--- a/Arquitectura de Sistemas Computacionales/Clases/Clase 7 - Redes y almacenamiento cloud/Presentacion.pptx
+++ b/Arquitectura de Sistemas Computacionales/Clases/Clase 7 - Redes y almacenamiento cloud/Presentacion.pptx
@@ -38,6 +38,10 @@
     <p:sldId id="286" r:id="rId37"/>
     <p:sldId id="287" r:id="rId38"/>
     <p:sldId id="288" r:id="rId39"/>
+    <p:sldId id="289" r:id="rId40"/>
+    <p:sldId id="290" r:id="rId41"/>
+    <p:sldId id="291" r:id="rId42"/>
+    <p:sldId id="292" r:id="rId43"/>
   </p:sldIdLst>
   <p:sldSz cx="12191695" cy="6858000" type="screen4x3"/>
   <p:notesSz cx="6858000" cy="9144000"/>
@@ -3596,7 +3600,7 @@
                 </a:solidFill>
                 <a:latin typeface="Calibri"/>
               </a:rPr>
-              <a:t>Subred publica y privada: lo definen las rutas, no el nombre (1/2)</a:t>
+              <a:t>IP, puerto y protocolo: las tres etiquetas de cada flecha (2/2)</a:t>
             </a:r>
           </a:p>
         </p:txBody>
@@ -3629,13 +3633,13 @@
               </a:spcAft>
             </a:pPr>
             <a:r>
-              <a:rPr sz="1900" b="0" i="0">
-                <a:solidFill>
-                  <a:srgbClr val="333333"/>
-                </a:solidFill>
-                <a:latin typeface="Calibri"/>
-              </a:rPr>
-              <a:t>–   Una subred es una subdivision de una red, y lo que la hace publica o privada no es su nombre sino sus rutas.</a:t>
+              <a:rPr sz="2000" b="0" i="0">
+                <a:solidFill>
+                  <a:srgbClr val="333333"/>
+                </a:solidFill>
+                <a:latin typeface="Calibri"/>
+              </a:rPr>
+              <a:t>–   Nada impide correr una base de datos en el 9999, pero cambiar la convencion confunde a quien opera.</a:t>
             </a:r>
           </a:p>
           <a:p>
@@ -3645,13 +3649,13 @@
               </a:spcAft>
             </a:pPr>
             <a:r>
-              <a:rPr sz="1900" b="0" i="0">
-                <a:solidFill>
-                  <a:srgbClr val="333333"/>
-                </a:solidFill>
-                <a:latin typeface="Calibri"/>
-              </a:rPr>
-              <a:t>–   Una subred publica tiene camino de entrada desde internet: alguien de afuera puede iniciar una conexion hacia lo que vive ahi.</a:t>
+              <a:rPr sz="2000" b="0" i="0">
+                <a:solidFill>
+                  <a:srgbClr val="333333"/>
+                </a:solidFill>
+                <a:latin typeface="Calibri"/>
+              </a:rPr>
+              <a:t>–   Esto no es decorativo: la pregunta 4 da 2 puntos por que cada componente lleve su puerto etiquetado</a:t>
             </a:r>
           </a:p>
           <a:p>
@@ -3661,61 +3665,13 @@
               </a:spcAft>
             </a:pPr>
             <a:r>
-              <a:rPr sz="1900" b="0" i="0">
-                <a:solidFill>
-                  <a:srgbClr val="333333"/>
-                </a:solidFill>
-                <a:latin typeface="Calibri"/>
-              </a:rPr>
-              <a:t>–   Una privada no lo tiene; solo se alcanza desde dentro, aunque normalmente si puede salir para descargar actualizaciones.</a:t>
-            </a:r>
-          </a:p>
-          <a:p>
-            <a:pPr>
-              <a:spcAft>
-                <a:spcPts val="800"/>
-              </a:spcAft>
-            </a:pPr>
-            <a:r>
-              <a:rPr sz="1900" b="0" i="0">
-                <a:solidFill>
-                  <a:srgbClr val="333333"/>
-                </a:solidFill>
-                <a:latin typeface="Calibri"/>
-              </a:rPr>
-              <a:t>–   Sobre esa distincion se construye la regla que se evalua hoy, y hay que decirla con los tres nombres exactos porque son tres zonas y no dos: en la zona PUBLICA van el punto de entrada, el balanceador o proxy inverso</a:t>
-            </a:r>
-          </a:p>
-          <a:p>
-            <a:pPr>
-              <a:spcAft>
-                <a:spcPts val="800"/>
-              </a:spcAft>
-            </a:pPr>
-            <a:r>
-              <a:rPr sz="1900" b="0" i="0">
-                <a:solidFill>
-                  <a:srgbClr val="333333"/>
-                </a:solidFill>
-                <a:latin typeface="Calibri"/>
-              </a:rPr>
-              <a:t>–   Y la aplicacion web estatica, que es publica sin que eso sea una fuga porque no lleva secretos dentro; el cliente que llega de internet se dibuja FUERA de las tres zonas, porque es el actor y no una pieza que el estudiante despliegue</a:t>
-            </a:r>
-          </a:p>
-          <a:p>
-            <a:pPr>
-              <a:spcAft>
-                <a:spcPts val="800"/>
-              </a:spcAft>
-            </a:pPr>
-            <a:r>
-              <a:rPr sz="1900" b="0" i="0">
-                <a:solidFill>
-                  <a:srgbClr val="333333"/>
-                </a:solidFill>
-                <a:latin typeface="Calibri"/>
-              </a:rPr>
-              <a:t>–   Y por eso es una de las dos filas sin par de la tabla de la pregunta 6; la API va en la zona PRIVADA, alcanzable solo desde el edge; y los datos van en una tercera zona, la de DATOS, que solo acepta conexiones desde la aplicacion y no tiene salida a internet.</a:t>
+              <a:rPr sz="2000" b="0" i="0">
+                <a:solidFill>
+                  <a:srgbClr val="333333"/>
+                </a:solidFill>
+                <a:latin typeface="Calibri"/>
+              </a:rPr>
+              <a:t>–   Y el diagrama de referencia usa exactamente tres, 443 en el edge, 8080 en la API y 5432 en la base de datos, que son los mismos que el estudiante ya escribio en el EXPOSE de su Dockerfile de la Clase 3.</a:t>
             </a:r>
           </a:p>
         </p:txBody>
@@ -3896,7 +3852,7 @@
                 </a:solidFill>
                 <a:latin typeface="Calibri"/>
               </a:rPr>
-              <a:t>Subred publica y privada: lo definen las rutas, no el nombre (2/2)</a:t>
+              <a:t>Subred publica y privada: lo definen las rutas, no el nombre (1/2)</a:t>
             </a:r>
           </a:p>
         </p:txBody>
@@ -3935,7 +3891,7 @@
                 </a:solidFill>
                 <a:latin typeface="Calibri"/>
               </a:rPr>
-              <a:t>–   Los 4 puntos de ubicacion de la pregunta 4 se pierden COMPLETOS si la base de datos queda en la zona publica: no es un descuento parcial, es el error que la pregunta esta disenada para detectar.</a:t>
+              <a:t>–   Una subred es una subdivision de una red, y lo que la hace publica o privada no es su nombre sino sus rutas.</a:t>
             </a:r>
           </a:p>
           <a:p>
@@ -3951,7 +3907,7 @@
                 </a:solidFill>
                 <a:latin typeface="Calibri"/>
               </a:rPr>
-              <a:t>–   Y las tres zonas rotuladas valen otros 4 puntos por si mismas, asi que un diagrama de dos zonas, aunque tenga la base de datos bien puesta, ya empezo perdiendo.</a:t>
+              <a:t>–   Una subred publica tiene camino de entrada desde internet: alguien de afuera puede iniciar una conexion hacia lo que vive ahi.</a:t>
             </a:r>
           </a:p>
           <a:p>
@@ -3967,7 +3923,39 @@
                 </a:solidFill>
                 <a:latin typeface="Calibri"/>
               </a:rPr>
-              <a:t>–   En CloudLite las mas faciles de senalar son las dos flechas que salen a lo que no es suyo, la pasarela de pagos y el correo transaccional: ninguno de los dos esta en las tres zonas, y la del molde que se proyecta es la de la pasarela.</a:t>
+              <a:t>–   Sobre esa distincion se construye la regla que se evalua hoy, y hay que decirla con los tres nombres exactos porque son tres zonas y no dos: en la zona PUBLICA van el punto de entrada, el balanceador o proxy inverso</a:t>
+            </a:r>
+          </a:p>
+          <a:p>
+            <a:pPr>
+              <a:spcAft>
+                <a:spcPts val="800"/>
+              </a:spcAft>
+            </a:pPr>
+            <a:r>
+              <a:rPr sz="2000" b="0" i="0">
+                <a:solidFill>
+                  <a:srgbClr val="333333"/>
+                </a:solidFill>
+                <a:latin typeface="Calibri"/>
+              </a:rPr>
+              <a:t>–   Y la aplicacion web estatica, que es publica sin que eso sea una fuga porque no lleva secretos dentro; el cliente que llega de internet se dibuja FUERA de las tres zonas, porque es el actor y no una pieza que el estudiante despliegue</a:t>
+            </a:r>
+          </a:p>
+          <a:p>
+            <a:pPr>
+              <a:spcAft>
+                <a:spcPts val="800"/>
+              </a:spcAft>
+            </a:pPr>
+            <a:r>
+              <a:rPr sz="2000" b="0" i="0">
+                <a:solidFill>
+                  <a:srgbClr val="333333"/>
+                </a:solidFill>
+                <a:latin typeface="Calibri"/>
+              </a:rPr>
+              <a:t>–   Y por eso es una de las dos filas sin par de la tabla de la pregunta 6; la API va en la zona PRIVADA, alcanzable solo desde el edge; y los datos van en una tercera zona, la de DATOS, que solo acepta conexiones desde la aplicacion y no tiene salida a internet.</a:t>
             </a:r>
           </a:p>
         </p:txBody>
@@ -4148,7 +4136,7 @@
                 </a:solidFill>
                 <a:latin typeface="Calibri"/>
               </a:rPr>
-              <a:t>DNS y balanceador de carga</a:t>
+              <a:t>Subred publica y privada: lo definen las rutas, no el nombre (2/2)</a:t>
             </a:r>
           </a:p>
         </p:txBody>
@@ -4187,7 +4175,7 @@
                 </a:solidFill>
                 <a:latin typeface="Calibri"/>
               </a:rPr>
-              <a:t>–   Dos piezas mas hay que explicar sin titubear.</a:t>
+              <a:t>–   Los 4 puntos de ubicacion de la pregunta 4 se pierden COMPLETOS si la base de datos queda en la zona publica: no es un descuento parcial, es el error que la pregunta esta disenada para detectar.</a:t>
             </a:r>
           </a:p>
           <a:p>
@@ -4203,7 +4191,7 @@
                 </a:solidFill>
                 <a:latin typeface="Calibri"/>
               </a:rPr>
-              <a:t>–   El DNS es el directorio distribuido que traduce un nombre legible, como cloudlite.example, en la direccion IP donde atiende el servicio; el registro tipo A apunta un nombre a una IP y el CNAME apunta un nombre a otro nombre.</a:t>
+              <a:t>–   Y las tres zonas rotuladas valen otros 4 puntos por si mismas, asi que un diagrama de dos zonas, aunque tenga la base de datos bien puesta, ya empezo perdiendo.</a:t>
             </a:r>
           </a:p>
           <a:p>
@@ -4219,71 +4207,7 @@
                 </a:solidFill>
                 <a:latin typeface="Calibri"/>
               </a:rPr>
-              <a:t>–   Cada registro tiene un TTL, los segundos que los demas guardan la respuesta en cache; tipicamente de 300 a 3600, asi que un cambio de direccion no es instantaneo para todos.</a:t>
-            </a:r>
-          </a:p>
-          <a:p>
-            <a:pPr>
-              <a:spcAft>
-                <a:spcPts val="800"/>
-              </a:spcAft>
-            </a:pPr>
-            <a:r>
-              <a:rPr sz="2000" b="0" i="0">
-                <a:solidFill>
-                  <a:srgbClr val="333333"/>
-                </a:solidFill>
-                <a:latin typeface="Calibri"/>
-              </a:rPr>
-              <a:t>–   El balanceador de carga recibe todas las peticiones y las reparte entre varias instancias iguales del mismo servicio, con algoritmos como round robin o menor numero de conexiones activas.</a:t>
-            </a:r>
-          </a:p>
-          <a:p>
-            <a:pPr>
-              <a:spcAft>
-                <a:spcPts val="800"/>
-              </a:spcAft>
-            </a:pPr>
-            <a:r>
-              <a:rPr sz="2000" b="0" i="0">
-                <a:solidFill>
-                  <a:srgbClr val="333333"/>
-                </a:solidFill>
-                <a:latin typeface="Calibri"/>
-              </a:rPr>
-              <a:t>–   Su funcion menos obvia y mas importante es el chequeo de salud: consulta un endpoint como /health, por convencion cada 10 a 30 segundos, y si falla dos o tres veces seguidas retira esa instancia de la rotacion hasta que responda.</a:t>
-            </a:r>
-          </a:p>
-          <a:p>
-            <a:pPr>
-              <a:spcAft>
-                <a:spcPts val="800"/>
-              </a:spcAft>
-            </a:pPr>
-            <a:r>
-              <a:rPr sz="2000" b="0" i="0">
-                <a:solidFill>
-                  <a:srgbClr val="333333"/>
-                </a:solidFill>
-                <a:latin typeface="Calibri"/>
-              </a:rPr>
-              <a:t>–   Es tambien donde termina el TLS, es decir donde se descifra HTTPS.</a:t>
-            </a:r>
-          </a:p>
-          <a:p>
-            <a:pPr>
-              <a:spcAft>
-                <a:spcPts val="800"/>
-              </a:spcAft>
-            </a:pPr>
-            <a:r>
-              <a:rPr sz="2000" b="0" i="0">
-                <a:solidFill>
-                  <a:srgbClr val="333333"/>
-                </a:solidFill>
-                <a:latin typeface="Calibri"/>
-              </a:rPr>
-              <a:t>–   En el diagrama de hoy el balanceador es el habitante de la zona publica, y el /health que consulta es el mismo contrato de salud que se verifico con curl en la Clase 3 y el primer monitoreo real de la Clase 8.</a:t>
+              <a:t>–   En CloudLite las mas faciles de senalar son las dos flechas que salen a lo que no es suyo, la pasarela de pagos y el correo transaccional: ninguno de los dos esta en las tres zonas, y la del molde que se proyecta es la de la pasarela.</a:t>
             </a:r>
           </a:p>
         </p:txBody>
@@ -4464,7 +4388,7 @@
                 </a:solidFill>
                 <a:latin typeface="Calibri"/>
               </a:rPr>
-              <a:t>Los tres nombres de almacenamiento que califica la pregunta 5 (1/2)</a:t>
+              <a:t>DNS y balanceador de carga (1/2)</a:t>
             </a:r>
           </a:p>
         </p:txBody>
@@ -4497,13 +4421,13 @@
               </a:spcAft>
             </a:pPr>
             <a:r>
-              <a:rPr sz="1900" b="0" i="0">
-                <a:solidFill>
-                  <a:srgbClr val="333333"/>
-                </a:solidFill>
-                <a:latin typeface="Calibri"/>
-              </a:rPr>
-              <a:t>–   El almacenamiento se decide por la caracteristica del dato, y aqui hay que ser estricto con el vocabulario porque la pregunta 5 admite TRES palabras y no mas: Relacional, Bloque y Objeto.</a:t>
+              <a:rPr sz="2000" b="0" i="0">
+                <a:solidFill>
+                  <a:srgbClr val="333333"/>
+                </a:solidFill>
+                <a:latin typeface="Calibri"/>
+              </a:rPr>
+              <a:t>–   Dos piezas mas hay que explicar sin titubear.</a:t>
             </a:r>
           </a:p>
           <a:p>
@@ -4513,13 +4437,13 @@
               </a:spcAft>
             </a:pPr>
             <a:r>
-              <a:rPr sz="1900" b="0" i="0">
-                <a:solidFill>
-                  <a:srgbClr val="333333"/>
-                </a:solidFill>
-                <a:latin typeface="Calibri"/>
-              </a:rPr>
-              <a:t>–   Vale la pena escribirlas en el tablero y sostenerlas toda la clase.</a:t>
+              <a:rPr sz="2000" b="0" i="0">
+                <a:solidFill>
+                  <a:srgbClr val="333333"/>
+                </a:solidFill>
+                <a:latin typeface="Calibri"/>
+              </a:rPr>
+              <a:t>–   El DNS es el directorio distribuido que traduce un nombre legible, como cloudlite.example, en la direccion IP donde atiende el servicio; el registro tipo A apunta un nombre a una IP y el CNAME apunta un nombre a otro nombre.</a:t>
             </a:r>
           </a:p>
           <a:p>
@@ -4529,13 +4453,13 @@
               </a:spcAft>
             </a:pPr>
             <a:r>
-              <a:rPr sz="1900" b="0" i="0">
-                <a:solidFill>
-                  <a:srgbClr val="333333"/>
-                </a:solidFill>
-                <a:latin typeface="Calibri"/>
-              </a:rPr>
-              <a:t>–   RELACIONAL es el motor de base de datos que guarda registros estructurados y permite cruzarlos con consultas y transacciones; la caracteristica del dato que lo exige es que ese dato se cruza con otro dato, y la prueba es que existe una consulta que los junta.</a:t>
+              <a:rPr sz="2000" b="0" i="0">
+                <a:solidFill>
+                  <a:srgbClr val="333333"/>
+                </a:solidFill>
+                <a:latin typeface="Calibri"/>
+              </a:rPr>
+              <a:t>–   Cada registro tiene un TTL, los segundos que los demas guardan la respuesta en cache; tipicamente de 300 a 3600, asi que un cambio de direccion no es instantaneo para todos.</a:t>
             </a:r>
           </a:p>
           <a:p>
@@ -4545,61 +4469,13 @@
               </a:spcAft>
             </a:pPr>
             <a:r>
-              <a:rPr sz="1900" b="0" i="0">
-                <a:solidFill>
-                  <a:srgbClr val="333333"/>
-                </a:solidFill>
-                <a:latin typeface="Calibri"/>
-              </a:rPr>
-              <a:t>–   BLOQUE es un disco crudo que el sistema operativo formatea y monta; se conecta a una sola instancia a la vez, es lo que hay debajo del volumen de un contenedor</a:t>
-            </a:r>
-          </a:p>
-          <a:p>
-            <a:pPr>
-              <a:spcAft>
-                <a:spcPts val="800"/>
-              </a:spcAft>
-            </a:pPr>
-            <a:r>
-              <a:rPr sz="1900" b="0" i="0">
-                <a:solidFill>
-                  <a:srgbClr val="333333"/>
-                </a:solidFill>
-                <a:latin typeface="Calibri"/>
-              </a:rPr>
-              <a:t>–   Y se mide en gigabytes y en IOPS, operaciones de lectura y escritura por segundo; la caracteristica que lo exige es que el dato lo monta un solo proceso y se escribe por partes, sin recuperarse entero.</a:t>
-            </a:r>
-          </a:p>
-          <a:p>
-            <a:pPr>
-              <a:spcAft>
-                <a:spcPts val="800"/>
-              </a:spcAft>
-            </a:pPr>
-            <a:r>
-              <a:rPr sz="1900" b="0" i="0">
-                <a:solidFill>
-                  <a:srgbClr val="333333"/>
-                </a:solidFill>
-                <a:latin typeface="Calibri"/>
-              </a:rPr>
-              <a:t>–   OBJETO no tiene carpetas reales: es un espacio plano de contenedores llamados buckets donde cada objeto se guarda bajo una clave, se lee y escribe por HTTP y se reemplaza completo en vez de editarse por partes</a:t>
-            </a:r>
-          </a:p>
-          <a:p>
-            <a:pPr>
-              <a:spcAft>
-                <a:spcPts val="800"/>
-              </a:spcAft>
-            </a:pPr>
-            <a:r>
-              <a:rPr sz="1900" b="0" i="0">
-                <a:solidFill>
-                  <a:srgbClr val="333333"/>
-                </a:solidFill>
-                <a:latin typeface="Calibri"/>
-              </a:rPr>
-              <a:t>–   Es practicamente ilimitado, barato y accesible por URL; la caracteristica que lo exige es que el dato se recupera entero, sin partes.</a:t>
+              <a:rPr sz="2000" b="0" i="0">
+                <a:solidFill>
+                  <a:srgbClr val="333333"/>
+                </a:solidFill>
+                <a:latin typeface="Calibri"/>
+              </a:rPr>
+              <a:t>–   Su funcion menos obvia y mas importante es el chequeo de salud: consulta un endpoint como /health, por convencion cada 10 a 30 segundos, y si falla dos o tres veces seguidas retira esa instancia de la rotacion hasta que responda.</a:t>
             </a:r>
           </a:p>
         </p:txBody>
@@ -4780,7 +4656,7 @@
                 </a:solidFill>
                 <a:latin typeface="Calibri"/>
               </a:rPr>
-              <a:t>Los tres nombres de almacenamiento que califica la pregunta 5 (2/2)</a:t>
+              <a:t>DNS y balanceador de carga (2/2)</a:t>
             </a:r>
           </a:p>
         </p:txBody>
@@ -4819,7 +4695,7 @@
                 </a:solidFill>
                 <a:latin typeface="Calibri"/>
               </a:rPr>
-              <a:t>–   Hay una cuarta categoria en la literatura, el almacenamiento de ARCHIVOS, un sistema de archivos compartido que varias instancias montan por red</a:t>
+              <a:t>–   Es tambien donde termina el TLS, es decir donde se descifra HTTPS.</a:t>
             </a:r>
           </a:p>
           <a:p>
@@ -4835,87 +4711,7 @@
                 </a:solidFill>
                 <a:latin typeface="Calibri"/>
               </a:rPr>
-              <a:t>–   Conviene nombrarla como contraste para que nadie se sienta enganado, pero no es una de las tres palabras que la pregunta admite</a:t>
-            </a:r>
-          </a:p>
-          <a:p>
-            <a:pPr>
-              <a:spcAft>
-                <a:spcPts val="800"/>
-              </a:spcAft>
-            </a:pPr>
-            <a:r>
-              <a:rPr sz="2000" b="0" i="0">
-                <a:solidFill>
-                  <a:srgbClr val="333333"/>
-                </a:solidFill>
-                <a:latin typeface="Calibri"/>
-              </a:rPr>
-              <a:t>–   Y quien cree necesitarla casi siempre esta describiendo un caso que en la nube se resuelve con objeto.</a:t>
-            </a:r>
-          </a:p>
-          <a:p>
-            <a:pPr>
-              <a:spcAft>
-                <a:spcPts val="800"/>
-              </a:spcAft>
-            </a:pPr>
-            <a:r>
-              <a:rPr sz="2000" b="0" i="0">
-                <a:solidFill>
-                  <a:srgbClr val="333333"/>
-                </a:solidFill>
-                <a:latin typeface="Calibri"/>
-              </a:rPr>
-              <a:t>–   El numero que ordena la decision es el precio relativo: un gigabyte al mes en objetos cuesta del orden de dos a tres centavos de dolar, en disco de bloque cerca de cuatro veces mas, y en base de datos gestionada aun mas porque se paga computo.</a:t>
-            </a:r>
-          </a:p>
-          <a:p>
-            <a:pPr>
-              <a:spcAft>
-                <a:spcPts val="800"/>
-              </a:spcAft>
-            </a:pPr>
-            <a:r>
-              <a:rPr sz="2000" b="0" i="0">
-                <a:solidFill>
-                  <a:srgbClr val="333333"/>
-                </a:solidFill>
-                <a:latin typeface="Calibri"/>
-              </a:rPr>
-              <a:t>–   Son referencias de mercado, no reglas fijas, y aqui no se aprovisiona nada de pago: el valor esta en justificar.</a:t>
-            </a:r>
-          </a:p>
-          <a:p>
-            <a:pPr>
-              <a:spcAft>
-                <a:spcPts val="800"/>
-              </a:spcAft>
-            </a:pPr>
-            <a:r>
-              <a:rPr sz="2000" b="0" i="0">
-                <a:solidFill>
-                  <a:srgbClr val="333333"/>
-                </a:solidFill>
-                <a:latin typeface="Calibri"/>
-              </a:rPr>
-              <a:t>–   Y la justificacion se califica aparte, 2.5 de los 5.5 puntos: cada fila tiene que nombrar la caracteristica del dato.</a:t>
-            </a:r>
-          </a:p>
-          <a:p>
-            <a:pPr>
-              <a:spcAft>
-                <a:spcPts val="800"/>
-              </a:spcAft>
-            </a:pPr>
-            <a:r>
-              <a:rPr sz="2000" b="0" i="0">
-                <a:solidFill>
-                  <a:srgbClr val="333333"/>
-                </a:solidFill>
-                <a:latin typeface="Calibri"/>
-              </a:rPr>
-              <a:t>–   «Es mas rapido», «es lo que usa todo el mundo» o «es lo normal» no son caracteristicas del dato y no suman ni un punto, aunque el tipo elegido sea el correcto.</a:t>
+              <a:t>–   En el diagrama de hoy el balanceador es el habitante de la zona publica, y el /health que consulta es el mismo contrato de salud que se verifico con curl en la Clase 3 y el primer monitoreo real de la Clase 8.</a:t>
             </a:r>
           </a:p>
         </p:txBody>
@@ -5096,7 +4892,7 @@
                 </a:solidFill>
                 <a:latin typeface="Calibri"/>
               </a:rPr>
-              <a:t>El caso de la foto de perfil, y cuando la respuesta correcta es «no necesito objeto» (1/2)</a:t>
+              <a:t>Los tres nombres de almacenamiento que califica la pregunta 5 (1/3)</a:t>
             </a:r>
           </a:p>
         </p:txBody>
@@ -5135,7 +4931,7 @@
                 </a:solidFill>
                 <a:latin typeface="Calibri"/>
               </a:rPr>
-              <a:t>–   El ejemplo que hace visible la decision, y el error de diseno que conviene provocar: CloudLite permite subir una foto de perfil o adjuntar un PDF.</a:t>
+              <a:t>–   El almacenamiento se decide por la caracteristica del dato, y aqui hay que ser estricto con el vocabulario porque la pregunta 5 admite TRES palabras y no mas: Relacional, Bloque y Objeto.</a:t>
             </a:r>
           </a:p>
           <a:p>
@@ -5151,7 +4947,7 @@
                 </a:solidFill>
                 <a:latin typeface="Calibri"/>
               </a:rPr>
-              <a:t>–   La solucion ingenua es guardar el archivo en una columna binaria de la base de datos.</a:t>
+              <a:t>–   RELACIONAL es el motor de base de datos que guarda registros estructurados y permite cruzarlos con consultas y transacciones; la caracteristica del dato que lo exige es que ese dato se cruza con otro dato, y la prueba es que existe una consulta que los junta.</a:t>
             </a:r>
           </a:p>
           <a:p>
@@ -5167,7 +4963,7 @@
                 </a:solidFill>
                 <a:latin typeface="Calibri"/>
               </a:rPr>
-              <a:t>–   Hay que dejar que el estudiante la proponga y luego cuantificarla: dos megabytes por usuario y cinco mil usuarios son diez gigabytes de binarios dentro de una base cuyos datos utiles podrian ser doscientos megabytes</a:t>
+              <a:t>–   BLOQUE es un disco crudo que el sistema operativo formatea y monta; se conecta a una sola instancia a la vez, es lo que hay debajo del volumen de un contenedor</a:t>
             </a:r>
           </a:p>
           <a:p>
@@ -5183,39 +4979,7 @@
                 </a:solidFill>
                 <a:latin typeface="Calibri"/>
               </a:rPr>
-              <a:t>–   Cada respaldo arrastra esos diez gigabytes y la cache del motor se llena de bytes que ninguna consulta filtra.</a:t>
-            </a:r>
-          </a:p>
-          <a:p>
-            <a:pPr>
-              <a:spcAft>
-                <a:spcPts val="800"/>
-              </a:spcAft>
-            </a:pPr>
-            <a:r>
-              <a:rPr sz="2000" b="0" i="0">
-                <a:solidFill>
-                  <a:srgbClr val="333333"/>
-                </a:solidFill>
-                <a:latin typeface="Calibri"/>
-              </a:rPr>
-              <a:t>–   El diseno correcto separa: el archivo va a almacenamiento de objetos y la base guarda una fila con la clave del objeto, el dueno, el tamano, el tipo de contenido y la fecha.</a:t>
-            </a:r>
-          </a:p>
-          <a:p>
-            <a:pPr>
-              <a:spcAft>
-                <a:spcPts val="800"/>
-              </a:spcAft>
-            </a:pPr>
-            <a:r>
-              <a:rPr sz="2000" b="0" i="0">
-                <a:solidFill>
-                  <a:srgbClr val="333333"/>
-                </a:solidFill>
-                <a:latin typeface="Calibri"/>
-              </a:rPr>
-              <a:t>–   Hay una razon adicional: un contenedor es efimero, lo que se escriba en su sistema de archivos desaparece cuando se reemplaza, y con dos instancias detras del balanceador el archivo subido a una no existe en la otra.</a:t>
+              <a:t>–   Y se mide en gigabytes y en IOPS, operaciones de lectura y escritura por segundo; la caracteristica que lo exige es que el dato lo monta un solo proceso y se escribe por partes, sin recuperarse entero.</a:t>
             </a:r>
           </a:p>
         </p:txBody>
@@ -5396,7 +5160,7 @@
                 </a:solidFill>
                 <a:latin typeface="Calibri"/>
               </a:rPr>
-              <a:t>El caso de la foto de perfil, y cuando la respuesta correcta es «no necesito objeto» (2/2)</a:t>
+              <a:t>Los tres nombres de almacenamiento que califica la pregunta 5 (2/3)</a:t>
             </a:r>
           </a:p>
         </p:txBody>
@@ -5435,7 +5199,7 @@
                 </a:solidFill>
                 <a:latin typeface="Calibri"/>
               </a:rPr>
-              <a:t>–   Mantener los contenedores sin estado es la condicion del escalado horizontal de la Clase 13.</a:t>
+              <a:t>–   OBJETO no tiene carpetas reales: es un espacio plano de contenedores llamados buckets donde cada objeto se guarda bajo una clave, se lee y escribe por HTTP y se reemplaza completo en vez de editarse por partes</a:t>
             </a:r>
           </a:p>
           <a:p>
@@ -5451,7 +5215,7 @@
                 </a:solidFill>
                 <a:latin typeface="Calibri"/>
               </a:rPr>
-              <a:t>–   Y ahora la otra mitad, que es la que sorprende al docente: si el dominio del estudiante no maneja archivos, imagenes ni documentos adjuntos, la respuesta correcta y completa es declarar que NO necesita almacenamiento de objetos y explicar por que.</a:t>
+              <a:t>–   Es practicamente ilimitado, barato y accesible por URL; la caracteristica que lo exige es que el dato se recupera entero, sin partes.</a:t>
             </a:r>
           </a:p>
           <a:p>
@@ -5467,7 +5231,7 @@
                 </a:solidFill>
                 <a:latin typeface="Calibri"/>
               </a:rPr>
-              <a:t>–   La rubrica lo dice al reves de como el grupo lo espera: suma completo quien lo declare y justifique, y se descuenta a quien agregue un almacen de objetos sin un dato que lo pida.</a:t>
+              <a:t>–   Hay una cuarta categoria en la literatura, el almacenamiento de ARCHIVOS, un sistema de archivos compartido que varias instancias montan por red</a:t>
             </a:r>
           </a:p>
           <a:p>
@@ -5483,7 +5247,39 @@
                 </a:solidFill>
                 <a:latin typeface="Calibri"/>
               </a:rPr>
-              <a:t>–   Hay que anunciarlo antes del taller, porque si no medio salon inventa un bucket «porque suena a cloud» y pierde puntos por agregar.</a:t>
+              <a:t>–   Conviene nombrarla como contraste para que nadie se sienta enganado, pero no es una de las tres palabras que la pregunta admite</a:t>
+            </a:r>
+          </a:p>
+          <a:p>
+            <a:pPr>
+              <a:spcAft>
+                <a:spcPts val="800"/>
+              </a:spcAft>
+            </a:pPr>
+            <a:r>
+              <a:rPr sz="2000" b="0" i="0">
+                <a:solidFill>
+                  <a:srgbClr val="333333"/>
+                </a:solidFill>
+                <a:latin typeface="Calibri"/>
+              </a:rPr>
+              <a:t>–   Y quien cree necesitarla casi siempre esta describiendo un caso que en la nube se resuelve con objeto.</a:t>
+            </a:r>
+          </a:p>
+          <a:p>
+            <a:pPr>
+              <a:spcAft>
+                <a:spcPts val="800"/>
+              </a:spcAft>
+            </a:pPr>
+            <a:r>
+              <a:rPr sz="2000" b="0" i="0">
+                <a:solidFill>
+                  <a:srgbClr val="333333"/>
+                </a:solidFill>
+                <a:latin typeface="Calibri"/>
+              </a:rPr>
+              <a:t>–   El numero que ordena la decision es el precio relativo: un gigabyte al mes en objetos cuesta del orden de dos a tres centavos de dolar, en disco de bloque cerca de cuatro veces mas, y en base de datos gestionada aun mas porque se paga computo.</a:t>
             </a:r>
           </a:p>
         </p:txBody>
@@ -5664,7 +5460,7 @@
                 </a:solidFill>
                 <a:latin typeface="Calibri"/>
               </a:rPr>
-              <a:t>Trazabilidad: la tabla de correspondencia de la pregunta 6 (1/2)</a:t>
+              <a:t>Los tres nombres de almacenamiento que califica la pregunta 5 (3/3)</a:t>
             </a:r>
           </a:p>
         </p:txBody>
@@ -5703,7 +5499,7 @@
                 </a:solidFill>
                 <a:latin typeface="Calibri"/>
               </a:rPr>
-              <a:t>–   Queda la trazabilidad, donde mas puntos se pierden y donde vive una pregunta entera.</a:t>
+              <a:t>–   Son referencias de mercado, no reglas fijas, y aqui no se aprovisiona nada de pago: el valor esta en justificar.</a:t>
             </a:r>
           </a:p>
           <a:p>
@@ -5719,7 +5515,7 @@
                 </a:solidFill>
                 <a:latin typeface="Calibri"/>
               </a:rPr>
-              <a:t>–   Los nombres de las cajas del despliegue deben ser los mismos que los contenedores del C4 Containers de la Clase 4: si alli el servicio se llamaba api-citas, hoy no puede aparecer como backend, ni puede aparecer una caja nueva que nadie declaro.</a:t>
+              <a:t>–   Y la justificacion se califica aparte, 2.5 de los 5.5 puntos: cada fila tiene que nombrar la caracteristica del dato.</a:t>
             </a:r>
           </a:p>
           <a:p>
@@ -5735,55 +5531,7 @@
                 </a:solidFill>
                 <a:latin typeface="Calibri"/>
               </a:rPr>
-              <a:t>–   La pregunta 6 pide demostrarlo con una tabla de tres columnas cuyos nombres hay que dictar tal cual: «Componente en el C4 Containers», «Componente en el Despliegue» y «Zona».</a:t>
-            </a:r>
-          </a:p>
-          <a:p>
-            <a:pPr>
-              <a:spcAft>
-                <a:spcPts val="800"/>
-              </a:spcAft>
-            </a:pPr>
-            <a:r>
-              <a:rPr sz="2000" b="0" i="0">
-                <a:solidFill>
-                  <a:srgbClr val="333333"/>
-                </a:solidFill>
-                <a:latin typeface="Calibri"/>
-              </a:rPr>
-              <a:t>–   Los 5.5 puntos se reparten asi, y conviene decirlo en voz alta: 2 puntos la explicacion de por que los nombres deben coincidir</a:t>
-            </a:r>
-          </a:p>
-          <a:p>
-            <a:pPr>
-              <a:spcAft>
-                <a:spcPts val="800"/>
-              </a:spcAft>
-            </a:pPr>
-            <a:r>
-              <a:rPr sz="2000" b="0" i="0">
-                <a:solidFill>
-                  <a:srgbClr val="333333"/>
-                </a:solidFill>
-                <a:latin typeface="Calibri"/>
-              </a:rPr>
-              <a:t>–   Y la respuesta esperada es que los dos diagramas son el MISMO sistema visto desde angulos distintos, uno dice que piezas hay y el otro donde se ejecutan</a:t>
-            </a:r>
-          </a:p>
-          <a:p>
-            <a:pPr>
-              <a:spcAft>
-                <a:spcPts val="800"/>
-              </a:spcAft>
-            </a:pPr>
-            <a:r>
-              <a:rPr sz="2000" b="0" i="0">
-                <a:solidFill>
-                  <a:srgbClr val="333333"/>
-                </a:solidFill>
-                <a:latin typeface="Calibri"/>
-              </a:rPr>
-              <a:t>–   2.5 puntos la tabla completa, con una fila por componente y su zona; y 1 punto listar los renombres que se aplicaron, o declarar explicitamente que no hubo ninguno, que tambien vale.</a:t>
+              <a:t>–   «Es mas rapido», «es lo que usa todo el mundo» o «es lo normal» no son caracteristicas del dato y no suman ni un punto, aunque el tipo elegido sea el correcto.</a:t>
             </a:r>
           </a:p>
         </p:txBody>
@@ -5964,7 +5712,7 @@
                 </a:solidFill>
                 <a:latin typeface="Calibri"/>
               </a:rPr>
-              <a:t>Trazabilidad: la tabla de correspondencia de la pregunta 6 (2/2)</a:t>
+              <a:t>El caso de la foto de perfil, y cuando la respuesta correcta es «no necesito objeto» (1/2)</a:t>
             </a:r>
           </a:p>
         </p:txBody>
@@ -6003,7 +5751,7 @@
                 </a:solidFill>
                 <a:latin typeface="Calibri"/>
               </a:rPr>
-              <a:t>–   La trampa esta en la palabra completa: se descuenta si la tabla deja fuera un componente que si aparece en alguno de los dos diagramas, asi que hay que instruir el gesto de llenarla con los dos diagramas abiertos al lado y contando cajas.</a:t>
+              <a:t>–   El ejemplo que hace visible la decision, y el error de diseno que conviene provocar: CloudLite permite subir una foto de perfil o adjuntar un PDF.</a:t>
             </a:r>
           </a:p>
           <a:p>
@@ -6019,7 +5767,7 @@
                 </a:solidFill>
                 <a:latin typeface="Calibri"/>
               </a:rPr>
-              <a:t>–   La cadena aguas abajo es directa: la Clase 6 identifico amenazas y fronteras de confianza en texto y hoy esas fronteras se vuelven zonas dibujadas; la Clase 8 tomara cada flecha para definir que se mide en ella</a:t>
+              <a:t>–   La solucion ingenua es guardar el archivo en una columna binaria de la base de datos.</a:t>
             </a:r>
           </a:p>
           <a:p>
@@ -6035,7 +5783,7 @@
                 </a:solidFill>
                 <a:latin typeface="Calibri"/>
               </a:rPr>
-              <a:t>–   Porque no se puede monitorear un camino que no esta dibujado; la Clase 10 costeara estas mismas cajas, asi que la eleccion de almacenamiento es tambien decision de costo; y la Clase 13 discutira cual caja se replica y cual no.</a:t>
+              <a:t>–   Hay que dejar que el estudiante la proponga y luego cuantificarla: dos megabytes por usuario y cinco mil usuarios son diez gigabytes de binarios dentro de una base cuyos datos utiles podrian ser doscientos megabytes</a:t>
             </a:r>
           </a:p>
           <a:p>
@@ -6051,7 +5799,23 @@
                 </a:solidFill>
                 <a:latin typeface="Calibri"/>
               </a:rPr>
-              <a:t>–   Todo el bloque se evalua en el Parcial 2 de la Clase 9.</a:t>
+              <a:t>–   Cada respaldo arrastra esos diez gigabytes y la cache del motor se llena de bytes que ninguna consulta filtra.</a:t>
+            </a:r>
+          </a:p>
+          <a:p>
+            <a:pPr>
+              <a:spcAft>
+                <a:spcPts val="800"/>
+              </a:spcAft>
+            </a:pPr>
+            <a:r>
+              <a:rPr sz="2000" b="0" i="0">
+                <a:solidFill>
+                  <a:srgbClr val="333333"/>
+                </a:solidFill>
+                <a:latin typeface="Calibri"/>
+              </a:rPr>
+              <a:t>–   El diseno correcto separa: el archivo va a almacenamiento de objetos y la base guarda una fila con la clave del objeto, el dueno, el tamano, el tipo de contenido y la fecha.</a:t>
             </a:r>
           </a:p>
         </p:txBody>
@@ -6232,7 +5996,7 @@
                 </a:solidFill>
                 <a:latin typeface="Calibri"/>
               </a:rPr>
-              <a:t>Recorrer una peticion de CloudLite de punta a punta (1/2)</a:t>
+              <a:t>El caso de la foto de perfil, y cuando la respuesta correcta es «no necesito objeto» (2/2)</a:t>
             </a:r>
           </a:p>
         </p:txBody>
@@ -6271,7 +6035,7 @@
                 </a:solidFill>
                 <a:latin typeface="Calibri"/>
               </a:rPr>
-              <a:t>–   La mejor forma de dictar la clase es seguir una peticion de CloudLite de punta a punta sobre el diagrama proyectado.</a:t>
+              <a:t>–   Hay una razon adicional: un contenedor es efimero, lo que se escriba en su sistema de archivos desaparece cuando se reemplaza, y con dos instancias detras del balanceador el archivo subido a una no existe en la otra.</a:t>
             </a:r>
           </a:p>
           <a:p>
@@ -6287,7 +6051,7 @@
                 </a:solidFill>
                 <a:latin typeface="Calibri"/>
               </a:rPr>
-              <a:t>–   Un usuario final abre cloudlite.example en su telefono; el DNS resuelve el nombre a la IP publica del balanceador; el navegador abre una conexion HTTPS al puerto 443 de ese balanceador</a:t>
+              <a:t>–   Mantener los contenedores sin estado es la condicion del escalado horizontal de la Clase 13.</a:t>
             </a:r>
           </a:p>
           <a:p>
@@ -6303,7 +6067,7 @@
                 </a:solidFill>
                 <a:latin typeface="Calibri"/>
               </a:rPr>
-              <a:t>–   Que vive en la zona publica; el balanceador elige una de las dos instancias del contenedor de la API, en la zona privada</a:t>
+              <a:t>–   La rubrica lo dice al reves de como el grupo lo espera: suma completo quien lo declare y justifique, y se descuenta a quien agregue un almacen de objetos sin un dato que lo pida.</a:t>
             </a:r>
           </a:p>
           <a:p>
@@ -6319,23 +6083,7 @@
                 </a:solidFill>
                 <a:latin typeface="Calibri"/>
               </a:rPr>
-              <a:t>–   Y le reenvia la peticion por HTTP al puerto 8080; la API consulta el motor de base de datos en la zona de datos por el puerto 5432 y devuelve JSON por el mismo camino.</a:t>
-            </a:r>
-          </a:p>
-          <a:p>
-            <a:pPr>
-              <a:spcAft>
-                <a:spcPts val="800"/>
-              </a:spcAft>
-            </a:pPr>
-            <a:r>
-              <a:rPr sz="2000" b="0" i="0">
-                <a:solidFill>
-                  <a:srgbClr val="333333"/>
-                </a:solidFill>
-                <a:latin typeface="Calibri"/>
-              </a:rPr>
-              <a:t>–   Ese recorrido, con cada flecha etiquetada con protocolo y puerto y cada caja dentro de su zona, es la estructura que la pregunta 4 califica; lo que se pega en la plataforma es su version en Mermaid, que es la seccion siguiente.</a:t>
+              <a:t>–   Hay que anunciarlo antes del taller, porque si no medio salon inventa un bucket «porque suena a cloud» y pierde puntos por agregar.</a:t>
             </a:r>
           </a:p>
         </p:txBody>
@@ -6863,7 +6611,7 @@
                 </a:solidFill>
                 <a:latin typeface="Calibri"/>
               </a:rPr>
-              <a:t>Recorrer una peticion de CloudLite de punta a punta (2/2)</a:t>
+              <a:t>Trazabilidad: la tabla de correspondencia de la pregunta 6 (1/3)</a:t>
             </a:r>
           </a:p>
         </p:txBody>
@@ -6902,7 +6650,7 @@
                 </a:solidFill>
                 <a:latin typeface="Calibri"/>
               </a:rPr>
-              <a:t>–   Sirve tambien para citar numeros: una consulta simple bien indexada responde entre 1 y 20 milisegundos, y el objetivo que se formalizara en la Clase 12 suele fijarse por convencion en menos de 300 milisegundos para el 95 por ciento de las peticiones.</a:t>
+              <a:t>–   Los nombres de las cajas del despliegue deben ser los mismos que los contenedores del C4 Containers de la Clase 4: si alli el servicio se llamaba api-citas, hoy no puede aparecer como backend, ni puede aparecer una caja nueva que nadie declaro.</a:t>
             </a:r>
           </a:p>
           <a:p>
@@ -6918,7 +6666,23 @@
                 </a:solidFill>
                 <a:latin typeface="Calibri"/>
               </a:rPr>
-              <a:t>–   Con eso el grupo ve que si una pantalla dispara veinte consultas encadenadas el problema es de diseno y no de servidor.</a:t>
+              <a:t>–   La pregunta 6 pide demostrarlo con una tabla de tres columnas cuyos nombres hay que dictar tal cual: «Componente en el C4 Containers», «Componente en el Despliegue» y «Zona».</a:t>
+            </a:r>
+          </a:p>
+          <a:p>
+            <a:pPr>
+              <a:spcAft>
+                <a:spcPts val="800"/>
+              </a:spcAft>
+            </a:pPr>
+            <a:r>
+              <a:rPr sz="2000" b="0" i="0">
+                <a:solidFill>
+                  <a:srgbClr val="333333"/>
+                </a:solidFill>
+                <a:latin typeface="Calibri"/>
+              </a:rPr>
+              <a:t>–   Los 5.5 puntos se reparten asi, y conviene decirlo en voz alta: 2 puntos la explicacion de por que los nombres deben coincidir</a:t>
             </a:r>
           </a:p>
         </p:txBody>
@@ -7099,7 +6863,7 @@
                 </a:solidFill>
                 <a:latin typeface="Calibri"/>
               </a:rPr>
-              <a:t>El molde de Mermaid, linea por linea (1/3)</a:t>
+              <a:t>Trazabilidad: la tabla de correspondencia de la pregunta 6 (2/3)</a:t>
             </a:r>
           </a:p>
         </p:txBody>
@@ -7138,7 +6902,7 @@
                 </a:solidFill>
                 <a:latin typeface="Calibri"/>
               </a:rPr>
-              <a:t>–   La diapositiva del molde existe porque el estudiante puede tener el modelo correcto en la cabeza y perder puntos por sintaxis, y porque 2 de los 14 son que el diagrama renderice.</a:t>
+              <a:t>–   Y la respuesta esperada es que los dos diagramas son el MISMO sistema visto desde angulos distintos, uno dice que piezas hay y el otro donde se ejecutan</a:t>
             </a:r>
           </a:p>
           <a:p>
@@ -7154,7 +6918,7 @@
                 </a:solidFill>
                 <a:latin typeface="Calibri"/>
               </a:rPr>
-              <a:t>–   Primera: la palabra inicial.</a:t>
+              <a:t>–   2.5 puntos la tabla completa, con una fila por componente y su zona; y 1 punto listar los renombres que se aplicaron, o declarar explicitamente que no hubo ninguno, que tambien vale.</a:t>
             </a:r>
           </a:p>
           <a:p>
@@ -7170,71 +6934,7 @@
                 </a:solidFill>
                 <a:latin typeface="Calibri"/>
               </a:rPr>
-              <a:t>–   Se escribe flowchart LR, donde LR significa de izquierda a derecha, y es lo que hace que el recorrido cliente, edge, aplicacion, datos se lea como un flujo y no como una torre.</a:t>
-            </a:r>
-          </a:p>
-          <a:p>
-            <a:pPr>
-              <a:spcAft>
-                <a:spcPts val="800"/>
-              </a:spcAft>
-            </a:pPr>
-            <a:r>
-              <a:rPr sz="2000" b="0" i="0">
-                <a:solidFill>
-                  <a:srgbClr val="333333"/>
-                </a:solidFill>
-                <a:latin typeface="Calibri"/>
-              </a:rPr>
-              <a:t>–   Segunda: cada zona es un subgraph con su rotulo entre comillas y su propio end.</a:t>
-            </a:r>
-          </a:p>
-          <a:p>
-            <a:pPr>
-              <a:spcAft>
-                <a:spcPts val="800"/>
-              </a:spcAft>
-            </a:pPr>
-            <a:r>
-              <a:rPr sz="2000" b="0" i="0">
-                <a:solidFill>
-                  <a:srgbClr val="333333"/>
-                </a:solidFill>
-                <a:latin typeface="Calibri"/>
-              </a:rPr>
-              <a:t>–   Los subgraph son las tres zonas, y son las que valen 4 puntos; olvidar un end es la causa numero uno de que la plataforma no dibuje nada, porque el bloque queda abierto.</a:t>
-            </a:r>
-          </a:p>
-          <a:p>
-            <a:pPr>
-              <a:spcAft>
-                <a:spcPts val="800"/>
-              </a:spcAft>
-            </a:pPr>
-            <a:r>
-              <a:rPr sz="2000" b="0" i="0">
-                <a:solidFill>
-                  <a:srgbClr val="333333"/>
-                </a:solidFill>
-                <a:latin typeface="Calibri"/>
-              </a:rPr>
-              <a:t>–   Tercera: la forma de la caja dice que es la pieza.</a:t>
-            </a:r>
-          </a:p>
-          <a:p>
-            <a:pPr>
-              <a:spcAft>
-                <a:spcPts val="800"/>
-              </a:spcAft>
-            </a:pPr>
-            <a:r>
-              <a:rPr sz="2000" b="0" i="0">
-                <a:solidFill>
-                  <a:srgbClr val="333333"/>
-                </a:solidFill>
-                <a:latin typeface="Calibri"/>
-              </a:rPr>
-              <a:t>–   Los corchetes rectos son un proceso o servicio, y la combinacion de corchete y parentesis, es decir abrir corchete parentesis, es la base de datos, que se lee como cilindro.</a:t>
+              <a:t>–   La trampa esta en la palabra completa: se descuenta si la tabla deja fuera un componente que si aparece en alguno de los dos diagramas, asi que hay que instruir el gesto de llenarla con los dos diagramas abiertos al lado y contando cajas.</a:t>
             </a:r>
           </a:p>
         </p:txBody>
@@ -7415,7 +7115,7 @@
                 </a:solidFill>
                 <a:latin typeface="Calibri"/>
               </a:rPr>
-              <a:t>El molde de Mermaid, linea por linea (2/3)</a:t>
+              <a:t>Trazabilidad: la tabla de correspondencia de la pregunta 6 (3/3)</a:t>
             </a:r>
           </a:p>
         </p:txBody>
@@ -7454,7 +7154,7 @@
                 </a:solidFill>
                 <a:latin typeface="Calibri"/>
               </a:rPr>
-              <a:t>–   Vale la pena senalar la caja de la base de datos y decir «esta forma, dentro de este subgraph, son 4 de los 14 puntos».</a:t>
+              <a:t>–   La cadena aguas abajo es directa: la Clase 6 identifico amenazas y fronteras de confianza en texto y hoy esas fronteras se vuelven zonas dibujadas; la Clase 8 tomara cada flecha para definir que se mide en ella</a:t>
             </a:r>
           </a:p>
           <a:p>
@@ -7470,7 +7170,7 @@
                 </a:solidFill>
                 <a:latin typeface="Calibri"/>
               </a:rPr>
-              <a:t>–   Cuarta: el puerto va DENTRO del rotulo de la caja, separado con la etiqueta de salto de linea de HTML, y la etiqueta de la flecha va entre barras verticales y comillas, con el protocolo y el puerto.</a:t>
+              <a:t>–   Porque no se puede monitorear un camino que no esta dibujado; la Clase 10 costeara estas mismas cajas, asi que la eleccion de almacenamiento es tambien decision de costo; y la Clase 13 discutira cual caja se replica y cual no.</a:t>
             </a:r>
           </a:p>
           <a:p>
@@ -7486,55 +7186,7 @@
                 </a:solidFill>
                 <a:latin typeface="Calibri"/>
               </a:rPr>
-              <a:t>–   Es la forma mas segura de cumplir los 2 puntos de puertos sin ensuciar el dibujo.</a:t>
-            </a:r>
-          </a:p>
-          <a:p>
-            <a:pPr>
-              <a:spcAft>
-                <a:spcPts val="800"/>
-              </a:spcAft>
-            </a:pPr>
-            <a:r>
-              <a:rPr sz="2000" b="0" i="0">
-                <a:solidFill>
-                  <a:srgbClr val="333333"/>
-                </a:solidFill>
-                <a:latin typeface="Calibri"/>
-              </a:rPr>
-              <a:t>–   Quinta: el servicio externo se declara FUERA de los tres subgraph, y la flecha que llega a el se rotula como frontera de confianza; asi los 2 puntos de fronteras quedan visibles en el propio dibujo y no en un comentario aparte.</a:t>
-            </a:r>
-          </a:p>
-          <a:p>
-            <a:pPr>
-              <a:spcAft>
-                <a:spcPts val="800"/>
-              </a:spcAft>
-            </a:pPr>
-            <a:r>
-              <a:rPr sz="2000" b="0" i="0">
-                <a:solidFill>
-                  <a:srgbClr val="333333"/>
-                </a:solidFill>
-                <a:latin typeface="Calibri"/>
-              </a:rPr>
-              <a:t>–   Dos advertencias practicas.</a:t>
-            </a:r>
-          </a:p>
-          <a:p>
-            <a:pPr>
-              <a:spcAft>
-                <a:spcPts val="800"/>
-              </a:spcAft>
-            </a:pPr>
-            <a:r>
-              <a:rPr sz="2000" b="0" i="0">
-                <a:solidFill>
-                  <a:srgbClr val="333333"/>
-                </a:solidFill>
-                <a:latin typeface="Calibri"/>
-              </a:rPr>
-              <a:t>–   Los comentarios de Mermaid empiezan con dos signos de porcentaje, no se dibujan y tienen que ir en LINEA PROPIA: uno pegado al final de la linea de un nodo puede tumbar el renderizado, y ahi se van los 2 puntos.</a:t>
+              <a:t>–   Todo el bloque se evalua en el Parcial 2 de la Clase 9.</a:t>
             </a:r>
           </a:p>
         </p:txBody>
@@ -7715,7 +7367,7 @@
                 </a:solidFill>
                 <a:latin typeface="Calibri"/>
               </a:rPr>
-              <a:t>El molde de Mermaid, linea por linea (3/3)</a:t>
+              <a:t>Recorrer una peticion de CloudLite de punta a punta (1/2)</a:t>
             </a:r>
           </a:p>
         </p:txBody>
@@ -7754,7 +7406,7 @@
                 </a:solidFill>
                 <a:latin typeface="Calibri"/>
               </a:rPr>
-              <a:t>–   Sirven para dejar una nota al evaluador, no para responder.</a:t>
+              <a:t>–   La mejor forma de dictar la clase es seguir una peticion de CloudLite de punta a punta sobre el diagrama proyectado.</a:t>
             </a:r>
           </a:p>
           <a:p>
@@ -7770,7 +7422,7 @@
                 </a:solidFill>
                 <a:latin typeface="Calibri"/>
               </a:rPr>
-              <a:t>–   Y si un rotulo lleva parentesis, dos puntos o comillas, hay que envolverlo en comillas dobles, porque sin ellas el analizador se detiene ahi.</a:t>
+              <a:t>–   Un usuario final abre cloudlite.example en su telefono; el DNS resuelve el nombre a la IP publica del balanceador; el navegador abre una conexion HTTPS al puerto 443 de ese balanceador</a:t>
             </a:r>
           </a:p>
           <a:p>
@@ -7786,7 +7438,7 @@
                 </a:solidFill>
                 <a:latin typeface="Calibri"/>
               </a:rPr>
-              <a:t>–   El procedimiento que se proyecta en la demo es el que conviene repetir tres veces: dibujar el boceto donde sea, traducirlo a Mermaid (una IA lo hace bien</a:t>
+              <a:t>–   Que vive en la zona publica; el balanceador elige una de las dos instancias del contenedor de la API, en la zona privada</a:t>
             </a:r>
           </a:p>
           <a:p>
@@ -7802,7 +7454,7 @@
                 </a:solidFill>
                 <a:latin typeface="Calibri"/>
               </a:rPr>
-              <a:t>–   Y ahi hay que decir la frase exacta: la IA acierta la sintaxis, no el modelo), pegarlo en la pregunta 4 y MIRARLO RENDERIZADO antes de enviar.</a:t>
+              <a:t>–   Y le reenvia la peticion por HTTP al puerto 8080; la API consulta el motor de base de datos en la zona de datos por el puerto 5432 y devuelve JSON por el mismo camino.</a:t>
             </a:r>
           </a:p>
           <a:p>
@@ -7818,7 +7470,7 @@
                 </a:solidFill>
                 <a:latin typeface="Calibri"/>
               </a:rPr>
-              <a:t>–   Si no se dibuja, se corrige ahi mismo; nadie califica un codigo que no dibuja.</a:t>
+              <a:t>–   Ese recorrido, con cada flecha etiquetada con protocolo y puerto y cada caja dentro de su zona, es la estructura que la pregunta 4 califica; lo que se pega en la plataforma es su version en Mermaid, que es la seccion siguiente.</a:t>
             </a:r>
           </a:p>
         </p:txBody>
@@ -7999,7 +7651,7 @@
                 </a:solidFill>
                 <a:latin typeface="Calibri"/>
               </a:rPr>
-              <a:t>Preguntas frecuentes del grupo (1/2)</a:t>
+              <a:t>Recorrer una peticion de CloudLite de punta a punta (2/2)</a:t>
             </a:r>
           </a:p>
         </p:txBody>
@@ -8038,7 +7690,7 @@
                 </a:solidFill>
                 <a:latin typeface="Calibri"/>
               </a:rPr>
-              <a:t>–   Estas cuatro aparecen todos los semestres y las cuatro se responden con material que ya esta proyectado.</a:t>
+              <a:t>–   Sirve tambien para citar numeros: una consulta simple bien indexada responde entre 1 y 20 milisegundos, y el objetivo que se formalizara en la Clase 12 suele fijarse por convencion en menos de 300 milisegundos para el 95 por ciento de las peticiones.</a:t>
             </a:r>
           </a:p>
           <a:p>
@@ -8054,71 +7706,7 @@
                 </a:solidFill>
                 <a:latin typeface="Calibri"/>
               </a:rPr>
-              <a:t>–   «Si la base de datos es privada, como se conecta la API?» Privado significa inalcanzable desde internet</a:t>
-            </a:r>
-          </a:p>
-          <a:p>
-            <a:pPr>
-              <a:spcAft>
-                <a:spcPts val="800"/>
-              </a:spcAft>
-            </a:pPr>
-            <a:r>
-              <a:rPr sz="2000" b="0" i="0">
-                <a:solidFill>
-                  <a:srgbClr val="333333"/>
-                </a:solidFill>
-                <a:latin typeface="Calibri"/>
-              </a:rPr>
-              <a:t>–   No inalcanzable en absoluto: la API esta en la misma red y llega por el nombre interno y el puerto del motor; quien no puede llegar es el usuario final ni un atacante externo.</a:t>
-            </a:r>
-          </a:p>
-          <a:p>
-            <a:pPr>
-              <a:spcAft>
-                <a:spcPts val="800"/>
-              </a:spcAft>
-            </a:pPr>
-            <a:r>
-              <a:rPr sz="2000" b="0" i="0">
-                <a:solidFill>
-                  <a:srgbClr val="333333"/>
-                </a:solidFill>
-                <a:latin typeface="Calibri"/>
-              </a:rPr>
-              <a:t>–   Si un desarrollador necesita entrar, se hace por un unico host intermedio controlado, llamado bastion.</a:t>
-            </a:r>
-          </a:p>
-          <a:p>
-            <a:pPr>
-              <a:spcAft>
-                <a:spcPts val="800"/>
-              </a:spcAft>
-            </a:pPr>
-            <a:r>
-              <a:rPr sz="2000" b="0" i="0">
-                <a:solidFill>
-                  <a:srgbClr val="333333"/>
-                </a:solidFill>
-                <a:latin typeface="Calibri"/>
-              </a:rPr>
-              <a:t>–   «Esto no esta mal por no ser una VPC real de un proveedor?» Lo que se evalua es el razonamiento sobre zonas, puertos y ubicacion de los datos, no la sintaxis de una marca; el curso usa herramientas gratis en navegador y no pide cuenta de pago ni tarjeta.</a:t>
-            </a:r>
-          </a:p>
-          <a:p>
-            <a:pPr>
-              <a:spcAft>
-                <a:spcPts val="800"/>
-              </a:spcAft>
-            </a:pPr>
-            <a:r>
-              <a:rPr sz="2000" b="0" i="0">
-                <a:solidFill>
-                  <a:srgbClr val="333333"/>
-                </a:solidFill>
-                <a:latin typeface="Calibri"/>
-              </a:rPr>
-              <a:t>–   Es mas: la rubrica DESCUENTA por nombrar subredes o servicios de un proveedor concreto, asi que escribir VPC, el nombre de una zona de disponibilidad o el de un servicio de marca resta en vez de sumar.</a:t>
+              <a:t>–   Con eso el grupo ve que si una pantalla dispara veinte consultas encadenadas el problema es de diseno y no de servidor.</a:t>
             </a:r>
           </a:p>
         </p:txBody>
@@ -8299,7 +7887,7 @@
                 </a:solidFill>
                 <a:latin typeface="Calibri"/>
               </a:rPr>
-              <a:t>Preguntas frecuentes del grupo (2/2)</a:t>
+              <a:t>El molde de Mermaid, linea por linea (1/3)</a:t>
             </a:r>
           </a:p>
         </p:txBody>
@@ -8338,7 +7926,7 @@
                 </a:solidFill>
                 <a:latin typeface="Calibri"/>
               </a:rPr>
-              <a:t>–   Por eso las zonas se llaman Publica, Privada y Datos.</a:t>
+              <a:t>–   La diapositiva del molde existe porque el estudiante puede tener el modelo correcto en la cabeza y perder puntos por sintaxis, y porque 2 de los 14 son que el diagrama renderice.</a:t>
             </a:r>
           </a:p>
           <a:p>
@@ -8354,7 +7942,7 @@
                 </a:solidFill>
                 <a:latin typeface="Calibri"/>
               </a:rPr>
-              <a:t>–   «Puedo subir mi imagen del diagrama en vez del codigo Mermaid?» No para la pregunta 4: lo que se califica es el diagrama renderizado dentro de la plataforma.</a:t>
+              <a:t>–   Primera: la palabra inicial.</a:t>
             </a:r>
           </a:p>
           <a:p>
@@ -8370,7 +7958,7 @@
                 </a:solidFill>
                 <a:latin typeface="Calibri"/>
               </a:rPr>
-              <a:t>–   El PNG exportado va a la carpeta del Proyecto Integrador, para el informe, y no reemplaza la respuesta.</a:t>
+              <a:t>–   Segunda: cada zona es un subgraph con su rotulo entre comillas y su propio end.</a:t>
             </a:r>
           </a:p>
           <a:p>
@@ -8386,7 +7974,7 @@
                 </a:solidFill>
                 <a:latin typeface="Calibri"/>
               </a:rPr>
-              <a:t>–   «Mi sistema es pequeno, solo tiene la aplicacion y la base de datos; igual necesito tres zonas?» Si</a:t>
+              <a:t>–   Los subgraph son las tres zonas, y son las que valen 4 puntos; olvidar un end es la causa numero uno de que la plataforma no dibuje nada, porque el bloque queda abierto.</a:t>
             </a:r>
           </a:p>
           <a:p>
@@ -8402,7 +7990,7 @@
                 </a:solidFill>
                 <a:latin typeface="Calibri"/>
               </a:rPr>
-              <a:t>–   Y no es burocracia: las tres zonas son 4 puntos y el sentido de la separacion es justamente que el punto de entrada, la logica y los datos tengan grados de exposicion distintos.</a:t>
+              <a:t>–   Tercera: la forma de la caja dice que es la pieza.</a:t>
             </a:r>
           </a:p>
           <a:p>
@@ -8418,23 +8006,7 @@
                 </a:solidFill>
                 <a:latin typeface="Calibri"/>
               </a:rPr>
-              <a:t>–   Un sistema de dos cajas se dibuja con cliente y edge en la publica, la aplicacion en la privada y la base en la de datos</a:t>
-            </a:r>
-          </a:p>
-          <a:p>
-            <a:pPr>
-              <a:spcAft>
-                <a:spcPts val="800"/>
-              </a:spcAft>
-            </a:pPr>
-            <a:r>
-              <a:rPr sz="2000" b="0" i="0">
-                <a:solidFill>
-                  <a:srgbClr val="333333"/>
-                </a:solidFill>
-                <a:latin typeface="Calibri"/>
-              </a:rPr>
-              <a:t>–   Si de verdad no hay balanceador, el punto de entrada es el servidor web o el proxy que atiende el 443, y ese es el habitante de la zona publica.</a:t>
+              <a:t>–   Los corchetes rectos son un proceso o servicio, y la combinacion de corchete y parentesis, es decir abrir corchete parentesis, es la base de datos, que se lee como cilindro.</a:t>
             </a:r>
           </a:p>
         </p:txBody>
@@ -8509,7 +8081,7 @@
         <p:spPr>
           <a:xfrm>
             <a:off x="0" y="0"/>
-            <a:ext cx="12191695" cy="1170432"/>
+            <a:ext cx="12191695" cy="960120"/>
           </a:xfrm>
           <a:prstGeom prst="rect">
             <a:avLst/>
@@ -8551,7 +8123,7 @@
         </p:nvSpPr>
         <p:spPr>
           <a:xfrm>
-            <a:off x="0" y="1170432"/>
+            <a:off x="0" y="960120"/>
             <a:ext cx="12191695" cy="41148"/>
           </a:xfrm>
           <a:prstGeom prst="rect">
@@ -8595,7 +8167,7 @@
         <p:spPr>
           <a:xfrm>
             <a:off x="457200" y="164592"/>
-            <a:ext cx="11277295" cy="384048"/>
+            <a:ext cx="11277295" cy="502920"/>
           </a:xfrm>
           <a:prstGeom prst="rect">
             <a:avLst/>
@@ -8615,7 +8187,7 @@
                 </a:solidFill>
                 <a:latin typeface="Calibri"/>
               </a:rPr>
-              <a:t>Ejemplo de diagrama de despliegue (Deployment)</a:t>
+              <a:t>El molde de Mermaid, linea por linea (2/3)</a:t>
             </a:r>
           </a:p>
         </p:txBody>
@@ -8628,8 +8200,8 @@
         </p:nvSpPr>
         <p:spPr>
           <a:xfrm>
-            <a:off x="457200" y="566928"/>
-            <a:ext cx="11277295" cy="411480"/>
+            <a:off x="457200" y="1170432"/>
+            <a:ext cx="11277295" cy="5230368"/>
           </a:xfrm>
           <a:prstGeom prst="rect">
             <a:avLst/>
@@ -8642,362 +8214,74 @@
           </a:bodyPr>
           <a:lstStyle/>
           <a:p>
-            <a:r>
-              <a:rPr sz="1400" b="0" i="0">
-                <a:solidFill>
-                  <a:srgbClr val="B8D8EE"/>
-                </a:solidFill>
-                <a:latin typeface="Calibri"/>
-              </a:rPr>
-              <a:t>Zonas de confianza: qué es público, qué es privado, dónde viven los datos</a:t>
-            </a:r>
-          </a:p>
-        </p:txBody>
-      </p:sp>
-      <p:sp>
-        <p:nvSpPr>
-          <p:cNvPr id="6" name="Rounded Rectangle 5"/>
-          <p:cNvSpPr/>
-          <p:nvPr/>
-        </p:nvSpPr>
-        <p:spPr>
-          <a:xfrm>
-            <a:off x="822960" y="2194560"/>
-            <a:ext cx="3291840" cy="1005840"/>
-          </a:xfrm>
-          <a:prstGeom prst="roundRect">
-            <a:avLst>
-              <a:gd name="adj" fmla="val 12000"/>
-            </a:avLst>
-          </a:prstGeom>
-          <a:solidFill>
-            <a:srgbClr val="FFD000"/>
-          </a:solidFill>
-          <a:ln>
-            <a:noFill/>
-          </a:ln>
-        </p:spPr>
-        <p:style>
-          <a:lnRef idx="1">
-            <a:schemeClr val="accent1"/>
-          </a:lnRef>
-          <a:fillRef idx="3">
-            <a:schemeClr val="accent1"/>
-          </a:fillRef>
-          <a:effectRef idx="2">
-            <a:schemeClr val="accent1"/>
-          </a:effectRef>
-          <a:fontRef idx="minor">
-            <a:schemeClr val="lt1"/>
-          </a:fontRef>
-        </p:style>
-        <p:txBody>
-          <a:bodyPr rtlCol="0" anchor="ctr" wrap="square"/>
-          <a:lstStyle/>
-          <a:p>
-            <a:pPr algn="ctr"/>
-            <a:r>
-              <a:rPr sz="1300" b="1" i="0">
-                <a:solidFill>
-                  <a:srgbClr val="095292"/>
-                </a:solidFill>
-                <a:latin typeface="Calibri"/>
-              </a:rPr>
-              <a:t>Zona pública
-(balanceador / edge)</a:t>
-            </a:r>
-          </a:p>
-        </p:txBody>
-      </p:sp>
-      <p:sp>
-        <p:nvSpPr>
-          <p:cNvPr id="7" name="Rounded Rectangle 6"/>
-          <p:cNvSpPr/>
-          <p:nvPr/>
-        </p:nvSpPr>
-        <p:spPr>
-          <a:xfrm>
-            <a:off x="4754880" y="2194560"/>
-            <a:ext cx="3291840" cy="1005840"/>
-          </a:xfrm>
-          <a:prstGeom prst="roundRect">
-            <a:avLst>
-              <a:gd name="adj" fmla="val 12000"/>
-            </a:avLst>
-          </a:prstGeom>
-          <a:solidFill>
-            <a:srgbClr val="095292"/>
-          </a:solidFill>
-          <a:ln>
-            <a:noFill/>
-          </a:ln>
-        </p:spPr>
-        <p:style>
-          <a:lnRef idx="1">
-            <a:schemeClr val="accent1"/>
-          </a:lnRef>
-          <a:fillRef idx="3">
-            <a:schemeClr val="accent1"/>
-          </a:fillRef>
-          <a:effectRef idx="2">
-            <a:schemeClr val="accent1"/>
-          </a:effectRef>
-          <a:fontRef idx="minor">
-            <a:schemeClr val="lt1"/>
-          </a:fontRef>
-        </p:style>
-        <p:txBody>
-          <a:bodyPr rtlCol="0" anchor="ctr" wrap="square"/>
-          <a:lstStyle/>
-          <a:p>
-            <a:pPr algn="ctr"/>
-            <a:r>
-              <a:rPr sz="1300" b="1" i="0">
-                <a:solidFill>
-                  <a:srgbClr val="FFFFFF"/>
-                </a:solidFill>
-                <a:latin typeface="Calibri"/>
-              </a:rPr>
-              <a:t>Zona privada
-(app CloudLite)</a:t>
-            </a:r>
-          </a:p>
-        </p:txBody>
-      </p:sp>
-      <p:sp>
-        <p:nvSpPr>
-          <p:cNvPr id="8" name="Rounded Rectangle 7"/>
-          <p:cNvSpPr/>
-          <p:nvPr/>
-        </p:nvSpPr>
-        <p:spPr>
-          <a:xfrm>
-            <a:off x="8595360" y="2194560"/>
-            <a:ext cx="3291840" cy="1005840"/>
-          </a:xfrm>
-          <a:prstGeom prst="roundRect">
-            <a:avLst>
-              <a:gd name="adj" fmla="val 12000"/>
-            </a:avLst>
-          </a:prstGeom>
-          <a:solidFill>
-            <a:srgbClr val="269CCB"/>
-          </a:solidFill>
-          <a:ln>
-            <a:noFill/>
-          </a:ln>
-        </p:spPr>
-        <p:style>
-          <a:lnRef idx="1">
-            <a:schemeClr val="accent1"/>
-          </a:lnRef>
-          <a:fillRef idx="3">
-            <a:schemeClr val="accent1"/>
-          </a:fillRef>
-          <a:effectRef idx="2">
-            <a:schemeClr val="accent1"/>
-          </a:effectRef>
-          <a:fontRef idx="minor">
-            <a:schemeClr val="lt1"/>
-          </a:fontRef>
-        </p:style>
-        <p:txBody>
-          <a:bodyPr rtlCol="0" anchor="ctr" wrap="square"/>
-          <a:lstStyle/>
-          <a:p>
-            <a:pPr algn="ctr"/>
-            <a:r>
-              <a:rPr sz="1300" b="1" i="0">
-                <a:solidFill>
-                  <a:srgbClr val="FFFFFF"/>
-                </a:solidFill>
-                <a:latin typeface="Calibri"/>
-              </a:rPr>
-              <a:t>Zona de datos
-(base de datos)</a:t>
-            </a:r>
-          </a:p>
-        </p:txBody>
-      </p:sp>
-      <p:cxnSp>
-        <p:nvCxnSpPr>
-          <p:cNvPr id="9" name="Connector 8"/>
-          <p:cNvCxnSpPr/>
-          <p:nvPr/>
-        </p:nvCxnSpPr>
-        <p:spPr>
-          <a:xfrm>
-            <a:off x="4114800" y="2697480"/>
-            <a:ext cx="640080" cy="0"/>
-          </a:xfrm>
-          <a:prstGeom prst="line">
-            <a:avLst/>
-          </a:prstGeom>
-          <a:ln w="22225">
-            <a:solidFill>
-              <a:srgbClr val="666666"/>
-            </a:solidFill>
-            <a:tailEnd type="triangle" w="med" len="med"/>
-          </a:ln>
-        </p:spPr>
-        <p:style>
-          <a:lnRef idx="2">
-            <a:schemeClr val="accent1"/>
-          </a:lnRef>
-          <a:fillRef idx="0">
-            <a:schemeClr val="accent1"/>
-          </a:fillRef>
-          <a:effectRef idx="1">
-            <a:schemeClr val="accent1"/>
-          </a:effectRef>
-          <a:fontRef idx="minor">
-            <a:schemeClr val="tx1"/>
-          </a:fontRef>
-        </p:style>
-      </p:cxnSp>
-      <p:sp>
-        <p:nvSpPr>
-          <p:cNvPr id="10" name="TextBox 9"/>
-          <p:cNvSpPr txBox="1"/>
-          <p:nvPr/>
-        </p:nvSpPr>
-        <p:spPr>
-          <a:xfrm>
-            <a:off x="3611879" y="2496312"/>
-            <a:ext cx="1645920" cy="320040"/>
-          </a:xfrm>
-          <a:prstGeom prst="rect">
-            <a:avLst/>
-          </a:prstGeom>
-          <a:noFill/>
-        </p:spPr>
-        <p:txBody>
-          <a:bodyPr wrap="square">
-            <a:spAutoFit/>
-          </a:bodyPr>
-          <a:lstStyle/>
-          <a:p>
-            <a:pPr algn="ctr"/>
-            <a:r>
-              <a:rPr sz="1000" b="0" i="1">
-                <a:solidFill>
-                  <a:srgbClr val="666666"/>
-                </a:solidFill>
-                <a:latin typeface="Calibri"/>
-              </a:rPr>
-              <a:t>solo el 8080</a:t>
-            </a:r>
-          </a:p>
-        </p:txBody>
-      </p:sp>
-      <p:cxnSp>
-        <p:nvCxnSpPr>
-          <p:cNvPr id="11" name="Connector 10"/>
-          <p:cNvCxnSpPr/>
-          <p:nvPr/>
-        </p:nvCxnSpPr>
-        <p:spPr>
-          <a:xfrm>
-            <a:off x="8046720" y="2697480"/>
-            <a:ext cx="548640" cy="0"/>
-          </a:xfrm>
-          <a:prstGeom prst="line">
-            <a:avLst/>
-          </a:prstGeom>
-          <a:ln w="22225">
-            <a:solidFill>
-              <a:srgbClr val="666666"/>
-            </a:solidFill>
-            <a:tailEnd type="triangle" w="med" len="med"/>
-          </a:ln>
-        </p:spPr>
-        <p:style>
-          <a:lnRef idx="2">
-            <a:schemeClr val="accent1"/>
-          </a:lnRef>
-          <a:fillRef idx="0">
-            <a:schemeClr val="accent1"/>
-          </a:fillRef>
-          <a:effectRef idx="1">
-            <a:schemeClr val="accent1"/>
-          </a:effectRef>
-          <a:fontRef idx="minor">
-            <a:schemeClr val="tx1"/>
-          </a:fontRef>
-        </p:style>
-      </p:cxnSp>
-      <p:sp>
-        <p:nvSpPr>
-          <p:cNvPr id="12" name="TextBox 11"/>
-          <p:cNvSpPr txBox="1"/>
-          <p:nvPr/>
-        </p:nvSpPr>
-        <p:spPr>
-          <a:xfrm>
-            <a:off x="7498080" y="2496312"/>
-            <a:ext cx="1645920" cy="320040"/>
-          </a:xfrm>
-          <a:prstGeom prst="rect">
-            <a:avLst/>
-          </a:prstGeom>
-          <a:noFill/>
-        </p:spPr>
-        <p:txBody>
-          <a:bodyPr wrap="square">
-            <a:spAutoFit/>
-          </a:bodyPr>
-          <a:lstStyle/>
-          <a:p>
-            <a:pPr algn="ctr"/>
-            <a:r>
-              <a:rPr sz="1000" b="0" i="1">
-                <a:solidFill>
-                  <a:srgbClr val="666666"/>
-                </a:solidFill>
-                <a:latin typeface="Calibri"/>
-              </a:rPr>
-              <a:t>solo el 5432</a:t>
-            </a:r>
-          </a:p>
-        </p:txBody>
-      </p:sp>
-      <p:sp>
-        <p:nvSpPr>
-          <p:cNvPr id="13" name="TextBox 12"/>
-          <p:cNvSpPr txBox="1"/>
-          <p:nvPr/>
-        </p:nvSpPr>
-        <p:spPr>
-          <a:xfrm>
-            <a:off x="457200" y="6263640"/>
-            <a:ext cx="11277295" cy="411480"/>
-          </a:xfrm>
-          <a:prstGeom prst="rect">
-            <a:avLst/>
-          </a:prstGeom>
-          <a:noFill/>
-        </p:spPr>
-        <p:txBody>
-          <a:bodyPr wrap="square">
-            <a:spAutoFit/>
-          </a:bodyPr>
-          <a:lstStyle/>
-          <a:p>
-            <a:r>
-              <a:rPr sz="1100" b="0" i="1">
-                <a:solidFill>
-                  <a:srgbClr val="666666"/>
-                </a:solidFill>
-                <a:latin typeface="Calibri"/>
-              </a:rPr>
-              <a:t>La base de datos NUNCA vive en la zona pública. Los nombres deben coincidir con los del C4 Containers (Clase 4) — mismo sistema, otro ángulo.</a:t>
-            </a:r>
-          </a:p>
-        </p:txBody>
-      </p:sp>
-      <p:sp>
-        <p:nvSpPr>
-          <p:cNvPr id="14" name="TextBox 13"/>
+            <a:pPr>
+              <a:spcAft>
+                <a:spcPts val="800"/>
+              </a:spcAft>
+            </a:pPr>
+            <a:r>
+              <a:rPr sz="2000" b="0" i="0">
+                <a:solidFill>
+                  <a:srgbClr val="333333"/>
+                </a:solidFill>
+                <a:latin typeface="Calibri"/>
+              </a:rPr>
+              <a:t>–   Cuarta: el puerto va DENTRO del rotulo de la caja, separado con la etiqueta de salto de linea de HTML, y la etiqueta de la flecha va entre barras verticales y comillas, con el protocolo y el puerto.</a:t>
+            </a:r>
+          </a:p>
+          <a:p>
+            <a:pPr>
+              <a:spcAft>
+                <a:spcPts val="800"/>
+              </a:spcAft>
+            </a:pPr>
+            <a:r>
+              <a:rPr sz="2000" b="0" i="0">
+                <a:solidFill>
+                  <a:srgbClr val="333333"/>
+                </a:solidFill>
+                <a:latin typeface="Calibri"/>
+              </a:rPr>
+              <a:t>–   Es la forma mas segura de cumplir los 2 puntos de puertos sin ensuciar el dibujo.</a:t>
+            </a:r>
+          </a:p>
+          <a:p>
+            <a:pPr>
+              <a:spcAft>
+                <a:spcPts val="800"/>
+              </a:spcAft>
+            </a:pPr>
+            <a:r>
+              <a:rPr sz="2000" b="0" i="0">
+                <a:solidFill>
+                  <a:srgbClr val="333333"/>
+                </a:solidFill>
+                <a:latin typeface="Calibri"/>
+              </a:rPr>
+              <a:t>–   Quinta: el servicio externo se declara FUERA de los tres subgraph, y la flecha que llega a el se rotula como frontera de confianza; asi los 2 puntos de fronteras quedan visibles en el propio dibujo y no en un comentario aparte.</a:t>
+            </a:r>
+          </a:p>
+          <a:p>
+            <a:pPr>
+              <a:spcAft>
+                <a:spcPts val="800"/>
+              </a:spcAft>
+            </a:pPr>
+            <a:r>
+              <a:rPr sz="2000" b="0" i="0">
+                <a:solidFill>
+                  <a:srgbClr val="333333"/>
+                </a:solidFill>
+                <a:latin typeface="Calibri"/>
+              </a:rPr>
+              <a:t>–   Los comentarios de Mermaid empiezan con dos signos de porcentaje, no se dibujan y tienen que ir en LINEA PROPIA: uno pegado al final de la linea de un nodo puede tumbar el renderizado, y ahi se van los 2 puntos.</a:t>
+            </a:r>
+          </a:p>
+        </p:txBody>
+      </p:sp>
+      <p:sp>
+        <p:nvSpPr>
+          <p:cNvPr id="6" name="TextBox 5"/>
           <p:cNvSpPr txBox="1"/>
           <p:nvPr/>
         </p:nvSpPr>
@@ -9171,141 +8455,21 @@
                 </a:solidFill>
                 <a:latin typeface="Calibri"/>
               </a:rPr>
-              <a:t>El Despliegue en Mermaid: el molde que la plataforma del curso renderiza</a:t>
-            </a:r>
-          </a:p>
-        </p:txBody>
-      </p:sp>
-      <p:sp>
-        <p:nvSpPr>
-          <p:cNvPr id="5" name="Rounded Rectangle 4"/>
-          <p:cNvSpPr/>
-          <p:nvPr/>
-        </p:nvSpPr>
-        <p:spPr>
-          <a:xfrm>
-            <a:off x="457200" y="1261872"/>
-            <a:ext cx="11277295" cy="4773168"/>
-          </a:xfrm>
-          <a:prstGeom prst="roundRect">
-            <a:avLst>
-              <a:gd name="adj" fmla="val 12000"/>
-            </a:avLst>
-          </a:prstGeom>
-          <a:solidFill>
-            <a:srgbClr val="1E2A38"/>
-          </a:solidFill>
-          <a:ln>
-            <a:noFill/>
-          </a:ln>
-        </p:spPr>
-        <p:style>
-          <a:lnRef idx="1">
-            <a:schemeClr val="accent1"/>
-          </a:lnRef>
-          <a:fillRef idx="3">
-            <a:schemeClr val="accent1"/>
-          </a:fillRef>
-          <a:effectRef idx="2">
-            <a:schemeClr val="accent1"/>
-          </a:effectRef>
-          <a:fontRef idx="minor">
-            <a:schemeClr val="lt1"/>
-          </a:fontRef>
-        </p:style>
-        <p:txBody>
-          <a:bodyPr rtlCol="0" anchor="ctr"/>
-          <a:lstStyle/>
-          <a:p>
-            <a:pPr algn="ctr"/>
-          </a:p>
-        </p:txBody>
-      </p:sp>
-      <p:sp>
-        <p:nvSpPr>
-          <p:cNvPr id="6" name="Rectangle 5"/>
-          <p:cNvSpPr/>
-          <p:nvPr/>
-        </p:nvSpPr>
-        <p:spPr>
-          <a:xfrm>
-            <a:off x="457200" y="1261872"/>
-            <a:ext cx="11277295" cy="320040"/>
-          </a:xfrm>
-          <a:prstGeom prst="rect">
-            <a:avLst/>
-          </a:prstGeom>
-          <a:solidFill>
-            <a:srgbClr val="095292"/>
-          </a:solidFill>
-          <a:ln>
-            <a:noFill/>
-          </a:ln>
-        </p:spPr>
-        <p:style>
-          <a:lnRef idx="1">
-            <a:schemeClr val="accent1"/>
-          </a:lnRef>
-          <a:fillRef idx="3">
-            <a:schemeClr val="accent1"/>
-          </a:fillRef>
-          <a:effectRef idx="2">
-            <a:schemeClr val="accent1"/>
-          </a:effectRef>
-          <a:fontRef idx="minor">
-            <a:schemeClr val="lt1"/>
-          </a:fontRef>
-        </p:style>
-        <p:txBody>
-          <a:bodyPr rtlCol="0" anchor="ctr"/>
-          <a:lstStyle/>
-          <a:p>
-            <a:pPr algn="ctr"/>
-          </a:p>
-        </p:txBody>
-      </p:sp>
-      <p:sp>
-        <p:nvSpPr>
-          <p:cNvPr id="7" name="TextBox 6"/>
+              <a:t>El molde de Mermaid, linea por linea (3/3)</a:t>
+            </a:r>
+          </a:p>
+        </p:txBody>
+      </p:sp>
+      <p:sp>
+        <p:nvSpPr>
+          <p:cNvPr id="5" name="TextBox 4"/>
           <p:cNvSpPr txBox="1"/>
           <p:nvPr/>
         </p:nvSpPr>
         <p:spPr>
           <a:xfrm>
-            <a:off x="685800" y="1307592"/>
-            <a:ext cx="10820095" cy="256032"/>
-          </a:xfrm>
-          <a:prstGeom prst="rect">
-            <a:avLst/>
-          </a:prstGeom>
-          <a:noFill/>
-        </p:spPr>
-        <p:txBody>
-          <a:bodyPr wrap="square" anchor="ctr"/>
-          <a:lstStyle/>
-          <a:p>
-            <a:r>
-              <a:rPr sz="1000" b="1" i="0">
-                <a:solidFill>
-                  <a:srgbClr val="269CCB"/>
-                </a:solidFill>
-                <a:latin typeface="Calibri"/>
-              </a:rPr>
-              <a:t>● ● ●</a:t>
-            </a:r>
-          </a:p>
-        </p:txBody>
-      </p:sp>
-      <p:sp>
-        <p:nvSpPr>
-          <p:cNvPr id="8" name="TextBox 7"/>
-          <p:cNvSpPr txBox="1"/>
-          <p:nvPr/>
-        </p:nvSpPr>
-        <p:spPr>
-          <a:xfrm>
-            <a:off x="777240" y="1719072"/>
-            <a:ext cx="10637215" cy="4133087"/>
+            <a:off x="457200" y="1170432"/>
+            <a:ext cx="11277295" cy="5230368"/>
           </a:xfrm>
           <a:prstGeom prst="rect">
             <a:avLst/>
@@ -9320,283 +8484,72 @@
           <a:p>
             <a:pPr>
               <a:spcAft>
-                <a:spcPts val="400"/>
+                <a:spcPts val="800"/>
               </a:spcAft>
             </a:pPr>
             <a:r>
-              <a:rPr sz="1400" b="0" i="0">
-                <a:solidFill>
-                  <a:srgbClr val="FFFFFF"/>
-                </a:solidFill>
-                <a:latin typeface="Calibri"/>
-              </a:rPr>
-              <a:t>flowchart LR</a:t>
+              <a:rPr sz="2000" b="0" i="0">
+                <a:solidFill>
+                  <a:srgbClr val="333333"/>
+                </a:solidFill>
+                <a:latin typeface="Calibri"/>
+              </a:rPr>
+              <a:t>–   Y si un rotulo lleva parentesis, dos puntos o comillas, hay que envolverlo en comillas dobles, porque sin ellas el analizador se detiene ahi.</a:t>
             </a:r>
           </a:p>
           <a:p>
             <a:pPr>
               <a:spcAft>
-                <a:spcPts val="400"/>
+                <a:spcPts val="800"/>
               </a:spcAft>
             </a:pPr>
             <a:r>
-              <a:rPr sz="1400" b="0" i="0">
-                <a:solidFill>
-                  <a:srgbClr val="FFFFFF"/>
-                </a:solidFill>
-                <a:latin typeface="Calibri"/>
-              </a:rPr>
-              <a:t>  subgraph publica["Zona publica - internet"]</a:t>
+              <a:rPr sz="2000" b="0" i="0">
+                <a:solidFill>
+                  <a:srgbClr val="333333"/>
+                </a:solidFill>
+                <a:latin typeface="Calibri"/>
+              </a:rPr>
+              <a:t>–   El procedimiento que se proyecta en la demo es el que conviene repetir tres veces: dibujar el boceto donde sea, traducirlo a Mermaid (una IA lo hace bien</a:t>
             </a:r>
           </a:p>
           <a:p>
             <a:pPr>
               <a:spcAft>
-                <a:spcPts val="400"/>
+                <a:spcPts val="800"/>
               </a:spcAft>
             </a:pPr>
             <a:r>
-              <a:rPr sz="1400" b="0" i="0">
-                <a:solidFill>
-                  <a:srgbClr val="FFFFFF"/>
-                </a:solidFill>
-                <a:latin typeface="Calibri"/>
-              </a:rPr>
-              <a:t>    web["App web&lt;br/&gt;React estatico - 443"]</a:t>
+              <a:rPr sz="2000" b="0" i="0">
+                <a:solidFill>
+                  <a:srgbClr val="333333"/>
+                </a:solidFill>
+                <a:latin typeface="Calibri"/>
+              </a:rPr>
+              <a:t>–   Y ahi hay que decir la frase exacta: la IA acierta la sintaxis, no el modelo), pegarlo en la pregunta 4 y MIRARLO RENDERIZADO antes de enviar.</a:t>
             </a:r>
           </a:p>
           <a:p>
             <a:pPr>
               <a:spcAft>
-                <a:spcPts val="400"/>
+                <a:spcPts val="800"/>
               </a:spcAft>
             </a:pPr>
             <a:r>
-              <a:rPr sz="1400" b="0" i="0">
-                <a:solidFill>
-                  <a:srgbClr val="FFFFFF"/>
-                </a:solidFill>
-                <a:latin typeface="Calibri"/>
-              </a:rPr>
-              <a:t>    edge["Edge / balanceador&lt;br/&gt;443 HTTPS"]</a:t>
-            </a:r>
-          </a:p>
-          <a:p>
-            <a:pPr>
-              <a:spcAft>
-                <a:spcPts val="400"/>
-              </a:spcAft>
-            </a:pPr>
-            <a:r>
-              <a:rPr sz="1400" b="0" i="0">
-                <a:solidFill>
-                  <a:srgbClr val="FFFFFF"/>
-                </a:solidFill>
-                <a:latin typeface="Calibri"/>
-              </a:rPr>
-              <a:t>  end</a:t>
-            </a:r>
-          </a:p>
-          <a:p>
-            <a:pPr>
-              <a:spcAft>
-                <a:spcPts val="400"/>
-              </a:spcAft>
-            </a:pPr>
-            <a:r>
-              <a:rPr sz="1400" b="0" i="0">
-                <a:solidFill>
-                  <a:srgbClr val="FFFFFF"/>
-                </a:solidFill>
-                <a:latin typeface="Calibri"/>
-              </a:rPr>
-              <a:t>  subgraph privada["Zona privada - solo desde el edge"]</a:t>
-            </a:r>
-          </a:p>
-          <a:p>
-            <a:pPr>
-              <a:spcAft>
-                <a:spcPts val="400"/>
-              </a:spcAft>
-            </a:pPr>
-            <a:r>
-              <a:rPr sz="1400" b="0" i="0">
-                <a:solidFill>
-                  <a:srgbClr val="FFFFFF"/>
-                </a:solidFill>
-                <a:latin typeface="Calibri"/>
-              </a:rPr>
-              <a:t>    api["API CloudLite&lt;br/&gt;8080 HTTP"]</a:t>
-            </a:r>
-          </a:p>
-          <a:p>
-            <a:pPr>
-              <a:spcAft>
-                <a:spcPts val="400"/>
-              </a:spcAft>
-            </a:pPr>
-            <a:r>
-              <a:rPr sz="1400" b="0" i="0">
-                <a:solidFill>
-                  <a:srgbClr val="FFFFFF"/>
-                </a:solidFill>
-                <a:latin typeface="Calibri"/>
-              </a:rPr>
-              <a:t>  end</a:t>
-            </a:r>
-          </a:p>
-          <a:p>
-            <a:pPr>
-              <a:spcAft>
-                <a:spcPts val="400"/>
-              </a:spcAft>
-            </a:pPr>
-            <a:r>
-              <a:rPr sz="1400" b="0" i="0">
-                <a:solidFill>
-                  <a:srgbClr val="FFFFFF"/>
-                </a:solidFill>
-                <a:latin typeface="Calibri"/>
-              </a:rPr>
-              <a:t>  subgraph datos["Zona de datos - sin internet: la BD va AQUI"]</a:t>
-            </a:r>
-          </a:p>
-          <a:p>
-            <a:pPr>
-              <a:spcAft>
-                <a:spcPts val="400"/>
-              </a:spcAft>
-            </a:pPr>
-            <a:r>
-              <a:rPr sz="1400" b="0" i="0">
-                <a:solidFill>
-                  <a:srgbClr val="FFFFFF"/>
-                </a:solidFill>
-                <a:latin typeface="Calibri"/>
-              </a:rPr>
-              <a:t>    db[("Base de datos&lt;br/&gt;5432 TCP")]</a:t>
-            </a:r>
-          </a:p>
-          <a:p>
-            <a:pPr>
-              <a:spcAft>
-                <a:spcPts val="400"/>
-              </a:spcAft>
-            </a:pPr>
-            <a:r>
-              <a:rPr sz="1400" b="0" i="0">
-                <a:solidFill>
-                  <a:srgbClr val="FFFFFF"/>
-                </a:solidFill>
-                <a:latin typeface="Calibri"/>
-              </a:rPr>
-              <a:t>  end</a:t>
-            </a:r>
-          </a:p>
-          <a:p>
-            <a:pPr>
-              <a:spcAft>
-                <a:spcPts val="400"/>
-              </a:spcAft>
-            </a:pPr>
-            <a:r>
-              <a:rPr sz="1400" b="0" i="0">
-                <a:solidFill>
-                  <a:srgbClr val="FFFFFF"/>
-                </a:solidFill>
-                <a:latin typeface="Calibri"/>
-              </a:rPr>
-              <a:t>  web --&gt;|"HTTPS 443"| edge</a:t>
-            </a:r>
-          </a:p>
-          <a:p>
-            <a:pPr>
-              <a:spcAft>
-                <a:spcPts val="400"/>
-              </a:spcAft>
-            </a:pPr>
-            <a:r>
-              <a:rPr sz="1400" b="0" i="0">
-                <a:solidFill>
-                  <a:srgbClr val="FFFFFF"/>
-                </a:solidFill>
-                <a:latin typeface="Calibri"/>
-              </a:rPr>
-              <a:t>  edge --&gt;|"HTTP 8080"| api</a:t>
-            </a:r>
-          </a:p>
-          <a:p>
-            <a:pPr>
-              <a:spcAft>
-                <a:spcPts val="400"/>
-              </a:spcAft>
-            </a:pPr>
-            <a:r>
-              <a:rPr sz="1400" b="0" i="0">
-                <a:solidFill>
-                  <a:srgbClr val="FFFFFF"/>
-                </a:solidFill>
-                <a:latin typeface="Calibri"/>
-              </a:rPr>
-              <a:t>  api --&gt;|"TCP 5432"| db</a:t>
-            </a:r>
-          </a:p>
-          <a:p>
-            <a:pPr>
-              <a:spcAft>
-                <a:spcPts val="400"/>
-              </a:spcAft>
-            </a:pPr>
-            <a:r>
-              <a:rPr sz="1400" b="0" i="0">
-                <a:solidFill>
-                  <a:srgbClr val="FFFFFF"/>
-                </a:solidFill>
-                <a:latin typeface="Calibri"/>
-              </a:rPr>
-              <a:t>  api --&gt;|"HTTPS 443 - frontera de confianza"| pagos["Pasarela de pagos externa"]</a:t>
-            </a:r>
-          </a:p>
-        </p:txBody>
-      </p:sp>
-      <p:sp>
-        <p:nvSpPr>
-          <p:cNvPr id="9" name="TextBox 8"/>
-          <p:cNvSpPr txBox="1"/>
-          <p:nvPr/>
-        </p:nvSpPr>
-        <p:spPr>
-          <a:xfrm>
-            <a:off x="457200" y="6080760"/>
-            <a:ext cx="11277295" cy="320040"/>
-          </a:xfrm>
-          <a:prstGeom prst="rect">
-            <a:avLst/>
-          </a:prstGeom>
-          <a:noFill/>
-        </p:spPr>
-        <p:txBody>
-          <a:bodyPr wrap="square">
-            <a:spAutoFit/>
-          </a:bodyPr>
-          <a:lstStyle/>
-          <a:p>
-            <a:pPr algn="ctr"/>
-            <a:r>
-              <a:rPr sz="1200" b="0" i="1">
-                <a:solidFill>
-                  <a:srgbClr val="666666"/>
-                </a:solidFill>
-                <a:latin typeface="Calibri"/>
-              </a:rPr>
-              <a:t>Una «subgraph» por zona, el puerto en cada caja y la base con «[( )]». La flecha al externo ES la frontera de confianza. Nombres: los mismos del C4 Containers de la Clase 4.</a:t>
-            </a:r>
-          </a:p>
-        </p:txBody>
-      </p:sp>
-      <p:sp>
-        <p:nvSpPr>
-          <p:cNvPr id="10" name="TextBox 9"/>
+              <a:rPr sz="2000" b="0" i="0">
+                <a:solidFill>
+                  <a:srgbClr val="333333"/>
+                </a:solidFill>
+                <a:latin typeface="Calibri"/>
+              </a:rPr>
+              <a:t>–   Si no se dibuja, se corrige ahi mismo; nadie califica un codigo que no dibuja.</a:t>
+            </a:r>
+          </a:p>
+        </p:txBody>
+      </p:sp>
+      <p:sp>
+        <p:nvSpPr>
+          <p:cNvPr id="6" name="TextBox 5"/>
           <p:cNvSpPr txBox="1"/>
           <p:nvPr/>
         </p:nvSpPr>
@@ -9664,7 +8617,7 @@
         <p:spPr>
           <a:xfrm>
             <a:off x="0" y="0"/>
-            <a:ext cx="12191695" cy="1170432"/>
+            <a:ext cx="12191695" cy="960120"/>
           </a:xfrm>
           <a:prstGeom prst="rect">
             <a:avLst/>
@@ -9706,7 +8659,7 @@
         </p:nvSpPr>
         <p:spPr>
           <a:xfrm>
-            <a:off x="0" y="1170432"/>
+            <a:off x="0" y="960120"/>
             <a:ext cx="12191695" cy="41148"/>
           </a:xfrm>
           <a:prstGeom prst="rect">
@@ -9750,7 +8703,7 @@
         <p:spPr>
           <a:xfrm>
             <a:off x="457200" y="164592"/>
-            <a:ext cx="11277295" cy="384048"/>
+            <a:ext cx="11277295" cy="502920"/>
           </a:xfrm>
           <a:prstGeom prst="rect">
             <a:avLst/>
@@ -9770,7 +8723,7 @@
                 </a:solidFill>
                 <a:latin typeface="Calibri"/>
               </a:rPr>
-              <a:t>Herramientas de hoy</a:t>
+              <a:t>Preguntas frecuentes del grupo (1/2)</a:t>
             </a:r>
           </a:p>
         </p:txBody>
@@ -9783,8 +8736,8 @@
         </p:nvSpPr>
         <p:spPr>
           <a:xfrm>
-            <a:off x="457200" y="566928"/>
-            <a:ext cx="11277295" cy="411480"/>
+            <a:off x="457200" y="1170432"/>
+            <a:ext cx="11277295" cy="5230368"/>
           </a:xfrm>
           <a:prstGeom prst="rect">
             <a:avLst/>
@@ -9797,837 +8750,74 @@
           </a:bodyPr>
           <a:lstStyle/>
           <a:p>
-            <a:r>
-              <a:rPr sz="1400" b="0" i="0">
-                <a:solidFill>
-                  <a:srgbClr val="B8D8EE"/>
-                </a:solidFill>
-                <a:latin typeface="Calibri"/>
-              </a:rPr>
-              <a:t>Gratis · navegador o free tier · sin cuenta de pago</a:t>
-            </a:r>
-          </a:p>
-        </p:txBody>
-      </p:sp>
-      <p:sp>
-        <p:nvSpPr>
-          <p:cNvPr id="6" name="Rounded Rectangle 5"/>
-          <p:cNvSpPr/>
-          <p:nvPr/>
-        </p:nvSpPr>
-        <p:spPr>
-          <a:xfrm>
-            <a:off x="457200" y="1591056"/>
-            <a:ext cx="3624986" cy="2299716"/>
-          </a:xfrm>
-          <a:prstGeom prst="roundRect">
-            <a:avLst>
-              <a:gd name="adj" fmla="val 12000"/>
-            </a:avLst>
-          </a:prstGeom>
-          <a:solidFill>
-            <a:srgbClr val="F2F2F2"/>
-          </a:solidFill>
-          <a:ln>
-            <a:noFill/>
-          </a:ln>
-        </p:spPr>
-        <p:style>
-          <a:lnRef idx="1">
-            <a:schemeClr val="accent1"/>
-          </a:lnRef>
-          <a:fillRef idx="3">
-            <a:schemeClr val="accent1"/>
-          </a:fillRef>
-          <a:effectRef idx="2">
-            <a:schemeClr val="accent1"/>
-          </a:effectRef>
-          <a:fontRef idx="minor">
-            <a:schemeClr val="lt1"/>
-          </a:fontRef>
-        </p:style>
-        <p:txBody>
-          <a:bodyPr rtlCol="0" anchor="ctr"/>
-          <a:lstStyle/>
-          <a:p>
-            <a:pPr algn="ctr"/>
-          </a:p>
-        </p:txBody>
-      </p:sp>
-      <p:sp>
-        <p:nvSpPr>
-          <p:cNvPr id="7" name="Rectangle 6"/>
-          <p:cNvSpPr/>
-          <p:nvPr/>
-        </p:nvSpPr>
-        <p:spPr>
-          <a:xfrm>
-            <a:off x="457200" y="1591056"/>
-            <a:ext cx="3624986" cy="64008"/>
-          </a:xfrm>
-          <a:prstGeom prst="rect">
-            <a:avLst/>
-          </a:prstGeom>
-          <a:solidFill>
-            <a:srgbClr val="095292"/>
-          </a:solidFill>
-          <a:ln>
-            <a:noFill/>
-          </a:ln>
-        </p:spPr>
-        <p:style>
-          <a:lnRef idx="1">
-            <a:schemeClr val="accent1"/>
-          </a:lnRef>
-          <a:fillRef idx="3">
-            <a:schemeClr val="accent1"/>
-          </a:fillRef>
-          <a:effectRef idx="2">
-            <a:schemeClr val="accent1"/>
-          </a:effectRef>
-          <a:fontRef idx="minor">
-            <a:schemeClr val="lt1"/>
-          </a:fontRef>
-        </p:style>
-        <p:txBody>
-          <a:bodyPr rtlCol="0" anchor="ctr"/>
-          <a:lstStyle/>
-          <a:p>
-            <a:pPr algn="ctr"/>
-          </a:p>
-        </p:txBody>
-      </p:sp>
-      <p:sp>
-        <p:nvSpPr>
-          <p:cNvPr id="8" name="Rectangle 7"/>
-          <p:cNvSpPr/>
-          <p:nvPr/>
-        </p:nvSpPr>
-        <p:spPr>
-          <a:xfrm>
-            <a:off x="457200" y="1655064"/>
-            <a:ext cx="3624986" cy="27432"/>
-          </a:xfrm>
-          <a:prstGeom prst="rect">
-            <a:avLst/>
-          </a:prstGeom>
-          <a:solidFill>
-            <a:srgbClr val="FFD000"/>
-          </a:solidFill>
-          <a:ln>
-            <a:noFill/>
-          </a:ln>
-        </p:spPr>
-        <p:style>
-          <a:lnRef idx="1">
-            <a:schemeClr val="accent1"/>
-          </a:lnRef>
-          <a:fillRef idx="3">
-            <a:schemeClr val="accent1"/>
-          </a:fillRef>
-          <a:effectRef idx="2">
-            <a:schemeClr val="accent1"/>
-          </a:effectRef>
-          <a:fontRef idx="minor">
-            <a:schemeClr val="lt1"/>
-          </a:fontRef>
-        </p:style>
-        <p:txBody>
-          <a:bodyPr rtlCol="0" anchor="ctr"/>
-          <a:lstStyle/>
-          <a:p>
-            <a:pPr algn="ctr"/>
-          </a:p>
-        </p:txBody>
-      </p:sp>
-      <p:pic>
-        <p:nvPicPr>
-          <p:cNvPr id="9" name="Picture 8" descr="drawio.png"/>
-          <p:cNvPicPr>
-            <a:picLocks noChangeAspect="1"/>
-          </p:cNvPicPr>
-          <p:nvPr/>
-        </p:nvPicPr>
-        <p:blipFill>
-          <a:blip r:embed="rId2"/>
-          <a:stretch>
-            <a:fillRect/>
-          </a:stretch>
-        </p:blipFill>
-        <p:spPr>
-          <a:xfrm>
-            <a:off x="1659331" y="1847087"/>
-            <a:ext cx="1220724" cy="1220724"/>
-          </a:xfrm>
-          <a:prstGeom prst="rect">
-            <a:avLst/>
-          </a:prstGeom>
-        </p:spPr>
-      </p:pic>
-      <p:sp>
-        <p:nvSpPr>
-          <p:cNvPr id="10" name="TextBox 9"/>
-          <p:cNvSpPr txBox="1"/>
-          <p:nvPr/>
-        </p:nvSpPr>
-        <p:spPr>
-          <a:xfrm>
-            <a:off x="530352" y="3159251"/>
-            <a:ext cx="3478682" cy="621792"/>
-          </a:xfrm>
-          <a:prstGeom prst="rect">
-            <a:avLst/>
-          </a:prstGeom>
-          <a:noFill/>
-        </p:spPr>
-        <p:txBody>
-          <a:bodyPr wrap="square" anchor="t"/>
-          <a:lstStyle/>
-          <a:p>
-            <a:pPr algn="ctr"/>
-            <a:r>
-              <a:rPr sz="1300" b="1" i="0">
-                <a:solidFill>
-                  <a:srgbClr val="095292"/>
-                </a:solidFill>
-                <a:latin typeface="Calibri"/>
-              </a:rPr>
-              <a:t>draw.io</a:t>
-            </a:r>
-          </a:p>
-          <a:p>
-            <a:pPr algn="ctr">
-              <a:spcBef>
-                <a:spcPts val="200"/>
-              </a:spcBef>
+            <a:pPr>
+              <a:spcAft>
+                <a:spcPts val="800"/>
+              </a:spcAft>
             </a:pPr>
             <a:r>
-              <a:rPr sz="1000" b="0" i="0">
-                <a:solidFill>
-                  <a:srgbClr val="666666"/>
-                </a:solidFill>
-                <a:latin typeface="Calibri"/>
-              </a:rPr>
-              <a:t>Deployment</a:t>
-            </a:r>
-          </a:p>
-        </p:txBody>
-      </p:sp>
-      <p:sp>
-        <p:nvSpPr>
-          <p:cNvPr id="11" name="Rounded Rectangle 10"/>
-          <p:cNvSpPr/>
-          <p:nvPr/>
-        </p:nvSpPr>
-        <p:spPr>
-          <a:xfrm>
-            <a:off x="4283354" y="1591056"/>
-            <a:ext cx="3624986" cy="2299716"/>
-          </a:xfrm>
-          <a:prstGeom prst="roundRect">
-            <a:avLst>
-              <a:gd name="adj" fmla="val 12000"/>
-            </a:avLst>
-          </a:prstGeom>
-          <a:solidFill>
-            <a:srgbClr val="F2F2F2"/>
-          </a:solidFill>
-          <a:ln>
-            <a:noFill/>
-          </a:ln>
-        </p:spPr>
-        <p:style>
-          <a:lnRef idx="1">
-            <a:schemeClr val="accent1"/>
-          </a:lnRef>
-          <a:fillRef idx="3">
-            <a:schemeClr val="accent1"/>
-          </a:fillRef>
-          <a:effectRef idx="2">
-            <a:schemeClr val="accent1"/>
-          </a:effectRef>
-          <a:fontRef idx="minor">
-            <a:schemeClr val="lt1"/>
-          </a:fontRef>
-        </p:style>
-        <p:txBody>
-          <a:bodyPr rtlCol="0" anchor="ctr"/>
-          <a:lstStyle/>
-          <a:p>
-            <a:pPr algn="ctr"/>
-          </a:p>
-        </p:txBody>
-      </p:sp>
-      <p:sp>
-        <p:nvSpPr>
-          <p:cNvPr id="12" name="Rectangle 11"/>
-          <p:cNvSpPr/>
-          <p:nvPr/>
-        </p:nvSpPr>
-        <p:spPr>
-          <a:xfrm>
-            <a:off x="4283354" y="1591056"/>
-            <a:ext cx="3624986" cy="64008"/>
-          </a:xfrm>
-          <a:prstGeom prst="rect">
-            <a:avLst/>
-          </a:prstGeom>
-          <a:solidFill>
-            <a:srgbClr val="095292"/>
-          </a:solidFill>
-          <a:ln>
-            <a:noFill/>
-          </a:ln>
-        </p:spPr>
-        <p:style>
-          <a:lnRef idx="1">
-            <a:schemeClr val="accent1"/>
-          </a:lnRef>
-          <a:fillRef idx="3">
-            <a:schemeClr val="accent1"/>
-          </a:fillRef>
-          <a:effectRef idx="2">
-            <a:schemeClr val="accent1"/>
-          </a:effectRef>
-          <a:fontRef idx="minor">
-            <a:schemeClr val="lt1"/>
-          </a:fontRef>
-        </p:style>
-        <p:txBody>
-          <a:bodyPr rtlCol="0" anchor="ctr"/>
-          <a:lstStyle/>
-          <a:p>
-            <a:pPr algn="ctr"/>
-          </a:p>
-        </p:txBody>
-      </p:sp>
-      <p:sp>
-        <p:nvSpPr>
-          <p:cNvPr id="13" name="Rectangle 12"/>
-          <p:cNvSpPr/>
-          <p:nvPr/>
-        </p:nvSpPr>
-        <p:spPr>
-          <a:xfrm>
-            <a:off x="4283354" y="1655064"/>
-            <a:ext cx="3624986" cy="27432"/>
-          </a:xfrm>
-          <a:prstGeom prst="rect">
-            <a:avLst/>
-          </a:prstGeom>
-          <a:solidFill>
-            <a:srgbClr val="FFD000"/>
-          </a:solidFill>
-          <a:ln>
-            <a:noFill/>
-          </a:ln>
-        </p:spPr>
-        <p:style>
-          <a:lnRef idx="1">
-            <a:schemeClr val="accent1"/>
-          </a:lnRef>
-          <a:fillRef idx="3">
-            <a:schemeClr val="accent1"/>
-          </a:fillRef>
-          <a:effectRef idx="2">
-            <a:schemeClr val="accent1"/>
-          </a:effectRef>
-          <a:fontRef idx="minor">
-            <a:schemeClr val="lt1"/>
-          </a:fontRef>
-        </p:style>
-        <p:txBody>
-          <a:bodyPr rtlCol="0" anchor="ctr"/>
-          <a:lstStyle/>
-          <a:p>
-            <a:pPr algn="ctr"/>
-          </a:p>
-        </p:txBody>
-      </p:sp>
-      <p:pic>
-        <p:nvPicPr>
-          <p:cNvPr id="14" name="Picture 13" descr="google_docs.png"/>
-          <p:cNvPicPr>
-            <a:picLocks noChangeAspect="1"/>
-          </p:cNvPicPr>
-          <p:nvPr/>
-        </p:nvPicPr>
-        <p:blipFill>
-          <a:blip r:embed="rId3"/>
-          <a:stretch>
-            <a:fillRect/>
-          </a:stretch>
-        </p:blipFill>
-        <p:spPr>
-          <a:xfrm>
-            <a:off x="5485485" y="1847087"/>
-            <a:ext cx="1220724" cy="1220724"/>
-          </a:xfrm>
-          <a:prstGeom prst="rect">
-            <a:avLst/>
-          </a:prstGeom>
-        </p:spPr>
-      </p:pic>
-      <p:sp>
-        <p:nvSpPr>
-          <p:cNvPr id="15" name="TextBox 14"/>
-          <p:cNvSpPr txBox="1"/>
-          <p:nvPr/>
-        </p:nvSpPr>
-        <p:spPr>
-          <a:xfrm>
-            <a:off x="4356506" y="3159251"/>
-            <a:ext cx="3478682" cy="621792"/>
-          </a:xfrm>
-          <a:prstGeom prst="rect">
-            <a:avLst/>
-          </a:prstGeom>
-          <a:noFill/>
-        </p:spPr>
-        <p:txBody>
-          <a:bodyPr wrap="square" anchor="t"/>
-          <a:lstStyle/>
-          <a:p>
-            <a:pPr algn="ctr"/>
-            <a:r>
-              <a:rPr sz="1300" b="1" i="0">
-                <a:solidFill>
-                  <a:srgbClr val="095292"/>
-                </a:solidFill>
-                <a:latin typeface="Calibri"/>
-              </a:rPr>
-              <a:t>Google Docs</a:t>
-            </a:r>
-          </a:p>
-          <a:p>
-            <a:pPr algn="ctr">
-              <a:spcBef>
-                <a:spcPts val="200"/>
-              </a:spcBef>
+              <a:rPr sz="2000" b="0" i="0">
+                <a:solidFill>
+                  <a:srgbClr val="333333"/>
+                </a:solidFill>
+                <a:latin typeface="Calibri"/>
+              </a:rPr>
+              <a:t>–   «Si la base de datos es privada, como se conecta la API?» Privado significa inalcanzable desde internet</a:t>
+            </a:r>
+          </a:p>
+          <a:p>
+            <a:pPr>
+              <a:spcAft>
+                <a:spcPts val="800"/>
+              </a:spcAft>
             </a:pPr>
             <a:r>
-              <a:rPr sz="1000" b="0" i="0">
-                <a:solidFill>
-                  <a:srgbClr val="666666"/>
-                </a:solidFill>
-                <a:latin typeface="Calibri"/>
-              </a:rPr>
-              <a:t>Informe PI</a:t>
-            </a:r>
-          </a:p>
-        </p:txBody>
-      </p:sp>
-      <p:sp>
-        <p:nvSpPr>
-          <p:cNvPr id="16" name="Rounded Rectangle 15"/>
-          <p:cNvSpPr/>
-          <p:nvPr/>
-        </p:nvSpPr>
-        <p:spPr>
-          <a:xfrm>
-            <a:off x="8109508" y="1591056"/>
-            <a:ext cx="3624986" cy="2299716"/>
-          </a:xfrm>
-          <a:prstGeom prst="roundRect">
-            <a:avLst>
-              <a:gd name="adj" fmla="val 12000"/>
-            </a:avLst>
-          </a:prstGeom>
-          <a:solidFill>
-            <a:srgbClr val="F2F2F2"/>
-          </a:solidFill>
-          <a:ln>
-            <a:noFill/>
-          </a:ln>
-        </p:spPr>
-        <p:style>
-          <a:lnRef idx="1">
-            <a:schemeClr val="accent1"/>
-          </a:lnRef>
-          <a:fillRef idx="3">
-            <a:schemeClr val="accent1"/>
-          </a:fillRef>
-          <a:effectRef idx="2">
-            <a:schemeClr val="accent1"/>
-          </a:effectRef>
-          <a:fontRef idx="minor">
-            <a:schemeClr val="lt1"/>
-          </a:fontRef>
-        </p:style>
-        <p:txBody>
-          <a:bodyPr rtlCol="0" anchor="ctr"/>
-          <a:lstStyle/>
-          <a:p>
-            <a:pPr algn="ctr"/>
-          </a:p>
-        </p:txBody>
-      </p:sp>
-      <p:sp>
-        <p:nvSpPr>
-          <p:cNvPr id="17" name="Rectangle 16"/>
-          <p:cNvSpPr/>
-          <p:nvPr/>
-        </p:nvSpPr>
-        <p:spPr>
-          <a:xfrm>
-            <a:off x="8109508" y="1591056"/>
-            <a:ext cx="3624986" cy="64008"/>
-          </a:xfrm>
-          <a:prstGeom prst="rect">
-            <a:avLst/>
-          </a:prstGeom>
-          <a:solidFill>
-            <a:srgbClr val="095292"/>
-          </a:solidFill>
-          <a:ln>
-            <a:noFill/>
-          </a:ln>
-        </p:spPr>
-        <p:style>
-          <a:lnRef idx="1">
-            <a:schemeClr val="accent1"/>
-          </a:lnRef>
-          <a:fillRef idx="3">
-            <a:schemeClr val="accent1"/>
-          </a:fillRef>
-          <a:effectRef idx="2">
-            <a:schemeClr val="accent1"/>
-          </a:effectRef>
-          <a:fontRef idx="minor">
-            <a:schemeClr val="lt1"/>
-          </a:fontRef>
-        </p:style>
-        <p:txBody>
-          <a:bodyPr rtlCol="0" anchor="ctr"/>
-          <a:lstStyle/>
-          <a:p>
-            <a:pPr algn="ctr"/>
-          </a:p>
-        </p:txBody>
-      </p:sp>
-      <p:sp>
-        <p:nvSpPr>
-          <p:cNvPr id="18" name="Rectangle 17"/>
-          <p:cNvSpPr/>
-          <p:nvPr/>
-        </p:nvSpPr>
-        <p:spPr>
-          <a:xfrm>
-            <a:off x="8109508" y="1655064"/>
-            <a:ext cx="3624986" cy="27432"/>
-          </a:xfrm>
-          <a:prstGeom prst="rect">
-            <a:avLst/>
-          </a:prstGeom>
-          <a:solidFill>
-            <a:srgbClr val="FFD000"/>
-          </a:solidFill>
-          <a:ln>
-            <a:noFill/>
-          </a:ln>
-        </p:spPr>
-        <p:style>
-          <a:lnRef idx="1">
-            <a:schemeClr val="accent1"/>
-          </a:lnRef>
-          <a:fillRef idx="3">
-            <a:schemeClr val="accent1"/>
-          </a:fillRef>
-          <a:effectRef idx="2">
-            <a:schemeClr val="accent1"/>
-          </a:effectRef>
-          <a:fontRef idx="minor">
-            <a:schemeClr val="lt1"/>
-          </a:fontRef>
-        </p:style>
-        <p:txBody>
-          <a:bodyPr rtlCol="0" anchor="ctr"/>
-          <a:lstStyle/>
-          <a:p>
-            <a:pPr algn="ctr"/>
-          </a:p>
-        </p:txBody>
-      </p:sp>
-      <p:pic>
-        <p:nvPicPr>
-          <p:cNvPr id="19" name="Picture 18" descr="mermaid.png"/>
-          <p:cNvPicPr>
-            <a:picLocks noChangeAspect="1"/>
-          </p:cNvPicPr>
-          <p:nvPr/>
-        </p:nvPicPr>
-        <p:blipFill>
-          <a:blip r:embed="rId4"/>
-          <a:stretch>
-            <a:fillRect/>
-          </a:stretch>
-        </p:blipFill>
-        <p:spPr>
-          <a:xfrm>
-            <a:off x="9311640" y="1847087"/>
-            <a:ext cx="1220724" cy="1220724"/>
-          </a:xfrm>
-          <a:prstGeom prst="rect">
-            <a:avLst/>
-          </a:prstGeom>
-        </p:spPr>
-      </p:pic>
-      <p:sp>
-        <p:nvSpPr>
-          <p:cNvPr id="20" name="TextBox 19"/>
-          <p:cNvSpPr txBox="1"/>
-          <p:nvPr/>
-        </p:nvSpPr>
-        <p:spPr>
-          <a:xfrm>
-            <a:off x="8182660" y="3159251"/>
-            <a:ext cx="3478682" cy="621792"/>
-          </a:xfrm>
-          <a:prstGeom prst="rect">
-            <a:avLst/>
-          </a:prstGeom>
-          <a:noFill/>
-        </p:spPr>
-        <p:txBody>
-          <a:bodyPr wrap="square" anchor="t"/>
-          <a:lstStyle/>
-          <a:p>
-            <a:pPr algn="ctr"/>
-            <a:r>
-              <a:rPr sz="1300" b="1" i="0">
-                <a:solidFill>
-                  <a:srgbClr val="095292"/>
-                </a:solidFill>
-                <a:latin typeface="Calibri"/>
-              </a:rPr>
-              <a:t>Mermaid</a:t>
-            </a:r>
-          </a:p>
-          <a:p>
-            <a:pPr algn="ctr">
-              <a:spcBef>
-                <a:spcPts val="200"/>
-              </a:spcBef>
+              <a:rPr sz="2000" b="0" i="0">
+                <a:solidFill>
+                  <a:srgbClr val="333333"/>
+                </a:solidFill>
+                <a:latin typeface="Calibri"/>
+              </a:rPr>
+              <a:t>–   No inalcanzable en absoluto: la API esta en la misma red y llega por el nombre interno y el puerto del motor; quien no puede llegar es el usuario final ni un atacante externo.</a:t>
+            </a:r>
+          </a:p>
+          <a:p>
+            <a:pPr>
+              <a:spcAft>
+                <a:spcPts val="800"/>
+              </a:spcAft>
             </a:pPr>
             <a:r>
-              <a:rPr sz="1000" b="0" i="0">
-                <a:solidFill>
-                  <a:srgbClr val="666666"/>
-                </a:solidFill>
-                <a:latin typeface="Calibri"/>
-              </a:rPr>
-              <a:t>Codigo del diagrama</a:t>
-            </a:r>
-          </a:p>
-        </p:txBody>
-      </p:sp>
-      <p:sp>
-        <p:nvSpPr>
-          <p:cNvPr id="21" name="Rounded Rectangle 20"/>
-          <p:cNvSpPr/>
-          <p:nvPr/>
-        </p:nvSpPr>
-        <p:spPr>
-          <a:xfrm>
-            <a:off x="4283354" y="4055364"/>
-            <a:ext cx="3624986" cy="2299716"/>
-          </a:xfrm>
-          <a:prstGeom prst="roundRect">
-            <a:avLst>
-              <a:gd name="adj" fmla="val 12000"/>
-            </a:avLst>
-          </a:prstGeom>
-          <a:solidFill>
-            <a:srgbClr val="F2F2F2"/>
-          </a:solidFill>
-          <a:ln>
-            <a:noFill/>
-          </a:ln>
-        </p:spPr>
-        <p:style>
-          <a:lnRef idx="1">
-            <a:schemeClr val="accent1"/>
-          </a:lnRef>
-          <a:fillRef idx="3">
-            <a:schemeClr val="accent1"/>
-          </a:fillRef>
-          <a:effectRef idx="2">
-            <a:schemeClr val="accent1"/>
-          </a:effectRef>
-          <a:fontRef idx="minor">
-            <a:schemeClr val="lt1"/>
-          </a:fontRef>
-        </p:style>
-        <p:txBody>
-          <a:bodyPr rtlCol="0" anchor="ctr"/>
-          <a:lstStyle/>
-          <a:p>
-            <a:pPr algn="ctr"/>
-          </a:p>
-        </p:txBody>
-      </p:sp>
-      <p:sp>
-        <p:nvSpPr>
-          <p:cNvPr id="22" name="Rectangle 21"/>
-          <p:cNvSpPr/>
-          <p:nvPr/>
-        </p:nvSpPr>
-        <p:spPr>
-          <a:xfrm>
-            <a:off x="4283354" y="4055364"/>
-            <a:ext cx="3624986" cy="64008"/>
-          </a:xfrm>
-          <a:prstGeom prst="rect">
-            <a:avLst/>
-          </a:prstGeom>
-          <a:solidFill>
-            <a:srgbClr val="095292"/>
-          </a:solidFill>
-          <a:ln>
-            <a:noFill/>
-          </a:ln>
-        </p:spPr>
-        <p:style>
-          <a:lnRef idx="1">
-            <a:schemeClr val="accent1"/>
-          </a:lnRef>
-          <a:fillRef idx="3">
-            <a:schemeClr val="accent1"/>
-          </a:fillRef>
-          <a:effectRef idx="2">
-            <a:schemeClr val="accent1"/>
-          </a:effectRef>
-          <a:fontRef idx="minor">
-            <a:schemeClr val="lt1"/>
-          </a:fontRef>
-        </p:style>
-        <p:txBody>
-          <a:bodyPr rtlCol="0" anchor="ctr"/>
-          <a:lstStyle/>
-          <a:p>
-            <a:pPr algn="ctr"/>
-          </a:p>
-        </p:txBody>
-      </p:sp>
-      <p:sp>
-        <p:nvSpPr>
-          <p:cNvPr id="23" name="Rectangle 22"/>
-          <p:cNvSpPr/>
-          <p:nvPr/>
-        </p:nvSpPr>
-        <p:spPr>
-          <a:xfrm>
-            <a:off x="4283354" y="4119372"/>
-            <a:ext cx="3624986" cy="27432"/>
-          </a:xfrm>
-          <a:prstGeom prst="rect">
-            <a:avLst/>
-          </a:prstGeom>
-          <a:solidFill>
-            <a:srgbClr val="FFD000"/>
-          </a:solidFill>
-          <a:ln>
-            <a:noFill/>
-          </a:ln>
-        </p:spPr>
-        <p:style>
-          <a:lnRef idx="1">
-            <a:schemeClr val="accent1"/>
-          </a:lnRef>
-          <a:fillRef idx="3">
-            <a:schemeClr val="accent1"/>
-          </a:fillRef>
-          <a:effectRef idx="2">
-            <a:schemeClr val="accent1"/>
-          </a:effectRef>
-          <a:fontRef idx="minor">
-            <a:schemeClr val="lt1"/>
-          </a:fontRef>
-        </p:style>
-        <p:txBody>
-          <a:bodyPr rtlCol="0" anchor="ctr"/>
-          <a:lstStyle/>
-          <a:p>
-            <a:pPr algn="ctr"/>
-          </a:p>
-        </p:txBody>
-      </p:sp>
-      <p:pic>
-        <p:nvPicPr>
-          <p:cNvPr id="24" name="Picture 23" descr="examlab.png"/>
-          <p:cNvPicPr>
-            <a:picLocks noChangeAspect="1"/>
-          </p:cNvPicPr>
-          <p:nvPr/>
-        </p:nvPicPr>
-        <p:blipFill>
-          <a:blip r:embed="rId5"/>
-          <a:stretch>
-            <a:fillRect/>
-          </a:stretch>
-        </p:blipFill>
-        <p:spPr>
-          <a:xfrm>
-            <a:off x="5485485" y="4311396"/>
-            <a:ext cx="1220724" cy="1220724"/>
-          </a:xfrm>
-          <a:prstGeom prst="rect">
-            <a:avLst/>
-          </a:prstGeom>
-        </p:spPr>
-      </p:pic>
-      <p:sp>
-        <p:nvSpPr>
-          <p:cNvPr id="25" name="TextBox 24"/>
-          <p:cNvSpPr txBox="1"/>
-          <p:nvPr/>
-        </p:nvSpPr>
-        <p:spPr>
-          <a:xfrm>
-            <a:off x="4356506" y="5623560"/>
-            <a:ext cx="3478682" cy="621792"/>
-          </a:xfrm>
-          <a:prstGeom prst="rect">
-            <a:avLst/>
-          </a:prstGeom>
-          <a:noFill/>
-        </p:spPr>
-        <p:txBody>
-          <a:bodyPr wrap="square" anchor="t"/>
-          <a:lstStyle/>
-          <a:p>
-            <a:pPr algn="ctr"/>
-            <a:r>
-              <a:rPr sz="1300" b="1" i="0">
-                <a:solidFill>
-                  <a:srgbClr val="095292"/>
-                </a:solidFill>
-                <a:latin typeface="Calibri"/>
-              </a:rPr>
-              <a:t>la plataforma del curso</a:t>
-            </a:r>
-          </a:p>
-          <a:p>
-            <a:pPr algn="ctr">
-              <a:spcBef>
-                <a:spcPts val="200"/>
-              </a:spcBef>
+              <a:rPr sz="2000" b="0" i="0">
+                <a:solidFill>
+                  <a:srgbClr val="333333"/>
+                </a:solidFill>
+                <a:latin typeface="Calibri"/>
+              </a:rPr>
+              <a:t>–   «Esto no esta mal por no ser una VPC real de un proveedor?» Lo que se evalua es el razonamiento sobre zonas, puertos y ubicacion de los datos, no la sintaxis de una marca; el curso usa herramientas gratis en navegador y no pide cuenta de pago ni tarjeta.</a:t>
+            </a:r>
+          </a:p>
+          <a:p>
+            <a:pPr>
+              <a:spcAft>
+                <a:spcPts val="800"/>
+              </a:spcAft>
             </a:pPr>
             <a:r>
-              <a:rPr sz="1000" b="0" i="0">
-                <a:solidFill>
-                  <a:srgbClr val="666666"/>
-                </a:solidFill>
-                <a:latin typeface="Calibri"/>
-              </a:rPr>
-              <a:t>Donde se entrega</a:t>
-            </a:r>
-          </a:p>
-        </p:txBody>
-      </p:sp>
-      <p:sp>
-        <p:nvSpPr>
-          <p:cNvPr id="26" name="TextBox 25"/>
+              <a:rPr sz="2000" b="0" i="0">
+                <a:solidFill>
+                  <a:srgbClr val="333333"/>
+                </a:solidFill>
+                <a:latin typeface="Calibri"/>
+              </a:rPr>
+              <a:t>–   Es mas: la rubrica DESCUENTA por nombrar subredes o servicios de un proveedor concreto, asi que escribir VPC, el nombre de una zona de disponibilidad o el de un servicio de marca resta en vez de sumar.</a:t>
+            </a:r>
+          </a:p>
+        </p:txBody>
+      </p:sp>
+      <p:sp>
+        <p:nvSpPr>
+          <p:cNvPr id="6" name="TextBox 5"/>
           <p:cNvSpPr txBox="1"/>
           <p:nvPr/>
         </p:nvSpPr>
@@ -10695,7 +8885,7 @@
         <p:spPr>
           <a:xfrm>
             <a:off x="0" y="0"/>
-            <a:ext cx="12191695" cy="1170432"/>
+            <a:ext cx="12191695" cy="960120"/>
           </a:xfrm>
           <a:prstGeom prst="rect">
             <a:avLst/>
@@ -10737,7 +8927,7 @@
         </p:nvSpPr>
         <p:spPr>
           <a:xfrm>
-            <a:off x="0" y="1170432"/>
+            <a:off x="0" y="960120"/>
             <a:ext cx="12191695" cy="41148"/>
           </a:xfrm>
           <a:prstGeom prst="rect">
@@ -10781,7 +8971,7 @@
         <p:spPr>
           <a:xfrm>
             <a:off x="457200" y="164592"/>
-            <a:ext cx="11277295" cy="384048"/>
+            <a:ext cx="11277295" cy="502920"/>
           </a:xfrm>
           <a:prstGeom prst="rect">
             <a:avLst/>
@@ -10801,7 +8991,7 @@
                 </a:solidFill>
                 <a:latin typeface="Calibri"/>
               </a:rPr>
-              <a:t>Del boceto a la plataforma del curso (diagrama)</a:t>
+              <a:t>Preguntas frecuentes del grupo (2/2)</a:t>
             </a:r>
           </a:p>
         </p:txBody>
@@ -10814,8 +9004,8 @@
         </p:nvSpPr>
         <p:spPr>
           <a:xfrm>
-            <a:off x="457200" y="566928"/>
-            <a:ext cx="11277295" cy="411480"/>
+            <a:off x="457200" y="1170432"/>
+            <a:ext cx="11277295" cy="5230368"/>
           </a:xfrm>
           <a:prstGeom prst="rect">
             <a:avLst/>
@@ -10828,705 +9018,90 @@
           </a:bodyPr>
           <a:lstStyle/>
           <a:p>
-            <a:r>
-              <a:rPr sz="1400" b="0" i="0">
-                <a:solidFill>
-                  <a:srgbClr val="B8D8EE"/>
-                </a:solidFill>
-                <a:latin typeface="Calibri"/>
-              </a:rPr>
-              <a:t>El diagrama se entrega como código Mermaid dentro de la plataforma del curso, no como imagen</a:t>
-            </a:r>
-          </a:p>
-        </p:txBody>
-      </p:sp>
-      <p:sp>
-        <p:nvSpPr>
-          <p:cNvPr id="6" name="Rounded Rectangle 5"/>
-          <p:cNvSpPr/>
-          <p:nvPr/>
-        </p:nvSpPr>
-        <p:spPr>
-          <a:xfrm>
-            <a:off x="457200" y="1659636"/>
-            <a:ext cx="11277295" cy="1051560"/>
-          </a:xfrm>
-          <a:prstGeom prst="roundRect">
-            <a:avLst>
-              <a:gd name="adj" fmla="val 12000"/>
-            </a:avLst>
-          </a:prstGeom>
-          <a:solidFill>
-            <a:srgbClr val="F2F2F2"/>
-          </a:solidFill>
-          <a:ln>
-            <a:noFill/>
-          </a:ln>
-        </p:spPr>
-        <p:style>
-          <a:lnRef idx="1">
-            <a:schemeClr val="accent1"/>
-          </a:lnRef>
-          <a:fillRef idx="3">
-            <a:schemeClr val="accent1"/>
-          </a:fillRef>
-          <a:effectRef idx="2">
-            <a:schemeClr val="accent1"/>
-          </a:effectRef>
-          <a:fontRef idx="minor">
-            <a:schemeClr val="lt1"/>
-          </a:fontRef>
-        </p:style>
-        <p:txBody>
-          <a:bodyPr rtlCol="0" anchor="ctr"/>
-          <a:lstStyle/>
-          <a:p>
-            <a:pPr algn="ctr"/>
-          </a:p>
-        </p:txBody>
-      </p:sp>
-      <p:sp>
-        <p:nvSpPr>
-          <p:cNvPr id="7" name="Rounded Rectangle 6"/>
-          <p:cNvSpPr/>
-          <p:nvPr/>
-        </p:nvSpPr>
-        <p:spPr>
-          <a:xfrm>
-            <a:off x="594360" y="1965960"/>
-            <a:ext cx="438912" cy="438912"/>
-          </a:xfrm>
-          <a:prstGeom prst="roundRect">
-            <a:avLst>
-              <a:gd name="adj" fmla="val 12000"/>
-            </a:avLst>
-          </a:prstGeom>
-          <a:solidFill>
-            <a:srgbClr val="095292"/>
-          </a:solidFill>
-          <a:ln>
-            <a:noFill/>
-          </a:ln>
-        </p:spPr>
-        <p:style>
-          <a:lnRef idx="1">
-            <a:schemeClr val="accent1"/>
-          </a:lnRef>
-          <a:fillRef idx="3">
-            <a:schemeClr val="accent1"/>
-          </a:fillRef>
-          <a:effectRef idx="2">
-            <a:schemeClr val="accent1"/>
-          </a:effectRef>
-          <a:fontRef idx="minor">
-            <a:schemeClr val="lt1"/>
-          </a:fontRef>
-        </p:style>
-        <p:txBody>
-          <a:bodyPr rtlCol="0" anchor="ctr"/>
-          <a:lstStyle/>
-          <a:p>
-            <a:pPr algn="ctr"/>
-          </a:p>
-        </p:txBody>
-      </p:sp>
-      <p:sp>
-        <p:nvSpPr>
-          <p:cNvPr id="8" name="TextBox 7"/>
-          <p:cNvSpPr txBox="1"/>
-          <p:nvPr/>
-        </p:nvSpPr>
-        <p:spPr>
-          <a:xfrm>
-            <a:off x="594360" y="1965960"/>
-            <a:ext cx="438912" cy="438912"/>
-          </a:xfrm>
-          <a:prstGeom prst="rect">
-            <a:avLst/>
-          </a:prstGeom>
-          <a:noFill/>
-        </p:spPr>
-        <p:txBody>
-          <a:bodyPr wrap="square" anchor="ctr"/>
-          <a:lstStyle/>
-          <a:p>
-            <a:pPr algn="ctr"/>
-            <a:r>
-              <a:rPr sz="1600" b="1" i="0">
-                <a:solidFill>
-                  <a:srgbClr val="FFFFFF"/>
-                </a:solidFill>
-                <a:latin typeface="Calibri"/>
-              </a:rPr>
-              <a:t>1</a:t>
-            </a:r>
-          </a:p>
-        </p:txBody>
-      </p:sp>
-      <p:sp>
-        <p:nvSpPr>
-          <p:cNvPr id="9" name="TextBox 8"/>
-          <p:cNvSpPr txBox="1"/>
-          <p:nvPr/>
-        </p:nvSpPr>
-        <p:spPr>
-          <a:xfrm>
-            <a:off x="1188720" y="1751076"/>
-            <a:ext cx="10271455" cy="886968"/>
-          </a:xfrm>
-          <a:prstGeom prst="rect">
-            <a:avLst/>
-          </a:prstGeom>
-          <a:noFill/>
-        </p:spPr>
-        <p:txBody>
-          <a:bodyPr wrap="square" anchor="ctr"/>
-          <a:lstStyle/>
-          <a:p>
-            <a:r>
-              <a:rPr sz="1500" b="1" i="0">
-                <a:solidFill>
-                  <a:srgbClr val="095292"/>
-                </a:solidFill>
-                <a:latin typeface="Calibri"/>
-              </a:rPr>
-              <a:t>Disena visual</a:t>
-            </a:r>
-          </a:p>
-          <a:p>
             <a:pPr>
-              <a:spcBef>
-                <a:spcPts val="200"/>
-              </a:spcBef>
+              <a:spcAft>
+                <a:spcPts val="800"/>
+              </a:spcAft>
             </a:pPr>
             <a:r>
-              <a:rPr sz="1300" b="0" i="0">
-                <a:solidFill>
-                  <a:srgbClr val="333333"/>
-                </a:solidFill>
-                <a:latin typeface="Calibri"/>
-              </a:rPr>
-              <a:t>Dibuja el diagrama como quieras en Excalidraw o draw.io: es mas rapido arrastrar cajas que escribir codigo, y ahi es donde piensas el modelo.</a:t>
-            </a:r>
-          </a:p>
-        </p:txBody>
-      </p:sp>
-      <p:sp>
-        <p:nvSpPr>
-          <p:cNvPr id="10" name="Rounded Rectangle 9"/>
-          <p:cNvSpPr/>
-          <p:nvPr/>
-        </p:nvSpPr>
-        <p:spPr>
-          <a:xfrm>
-            <a:off x="457200" y="2802636"/>
-            <a:ext cx="11277295" cy="1051560"/>
-          </a:xfrm>
-          <a:prstGeom prst="roundRect">
-            <a:avLst>
-              <a:gd name="adj" fmla="val 12000"/>
-            </a:avLst>
-          </a:prstGeom>
-          <a:solidFill>
-            <a:srgbClr val="E8F4FA"/>
-          </a:solidFill>
-          <a:ln>
-            <a:noFill/>
-          </a:ln>
-        </p:spPr>
-        <p:style>
-          <a:lnRef idx="1">
-            <a:schemeClr val="accent1"/>
-          </a:lnRef>
-          <a:fillRef idx="3">
-            <a:schemeClr val="accent1"/>
-          </a:fillRef>
-          <a:effectRef idx="2">
-            <a:schemeClr val="accent1"/>
-          </a:effectRef>
-          <a:fontRef idx="minor">
-            <a:schemeClr val="lt1"/>
-          </a:fontRef>
-        </p:style>
-        <p:txBody>
-          <a:bodyPr rtlCol="0" anchor="ctr"/>
-          <a:lstStyle/>
-          <a:p>
-            <a:pPr algn="ctr"/>
-          </a:p>
-        </p:txBody>
-      </p:sp>
-      <p:sp>
-        <p:nvSpPr>
-          <p:cNvPr id="11" name="Rounded Rectangle 10"/>
-          <p:cNvSpPr/>
-          <p:nvPr/>
-        </p:nvSpPr>
-        <p:spPr>
-          <a:xfrm>
-            <a:off x="594360" y="3108960"/>
-            <a:ext cx="438912" cy="438912"/>
-          </a:xfrm>
-          <a:prstGeom prst="roundRect">
-            <a:avLst>
-              <a:gd name="adj" fmla="val 12000"/>
-            </a:avLst>
-          </a:prstGeom>
-          <a:solidFill>
-            <a:srgbClr val="095292"/>
-          </a:solidFill>
-          <a:ln>
-            <a:noFill/>
-          </a:ln>
-        </p:spPr>
-        <p:style>
-          <a:lnRef idx="1">
-            <a:schemeClr val="accent1"/>
-          </a:lnRef>
-          <a:fillRef idx="3">
-            <a:schemeClr val="accent1"/>
-          </a:fillRef>
-          <a:effectRef idx="2">
-            <a:schemeClr val="accent1"/>
-          </a:effectRef>
-          <a:fontRef idx="minor">
-            <a:schemeClr val="lt1"/>
-          </a:fontRef>
-        </p:style>
-        <p:txBody>
-          <a:bodyPr rtlCol="0" anchor="ctr"/>
-          <a:lstStyle/>
-          <a:p>
-            <a:pPr algn="ctr"/>
-          </a:p>
-        </p:txBody>
-      </p:sp>
-      <p:sp>
-        <p:nvSpPr>
-          <p:cNvPr id="12" name="TextBox 11"/>
-          <p:cNvSpPr txBox="1"/>
-          <p:nvPr/>
-        </p:nvSpPr>
-        <p:spPr>
-          <a:xfrm>
-            <a:off x="594360" y="3108960"/>
-            <a:ext cx="438912" cy="438912"/>
-          </a:xfrm>
-          <a:prstGeom prst="rect">
-            <a:avLst/>
-          </a:prstGeom>
-          <a:noFill/>
-        </p:spPr>
-        <p:txBody>
-          <a:bodyPr wrap="square" anchor="ctr"/>
-          <a:lstStyle/>
-          <a:p>
-            <a:pPr algn="ctr"/>
-            <a:r>
-              <a:rPr sz="1600" b="1" i="0">
-                <a:solidFill>
-                  <a:srgbClr val="FFFFFF"/>
-                </a:solidFill>
-                <a:latin typeface="Calibri"/>
-              </a:rPr>
-              <a:t>2</a:t>
-            </a:r>
-          </a:p>
-        </p:txBody>
-      </p:sp>
-      <p:sp>
-        <p:nvSpPr>
-          <p:cNvPr id="13" name="TextBox 12"/>
-          <p:cNvSpPr txBox="1"/>
-          <p:nvPr/>
-        </p:nvSpPr>
-        <p:spPr>
-          <a:xfrm>
-            <a:off x="1188720" y="2894076"/>
-            <a:ext cx="10271455" cy="886968"/>
-          </a:xfrm>
-          <a:prstGeom prst="rect">
-            <a:avLst/>
-          </a:prstGeom>
-          <a:noFill/>
-        </p:spPr>
-        <p:txBody>
-          <a:bodyPr wrap="square" anchor="ctr"/>
-          <a:lstStyle/>
-          <a:p>
-            <a:r>
-              <a:rPr sz="1500" b="1" i="0">
-                <a:solidFill>
-                  <a:srgbClr val="095292"/>
-                </a:solidFill>
-                <a:latin typeface="Calibri"/>
-              </a:rPr>
-              <a:t>Traduce con IA</a:t>
+              <a:rPr sz="2000" b="0" i="0">
+                <a:solidFill>
+                  <a:srgbClr val="333333"/>
+                </a:solidFill>
+                <a:latin typeface="Calibri"/>
+              </a:rPr>
+              <a:t>–   «Puedo subir mi imagen del diagrama en vez del codigo Mermaid?» No para la pregunta 4: lo que se califica es el diagrama renderizado dentro de la plataforma.</a:t>
             </a:r>
           </a:p>
           <a:p>
             <a:pPr>
-              <a:spcBef>
-                <a:spcPts val="200"/>
-              </a:spcBef>
+              <a:spcAft>
+                <a:spcPts val="800"/>
+              </a:spcAft>
             </a:pPr>
             <a:r>
-              <a:rPr sz="1300" b="0" i="0">
-                <a:solidFill>
-                  <a:srgbClr val="333333"/>
-                </a:solidFill>
-                <a:latin typeface="Calibri"/>
-              </a:rPr>
-              <a:t>Copia o describe tu boceto a una IA y pidele el codigo Mermaid: «convierte este diagrama a Mermaid usando flowchart». Revisa el resultado: la IA acierta la sintaxis, no tu modelo.</a:t>
-            </a:r>
-          </a:p>
-        </p:txBody>
-      </p:sp>
-      <p:sp>
-        <p:nvSpPr>
-          <p:cNvPr id="14" name="Rounded Rectangle 13"/>
-          <p:cNvSpPr/>
-          <p:nvPr/>
-        </p:nvSpPr>
-        <p:spPr>
-          <a:xfrm>
-            <a:off x="457200" y="3945636"/>
-            <a:ext cx="11277295" cy="1051560"/>
-          </a:xfrm>
-          <a:prstGeom prst="roundRect">
-            <a:avLst>
-              <a:gd name="adj" fmla="val 12000"/>
-            </a:avLst>
-          </a:prstGeom>
-          <a:solidFill>
-            <a:srgbClr val="F2F2F2"/>
-          </a:solidFill>
-          <a:ln>
-            <a:noFill/>
-          </a:ln>
-        </p:spPr>
-        <p:style>
-          <a:lnRef idx="1">
-            <a:schemeClr val="accent1"/>
-          </a:lnRef>
-          <a:fillRef idx="3">
-            <a:schemeClr val="accent1"/>
-          </a:fillRef>
-          <a:effectRef idx="2">
-            <a:schemeClr val="accent1"/>
-          </a:effectRef>
-          <a:fontRef idx="minor">
-            <a:schemeClr val="lt1"/>
-          </a:fontRef>
-        </p:style>
-        <p:txBody>
-          <a:bodyPr rtlCol="0" anchor="ctr"/>
-          <a:lstStyle/>
-          <a:p>
-            <a:pPr algn="ctr"/>
-          </a:p>
-        </p:txBody>
-      </p:sp>
-      <p:sp>
-        <p:nvSpPr>
-          <p:cNvPr id="15" name="Rounded Rectangle 14"/>
-          <p:cNvSpPr/>
-          <p:nvPr/>
-        </p:nvSpPr>
-        <p:spPr>
-          <a:xfrm>
-            <a:off x="594360" y="4251960"/>
-            <a:ext cx="438912" cy="438912"/>
-          </a:xfrm>
-          <a:prstGeom prst="roundRect">
-            <a:avLst>
-              <a:gd name="adj" fmla="val 12000"/>
-            </a:avLst>
-          </a:prstGeom>
-          <a:solidFill>
-            <a:srgbClr val="095292"/>
-          </a:solidFill>
-          <a:ln>
-            <a:noFill/>
-          </a:ln>
-        </p:spPr>
-        <p:style>
-          <a:lnRef idx="1">
-            <a:schemeClr val="accent1"/>
-          </a:lnRef>
-          <a:fillRef idx="3">
-            <a:schemeClr val="accent1"/>
-          </a:fillRef>
-          <a:effectRef idx="2">
-            <a:schemeClr val="accent1"/>
-          </a:effectRef>
-          <a:fontRef idx="minor">
-            <a:schemeClr val="lt1"/>
-          </a:fontRef>
-        </p:style>
-        <p:txBody>
-          <a:bodyPr rtlCol="0" anchor="ctr"/>
-          <a:lstStyle/>
-          <a:p>
-            <a:pPr algn="ctr"/>
-          </a:p>
-        </p:txBody>
-      </p:sp>
-      <p:sp>
-        <p:nvSpPr>
-          <p:cNvPr id="16" name="TextBox 15"/>
-          <p:cNvSpPr txBox="1"/>
-          <p:nvPr/>
-        </p:nvSpPr>
-        <p:spPr>
-          <a:xfrm>
-            <a:off x="594360" y="4251960"/>
-            <a:ext cx="438912" cy="438912"/>
-          </a:xfrm>
-          <a:prstGeom prst="rect">
-            <a:avLst/>
-          </a:prstGeom>
-          <a:noFill/>
-        </p:spPr>
-        <p:txBody>
-          <a:bodyPr wrap="square" anchor="ctr"/>
-          <a:lstStyle/>
-          <a:p>
-            <a:pPr algn="ctr"/>
-            <a:r>
-              <a:rPr sz="1600" b="1" i="0">
-                <a:solidFill>
-                  <a:srgbClr val="FFFFFF"/>
-                </a:solidFill>
-                <a:latin typeface="Calibri"/>
-              </a:rPr>
-              <a:t>3</a:t>
-            </a:r>
-          </a:p>
-        </p:txBody>
-      </p:sp>
-      <p:sp>
-        <p:nvSpPr>
-          <p:cNvPr id="17" name="TextBox 16"/>
-          <p:cNvSpPr txBox="1"/>
-          <p:nvPr/>
-        </p:nvSpPr>
-        <p:spPr>
-          <a:xfrm>
-            <a:off x="1188720" y="4037076"/>
-            <a:ext cx="10271455" cy="886968"/>
-          </a:xfrm>
-          <a:prstGeom prst="rect">
-            <a:avLst/>
-          </a:prstGeom>
-          <a:noFill/>
-        </p:spPr>
-        <p:txBody>
-          <a:bodyPr wrap="square" anchor="ctr"/>
-          <a:lstStyle/>
-          <a:p>
-            <a:r>
-              <a:rPr sz="1500" b="1" i="0">
-                <a:solidFill>
-                  <a:srgbClr val="095292"/>
-                </a:solidFill>
-                <a:latin typeface="Calibri"/>
-              </a:rPr>
-              <a:t>Pega y renderiza en la plataforma del curso</a:t>
+              <a:rPr sz="2000" b="0" i="0">
+                <a:solidFill>
+                  <a:srgbClr val="333333"/>
+                </a:solidFill>
+                <a:latin typeface="Calibri"/>
+              </a:rPr>
+              <a:t>–   «Mi sistema es pequeno, solo tiene la aplicacion y la base de datos; igual necesito tres zonas?» Si</a:t>
             </a:r>
           </a:p>
           <a:p>
             <a:pPr>
-              <a:spcBef>
-                <a:spcPts val="200"/>
-              </a:spcBef>
+              <a:spcAft>
+                <a:spcPts val="800"/>
+              </a:spcAft>
             </a:pPr>
             <a:r>
-              <a:rPr sz="1300" b="0" i="0">
-                <a:solidFill>
-                  <a:srgbClr val="333333"/>
-                </a:solidFill>
-                <a:latin typeface="Calibri"/>
-              </a:rPr>
-              <a:t>Pega ese codigo en la caja de texto de la pregunta y mira como lo dibuja la plataforma. Si no renderiza, corrige ahi mismo: lo que se califica es el diagrama renderizado dentro de la plataforma del curso.</a:t>
-            </a:r>
-          </a:p>
-        </p:txBody>
-      </p:sp>
-      <p:sp>
-        <p:nvSpPr>
-          <p:cNvPr id="18" name="Rounded Rectangle 17"/>
-          <p:cNvSpPr/>
-          <p:nvPr/>
-        </p:nvSpPr>
-        <p:spPr>
-          <a:xfrm>
-            <a:off x="457200" y="5088636"/>
-            <a:ext cx="11277295" cy="1051560"/>
-          </a:xfrm>
-          <a:prstGeom prst="roundRect">
-            <a:avLst>
-              <a:gd name="adj" fmla="val 12000"/>
-            </a:avLst>
-          </a:prstGeom>
-          <a:solidFill>
-            <a:srgbClr val="E8F4FA"/>
-          </a:solidFill>
-          <a:ln>
-            <a:noFill/>
-          </a:ln>
-        </p:spPr>
-        <p:style>
-          <a:lnRef idx="1">
-            <a:schemeClr val="accent1"/>
-          </a:lnRef>
-          <a:fillRef idx="3">
-            <a:schemeClr val="accent1"/>
-          </a:fillRef>
-          <a:effectRef idx="2">
-            <a:schemeClr val="accent1"/>
-          </a:effectRef>
-          <a:fontRef idx="minor">
-            <a:schemeClr val="lt1"/>
-          </a:fontRef>
-        </p:style>
-        <p:txBody>
-          <a:bodyPr rtlCol="0" anchor="ctr"/>
-          <a:lstStyle/>
-          <a:p>
-            <a:pPr algn="ctr"/>
-          </a:p>
-        </p:txBody>
-      </p:sp>
-      <p:sp>
-        <p:nvSpPr>
-          <p:cNvPr id="19" name="Rounded Rectangle 18"/>
-          <p:cNvSpPr/>
-          <p:nvPr/>
-        </p:nvSpPr>
-        <p:spPr>
-          <a:xfrm>
-            <a:off x="594360" y="5394960"/>
-            <a:ext cx="438912" cy="438912"/>
-          </a:xfrm>
-          <a:prstGeom prst="roundRect">
-            <a:avLst>
-              <a:gd name="adj" fmla="val 12000"/>
-            </a:avLst>
-          </a:prstGeom>
-          <a:solidFill>
-            <a:srgbClr val="095292"/>
-          </a:solidFill>
-          <a:ln>
-            <a:noFill/>
-          </a:ln>
-        </p:spPr>
-        <p:style>
-          <a:lnRef idx="1">
-            <a:schemeClr val="accent1"/>
-          </a:lnRef>
-          <a:fillRef idx="3">
-            <a:schemeClr val="accent1"/>
-          </a:fillRef>
-          <a:effectRef idx="2">
-            <a:schemeClr val="accent1"/>
-          </a:effectRef>
-          <a:fontRef idx="minor">
-            <a:schemeClr val="lt1"/>
-          </a:fontRef>
-        </p:style>
-        <p:txBody>
-          <a:bodyPr rtlCol="0" anchor="ctr"/>
-          <a:lstStyle/>
-          <a:p>
-            <a:pPr algn="ctr"/>
-          </a:p>
-        </p:txBody>
-      </p:sp>
-      <p:sp>
-        <p:nvSpPr>
-          <p:cNvPr id="20" name="TextBox 19"/>
-          <p:cNvSpPr txBox="1"/>
-          <p:nvPr/>
-        </p:nvSpPr>
-        <p:spPr>
-          <a:xfrm>
-            <a:off x="594360" y="5394960"/>
-            <a:ext cx="438912" cy="438912"/>
-          </a:xfrm>
-          <a:prstGeom prst="rect">
-            <a:avLst/>
-          </a:prstGeom>
-          <a:noFill/>
-        </p:spPr>
-        <p:txBody>
-          <a:bodyPr wrap="square" anchor="ctr"/>
-          <a:lstStyle/>
-          <a:p>
-            <a:pPr algn="ctr"/>
-            <a:r>
-              <a:rPr sz="1600" b="1" i="0">
-                <a:solidFill>
-                  <a:srgbClr val="FFFFFF"/>
-                </a:solidFill>
-                <a:latin typeface="Calibri"/>
-              </a:rPr>
-              <a:t>4</a:t>
-            </a:r>
-          </a:p>
-        </p:txBody>
-      </p:sp>
-      <p:sp>
-        <p:nvSpPr>
-          <p:cNvPr id="21" name="TextBox 20"/>
-          <p:cNvSpPr txBox="1"/>
-          <p:nvPr/>
-        </p:nvSpPr>
-        <p:spPr>
-          <a:xfrm>
-            <a:off x="1188720" y="5180076"/>
-            <a:ext cx="10271455" cy="886968"/>
-          </a:xfrm>
-          <a:prstGeom prst="rect">
-            <a:avLst/>
-          </a:prstGeom>
-          <a:noFill/>
-        </p:spPr>
-        <p:txBody>
-          <a:bodyPr wrap="square" anchor="ctr"/>
-          <a:lstStyle/>
-          <a:p>
-            <a:r>
-              <a:rPr sz="1500" b="1" i="0">
-                <a:solidFill>
-                  <a:srgbClr val="095292"/>
-                </a:solidFill>
-                <a:latin typeface="Calibri"/>
-              </a:rPr>
-              <a:t>Guarda el PNG para tu PI</a:t>
+              <a:rPr sz="2000" b="0" i="0">
+                <a:solidFill>
+                  <a:srgbClr val="333333"/>
+                </a:solidFill>
+                <a:latin typeface="Calibri"/>
+              </a:rPr>
+              <a:t>–   Y no es burocracia: las tres zonas son 4 puntos y el sentido de la separacion es justamente que el punto de entrada, la logica y los datos tengan grados de exposicion distintos.</a:t>
             </a:r>
           </a:p>
           <a:p>
             <a:pPr>
-              <a:spcBef>
-                <a:spcPts val="200"/>
-              </a:spcBef>
+              <a:spcAft>
+                <a:spcPts val="800"/>
+              </a:spcAft>
             </a:pPr>
             <a:r>
-              <a:rPr sz="1300" b="0" i="0">
-                <a:solidFill>
-                  <a:srgbClr val="333333"/>
-                </a:solidFill>
-                <a:latin typeface="Calibri"/>
-              </a:rPr>
-              <a:t>Exporta tambien la imagen a la carpeta de tu Proyecto Integrador. Esa copia es para tu informe; no reemplaza la respuesta en la plataforma.</a:t>
-            </a:r>
-          </a:p>
-        </p:txBody>
-      </p:sp>
-      <p:sp>
-        <p:nvSpPr>
-          <p:cNvPr id="22" name="TextBox 21"/>
+              <a:rPr sz="2000" b="0" i="0">
+                <a:solidFill>
+                  <a:srgbClr val="333333"/>
+                </a:solidFill>
+                <a:latin typeface="Calibri"/>
+              </a:rPr>
+              <a:t>–   Un sistema de dos cajas se dibuja con cliente y edge en la publica, la aplicacion en la privada y la base en la de datos</a:t>
+            </a:r>
+          </a:p>
+          <a:p>
+            <a:pPr>
+              <a:spcAft>
+                <a:spcPts val="800"/>
+              </a:spcAft>
+            </a:pPr>
+            <a:r>
+              <a:rPr sz="2000" b="0" i="0">
+                <a:solidFill>
+                  <a:srgbClr val="333333"/>
+                </a:solidFill>
+                <a:latin typeface="Calibri"/>
+              </a:rPr>
+              <a:t>–   Si de verdad no hay balanceador, el punto de entrada es el servidor web o el proxy que atiende el 443, y ese es el habitante de la zona publica.</a:t>
+            </a:r>
+          </a:p>
+        </p:txBody>
+      </p:sp>
+      <p:sp>
+        <p:nvSpPr>
+          <p:cNvPr id="6" name="TextBox 5"/>
           <p:cNvSpPr txBox="1"/>
           <p:nvPr/>
         </p:nvSpPr>
@@ -11864,7 +9439,7 @@
         <p:spPr>
           <a:xfrm>
             <a:off x="0" y="0"/>
-            <a:ext cx="12191695" cy="960120"/>
+            <a:ext cx="12191695" cy="1170432"/>
           </a:xfrm>
           <a:prstGeom prst="rect">
             <a:avLst/>
@@ -11906,7 +9481,7 @@
         </p:nvSpPr>
         <p:spPr>
           <a:xfrm>
-            <a:off x="0" y="960120"/>
+            <a:off x="0" y="1170432"/>
             <a:ext cx="12191695" cy="41148"/>
           </a:xfrm>
           <a:prstGeom prst="rect">
@@ -11950,7 +9525,7 @@
         <p:spPr>
           <a:xfrm>
             <a:off x="457200" y="164592"/>
-            <a:ext cx="11277295" cy="502920"/>
+            <a:ext cx="11277295" cy="384048"/>
           </a:xfrm>
           <a:prstGeom prst="rect">
             <a:avLst/>
@@ -11970,7 +9545,7 @@
                 </a:solidFill>
                 <a:latin typeface="Calibri"/>
               </a:rPr>
-              <a:t>PI CloudLite — entregable de hoy</a:t>
+              <a:t>Ejemplo de diagrama de despliegue (Deployment)</a:t>
             </a:r>
           </a:p>
         </p:txBody>
@@ -11983,8 +9558,8 @@
         </p:nvSpPr>
         <p:spPr>
           <a:xfrm>
-            <a:off x="457200" y="1170432"/>
-            <a:ext cx="11277295" cy="5230368"/>
+            <a:off x="457200" y="566928"/>
+            <a:ext cx="11277295" cy="411480"/>
           </a:xfrm>
           <a:prstGeom prst="rect">
             <a:avLst/>
@@ -11997,119 +9572,362 @@
           </a:bodyPr>
           <a:lstStyle/>
           <a:p>
-            <a:pPr>
-              <a:spcAft>
-                <a:spcPts val="800"/>
-              </a:spcAft>
-            </a:pPr>
-            <a:r>
-              <a:rPr sz="2000" b="0" i="0">
-                <a:solidFill>
-                  <a:srgbClr val="333333"/>
-                </a:solidFill>
-                <a:latin typeface="Calibri"/>
-              </a:rPr>
-              <a:t>–   </a:t>
-            </a:r>
-            <a:r>
-              <a:rPr sz="2000" b="1" i="0">
-                <a:solidFill>
-                  <a:srgbClr val="333333"/>
-                </a:solidFill>
-                <a:latin typeface="Calibri"/>
-              </a:rPr>
-              <a:t>Entregable:</a:t>
-            </a:r>
-            <a:r>
-              <a:rPr sz="2000" b="0" i="0">
-                <a:solidFill>
-                  <a:srgbClr val="333333"/>
-                </a:solidFill>
-                <a:latin typeface="Calibri"/>
-              </a:rPr>
-              <a:t> Diagrama Deployment en Mermaid dentro de la plataforma del curso (3 zonas + puertos) + tipo de almacenamiento por componente</a:t>
-            </a:r>
-          </a:p>
-          <a:p>
-            <a:pPr>
-              <a:spcAft>
-                <a:spcPts val="800"/>
-              </a:spcAft>
-            </a:pPr>
-            <a:r>
-              <a:rPr sz="2000" b="0" i="0">
-                <a:solidFill>
-                  <a:srgbClr val="333333"/>
-                </a:solidFill>
-                <a:latin typeface="Calibri"/>
-              </a:rPr>
-              <a:t>–   Herramienta: </a:t>
-            </a:r>
-            <a:r>
-              <a:rPr sz="2000" b="1" i="0">
-                <a:solidFill>
-                  <a:srgbClr val="333333"/>
-                </a:solidFill>
-                <a:latin typeface="Calibri"/>
-              </a:rPr>
-              <a:t>la plataforma del curso (Mermaid) · boceto en draw.io o Excalidraw</a:t>
-            </a:r>
-          </a:p>
-          <a:p>
-            <a:pPr>
-              <a:spcAft>
-                <a:spcPts val="800"/>
-              </a:spcAft>
-            </a:pPr>
-            <a:r>
-              <a:rPr sz="2000" b="0" i="0">
-                <a:solidFill>
-                  <a:srgbClr val="333333"/>
-                </a:solidFill>
-                <a:latin typeface="Calibri"/>
-              </a:rPr>
-              <a:t>–   Todo lo que construyan hoy entra al </a:t>
-            </a:r>
-            <a:r>
-              <a:rPr sz="2000" b="1" i="0">
-                <a:solidFill>
-                  <a:srgbClr val="333333"/>
-                </a:solidFill>
-                <a:latin typeface="Calibri"/>
-              </a:rPr>
-              <a:t>informe/repo del PI</a:t>
-            </a:r>
-            <a:r>
-              <a:rPr sz="2000" b="0" i="0">
-                <a:solidFill>
-                  <a:srgbClr val="333333"/>
-                </a:solidFill>
-                <a:latin typeface="Calibri"/>
-              </a:rPr>
-              <a:t> (no es lab suelto).</a:t>
-            </a:r>
-          </a:p>
-          <a:p>
-            <a:pPr>
-              <a:spcAft>
-                <a:spcPts val="800"/>
-              </a:spcAft>
-            </a:pPr>
-            <a:r>
-              <a:rPr sz="2000" b="0" i="0">
-                <a:solidFill>
-                  <a:srgbClr val="333333"/>
-                </a:solidFill>
-                <a:latin typeface="Calibri"/>
-              </a:rPr>
-              <a:t>–   Individual por defecto · el docente puede autorizar equipos de 2–3; la entrega en la plataforma del curso siempre es individual.</a:t>
-            </a:r>
-          </a:p>
-        </p:txBody>
-      </p:sp>
-      <p:sp>
-        <p:nvSpPr>
-          <p:cNvPr id="6" name="TextBox 5"/>
+            <a:r>
+              <a:rPr sz="1400" b="0" i="0">
+                <a:solidFill>
+                  <a:srgbClr val="B8D8EE"/>
+                </a:solidFill>
+                <a:latin typeface="Calibri"/>
+              </a:rPr>
+              <a:t>Zonas de confianza: qué es público, qué es privado, dónde viven los datos</a:t>
+            </a:r>
+          </a:p>
+        </p:txBody>
+      </p:sp>
+      <p:sp>
+        <p:nvSpPr>
+          <p:cNvPr id="6" name="Rounded Rectangle 5"/>
+          <p:cNvSpPr/>
+          <p:nvPr/>
+        </p:nvSpPr>
+        <p:spPr>
+          <a:xfrm>
+            <a:off x="822960" y="2194560"/>
+            <a:ext cx="3291840" cy="1005840"/>
+          </a:xfrm>
+          <a:prstGeom prst="roundRect">
+            <a:avLst>
+              <a:gd name="adj" fmla="val 12000"/>
+            </a:avLst>
+          </a:prstGeom>
+          <a:solidFill>
+            <a:srgbClr val="FFD000"/>
+          </a:solidFill>
+          <a:ln>
+            <a:noFill/>
+          </a:ln>
+        </p:spPr>
+        <p:style>
+          <a:lnRef idx="1">
+            <a:schemeClr val="accent1"/>
+          </a:lnRef>
+          <a:fillRef idx="3">
+            <a:schemeClr val="accent1"/>
+          </a:fillRef>
+          <a:effectRef idx="2">
+            <a:schemeClr val="accent1"/>
+          </a:effectRef>
+          <a:fontRef idx="minor">
+            <a:schemeClr val="lt1"/>
+          </a:fontRef>
+        </p:style>
+        <p:txBody>
+          <a:bodyPr rtlCol="0" anchor="ctr" wrap="square"/>
+          <a:lstStyle/>
+          <a:p>
+            <a:pPr algn="ctr"/>
+            <a:r>
+              <a:rPr sz="1300" b="1" i="0">
+                <a:solidFill>
+                  <a:srgbClr val="095292"/>
+                </a:solidFill>
+                <a:latin typeface="Calibri"/>
+              </a:rPr>
+              <a:t>Zona pública
+(balanceador / edge)</a:t>
+            </a:r>
+          </a:p>
+        </p:txBody>
+      </p:sp>
+      <p:sp>
+        <p:nvSpPr>
+          <p:cNvPr id="7" name="Rounded Rectangle 6"/>
+          <p:cNvSpPr/>
+          <p:nvPr/>
+        </p:nvSpPr>
+        <p:spPr>
+          <a:xfrm>
+            <a:off x="4754880" y="2194560"/>
+            <a:ext cx="3291840" cy="1005840"/>
+          </a:xfrm>
+          <a:prstGeom prst="roundRect">
+            <a:avLst>
+              <a:gd name="adj" fmla="val 12000"/>
+            </a:avLst>
+          </a:prstGeom>
+          <a:solidFill>
+            <a:srgbClr val="095292"/>
+          </a:solidFill>
+          <a:ln>
+            <a:noFill/>
+          </a:ln>
+        </p:spPr>
+        <p:style>
+          <a:lnRef idx="1">
+            <a:schemeClr val="accent1"/>
+          </a:lnRef>
+          <a:fillRef idx="3">
+            <a:schemeClr val="accent1"/>
+          </a:fillRef>
+          <a:effectRef idx="2">
+            <a:schemeClr val="accent1"/>
+          </a:effectRef>
+          <a:fontRef idx="minor">
+            <a:schemeClr val="lt1"/>
+          </a:fontRef>
+        </p:style>
+        <p:txBody>
+          <a:bodyPr rtlCol="0" anchor="ctr" wrap="square"/>
+          <a:lstStyle/>
+          <a:p>
+            <a:pPr algn="ctr"/>
+            <a:r>
+              <a:rPr sz="1300" b="1" i="0">
+                <a:solidFill>
+                  <a:srgbClr val="FFFFFF"/>
+                </a:solidFill>
+                <a:latin typeface="Calibri"/>
+              </a:rPr>
+              <a:t>Zona privada
+(app CloudLite)</a:t>
+            </a:r>
+          </a:p>
+        </p:txBody>
+      </p:sp>
+      <p:sp>
+        <p:nvSpPr>
+          <p:cNvPr id="8" name="Rounded Rectangle 7"/>
+          <p:cNvSpPr/>
+          <p:nvPr/>
+        </p:nvSpPr>
+        <p:spPr>
+          <a:xfrm>
+            <a:off x="8595360" y="2194560"/>
+            <a:ext cx="3291840" cy="1005840"/>
+          </a:xfrm>
+          <a:prstGeom prst="roundRect">
+            <a:avLst>
+              <a:gd name="adj" fmla="val 12000"/>
+            </a:avLst>
+          </a:prstGeom>
+          <a:solidFill>
+            <a:srgbClr val="269CCB"/>
+          </a:solidFill>
+          <a:ln>
+            <a:noFill/>
+          </a:ln>
+        </p:spPr>
+        <p:style>
+          <a:lnRef idx="1">
+            <a:schemeClr val="accent1"/>
+          </a:lnRef>
+          <a:fillRef idx="3">
+            <a:schemeClr val="accent1"/>
+          </a:fillRef>
+          <a:effectRef idx="2">
+            <a:schemeClr val="accent1"/>
+          </a:effectRef>
+          <a:fontRef idx="minor">
+            <a:schemeClr val="lt1"/>
+          </a:fontRef>
+        </p:style>
+        <p:txBody>
+          <a:bodyPr rtlCol="0" anchor="ctr" wrap="square"/>
+          <a:lstStyle/>
+          <a:p>
+            <a:pPr algn="ctr"/>
+            <a:r>
+              <a:rPr sz="1300" b="1" i="0">
+                <a:solidFill>
+                  <a:srgbClr val="FFFFFF"/>
+                </a:solidFill>
+                <a:latin typeface="Calibri"/>
+              </a:rPr>
+              <a:t>Zona de datos
+(base de datos)</a:t>
+            </a:r>
+          </a:p>
+        </p:txBody>
+      </p:sp>
+      <p:cxnSp>
+        <p:nvCxnSpPr>
+          <p:cNvPr id="9" name="Connector 8"/>
+          <p:cNvCxnSpPr/>
+          <p:nvPr/>
+        </p:nvCxnSpPr>
+        <p:spPr>
+          <a:xfrm>
+            <a:off x="4114800" y="2697480"/>
+            <a:ext cx="640080" cy="0"/>
+          </a:xfrm>
+          <a:prstGeom prst="line">
+            <a:avLst/>
+          </a:prstGeom>
+          <a:ln w="22225">
+            <a:solidFill>
+              <a:srgbClr val="666666"/>
+            </a:solidFill>
+            <a:tailEnd type="triangle" w="med" len="med"/>
+          </a:ln>
+        </p:spPr>
+        <p:style>
+          <a:lnRef idx="2">
+            <a:schemeClr val="accent1"/>
+          </a:lnRef>
+          <a:fillRef idx="0">
+            <a:schemeClr val="accent1"/>
+          </a:fillRef>
+          <a:effectRef idx="1">
+            <a:schemeClr val="accent1"/>
+          </a:effectRef>
+          <a:fontRef idx="minor">
+            <a:schemeClr val="tx1"/>
+          </a:fontRef>
+        </p:style>
+      </p:cxnSp>
+      <p:sp>
+        <p:nvSpPr>
+          <p:cNvPr id="10" name="TextBox 9"/>
+          <p:cNvSpPr txBox="1"/>
+          <p:nvPr/>
+        </p:nvSpPr>
+        <p:spPr>
+          <a:xfrm>
+            <a:off x="3611879" y="2496312"/>
+            <a:ext cx="1645920" cy="320040"/>
+          </a:xfrm>
+          <a:prstGeom prst="rect">
+            <a:avLst/>
+          </a:prstGeom>
+          <a:noFill/>
+        </p:spPr>
+        <p:txBody>
+          <a:bodyPr wrap="square">
+            <a:spAutoFit/>
+          </a:bodyPr>
+          <a:lstStyle/>
+          <a:p>
+            <a:pPr algn="ctr"/>
+            <a:r>
+              <a:rPr sz="1000" b="0" i="1">
+                <a:solidFill>
+                  <a:srgbClr val="666666"/>
+                </a:solidFill>
+                <a:latin typeface="Calibri"/>
+              </a:rPr>
+              <a:t>solo el 8080</a:t>
+            </a:r>
+          </a:p>
+        </p:txBody>
+      </p:sp>
+      <p:cxnSp>
+        <p:nvCxnSpPr>
+          <p:cNvPr id="11" name="Connector 10"/>
+          <p:cNvCxnSpPr/>
+          <p:nvPr/>
+        </p:nvCxnSpPr>
+        <p:spPr>
+          <a:xfrm>
+            <a:off x="8046720" y="2697480"/>
+            <a:ext cx="548640" cy="0"/>
+          </a:xfrm>
+          <a:prstGeom prst="line">
+            <a:avLst/>
+          </a:prstGeom>
+          <a:ln w="22225">
+            <a:solidFill>
+              <a:srgbClr val="666666"/>
+            </a:solidFill>
+            <a:tailEnd type="triangle" w="med" len="med"/>
+          </a:ln>
+        </p:spPr>
+        <p:style>
+          <a:lnRef idx="2">
+            <a:schemeClr val="accent1"/>
+          </a:lnRef>
+          <a:fillRef idx="0">
+            <a:schemeClr val="accent1"/>
+          </a:fillRef>
+          <a:effectRef idx="1">
+            <a:schemeClr val="accent1"/>
+          </a:effectRef>
+          <a:fontRef idx="minor">
+            <a:schemeClr val="tx1"/>
+          </a:fontRef>
+        </p:style>
+      </p:cxnSp>
+      <p:sp>
+        <p:nvSpPr>
+          <p:cNvPr id="12" name="TextBox 11"/>
+          <p:cNvSpPr txBox="1"/>
+          <p:nvPr/>
+        </p:nvSpPr>
+        <p:spPr>
+          <a:xfrm>
+            <a:off x="7498080" y="2496312"/>
+            <a:ext cx="1645920" cy="320040"/>
+          </a:xfrm>
+          <a:prstGeom prst="rect">
+            <a:avLst/>
+          </a:prstGeom>
+          <a:noFill/>
+        </p:spPr>
+        <p:txBody>
+          <a:bodyPr wrap="square">
+            <a:spAutoFit/>
+          </a:bodyPr>
+          <a:lstStyle/>
+          <a:p>
+            <a:pPr algn="ctr"/>
+            <a:r>
+              <a:rPr sz="1000" b="0" i="1">
+                <a:solidFill>
+                  <a:srgbClr val="666666"/>
+                </a:solidFill>
+                <a:latin typeface="Calibri"/>
+              </a:rPr>
+              <a:t>solo el 5432</a:t>
+            </a:r>
+          </a:p>
+        </p:txBody>
+      </p:sp>
+      <p:sp>
+        <p:nvSpPr>
+          <p:cNvPr id="13" name="TextBox 12"/>
+          <p:cNvSpPr txBox="1"/>
+          <p:nvPr/>
+        </p:nvSpPr>
+        <p:spPr>
+          <a:xfrm>
+            <a:off x="457200" y="6263640"/>
+            <a:ext cx="11277295" cy="411480"/>
+          </a:xfrm>
+          <a:prstGeom prst="rect">
+            <a:avLst/>
+          </a:prstGeom>
+          <a:noFill/>
+        </p:spPr>
+        <p:txBody>
+          <a:bodyPr wrap="square">
+            <a:spAutoFit/>
+          </a:bodyPr>
+          <a:lstStyle/>
+          <a:p>
+            <a:r>
+              <a:rPr sz="1100" b="0" i="1">
+                <a:solidFill>
+                  <a:srgbClr val="666666"/>
+                </a:solidFill>
+                <a:latin typeface="Calibri"/>
+              </a:rPr>
+              <a:t>La base de datos NUNCA vive en la zona pública. Los nombres deben coincidir con los del C4 Containers (Clase 4) — mismo sistema, otro ángulo.</a:t>
+            </a:r>
+          </a:p>
+        </p:txBody>
+      </p:sp>
+      <p:sp>
+        <p:nvSpPr>
+          <p:cNvPr id="14" name="TextBox 13"/>
           <p:cNvSpPr txBox="1"/>
           <p:nvPr/>
         </p:nvSpPr>
@@ -12283,21 +10101,141 @@
                 </a:solidFill>
                 <a:latin typeface="Calibri"/>
               </a:rPr>
-              <a:t>Manos a la obra (paso a paso)</a:t>
-            </a:r>
-          </a:p>
-        </p:txBody>
-      </p:sp>
-      <p:sp>
-        <p:nvSpPr>
-          <p:cNvPr id="5" name="TextBox 4"/>
+              <a:t>El Despliegue en Mermaid: el molde que la plataforma del curso renderiza</a:t>
+            </a:r>
+          </a:p>
+        </p:txBody>
+      </p:sp>
+      <p:sp>
+        <p:nvSpPr>
+          <p:cNvPr id="5" name="Rounded Rectangle 4"/>
+          <p:cNvSpPr/>
+          <p:nvPr/>
+        </p:nvSpPr>
+        <p:spPr>
+          <a:xfrm>
+            <a:off x="457200" y="1261872"/>
+            <a:ext cx="11277295" cy="4773168"/>
+          </a:xfrm>
+          <a:prstGeom prst="roundRect">
+            <a:avLst>
+              <a:gd name="adj" fmla="val 12000"/>
+            </a:avLst>
+          </a:prstGeom>
+          <a:solidFill>
+            <a:srgbClr val="1E2A38"/>
+          </a:solidFill>
+          <a:ln>
+            <a:noFill/>
+          </a:ln>
+        </p:spPr>
+        <p:style>
+          <a:lnRef idx="1">
+            <a:schemeClr val="accent1"/>
+          </a:lnRef>
+          <a:fillRef idx="3">
+            <a:schemeClr val="accent1"/>
+          </a:fillRef>
+          <a:effectRef idx="2">
+            <a:schemeClr val="accent1"/>
+          </a:effectRef>
+          <a:fontRef idx="minor">
+            <a:schemeClr val="lt1"/>
+          </a:fontRef>
+        </p:style>
+        <p:txBody>
+          <a:bodyPr rtlCol="0" anchor="ctr"/>
+          <a:lstStyle/>
+          <a:p>
+            <a:pPr algn="ctr"/>
+          </a:p>
+        </p:txBody>
+      </p:sp>
+      <p:sp>
+        <p:nvSpPr>
+          <p:cNvPr id="6" name="Rectangle 5"/>
+          <p:cNvSpPr/>
+          <p:nvPr/>
+        </p:nvSpPr>
+        <p:spPr>
+          <a:xfrm>
+            <a:off x="457200" y="1261872"/>
+            <a:ext cx="11277295" cy="320040"/>
+          </a:xfrm>
+          <a:prstGeom prst="rect">
+            <a:avLst/>
+          </a:prstGeom>
+          <a:solidFill>
+            <a:srgbClr val="095292"/>
+          </a:solidFill>
+          <a:ln>
+            <a:noFill/>
+          </a:ln>
+        </p:spPr>
+        <p:style>
+          <a:lnRef idx="1">
+            <a:schemeClr val="accent1"/>
+          </a:lnRef>
+          <a:fillRef idx="3">
+            <a:schemeClr val="accent1"/>
+          </a:fillRef>
+          <a:effectRef idx="2">
+            <a:schemeClr val="accent1"/>
+          </a:effectRef>
+          <a:fontRef idx="minor">
+            <a:schemeClr val="lt1"/>
+          </a:fontRef>
+        </p:style>
+        <p:txBody>
+          <a:bodyPr rtlCol="0" anchor="ctr"/>
+          <a:lstStyle/>
+          <a:p>
+            <a:pPr algn="ctr"/>
+          </a:p>
+        </p:txBody>
+      </p:sp>
+      <p:sp>
+        <p:nvSpPr>
+          <p:cNvPr id="7" name="TextBox 6"/>
           <p:cNvSpPr txBox="1"/>
           <p:nvPr/>
         </p:nvSpPr>
         <p:spPr>
           <a:xfrm>
-            <a:off x="457200" y="1170432"/>
-            <a:ext cx="11277295" cy="5230368"/>
+            <a:off x="685800" y="1307592"/>
+            <a:ext cx="10820095" cy="256032"/>
+          </a:xfrm>
+          <a:prstGeom prst="rect">
+            <a:avLst/>
+          </a:prstGeom>
+          <a:noFill/>
+        </p:spPr>
+        <p:txBody>
+          <a:bodyPr wrap="square" anchor="ctr"/>
+          <a:lstStyle/>
+          <a:p>
+            <a:r>
+              <a:rPr sz="1000" b="1" i="0">
+                <a:solidFill>
+                  <a:srgbClr val="269CCB"/>
+                </a:solidFill>
+                <a:latin typeface="Calibri"/>
+              </a:rPr>
+              <a:t>● ● ●</a:t>
+            </a:r>
+          </a:p>
+        </p:txBody>
+      </p:sp>
+      <p:sp>
+        <p:nvSpPr>
+          <p:cNvPr id="8" name="TextBox 7"/>
+          <p:cNvSpPr txBox="1"/>
+          <p:nvPr/>
+        </p:nvSpPr>
+        <p:spPr>
+          <a:xfrm>
+            <a:off x="777240" y="1719072"/>
+            <a:ext cx="10637215" cy="4133087"/>
           </a:xfrm>
           <a:prstGeom prst="rect">
             <a:avLst/>
@@ -12312,135 +10250,283 @@
           <a:p>
             <a:pPr>
               <a:spcAft>
-                <a:spcPts val="800"/>
+                <a:spcPts val="400"/>
               </a:spcAft>
             </a:pPr>
             <a:r>
-              <a:rPr sz="2000" b="1" i="0">
-                <a:solidFill>
-                  <a:srgbClr val="333333"/>
-                </a:solidFill>
-                <a:latin typeface="Calibri"/>
-              </a:rPr>
-              <a:t>1.</a:t>
-            </a:r>
-            <a:r>
-              <a:rPr sz="2000" b="0" i="0">
-                <a:solidFill>
-                  <a:srgbClr val="333333"/>
-                </a:solidFill>
-                <a:latin typeface="Calibri"/>
-              </a:rPr>
-              <a:t> Paso 1: dibuje primero el boceto del despliegue en Excalidraw o draw.io con las tres zonas (publica, privada y de datos), y despues pidale a una IA que lo traduzca a Mermaid; peguelo en la pregunta 4 y verifique en el diagrama ya renderizado que la base de datos NO quede en la zona publica.</a:t>
+              <a:rPr sz="1400" b="0" i="0">
+                <a:solidFill>
+                  <a:srgbClr val="FFFFFF"/>
+                </a:solidFill>
+                <a:latin typeface="Calibri"/>
+              </a:rPr>
+              <a:t>flowchart LR</a:t>
             </a:r>
           </a:p>
           <a:p>
             <a:pPr>
               <a:spcAft>
-                <a:spcPts val="800"/>
+                <a:spcPts val="400"/>
               </a:spcAft>
             </a:pPr>
             <a:r>
-              <a:rPr sz="2000" b="0" i="0">
-                <a:solidFill>
-                  <a:srgbClr val="333333"/>
-                </a:solidFill>
-                <a:latin typeface="Calibri"/>
-              </a:rPr>
-              <a:t>–   </a:t>
-            </a:r>
-            <a:r>
-              <a:rPr sz="2000" b="1" i="0">
-                <a:solidFill>
-                  <a:srgbClr val="333333"/>
-                </a:solidFill>
-                <a:latin typeface="Calibri"/>
-              </a:rPr>
-              <a:t>2.</a:t>
-            </a:r>
-            <a:r>
-              <a:rPr sz="2000" b="0" i="0">
-                <a:solidFill>
-                  <a:srgbClr val="333333"/>
-                </a:solidFill>
-                <a:latin typeface="Calibri"/>
-              </a:rPr>
-              <a:t> Paso 2: etiquete en ese mismo diagrama el puerto de cada componente y marque las fronteras de confianza, es decir donde termina lo que usted controla; verifique que no aparezcan nombres de subredes ni de servicios de un proveedor concreto.</a:t>
+              <a:rPr sz="1400" b="0" i="0">
+                <a:solidFill>
+                  <a:srgbClr val="FFFFFF"/>
+                </a:solidFill>
+                <a:latin typeface="Calibri"/>
+              </a:rPr>
+              <a:t>  subgraph publica["Zona publica - internet"]</a:t>
             </a:r>
           </a:p>
           <a:p>
             <a:pPr>
               <a:spcAft>
-                <a:spcPts val="800"/>
+                <a:spcPts val="400"/>
               </a:spcAft>
             </a:pPr>
             <a:r>
-              <a:rPr sz="2000" b="0" i="0">
-                <a:solidFill>
-                  <a:srgbClr val="333333"/>
-                </a:solidFill>
-                <a:latin typeface="Calibri"/>
-              </a:rPr>
-              <a:t>–   </a:t>
-            </a:r>
-            <a:r>
-              <a:rPr sz="2000" b="1" i="0">
-                <a:solidFill>
-                  <a:srgbClr val="333333"/>
-                </a:solidFill>
-                <a:latin typeface="Calibri"/>
-              </a:rPr>
-              <a:t>3.</a:t>
-            </a:r>
-            <a:r>
-              <a:rPr sz="2000" b="0" i="0">
-                <a:solidFill>
-                  <a:srgbClr val="333333"/>
-                </a:solidFill>
-                <a:latin typeface="Calibri"/>
-              </a:rPr>
-              <a:t> Paso 3: justifique en la pregunta 5 el tipo de almacenamiento de cada componente diciendo que caracteristica del dato lo exige; si su dominio no necesita almacenamiento de objetos, declarelo y justifiquelo en vez de agregarlo.</a:t>
+              <a:rPr sz="1400" b="0" i="0">
+                <a:solidFill>
+                  <a:srgbClr val="FFFFFF"/>
+                </a:solidFill>
+                <a:latin typeface="Calibri"/>
+              </a:rPr>
+              <a:t>    web["App web&lt;br/&gt;React estatico - 443"]</a:t>
             </a:r>
           </a:p>
           <a:p>
             <a:pPr>
               <a:spcAft>
-                <a:spcPts val="800"/>
+                <a:spcPts val="400"/>
               </a:spcAft>
             </a:pPr>
             <a:r>
-              <a:rPr sz="2000" b="0" i="0">
-                <a:solidFill>
-                  <a:srgbClr val="333333"/>
-                </a:solidFill>
-                <a:latin typeface="Calibri"/>
-              </a:rPr>
-              <a:t>–   </a:t>
-            </a:r>
-            <a:r>
-              <a:rPr sz="2000" b="1" i="0">
-                <a:solidFill>
-                  <a:srgbClr val="333333"/>
-                </a:solidFill>
-                <a:latin typeface="Calibri"/>
-              </a:rPr>
-              <a:t>4.</a:t>
-            </a:r>
-            <a:r>
-              <a:rPr sz="2000" b="0" i="0">
-                <a:solidFill>
-                  <a:srgbClr val="333333"/>
-                </a:solidFill>
-                <a:latin typeface="Calibri"/>
-              </a:rPr>
-              <a:t> Paso 4: complete en la pregunta 6 la tabla de correspondencia entre el C4 Containers y el Despliegue, con una fila por componente y su zona, y liste los renombres que aplico; si no hubo ninguno, digalo explicitamente.</a:t>
-            </a:r>
-          </a:p>
-        </p:txBody>
-      </p:sp>
-      <p:sp>
-        <p:nvSpPr>
-          <p:cNvPr id="6" name="TextBox 5"/>
+              <a:rPr sz="1400" b="0" i="0">
+                <a:solidFill>
+                  <a:srgbClr val="FFFFFF"/>
+                </a:solidFill>
+                <a:latin typeface="Calibri"/>
+              </a:rPr>
+              <a:t>    edge["Edge / balanceador&lt;br/&gt;443 HTTPS"]</a:t>
+            </a:r>
+          </a:p>
+          <a:p>
+            <a:pPr>
+              <a:spcAft>
+                <a:spcPts val="400"/>
+              </a:spcAft>
+            </a:pPr>
+            <a:r>
+              <a:rPr sz="1400" b="0" i="0">
+                <a:solidFill>
+                  <a:srgbClr val="FFFFFF"/>
+                </a:solidFill>
+                <a:latin typeface="Calibri"/>
+              </a:rPr>
+              <a:t>  end</a:t>
+            </a:r>
+          </a:p>
+          <a:p>
+            <a:pPr>
+              <a:spcAft>
+                <a:spcPts val="400"/>
+              </a:spcAft>
+            </a:pPr>
+            <a:r>
+              <a:rPr sz="1400" b="0" i="0">
+                <a:solidFill>
+                  <a:srgbClr val="FFFFFF"/>
+                </a:solidFill>
+                <a:latin typeface="Calibri"/>
+              </a:rPr>
+              <a:t>  subgraph privada["Zona privada - solo desde el edge"]</a:t>
+            </a:r>
+          </a:p>
+          <a:p>
+            <a:pPr>
+              <a:spcAft>
+                <a:spcPts val="400"/>
+              </a:spcAft>
+            </a:pPr>
+            <a:r>
+              <a:rPr sz="1400" b="0" i="0">
+                <a:solidFill>
+                  <a:srgbClr val="FFFFFF"/>
+                </a:solidFill>
+                <a:latin typeface="Calibri"/>
+              </a:rPr>
+              <a:t>    api["API CloudLite&lt;br/&gt;8080 HTTP"]</a:t>
+            </a:r>
+          </a:p>
+          <a:p>
+            <a:pPr>
+              <a:spcAft>
+                <a:spcPts val="400"/>
+              </a:spcAft>
+            </a:pPr>
+            <a:r>
+              <a:rPr sz="1400" b="0" i="0">
+                <a:solidFill>
+                  <a:srgbClr val="FFFFFF"/>
+                </a:solidFill>
+                <a:latin typeface="Calibri"/>
+              </a:rPr>
+              <a:t>  end</a:t>
+            </a:r>
+          </a:p>
+          <a:p>
+            <a:pPr>
+              <a:spcAft>
+                <a:spcPts val="400"/>
+              </a:spcAft>
+            </a:pPr>
+            <a:r>
+              <a:rPr sz="1400" b="0" i="0">
+                <a:solidFill>
+                  <a:srgbClr val="FFFFFF"/>
+                </a:solidFill>
+                <a:latin typeface="Calibri"/>
+              </a:rPr>
+              <a:t>  subgraph datos["Zona de datos - sin internet: la BD va AQUI"]</a:t>
+            </a:r>
+          </a:p>
+          <a:p>
+            <a:pPr>
+              <a:spcAft>
+                <a:spcPts val="400"/>
+              </a:spcAft>
+            </a:pPr>
+            <a:r>
+              <a:rPr sz="1400" b="0" i="0">
+                <a:solidFill>
+                  <a:srgbClr val="FFFFFF"/>
+                </a:solidFill>
+                <a:latin typeface="Calibri"/>
+              </a:rPr>
+              <a:t>    db[("Base de datos&lt;br/&gt;5432 TCP")]</a:t>
+            </a:r>
+          </a:p>
+          <a:p>
+            <a:pPr>
+              <a:spcAft>
+                <a:spcPts val="400"/>
+              </a:spcAft>
+            </a:pPr>
+            <a:r>
+              <a:rPr sz="1400" b="0" i="0">
+                <a:solidFill>
+                  <a:srgbClr val="FFFFFF"/>
+                </a:solidFill>
+                <a:latin typeface="Calibri"/>
+              </a:rPr>
+              <a:t>  end</a:t>
+            </a:r>
+          </a:p>
+          <a:p>
+            <a:pPr>
+              <a:spcAft>
+                <a:spcPts val="400"/>
+              </a:spcAft>
+            </a:pPr>
+            <a:r>
+              <a:rPr sz="1400" b="0" i="0">
+                <a:solidFill>
+                  <a:srgbClr val="FFFFFF"/>
+                </a:solidFill>
+                <a:latin typeface="Calibri"/>
+              </a:rPr>
+              <a:t>  web --&gt;|"HTTPS 443"| edge</a:t>
+            </a:r>
+          </a:p>
+          <a:p>
+            <a:pPr>
+              <a:spcAft>
+                <a:spcPts val="400"/>
+              </a:spcAft>
+            </a:pPr>
+            <a:r>
+              <a:rPr sz="1400" b="0" i="0">
+                <a:solidFill>
+                  <a:srgbClr val="FFFFFF"/>
+                </a:solidFill>
+                <a:latin typeface="Calibri"/>
+              </a:rPr>
+              <a:t>  edge --&gt;|"HTTP 8080"| api</a:t>
+            </a:r>
+          </a:p>
+          <a:p>
+            <a:pPr>
+              <a:spcAft>
+                <a:spcPts val="400"/>
+              </a:spcAft>
+            </a:pPr>
+            <a:r>
+              <a:rPr sz="1400" b="0" i="0">
+                <a:solidFill>
+                  <a:srgbClr val="FFFFFF"/>
+                </a:solidFill>
+                <a:latin typeface="Calibri"/>
+              </a:rPr>
+              <a:t>  api --&gt;|"TCP 5432"| db</a:t>
+            </a:r>
+          </a:p>
+          <a:p>
+            <a:pPr>
+              <a:spcAft>
+                <a:spcPts val="400"/>
+              </a:spcAft>
+            </a:pPr>
+            <a:r>
+              <a:rPr sz="1400" b="0" i="0">
+                <a:solidFill>
+                  <a:srgbClr val="FFFFFF"/>
+                </a:solidFill>
+                <a:latin typeface="Calibri"/>
+              </a:rPr>
+              <a:t>  api --&gt;|"HTTPS 443 - frontera de confianza"| pagos["Pasarela de pagos externa"]</a:t>
+            </a:r>
+          </a:p>
+        </p:txBody>
+      </p:sp>
+      <p:sp>
+        <p:nvSpPr>
+          <p:cNvPr id="9" name="TextBox 8"/>
+          <p:cNvSpPr txBox="1"/>
+          <p:nvPr/>
+        </p:nvSpPr>
+        <p:spPr>
+          <a:xfrm>
+            <a:off x="457200" y="6080760"/>
+            <a:ext cx="11277295" cy="320040"/>
+          </a:xfrm>
+          <a:prstGeom prst="rect">
+            <a:avLst/>
+          </a:prstGeom>
+          <a:noFill/>
+        </p:spPr>
+        <p:txBody>
+          <a:bodyPr wrap="square">
+            <a:spAutoFit/>
+          </a:bodyPr>
+          <a:lstStyle/>
+          <a:p>
+            <a:pPr algn="ctr"/>
+            <a:r>
+              <a:rPr sz="1200" b="0" i="1">
+                <a:solidFill>
+                  <a:srgbClr val="666666"/>
+                </a:solidFill>
+                <a:latin typeface="Calibri"/>
+              </a:rPr>
+              <a:t>Una «subgraph» por zona, el puerto en cada caja y la base con «[( )]». La flecha al externo ES la frontera de confianza. Nombres: los mismos del C4 Containers de la Clase 4.</a:t>
+            </a:r>
+          </a:p>
+        </p:txBody>
+      </p:sp>
+      <p:sp>
+        <p:nvSpPr>
+          <p:cNvPr id="10" name="TextBox 9"/>
           <p:cNvSpPr txBox="1"/>
           <p:nvPr/>
         </p:nvSpPr>
@@ -12508,7 +10594,7 @@
         <p:spPr>
           <a:xfrm>
             <a:off x="0" y="0"/>
-            <a:ext cx="12191695" cy="960120"/>
+            <a:ext cx="12191695" cy="1170432"/>
           </a:xfrm>
           <a:prstGeom prst="rect">
             <a:avLst/>
@@ -12550,7 +10636,7 @@
         </p:nvSpPr>
         <p:spPr>
           <a:xfrm>
-            <a:off x="0" y="960120"/>
+            <a:off x="0" y="1170432"/>
             <a:ext cx="12191695" cy="41148"/>
           </a:xfrm>
           <a:prstGeom prst="rect">
@@ -12594,7 +10680,7 @@
         <p:spPr>
           <a:xfrm>
             <a:off x="457200" y="164592"/>
-            <a:ext cx="11277295" cy="502920"/>
+            <a:ext cx="11277295" cy="384048"/>
           </a:xfrm>
           <a:prstGeom prst="rect">
             <a:avLst/>
@@ -12614,21 +10700,55 @@
                 </a:solidFill>
                 <a:latin typeface="Calibri"/>
               </a:rPr>
-              <a:t>Para continuar (PI)</a:t>
-            </a:r>
-          </a:p>
-        </p:txBody>
-      </p:sp>
-      <p:sp>
-        <p:nvSpPr>
-          <p:cNvPr id="5" name="Rounded Rectangle 4"/>
+              <a:t>Herramientas de hoy</a:t>
+            </a:r>
+          </a:p>
+        </p:txBody>
+      </p:sp>
+      <p:sp>
+        <p:nvSpPr>
+          <p:cNvPr id="5" name="TextBox 4"/>
+          <p:cNvSpPr txBox="1"/>
+          <p:nvPr/>
+        </p:nvSpPr>
+        <p:spPr>
+          <a:xfrm>
+            <a:off x="457200" y="566928"/>
+            <a:ext cx="11277295" cy="411480"/>
+          </a:xfrm>
+          <a:prstGeom prst="rect">
+            <a:avLst/>
+          </a:prstGeom>
+          <a:noFill/>
+        </p:spPr>
+        <p:txBody>
+          <a:bodyPr wrap="square">
+            <a:spAutoFit/>
+          </a:bodyPr>
+          <a:lstStyle/>
+          <a:p>
+            <a:r>
+              <a:rPr sz="1400" b="0" i="0">
+                <a:solidFill>
+                  <a:srgbClr val="B8D8EE"/>
+                </a:solidFill>
+                <a:latin typeface="Calibri"/>
+              </a:rPr>
+              <a:t>Gratis · navegador o free tier · sin cuenta de pago</a:t>
+            </a:r>
+          </a:p>
+        </p:txBody>
+      </p:sp>
+      <p:sp>
+        <p:nvSpPr>
+          <p:cNvPr id="6" name="Rounded Rectangle 5"/>
           <p:cNvSpPr/>
           <p:nvPr/>
         </p:nvSpPr>
         <p:spPr>
           <a:xfrm>
-            <a:off x="457200" y="1261872"/>
-            <a:ext cx="11277295" cy="1051560"/>
+            <a:off x="457200" y="1591056"/>
+            <a:ext cx="3624986" cy="2299716"/>
           </a:xfrm>
           <a:prstGeom prst="roundRect">
             <a:avLst>
@@ -12636,7 +10756,7 @@
             </a:avLst>
           </a:prstGeom>
           <a:solidFill>
-            <a:srgbClr val="E8F4FA"/>
+            <a:srgbClr val="F2F2F2"/>
           </a:solidFill>
           <a:ln>
             <a:noFill/>
@@ -12666,20 +10786,20 @@
       </p:sp>
       <p:sp>
         <p:nvSpPr>
-          <p:cNvPr id="6" name="Rectangle 5"/>
+          <p:cNvPr id="7" name="Rectangle 6"/>
           <p:cNvSpPr/>
           <p:nvPr/>
         </p:nvSpPr>
         <p:spPr>
           <a:xfrm>
-            <a:off x="457200" y="1261872"/>
-            <a:ext cx="128016" cy="1051560"/>
+            <a:off x="457200" y="1591056"/>
+            <a:ext cx="3624986" cy="64008"/>
           </a:xfrm>
           <a:prstGeom prst="rect">
             <a:avLst/>
           </a:prstGeom>
           <a:solidFill>
-            <a:srgbClr val="269CCB"/>
+            <a:srgbClr val="095292"/>
           </a:solidFill>
           <a:ln>
             <a:noFill/>
@@ -12709,109 +10829,14 @@
       </p:sp>
       <p:sp>
         <p:nvSpPr>
-          <p:cNvPr id="7" name="TextBox 6"/>
-          <p:cNvSpPr txBox="1"/>
-          <p:nvPr/>
-        </p:nvSpPr>
-        <p:spPr>
-          <a:xfrm>
-            <a:off x="777240" y="1399031"/>
-            <a:ext cx="10774375" cy="822959"/>
-          </a:xfrm>
-          <a:prstGeom prst="rect">
-            <a:avLst/>
-          </a:prstGeom>
-          <a:noFill/>
-        </p:spPr>
-        <p:txBody>
-          <a:bodyPr wrap="square">
-            <a:spAutoFit/>
-          </a:bodyPr>
-          <a:lstStyle/>
-          <a:p>
-            <a:r>
-              <a:rPr sz="1200" b="1" i="0">
-                <a:solidFill>
-                  <a:srgbClr val="269CCB"/>
-                </a:solidFill>
-                <a:latin typeface="Calibri"/>
-              </a:rPr>
-              <a:t>Info</a:t>
-            </a:r>
-          </a:p>
-          <a:p>
-            <a:pPr>
-              <a:spcBef>
-                <a:spcPts val="400"/>
-              </a:spcBef>
-            </a:pPr>
-            <a:r>
-              <a:rPr sz="1400" b="0" i="0">
-                <a:solidFill>
-                  <a:srgbClr val="333333"/>
-                </a:solidFill>
-                <a:latin typeface="Calibri"/>
-              </a:rPr>
-              <a:t>Entregable: Diagrama Deployment en Mermaid dentro de la plataforma del curso (3 zonas + puertos) + tipo de almacenamiento por componente</a:t>
-            </a:r>
-          </a:p>
-        </p:txBody>
-      </p:sp>
-      <p:sp>
-        <p:nvSpPr>
-          <p:cNvPr id="8" name="Rounded Rectangle 7"/>
+          <p:cNvPr id="8" name="Rectangle 7"/>
           <p:cNvSpPr/>
           <p:nvPr/>
         </p:nvSpPr>
         <p:spPr>
           <a:xfrm>
-            <a:off x="457200" y="2478024"/>
-            <a:ext cx="11277295" cy="1051560"/>
-          </a:xfrm>
-          <a:prstGeom prst="roundRect">
-            <a:avLst>
-              <a:gd name="adj" fmla="val 12000"/>
-            </a:avLst>
-          </a:prstGeom>
-          <a:solidFill>
-            <a:srgbClr val="FFF8E1"/>
-          </a:solidFill>
-          <a:ln>
-            <a:noFill/>
-          </a:ln>
-        </p:spPr>
-        <p:style>
-          <a:lnRef idx="1">
-            <a:schemeClr val="accent1"/>
-          </a:lnRef>
-          <a:fillRef idx="3">
-            <a:schemeClr val="accent1"/>
-          </a:fillRef>
-          <a:effectRef idx="2">
-            <a:schemeClr val="accent1"/>
-          </a:effectRef>
-          <a:fontRef idx="minor">
-            <a:schemeClr val="lt1"/>
-          </a:fontRef>
-        </p:style>
-        <p:txBody>
-          <a:bodyPr rtlCol="0" anchor="ctr"/>
-          <a:lstStyle/>
-          <a:p>
-            <a:pPr algn="ctr"/>
-          </a:p>
-        </p:txBody>
-      </p:sp>
-      <p:sp>
-        <p:nvSpPr>
-          <p:cNvPr id="9" name="Rectangle 8"/>
-          <p:cNvSpPr/>
-          <p:nvPr/>
-        </p:nvSpPr>
-        <p:spPr>
-          <a:xfrm>
-            <a:off x="457200" y="2478024"/>
-            <a:ext cx="128016" cy="1051560"/>
+            <a:off x="457200" y="1655064"/>
+            <a:ext cx="3624986" cy="27432"/>
           </a:xfrm>
           <a:prstGeom prst="rect">
             <a:avLst/>
@@ -12845,6 +10870,30 @@
           </a:p>
         </p:txBody>
       </p:sp>
+      <p:pic>
+        <p:nvPicPr>
+          <p:cNvPr id="9" name="Picture 8" descr="drawio.png"/>
+          <p:cNvPicPr>
+            <a:picLocks noChangeAspect="1"/>
+          </p:cNvPicPr>
+          <p:nvPr/>
+        </p:nvPicPr>
+        <p:blipFill>
+          <a:blip r:embed="rId2"/>
+          <a:stretch>
+            <a:fillRect/>
+          </a:stretch>
+        </p:blipFill>
+        <p:spPr>
+          <a:xfrm>
+            <a:off x="1659331" y="1847087"/>
+            <a:ext cx="1220724" cy="1220724"/>
+          </a:xfrm>
+          <a:prstGeom prst="rect">
+            <a:avLst/>
+          </a:prstGeom>
+        </p:spPr>
+      </p:pic>
       <p:sp>
         <p:nvSpPr>
           <p:cNvPr id="10" name="TextBox 9"/>
@@ -12853,8 +10902,8 @@
         </p:nvSpPr>
         <p:spPr>
           <a:xfrm>
-            <a:off x="777240" y="2615184"/>
-            <a:ext cx="10774375" cy="822959"/>
+            <a:off x="530352" y="3159251"/>
+            <a:ext cx="3478682" cy="621792"/>
           </a:xfrm>
           <a:prstGeom prst="rect">
             <a:avLst/>
@@ -12862,35 +10911,34 @@
           <a:noFill/>
         </p:spPr>
         <p:txBody>
-          <a:bodyPr wrap="square">
-            <a:spAutoFit/>
-          </a:bodyPr>
-          <a:lstStyle/>
-          <a:p>
-            <a:r>
-              <a:rPr sz="1200" b="1" i="0">
-                <a:solidFill>
-                  <a:srgbClr val="FFD000"/>
-                </a:solidFill>
-                <a:latin typeface="Calibri"/>
-              </a:rPr>
-              <a:t>Aclaración</a:t>
-            </a:r>
-          </a:p>
-          <a:p>
-            <a:pPr>
+          <a:bodyPr wrap="square" anchor="t"/>
+          <a:lstStyle/>
+          <a:p>
+            <a:pPr algn="ctr"/>
+            <a:r>
+              <a:rPr sz="1300" b="1" i="0">
+                <a:solidFill>
+                  <a:srgbClr val="095292"/>
+                </a:solidFill>
+                <a:latin typeface="Calibri"/>
+              </a:rPr>
+              <a:t>draw.io</a:t>
+            </a:r>
+          </a:p>
+          <a:p>
+            <a:pPr algn="ctr">
               <a:spcBef>
-                <a:spcPts val="400"/>
+                <a:spcPts val="200"/>
               </a:spcBef>
             </a:pPr>
             <a:r>
-              <a:rPr sz="1400" b="0" i="0">
-                <a:solidFill>
-                  <a:srgbClr val="333333"/>
-                </a:solidFill>
-                <a:latin typeface="Calibri"/>
-              </a:rPr>
-              <a:t>Subir evidencias al paquete CloudLite (Drive/repo) y a la plataforma del curso en la fecha que indique el docente.</a:t>
+              <a:rPr sz="1000" b="0" i="0">
+                <a:solidFill>
+                  <a:srgbClr val="666666"/>
+                </a:solidFill>
+                <a:latin typeface="Calibri"/>
+              </a:rPr>
+              <a:t>Deployment</a:t>
             </a:r>
           </a:p>
         </p:txBody>
@@ -12903,8 +10951,8 @@
         </p:nvSpPr>
         <p:spPr>
           <a:xfrm>
-            <a:off x="457200" y="3694176"/>
-            <a:ext cx="11277295" cy="1051560"/>
+            <a:off x="4283354" y="1591056"/>
+            <a:ext cx="3624986" cy="2299716"/>
           </a:xfrm>
           <a:prstGeom prst="roundRect">
             <a:avLst>
@@ -12912,7 +10960,7 @@
             </a:avLst>
           </a:prstGeom>
           <a:solidFill>
-            <a:srgbClr val="FBE4E4"/>
+            <a:srgbClr val="F2F2F2"/>
           </a:solidFill>
           <a:ln>
             <a:noFill/>
@@ -12948,14 +10996,14 @@
         </p:nvSpPr>
         <p:spPr>
           <a:xfrm>
-            <a:off x="457200" y="3694176"/>
-            <a:ext cx="128016" cy="1051560"/>
+            <a:off x="4283354" y="1591056"/>
+            <a:ext cx="3624986" cy="64008"/>
           </a:xfrm>
           <a:prstGeom prst="rect">
             <a:avLst/>
           </a:prstGeom>
           <a:solidFill>
-            <a:srgbClr val="A02030"/>
+            <a:srgbClr val="095292"/>
           </a:solidFill>
           <a:ln>
             <a:noFill/>
@@ -12985,14 +11033,81 @@
       </p:sp>
       <p:sp>
         <p:nvSpPr>
-          <p:cNvPr id="13" name="TextBox 12"/>
+          <p:cNvPr id="13" name="Rectangle 12"/>
+          <p:cNvSpPr/>
+          <p:nvPr/>
+        </p:nvSpPr>
+        <p:spPr>
+          <a:xfrm>
+            <a:off x="4283354" y="1655064"/>
+            <a:ext cx="3624986" cy="27432"/>
+          </a:xfrm>
+          <a:prstGeom prst="rect">
+            <a:avLst/>
+          </a:prstGeom>
+          <a:solidFill>
+            <a:srgbClr val="FFD000"/>
+          </a:solidFill>
+          <a:ln>
+            <a:noFill/>
+          </a:ln>
+        </p:spPr>
+        <p:style>
+          <a:lnRef idx="1">
+            <a:schemeClr val="accent1"/>
+          </a:lnRef>
+          <a:fillRef idx="3">
+            <a:schemeClr val="accent1"/>
+          </a:fillRef>
+          <a:effectRef idx="2">
+            <a:schemeClr val="accent1"/>
+          </a:effectRef>
+          <a:fontRef idx="minor">
+            <a:schemeClr val="lt1"/>
+          </a:fontRef>
+        </p:style>
+        <p:txBody>
+          <a:bodyPr rtlCol="0" anchor="ctr"/>
+          <a:lstStyle/>
+          <a:p>
+            <a:pPr algn="ctr"/>
+          </a:p>
+        </p:txBody>
+      </p:sp>
+      <p:pic>
+        <p:nvPicPr>
+          <p:cNvPr id="14" name="Picture 13" descr="google_docs.png"/>
+          <p:cNvPicPr>
+            <a:picLocks noChangeAspect="1"/>
+          </p:cNvPicPr>
+          <p:nvPr/>
+        </p:nvPicPr>
+        <p:blipFill>
+          <a:blip r:embed="rId3"/>
+          <a:stretch>
+            <a:fillRect/>
+          </a:stretch>
+        </p:blipFill>
+        <p:spPr>
+          <a:xfrm>
+            <a:off x="5485485" y="1847087"/>
+            <a:ext cx="1220724" cy="1220724"/>
+          </a:xfrm>
+          <a:prstGeom prst="rect">
+            <a:avLst/>
+          </a:prstGeom>
+        </p:spPr>
+      </p:pic>
+      <p:sp>
+        <p:nvSpPr>
+          <p:cNvPr id="15" name="TextBox 14"/>
           <p:cNvSpPr txBox="1"/>
           <p:nvPr/>
         </p:nvSpPr>
         <p:spPr>
           <a:xfrm>
-            <a:off x="777240" y="3831336"/>
-            <a:ext cx="10774375" cy="822959"/>
+            <a:off x="4356506" y="3159251"/>
+            <a:ext cx="3478682" cy="621792"/>
           </a:xfrm>
           <a:prstGeom prst="rect">
             <a:avLst/>
@@ -13000,42 +11115,449 @@
           <a:noFill/>
         </p:spPr>
         <p:txBody>
-          <a:bodyPr wrap="square">
-            <a:spAutoFit/>
-          </a:bodyPr>
-          <a:lstStyle/>
-          <a:p>
-            <a:r>
-              <a:rPr sz="1200" b="1" i="0">
-                <a:solidFill>
-                  <a:srgbClr val="A02030"/>
-                </a:solidFill>
-                <a:latin typeface="Calibri"/>
-              </a:rPr>
-              <a:t>Atención</a:t>
-            </a:r>
-          </a:p>
-          <a:p>
-            <a:pPr>
+          <a:bodyPr wrap="square" anchor="t"/>
+          <a:lstStyle/>
+          <a:p>
+            <a:pPr algn="ctr"/>
+            <a:r>
+              <a:rPr sz="1300" b="1" i="0">
+                <a:solidFill>
+                  <a:srgbClr val="095292"/>
+                </a:solidFill>
+                <a:latin typeface="Calibri"/>
+              </a:rPr>
+              <a:t>Google Docs</a:t>
+            </a:r>
+          </a:p>
+          <a:p>
+            <a:pPr algn="ctr">
               <a:spcBef>
-                <a:spcPts val="400"/>
+                <a:spcPts val="200"/>
               </a:spcBef>
             </a:pPr>
             <a:r>
-              <a:rPr sz="1400" b="0" i="0">
-                <a:solidFill>
-                  <a:srgbClr val="333333"/>
-                </a:solidFill>
-                <a:latin typeface="Calibri"/>
-              </a:rPr>
-              <a:t>Sin cloud de pago ni instalaciones obligatorias de hipervisores/Docker Desktop.</a:t>
-            </a:r>
-          </a:p>
-        </p:txBody>
-      </p:sp>
-      <p:sp>
-        <p:nvSpPr>
-          <p:cNvPr id="14" name="TextBox 13"/>
+              <a:rPr sz="1000" b="0" i="0">
+                <a:solidFill>
+                  <a:srgbClr val="666666"/>
+                </a:solidFill>
+                <a:latin typeface="Calibri"/>
+              </a:rPr>
+              <a:t>Informe PI</a:t>
+            </a:r>
+          </a:p>
+        </p:txBody>
+      </p:sp>
+      <p:sp>
+        <p:nvSpPr>
+          <p:cNvPr id="16" name="Rounded Rectangle 15"/>
+          <p:cNvSpPr/>
+          <p:nvPr/>
+        </p:nvSpPr>
+        <p:spPr>
+          <a:xfrm>
+            <a:off x="8109508" y="1591056"/>
+            <a:ext cx="3624986" cy="2299716"/>
+          </a:xfrm>
+          <a:prstGeom prst="roundRect">
+            <a:avLst>
+              <a:gd name="adj" fmla="val 12000"/>
+            </a:avLst>
+          </a:prstGeom>
+          <a:solidFill>
+            <a:srgbClr val="F2F2F2"/>
+          </a:solidFill>
+          <a:ln>
+            <a:noFill/>
+          </a:ln>
+        </p:spPr>
+        <p:style>
+          <a:lnRef idx="1">
+            <a:schemeClr val="accent1"/>
+          </a:lnRef>
+          <a:fillRef idx="3">
+            <a:schemeClr val="accent1"/>
+          </a:fillRef>
+          <a:effectRef idx="2">
+            <a:schemeClr val="accent1"/>
+          </a:effectRef>
+          <a:fontRef idx="minor">
+            <a:schemeClr val="lt1"/>
+          </a:fontRef>
+        </p:style>
+        <p:txBody>
+          <a:bodyPr rtlCol="0" anchor="ctr"/>
+          <a:lstStyle/>
+          <a:p>
+            <a:pPr algn="ctr"/>
+          </a:p>
+        </p:txBody>
+      </p:sp>
+      <p:sp>
+        <p:nvSpPr>
+          <p:cNvPr id="17" name="Rectangle 16"/>
+          <p:cNvSpPr/>
+          <p:nvPr/>
+        </p:nvSpPr>
+        <p:spPr>
+          <a:xfrm>
+            <a:off x="8109508" y="1591056"/>
+            <a:ext cx="3624986" cy="64008"/>
+          </a:xfrm>
+          <a:prstGeom prst="rect">
+            <a:avLst/>
+          </a:prstGeom>
+          <a:solidFill>
+            <a:srgbClr val="095292"/>
+          </a:solidFill>
+          <a:ln>
+            <a:noFill/>
+          </a:ln>
+        </p:spPr>
+        <p:style>
+          <a:lnRef idx="1">
+            <a:schemeClr val="accent1"/>
+          </a:lnRef>
+          <a:fillRef idx="3">
+            <a:schemeClr val="accent1"/>
+          </a:fillRef>
+          <a:effectRef idx="2">
+            <a:schemeClr val="accent1"/>
+          </a:effectRef>
+          <a:fontRef idx="minor">
+            <a:schemeClr val="lt1"/>
+          </a:fontRef>
+        </p:style>
+        <p:txBody>
+          <a:bodyPr rtlCol="0" anchor="ctr"/>
+          <a:lstStyle/>
+          <a:p>
+            <a:pPr algn="ctr"/>
+          </a:p>
+        </p:txBody>
+      </p:sp>
+      <p:sp>
+        <p:nvSpPr>
+          <p:cNvPr id="18" name="Rectangle 17"/>
+          <p:cNvSpPr/>
+          <p:nvPr/>
+        </p:nvSpPr>
+        <p:spPr>
+          <a:xfrm>
+            <a:off x="8109508" y="1655064"/>
+            <a:ext cx="3624986" cy="27432"/>
+          </a:xfrm>
+          <a:prstGeom prst="rect">
+            <a:avLst/>
+          </a:prstGeom>
+          <a:solidFill>
+            <a:srgbClr val="FFD000"/>
+          </a:solidFill>
+          <a:ln>
+            <a:noFill/>
+          </a:ln>
+        </p:spPr>
+        <p:style>
+          <a:lnRef idx="1">
+            <a:schemeClr val="accent1"/>
+          </a:lnRef>
+          <a:fillRef idx="3">
+            <a:schemeClr val="accent1"/>
+          </a:fillRef>
+          <a:effectRef idx="2">
+            <a:schemeClr val="accent1"/>
+          </a:effectRef>
+          <a:fontRef idx="minor">
+            <a:schemeClr val="lt1"/>
+          </a:fontRef>
+        </p:style>
+        <p:txBody>
+          <a:bodyPr rtlCol="0" anchor="ctr"/>
+          <a:lstStyle/>
+          <a:p>
+            <a:pPr algn="ctr"/>
+          </a:p>
+        </p:txBody>
+      </p:sp>
+      <p:pic>
+        <p:nvPicPr>
+          <p:cNvPr id="19" name="Picture 18" descr="mermaid.png"/>
+          <p:cNvPicPr>
+            <a:picLocks noChangeAspect="1"/>
+          </p:cNvPicPr>
+          <p:nvPr/>
+        </p:nvPicPr>
+        <p:blipFill>
+          <a:blip r:embed="rId4"/>
+          <a:stretch>
+            <a:fillRect/>
+          </a:stretch>
+        </p:blipFill>
+        <p:spPr>
+          <a:xfrm>
+            <a:off x="9311640" y="1847087"/>
+            <a:ext cx="1220724" cy="1220724"/>
+          </a:xfrm>
+          <a:prstGeom prst="rect">
+            <a:avLst/>
+          </a:prstGeom>
+        </p:spPr>
+      </p:pic>
+      <p:sp>
+        <p:nvSpPr>
+          <p:cNvPr id="20" name="TextBox 19"/>
+          <p:cNvSpPr txBox="1"/>
+          <p:nvPr/>
+        </p:nvSpPr>
+        <p:spPr>
+          <a:xfrm>
+            <a:off x="8182660" y="3159251"/>
+            <a:ext cx="3478682" cy="621792"/>
+          </a:xfrm>
+          <a:prstGeom prst="rect">
+            <a:avLst/>
+          </a:prstGeom>
+          <a:noFill/>
+        </p:spPr>
+        <p:txBody>
+          <a:bodyPr wrap="square" anchor="t"/>
+          <a:lstStyle/>
+          <a:p>
+            <a:pPr algn="ctr"/>
+            <a:r>
+              <a:rPr sz="1300" b="1" i="0">
+                <a:solidFill>
+                  <a:srgbClr val="095292"/>
+                </a:solidFill>
+                <a:latin typeface="Calibri"/>
+              </a:rPr>
+              <a:t>Mermaid</a:t>
+            </a:r>
+          </a:p>
+          <a:p>
+            <a:pPr algn="ctr">
+              <a:spcBef>
+                <a:spcPts val="200"/>
+              </a:spcBef>
+            </a:pPr>
+            <a:r>
+              <a:rPr sz="1000" b="0" i="0">
+                <a:solidFill>
+                  <a:srgbClr val="666666"/>
+                </a:solidFill>
+                <a:latin typeface="Calibri"/>
+              </a:rPr>
+              <a:t>Codigo del diagrama</a:t>
+            </a:r>
+          </a:p>
+        </p:txBody>
+      </p:sp>
+      <p:sp>
+        <p:nvSpPr>
+          <p:cNvPr id="21" name="Rounded Rectangle 20"/>
+          <p:cNvSpPr/>
+          <p:nvPr/>
+        </p:nvSpPr>
+        <p:spPr>
+          <a:xfrm>
+            <a:off x="4283354" y="4055364"/>
+            <a:ext cx="3624986" cy="2299716"/>
+          </a:xfrm>
+          <a:prstGeom prst="roundRect">
+            <a:avLst>
+              <a:gd name="adj" fmla="val 12000"/>
+            </a:avLst>
+          </a:prstGeom>
+          <a:solidFill>
+            <a:srgbClr val="F2F2F2"/>
+          </a:solidFill>
+          <a:ln>
+            <a:noFill/>
+          </a:ln>
+        </p:spPr>
+        <p:style>
+          <a:lnRef idx="1">
+            <a:schemeClr val="accent1"/>
+          </a:lnRef>
+          <a:fillRef idx="3">
+            <a:schemeClr val="accent1"/>
+          </a:fillRef>
+          <a:effectRef idx="2">
+            <a:schemeClr val="accent1"/>
+          </a:effectRef>
+          <a:fontRef idx="minor">
+            <a:schemeClr val="lt1"/>
+          </a:fontRef>
+        </p:style>
+        <p:txBody>
+          <a:bodyPr rtlCol="0" anchor="ctr"/>
+          <a:lstStyle/>
+          <a:p>
+            <a:pPr algn="ctr"/>
+          </a:p>
+        </p:txBody>
+      </p:sp>
+      <p:sp>
+        <p:nvSpPr>
+          <p:cNvPr id="22" name="Rectangle 21"/>
+          <p:cNvSpPr/>
+          <p:nvPr/>
+        </p:nvSpPr>
+        <p:spPr>
+          <a:xfrm>
+            <a:off x="4283354" y="4055364"/>
+            <a:ext cx="3624986" cy="64008"/>
+          </a:xfrm>
+          <a:prstGeom prst="rect">
+            <a:avLst/>
+          </a:prstGeom>
+          <a:solidFill>
+            <a:srgbClr val="095292"/>
+          </a:solidFill>
+          <a:ln>
+            <a:noFill/>
+          </a:ln>
+        </p:spPr>
+        <p:style>
+          <a:lnRef idx="1">
+            <a:schemeClr val="accent1"/>
+          </a:lnRef>
+          <a:fillRef idx="3">
+            <a:schemeClr val="accent1"/>
+          </a:fillRef>
+          <a:effectRef idx="2">
+            <a:schemeClr val="accent1"/>
+          </a:effectRef>
+          <a:fontRef idx="minor">
+            <a:schemeClr val="lt1"/>
+          </a:fontRef>
+        </p:style>
+        <p:txBody>
+          <a:bodyPr rtlCol="0" anchor="ctr"/>
+          <a:lstStyle/>
+          <a:p>
+            <a:pPr algn="ctr"/>
+          </a:p>
+        </p:txBody>
+      </p:sp>
+      <p:sp>
+        <p:nvSpPr>
+          <p:cNvPr id="23" name="Rectangle 22"/>
+          <p:cNvSpPr/>
+          <p:nvPr/>
+        </p:nvSpPr>
+        <p:spPr>
+          <a:xfrm>
+            <a:off x="4283354" y="4119372"/>
+            <a:ext cx="3624986" cy="27432"/>
+          </a:xfrm>
+          <a:prstGeom prst="rect">
+            <a:avLst/>
+          </a:prstGeom>
+          <a:solidFill>
+            <a:srgbClr val="FFD000"/>
+          </a:solidFill>
+          <a:ln>
+            <a:noFill/>
+          </a:ln>
+        </p:spPr>
+        <p:style>
+          <a:lnRef idx="1">
+            <a:schemeClr val="accent1"/>
+          </a:lnRef>
+          <a:fillRef idx="3">
+            <a:schemeClr val="accent1"/>
+          </a:fillRef>
+          <a:effectRef idx="2">
+            <a:schemeClr val="accent1"/>
+          </a:effectRef>
+          <a:fontRef idx="minor">
+            <a:schemeClr val="lt1"/>
+          </a:fontRef>
+        </p:style>
+        <p:txBody>
+          <a:bodyPr rtlCol="0" anchor="ctr"/>
+          <a:lstStyle/>
+          <a:p>
+            <a:pPr algn="ctr"/>
+          </a:p>
+        </p:txBody>
+      </p:sp>
+      <p:pic>
+        <p:nvPicPr>
+          <p:cNvPr id="24" name="Picture 23" descr="examlab.png"/>
+          <p:cNvPicPr>
+            <a:picLocks noChangeAspect="1"/>
+          </p:cNvPicPr>
+          <p:nvPr/>
+        </p:nvPicPr>
+        <p:blipFill>
+          <a:blip r:embed="rId5"/>
+          <a:stretch>
+            <a:fillRect/>
+          </a:stretch>
+        </p:blipFill>
+        <p:spPr>
+          <a:xfrm>
+            <a:off x="5485485" y="4311396"/>
+            <a:ext cx="1220724" cy="1220724"/>
+          </a:xfrm>
+          <a:prstGeom prst="rect">
+            <a:avLst/>
+          </a:prstGeom>
+        </p:spPr>
+      </p:pic>
+      <p:sp>
+        <p:nvSpPr>
+          <p:cNvPr id="25" name="TextBox 24"/>
+          <p:cNvSpPr txBox="1"/>
+          <p:nvPr/>
+        </p:nvSpPr>
+        <p:spPr>
+          <a:xfrm>
+            <a:off x="4356506" y="5623560"/>
+            <a:ext cx="3478682" cy="621792"/>
+          </a:xfrm>
+          <a:prstGeom prst="rect">
+            <a:avLst/>
+          </a:prstGeom>
+          <a:noFill/>
+        </p:spPr>
+        <p:txBody>
+          <a:bodyPr wrap="square" anchor="t"/>
+          <a:lstStyle/>
+          <a:p>
+            <a:pPr algn="ctr"/>
+            <a:r>
+              <a:rPr sz="1300" b="1" i="0">
+                <a:solidFill>
+                  <a:srgbClr val="095292"/>
+                </a:solidFill>
+                <a:latin typeface="Calibri"/>
+              </a:rPr>
+              <a:t>la plataforma del curso</a:t>
+            </a:r>
+          </a:p>
+          <a:p>
+            <a:pPr algn="ctr">
+              <a:spcBef>
+                <a:spcPts val="200"/>
+              </a:spcBef>
+            </a:pPr>
+            <a:r>
+              <a:rPr sz="1000" b="0" i="0">
+                <a:solidFill>
+                  <a:srgbClr val="666666"/>
+                </a:solidFill>
+                <a:latin typeface="Calibri"/>
+              </a:rPr>
+              <a:t>Donde se entrega</a:t>
+            </a:r>
+          </a:p>
+        </p:txBody>
+      </p:sp>
+      <p:sp>
+        <p:nvSpPr>
+          <p:cNvPr id="26" name="TextBox 25"/>
           <p:cNvSpPr txBox="1"/>
           <p:nvPr/>
         </p:nvSpPr>
@@ -13103,6 +11625,2144 @@
         <p:spPr>
           <a:xfrm>
             <a:off x="0" y="0"/>
+            <a:ext cx="12191695" cy="1170432"/>
+          </a:xfrm>
+          <a:prstGeom prst="rect">
+            <a:avLst/>
+          </a:prstGeom>
+          <a:solidFill>
+            <a:srgbClr val="095292"/>
+          </a:solidFill>
+          <a:ln>
+            <a:noFill/>
+          </a:ln>
+        </p:spPr>
+        <p:style>
+          <a:lnRef idx="1">
+            <a:schemeClr val="accent1"/>
+          </a:lnRef>
+          <a:fillRef idx="3">
+            <a:schemeClr val="accent1"/>
+          </a:fillRef>
+          <a:effectRef idx="2">
+            <a:schemeClr val="accent1"/>
+          </a:effectRef>
+          <a:fontRef idx="minor">
+            <a:schemeClr val="lt1"/>
+          </a:fontRef>
+        </p:style>
+        <p:txBody>
+          <a:bodyPr rtlCol="0" anchor="ctr"/>
+          <a:lstStyle/>
+          <a:p>
+            <a:pPr algn="ctr"/>
+          </a:p>
+        </p:txBody>
+      </p:sp>
+      <p:sp>
+        <p:nvSpPr>
+          <p:cNvPr id="3" name="Rectangle 2"/>
+          <p:cNvSpPr/>
+          <p:nvPr/>
+        </p:nvSpPr>
+        <p:spPr>
+          <a:xfrm>
+            <a:off x="0" y="1170432"/>
+            <a:ext cx="12191695" cy="41148"/>
+          </a:xfrm>
+          <a:prstGeom prst="rect">
+            <a:avLst/>
+          </a:prstGeom>
+          <a:solidFill>
+            <a:srgbClr val="FFD000"/>
+          </a:solidFill>
+          <a:ln>
+            <a:noFill/>
+          </a:ln>
+        </p:spPr>
+        <p:style>
+          <a:lnRef idx="1">
+            <a:schemeClr val="accent1"/>
+          </a:lnRef>
+          <a:fillRef idx="3">
+            <a:schemeClr val="accent1"/>
+          </a:fillRef>
+          <a:effectRef idx="2">
+            <a:schemeClr val="accent1"/>
+          </a:effectRef>
+          <a:fontRef idx="minor">
+            <a:schemeClr val="lt1"/>
+          </a:fontRef>
+        </p:style>
+        <p:txBody>
+          <a:bodyPr rtlCol="0" anchor="ctr"/>
+          <a:lstStyle/>
+          <a:p>
+            <a:pPr algn="ctr"/>
+          </a:p>
+        </p:txBody>
+      </p:sp>
+      <p:sp>
+        <p:nvSpPr>
+          <p:cNvPr id="4" name="TextBox 3"/>
+          <p:cNvSpPr txBox="1"/>
+          <p:nvPr/>
+        </p:nvSpPr>
+        <p:spPr>
+          <a:xfrm>
+            <a:off x="457200" y="164592"/>
+            <a:ext cx="11277295" cy="384048"/>
+          </a:xfrm>
+          <a:prstGeom prst="rect">
+            <a:avLst/>
+          </a:prstGeom>
+          <a:noFill/>
+        </p:spPr>
+        <p:txBody>
+          <a:bodyPr wrap="square">
+            <a:spAutoFit/>
+          </a:bodyPr>
+          <a:lstStyle/>
+          <a:p>
+            <a:r>
+              <a:rPr sz="2600" b="1" i="0">
+                <a:solidFill>
+                  <a:srgbClr val="FFFFFF"/>
+                </a:solidFill>
+                <a:latin typeface="Calibri"/>
+              </a:rPr>
+              <a:t>Del boceto a la plataforma del curso (diagrama)</a:t>
+            </a:r>
+          </a:p>
+        </p:txBody>
+      </p:sp>
+      <p:sp>
+        <p:nvSpPr>
+          <p:cNvPr id="5" name="TextBox 4"/>
+          <p:cNvSpPr txBox="1"/>
+          <p:nvPr/>
+        </p:nvSpPr>
+        <p:spPr>
+          <a:xfrm>
+            <a:off x="457200" y="566928"/>
+            <a:ext cx="11277295" cy="411480"/>
+          </a:xfrm>
+          <a:prstGeom prst="rect">
+            <a:avLst/>
+          </a:prstGeom>
+          <a:noFill/>
+        </p:spPr>
+        <p:txBody>
+          <a:bodyPr wrap="square">
+            <a:spAutoFit/>
+          </a:bodyPr>
+          <a:lstStyle/>
+          <a:p>
+            <a:r>
+              <a:rPr sz="1400" b="0" i="0">
+                <a:solidFill>
+                  <a:srgbClr val="B8D8EE"/>
+                </a:solidFill>
+                <a:latin typeface="Calibri"/>
+              </a:rPr>
+              <a:t>El diagrama se entrega como código Mermaid dentro de la plataforma del curso, no como imagen</a:t>
+            </a:r>
+          </a:p>
+        </p:txBody>
+      </p:sp>
+      <p:sp>
+        <p:nvSpPr>
+          <p:cNvPr id="6" name="Rounded Rectangle 5"/>
+          <p:cNvSpPr/>
+          <p:nvPr/>
+        </p:nvSpPr>
+        <p:spPr>
+          <a:xfrm>
+            <a:off x="457200" y="1659636"/>
+            <a:ext cx="11277295" cy="1051560"/>
+          </a:xfrm>
+          <a:prstGeom prst="roundRect">
+            <a:avLst>
+              <a:gd name="adj" fmla="val 12000"/>
+            </a:avLst>
+          </a:prstGeom>
+          <a:solidFill>
+            <a:srgbClr val="F2F2F2"/>
+          </a:solidFill>
+          <a:ln>
+            <a:noFill/>
+          </a:ln>
+        </p:spPr>
+        <p:style>
+          <a:lnRef idx="1">
+            <a:schemeClr val="accent1"/>
+          </a:lnRef>
+          <a:fillRef idx="3">
+            <a:schemeClr val="accent1"/>
+          </a:fillRef>
+          <a:effectRef idx="2">
+            <a:schemeClr val="accent1"/>
+          </a:effectRef>
+          <a:fontRef idx="minor">
+            <a:schemeClr val="lt1"/>
+          </a:fontRef>
+        </p:style>
+        <p:txBody>
+          <a:bodyPr rtlCol="0" anchor="ctr"/>
+          <a:lstStyle/>
+          <a:p>
+            <a:pPr algn="ctr"/>
+          </a:p>
+        </p:txBody>
+      </p:sp>
+      <p:sp>
+        <p:nvSpPr>
+          <p:cNvPr id="7" name="Rounded Rectangle 6"/>
+          <p:cNvSpPr/>
+          <p:nvPr/>
+        </p:nvSpPr>
+        <p:spPr>
+          <a:xfrm>
+            <a:off x="594360" y="1965960"/>
+            <a:ext cx="438912" cy="438912"/>
+          </a:xfrm>
+          <a:prstGeom prst="roundRect">
+            <a:avLst>
+              <a:gd name="adj" fmla="val 12000"/>
+            </a:avLst>
+          </a:prstGeom>
+          <a:solidFill>
+            <a:srgbClr val="095292"/>
+          </a:solidFill>
+          <a:ln>
+            <a:noFill/>
+          </a:ln>
+        </p:spPr>
+        <p:style>
+          <a:lnRef idx="1">
+            <a:schemeClr val="accent1"/>
+          </a:lnRef>
+          <a:fillRef idx="3">
+            <a:schemeClr val="accent1"/>
+          </a:fillRef>
+          <a:effectRef idx="2">
+            <a:schemeClr val="accent1"/>
+          </a:effectRef>
+          <a:fontRef idx="minor">
+            <a:schemeClr val="lt1"/>
+          </a:fontRef>
+        </p:style>
+        <p:txBody>
+          <a:bodyPr rtlCol="0" anchor="ctr"/>
+          <a:lstStyle/>
+          <a:p>
+            <a:pPr algn="ctr"/>
+          </a:p>
+        </p:txBody>
+      </p:sp>
+      <p:sp>
+        <p:nvSpPr>
+          <p:cNvPr id="8" name="TextBox 7"/>
+          <p:cNvSpPr txBox="1"/>
+          <p:nvPr/>
+        </p:nvSpPr>
+        <p:spPr>
+          <a:xfrm>
+            <a:off x="594360" y="1965960"/>
+            <a:ext cx="438912" cy="438912"/>
+          </a:xfrm>
+          <a:prstGeom prst="rect">
+            <a:avLst/>
+          </a:prstGeom>
+          <a:noFill/>
+        </p:spPr>
+        <p:txBody>
+          <a:bodyPr wrap="square" anchor="ctr"/>
+          <a:lstStyle/>
+          <a:p>
+            <a:pPr algn="ctr"/>
+            <a:r>
+              <a:rPr sz="1600" b="1" i="0">
+                <a:solidFill>
+                  <a:srgbClr val="FFFFFF"/>
+                </a:solidFill>
+                <a:latin typeface="Calibri"/>
+              </a:rPr>
+              <a:t>1</a:t>
+            </a:r>
+          </a:p>
+        </p:txBody>
+      </p:sp>
+      <p:sp>
+        <p:nvSpPr>
+          <p:cNvPr id="9" name="TextBox 8"/>
+          <p:cNvSpPr txBox="1"/>
+          <p:nvPr/>
+        </p:nvSpPr>
+        <p:spPr>
+          <a:xfrm>
+            <a:off x="1188720" y="1751076"/>
+            <a:ext cx="10271455" cy="886968"/>
+          </a:xfrm>
+          <a:prstGeom prst="rect">
+            <a:avLst/>
+          </a:prstGeom>
+          <a:noFill/>
+        </p:spPr>
+        <p:txBody>
+          <a:bodyPr wrap="square" anchor="ctr"/>
+          <a:lstStyle/>
+          <a:p>
+            <a:r>
+              <a:rPr sz="1500" b="1" i="0">
+                <a:solidFill>
+                  <a:srgbClr val="095292"/>
+                </a:solidFill>
+                <a:latin typeface="Calibri"/>
+              </a:rPr>
+              <a:t>Disena visual</a:t>
+            </a:r>
+          </a:p>
+          <a:p>
+            <a:pPr>
+              <a:spcBef>
+                <a:spcPts val="200"/>
+              </a:spcBef>
+            </a:pPr>
+            <a:r>
+              <a:rPr sz="1300" b="0" i="0">
+                <a:solidFill>
+                  <a:srgbClr val="333333"/>
+                </a:solidFill>
+                <a:latin typeface="Calibri"/>
+              </a:rPr>
+              <a:t>Dibuja el diagrama como quieras en Excalidraw o draw.io: es mas rapido arrastrar cajas que escribir codigo, y ahi es donde piensas el modelo.</a:t>
+            </a:r>
+          </a:p>
+        </p:txBody>
+      </p:sp>
+      <p:sp>
+        <p:nvSpPr>
+          <p:cNvPr id="10" name="Rounded Rectangle 9"/>
+          <p:cNvSpPr/>
+          <p:nvPr/>
+        </p:nvSpPr>
+        <p:spPr>
+          <a:xfrm>
+            <a:off x="457200" y="2802636"/>
+            <a:ext cx="11277295" cy="1051560"/>
+          </a:xfrm>
+          <a:prstGeom prst="roundRect">
+            <a:avLst>
+              <a:gd name="adj" fmla="val 12000"/>
+            </a:avLst>
+          </a:prstGeom>
+          <a:solidFill>
+            <a:srgbClr val="E8F4FA"/>
+          </a:solidFill>
+          <a:ln>
+            <a:noFill/>
+          </a:ln>
+        </p:spPr>
+        <p:style>
+          <a:lnRef idx="1">
+            <a:schemeClr val="accent1"/>
+          </a:lnRef>
+          <a:fillRef idx="3">
+            <a:schemeClr val="accent1"/>
+          </a:fillRef>
+          <a:effectRef idx="2">
+            <a:schemeClr val="accent1"/>
+          </a:effectRef>
+          <a:fontRef idx="minor">
+            <a:schemeClr val="lt1"/>
+          </a:fontRef>
+        </p:style>
+        <p:txBody>
+          <a:bodyPr rtlCol="0" anchor="ctr"/>
+          <a:lstStyle/>
+          <a:p>
+            <a:pPr algn="ctr"/>
+          </a:p>
+        </p:txBody>
+      </p:sp>
+      <p:sp>
+        <p:nvSpPr>
+          <p:cNvPr id="11" name="Rounded Rectangle 10"/>
+          <p:cNvSpPr/>
+          <p:nvPr/>
+        </p:nvSpPr>
+        <p:spPr>
+          <a:xfrm>
+            <a:off x="594360" y="3108960"/>
+            <a:ext cx="438912" cy="438912"/>
+          </a:xfrm>
+          <a:prstGeom prst="roundRect">
+            <a:avLst>
+              <a:gd name="adj" fmla="val 12000"/>
+            </a:avLst>
+          </a:prstGeom>
+          <a:solidFill>
+            <a:srgbClr val="095292"/>
+          </a:solidFill>
+          <a:ln>
+            <a:noFill/>
+          </a:ln>
+        </p:spPr>
+        <p:style>
+          <a:lnRef idx="1">
+            <a:schemeClr val="accent1"/>
+          </a:lnRef>
+          <a:fillRef idx="3">
+            <a:schemeClr val="accent1"/>
+          </a:fillRef>
+          <a:effectRef idx="2">
+            <a:schemeClr val="accent1"/>
+          </a:effectRef>
+          <a:fontRef idx="minor">
+            <a:schemeClr val="lt1"/>
+          </a:fontRef>
+        </p:style>
+        <p:txBody>
+          <a:bodyPr rtlCol="0" anchor="ctr"/>
+          <a:lstStyle/>
+          <a:p>
+            <a:pPr algn="ctr"/>
+          </a:p>
+        </p:txBody>
+      </p:sp>
+      <p:sp>
+        <p:nvSpPr>
+          <p:cNvPr id="12" name="TextBox 11"/>
+          <p:cNvSpPr txBox="1"/>
+          <p:nvPr/>
+        </p:nvSpPr>
+        <p:spPr>
+          <a:xfrm>
+            <a:off x="594360" y="3108960"/>
+            <a:ext cx="438912" cy="438912"/>
+          </a:xfrm>
+          <a:prstGeom prst="rect">
+            <a:avLst/>
+          </a:prstGeom>
+          <a:noFill/>
+        </p:spPr>
+        <p:txBody>
+          <a:bodyPr wrap="square" anchor="ctr"/>
+          <a:lstStyle/>
+          <a:p>
+            <a:pPr algn="ctr"/>
+            <a:r>
+              <a:rPr sz="1600" b="1" i="0">
+                <a:solidFill>
+                  <a:srgbClr val="FFFFFF"/>
+                </a:solidFill>
+                <a:latin typeface="Calibri"/>
+              </a:rPr>
+              <a:t>2</a:t>
+            </a:r>
+          </a:p>
+        </p:txBody>
+      </p:sp>
+      <p:sp>
+        <p:nvSpPr>
+          <p:cNvPr id="13" name="TextBox 12"/>
+          <p:cNvSpPr txBox="1"/>
+          <p:nvPr/>
+        </p:nvSpPr>
+        <p:spPr>
+          <a:xfrm>
+            <a:off x="1188720" y="2894076"/>
+            <a:ext cx="10271455" cy="886968"/>
+          </a:xfrm>
+          <a:prstGeom prst="rect">
+            <a:avLst/>
+          </a:prstGeom>
+          <a:noFill/>
+        </p:spPr>
+        <p:txBody>
+          <a:bodyPr wrap="square" anchor="ctr"/>
+          <a:lstStyle/>
+          <a:p>
+            <a:r>
+              <a:rPr sz="1500" b="1" i="0">
+                <a:solidFill>
+                  <a:srgbClr val="095292"/>
+                </a:solidFill>
+                <a:latin typeface="Calibri"/>
+              </a:rPr>
+              <a:t>Traduce con IA</a:t>
+            </a:r>
+          </a:p>
+          <a:p>
+            <a:pPr>
+              <a:spcBef>
+                <a:spcPts val="200"/>
+              </a:spcBef>
+            </a:pPr>
+            <a:r>
+              <a:rPr sz="1300" b="0" i="0">
+                <a:solidFill>
+                  <a:srgbClr val="333333"/>
+                </a:solidFill>
+                <a:latin typeface="Calibri"/>
+              </a:rPr>
+              <a:t>Copia o describe tu boceto a una IA y pidele el codigo Mermaid: «convierte este diagrama a Mermaid usando flowchart». Revisa el resultado: la IA acierta la sintaxis, no tu modelo.</a:t>
+            </a:r>
+          </a:p>
+        </p:txBody>
+      </p:sp>
+      <p:sp>
+        <p:nvSpPr>
+          <p:cNvPr id="14" name="Rounded Rectangle 13"/>
+          <p:cNvSpPr/>
+          <p:nvPr/>
+        </p:nvSpPr>
+        <p:spPr>
+          <a:xfrm>
+            <a:off x="457200" y="3945636"/>
+            <a:ext cx="11277295" cy="1051560"/>
+          </a:xfrm>
+          <a:prstGeom prst="roundRect">
+            <a:avLst>
+              <a:gd name="adj" fmla="val 12000"/>
+            </a:avLst>
+          </a:prstGeom>
+          <a:solidFill>
+            <a:srgbClr val="F2F2F2"/>
+          </a:solidFill>
+          <a:ln>
+            <a:noFill/>
+          </a:ln>
+        </p:spPr>
+        <p:style>
+          <a:lnRef idx="1">
+            <a:schemeClr val="accent1"/>
+          </a:lnRef>
+          <a:fillRef idx="3">
+            <a:schemeClr val="accent1"/>
+          </a:fillRef>
+          <a:effectRef idx="2">
+            <a:schemeClr val="accent1"/>
+          </a:effectRef>
+          <a:fontRef idx="minor">
+            <a:schemeClr val="lt1"/>
+          </a:fontRef>
+        </p:style>
+        <p:txBody>
+          <a:bodyPr rtlCol="0" anchor="ctr"/>
+          <a:lstStyle/>
+          <a:p>
+            <a:pPr algn="ctr"/>
+          </a:p>
+        </p:txBody>
+      </p:sp>
+      <p:sp>
+        <p:nvSpPr>
+          <p:cNvPr id="15" name="Rounded Rectangle 14"/>
+          <p:cNvSpPr/>
+          <p:nvPr/>
+        </p:nvSpPr>
+        <p:spPr>
+          <a:xfrm>
+            <a:off x="594360" y="4251960"/>
+            <a:ext cx="438912" cy="438912"/>
+          </a:xfrm>
+          <a:prstGeom prst="roundRect">
+            <a:avLst>
+              <a:gd name="adj" fmla="val 12000"/>
+            </a:avLst>
+          </a:prstGeom>
+          <a:solidFill>
+            <a:srgbClr val="095292"/>
+          </a:solidFill>
+          <a:ln>
+            <a:noFill/>
+          </a:ln>
+        </p:spPr>
+        <p:style>
+          <a:lnRef idx="1">
+            <a:schemeClr val="accent1"/>
+          </a:lnRef>
+          <a:fillRef idx="3">
+            <a:schemeClr val="accent1"/>
+          </a:fillRef>
+          <a:effectRef idx="2">
+            <a:schemeClr val="accent1"/>
+          </a:effectRef>
+          <a:fontRef idx="minor">
+            <a:schemeClr val="lt1"/>
+          </a:fontRef>
+        </p:style>
+        <p:txBody>
+          <a:bodyPr rtlCol="0" anchor="ctr"/>
+          <a:lstStyle/>
+          <a:p>
+            <a:pPr algn="ctr"/>
+          </a:p>
+        </p:txBody>
+      </p:sp>
+      <p:sp>
+        <p:nvSpPr>
+          <p:cNvPr id="16" name="TextBox 15"/>
+          <p:cNvSpPr txBox="1"/>
+          <p:nvPr/>
+        </p:nvSpPr>
+        <p:spPr>
+          <a:xfrm>
+            <a:off x="594360" y="4251960"/>
+            <a:ext cx="438912" cy="438912"/>
+          </a:xfrm>
+          <a:prstGeom prst="rect">
+            <a:avLst/>
+          </a:prstGeom>
+          <a:noFill/>
+        </p:spPr>
+        <p:txBody>
+          <a:bodyPr wrap="square" anchor="ctr"/>
+          <a:lstStyle/>
+          <a:p>
+            <a:pPr algn="ctr"/>
+            <a:r>
+              <a:rPr sz="1600" b="1" i="0">
+                <a:solidFill>
+                  <a:srgbClr val="FFFFFF"/>
+                </a:solidFill>
+                <a:latin typeface="Calibri"/>
+              </a:rPr>
+              <a:t>3</a:t>
+            </a:r>
+          </a:p>
+        </p:txBody>
+      </p:sp>
+      <p:sp>
+        <p:nvSpPr>
+          <p:cNvPr id="17" name="TextBox 16"/>
+          <p:cNvSpPr txBox="1"/>
+          <p:nvPr/>
+        </p:nvSpPr>
+        <p:spPr>
+          <a:xfrm>
+            <a:off x="1188720" y="4037076"/>
+            <a:ext cx="10271455" cy="886968"/>
+          </a:xfrm>
+          <a:prstGeom prst="rect">
+            <a:avLst/>
+          </a:prstGeom>
+          <a:noFill/>
+        </p:spPr>
+        <p:txBody>
+          <a:bodyPr wrap="square" anchor="ctr"/>
+          <a:lstStyle/>
+          <a:p>
+            <a:r>
+              <a:rPr sz="1500" b="1" i="0">
+                <a:solidFill>
+                  <a:srgbClr val="095292"/>
+                </a:solidFill>
+                <a:latin typeface="Calibri"/>
+              </a:rPr>
+              <a:t>Pega y renderiza en la plataforma del curso</a:t>
+            </a:r>
+          </a:p>
+          <a:p>
+            <a:pPr>
+              <a:spcBef>
+                <a:spcPts val="200"/>
+              </a:spcBef>
+            </a:pPr>
+            <a:r>
+              <a:rPr sz="1300" b="0" i="0">
+                <a:solidFill>
+                  <a:srgbClr val="333333"/>
+                </a:solidFill>
+                <a:latin typeface="Calibri"/>
+              </a:rPr>
+              <a:t>Pega ese codigo en la caja de texto de la pregunta y mira como lo dibuja la plataforma. Si no renderiza, corrige ahi mismo: lo que se califica es el diagrama renderizado dentro de la plataforma del curso.</a:t>
+            </a:r>
+          </a:p>
+        </p:txBody>
+      </p:sp>
+      <p:sp>
+        <p:nvSpPr>
+          <p:cNvPr id="18" name="Rounded Rectangle 17"/>
+          <p:cNvSpPr/>
+          <p:nvPr/>
+        </p:nvSpPr>
+        <p:spPr>
+          <a:xfrm>
+            <a:off x="457200" y="5088636"/>
+            <a:ext cx="11277295" cy="1051560"/>
+          </a:xfrm>
+          <a:prstGeom prst="roundRect">
+            <a:avLst>
+              <a:gd name="adj" fmla="val 12000"/>
+            </a:avLst>
+          </a:prstGeom>
+          <a:solidFill>
+            <a:srgbClr val="E8F4FA"/>
+          </a:solidFill>
+          <a:ln>
+            <a:noFill/>
+          </a:ln>
+        </p:spPr>
+        <p:style>
+          <a:lnRef idx="1">
+            <a:schemeClr val="accent1"/>
+          </a:lnRef>
+          <a:fillRef idx="3">
+            <a:schemeClr val="accent1"/>
+          </a:fillRef>
+          <a:effectRef idx="2">
+            <a:schemeClr val="accent1"/>
+          </a:effectRef>
+          <a:fontRef idx="minor">
+            <a:schemeClr val="lt1"/>
+          </a:fontRef>
+        </p:style>
+        <p:txBody>
+          <a:bodyPr rtlCol="0" anchor="ctr"/>
+          <a:lstStyle/>
+          <a:p>
+            <a:pPr algn="ctr"/>
+          </a:p>
+        </p:txBody>
+      </p:sp>
+      <p:sp>
+        <p:nvSpPr>
+          <p:cNvPr id="19" name="Rounded Rectangle 18"/>
+          <p:cNvSpPr/>
+          <p:nvPr/>
+        </p:nvSpPr>
+        <p:spPr>
+          <a:xfrm>
+            <a:off x="594360" y="5394960"/>
+            <a:ext cx="438912" cy="438912"/>
+          </a:xfrm>
+          <a:prstGeom prst="roundRect">
+            <a:avLst>
+              <a:gd name="adj" fmla="val 12000"/>
+            </a:avLst>
+          </a:prstGeom>
+          <a:solidFill>
+            <a:srgbClr val="095292"/>
+          </a:solidFill>
+          <a:ln>
+            <a:noFill/>
+          </a:ln>
+        </p:spPr>
+        <p:style>
+          <a:lnRef idx="1">
+            <a:schemeClr val="accent1"/>
+          </a:lnRef>
+          <a:fillRef idx="3">
+            <a:schemeClr val="accent1"/>
+          </a:fillRef>
+          <a:effectRef idx="2">
+            <a:schemeClr val="accent1"/>
+          </a:effectRef>
+          <a:fontRef idx="minor">
+            <a:schemeClr val="lt1"/>
+          </a:fontRef>
+        </p:style>
+        <p:txBody>
+          <a:bodyPr rtlCol="0" anchor="ctr"/>
+          <a:lstStyle/>
+          <a:p>
+            <a:pPr algn="ctr"/>
+          </a:p>
+        </p:txBody>
+      </p:sp>
+      <p:sp>
+        <p:nvSpPr>
+          <p:cNvPr id="20" name="TextBox 19"/>
+          <p:cNvSpPr txBox="1"/>
+          <p:nvPr/>
+        </p:nvSpPr>
+        <p:spPr>
+          <a:xfrm>
+            <a:off x="594360" y="5394960"/>
+            <a:ext cx="438912" cy="438912"/>
+          </a:xfrm>
+          <a:prstGeom prst="rect">
+            <a:avLst/>
+          </a:prstGeom>
+          <a:noFill/>
+        </p:spPr>
+        <p:txBody>
+          <a:bodyPr wrap="square" anchor="ctr"/>
+          <a:lstStyle/>
+          <a:p>
+            <a:pPr algn="ctr"/>
+            <a:r>
+              <a:rPr sz="1600" b="1" i="0">
+                <a:solidFill>
+                  <a:srgbClr val="FFFFFF"/>
+                </a:solidFill>
+                <a:latin typeface="Calibri"/>
+              </a:rPr>
+              <a:t>4</a:t>
+            </a:r>
+          </a:p>
+        </p:txBody>
+      </p:sp>
+      <p:sp>
+        <p:nvSpPr>
+          <p:cNvPr id="21" name="TextBox 20"/>
+          <p:cNvSpPr txBox="1"/>
+          <p:nvPr/>
+        </p:nvSpPr>
+        <p:spPr>
+          <a:xfrm>
+            <a:off x="1188720" y="5180076"/>
+            <a:ext cx="10271455" cy="886968"/>
+          </a:xfrm>
+          <a:prstGeom prst="rect">
+            <a:avLst/>
+          </a:prstGeom>
+          <a:noFill/>
+        </p:spPr>
+        <p:txBody>
+          <a:bodyPr wrap="square" anchor="ctr"/>
+          <a:lstStyle/>
+          <a:p>
+            <a:r>
+              <a:rPr sz="1500" b="1" i="0">
+                <a:solidFill>
+                  <a:srgbClr val="095292"/>
+                </a:solidFill>
+                <a:latin typeface="Calibri"/>
+              </a:rPr>
+              <a:t>Guarda el PNG para tu PI</a:t>
+            </a:r>
+          </a:p>
+          <a:p>
+            <a:pPr>
+              <a:spcBef>
+                <a:spcPts val="200"/>
+              </a:spcBef>
+            </a:pPr>
+            <a:r>
+              <a:rPr sz="1300" b="0" i="0">
+                <a:solidFill>
+                  <a:srgbClr val="333333"/>
+                </a:solidFill>
+                <a:latin typeface="Calibri"/>
+              </a:rPr>
+              <a:t>Exporta tambien la imagen a la carpeta de tu Proyecto Integrador. Esa copia es para tu informe; no reemplaza la respuesta en la plataforma.</a:t>
+            </a:r>
+          </a:p>
+        </p:txBody>
+      </p:sp>
+      <p:sp>
+        <p:nvSpPr>
+          <p:cNvPr id="22" name="TextBox 21"/>
+          <p:cNvSpPr txBox="1"/>
+          <p:nvPr/>
+        </p:nvSpPr>
+        <p:spPr>
+          <a:xfrm>
+            <a:off x="11185855" y="6473952"/>
+            <a:ext cx="640080" cy="274320"/>
+          </a:xfrm>
+          <a:prstGeom prst="rect">
+            <a:avLst/>
+          </a:prstGeom>
+          <a:noFill/>
+        </p:spPr>
+        <p:txBody>
+          <a:bodyPr wrap="square">
+            <a:spAutoFit/>
+          </a:bodyPr>
+          <a:lstStyle/>
+          <a:p>
+            <a:pPr algn="r"/>
+            <a:r>
+              <a:rPr sz="1100" b="0" i="0">
+                <a:solidFill>
+                  <a:srgbClr val="666666"/>
+                </a:solidFill>
+                <a:latin typeface="Calibri"/>
+              </a:rPr>
+              <a:t>33</a:t>
+            </a:r>
+          </a:p>
+        </p:txBody>
+      </p:sp>
+    </p:spTree>
+  </p:cSld>
+  <p:clrMapOvr>
+    <a:masterClrMapping/>
+  </p:clrMapOvr>
+</p:sld>
+</file>
+
+<file path=ppt/slides/slide34.xml><?xml version="1.0" encoding="utf-8"?>
+<p:sld xmlns:a="http://schemas.openxmlformats.org/drawingml/2006/main" xmlns:p="http://schemas.openxmlformats.org/presentationml/2006/main" xmlns:r="http://schemas.openxmlformats.org/officeDocument/2006/relationships">
+  <p:cSld>
+    <p:bg>
+      <p:bgPr>
+        <a:solidFill>
+          <a:srgbClr val="FFFFFF"/>
+        </a:solidFill>
+        <a:effectLst/>
+      </p:bgPr>
+    </p:bg>
+    <p:spTree>
+      <p:nvGrpSpPr>
+        <p:cNvPr id="1" name=""/>
+        <p:cNvGrpSpPr/>
+        <p:nvPr/>
+      </p:nvGrpSpPr>
+      <p:grpSpPr/>
+      <p:sp>
+        <p:nvSpPr>
+          <p:cNvPr id="2" name="Rectangle 1"/>
+          <p:cNvSpPr/>
+          <p:nvPr/>
+        </p:nvSpPr>
+        <p:spPr>
+          <a:xfrm>
+            <a:off x="0" y="0"/>
+            <a:ext cx="12191695" cy="960120"/>
+          </a:xfrm>
+          <a:prstGeom prst="rect">
+            <a:avLst/>
+          </a:prstGeom>
+          <a:solidFill>
+            <a:srgbClr val="095292"/>
+          </a:solidFill>
+          <a:ln>
+            <a:noFill/>
+          </a:ln>
+        </p:spPr>
+        <p:style>
+          <a:lnRef idx="1">
+            <a:schemeClr val="accent1"/>
+          </a:lnRef>
+          <a:fillRef idx="3">
+            <a:schemeClr val="accent1"/>
+          </a:fillRef>
+          <a:effectRef idx="2">
+            <a:schemeClr val="accent1"/>
+          </a:effectRef>
+          <a:fontRef idx="minor">
+            <a:schemeClr val="lt1"/>
+          </a:fontRef>
+        </p:style>
+        <p:txBody>
+          <a:bodyPr rtlCol="0" anchor="ctr"/>
+          <a:lstStyle/>
+          <a:p>
+            <a:pPr algn="ctr"/>
+          </a:p>
+        </p:txBody>
+      </p:sp>
+      <p:sp>
+        <p:nvSpPr>
+          <p:cNvPr id="3" name="Rectangle 2"/>
+          <p:cNvSpPr/>
+          <p:nvPr/>
+        </p:nvSpPr>
+        <p:spPr>
+          <a:xfrm>
+            <a:off x="0" y="960120"/>
+            <a:ext cx="12191695" cy="41148"/>
+          </a:xfrm>
+          <a:prstGeom prst="rect">
+            <a:avLst/>
+          </a:prstGeom>
+          <a:solidFill>
+            <a:srgbClr val="FFD000"/>
+          </a:solidFill>
+          <a:ln>
+            <a:noFill/>
+          </a:ln>
+        </p:spPr>
+        <p:style>
+          <a:lnRef idx="1">
+            <a:schemeClr val="accent1"/>
+          </a:lnRef>
+          <a:fillRef idx="3">
+            <a:schemeClr val="accent1"/>
+          </a:fillRef>
+          <a:effectRef idx="2">
+            <a:schemeClr val="accent1"/>
+          </a:effectRef>
+          <a:fontRef idx="minor">
+            <a:schemeClr val="lt1"/>
+          </a:fontRef>
+        </p:style>
+        <p:txBody>
+          <a:bodyPr rtlCol="0" anchor="ctr"/>
+          <a:lstStyle/>
+          <a:p>
+            <a:pPr algn="ctr"/>
+          </a:p>
+        </p:txBody>
+      </p:sp>
+      <p:sp>
+        <p:nvSpPr>
+          <p:cNvPr id="4" name="TextBox 3"/>
+          <p:cNvSpPr txBox="1"/>
+          <p:nvPr/>
+        </p:nvSpPr>
+        <p:spPr>
+          <a:xfrm>
+            <a:off x="457200" y="164592"/>
+            <a:ext cx="11277295" cy="502920"/>
+          </a:xfrm>
+          <a:prstGeom prst="rect">
+            <a:avLst/>
+          </a:prstGeom>
+          <a:noFill/>
+        </p:spPr>
+        <p:txBody>
+          <a:bodyPr wrap="square">
+            <a:spAutoFit/>
+          </a:bodyPr>
+          <a:lstStyle/>
+          <a:p>
+            <a:r>
+              <a:rPr sz="2600" b="1" i="0">
+                <a:solidFill>
+                  <a:srgbClr val="FFFFFF"/>
+                </a:solidFill>
+                <a:latin typeface="Calibri"/>
+              </a:rPr>
+              <a:t>PI CloudLite — entregable de hoy</a:t>
+            </a:r>
+          </a:p>
+        </p:txBody>
+      </p:sp>
+      <p:sp>
+        <p:nvSpPr>
+          <p:cNvPr id="5" name="TextBox 4"/>
+          <p:cNvSpPr txBox="1"/>
+          <p:nvPr/>
+        </p:nvSpPr>
+        <p:spPr>
+          <a:xfrm>
+            <a:off x="457200" y="1170432"/>
+            <a:ext cx="11277295" cy="5230368"/>
+          </a:xfrm>
+          <a:prstGeom prst="rect">
+            <a:avLst/>
+          </a:prstGeom>
+          <a:noFill/>
+        </p:spPr>
+        <p:txBody>
+          <a:bodyPr wrap="square">
+            <a:spAutoFit/>
+          </a:bodyPr>
+          <a:lstStyle/>
+          <a:p>
+            <a:pPr>
+              <a:spcAft>
+                <a:spcPts val="800"/>
+              </a:spcAft>
+            </a:pPr>
+            <a:r>
+              <a:rPr sz="2000" b="0" i="0">
+                <a:solidFill>
+                  <a:srgbClr val="333333"/>
+                </a:solidFill>
+                <a:latin typeface="Calibri"/>
+              </a:rPr>
+              <a:t>–   </a:t>
+            </a:r>
+            <a:r>
+              <a:rPr sz="2000" b="1" i="0">
+                <a:solidFill>
+                  <a:srgbClr val="333333"/>
+                </a:solidFill>
+                <a:latin typeface="Calibri"/>
+              </a:rPr>
+              <a:t>Entregable:</a:t>
+            </a:r>
+            <a:r>
+              <a:rPr sz="2000" b="0" i="0">
+                <a:solidFill>
+                  <a:srgbClr val="333333"/>
+                </a:solidFill>
+                <a:latin typeface="Calibri"/>
+              </a:rPr>
+              <a:t> Diagrama Deployment en Mermaid dentro de la plataforma del curso (3 zonas + puertos) + tipo de almacenamiento por componente</a:t>
+            </a:r>
+          </a:p>
+          <a:p>
+            <a:pPr>
+              <a:spcAft>
+                <a:spcPts val="800"/>
+              </a:spcAft>
+            </a:pPr>
+            <a:r>
+              <a:rPr sz="2000" b="0" i="0">
+                <a:solidFill>
+                  <a:srgbClr val="333333"/>
+                </a:solidFill>
+                <a:latin typeface="Calibri"/>
+              </a:rPr>
+              <a:t>–   Herramienta: </a:t>
+            </a:r>
+            <a:r>
+              <a:rPr sz="2000" b="1" i="0">
+                <a:solidFill>
+                  <a:srgbClr val="333333"/>
+                </a:solidFill>
+                <a:latin typeface="Calibri"/>
+              </a:rPr>
+              <a:t>la plataforma del curso (Mermaid) · boceto en draw.io o Excalidraw</a:t>
+            </a:r>
+          </a:p>
+          <a:p>
+            <a:pPr>
+              <a:spcAft>
+                <a:spcPts val="800"/>
+              </a:spcAft>
+            </a:pPr>
+            <a:r>
+              <a:rPr sz="2000" b="0" i="0">
+                <a:solidFill>
+                  <a:srgbClr val="333333"/>
+                </a:solidFill>
+                <a:latin typeface="Calibri"/>
+              </a:rPr>
+              <a:t>–   Todo lo que construyan hoy entra al </a:t>
+            </a:r>
+            <a:r>
+              <a:rPr sz="2000" b="1" i="0">
+                <a:solidFill>
+                  <a:srgbClr val="333333"/>
+                </a:solidFill>
+                <a:latin typeface="Calibri"/>
+              </a:rPr>
+              <a:t>informe/repo del PI</a:t>
+            </a:r>
+            <a:r>
+              <a:rPr sz="2000" b="0" i="0">
+                <a:solidFill>
+                  <a:srgbClr val="333333"/>
+                </a:solidFill>
+                <a:latin typeface="Calibri"/>
+              </a:rPr>
+              <a:t> (no es lab suelto).</a:t>
+            </a:r>
+          </a:p>
+          <a:p>
+            <a:pPr>
+              <a:spcAft>
+                <a:spcPts val="800"/>
+              </a:spcAft>
+            </a:pPr>
+            <a:r>
+              <a:rPr sz="2000" b="0" i="0">
+                <a:solidFill>
+                  <a:srgbClr val="333333"/>
+                </a:solidFill>
+                <a:latin typeface="Calibri"/>
+              </a:rPr>
+              <a:t>–   Individual por defecto · el docente puede autorizar equipos de 2–3; la entrega en la plataforma del curso siempre es individual.</a:t>
+            </a:r>
+          </a:p>
+        </p:txBody>
+      </p:sp>
+      <p:sp>
+        <p:nvSpPr>
+          <p:cNvPr id="6" name="TextBox 5"/>
+          <p:cNvSpPr txBox="1"/>
+          <p:nvPr/>
+        </p:nvSpPr>
+        <p:spPr>
+          <a:xfrm>
+            <a:off x="11185855" y="6473952"/>
+            <a:ext cx="640080" cy="274320"/>
+          </a:xfrm>
+          <a:prstGeom prst="rect">
+            <a:avLst/>
+          </a:prstGeom>
+          <a:noFill/>
+        </p:spPr>
+        <p:txBody>
+          <a:bodyPr wrap="square">
+            <a:spAutoFit/>
+          </a:bodyPr>
+          <a:lstStyle/>
+          <a:p>
+            <a:pPr algn="r"/>
+            <a:r>
+              <a:rPr sz="1100" b="0" i="0">
+                <a:solidFill>
+                  <a:srgbClr val="666666"/>
+                </a:solidFill>
+                <a:latin typeface="Calibri"/>
+              </a:rPr>
+              <a:t>34</a:t>
+            </a:r>
+          </a:p>
+        </p:txBody>
+      </p:sp>
+    </p:spTree>
+  </p:cSld>
+  <p:clrMapOvr>
+    <a:masterClrMapping/>
+  </p:clrMapOvr>
+</p:sld>
+</file>
+
+<file path=ppt/slides/slide35.xml><?xml version="1.0" encoding="utf-8"?>
+<p:sld xmlns:a="http://schemas.openxmlformats.org/drawingml/2006/main" xmlns:p="http://schemas.openxmlformats.org/presentationml/2006/main" xmlns:r="http://schemas.openxmlformats.org/officeDocument/2006/relationships">
+  <p:cSld>
+    <p:bg>
+      <p:bgPr>
+        <a:solidFill>
+          <a:srgbClr val="FFFFFF"/>
+        </a:solidFill>
+        <a:effectLst/>
+      </p:bgPr>
+    </p:bg>
+    <p:spTree>
+      <p:nvGrpSpPr>
+        <p:cNvPr id="1" name=""/>
+        <p:cNvGrpSpPr/>
+        <p:nvPr/>
+      </p:nvGrpSpPr>
+      <p:grpSpPr/>
+      <p:sp>
+        <p:nvSpPr>
+          <p:cNvPr id="2" name="Rectangle 1"/>
+          <p:cNvSpPr/>
+          <p:nvPr/>
+        </p:nvSpPr>
+        <p:spPr>
+          <a:xfrm>
+            <a:off x="0" y="0"/>
+            <a:ext cx="12191695" cy="960120"/>
+          </a:xfrm>
+          <a:prstGeom prst="rect">
+            <a:avLst/>
+          </a:prstGeom>
+          <a:solidFill>
+            <a:srgbClr val="095292"/>
+          </a:solidFill>
+          <a:ln>
+            <a:noFill/>
+          </a:ln>
+        </p:spPr>
+        <p:style>
+          <a:lnRef idx="1">
+            <a:schemeClr val="accent1"/>
+          </a:lnRef>
+          <a:fillRef idx="3">
+            <a:schemeClr val="accent1"/>
+          </a:fillRef>
+          <a:effectRef idx="2">
+            <a:schemeClr val="accent1"/>
+          </a:effectRef>
+          <a:fontRef idx="minor">
+            <a:schemeClr val="lt1"/>
+          </a:fontRef>
+        </p:style>
+        <p:txBody>
+          <a:bodyPr rtlCol="0" anchor="ctr"/>
+          <a:lstStyle/>
+          <a:p>
+            <a:pPr algn="ctr"/>
+          </a:p>
+        </p:txBody>
+      </p:sp>
+      <p:sp>
+        <p:nvSpPr>
+          <p:cNvPr id="3" name="Rectangle 2"/>
+          <p:cNvSpPr/>
+          <p:nvPr/>
+        </p:nvSpPr>
+        <p:spPr>
+          <a:xfrm>
+            <a:off x="0" y="960120"/>
+            <a:ext cx="12191695" cy="41148"/>
+          </a:xfrm>
+          <a:prstGeom prst="rect">
+            <a:avLst/>
+          </a:prstGeom>
+          <a:solidFill>
+            <a:srgbClr val="FFD000"/>
+          </a:solidFill>
+          <a:ln>
+            <a:noFill/>
+          </a:ln>
+        </p:spPr>
+        <p:style>
+          <a:lnRef idx="1">
+            <a:schemeClr val="accent1"/>
+          </a:lnRef>
+          <a:fillRef idx="3">
+            <a:schemeClr val="accent1"/>
+          </a:fillRef>
+          <a:effectRef idx="2">
+            <a:schemeClr val="accent1"/>
+          </a:effectRef>
+          <a:fontRef idx="minor">
+            <a:schemeClr val="lt1"/>
+          </a:fontRef>
+        </p:style>
+        <p:txBody>
+          <a:bodyPr rtlCol="0" anchor="ctr"/>
+          <a:lstStyle/>
+          <a:p>
+            <a:pPr algn="ctr"/>
+          </a:p>
+        </p:txBody>
+      </p:sp>
+      <p:sp>
+        <p:nvSpPr>
+          <p:cNvPr id="4" name="TextBox 3"/>
+          <p:cNvSpPr txBox="1"/>
+          <p:nvPr/>
+        </p:nvSpPr>
+        <p:spPr>
+          <a:xfrm>
+            <a:off x="457200" y="164592"/>
+            <a:ext cx="11277295" cy="502920"/>
+          </a:xfrm>
+          <a:prstGeom prst="rect">
+            <a:avLst/>
+          </a:prstGeom>
+          <a:noFill/>
+        </p:spPr>
+        <p:txBody>
+          <a:bodyPr wrap="square">
+            <a:spAutoFit/>
+          </a:bodyPr>
+          <a:lstStyle/>
+          <a:p>
+            <a:r>
+              <a:rPr sz="2600" b="1" i="0">
+                <a:solidFill>
+                  <a:srgbClr val="FFFFFF"/>
+                </a:solidFill>
+                <a:latin typeface="Calibri"/>
+              </a:rPr>
+              <a:t>Manos a la obra (paso a paso)</a:t>
+            </a:r>
+          </a:p>
+        </p:txBody>
+      </p:sp>
+      <p:sp>
+        <p:nvSpPr>
+          <p:cNvPr id="5" name="TextBox 4"/>
+          <p:cNvSpPr txBox="1"/>
+          <p:nvPr/>
+        </p:nvSpPr>
+        <p:spPr>
+          <a:xfrm>
+            <a:off x="457200" y="1170432"/>
+            <a:ext cx="11277295" cy="5230368"/>
+          </a:xfrm>
+          <a:prstGeom prst="rect">
+            <a:avLst/>
+          </a:prstGeom>
+          <a:noFill/>
+        </p:spPr>
+        <p:txBody>
+          <a:bodyPr wrap="square">
+            <a:spAutoFit/>
+          </a:bodyPr>
+          <a:lstStyle/>
+          <a:p>
+            <a:pPr>
+              <a:spcAft>
+                <a:spcPts val="800"/>
+              </a:spcAft>
+            </a:pPr>
+            <a:r>
+              <a:rPr sz="2000" b="1" i="0">
+                <a:solidFill>
+                  <a:srgbClr val="333333"/>
+                </a:solidFill>
+                <a:latin typeface="Calibri"/>
+              </a:rPr>
+              <a:t>1.</a:t>
+            </a:r>
+            <a:r>
+              <a:rPr sz="2000" b="0" i="0">
+                <a:solidFill>
+                  <a:srgbClr val="333333"/>
+                </a:solidFill>
+                <a:latin typeface="Calibri"/>
+              </a:rPr>
+              <a:t> Paso 1: dibuje primero el boceto del despliegue en Excalidraw o draw.io con las tres zonas (publica, privada y de datos), y despues pidale a una IA que lo traduzca a Mermaid; peguelo en la pregunta 4 y verifique en el diagrama ya renderizado que la base de datos NO quede en la zona publica.</a:t>
+            </a:r>
+          </a:p>
+          <a:p>
+            <a:pPr>
+              <a:spcAft>
+                <a:spcPts val="800"/>
+              </a:spcAft>
+            </a:pPr>
+            <a:r>
+              <a:rPr sz="2000" b="0" i="0">
+                <a:solidFill>
+                  <a:srgbClr val="333333"/>
+                </a:solidFill>
+                <a:latin typeface="Calibri"/>
+              </a:rPr>
+              <a:t>–   </a:t>
+            </a:r>
+            <a:r>
+              <a:rPr sz="2000" b="1" i="0">
+                <a:solidFill>
+                  <a:srgbClr val="333333"/>
+                </a:solidFill>
+                <a:latin typeface="Calibri"/>
+              </a:rPr>
+              <a:t>2.</a:t>
+            </a:r>
+            <a:r>
+              <a:rPr sz="2000" b="0" i="0">
+                <a:solidFill>
+                  <a:srgbClr val="333333"/>
+                </a:solidFill>
+                <a:latin typeface="Calibri"/>
+              </a:rPr>
+              <a:t> Paso 2: etiquete en ese mismo diagrama el puerto de cada componente y marque las fronteras de confianza, es decir donde termina lo que usted controla; verifique que no aparezcan nombres de subredes ni de servicios de un proveedor concreto.</a:t>
+            </a:r>
+          </a:p>
+          <a:p>
+            <a:pPr>
+              <a:spcAft>
+                <a:spcPts val="800"/>
+              </a:spcAft>
+            </a:pPr>
+            <a:r>
+              <a:rPr sz="2000" b="0" i="0">
+                <a:solidFill>
+                  <a:srgbClr val="333333"/>
+                </a:solidFill>
+                <a:latin typeface="Calibri"/>
+              </a:rPr>
+              <a:t>–   </a:t>
+            </a:r>
+            <a:r>
+              <a:rPr sz="2000" b="1" i="0">
+                <a:solidFill>
+                  <a:srgbClr val="333333"/>
+                </a:solidFill>
+                <a:latin typeface="Calibri"/>
+              </a:rPr>
+              <a:t>3.</a:t>
+            </a:r>
+            <a:r>
+              <a:rPr sz="2000" b="0" i="0">
+                <a:solidFill>
+                  <a:srgbClr val="333333"/>
+                </a:solidFill>
+                <a:latin typeface="Calibri"/>
+              </a:rPr>
+              <a:t> Paso 3: justifique en la pregunta 5 el tipo de almacenamiento de cada componente diciendo que caracteristica del dato lo exige; si su dominio no necesita almacenamiento de objetos, declarelo y justifiquelo en vez de agregarlo.</a:t>
+            </a:r>
+          </a:p>
+          <a:p>
+            <a:pPr>
+              <a:spcAft>
+                <a:spcPts val="800"/>
+              </a:spcAft>
+            </a:pPr>
+            <a:r>
+              <a:rPr sz="2000" b="0" i="0">
+                <a:solidFill>
+                  <a:srgbClr val="333333"/>
+                </a:solidFill>
+                <a:latin typeface="Calibri"/>
+              </a:rPr>
+              <a:t>–   </a:t>
+            </a:r>
+            <a:r>
+              <a:rPr sz="2000" b="1" i="0">
+                <a:solidFill>
+                  <a:srgbClr val="333333"/>
+                </a:solidFill>
+                <a:latin typeface="Calibri"/>
+              </a:rPr>
+              <a:t>4.</a:t>
+            </a:r>
+            <a:r>
+              <a:rPr sz="2000" b="0" i="0">
+                <a:solidFill>
+                  <a:srgbClr val="333333"/>
+                </a:solidFill>
+                <a:latin typeface="Calibri"/>
+              </a:rPr>
+              <a:t> Paso 4: complete en la pregunta 6 la tabla de correspondencia entre el C4 Containers y el Despliegue, con una fila por componente y su zona, y liste los renombres que aplico; si no hubo ninguno, digalo explicitamente.</a:t>
+            </a:r>
+          </a:p>
+        </p:txBody>
+      </p:sp>
+      <p:sp>
+        <p:nvSpPr>
+          <p:cNvPr id="6" name="TextBox 5"/>
+          <p:cNvSpPr txBox="1"/>
+          <p:nvPr/>
+        </p:nvSpPr>
+        <p:spPr>
+          <a:xfrm>
+            <a:off x="11185855" y="6473952"/>
+            <a:ext cx="640080" cy="274320"/>
+          </a:xfrm>
+          <a:prstGeom prst="rect">
+            <a:avLst/>
+          </a:prstGeom>
+          <a:noFill/>
+        </p:spPr>
+        <p:txBody>
+          <a:bodyPr wrap="square">
+            <a:spAutoFit/>
+          </a:bodyPr>
+          <a:lstStyle/>
+          <a:p>
+            <a:pPr algn="r"/>
+            <a:r>
+              <a:rPr sz="1100" b="0" i="0">
+                <a:solidFill>
+                  <a:srgbClr val="666666"/>
+                </a:solidFill>
+                <a:latin typeface="Calibri"/>
+              </a:rPr>
+              <a:t>35</a:t>
+            </a:r>
+          </a:p>
+        </p:txBody>
+      </p:sp>
+    </p:spTree>
+  </p:cSld>
+  <p:clrMapOvr>
+    <a:masterClrMapping/>
+  </p:clrMapOvr>
+</p:sld>
+</file>
+
+<file path=ppt/slides/slide36.xml><?xml version="1.0" encoding="utf-8"?>
+<p:sld xmlns:a="http://schemas.openxmlformats.org/drawingml/2006/main" xmlns:p="http://schemas.openxmlformats.org/presentationml/2006/main" xmlns:r="http://schemas.openxmlformats.org/officeDocument/2006/relationships">
+  <p:cSld>
+    <p:bg>
+      <p:bgPr>
+        <a:solidFill>
+          <a:srgbClr val="FFFFFF"/>
+        </a:solidFill>
+        <a:effectLst/>
+      </p:bgPr>
+    </p:bg>
+    <p:spTree>
+      <p:nvGrpSpPr>
+        <p:cNvPr id="1" name=""/>
+        <p:cNvGrpSpPr/>
+        <p:nvPr/>
+      </p:nvGrpSpPr>
+      <p:grpSpPr/>
+      <p:sp>
+        <p:nvSpPr>
+          <p:cNvPr id="2" name="Rectangle 1"/>
+          <p:cNvSpPr/>
+          <p:nvPr/>
+        </p:nvSpPr>
+        <p:spPr>
+          <a:xfrm>
+            <a:off x="0" y="0"/>
+            <a:ext cx="12191695" cy="960120"/>
+          </a:xfrm>
+          <a:prstGeom prst="rect">
+            <a:avLst/>
+          </a:prstGeom>
+          <a:solidFill>
+            <a:srgbClr val="095292"/>
+          </a:solidFill>
+          <a:ln>
+            <a:noFill/>
+          </a:ln>
+        </p:spPr>
+        <p:style>
+          <a:lnRef idx="1">
+            <a:schemeClr val="accent1"/>
+          </a:lnRef>
+          <a:fillRef idx="3">
+            <a:schemeClr val="accent1"/>
+          </a:fillRef>
+          <a:effectRef idx="2">
+            <a:schemeClr val="accent1"/>
+          </a:effectRef>
+          <a:fontRef idx="minor">
+            <a:schemeClr val="lt1"/>
+          </a:fontRef>
+        </p:style>
+        <p:txBody>
+          <a:bodyPr rtlCol="0" anchor="ctr"/>
+          <a:lstStyle/>
+          <a:p>
+            <a:pPr algn="ctr"/>
+          </a:p>
+        </p:txBody>
+      </p:sp>
+      <p:sp>
+        <p:nvSpPr>
+          <p:cNvPr id="3" name="Rectangle 2"/>
+          <p:cNvSpPr/>
+          <p:nvPr/>
+        </p:nvSpPr>
+        <p:spPr>
+          <a:xfrm>
+            <a:off x="0" y="960120"/>
+            <a:ext cx="12191695" cy="41148"/>
+          </a:xfrm>
+          <a:prstGeom prst="rect">
+            <a:avLst/>
+          </a:prstGeom>
+          <a:solidFill>
+            <a:srgbClr val="FFD000"/>
+          </a:solidFill>
+          <a:ln>
+            <a:noFill/>
+          </a:ln>
+        </p:spPr>
+        <p:style>
+          <a:lnRef idx="1">
+            <a:schemeClr val="accent1"/>
+          </a:lnRef>
+          <a:fillRef idx="3">
+            <a:schemeClr val="accent1"/>
+          </a:fillRef>
+          <a:effectRef idx="2">
+            <a:schemeClr val="accent1"/>
+          </a:effectRef>
+          <a:fontRef idx="minor">
+            <a:schemeClr val="lt1"/>
+          </a:fontRef>
+        </p:style>
+        <p:txBody>
+          <a:bodyPr rtlCol="0" anchor="ctr"/>
+          <a:lstStyle/>
+          <a:p>
+            <a:pPr algn="ctr"/>
+          </a:p>
+        </p:txBody>
+      </p:sp>
+      <p:sp>
+        <p:nvSpPr>
+          <p:cNvPr id="4" name="TextBox 3"/>
+          <p:cNvSpPr txBox="1"/>
+          <p:nvPr/>
+        </p:nvSpPr>
+        <p:spPr>
+          <a:xfrm>
+            <a:off x="457200" y="164592"/>
+            <a:ext cx="11277295" cy="502920"/>
+          </a:xfrm>
+          <a:prstGeom prst="rect">
+            <a:avLst/>
+          </a:prstGeom>
+          <a:noFill/>
+        </p:spPr>
+        <p:txBody>
+          <a:bodyPr wrap="square">
+            <a:spAutoFit/>
+          </a:bodyPr>
+          <a:lstStyle/>
+          <a:p>
+            <a:r>
+              <a:rPr sz="2600" b="1" i="0">
+                <a:solidFill>
+                  <a:srgbClr val="FFFFFF"/>
+                </a:solidFill>
+                <a:latin typeface="Calibri"/>
+              </a:rPr>
+              <a:t>Para continuar (PI)</a:t>
+            </a:r>
+          </a:p>
+        </p:txBody>
+      </p:sp>
+      <p:sp>
+        <p:nvSpPr>
+          <p:cNvPr id="5" name="Rounded Rectangle 4"/>
+          <p:cNvSpPr/>
+          <p:nvPr/>
+        </p:nvSpPr>
+        <p:spPr>
+          <a:xfrm>
+            <a:off x="457200" y="1261872"/>
+            <a:ext cx="11277295" cy="1051560"/>
+          </a:xfrm>
+          <a:prstGeom prst="roundRect">
+            <a:avLst>
+              <a:gd name="adj" fmla="val 12000"/>
+            </a:avLst>
+          </a:prstGeom>
+          <a:solidFill>
+            <a:srgbClr val="E8F4FA"/>
+          </a:solidFill>
+          <a:ln>
+            <a:noFill/>
+          </a:ln>
+        </p:spPr>
+        <p:style>
+          <a:lnRef idx="1">
+            <a:schemeClr val="accent1"/>
+          </a:lnRef>
+          <a:fillRef idx="3">
+            <a:schemeClr val="accent1"/>
+          </a:fillRef>
+          <a:effectRef idx="2">
+            <a:schemeClr val="accent1"/>
+          </a:effectRef>
+          <a:fontRef idx="minor">
+            <a:schemeClr val="lt1"/>
+          </a:fontRef>
+        </p:style>
+        <p:txBody>
+          <a:bodyPr rtlCol="0" anchor="ctr"/>
+          <a:lstStyle/>
+          <a:p>
+            <a:pPr algn="ctr"/>
+          </a:p>
+        </p:txBody>
+      </p:sp>
+      <p:sp>
+        <p:nvSpPr>
+          <p:cNvPr id="6" name="Rectangle 5"/>
+          <p:cNvSpPr/>
+          <p:nvPr/>
+        </p:nvSpPr>
+        <p:spPr>
+          <a:xfrm>
+            <a:off x="457200" y="1261872"/>
+            <a:ext cx="128016" cy="1051560"/>
+          </a:xfrm>
+          <a:prstGeom prst="rect">
+            <a:avLst/>
+          </a:prstGeom>
+          <a:solidFill>
+            <a:srgbClr val="269CCB"/>
+          </a:solidFill>
+          <a:ln>
+            <a:noFill/>
+          </a:ln>
+        </p:spPr>
+        <p:style>
+          <a:lnRef idx="1">
+            <a:schemeClr val="accent1"/>
+          </a:lnRef>
+          <a:fillRef idx="3">
+            <a:schemeClr val="accent1"/>
+          </a:fillRef>
+          <a:effectRef idx="2">
+            <a:schemeClr val="accent1"/>
+          </a:effectRef>
+          <a:fontRef idx="minor">
+            <a:schemeClr val="lt1"/>
+          </a:fontRef>
+        </p:style>
+        <p:txBody>
+          <a:bodyPr rtlCol="0" anchor="ctr"/>
+          <a:lstStyle/>
+          <a:p>
+            <a:pPr algn="ctr"/>
+          </a:p>
+        </p:txBody>
+      </p:sp>
+      <p:sp>
+        <p:nvSpPr>
+          <p:cNvPr id="7" name="TextBox 6"/>
+          <p:cNvSpPr txBox="1"/>
+          <p:nvPr/>
+        </p:nvSpPr>
+        <p:spPr>
+          <a:xfrm>
+            <a:off x="777240" y="1399031"/>
+            <a:ext cx="10774375" cy="822959"/>
+          </a:xfrm>
+          <a:prstGeom prst="rect">
+            <a:avLst/>
+          </a:prstGeom>
+          <a:noFill/>
+        </p:spPr>
+        <p:txBody>
+          <a:bodyPr wrap="square">
+            <a:spAutoFit/>
+          </a:bodyPr>
+          <a:lstStyle/>
+          <a:p>
+            <a:r>
+              <a:rPr sz="1200" b="1" i="0">
+                <a:solidFill>
+                  <a:srgbClr val="269CCB"/>
+                </a:solidFill>
+                <a:latin typeface="Calibri"/>
+              </a:rPr>
+              <a:t>Info</a:t>
+            </a:r>
+          </a:p>
+          <a:p>
+            <a:pPr>
+              <a:spcBef>
+                <a:spcPts val="400"/>
+              </a:spcBef>
+            </a:pPr>
+            <a:r>
+              <a:rPr sz="1400" b="0" i="0">
+                <a:solidFill>
+                  <a:srgbClr val="333333"/>
+                </a:solidFill>
+                <a:latin typeface="Calibri"/>
+              </a:rPr>
+              <a:t>Entregable: Diagrama Deployment en Mermaid dentro de la plataforma del curso (3 zonas + puertos) + tipo de almacenamiento por componente</a:t>
+            </a:r>
+          </a:p>
+        </p:txBody>
+      </p:sp>
+      <p:sp>
+        <p:nvSpPr>
+          <p:cNvPr id="8" name="Rounded Rectangle 7"/>
+          <p:cNvSpPr/>
+          <p:nvPr/>
+        </p:nvSpPr>
+        <p:spPr>
+          <a:xfrm>
+            <a:off x="457200" y="2478024"/>
+            <a:ext cx="11277295" cy="1051560"/>
+          </a:xfrm>
+          <a:prstGeom prst="roundRect">
+            <a:avLst>
+              <a:gd name="adj" fmla="val 12000"/>
+            </a:avLst>
+          </a:prstGeom>
+          <a:solidFill>
+            <a:srgbClr val="FFF8E1"/>
+          </a:solidFill>
+          <a:ln>
+            <a:noFill/>
+          </a:ln>
+        </p:spPr>
+        <p:style>
+          <a:lnRef idx="1">
+            <a:schemeClr val="accent1"/>
+          </a:lnRef>
+          <a:fillRef idx="3">
+            <a:schemeClr val="accent1"/>
+          </a:fillRef>
+          <a:effectRef idx="2">
+            <a:schemeClr val="accent1"/>
+          </a:effectRef>
+          <a:fontRef idx="minor">
+            <a:schemeClr val="lt1"/>
+          </a:fontRef>
+        </p:style>
+        <p:txBody>
+          <a:bodyPr rtlCol="0" anchor="ctr"/>
+          <a:lstStyle/>
+          <a:p>
+            <a:pPr algn="ctr"/>
+          </a:p>
+        </p:txBody>
+      </p:sp>
+      <p:sp>
+        <p:nvSpPr>
+          <p:cNvPr id="9" name="Rectangle 8"/>
+          <p:cNvSpPr/>
+          <p:nvPr/>
+        </p:nvSpPr>
+        <p:spPr>
+          <a:xfrm>
+            <a:off x="457200" y="2478024"/>
+            <a:ext cx="128016" cy="1051560"/>
+          </a:xfrm>
+          <a:prstGeom prst="rect">
+            <a:avLst/>
+          </a:prstGeom>
+          <a:solidFill>
+            <a:srgbClr val="FFD000"/>
+          </a:solidFill>
+          <a:ln>
+            <a:noFill/>
+          </a:ln>
+        </p:spPr>
+        <p:style>
+          <a:lnRef idx="1">
+            <a:schemeClr val="accent1"/>
+          </a:lnRef>
+          <a:fillRef idx="3">
+            <a:schemeClr val="accent1"/>
+          </a:fillRef>
+          <a:effectRef idx="2">
+            <a:schemeClr val="accent1"/>
+          </a:effectRef>
+          <a:fontRef idx="minor">
+            <a:schemeClr val="lt1"/>
+          </a:fontRef>
+        </p:style>
+        <p:txBody>
+          <a:bodyPr rtlCol="0" anchor="ctr"/>
+          <a:lstStyle/>
+          <a:p>
+            <a:pPr algn="ctr"/>
+          </a:p>
+        </p:txBody>
+      </p:sp>
+      <p:sp>
+        <p:nvSpPr>
+          <p:cNvPr id="10" name="TextBox 9"/>
+          <p:cNvSpPr txBox="1"/>
+          <p:nvPr/>
+        </p:nvSpPr>
+        <p:spPr>
+          <a:xfrm>
+            <a:off x="777240" y="2615184"/>
+            <a:ext cx="10774375" cy="822959"/>
+          </a:xfrm>
+          <a:prstGeom prst="rect">
+            <a:avLst/>
+          </a:prstGeom>
+          <a:noFill/>
+        </p:spPr>
+        <p:txBody>
+          <a:bodyPr wrap="square">
+            <a:spAutoFit/>
+          </a:bodyPr>
+          <a:lstStyle/>
+          <a:p>
+            <a:r>
+              <a:rPr sz="1200" b="1" i="0">
+                <a:solidFill>
+                  <a:srgbClr val="FFD000"/>
+                </a:solidFill>
+                <a:latin typeface="Calibri"/>
+              </a:rPr>
+              <a:t>Aclaración</a:t>
+            </a:r>
+          </a:p>
+          <a:p>
+            <a:pPr>
+              <a:spcBef>
+                <a:spcPts val="400"/>
+              </a:spcBef>
+            </a:pPr>
+            <a:r>
+              <a:rPr sz="1400" b="0" i="0">
+                <a:solidFill>
+                  <a:srgbClr val="333333"/>
+                </a:solidFill>
+                <a:latin typeface="Calibri"/>
+              </a:rPr>
+              <a:t>Subir evidencias al paquete CloudLite (Drive/repo) y a la plataforma del curso en la fecha que indique el docente.</a:t>
+            </a:r>
+          </a:p>
+        </p:txBody>
+      </p:sp>
+      <p:sp>
+        <p:nvSpPr>
+          <p:cNvPr id="11" name="Rounded Rectangle 10"/>
+          <p:cNvSpPr/>
+          <p:nvPr/>
+        </p:nvSpPr>
+        <p:spPr>
+          <a:xfrm>
+            <a:off x="457200" y="3694176"/>
+            <a:ext cx="11277295" cy="1051560"/>
+          </a:xfrm>
+          <a:prstGeom prst="roundRect">
+            <a:avLst>
+              <a:gd name="adj" fmla="val 12000"/>
+            </a:avLst>
+          </a:prstGeom>
+          <a:solidFill>
+            <a:srgbClr val="FBE4E4"/>
+          </a:solidFill>
+          <a:ln>
+            <a:noFill/>
+          </a:ln>
+        </p:spPr>
+        <p:style>
+          <a:lnRef idx="1">
+            <a:schemeClr val="accent1"/>
+          </a:lnRef>
+          <a:fillRef idx="3">
+            <a:schemeClr val="accent1"/>
+          </a:fillRef>
+          <a:effectRef idx="2">
+            <a:schemeClr val="accent1"/>
+          </a:effectRef>
+          <a:fontRef idx="minor">
+            <a:schemeClr val="lt1"/>
+          </a:fontRef>
+        </p:style>
+        <p:txBody>
+          <a:bodyPr rtlCol="0" anchor="ctr"/>
+          <a:lstStyle/>
+          <a:p>
+            <a:pPr algn="ctr"/>
+          </a:p>
+        </p:txBody>
+      </p:sp>
+      <p:sp>
+        <p:nvSpPr>
+          <p:cNvPr id="12" name="Rectangle 11"/>
+          <p:cNvSpPr/>
+          <p:nvPr/>
+        </p:nvSpPr>
+        <p:spPr>
+          <a:xfrm>
+            <a:off x="457200" y="3694176"/>
+            <a:ext cx="128016" cy="1051560"/>
+          </a:xfrm>
+          <a:prstGeom prst="rect">
+            <a:avLst/>
+          </a:prstGeom>
+          <a:solidFill>
+            <a:srgbClr val="A02030"/>
+          </a:solidFill>
+          <a:ln>
+            <a:noFill/>
+          </a:ln>
+        </p:spPr>
+        <p:style>
+          <a:lnRef idx="1">
+            <a:schemeClr val="accent1"/>
+          </a:lnRef>
+          <a:fillRef idx="3">
+            <a:schemeClr val="accent1"/>
+          </a:fillRef>
+          <a:effectRef idx="2">
+            <a:schemeClr val="accent1"/>
+          </a:effectRef>
+          <a:fontRef idx="minor">
+            <a:schemeClr val="lt1"/>
+          </a:fontRef>
+        </p:style>
+        <p:txBody>
+          <a:bodyPr rtlCol="0" anchor="ctr"/>
+          <a:lstStyle/>
+          <a:p>
+            <a:pPr algn="ctr"/>
+          </a:p>
+        </p:txBody>
+      </p:sp>
+      <p:sp>
+        <p:nvSpPr>
+          <p:cNvPr id="13" name="TextBox 12"/>
+          <p:cNvSpPr txBox="1"/>
+          <p:nvPr/>
+        </p:nvSpPr>
+        <p:spPr>
+          <a:xfrm>
+            <a:off x="777240" y="3831336"/>
+            <a:ext cx="10774375" cy="822959"/>
+          </a:xfrm>
+          <a:prstGeom prst="rect">
+            <a:avLst/>
+          </a:prstGeom>
+          <a:noFill/>
+        </p:spPr>
+        <p:txBody>
+          <a:bodyPr wrap="square">
+            <a:spAutoFit/>
+          </a:bodyPr>
+          <a:lstStyle/>
+          <a:p>
+            <a:r>
+              <a:rPr sz="1200" b="1" i="0">
+                <a:solidFill>
+                  <a:srgbClr val="A02030"/>
+                </a:solidFill>
+                <a:latin typeface="Calibri"/>
+              </a:rPr>
+              <a:t>Atención</a:t>
+            </a:r>
+          </a:p>
+          <a:p>
+            <a:pPr>
+              <a:spcBef>
+                <a:spcPts val="400"/>
+              </a:spcBef>
+            </a:pPr>
+            <a:r>
+              <a:rPr sz="1400" b="0" i="0">
+                <a:solidFill>
+                  <a:srgbClr val="333333"/>
+                </a:solidFill>
+                <a:latin typeface="Calibri"/>
+              </a:rPr>
+              <a:t>Sin cloud de pago ni instalaciones obligatorias de hipervisores/Docker Desktop.</a:t>
+            </a:r>
+          </a:p>
+        </p:txBody>
+      </p:sp>
+      <p:sp>
+        <p:nvSpPr>
+          <p:cNvPr id="14" name="TextBox 13"/>
+          <p:cNvSpPr txBox="1"/>
+          <p:nvPr/>
+        </p:nvSpPr>
+        <p:spPr>
+          <a:xfrm>
+            <a:off x="11185855" y="6473952"/>
+            <a:ext cx="640080" cy="274320"/>
+          </a:xfrm>
+          <a:prstGeom prst="rect">
+            <a:avLst/>
+          </a:prstGeom>
+          <a:noFill/>
+        </p:spPr>
+        <p:txBody>
+          <a:bodyPr wrap="square">
+            <a:spAutoFit/>
+          </a:bodyPr>
+          <a:lstStyle/>
+          <a:p>
+            <a:pPr algn="r"/>
+            <a:r>
+              <a:rPr sz="1100" b="0" i="0">
+                <a:solidFill>
+                  <a:srgbClr val="666666"/>
+                </a:solidFill>
+                <a:latin typeface="Calibri"/>
+              </a:rPr>
+              <a:t>36</a:t>
+            </a:r>
+          </a:p>
+        </p:txBody>
+      </p:sp>
+    </p:spTree>
+  </p:cSld>
+  <p:clrMapOvr>
+    <a:masterClrMapping/>
+  </p:clrMapOvr>
+</p:sld>
+</file>
+
+<file path=ppt/slides/slide37.xml><?xml version="1.0" encoding="utf-8"?>
+<p:sld xmlns:a="http://schemas.openxmlformats.org/drawingml/2006/main" xmlns:p="http://schemas.openxmlformats.org/presentationml/2006/main" xmlns:r="http://schemas.openxmlformats.org/officeDocument/2006/relationships">
+  <p:cSld>
+    <p:bg>
+      <p:bgPr>
+        <a:solidFill>
+          <a:srgbClr val="FFFFFF"/>
+        </a:solidFill>
+        <a:effectLst/>
+      </p:bgPr>
+    </p:bg>
+    <p:spTree>
+      <p:nvGrpSpPr>
+        <p:cNvPr id="1" name=""/>
+        <p:cNvGrpSpPr/>
+        <p:nvPr/>
+      </p:nvGrpSpPr>
+      <p:grpSpPr/>
+      <p:sp>
+        <p:nvSpPr>
+          <p:cNvPr id="2" name="Rectangle 1"/>
+          <p:cNvSpPr/>
+          <p:nvPr/>
+        </p:nvSpPr>
+        <p:spPr>
+          <a:xfrm>
+            <a:off x="0" y="0"/>
             <a:ext cx="12191695" cy="164592"/>
           </a:xfrm>
           <a:prstGeom prst="rect">
@@ -14515,22 +15175,6 @@
               <a:t>–   Un nodo es cualquier lugar de ejecucion: una maquina virtual, un host de contenedores, un servicio gestionado.</a:t>
             </a:r>
           </a:p>
-          <a:p>
-            <a:pPr>
-              <a:spcAft>
-                <a:spcPts val="800"/>
-              </a:spcAft>
-            </a:pPr>
-            <a:r>
-              <a:rPr sz="2000" b="0" i="0">
-                <a:solidFill>
-                  <a:srgbClr val="333333"/>
-                </a:solidFill>
-                <a:latin typeface="Calibri"/>
-              </a:rPr>
-              <a:t>–   Es el mismo sistema desde un tercer angulo, no un sistema nuevo, y por eso los nombres deben coincidir con los de la Clase 4.</a:t>
-            </a:r>
-          </a:p>
         </p:txBody>
       </p:sp>
       <p:sp>
@@ -14748,7 +15392,7 @@
                 </a:solidFill>
                 <a:latin typeface="Calibri"/>
               </a:rPr>
-              <a:t>–   Lo que se califica hoy son 25 de los 100 puntos de la actividad del Corte 2, en tres preguntas: 14 puntos el diagrama de despliegue, 5.5 el tipo de almacenamiento de cada componente y 5.5 la tabla de correspondencia con el C4 Containers.</a:t>
+              <a:t>–   Es el mismo sistema desde un tercer angulo, no un sistema nuevo, y por eso los nombres deben coincidir con los de la Clase 4.</a:t>
             </a:r>
           </a:p>
           <a:p>
@@ -14977,7 +15621,7 @@
                 </a:solidFill>
                 <a:latin typeface="Calibri"/>
               </a:rPr>
-              <a:t>IP, puerto y protocolo: las tres etiquetas de cada flecha</a:t>
+              <a:t>IP, puerto y protocolo: las tres etiquetas de cada flecha (1/2)</a:t>
             </a:r>
           </a:p>
         </p:txBody>
@@ -15016,7 +15660,7 @@
                 </a:solidFill>
                 <a:latin typeface="Calibri"/>
               </a:rPr>
-              <a:t>–   Una direccion IP identifica una maquina dentro de una red.</a:t>
+              <a:t>–   Un puerto es un numero entre 1 y 65535 que identifica a que proceso de esa maquina se entrega el trafico: la direccion lleva el paquete al edificio, el puerto lo lleva a la oficina.</a:t>
             </a:r>
           </a:p>
           <a:p>
@@ -15032,7 +15676,7 @@
                 </a:solidFill>
                 <a:latin typeface="Calibri"/>
               </a:rPr>
-              <a:t>–   Un puerto es un numero entre 1 y 65535 que identifica a que proceso de esa maquina se entrega el trafico: la direccion lleva el paquete al edificio, el puerto lo lleva a la oficina.</a:t>
+              <a:t>–   Un protocolo es el idioma de esa conexion: HTTP o HTTPS para la API, el protocolo propio del motor para la base de datos.</a:t>
             </a:r>
           </a:p>
           <a:p>
@@ -15048,87 +15692,7 @@
                 </a:solidFill>
                 <a:latin typeface="Calibri"/>
               </a:rPr>
-              <a:t>–   Un protocolo es el idioma de esa conexion: HTTP o HTTPS para la API, el protocolo propio del motor para la base de datos.</a:t>
-            </a:r>
-          </a:p>
-          <a:p>
-            <a:pPr>
-              <a:spcAft>
-                <a:spcPts val="800"/>
-              </a:spcAft>
-            </a:pPr>
-            <a:r>
-              <a:rPr sz="2000" b="0" i="0">
-                <a:solidFill>
-                  <a:srgbClr val="333333"/>
-                </a:solidFill>
-                <a:latin typeface="Calibri"/>
-              </a:rPr>
               <a:t>–   Hay puertos fijados por convencion registrada, no por ley fisica: 80 para HTTP, 443 para HTTPS, 5432 para PostgreSQL, 3306 para MySQL, 8080 para desarrollo.</a:t>
-            </a:r>
-          </a:p>
-          <a:p>
-            <a:pPr>
-              <a:spcAft>
-                <a:spcPts val="800"/>
-              </a:spcAft>
-            </a:pPr>
-            <a:r>
-              <a:rPr sz="2000" b="0" i="0">
-                <a:solidFill>
-                  <a:srgbClr val="333333"/>
-                </a:solidFill>
-                <a:latin typeface="Calibri"/>
-              </a:rPr>
-              <a:t>–   Nada impide correr una base de datos en el 9999, pero cambiar la convencion confunde a quien opera.</a:t>
-            </a:r>
-          </a:p>
-          <a:p>
-            <a:pPr>
-              <a:spcAft>
-                <a:spcPts val="800"/>
-              </a:spcAft>
-            </a:pPr>
-            <a:r>
-              <a:rPr sz="2000" b="0" i="0">
-                <a:solidFill>
-                  <a:srgbClr val="333333"/>
-                </a:solidFill>
-                <a:latin typeface="Calibri"/>
-              </a:rPr>
-              <a:t>–   Esto no es decorativo: la pregunta 4 da 2 puntos por que cada componente lleve su puerto etiquetado</a:t>
-            </a:r>
-          </a:p>
-          <a:p>
-            <a:pPr>
-              <a:spcAft>
-                <a:spcPts val="800"/>
-              </a:spcAft>
-            </a:pPr>
-            <a:r>
-              <a:rPr sz="2000" b="0" i="0">
-                <a:solidFill>
-                  <a:srgbClr val="333333"/>
-                </a:solidFill>
-                <a:latin typeface="Calibri"/>
-              </a:rPr>
-              <a:t>–   Y el diagrama de referencia usa exactamente tres, 443 en el edge, 8080 en la API y 5432 en la base de datos, que son los mismos que el estudiante ya escribio en el EXPOSE de su Dockerfile de la Clase 3.</a:t>
-            </a:r>
-          </a:p>
-          <a:p>
-            <a:pPr>
-              <a:spcAft>
-                <a:spcPts val="800"/>
-              </a:spcAft>
-            </a:pPr>
-            <a:r>
-              <a:rPr sz="2000" b="0" i="0">
-                <a:solidFill>
-                  <a:srgbClr val="333333"/>
-                </a:solidFill>
-                <a:latin typeface="Calibri"/>
-              </a:rPr>
-              <a:t>–   Ahi esta el amarre: cuando en Killercoda se ejecuto el contenedor publicando un puerto, esa linea era la decision de que superficie queda expuesta, tema de la Clase 6, y hoy esa decision se dibuja.</a:t>
             </a:r>
           </a:p>
         </p:txBody>

--- a/Arquitectura de Sistemas Computacionales/Clases/Clase 7 - Redes y almacenamiento cloud/Presentacion.pptx
+++ b/Arquitectura de Sistemas Computacionales/Clases/Clase 7 - Redes y almacenamiento cloud/Presentacion.pptx
@@ -42,6 +42,8 @@
     <p:sldId id="290" r:id="rId41"/>
     <p:sldId id="291" r:id="rId42"/>
     <p:sldId id="292" r:id="rId43"/>
+    <p:sldId id="293" r:id="rId44"/>
+    <p:sldId id="294" r:id="rId45"/>
   </p:sldIdLst>
   <p:sldSz cx="12191695" cy="6858000" type="screen4x3"/>
   <p:notesSz cx="6858000" cy="9144000"/>
@@ -9439,7 +9441,7 @@
         <p:spPr>
           <a:xfrm>
             <a:off x="0" y="0"/>
-            <a:ext cx="12191695" cy="1170432"/>
+            <a:ext cx="12191695" cy="960120"/>
           </a:xfrm>
           <a:prstGeom prst="rect">
             <a:avLst/>
@@ -9481,7 +9483,7 @@
         </p:nvSpPr>
         <p:spPr>
           <a:xfrm>
-            <a:off x="0" y="1170432"/>
+            <a:off x="0" y="960120"/>
             <a:ext cx="12191695" cy="41148"/>
           </a:xfrm>
           <a:prstGeom prst="rect">
@@ -9525,7 +9527,7 @@
         <p:spPr>
           <a:xfrm>
             <a:off x="457200" y="164592"/>
-            <a:ext cx="11277295" cy="384048"/>
+            <a:ext cx="11277295" cy="502920"/>
           </a:xfrm>
           <a:prstGeom prst="rect">
             <a:avLst/>
@@ -9545,55 +9547,21 @@
                 </a:solidFill>
                 <a:latin typeface="Calibri"/>
               </a:rPr>
-              <a:t>Ejemplo de diagrama de despliegue (Deployment)</a:t>
-            </a:r>
-          </a:p>
-        </p:txBody>
-      </p:sp>
-      <p:sp>
-        <p:nvSpPr>
-          <p:cNvPr id="5" name="TextBox 4"/>
-          <p:cNvSpPr txBox="1"/>
-          <p:nvPr/>
-        </p:nvSpPr>
-        <p:spPr>
-          <a:xfrm>
-            <a:off x="457200" y="566928"/>
-            <a:ext cx="11277295" cy="411480"/>
-          </a:xfrm>
-          <a:prstGeom prst="rect">
-            <a:avLst/>
-          </a:prstGeom>
-          <a:noFill/>
-        </p:spPr>
-        <p:txBody>
-          <a:bodyPr wrap="square">
-            <a:spAutoFit/>
-          </a:bodyPr>
-          <a:lstStyle/>
-          <a:p>
-            <a:r>
-              <a:rPr sz="1400" b="0" i="0">
-                <a:solidFill>
-                  <a:srgbClr val="B8D8EE"/>
-                </a:solidFill>
-                <a:latin typeface="Calibri"/>
-              </a:rPr>
-              <a:t>Zonas de confianza: qué es público, qué es privado, dónde viven los datos</a:t>
-            </a:r>
-          </a:p>
-        </p:txBody>
-      </p:sp>
-      <p:sp>
-        <p:nvSpPr>
-          <p:cNvPr id="6" name="Rounded Rectangle 5"/>
+              <a:t>El diagrama de Despliegue: donde corre cada cosa</a:t>
+            </a:r>
+          </a:p>
+        </p:txBody>
+      </p:sp>
+      <p:sp>
+        <p:nvSpPr>
+          <p:cNvPr id="5" name="Rounded Rectangle 4"/>
           <p:cNvSpPr/>
           <p:nvPr/>
         </p:nvSpPr>
         <p:spPr>
           <a:xfrm>
-            <a:off x="822960" y="2194560"/>
-            <a:ext cx="3291840" cy="1005840"/>
+            <a:off x="457200" y="1261872"/>
+            <a:ext cx="11277295" cy="5093208"/>
           </a:xfrm>
           <a:prstGeom prst="roundRect">
             <a:avLst>
@@ -9601,7 +9569,7 @@
             </a:avLst>
           </a:prstGeom>
           <a:solidFill>
-            <a:srgbClr val="FFD000"/>
+            <a:srgbClr val="1E2A38"/>
           </a:solidFill>
           <a:ln>
             <a:noFill/>
@@ -9622,38 +9590,26 @@
           </a:fontRef>
         </p:style>
         <p:txBody>
-          <a:bodyPr rtlCol="0" anchor="ctr" wrap="square"/>
+          <a:bodyPr rtlCol="0" anchor="ctr"/>
           <a:lstStyle/>
           <a:p>
             <a:pPr algn="ctr"/>
-            <a:r>
-              <a:rPr sz="1300" b="1" i="0">
-                <a:solidFill>
-                  <a:srgbClr val="095292"/>
-                </a:solidFill>
-                <a:latin typeface="Calibri"/>
-              </a:rPr>
-              <a:t>Zona pública
-(balanceador / edge)</a:t>
-            </a:r>
-          </a:p>
-        </p:txBody>
-      </p:sp>
-      <p:sp>
-        <p:nvSpPr>
-          <p:cNvPr id="7" name="Rounded Rectangle 6"/>
+          </a:p>
+        </p:txBody>
+      </p:sp>
+      <p:sp>
+        <p:nvSpPr>
+          <p:cNvPr id="6" name="Rectangle 5"/>
           <p:cNvSpPr/>
           <p:nvPr/>
         </p:nvSpPr>
         <p:spPr>
           <a:xfrm>
-            <a:off x="4754880" y="2194560"/>
-            <a:ext cx="3291840" cy="1005840"/>
-          </a:xfrm>
-          <a:prstGeom prst="roundRect">
-            <a:avLst>
-              <a:gd name="adj" fmla="val 12000"/>
-            </a:avLst>
+            <a:off x="457200" y="1261872"/>
+            <a:ext cx="11277295" cy="320040"/>
+          </a:xfrm>
+          <a:prstGeom prst="rect">
+            <a:avLst/>
           </a:prstGeom>
           <a:solidFill>
             <a:srgbClr val="095292"/>
@@ -9677,124 +9633,55 @@
           </a:fontRef>
         </p:style>
         <p:txBody>
-          <a:bodyPr rtlCol="0" anchor="ctr" wrap="square"/>
+          <a:bodyPr rtlCol="0" anchor="ctr"/>
           <a:lstStyle/>
           <a:p>
             <a:pPr algn="ctr"/>
-            <a:r>
-              <a:rPr sz="1300" b="1" i="0">
-                <a:solidFill>
-                  <a:srgbClr val="FFFFFF"/>
-                </a:solidFill>
-                <a:latin typeface="Calibri"/>
-              </a:rPr>
-              <a:t>Zona privada
-(app CloudLite)</a:t>
-            </a:r>
-          </a:p>
-        </p:txBody>
-      </p:sp>
-      <p:sp>
-        <p:nvSpPr>
-          <p:cNvPr id="8" name="Rounded Rectangle 7"/>
-          <p:cNvSpPr/>
-          <p:nvPr/>
-        </p:nvSpPr>
-        <p:spPr>
-          <a:xfrm>
-            <a:off x="8595360" y="2194560"/>
-            <a:ext cx="3291840" cy="1005840"/>
-          </a:xfrm>
-          <a:prstGeom prst="roundRect">
-            <a:avLst>
-              <a:gd name="adj" fmla="val 12000"/>
-            </a:avLst>
-          </a:prstGeom>
-          <a:solidFill>
-            <a:srgbClr val="269CCB"/>
-          </a:solidFill>
-          <a:ln>
-            <a:noFill/>
-          </a:ln>
-        </p:spPr>
-        <p:style>
-          <a:lnRef idx="1">
-            <a:schemeClr val="accent1"/>
-          </a:lnRef>
-          <a:fillRef idx="3">
-            <a:schemeClr val="accent1"/>
-          </a:fillRef>
-          <a:effectRef idx="2">
-            <a:schemeClr val="accent1"/>
-          </a:effectRef>
-          <a:fontRef idx="minor">
-            <a:schemeClr val="lt1"/>
-          </a:fontRef>
-        </p:style>
-        <p:txBody>
-          <a:bodyPr rtlCol="0" anchor="ctr" wrap="square"/>
-          <a:lstStyle/>
-          <a:p>
-            <a:pPr algn="ctr"/>
-            <a:r>
-              <a:rPr sz="1300" b="1" i="0">
-                <a:solidFill>
-                  <a:srgbClr val="FFFFFF"/>
-                </a:solidFill>
-                <a:latin typeface="Calibri"/>
-              </a:rPr>
-              <a:t>Zona de datos
-(base de datos)</a:t>
-            </a:r>
-          </a:p>
-        </p:txBody>
-      </p:sp>
-      <p:cxnSp>
-        <p:nvCxnSpPr>
-          <p:cNvPr id="9" name="Connector 8"/>
-          <p:cNvCxnSpPr/>
-          <p:nvPr/>
-        </p:nvCxnSpPr>
-        <p:spPr>
-          <a:xfrm>
-            <a:off x="4114800" y="2697480"/>
-            <a:ext cx="640080" cy="0"/>
-          </a:xfrm>
-          <a:prstGeom prst="line">
-            <a:avLst/>
-          </a:prstGeom>
-          <a:ln w="22225">
-            <a:solidFill>
-              <a:srgbClr val="666666"/>
-            </a:solidFill>
-            <a:tailEnd type="triangle" w="med" len="med"/>
-          </a:ln>
-        </p:spPr>
-        <p:style>
-          <a:lnRef idx="2">
-            <a:schemeClr val="accent1"/>
-          </a:lnRef>
-          <a:fillRef idx="0">
-            <a:schemeClr val="accent1"/>
-          </a:fillRef>
-          <a:effectRef idx="1">
-            <a:schemeClr val="accent1"/>
-          </a:effectRef>
-          <a:fontRef idx="minor">
-            <a:schemeClr val="tx1"/>
-          </a:fontRef>
-        </p:style>
-      </p:cxnSp>
-      <p:sp>
-        <p:nvSpPr>
-          <p:cNvPr id="10" name="TextBox 9"/>
+          </a:p>
+        </p:txBody>
+      </p:sp>
+      <p:sp>
+        <p:nvSpPr>
+          <p:cNvPr id="7" name="TextBox 6"/>
           <p:cNvSpPr txBox="1"/>
           <p:nvPr/>
         </p:nvSpPr>
         <p:spPr>
           <a:xfrm>
-            <a:off x="3611879" y="2496312"/>
-            <a:ext cx="1645920" cy="320040"/>
+            <a:off x="685800" y="1307592"/>
+            <a:ext cx="10820095" cy="256032"/>
+          </a:xfrm>
+          <a:prstGeom prst="rect">
+            <a:avLst/>
+          </a:prstGeom>
+          <a:noFill/>
+        </p:spPr>
+        <p:txBody>
+          <a:bodyPr wrap="square" anchor="ctr"/>
+          <a:lstStyle/>
+          <a:p>
+            <a:r>
+              <a:rPr sz="1000" b="1" i="0">
+                <a:solidFill>
+                  <a:srgbClr val="269CCB"/>
+                </a:solidFill>
+                <a:latin typeface="Calibri"/>
+              </a:rPr>
+              <a:t>● ● ●</a:t>
+            </a:r>
+          </a:p>
+        </p:txBody>
+      </p:sp>
+      <p:sp>
+        <p:nvSpPr>
+          <p:cNvPr id="8" name="TextBox 7"/>
+          <p:cNvSpPr txBox="1"/>
+          <p:nvPr/>
+        </p:nvSpPr>
+        <p:spPr>
+          <a:xfrm>
+            <a:off x="777240" y="1719072"/>
+            <a:ext cx="5181447" cy="4453128"/>
           </a:xfrm>
           <a:prstGeom prst="rect">
             <a:avLst/>
@@ -9807,65 +9694,209 @@
           </a:bodyPr>
           <a:lstStyle/>
           <a:p>
-            <a:pPr algn="ctr"/>
-            <a:r>
-              <a:rPr sz="1000" b="0" i="1">
-                <a:solidFill>
-                  <a:srgbClr val="666666"/>
-                </a:solidFill>
-                <a:latin typeface="Calibri"/>
-              </a:rPr>
-              <a:t>solo el 8080</a:t>
-            </a:r>
-          </a:p>
-        </p:txBody>
-      </p:sp>
-      <p:cxnSp>
-        <p:nvCxnSpPr>
-          <p:cNvPr id="11" name="Connector 10"/>
-          <p:cNvCxnSpPr/>
-          <p:nvPr/>
-        </p:nvCxnSpPr>
-        <p:spPr>
-          <a:xfrm>
-            <a:off x="8046720" y="2697480"/>
-            <a:ext cx="548640" cy="0"/>
-          </a:xfrm>
-          <a:prstGeom prst="line">
-            <a:avLst/>
-          </a:prstGeom>
-          <a:ln w="22225">
-            <a:solidFill>
-              <a:srgbClr val="666666"/>
-            </a:solidFill>
-            <a:tailEnd type="triangle" w="med" len="med"/>
-          </a:ln>
-        </p:spPr>
-        <p:style>
-          <a:lnRef idx="2">
-            <a:schemeClr val="accent1"/>
-          </a:lnRef>
-          <a:fillRef idx="0">
-            <a:schemeClr val="accent1"/>
-          </a:fillRef>
-          <a:effectRef idx="1">
-            <a:schemeClr val="accent1"/>
-          </a:effectRef>
-          <a:fontRef idx="minor">
-            <a:schemeClr val="tx1"/>
-          </a:fontRef>
-        </p:style>
-      </p:cxnSp>
-      <p:sp>
-        <p:nvSpPr>
-          <p:cNvPr id="12" name="TextBox 11"/>
+            <a:pPr>
+              <a:spcAft>
+                <a:spcPts val="400"/>
+              </a:spcAft>
+            </a:pPr>
+            <a:r>
+              <a:rPr sz="1400" b="0" i="0">
+                <a:solidFill>
+                  <a:srgbClr val="FFFFFF"/>
+                </a:solidFill>
+                <a:latin typeface="Calibri"/>
+              </a:rPr>
+              <a:t>flowchart TB</a:t>
+            </a:r>
+          </a:p>
+          <a:p>
+            <a:pPr>
+              <a:spcAft>
+                <a:spcPts val="400"/>
+              </a:spcAft>
+            </a:pPr>
+            <a:r>
+              <a:rPr sz="1400" b="0" i="0">
+                <a:solidFill>
+                  <a:srgbClr val="FFFFFF"/>
+                </a:solidFill>
+                <a:latin typeface="Calibri"/>
+              </a:rPr>
+              <a:t>  subgraph internet[Internet]</a:t>
+            </a:r>
+          </a:p>
+          <a:p>
+            <a:pPr>
+              <a:spcAft>
+                <a:spcPts val="400"/>
+              </a:spcAft>
+            </a:pPr>
+            <a:r>
+              <a:rPr sz="1400" b="0" i="0">
+                <a:solidFill>
+                  <a:srgbClr val="FFFFFF"/>
+                </a:solidFill>
+                <a:latin typeface="Calibri"/>
+              </a:rPr>
+              <a:t>    nav([Navegador del usuario])</a:t>
+            </a:r>
+          </a:p>
+          <a:p>
+            <a:pPr>
+              <a:spcAft>
+                <a:spcPts val="400"/>
+              </a:spcAft>
+            </a:pPr>
+            <a:r>
+              <a:rPr sz="1400" b="0" i="0">
+                <a:solidFill>
+                  <a:srgbClr val="FFFFFF"/>
+                </a:solidFill>
+                <a:latin typeface="Calibri"/>
+              </a:rPr>
+              <a:t>  end</a:t>
+            </a:r>
+          </a:p>
+          <a:p>
+            <a:pPr>
+              <a:spcAft>
+                <a:spcPts val="400"/>
+              </a:spcAft>
+            </a:pPr>
+            <a:r>
+              <a:rPr sz="1400" b="0" i="0">
+                <a:solidFill>
+                  <a:srgbClr val="FFFFFF"/>
+                </a:solidFill>
+                <a:latin typeface="Calibri"/>
+              </a:rPr>
+              <a:t/>
+            </a:r>
+          </a:p>
+          <a:p>
+            <a:pPr>
+              <a:spcAft>
+                <a:spcPts val="400"/>
+              </a:spcAft>
+            </a:pPr>
+            <a:r>
+              <a:rPr sz="1400" b="0" i="0">
+                <a:solidFill>
+                  <a:srgbClr val="FFFFFF"/>
+                </a:solidFill>
+                <a:latin typeface="Calibri"/>
+              </a:rPr>
+              <a:t>  subgraph nube[Proveedor cloud - region &lt;su region&gt;]</a:t>
+            </a:r>
+          </a:p>
+          <a:p>
+            <a:pPr>
+              <a:spcAft>
+                <a:spcPts val="400"/>
+              </a:spcAft>
+            </a:pPr>
+            <a:r>
+              <a:rPr sz="1400" b="0" i="0">
+                <a:solidFill>
+                  <a:srgbClr val="FFFFFF"/>
+                </a:solidFill>
+                <a:latin typeface="Calibri"/>
+              </a:rPr>
+              <a:t>    subgraph edge[CDN / Edge]</a:t>
+            </a:r>
+          </a:p>
+          <a:p>
+            <a:pPr>
+              <a:spcAft>
+                <a:spcPts val="400"/>
+              </a:spcAft>
+            </a:pPr>
+            <a:r>
+              <a:rPr sz="1400" b="0" i="0">
+                <a:solidFill>
+                  <a:srgbClr val="FFFFFF"/>
+                </a:solidFill>
+                <a:latin typeface="Calibri"/>
+              </a:rPr>
+              <a:t>      estatico[/Archivos estaticos&lt;br/&gt;build de la SPA/]</a:t>
+            </a:r>
+          </a:p>
+          <a:p>
+            <a:pPr>
+              <a:spcAft>
+                <a:spcPts val="400"/>
+              </a:spcAft>
+            </a:pPr>
+            <a:r>
+              <a:rPr sz="1400" b="0" i="0">
+                <a:solidFill>
+                  <a:srgbClr val="FFFFFF"/>
+                </a:solidFill>
+                <a:latin typeface="Calibri"/>
+              </a:rPr>
+              <a:t>    end</a:t>
+            </a:r>
+          </a:p>
+          <a:p>
+            <a:pPr>
+              <a:spcAft>
+                <a:spcPts val="400"/>
+              </a:spcAft>
+            </a:pPr>
+            <a:r>
+              <a:rPr sz="1400" b="0" i="0">
+                <a:solidFill>
+                  <a:srgbClr val="FFFFFF"/>
+                </a:solidFill>
+                <a:latin typeface="Calibri"/>
+              </a:rPr>
+              <a:t>    subgraph app[Servicio de aplicacion]</a:t>
+            </a:r>
+          </a:p>
+          <a:p>
+            <a:pPr>
+              <a:spcAft>
+                <a:spcPts val="400"/>
+              </a:spcAft>
+            </a:pPr>
+            <a:r>
+              <a:rPr sz="1400" b="0" i="0">
+                <a:solidFill>
+                  <a:srgbClr val="FFFFFF"/>
+                </a:solidFill>
+                <a:latin typeface="Calibri"/>
+              </a:rPr>
+              <a:t>      api1[Instancia API 1]</a:t>
+            </a:r>
+          </a:p>
+          <a:p>
+            <a:pPr>
+              <a:spcAft>
+                <a:spcPts val="400"/>
+              </a:spcAft>
+            </a:pPr>
+            <a:r>
+              <a:rPr sz="1400" b="0" i="0">
+                <a:solidFill>
+                  <a:srgbClr val="FFFFFF"/>
+                </a:solidFill>
+                <a:latin typeface="Calibri"/>
+              </a:rPr>
+              <a:t>      api2[Instancia API 2]</a:t>
+            </a:r>
+          </a:p>
+        </p:txBody>
+      </p:sp>
+      <p:sp>
+        <p:nvSpPr>
+          <p:cNvPr id="9" name="TextBox 8"/>
           <p:cNvSpPr txBox="1"/>
           <p:nvPr/>
         </p:nvSpPr>
         <p:spPr>
           <a:xfrm>
-            <a:off x="7498080" y="2496312"/>
-            <a:ext cx="1645920" cy="320040"/>
+            <a:off x="6233007" y="1719072"/>
+            <a:ext cx="5181447" cy="4453128"/>
           </a:xfrm>
           <a:prstGeom prst="rect">
             <a:avLst/>
@@ -9878,56 +9909,186 @@
           </a:bodyPr>
           <a:lstStyle/>
           <a:p>
-            <a:pPr algn="ctr"/>
-            <a:r>
-              <a:rPr sz="1000" b="0" i="1">
-                <a:solidFill>
-                  <a:srgbClr val="666666"/>
-                </a:solidFill>
-                <a:latin typeface="Calibri"/>
-              </a:rPr>
-              <a:t>solo el 5432</a:t>
-            </a:r>
-          </a:p>
-        </p:txBody>
-      </p:sp>
-      <p:sp>
-        <p:nvSpPr>
-          <p:cNvPr id="13" name="TextBox 12"/>
-          <p:cNvSpPr txBox="1"/>
-          <p:nvPr/>
-        </p:nvSpPr>
-        <p:spPr>
-          <a:xfrm>
-            <a:off x="457200" y="6263640"/>
-            <a:ext cx="11277295" cy="411480"/>
-          </a:xfrm>
-          <a:prstGeom prst="rect">
-            <a:avLst/>
-          </a:prstGeom>
-          <a:noFill/>
-        </p:spPr>
-        <p:txBody>
-          <a:bodyPr wrap="square">
-            <a:spAutoFit/>
-          </a:bodyPr>
-          <a:lstStyle/>
-          <a:p>
-            <a:r>
-              <a:rPr sz="1100" b="0" i="1">
-                <a:solidFill>
-                  <a:srgbClr val="666666"/>
-                </a:solidFill>
-                <a:latin typeface="Calibri"/>
-              </a:rPr>
-              <a:t>La base de datos NUNCA vive en la zona pública. Los nombres deben coincidir con los del C4 Containers (Clase 4) — mismo sistema, otro ángulo.</a:t>
-            </a:r>
-          </a:p>
-        </p:txBody>
-      </p:sp>
-      <p:sp>
-        <p:nvSpPr>
-          <p:cNvPr id="14" name="TextBox 13"/>
+            <a:pPr>
+              <a:spcAft>
+                <a:spcPts val="400"/>
+              </a:spcAft>
+            </a:pPr>
+            <a:r>
+              <a:rPr sz="1400" b="0" i="0">
+                <a:solidFill>
+                  <a:srgbClr val="FFFFFF"/>
+                </a:solidFill>
+                <a:latin typeface="Calibri"/>
+              </a:rPr>
+              <a:t>    end</a:t>
+            </a:r>
+          </a:p>
+          <a:p>
+            <a:pPr>
+              <a:spcAft>
+                <a:spcPts val="400"/>
+              </a:spcAft>
+            </a:pPr>
+            <a:r>
+              <a:rPr sz="1400" b="0" i="0">
+                <a:solidFill>
+                  <a:srgbClr val="FFFFFF"/>
+                </a:solidFill>
+                <a:latin typeface="Calibri"/>
+              </a:rPr>
+              <a:t>    subgraph datos[Servicio gestionado]</a:t>
+            </a:r>
+          </a:p>
+          <a:p>
+            <a:pPr>
+              <a:spcAft>
+                <a:spcPts val="400"/>
+              </a:spcAft>
+            </a:pPr>
+            <a:r>
+              <a:rPr sz="1400" b="0" i="0">
+                <a:solidFill>
+                  <a:srgbClr val="FFFFFF"/>
+                </a:solidFill>
+                <a:latin typeface="Calibri"/>
+              </a:rPr>
+              <a:t>      pg[(PostgreSQL&lt;br/&gt;con respaldo diario)]</a:t>
+            </a:r>
+          </a:p>
+          <a:p>
+            <a:pPr>
+              <a:spcAft>
+                <a:spcPts val="400"/>
+              </a:spcAft>
+            </a:pPr>
+            <a:r>
+              <a:rPr sz="1400" b="0" i="0">
+                <a:solidFill>
+                  <a:srgbClr val="FFFFFF"/>
+                </a:solidFill>
+                <a:latin typeface="Calibri"/>
+              </a:rPr>
+              <a:t>      obj[(Almacenamiento de objetos&lt;br/&gt;adjuntos)]</a:t>
+            </a:r>
+          </a:p>
+          <a:p>
+            <a:pPr>
+              <a:spcAft>
+                <a:spcPts val="400"/>
+              </a:spcAft>
+            </a:pPr>
+            <a:r>
+              <a:rPr sz="1400" b="0" i="0">
+                <a:solidFill>
+                  <a:srgbClr val="FFFFFF"/>
+                </a:solidFill>
+                <a:latin typeface="Calibri"/>
+              </a:rPr>
+              <a:t>    end</a:t>
+            </a:r>
+          </a:p>
+          <a:p>
+            <a:pPr>
+              <a:spcAft>
+                <a:spcPts val="400"/>
+              </a:spcAft>
+            </a:pPr>
+            <a:r>
+              <a:rPr sz="1400" b="0" i="0">
+                <a:solidFill>
+                  <a:srgbClr val="FFFFFF"/>
+                </a:solidFill>
+                <a:latin typeface="Calibri"/>
+              </a:rPr>
+              <a:t>  end</a:t>
+            </a:r>
+          </a:p>
+          <a:p>
+            <a:pPr>
+              <a:spcAft>
+                <a:spcPts val="400"/>
+              </a:spcAft>
+            </a:pPr>
+            <a:r>
+              <a:rPr sz="1400" b="0" i="0">
+                <a:solidFill>
+                  <a:srgbClr val="FFFFFF"/>
+                </a:solidFill>
+                <a:latin typeface="Calibri"/>
+              </a:rPr>
+              <a:t/>
+            </a:r>
+          </a:p>
+          <a:p>
+            <a:pPr>
+              <a:spcAft>
+                <a:spcPts val="400"/>
+              </a:spcAft>
+            </a:pPr>
+            <a:r>
+              <a:rPr sz="1400" b="0" i="0">
+                <a:solidFill>
+                  <a:srgbClr val="FFFFFF"/>
+                </a:solidFill>
+                <a:latin typeface="Calibri"/>
+              </a:rPr>
+              <a:t>  nav --&gt; estatico</a:t>
+            </a:r>
+          </a:p>
+          <a:p>
+            <a:pPr>
+              <a:spcAft>
+                <a:spcPts val="400"/>
+              </a:spcAft>
+            </a:pPr>
+            <a:r>
+              <a:rPr sz="1400" b="0" i="0">
+                <a:solidFill>
+                  <a:srgbClr val="FFFFFF"/>
+                </a:solidFill>
+                <a:latin typeface="Calibri"/>
+              </a:rPr>
+              <a:t>  nav --&gt; api1 &amp; api2</a:t>
+            </a:r>
+          </a:p>
+          <a:p>
+            <a:pPr>
+              <a:spcAft>
+                <a:spcPts val="400"/>
+              </a:spcAft>
+            </a:pPr>
+            <a:r>
+              <a:rPr sz="1400" b="0" i="0">
+                <a:solidFill>
+                  <a:srgbClr val="FFFFFF"/>
+                </a:solidFill>
+                <a:latin typeface="Calibri"/>
+              </a:rPr>
+              <a:t>  api1 &amp; api2 --&gt; pg</a:t>
+            </a:r>
+          </a:p>
+          <a:p>
+            <a:pPr>
+              <a:spcAft>
+                <a:spcPts val="400"/>
+              </a:spcAft>
+            </a:pPr>
+            <a:r>
+              <a:rPr sz="1400" b="0" i="0">
+                <a:solidFill>
+                  <a:srgbClr val="FFFFFF"/>
+                </a:solidFill>
+                <a:latin typeface="Calibri"/>
+              </a:rPr>
+              <a:t>  api1 &amp; api2 --&gt; obj</a:t>
+            </a:r>
+          </a:p>
+        </p:txBody>
+      </p:sp>
+      <p:sp>
+        <p:nvSpPr>
+          <p:cNvPr id="10" name="TextBox 9"/>
           <p:cNvSpPr txBox="1"/>
           <p:nvPr/>
         </p:nvSpPr>
@@ -10101,7 +10262,7 @@
                 </a:solidFill>
                 <a:latin typeface="Calibri"/>
               </a:rPr>
-              <a:t>El Despliegue en Mermaid: el molde que la plataforma del curso renderiza</a:t>
+              <a:t>Que tipo de almacenamiento pide cada componente</a:t>
             </a:r>
           </a:p>
         </p:txBody>
@@ -10115,7 +10276,7 @@
         <p:spPr>
           <a:xfrm>
             <a:off x="457200" y="1261872"/>
-            <a:ext cx="11277295" cy="4773168"/>
+            <a:ext cx="11277295" cy="5093208"/>
           </a:xfrm>
           <a:prstGeom prst="roundRect">
             <a:avLst>
@@ -10235,7 +10396,7 @@
         <p:spPr>
           <a:xfrm>
             <a:off x="777240" y="1719072"/>
-            <a:ext cx="10637215" cy="4133087"/>
+            <a:ext cx="10637215" cy="4453128"/>
           </a:xfrm>
           <a:prstGeom prst="rect">
             <a:avLst/>
@@ -10260,7 +10421,7 @@
                 </a:solidFill>
                 <a:latin typeface="Calibri"/>
               </a:rPr>
-              <a:t>flowchart LR</a:t>
+              <a:t>%% BLOQUE (disco de la instancia): rapido, se va con la instancia.</a:t>
             </a:r>
           </a:p>
           <a:p>
@@ -10276,7 +10437,7 @@
                 </a:solidFill>
                 <a:latin typeface="Calibri"/>
               </a:rPr>
-              <a:t>  subgraph publica["Zona publica - internet"]</a:t>
+              <a:t>%%   -&gt; cache local, archivos temporales. NUNCA el dato que importa.</a:t>
             </a:r>
           </a:p>
           <a:p>
@@ -10292,7 +10453,7 @@
                 </a:solidFill>
                 <a:latin typeface="Calibri"/>
               </a:rPr>
-              <a:t>    web["App web&lt;br/&gt;React estatico - 443"]</a:t>
+              <a:t/>
             </a:r>
           </a:p>
           <a:p>
@@ -10308,7 +10469,7 @@
                 </a:solidFill>
                 <a:latin typeface="Calibri"/>
               </a:rPr>
-              <a:t>    edge["Edge / balanceador&lt;br/&gt;443 HTTPS"]</a:t>
+              <a:t>%% OBJETOS (S3 y equivalentes): barato, por HTTP, no se monta como disco.</a:t>
             </a:r>
           </a:p>
           <a:p>
@@ -10324,7 +10485,7 @@
                 </a:solidFill>
                 <a:latin typeface="Calibri"/>
               </a:rPr>
-              <a:t>  end</a:t>
+              <a:t>%%   -&gt; adjuntos, imagenes, respaldos, el build de la SPA.</a:t>
             </a:r>
           </a:p>
           <a:p>
@@ -10340,7 +10501,7 @@
                 </a:solidFill>
                 <a:latin typeface="Calibri"/>
               </a:rPr>
-              <a:t>  subgraph privada["Zona privada - solo desde el edge"]</a:t>
+              <a:t/>
             </a:r>
           </a:p>
           <a:p>
@@ -10356,7 +10517,7 @@
                 </a:solidFill>
                 <a:latin typeface="Calibri"/>
               </a:rPr>
-              <a:t>    api["API CloudLite&lt;br/&gt;8080 HTTP"]</a:t>
+              <a:t>%% BASE RELACIONAL GESTIONADA: transaccional, con respaldo y replica.</a:t>
             </a:r>
           </a:p>
           <a:p>
@@ -10372,7 +10533,7 @@
                 </a:solidFill>
                 <a:latin typeface="Calibri"/>
               </a:rPr>
-              <a:t>  end</a:t>
+              <a:t>%%   -&gt; lo que necesita integridad y consultas.</a:t>
             </a:r>
           </a:p>
           <a:p>
@@ -10388,7 +10549,7 @@
                 </a:solidFill>
                 <a:latin typeface="Calibri"/>
               </a:rPr>
-              <a:t>  subgraph datos["Zona de datos - sin internet: la BD va AQUI"]</a:t>
+              <a:t/>
             </a:r>
           </a:p>
           <a:p>
@@ -10404,7 +10565,7 @@
                 </a:solidFill>
                 <a:latin typeface="Calibri"/>
               </a:rPr>
-              <a:t>    db[("Base de datos&lt;br/&gt;5432 TCP")]</a:t>
+              <a:t>%% La pregunta que decide: si esta instancia desaparece ahora mismo,</a:t>
             </a:r>
           </a:p>
           <a:p>
@@ -10420,71 +10581,7 @@
                 </a:solidFill>
                 <a:latin typeface="Calibri"/>
               </a:rPr>
-              <a:t>  end</a:t>
-            </a:r>
-          </a:p>
-          <a:p>
-            <a:pPr>
-              <a:spcAft>
-                <a:spcPts val="400"/>
-              </a:spcAft>
-            </a:pPr>
-            <a:r>
-              <a:rPr sz="1400" b="0" i="0">
-                <a:solidFill>
-                  <a:srgbClr val="FFFFFF"/>
-                </a:solidFill>
-                <a:latin typeface="Calibri"/>
-              </a:rPr>
-              <a:t>  web --&gt;|"HTTPS 443"| edge</a:t>
-            </a:r>
-          </a:p>
-          <a:p>
-            <a:pPr>
-              <a:spcAft>
-                <a:spcPts val="400"/>
-              </a:spcAft>
-            </a:pPr>
-            <a:r>
-              <a:rPr sz="1400" b="0" i="0">
-                <a:solidFill>
-                  <a:srgbClr val="FFFFFF"/>
-                </a:solidFill>
-                <a:latin typeface="Calibri"/>
-              </a:rPr>
-              <a:t>  edge --&gt;|"HTTP 8080"| api</a:t>
-            </a:r>
-          </a:p>
-          <a:p>
-            <a:pPr>
-              <a:spcAft>
-                <a:spcPts val="400"/>
-              </a:spcAft>
-            </a:pPr>
-            <a:r>
-              <a:rPr sz="1400" b="0" i="0">
-                <a:solidFill>
-                  <a:srgbClr val="FFFFFF"/>
-                </a:solidFill>
-                <a:latin typeface="Calibri"/>
-              </a:rPr>
-              <a:t>  api --&gt;|"TCP 5432"| db</a:t>
-            </a:r>
-          </a:p>
-          <a:p>
-            <a:pPr>
-              <a:spcAft>
-                <a:spcPts val="400"/>
-              </a:spcAft>
-            </a:pPr>
-            <a:r>
-              <a:rPr sz="1400" b="0" i="0">
-                <a:solidFill>
-                  <a:srgbClr val="FFFFFF"/>
-                </a:solidFill>
-                <a:latin typeface="Calibri"/>
-              </a:rPr>
-              <a:t>  api --&gt;|"HTTPS 443 - frontera de confianza"| pagos["Pasarela de pagos externa"]</a:t>
+              <a:t>%% que dato se pierde? Si la respuesta no es «ninguno», esta mal ubicado.</a:t>
             </a:r>
           </a:p>
         </p:txBody>
@@ -10492,41 +10589,6 @@
       <p:sp>
         <p:nvSpPr>
           <p:cNvPr id="9" name="TextBox 8"/>
-          <p:cNvSpPr txBox="1"/>
-          <p:nvPr/>
-        </p:nvSpPr>
-        <p:spPr>
-          <a:xfrm>
-            <a:off x="457200" y="6080760"/>
-            <a:ext cx="11277295" cy="320040"/>
-          </a:xfrm>
-          <a:prstGeom prst="rect">
-            <a:avLst/>
-          </a:prstGeom>
-          <a:noFill/>
-        </p:spPr>
-        <p:txBody>
-          <a:bodyPr wrap="square">
-            <a:spAutoFit/>
-          </a:bodyPr>
-          <a:lstStyle/>
-          <a:p>
-            <a:pPr algn="ctr"/>
-            <a:r>
-              <a:rPr sz="1200" b="0" i="1">
-                <a:solidFill>
-                  <a:srgbClr val="666666"/>
-                </a:solidFill>
-                <a:latin typeface="Calibri"/>
-              </a:rPr>
-              <a:t>Una «subgraph» por zona, el puerto en cada caja y la base con «[( )]». La flecha al externo ES la frontera de confianza. Nombres: los mismos del C4 Containers de la Clase 4.</a:t>
-            </a:r>
-          </a:p>
-        </p:txBody>
-      </p:sp>
-      <p:sp>
-        <p:nvSpPr>
-          <p:cNvPr id="10" name="TextBox 9"/>
           <p:cNvSpPr txBox="1"/>
           <p:nvPr/>
         </p:nvSpPr>
@@ -10700,7 +10762,7 @@
                 </a:solidFill>
                 <a:latin typeface="Calibri"/>
               </a:rPr>
-              <a:t>Herramientas de hoy</a:t>
+              <a:t>Ejemplo de diagrama de despliegue (Deployment)</a:t>
             </a:r>
           </a:p>
         </p:txBody>
@@ -10734,7 +10796,7 @@
                 </a:solidFill>
                 <a:latin typeface="Calibri"/>
               </a:rPr>
-              <a:t>Gratis · navegador o free tier · sin cuenta de pago</a:t>
+              <a:t>Zonas de confianza: qué es público, qué es privado, dónde viven los datos</a:t>
             </a:r>
           </a:p>
         </p:txBody>
@@ -10747,8 +10809,8 @@
         </p:nvSpPr>
         <p:spPr>
           <a:xfrm>
-            <a:off x="457200" y="1591056"/>
-            <a:ext cx="3624986" cy="2299716"/>
+            <a:off x="822960" y="2194560"/>
+            <a:ext cx="3291840" cy="1005840"/>
           </a:xfrm>
           <a:prstGeom prst="roundRect">
             <a:avLst>
@@ -10756,7 +10818,7 @@
             </a:avLst>
           </a:prstGeom>
           <a:solidFill>
-            <a:srgbClr val="F2F2F2"/>
+            <a:srgbClr val="FFD000"/>
           </a:solidFill>
           <a:ln>
             <a:noFill/>
@@ -10777,26 +10839,38 @@
           </a:fontRef>
         </p:style>
         <p:txBody>
-          <a:bodyPr rtlCol="0" anchor="ctr"/>
+          <a:bodyPr rtlCol="0" anchor="ctr" wrap="square"/>
           <a:lstStyle/>
           <a:p>
             <a:pPr algn="ctr"/>
-          </a:p>
-        </p:txBody>
-      </p:sp>
-      <p:sp>
-        <p:nvSpPr>
-          <p:cNvPr id="7" name="Rectangle 6"/>
+            <a:r>
+              <a:rPr sz="1300" b="1" i="0">
+                <a:solidFill>
+                  <a:srgbClr val="095292"/>
+                </a:solidFill>
+                <a:latin typeface="Calibri"/>
+              </a:rPr>
+              <a:t>Zona pública
+(balanceador / edge)</a:t>
+            </a:r>
+          </a:p>
+        </p:txBody>
+      </p:sp>
+      <p:sp>
+        <p:nvSpPr>
+          <p:cNvPr id="7" name="Rounded Rectangle 6"/>
           <p:cNvSpPr/>
           <p:nvPr/>
         </p:nvSpPr>
         <p:spPr>
           <a:xfrm>
-            <a:off x="457200" y="1591056"/>
-            <a:ext cx="3624986" cy="64008"/>
-          </a:xfrm>
-          <a:prstGeom prst="rect">
-            <a:avLst/>
+            <a:off x="4754880" y="2194560"/>
+            <a:ext cx="3291840" cy="1005840"/>
+          </a:xfrm>
+          <a:prstGeom prst="roundRect">
+            <a:avLst>
+              <a:gd name="adj" fmla="val 12000"/>
+            </a:avLst>
           </a:prstGeom>
           <a:solidFill>
             <a:srgbClr val="095292"/>
@@ -10820,29 +10894,41 @@
           </a:fontRef>
         </p:style>
         <p:txBody>
-          <a:bodyPr rtlCol="0" anchor="ctr"/>
+          <a:bodyPr rtlCol="0" anchor="ctr" wrap="square"/>
           <a:lstStyle/>
           <a:p>
             <a:pPr algn="ctr"/>
-          </a:p>
-        </p:txBody>
-      </p:sp>
-      <p:sp>
-        <p:nvSpPr>
-          <p:cNvPr id="8" name="Rectangle 7"/>
+            <a:r>
+              <a:rPr sz="1300" b="1" i="0">
+                <a:solidFill>
+                  <a:srgbClr val="FFFFFF"/>
+                </a:solidFill>
+                <a:latin typeface="Calibri"/>
+              </a:rPr>
+              <a:t>Zona privada
+(app CloudLite)</a:t>
+            </a:r>
+          </a:p>
+        </p:txBody>
+      </p:sp>
+      <p:sp>
+        <p:nvSpPr>
+          <p:cNvPr id="8" name="Rounded Rectangle 7"/>
           <p:cNvSpPr/>
           <p:nvPr/>
         </p:nvSpPr>
         <p:spPr>
           <a:xfrm>
-            <a:off x="457200" y="1655064"/>
-            <a:ext cx="3624986" cy="27432"/>
-          </a:xfrm>
-          <a:prstGeom prst="rect">
-            <a:avLst/>
+            <a:off x="8595360" y="2194560"/>
+            <a:ext cx="3291840" cy="1005840"/>
+          </a:xfrm>
+          <a:prstGeom prst="roundRect">
+            <a:avLst>
+              <a:gd name="adj" fmla="val 12000"/>
+            </a:avLst>
           </a:prstGeom>
           <a:solidFill>
-            <a:srgbClr val="FFD000"/>
+            <a:srgbClr val="269CCB"/>
           </a:solidFill>
           <a:ln>
             <a:noFill/>
@@ -10863,37 +10949,59 @@
           </a:fontRef>
         </p:style>
         <p:txBody>
-          <a:bodyPr rtlCol="0" anchor="ctr"/>
+          <a:bodyPr rtlCol="0" anchor="ctr" wrap="square"/>
           <a:lstStyle/>
           <a:p>
             <a:pPr algn="ctr"/>
-          </a:p>
-        </p:txBody>
-      </p:sp>
-      <p:pic>
-        <p:nvPicPr>
-          <p:cNvPr id="9" name="Picture 8" descr="drawio.png"/>
-          <p:cNvPicPr>
-            <a:picLocks noChangeAspect="1"/>
-          </p:cNvPicPr>
-          <p:nvPr/>
-        </p:nvPicPr>
-        <p:blipFill>
-          <a:blip r:embed="rId2"/>
-          <a:stretch>
-            <a:fillRect/>
-          </a:stretch>
-        </p:blipFill>
-        <p:spPr>
-          <a:xfrm>
-            <a:off x="1659331" y="1847087"/>
-            <a:ext cx="1220724" cy="1220724"/>
-          </a:xfrm>
-          <a:prstGeom prst="rect">
-            <a:avLst/>
-          </a:prstGeom>
-        </p:spPr>
-      </p:pic>
+            <a:r>
+              <a:rPr sz="1300" b="1" i="0">
+                <a:solidFill>
+                  <a:srgbClr val="FFFFFF"/>
+                </a:solidFill>
+                <a:latin typeface="Calibri"/>
+              </a:rPr>
+              <a:t>Zona de datos
+(base de datos)</a:t>
+            </a:r>
+          </a:p>
+        </p:txBody>
+      </p:sp>
+      <p:cxnSp>
+        <p:nvCxnSpPr>
+          <p:cNvPr id="9" name="Connector 8"/>
+          <p:cNvCxnSpPr/>
+          <p:nvPr/>
+        </p:nvCxnSpPr>
+        <p:spPr>
+          <a:xfrm>
+            <a:off x="4114800" y="2697480"/>
+            <a:ext cx="640080" cy="0"/>
+          </a:xfrm>
+          <a:prstGeom prst="line">
+            <a:avLst/>
+          </a:prstGeom>
+          <a:ln w="22225">
+            <a:solidFill>
+              <a:srgbClr val="666666"/>
+            </a:solidFill>
+            <a:tailEnd type="triangle" w="med" len="med"/>
+          </a:ln>
+        </p:spPr>
+        <p:style>
+          <a:lnRef idx="2">
+            <a:schemeClr val="accent1"/>
+          </a:lnRef>
+          <a:fillRef idx="0">
+            <a:schemeClr val="accent1"/>
+          </a:fillRef>
+          <a:effectRef idx="1">
+            <a:schemeClr val="accent1"/>
+          </a:effectRef>
+          <a:fontRef idx="minor">
+            <a:schemeClr val="tx1"/>
+          </a:fontRef>
+        </p:style>
+      </p:cxnSp>
       <p:sp>
         <p:nvSpPr>
           <p:cNvPr id="10" name="TextBox 9"/>
@@ -10902,8 +11010,8 @@
         </p:nvSpPr>
         <p:spPr>
           <a:xfrm>
-            <a:off x="530352" y="3159251"/>
-            <a:ext cx="3478682" cy="621792"/>
+            <a:off x="3611879" y="2496312"/>
+            <a:ext cx="1645920" cy="320040"/>
           </a:xfrm>
           <a:prstGeom prst="rect">
             <a:avLst/>
@@ -10911,203 +11019,105 @@
           <a:noFill/>
         </p:spPr>
         <p:txBody>
-          <a:bodyPr wrap="square" anchor="t"/>
+          <a:bodyPr wrap="square">
+            <a:spAutoFit/>
+          </a:bodyPr>
           <a:lstStyle/>
           <a:p>
             <a:pPr algn="ctr"/>
             <a:r>
-              <a:rPr sz="1300" b="1" i="0">
-                <a:solidFill>
-                  <a:srgbClr val="095292"/>
-                </a:solidFill>
-                <a:latin typeface="Calibri"/>
-              </a:rPr>
-              <a:t>draw.io</a:t>
-            </a:r>
-          </a:p>
-          <a:p>
-            <a:pPr algn="ctr">
-              <a:spcBef>
-                <a:spcPts val="200"/>
-              </a:spcBef>
-            </a:pPr>
-            <a:r>
-              <a:rPr sz="1000" b="0" i="0">
+              <a:rPr sz="1000" b="0" i="1">
                 <a:solidFill>
                   <a:srgbClr val="666666"/>
                 </a:solidFill>
                 <a:latin typeface="Calibri"/>
               </a:rPr>
-              <a:t>Deployment</a:t>
-            </a:r>
-          </a:p>
-        </p:txBody>
-      </p:sp>
-      <p:sp>
-        <p:nvSpPr>
-          <p:cNvPr id="11" name="Rounded Rectangle 10"/>
-          <p:cNvSpPr/>
-          <p:nvPr/>
-        </p:nvSpPr>
-        <p:spPr>
-          <a:xfrm>
-            <a:off x="4283354" y="1591056"/>
-            <a:ext cx="3624986" cy="2299716"/>
-          </a:xfrm>
-          <a:prstGeom prst="roundRect">
-            <a:avLst>
-              <a:gd name="adj" fmla="val 12000"/>
-            </a:avLst>
-          </a:prstGeom>
-          <a:solidFill>
-            <a:srgbClr val="F2F2F2"/>
-          </a:solidFill>
-          <a:ln>
-            <a:noFill/>
+              <a:t>solo el 8080</a:t>
+            </a:r>
+          </a:p>
+        </p:txBody>
+      </p:sp>
+      <p:cxnSp>
+        <p:nvCxnSpPr>
+          <p:cNvPr id="11" name="Connector 10"/>
+          <p:cNvCxnSpPr/>
+          <p:nvPr/>
+        </p:nvCxnSpPr>
+        <p:spPr>
+          <a:xfrm>
+            <a:off x="8046720" y="2697480"/>
+            <a:ext cx="548640" cy="0"/>
+          </a:xfrm>
+          <a:prstGeom prst="line">
+            <a:avLst/>
+          </a:prstGeom>
+          <a:ln w="22225">
+            <a:solidFill>
+              <a:srgbClr val="666666"/>
+            </a:solidFill>
+            <a:tailEnd type="triangle" w="med" len="med"/>
           </a:ln>
         </p:spPr>
         <p:style>
-          <a:lnRef idx="1">
+          <a:lnRef idx="2">
             <a:schemeClr val="accent1"/>
           </a:lnRef>
-          <a:fillRef idx="3">
+          <a:fillRef idx="0">
             <a:schemeClr val="accent1"/>
           </a:fillRef>
-          <a:effectRef idx="2">
+          <a:effectRef idx="1">
             <a:schemeClr val="accent1"/>
           </a:effectRef>
           <a:fontRef idx="minor">
-            <a:schemeClr val="lt1"/>
+            <a:schemeClr val="tx1"/>
           </a:fontRef>
         </p:style>
-        <p:txBody>
-          <a:bodyPr rtlCol="0" anchor="ctr"/>
+      </p:cxnSp>
+      <p:sp>
+        <p:nvSpPr>
+          <p:cNvPr id="12" name="TextBox 11"/>
+          <p:cNvSpPr txBox="1"/>
+          <p:nvPr/>
+        </p:nvSpPr>
+        <p:spPr>
+          <a:xfrm>
+            <a:off x="7498080" y="2496312"/>
+            <a:ext cx="1645920" cy="320040"/>
+          </a:xfrm>
+          <a:prstGeom prst="rect">
+            <a:avLst/>
+          </a:prstGeom>
+          <a:noFill/>
+        </p:spPr>
+        <p:txBody>
+          <a:bodyPr wrap="square">
+            <a:spAutoFit/>
+          </a:bodyPr>
           <a:lstStyle/>
           <a:p>
             <a:pPr algn="ctr"/>
-          </a:p>
-        </p:txBody>
-      </p:sp>
-      <p:sp>
-        <p:nvSpPr>
-          <p:cNvPr id="12" name="Rectangle 11"/>
-          <p:cNvSpPr/>
-          <p:nvPr/>
-        </p:nvSpPr>
-        <p:spPr>
-          <a:xfrm>
-            <a:off x="4283354" y="1591056"/>
-            <a:ext cx="3624986" cy="64008"/>
-          </a:xfrm>
-          <a:prstGeom prst="rect">
-            <a:avLst/>
-          </a:prstGeom>
-          <a:solidFill>
-            <a:srgbClr val="095292"/>
-          </a:solidFill>
-          <a:ln>
-            <a:noFill/>
-          </a:ln>
-        </p:spPr>
-        <p:style>
-          <a:lnRef idx="1">
-            <a:schemeClr val="accent1"/>
-          </a:lnRef>
-          <a:fillRef idx="3">
-            <a:schemeClr val="accent1"/>
-          </a:fillRef>
-          <a:effectRef idx="2">
-            <a:schemeClr val="accent1"/>
-          </a:effectRef>
-          <a:fontRef idx="minor">
-            <a:schemeClr val="lt1"/>
-          </a:fontRef>
-        </p:style>
-        <p:txBody>
-          <a:bodyPr rtlCol="0" anchor="ctr"/>
-          <a:lstStyle/>
-          <a:p>
-            <a:pPr algn="ctr"/>
-          </a:p>
-        </p:txBody>
-      </p:sp>
-      <p:sp>
-        <p:nvSpPr>
-          <p:cNvPr id="13" name="Rectangle 12"/>
-          <p:cNvSpPr/>
-          <p:nvPr/>
-        </p:nvSpPr>
-        <p:spPr>
-          <a:xfrm>
-            <a:off x="4283354" y="1655064"/>
-            <a:ext cx="3624986" cy="27432"/>
-          </a:xfrm>
-          <a:prstGeom prst="rect">
-            <a:avLst/>
-          </a:prstGeom>
-          <a:solidFill>
-            <a:srgbClr val="FFD000"/>
-          </a:solidFill>
-          <a:ln>
-            <a:noFill/>
-          </a:ln>
-        </p:spPr>
-        <p:style>
-          <a:lnRef idx="1">
-            <a:schemeClr val="accent1"/>
-          </a:lnRef>
-          <a:fillRef idx="3">
-            <a:schemeClr val="accent1"/>
-          </a:fillRef>
-          <a:effectRef idx="2">
-            <a:schemeClr val="accent1"/>
-          </a:effectRef>
-          <a:fontRef idx="minor">
-            <a:schemeClr val="lt1"/>
-          </a:fontRef>
-        </p:style>
-        <p:txBody>
-          <a:bodyPr rtlCol="0" anchor="ctr"/>
-          <a:lstStyle/>
-          <a:p>
-            <a:pPr algn="ctr"/>
-          </a:p>
-        </p:txBody>
-      </p:sp>
-      <p:pic>
-        <p:nvPicPr>
-          <p:cNvPr id="14" name="Picture 13" descr="google_docs.png"/>
-          <p:cNvPicPr>
-            <a:picLocks noChangeAspect="1"/>
-          </p:cNvPicPr>
-          <p:nvPr/>
-        </p:nvPicPr>
-        <p:blipFill>
-          <a:blip r:embed="rId3"/>
-          <a:stretch>
-            <a:fillRect/>
-          </a:stretch>
-        </p:blipFill>
-        <p:spPr>
-          <a:xfrm>
-            <a:off x="5485485" y="1847087"/>
-            <a:ext cx="1220724" cy="1220724"/>
-          </a:xfrm>
-          <a:prstGeom prst="rect">
-            <a:avLst/>
-          </a:prstGeom>
-        </p:spPr>
-      </p:pic>
-      <p:sp>
-        <p:nvSpPr>
-          <p:cNvPr id="15" name="TextBox 14"/>
+            <a:r>
+              <a:rPr sz="1000" b="0" i="1">
+                <a:solidFill>
+                  <a:srgbClr val="666666"/>
+                </a:solidFill>
+                <a:latin typeface="Calibri"/>
+              </a:rPr>
+              <a:t>solo el 5432</a:t>
+            </a:r>
+          </a:p>
+        </p:txBody>
+      </p:sp>
+      <p:sp>
+        <p:nvSpPr>
+          <p:cNvPr id="13" name="TextBox 12"/>
           <p:cNvSpPr txBox="1"/>
           <p:nvPr/>
         </p:nvSpPr>
         <p:spPr>
           <a:xfrm>
-            <a:off x="4356506" y="3159251"/>
-            <a:ext cx="3478682" cy="621792"/>
+            <a:off x="457200" y="6263640"/>
+            <a:ext cx="11277295" cy="411480"/>
           </a:xfrm>
           <a:prstGeom prst="rect">
             <a:avLst/>
@@ -11115,449 +11125,26 @@
           <a:noFill/>
         </p:spPr>
         <p:txBody>
-          <a:bodyPr wrap="square" anchor="t"/>
-          <a:lstStyle/>
-          <a:p>
-            <a:pPr algn="ctr"/>
-            <a:r>
-              <a:rPr sz="1300" b="1" i="0">
-                <a:solidFill>
-                  <a:srgbClr val="095292"/>
-                </a:solidFill>
-                <a:latin typeface="Calibri"/>
-              </a:rPr>
-              <a:t>Google Docs</a:t>
-            </a:r>
-          </a:p>
-          <a:p>
-            <a:pPr algn="ctr">
-              <a:spcBef>
-                <a:spcPts val="200"/>
-              </a:spcBef>
-            </a:pPr>
-            <a:r>
-              <a:rPr sz="1000" b="0" i="0">
+          <a:bodyPr wrap="square">
+            <a:spAutoFit/>
+          </a:bodyPr>
+          <a:lstStyle/>
+          <a:p>
+            <a:r>
+              <a:rPr sz="1100" b="0" i="1">
                 <a:solidFill>
                   <a:srgbClr val="666666"/>
                 </a:solidFill>
                 <a:latin typeface="Calibri"/>
               </a:rPr>
-              <a:t>Informe PI</a:t>
-            </a:r>
-          </a:p>
-        </p:txBody>
-      </p:sp>
-      <p:sp>
-        <p:nvSpPr>
-          <p:cNvPr id="16" name="Rounded Rectangle 15"/>
-          <p:cNvSpPr/>
-          <p:nvPr/>
-        </p:nvSpPr>
-        <p:spPr>
-          <a:xfrm>
-            <a:off x="8109508" y="1591056"/>
-            <a:ext cx="3624986" cy="2299716"/>
-          </a:xfrm>
-          <a:prstGeom prst="roundRect">
-            <a:avLst>
-              <a:gd name="adj" fmla="val 12000"/>
-            </a:avLst>
-          </a:prstGeom>
-          <a:solidFill>
-            <a:srgbClr val="F2F2F2"/>
-          </a:solidFill>
-          <a:ln>
-            <a:noFill/>
-          </a:ln>
-        </p:spPr>
-        <p:style>
-          <a:lnRef idx="1">
-            <a:schemeClr val="accent1"/>
-          </a:lnRef>
-          <a:fillRef idx="3">
-            <a:schemeClr val="accent1"/>
-          </a:fillRef>
-          <a:effectRef idx="2">
-            <a:schemeClr val="accent1"/>
-          </a:effectRef>
-          <a:fontRef idx="minor">
-            <a:schemeClr val="lt1"/>
-          </a:fontRef>
-        </p:style>
-        <p:txBody>
-          <a:bodyPr rtlCol="0" anchor="ctr"/>
-          <a:lstStyle/>
-          <a:p>
-            <a:pPr algn="ctr"/>
-          </a:p>
-        </p:txBody>
-      </p:sp>
-      <p:sp>
-        <p:nvSpPr>
-          <p:cNvPr id="17" name="Rectangle 16"/>
-          <p:cNvSpPr/>
-          <p:nvPr/>
-        </p:nvSpPr>
-        <p:spPr>
-          <a:xfrm>
-            <a:off x="8109508" y="1591056"/>
-            <a:ext cx="3624986" cy="64008"/>
-          </a:xfrm>
-          <a:prstGeom prst="rect">
-            <a:avLst/>
-          </a:prstGeom>
-          <a:solidFill>
-            <a:srgbClr val="095292"/>
-          </a:solidFill>
-          <a:ln>
-            <a:noFill/>
-          </a:ln>
-        </p:spPr>
-        <p:style>
-          <a:lnRef idx="1">
-            <a:schemeClr val="accent1"/>
-          </a:lnRef>
-          <a:fillRef idx="3">
-            <a:schemeClr val="accent1"/>
-          </a:fillRef>
-          <a:effectRef idx="2">
-            <a:schemeClr val="accent1"/>
-          </a:effectRef>
-          <a:fontRef idx="minor">
-            <a:schemeClr val="lt1"/>
-          </a:fontRef>
-        </p:style>
-        <p:txBody>
-          <a:bodyPr rtlCol="0" anchor="ctr"/>
-          <a:lstStyle/>
-          <a:p>
-            <a:pPr algn="ctr"/>
-          </a:p>
-        </p:txBody>
-      </p:sp>
-      <p:sp>
-        <p:nvSpPr>
-          <p:cNvPr id="18" name="Rectangle 17"/>
-          <p:cNvSpPr/>
-          <p:nvPr/>
-        </p:nvSpPr>
-        <p:spPr>
-          <a:xfrm>
-            <a:off x="8109508" y="1655064"/>
-            <a:ext cx="3624986" cy="27432"/>
-          </a:xfrm>
-          <a:prstGeom prst="rect">
-            <a:avLst/>
-          </a:prstGeom>
-          <a:solidFill>
-            <a:srgbClr val="FFD000"/>
-          </a:solidFill>
-          <a:ln>
-            <a:noFill/>
-          </a:ln>
-        </p:spPr>
-        <p:style>
-          <a:lnRef idx="1">
-            <a:schemeClr val="accent1"/>
-          </a:lnRef>
-          <a:fillRef idx="3">
-            <a:schemeClr val="accent1"/>
-          </a:fillRef>
-          <a:effectRef idx="2">
-            <a:schemeClr val="accent1"/>
-          </a:effectRef>
-          <a:fontRef idx="minor">
-            <a:schemeClr val="lt1"/>
-          </a:fontRef>
-        </p:style>
-        <p:txBody>
-          <a:bodyPr rtlCol="0" anchor="ctr"/>
-          <a:lstStyle/>
-          <a:p>
-            <a:pPr algn="ctr"/>
-          </a:p>
-        </p:txBody>
-      </p:sp>
-      <p:pic>
-        <p:nvPicPr>
-          <p:cNvPr id="19" name="Picture 18" descr="mermaid.png"/>
-          <p:cNvPicPr>
-            <a:picLocks noChangeAspect="1"/>
-          </p:cNvPicPr>
-          <p:nvPr/>
-        </p:nvPicPr>
-        <p:blipFill>
-          <a:blip r:embed="rId4"/>
-          <a:stretch>
-            <a:fillRect/>
-          </a:stretch>
-        </p:blipFill>
-        <p:spPr>
-          <a:xfrm>
-            <a:off x="9311640" y="1847087"/>
-            <a:ext cx="1220724" cy="1220724"/>
-          </a:xfrm>
-          <a:prstGeom prst="rect">
-            <a:avLst/>
-          </a:prstGeom>
-        </p:spPr>
-      </p:pic>
-      <p:sp>
-        <p:nvSpPr>
-          <p:cNvPr id="20" name="TextBox 19"/>
-          <p:cNvSpPr txBox="1"/>
-          <p:nvPr/>
-        </p:nvSpPr>
-        <p:spPr>
-          <a:xfrm>
-            <a:off x="8182660" y="3159251"/>
-            <a:ext cx="3478682" cy="621792"/>
-          </a:xfrm>
-          <a:prstGeom prst="rect">
-            <a:avLst/>
-          </a:prstGeom>
-          <a:noFill/>
-        </p:spPr>
-        <p:txBody>
-          <a:bodyPr wrap="square" anchor="t"/>
-          <a:lstStyle/>
-          <a:p>
-            <a:pPr algn="ctr"/>
-            <a:r>
-              <a:rPr sz="1300" b="1" i="0">
-                <a:solidFill>
-                  <a:srgbClr val="095292"/>
-                </a:solidFill>
-                <a:latin typeface="Calibri"/>
-              </a:rPr>
-              <a:t>Mermaid</a:t>
-            </a:r>
-          </a:p>
-          <a:p>
-            <a:pPr algn="ctr">
-              <a:spcBef>
-                <a:spcPts val="200"/>
-              </a:spcBef>
-            </a:pPr>
-            <a:r>
-              <a:rPr sz="1000" b="0" i="0">
-                <a:solidFill>
-                  <a:srgbClr val="666666"/>
-                </a:solidFill>
-                <a:latin typeface="Calibri"/>
-              </a:rPr>
-              <a:t>Codigo del diagrama</a:t>
-            </a:r>
-          </a:p>
-        </p:txBody>
-      </p:sp>
-      <p:sp>
-        <p:nvSpPr>
-          <p:cNvPr id="21" name="Rounded Rectangle 20"/>
-          <p:cNvSpPr/>
-          <p:nvPr/>
-        </p:nvSpPr>
-        <p:spPr>
-          <a:xfrm>
-            <a:off x="4283354" y="4055364"/>
-            <a:ext cx="3624986" cy="2299716"/>
-          </a:xfrm>
-          <a:prstGeom prst="roundRect">
-            <a:avLst>
-              <a:gd name="adj" fmla="val 12000"/>
-            </a:avLst>
-          </a:prstGeom>
-          <a:solidFill>
-            <a:srgbClr val="F2F2F2"/>
-          </a:solidFill>
-          <a:ln>
-            <a:noFill/>
-          </a:ln>
-        </p:spPr>
-        <p:style>
-          <a:lnRef idx="1">
-            <a:schemeClr val="accent1"/>
-          </a:lnRef>
-          <a:fillRef idx="3">
-            <a:schemeClr val="accent1"/>
-          </a:fillRef>
-          <a:effectRef idx="2">
-            <a:schemeClr val="accent1"/>
-          </a:effectRef>
-          <a:fontRef idx="minor">
-            <a:schemeClr val="lt1"/>
-          </a:fontRef>
-        </p:style>
-        <p:txBody>
-          <a:bodyPr rtlCol="0" anchor="ctr"/>
-          <a:lstStyle/>
-          <a:p>
-            <a:pPr algn="ctr"/>
-          </a:p>
-        </p:txBody>
-      </p:sp>
-      <p:sp>
-        <p:nvSpPr>
-          <p:cNvPr id="22" name="Rectangle 21"/>
-          <p:cNvSpPr/>
-          <p:nvPr/>
-        </p:nvSpPr>
-        <p:spPr>
-          <a:xfrm>
-            <a:off x="4283354" y="4055364"/>
-            <a:ext cx="3624986" cy="64008"/>
-          </a:xfrm>
-          <a:prstGeom prst="rect">
-            <a:avLst/>
-          </a:prstGeom>
-          <a:solidFill>
-            <a:srgbClr val="095292"/>
-          </a:solidFill>
-          <a:ln>
-            <a:noFill/>
-          </a:ln>
-        </p:spPr>
-        <p:style>
-          <a:lnRef idx="1">
-            <a:schemeClr val="accent1"/>
-          </a:lnRef>
-          <a:fillRef idx="3">
-            <a:schemeClr val="accent1"/>
-          </a:fillRef>
-          <a:effectRef idx="2">
-            <a:schemeClr val="accent1"/>
-          </a:effectRef>
-          <a:fontRef idx="minor">
-            <a:schemeClr val="lt1"/>
-          </a:fontRef>
-        </p:style>
-        <p:txBody>
-          <a:bodyPr rtlCol="0" anchor="ctr"/>
-          <a:lstStyle/>
-          <a:p>
-            <a:pPr algn="ctr"/>
-          </a:p>
-        </p:txBody>
-      </p:sp>
-      <p:sp>
-        <p:nvSpPr>
-          <p:cNvPr id="23" name="Rectangle 22"/>
-          <p:cNvSpPr/>
-          <p:nvPr/>
-        </p:nvSpPr>
-        <p:spPr>
-          <a:xfrm>
-            <a:off x="4283354" y="4119372"/>
-            <a:ext cx="3624986" cy="27432"/>
-          </a:xfrm>
-          <a:prstGeom prst="rect">
-            <a:avLst/>
-          </a:prstGeom>
-          <a:solidFill>
-            <a:srgbClr val="FFD000"/>
-          </a:solidFill>
-          <a:ln>
-            <a:noFill/>
-          </a:ln>
-        </p:spPr>
-        <p:style>
-          <a:lnRef idx="1">
-            <a:schemeClr val="accent1"/>
-          </a:lnRef>
-          <a:fillRef idx="3">
-            <a:schemeClr val="accent1"/>
-          </a:fillRef>
-          <a:effectRef idx="2">
-            <a:schemeClr val="accent1"/>
-          </a:effectRef>
-          <a:fontRef idx="minor">
-            <a:schemeClr val="lt1"/>
-          </a:fontRef>
-        </p:style>
-        <p:txBody>
-          <a:bodyPr rtlCol="0" anchor="ctr"/>
-          <a:lstStyle/>
-          <a:p>
-            <a:pPr algn="ctr"/>
-          </a:p>
-        </p:txBody>
-      </p:sp>
-      <p:pic>
-        <p:nvPicPr>
-          <p:cNvPr id="24" name="Picture 23" descr="examlab.png"/>
-          <p:cNvPicPr>
-            <a:picLocks noChangeAspect="1"/>
-          </p:cNvPicPr>
-          <p:nvPr/>
-        </p:nvPicPr>
-        <p:blipFill>
-          <a:blip r:embed="rId5"/>
-          <a:stretch>
-            <a:fillRect/>
-          </a:stretch>
-        </p:blipFill>
-        <p:spPr>
-          <a:xfrm>
-            <a:off x="5485485" y="4311396"/>
-            <a:ext cx="1220724" cy="1220724"/>
-          </a:xfrm>
-          <a:prstGeom prst="rect">
-            <a:avLst/>
-          </a:prstGeom>
-        </p:spPr>
-      </p:pic>
-      <p:sp>
-        <p:nvSpPr>
-          <p:cNvPr id="25" name="TextBox 24"/>
-          <p:cNvSpPr txBox="1"/>
-          <p:nvPr/>
-        </p:nvSpPr>
-        <p:spPr>
-          <a:xfrm>
-            <a:off x="4356506" y="5623560"/>
-            <a:ext cx="3478682" cy="621792"/>
-          </a:xfrm>
-          <a:prstGeom prst="rect">
-            <a:avLst/>
-          </a:prstGeom>
-          <a:noFill/>
-        </p:spPr>
-        <p:txBody>
-          <a:bodyPr wrap="square" anchor="t"/>
-          <a:lstStyle/>
-          <a:p>
-            <a:pPr algn="ctr"/>
-            <a:r>
-              <a:rPr sz="1300" b="1" i="0">
-                <a:solidFill>
-                  <a:srgbClr val="095292"/>
-                </a:solidFill>
-                <a:latin typeface="Calibri"/>
-              </a:rPr>
-              <a:t>la plataforma del curso</a:t>
-            </a:r>
-          </a:p>
-          <a:p>
-            <a:pPr algn="ctr">
-              <a:spcBef>
-                <a:spcPts val="200"/>
-              </a:spcBef>
-            </a:pPr>
-            <a:r>
-              <a:rPr sz="1000" b="0" i="0">
-                <a:solidFill>
-                  <a:srgbClr val="666666"/>
-                </a:solidFill>
-                <a:latin typeface="Calibri"/>
-              </a:rPr>
-              <a:t>Donde se entrega</a:t>
-            </a:r>
-          </a:p>
-        </p:txBody>
-      </p:sp>
-      <p:sp>
-        <p:nvSpPr>
-          <p:cNvPr id="26" name="TextBox 25"/>
+              <a:t>La base de datos NUNCA vive en la zona pública. Los nombres deben coincidir con los del C4 Containers (Clase 4) — mismo sistema, otro ángulo.</a:t>
+            </a:r>
+          </a:p>
+        </p:txBody>
+      </p:sp>
+      <p:sp>
+        <p:nvSpPr>
+          <p:cNvPr id="14" name="TextBox 13"/>
           <p:cNvSpPr txBox="1"/>
           <p:nvPr/>
         </p:nvSpPr>
@@ -11625,7 +11212,7 @@
         <p:spPr>
           <a:xfrm>
             <a:off x="0" y="0"/>
-            <a:ext cx="12191695" cy="1170432"/>
+            <a:ext cx="12191695" cy="960120"/>
           </a:xfrm>
           <a:prstGeom prst="rect">
             <a:avLst/>
@@ -11667,7 +11254,7 @@
         </p:nvSpPr>
         <p:spPr>
           <a:xfrm>
-            <a:off x="0" y="1170432"/>
+            <a:off x="0" y="960120"/>
             <a:ext cx="12191695" cy="41148"/>
           </a:xfrm>
           <a:prstGeom prst="rect">
@@ -11711,7 +11298,7 @@
         <p:spPr>
           <a:xfrm>
             <a:off x="457200" y="164592"/>
-            <a:ext cx="11277295" cy="384048"/>
+            <a:ext cx="11277295" cy="502920"/>
           </a:xfrm>
           <a:prstGeom prst="rect">
             <a:avLst/>
@@ -11731,55 +11318,21 @@
                 </a:solidFill>
                 <a:latin typeface="Calibri"/>
               </a:rPr>
-              <a:t>Del boceto a la plataforma del curso (diagrama)</a:t>
-            </a:r>
-          </a:p>
-        </p:txBody>
-      </p:sp>
-      <p:sp>
-        <p:nvSpPr>
-          <p:cNvPr id="5" name="TextBox 4"/>
-          <p:cNvSpPr txBox="1"/>
-          <p:nvPr/>
-        </p:nvSpPr>
-        <p:spPr>
-          <a:xfrm>
-            <a:off x="457200" y="566928"/>
-            <a:ext cx="11277295" cy="411480"/>
-          </a:xfrm>
-          <a:prstGeom prst="rect">
-            <a:avLst/>
-          </a:prstGeom>
-          <a:noFill/>
-        </p:spPr>
-        <p:txBody>
-          <a:bodyPr wrap="square">
-            <a:spAutoFit/>
-          </a:bodyPr>
-          <a:lstStyle/>
-          <a:p>
-            <a:r>
-              <a:rPr sz="1400" b="0" i="0">
-                <a:solidFill>
-                  <a:srgbClr val="B8D8EE"/>
-                </a:solidFill>
-                <a:latin typeface="Calibri"/>
-              </a:rPr>
-              <a:t>El diagrama se entrega como código Mermaid dentro de la plataforma del curso, no como imagen</a:t>
-            </a:r>
-          </a:p>
-        </p:txBody>
-      </p:sp>
-      <p:sp>
-        <p:nvSpPr>
-          <p:cNvPr id="6" name="Rounded Rectangle 5"/>
+              <a:t>El Despliegue en Mermaid: el molde que la plataforma del curso renderiza</a:t>
+            </a:r>
+          </a:p>
+        </p:txBody>
+      </p:sp>
+      <p:sp>
+        <p:nvSpPr>
+          <p:cNvPr id="5" name="Rounded Rectangle 4"/>
           <p:cNvSpPr/>
           <p:nvPr/>
         </p:nvSpPr>
         <p:spPr>
           <a:xfrm>
-            <a:off x="457200" y="1659636"/>
-            <a:ext cx="11277295" cy="1051560"/>
+            <a:off x="457200" y="1261872"/>
+            <a:ext cx="11277295" cy="4773168"/>
           </a:xfrm>
           <a:prstGeom prst="roundRect">
             <a:avLst>
@@ -11787,7 +11340,7 @@
             </a:avLst>
           </a:prstGeom>
           <a:solidFill>
-            <a:srgbClr val="F2F2F2"/>
+            <a:srgbClr val="1E2A38"/>
           </a:solidFill>
           <a:ln>
             <a:noFill/>
@@ -11817,19 +11370,17 @@
       </p:sp>
       <p:sp>
         <p:nvSpPr>
-          <p:cNvPr id="7" name="Rounded Rectangle 6"/>
+          <p:cNvPr id="6" name="Rectangle 5"/>
           <p:cNvSpPr/>
           <p:nvPr/>
         </p:nvSpPr>
         <p:spPr>
           <a:xfrm>
-            <a:off x="594360" y="1965960"/>
-            <a:ext cx="438912" cy="438912"/>
-          </a:xfrm>
-          <a:prstGeom prst="roundRect">
-            <a:avLst>
-              <a:gd name="adj" fmla="val 12000"/>
-            </a:avLst>
+            <a:off x="457200" y="1261872"/>
+            <a:ext cx="11277295" cy="320040"/>
+          </a:xfrm>
+          <a:prstGeom prst="rect">
+            <a:avLst/>
           </a:prstGeom>
           <a:solidFill>
             <a:srgbClr val="095292"/>
@@ -11862,14 +11413,46 @@
       </p:sp>
       <p:sp>
         <p:nvSpPr>
+          <p:cNvPr id="7" name="TextBox 6"/>
+          <p:cNvSpPr txBox="1"/>
+          <p:nvPr/>
+        </p:nvSpPr>
+        <p:spPr>
+          <a:xfrm>
+            <a:off x="685800" y="1307592"/>
+            <a:ext cx="10820095" cy="256032"/>
+          </a:xfrm>
+          <a:prstGeom prst="rect">
+            <a:avLst/>
+          </a:prstGeom>
+          <a:noFill/>
+        </p:spPr>
+        <p:txBody>
+          <a:bodyPr wrap="square" anchor="ctr"/>
+          <a:lstStyle/>
+          <a:p>
+            <a:r>
+              <a:rPr sz="1000" b="1" i="0">
+                <a:solidFill>
+                  <a:srgbClr val="269CCB"/>
+                </a:solidFill>
+                <a:latin typeface="Calibri"/>
+              </a:rPr>
+              <a:t>● ● ●</a:t>
+            </a:r>
+          </a:p>
+        </p:txBody>
+      </p:sp>
+      <p:sp>
+        <p:nvSpPr>
           <p:cNvPr id="8" name="TextBox 7"/>
           <p:cNvSpPr txBox="1"/>
           <p:nvPr/>
         </p:nvSpPr>
         <p:spPr>
           <a:xfrm>
-            <a:off x="594360" y="1965960"/>
-            <a:ext cx="438912" cy="438912"/>
+            <a:off x="777240" y="1719072"/>
+            <a:ext cx="10637215" cy="4133087"/>
           </a:xfrm>
           <a:prstGeom prst="rect">
             <a:avLst/>
@@ -11877,18 +11460,248 @@
           <a:noFill/>
         </p:spPr>
         <p:txBody>
-          <a:bodyPr wrap="square" anchor="ctr"/>
-          <a:lstStyle/>
-          <a:p>
-            <a:pPr algn="ctr"/>
-            <a:r>
-              <a:rPr sz="1600" b="1" i="0">
+          <a:bodyPr wrap="square">
+            <a:spAutoFit/>
+          </a:bodyPr>
+          <a:lstStyle/>
+          <a:p>
+            <a:pPr>
+              <a:spcAft>
+                <a:spcPts val="400"/>
+              </a:spcAft>
+            </a:pPr>
+            <a:r>
+              <a:rPr sz="1400" b="0" i="0">
                 <a:solidFill>
                   <a:srgbClr val="FFFFFF"/>
                 </a:solidFill>
                 <a:latin typeface="Calibri"/>
               </a:rPr>
-              <a:t>1</a:t>
+              <a:t>flowchart LR</a:t>
+            </a:r>
+          </a:p>
+          <a:p>
+            <a:pPr>
+              <a:spcAft>
+                <a:spcPts val="400"/>
+              </a:spcAft>
+            </a:pPr>
+            <a:r>
+              <a:rPr sz="1400" b="0" i="0">
+                <a:solidFill>
+                  <a:srgbClr val="FFFFFF"/>
+                </a:solidFill>
+                <a:latin typeface="Calibri"/>
+              </a:rPr>
+              <a:t>  subgraph publica["Zona publica - internet"]</a:t>
+            </a:r>
+          </a:p>
+          <a:p>
+            <a:pPr>
+              <a:spcAft>
+                <a:spcPts val="400"/>
+              </a:spcAft>
+            </a:pPr>
+            <a:r>
+              <a:rPr sz="1400" b="0" i="0">
+                <a:solidFill>
+                  <a:srgbClr val="FFFFFF"/>
+                </a:solidFill>
+                <a:latin typeface="Calibri"/>
+              </a:rPr>
+              <a:t>    web["App web&lt;br/&gt;React estatico - 443"]</a:t>
+            </a:r>
+          </a:p>
+          <a:p>
+            <a:pPr>
+              <a:spcAft>
+                <a:spcPts val="400"/>
+              </a:spcAft>
+            </a:pPr>
+            <a:r>
+              <a:rPr sz="1400" b="0" i="0">
+                <a:solidFill>
+                  <a:srgbClr val="FFFFFF"/>
+                </a:solidFill>
+                <a:latin typeface="Calibri"/>
+              </a:rPr>
+              <a:t>    edge["Edge / balanceador&lt;br/&gt;443 HTTPS"]</a:t>
+            </a:r>
+          </a:p>
+          <a:p>
+            <a:pPr>
+              <a:spcAft>
+                <a:spcPts val="400"/>
+              </a:spcAft>
+            </a:pPr>
+            <a:r>
+              <a:rPr sz="1400" b="0" i="0">
+                <a:solidFill>
+                  <a:srgbClr val="FFFFFF"/>
+                </a:solidFill>
+                <a:latin typeface="Calibri"/>
+              </a:rPr>
+              <a:t>  end</a:t>
+            </a:r>
+          </a:p>
+          <a:p>
+            <a:pPr>
+              <a:spcAft>
+                <a:spcPts val="400"/>
+              </a:spcAft>
+            </a:pPr>
+            <a:r>
+              <a:rPr sz="1400" b="0" i="0">
+                <a:solidFill>
+                  <a:srgbClr val="FFFFFF"/>
+                </a:solidFill>
+                <a:latin typeface="Calibri"/>
+              </a:rPr>
+              <a:t>  subgraph privada["Zona privada - solo desde el edge"]</a:t>
+            </a:r>
+          </a:p>
+          <a:p>
+            <a:pPr>
+              <a:spcAft>
+                <a:spcPts val="400"/>
+              </a:spcAft>
+            </a:pPr>
+            <a:r>
+              <a:rPr sz="1400" b="0" i="0">
+                <a:solidFill>
+                  <a:srgbClr val="FFFFFF"/>
+                </a:solidFill>
+                <a:latin typeface="Calibri"/>
+              </a:rPr>
+              <a:t>    api["API CloudLite&lt;br/&gt;8080 HTTP"]</a:t>
+            </a:r>
+          </a:p>
+          <a:p>
+            <a:pPr>
+              <a:spcAft>
+                <a:spcPts val="400"/>
+              </a:spcAft>
+            </a:pPr>
+            <a:r>
+              <a:rPr sz="1400" b="0" i="0">
+                <a:solidFill>
+                  <a:srgbClr val="FFFFFF"/>
+                </a:solidFill>
+                <a:latin typeface="Calibri"/>
+              </a:rPr>
+              <a:t>  end</a:t>
+            </a:r>
+          </a:p>
+          <a:p>
+            <a:pPr>
+              <a:spcAft>
+                <a:spcPts val="400"/>
+              </a:spcAft>
+            </a:pPr>
+            <a:r>
+              <a:rPr sz="1400" b="0" i="0">
+                <a:solidFill>
+                  <a:srgbClr val="FFFFFF"/>
+                </a:solidFill>
+                <a:latin typeface="Calibri"/>
+              </a:rPr>
+              <a:t>  subgraph datos["Zona de datos - sin internet: la BD va AQUI"]</a:t>
+            </a:r>
+          </a:p>
+          <a:p>
+            <a:pPr>
+              <a:spcAft>
+                <a:spcPts val="400"/>
+              </a:spcAft>
+            </a:pPr>
+            <a:r>
+              <a:rPr sz="1400" b="0" i="0">
+                <a:solidFill>
+                  <a:srgbClr val="FFFFFF"/>
+                </a:solidFill>
+                <a:latin typeface="Calibri"/>
+              </a:rPr>
+              <a:t>    db[("Base de datos&lt;br/&gt;5432 TCP")]</a:t>
+            </a:r>
+          </a:p>
+          <a:p>
+            <a:pPr>
+              <a:spcAft>
+                <a:spcPts val="400"/>
+              </a:spcAft>
+            </a:pPr>
+            <a:r>
+              <a:rPr sz="1400" b="0" i="0">
+                <a:solidFill>
+                  <a:srgbClr val="FFFFFF"/>
+                </a:solidFill>
+                <a:latin typeface="Calibri"/>
+              </a:rPr>
+              <a:t>  end</a:t>
+            </a:r>
+          </a:p>
+          <a:p>
+            <a:pPr>
+              <a:spcAft>
+                <a:spcPts val="400"/>
+              </a:spcAft>
+            </a:pPr>
+            <a:r>
+              <a:rPr sz="1400" b="0" i="0">
+                <a:solidFill>
+                  <a:srgbClr val="FFFFFF"/>
+                </a:solidFill>
+                <a:latin typeface="Calibri"/>
+              </a:rPr>
+              <a:t>  web --&gt;|"HTTPS 443"| edge</a:t>
+            </a:r>
+          </a:p>
+          <a:p>
+            <a:pPr>
+              <a:spcAft>
+                <a:spcPts val="400"/>
+              </a:spcAft>
+            </a:pPr>
+            <a:r>
+              <a:rPr sz="1400" b="0" i="0">
+                <a:solidFill>
+                  <a:srgbClr val="FFFFFF"/>
+                </a:solidFill>
+                <a:latin typeface="Calibri"/>
+              </a:rPr>
+              <a:t>  edge --&gt;|"HTTP 8080"| api</a:t>
+            </a:r>
+          </a:p>
+          <a:p>
+            <a:pPr>
+              <a:spcAft>
+                <a:spcPts val="400"/>
+              </a:spcAft>
+            </a:pPr>
+            <a:r>
+              <a:rPr sz="1400" b="0" i="0">
+                <a:solidFill>
+                  <a:srgbClr val="FFFFFF"/>
+                </a:solidFill>
+                <a:latin typeface="Calibri"/>
+              </a:rPr>
+              <a:t>  api --&gt;|"TCP 5432"| db</a:t>
+            </a:r>
+          </a:p>
+          <a:p>
+            <a:pPr>
+              <a:spcAft>
+                <a:spcPts val="400"/>
+              </a:spcAft>
+            </a:pPr>
+            <a:r>
+              <a:rPr sz="1400" b="0" i="0">
+                <a:solidFill>
+                  <a:srgbClr val="FFFFFF"/>
+                </a:solidFill>
+                <a:latin typeface="Calibri"/>
+              </a:rPr>
+              <a:t>  api --&gt;|"HTTPS 443 - frontera de confianza"| pagos["Pasarela de pagos externa"]</a:t>
             </a:r>
           </a:p>
         </p:txBody>
@@ -11901,8 +11714,8 @@
         </p:nvSpPr>
         <p:spPr>
           <a:xfrm>
-            <a:off x="1188720" y="1751076"/>
-            <a:ext cx="10271455" cy="886968"/>
+            <a:off x="457200" y="6080760"/>
+            <a:ext cx="11277295" cy="320040"/>
           </a:xfrm>
           <a:prstGeom prst="rect">
             <a:avLst/>
@@ -11910,553 +11723,27 @@
           <a:noFill/>
         </p:spPr>
         <p:txBody>
-          <a:bodyPr wrap="square" anchor="ctr"/>
-          <a:lstStyle/>
-          <a:p>
-            <a:r>
-              <a:rPr sz="1500" b="1" i="0">
-                <a:solidFill>
-                  <a:srgbClr val="095292"/>
-                </a:solidFill>
-                <a:latin typeface="Calibri"/>
-              </a:rPr>
-              <a:t>Disena visual</a:t>
-            </a:r>
-          </a:p>
-          <a:p>
-            <a:pPr>
-              <a:spcBef>
-                <a:spcPts val="200"/>
-              </a:spcBef>
-            </a:pPr>
-            <a:r>
-              <a:rPr sz="1300" b="0" i="0">
-                <a:solidFill>
-                  <a:srgbClr val="333333"/>
-                </a:solidFill>
-                <a:latin typeface="Calibri"/>
-              </a:rPr>
-              <a:t>Dibuja el diagrama como quieras en Excalidraw o draw.io: es mas rapido arrastrar cajas que escribir codigo, y ahi es donde piensas el modelo.</a:t>
-            </a:r>
-          </a:p>
-        </p:txBody>
-      </p:sp>
-      <p:sp>
-        <p:nvSpPr>
-          <p:cNvPr id="10" name="Rounded Rectangle 9"/>
-          <p:cNvSpPr/>
-          <p:nvPr/>
-        </p:nvSpPr>
-        <p:spPr>
-          <a:xfrm>
-            <a:off x="457200" y="2802636"/>
-            <a:ext cx="11277295" cy="1051560"/>
-          </a:xfrm>
-          <a:prstGeom prst="roundRect">
-            <a:avLst>
-              <a:gd name="adj" fmla="val 12000"/>
-            </a:avLst>
-          </a:prstGeom>
-          <a:solidFill>
-            <a:srgbClr val="E8F4FA"/>
-          </a:solidFill>
-          <a:ln>
-            <a:noFill/>
-          </a:ln>
-        </p:spPr>
-        <p:style>
-          <a:lnRef idx="1">
-            <a:schemeClr val="accent1"/>
-          </a:lnRef>
-          <a:fillRef idx="3">
-            <a:schemeClr val="accent1"/>
-          </a:fillRef>
-          <a:effectRef idx="2">
-            <a:schemeClr val="accent1"/>
-          </a:effectRef>
-          <a:fontRef idx="minor">
-            <a:schemeClr val="lt1"/>
-          </a:fontRef>
-        </p:style>
-        <p:txBody>
-          <a:bodyPr rtlCol="0" anchor="ctr"/>
+          <a:bodyPr wrap="square">
+            <a:spAutoFit/>
+          </a:bodyPr>
           <a:lstStyle/>
           <a:p>
             <a:pPr algn="ctr"/>
-          </a:p>
-        </p:txBody>
-      </p:sp>
-      <p:sp>
-        <p:nvSpPr>
-          <p:cNvPr id="11" name="Rounded Rectangle 10"/>
-          <p:cNvSpPr/>
-          <p:nvPr/>
-        </p:nvSpPr>
-        <p:spPr>
-          <a:xfrm>
-            <a:off x="594360" y="3108960"/>
-            <a:ext cx="438912" cy="438912"/>
-          </a:xfrm>
-          <a:prstGeom prst="roundRect">
-            <a:avLst>
-              <a:gd name="adj" fmla="val 12000"/>
-            </a:avLst>
-          </a:prstGeom>
-          <a:solidFill>
-            <a:srgbClr val="095292"/>
-          </a:solidFill>
-          <a:ln>
-            <a:noFill/>
-          </a:ln>
-        </p:spPr>
-        <p:style>
-          <a:lnRef idx="1">
-            <a:schemeClr val="accent1"/>
-          </a:lnRef>
-          <a:fillRef idx="3">
-            <a:schemeClr val="accent1"/>
-          </a:fillRef>
-          <a:effectRef idx="2">
-            <a:schemeClr val="accent1"/>
-          </a:effectRef>
-          <a:fontRef idx="minor">
-            <a:schemeClr val="lt1"/>
-          </a:fontRef>
-        </p:style>
-        <p:txBody>
-          <a:bodyPr rtlCol="0" anchor="ctr"/>
-          <a:lstStyle/>
-          <a:p>
-            <a:pPr algn="ctr"/>
-          </a:p>
-        </p:txBody>
-      </p:sp>
-      <p:sp>
-        <p:nvSpPr>
-          <p:cNvPr id="12" name="TextBox 11"/>
-          <p:cNvSpPr txBox="1"/>
-          <p:nvPr/>
-        </p:nvSpPr>
-        <p:spPr>
-          <a:xfrm>
-            <a:off x="594360" y="3108960"/>
-            <a:ext cx="438912" cy="438912"/>
-          </a:xfrm>
-          <a:prstGeom prst="rect">
-            <a:avLst/>
-          </a:prstGeom>
-          <a:noFill/>
-        </p:spPr>
-        <p:txBody>
-          <a:bodyPr wrap="square" anchor="ctr"/>
-          <a:lstStyle/>
-          <a:p>
-            <a:pPr algn="ctr"/>
-            <a:r>
-              <a:rPr sz="1600" b="1" i="0">
-                <a:solidFill>
-                  <a:srgbClr val="FFFFFF"/>
-                </a:solidFill>
-                <a:latin typeface="Calibri"/>
-              </a:rPr>
-              <a:t>2</a:t>
-            </a:r>
-          </a:p>
-        </p:txBody>
-      </p:sp>
-      <p:sp>
-        <p:nvSpPr>
-          <p:cNvPr id="13" name="TextBox 12"/>
-          <p:cNvSpPr txBox="1"/>
-          <p:nvPr/>
-        </p:nvSpPr>
-        <p:spPr>
-          <a:xfrm>
-            <a:off x="1188720" y="2894076"/>
-            <a:ext cx="10271455" cy="886968"/>
-          </a:xfrm>
-          <a:prstGeom prst="rect">
-            <a:avLst/>
-          </a:prstGeom>
-          <a:noFill/>
-        </p:spPr>
-        <p:txBody>
-          <a:bodyPr wrap="square" anchor="ctr"/>
-          <a:lstStyle/>
-          <a:p>
-            <a:r>
-              <a:rPr sz="1500" b="1" i="0">
-                <a:solidFill>
-                  <a:srgbClr val="095292"/>
-                </a:solidFill>
-                <a:latin typeface="Calibri"/>
-              </a:rPr>
-              <a:t>Traduce con IA</a:t>
-            </a:r>
-          </a:p>
-          <a:p>
-            <a:pPr>
-              <a:spcBef>
-                <a:spcPts val="200"/>
-              </a:spcBef>
-            </a:pPr>
-            <a:r>
-              <a:rPr sz="1300" b="0" i="0">
-                <a:solidFill>
-                  <a:srgbClr val="333333"/>
-                </a:solidFill>
-                <a:latin typeface="Calibri"/>
-              </a:rPr>
-              <a:t>Copia o describe tu boceto a una IA y pidele el codigo Mermaid: «convierte este diagrama a Mermaid usando flowchart». Revisa el resultado: la IA acierta la sintaxis, no tu modelo.</a:t>
-            </a:r>
-          </a:p>
-        </p:txBody>
-      </p:sp>
-      <p:sp>
-        <p:nvSpPr>
-          <p:cNvPr id="14" name="Rounded Rectangle 13"/>
-          <p:cNvSpPr/>
-          <p:nvPr/>
-        </p:nvSpPr>
-        <p:spPr>
-          <a:xfrm>
-            <a:off x="457200" y="3945636"/>
-            <a:ext cx="11277295" cy="1051560"/>
-          </a:xfrm>
-          <a:prstGeom prst="roundRect">
-            <a:avLst>
-              <a:gd name="adj" fmla="val 12000"/>
-            </a:avLst>
-          </a:prstGeom>
-          <a:solidFill>
-            <a:srgbClr val="F2F2F2"/>
-          </a:solidFill>
-          <a:ln>
-            <a:noFill/>
-          </a:ln>
-        </p:spPr>
-        <p:style>
-          <a:lnRef idx="1">
-            <a:schemeClr val="accent1"/>
-          </a:lnRef>
-          <a:fillRef idx="3">
-            <a:schemeClr val="accent1"/>
-          </a:fillRef>
-          <a:effectRef idx="2">
-            <a:schemeClr val="accent1"/>
-          </a:effectRef>
-          <a:fontRef idx="minor">
-            <a:schemeClr val="lt1"/>
-          </a:fontRef>
-        </p:style>
-        <p:txBody>
-          <a:bodyPr rtlCol="0" anchor="ctr"/>
-          <a:lstStyle/>
-          <a:p>
-            <a:pPr algn="ctr"/>
-          </a:p>
-        </p:txBody>
-      </p:sp>
-      <p:sp>
-        <p:nvSpPr>
-          <p:cNvPr id="15" name="Rounded Rectangle 14"/>
-          <p:cNvSpPr/>
-          <p:nvPr/>
-        </p:nvSpPr>
-        <p:spPr>
-          <a:xfrm>
-            <a:off x="594360" y="4251960"/>
-            <a:ext cx="438912" cy="438912"/>
-          </a:xfrm>
-          <a:prstGeom prst="roundRect">
-            <a:avLst>
-              <a:gd name="adj" fmla="val 12000"/>
-            </a:avLst>
-          </a:prstGeom>
-          <a:solidFill>
-            <a:srgbClr val="095292"/>
-          </a:solidFill>
-          <a:ln>
-            <a:noFill/>
-          </a:ln>
-        </p:spPr>
-        <p:style>
-          <a:lnRef idx="1">
-            <a:schemeClr val="accent1"/>
-          </a:lnRef>
-          <a:fillRef idx="3">
-            <a:schemeClr val="accent1"/>
-          </a:fillRef>
-          <a:effectRef idx="2">
-            <a:schemeClr val="accent1"/>
-          </a:effectRef>
-          <a:fontRef idx="minor">
-            <a:schemeClr val="lt1"/>
-          </a:fontRef>
-        </p:style>
-        <p:txBody>
-          <a:bodyPr rtlCol="0" anchor="ctr"/>
-          <a:lstStyle/>
-          <a:p>
-            <a:pPr algn="ctr"/>
-          </a:p>
-        </p:txBody>
-      </p:sp>
-      <p:sp>
-        <p:nvSpPr>
-          <p:cNvPr id="16" name="TextBox 15"/>
-          <p:cNvSpPr txBox="1"/>
-          <p:nvPr/>
-        </p:nvSpPr>
-        <p:spPr>
-          <a:xfrm>
-            <a:off x="594360" y="4251960"/>
-            <a:ext cx="438912" cy="438912"/>
-          </a:xfrm>
-          <a:prstGeom prst="rect">
-            <a:avLst/>
-          </a:prstGeom>
-          <a:noFill/>
-        </p:spPr>
-        <p:txBody>
-          <a:bodyPr wrap="square" anchor="ctr"/>
-          <a:lstStyle/>
-          <a:p>
-            <a:pPr algn="ctr"/>
-            <a:r>
-              <a:rPr sz="1600" b="1" i="0">
-                <a:solidFill>
-                  <a:srgbClr val="FFFFFF"/>
-                </a:solidFill>
-                <a:latin typeface="Calibri"/>
-              </a:rPr>
-              <a:t>3</a:t>
-            </a:r>
-          </a:p>
-        </p:txBody>
-      </p:sp>
-      <p:sp>
-        <p:nvSpPr>
-          <p:cNvPr id="17" name="TextBox 16"/>
-          <p:cNvSpPr txBox="1"/>
-          <p:nvPr/>
-        </p:nvSpPr>
-        <p:spPr>
-          <a:xfrm>
-            <a:off x="1188720" y="4037076"/>
-            <a:ext cx="10271455" cy="886968"/>
-          </a:xfrm>
-          <a:prstGeom prst="rect">
-            <a:avLst/>
-          </a:prstGeom>
-          <a:noFill/>
-        </p:spPr>
-        <p:txBody>
-          <a:bodyPr wrap="square" anchor="ctr"/>
-          <a:lstStyle/>
-          <a:p>
-            <a:r>
-              <a:rPr sz="1500" b="1" i="0">
-                <a:solidFill>
-                  <a:srgbClr val="095292"/>
-                </a:solidFill>
-                <a:latin typeface="Calibri"/>
-              </a:rPr>
-              <a:t>Pega y renderiza en la plataforma del curso</a:t>
-            </a:r>
-          </a:p>
-          <a:p>
-            <a:pPr>
-              <a:spcBef>
-                <a:spcPts val="200"/>
-              </a:spcBef>
-            </a:pPr>
-            <a:r>
-              <a:rPr sz="1300" b="0" i="0">
-                <a:solidFill>
-                  <a:srgbClr val="333333"/>
-                </a:solidFill>
-                <a:latin typeface="Calibri"/>
-              </a:rPr>
-              <a:t>Pega ese codigo en la caja de texto de la pregunta y mira como lo dibuja la plataforma. Si no renderiza, corrige ahi mismo: lo que se califica es el diagrama renderizado dentro de la plataforma del curso.</a:t>
-            </a:r>
-          </a:p>
-        </p:txBody>
-      </p:sp>
-      <p:sp>
-        <p:nvSpPr>
-          <p:cNvPr id="18" name="Rounded Rectangle 17"/>
-          <p:cNvSpPr/>
-          <p:nvPr/>
-        </p:nvSpPr>
-        <p:spPr>
-          <a:xfrm>
-            <a:off x="457200" y="5088636"/>
-            <a:ext cx="11277295" cy="1051560"/>
-          </a:xfrm>
-          <a:prstGeom prst="roundRect">
-            <a:avLst>
-              <a:gd name="adj" fmla="val 12000"/>
-            </a:avLst>
-          </a:prstGeom>
-          <a:solidFill>
-            <a:srgbClr val="E8F4FA"/>
-          </a:solidFill>
-          <a:ln>
-            <a:noFill/>
-          </a:ln>
-        </p:spPr>
-        <p:style>
-          <a:lnRef idx="1">
-            <a:schemeClr val="accent1"/>
-          </a:lnRef>
-          <a:fillRef idx="3">
-            <a:schemeClr val="accent1"/>
-          </a:fillRef>
-          <a:effectRef idx="2">
-            <a:schemeClr val="accent1"/>
-          </a:effectRef>
-          <a:fontRef idx="minor">
-            <a:schemeClr val="lt1"/>
-          </a:fontRef>
-        </p:style>
-        <p:txBody>
-          <a:bodyPr rtlCol="0" anchor="ctr"/>
-          <a:lstStyle/>
-          <a:p>
-            <a:pPr algn="ctr"/>
-          </a:p>
-        </p:txBody>
-      </p:sp>
-      <p:sp>
-        <p:nvSpPr>
-          <p:cNvPr id="19" name="Rounded Rectangle 18"/>
-          <p:cNvSpPr/>
-          <p:nvPr/>
-        </p:nvSpPr>
-        <p:spPr>
-          <a:xfrm>
-            <a:off x="594360" y="5394960"/>
-            <a:ext cx="438912" cy="438912"/>
-          </a:xfrm>
-          <a:prstGeom prst="roundRect">
-            <a:avLst>
-              <a:gd name="adj" fmla="val 12000"/>
-            </a:avLst>
-          </a:prstGeom>
-          <a:solidFill>
-            <a:srgbClr val="095292"/>
-          </a:solidFill>
-          <a:ln>
-            <a:noFill/>
-          </a:ln>
-        </p:spPr>
-        <p:style>
-          <a:lnRef idx="1">
-            <a:schemeClr val="accent1"/>
-          </a:lnRef>
-          <a:fillRef idx="3">
-            <a:schemeClr val="accent1"/>
-          </a:fillRef>
-          <a:effectRef idx="2">
-            <a:schemeClr val="accent1"/>
-          </a:effectRef>
-          <a:fontRef idx="minor">
-            <a:schemeClr val="lt1"/>
-          </a:fontRef>
-        </p:style>
-        <p:txBody>
-          <a:bodyPr rtlCol="0" anchor="ctr"/>
-          <a:lstStyle/>
-          <a:p>
-            <a:pPr algn="ctr"/>
-          </a:p>
-        </p:txBody>
-      </p:sp>
-      <p:sp>
-        <p:nvSpPr>
-          <p:cNvPr id="20" name="TextBox 19"/>
-          <p:cNvSpPr txBox="1"/>
-          <p:nvPr/>
-        </p:nvSpPr>
-        <p:spPr>
-          <a:xfrm>
-            <a:off x="594360" y="5394960"/>
-            <a:ext cx="438912" cy="438912"/>
-          </a:xfrm>
-          <a:prstGeom prst="rect">
-            <a:avLst/>
-          </a:prstGeom>
-          <a:noFill/>
-        </p:spPr>
-        <p:txBody>
-          <a:bodyPr wrap="square" anchor="ctr"/>
-          <a:lstStyle/>
-          <a:p>
-            <a:pPr algn="ctr"/>
-            <a:r>
-              <a:rPr sz="1600" b="1" i="0">
-                <a:solidFill>
-                  <a:srgbClr val="FFFFFF"/>
-                </a:solidFill>
-                <a:latin typeface="Calibri"/>
-              </a:rPr>
-              <a:t>4</a:t>
-            </a:r>
-          </a:p>
-        </p:txBody>
-      </p:sp>
-      <p:sp>
-        <p:nvSpPr>
-          <p:cNvPr id="21" name="TextBox 20"/>
-          <p:cNvSpPr txBox="1"/>
-          <p:nvPr/>
-        </p:nvSpPr>
-        <p:spPr>
-          <a:xfrm>
-            <a:off x="1188720" y="5180076"/>
-            <a:ext cx="10271455" cy="886968"/>
-          </a:xfrm>
-          <a:prstGeom prst="rect">
-            <a:avLst/>
-          </a:prstGeom>
-          <a:noFill/>
-        </p:spPr>
-        <p:txBody>
-          <a:bodyPr wrap="square" anchor="ctr"/>
-          <a:lstStyle/>
-          <a:p>
-            <a:r>
-              <a:rPr sz="1500" b="1" i="0">
-                <a:solidFill>
-                  <a:srgbClr val="095292"/>
-                </a:solidFill>
-                <a:latin typeface="Calibri"/>
-              </a:rPr>
-              <a:t>Guarda el PNG para tu PI</a:t>
-            </a:r>
-          </a:p>
-          <a:p>
-            <a:pPr>
-              <a:spcBef>
-                <a:spcPts val="200"/>
-              </a:spcBef>
-            </a:pPr>
-            <a:r>
-              <a:rPr sz="1300" b="0" i="0">
-                <a:solidFill>
-                  <a:srgbClr val="333333"/>
-                </a:solidFill>
-                <a:latin typeface="Calibri"/>
-              </a:rPr>
-              <a:t>Exporta tambien la imagen a la carpeta de tu Proyecto Integrador. Esa copia es para tu informe; no reemplaza la respuesta en la plataforma.</a:t>
-            </a:r>
-          </a:p>
-        </p:txBody>
-      </p:sp>
-      <p:sp>
-        <p:nvSpPr>
-          <p:cNvPr id="22" name="TextBox 21"/>
+            <a:r>
+              <a:rPr sz="1200" b="0" i="1">
+                <a:solidFill>
+                  <a:srgbClr val="666666"/>
+                </a:solidFill>
+                <a:latin typeface="Calibri"/>
+              </a:rPr>
+              <a:t>Una «subgraph» por zona, el puerto en cada caja y la base con «[( )]». La flecha al externo ES la frontera de confianza. Nombres: los mismos del C4 Containers de la Clase 4.</a:t>
+            </a:r>
+          </a:p>
+        </p:txBody>
+      </p:sp>
+      <p:sp>
+        <p:nvSpPr>
+          <p:cNvPr id="10" name="TextBox 9"/>
           <p:cNvSpPr txBox="1"/>
           <p:nvPr/>
         </p:nvSpPr>
@@ -12524,7 +11811,7 @@
         <p:spPr>
           <a:xfrm>
             <a:off x="0" y="0"/>
-            <a:ext cx="12191695" cy="960120"/>
+            <a:ext cx="12191695" cy="1170432"/>
           </a:xfrm>
           <a:prstGeom prst="rect">
             <a:avLst/>
@@ -12566,7 +11853,7 @@
         </p:nvSpPr>
         <p:spPr>
           <a:xfrm>
-            <a:off x="0" y="960120"/>
+            <a:off x="0" y="1170432"/>
             <a:ext cx="12191695" cy="41148"/>
           </a:xfrm>
           <a:prstGeom prst="rect">
@@ -12610,7 +11897,7 @@
         <p:spPr>
           <a:xfrm>
             <a:off x="457200" y="164592"/>
-            <a:ext cx="11277295" cy="502920"/>
+            <a:ext cx="11277295" cy="384048"/>
           </a:xfrm>
           <a:prstGeom prst="rect">
             <a:avLst/>
@@ -12630,7 +11917,7 @@
                 </a:solidFill>
                 <a:latin typeface="Calibri"/>
               </a:rPr>
-              <a:t>PI CloudLite — entregable de hoy</a:t>
+              <a:t>Herramientas de hoy</a:t>
             </a:r>
           </a:p>
         </p:txBody>
@@ -12643,8 +11930,8 @@
         </p:nvSpPr>
         <p:spPr>
           <a:xfrm>
-            <a:off x="457200" y="1170432"/>
-            <a:ext cx="11277295" cy="5230368"/>
+            <a:off x="457200" y="566928"/>
+            <a:ext cx="11277295" cy="411480"/>
           </a:xfrm>
           <a:prstGeom prst="rect">
             <a:avLst/>
@@ -12657,119 +11944,837 @@
           </a:bodyPr>
           <a:lstStyle/>
           <a:p>
-            <a:pPr>
-              <a:spcAft>
-                <a:spcPts val="800"/>
-              </a:spcAft>
-            </a:pPr>
-            <a:r>
-              <a:rPr sz="2000" b="0" i="0">
-                <a:solidFill>
-                  <a:srgbClr val="333333"/>
-                </a:solidFill>
-                <a:latin typeface="Calibri"/>
-              </a:rPr>
-              <a:t>–   </a:t>
-            </a:r>
-            <a:r>
-              <a:rPr sz="2000" b="1" i="0">
-                <a:solidFill>
-                  <a:srgbClr val="333333"/>
-                </a:solidFill>
-                <a:latin typeface="Calibri"/>
-              </a:rPr>
-              <a:t>Entregable:</a:t>
-            </a:r>
-            <a:r>
-              <a:rPr sz="2000" b="0" i="0">
-                <a:solidFill>
-                  <a:srgbClr val="333333"/>
-                </a:solidFill>
-                <a:latin typeface="Calibri"/>
-              </a:rPr>
-              <a:t> Diagrama Deployment en Mermaid dentro de la plataforma del curso (3 zonas + puertos) + tipo de almacenamiento por componente</a:t>
-            </a:r>
-          </a:p>
-          <a:p>
-            <a:pPr>
-              <a:spcAft>
-                <a:spcPts val="800"/>
-              </a:spcAft>
-            </a:pPr>
-            <a:r>
-              <a:rPr sz="2000" b="0" i="0">
-                <a:solidFill>
-                  <a:srgbClr val="333333"/>
-                </a:solidFill>
-                <a:latin typeface="Calibri"/>
-              </a:rPr>
-              <a:t>–   Herramienta: </a:t>
-            </a:r>
-            <a:r>
-              <a:rPr sz="2000" b="1" i="0">
-                <a:solidFill>
-                  <a:srgbClr val="333333"/>
-                </a:solidFill>
-                <a:latin typeface="Calibri"/>
-              </a:rPr>
-              <a:t>la plataforma del curso (Mermaid) · boceto en draw.io o Excalidraw</a:t>
-            </a:r>
-          </a:p>
-          <a:p>
-            <a:pPr>
-              <a:spcAft>
-                <a:spcPts val="800"/>
-              </a:spcAft>
-            </a:pPr>
-            <a:r>
-              <a:rPr sz="2000" b="0" i="0">
-                <a:solidFill>
-                  <a:srgbClr val="333333"/>
-                </a:solidFill>
-                <a:latin typeface="Calibri"/>
-              </a:rPr>
-              <a:t>–   Todo lo que construyan hoy entra al </a:t>
-            </a:r>
-            <a:r>
-              <a:rPr sz="2000" b="1" i="0">
-                <a:solidFill>
-                  <a:srgbClr val="333333"/>
-                </a:solidFill>
-                <a:latin typeface="Calibri"/>
-              </a:rPr>
-              <a:t>informe/repo del PI</a:t>
-            </a:r>
-            <a:r>
-              <a:rPr sz="2000" b="0" i="0">
-                <a:solidFill>
-                  <a:srgbClr val="333333"/>
-                </a:solidFill>
-                <a:latin typeface="Calibri"/>
-              </a:rPr>
-              <a:t> (no es lab suelto).</a:t>
-            </a:r>
-          </a:p>
-          <a:p>
-            <a:pPr>
-              <a:spcAft>
-                <a:spcPts val="800"/>
-              </a:spcAft>
-            </a:pPr>
-            <a:r>
-              <a:rPr sz="2000" b="0" i="0">
-                <a:solidFill>
-                  <a:srgbClr val="333333"/>
-                </a:solidFill>
-                <a:latin typeface="Calibri"/>
-              </a:rPr>
-              <a:t>–   Individual por defecto · el docente puede autorizar equipos de 2–3; la entrega en la plataforma del curso siempre es individual.</a:t>
-            </a:r>
-          </a:p>
-        </p:txBody>
-      </p:sp>
-      <p:sp>
-        <p:nvSpPr>
-          <p:cNvPr id="6" name="TextBox 5"/>
+            <a:r>
+              <a:rPr sz="1400" b="0" i="0">
+                <a:solidFill>
+                  <a:srgbClr val="B8D8EE"/>
+                </a:solidFill>
+                <a:latin typeface="Calibri"/>
+              </a:rPr>
+              <a:t>Gratis · navegador o free tier · sin cuenta de pago</a:t>
+            </a:r>
+          </a:p>
+        </p:txBody>
+      </p:sp>
+      <p:sp>
+        <p:nvSpPr>
+          <p:cNvPr id="6" name="Rounded Rectangle 5"/>
+          <p:cNvSpPr/>
+          <p:nvPr/>
+        </p:nvSpPr>
+        <p:spPr>
+          <a:xfrm>
+            <a:off x="457200" y="1591056"/>
+            <a:ext cx="3624986" cy="2299716"/>
+          </a:xfrm>
+          <a:prstGeom prst="roundRect">
+            <a:avLst>
+              <a:gd name="adj" fmla="val 12000"/>
+            </a:avLst>
+          </a:prstGeom>
+          <a:solidFill>
+            <a:srgbClr val="F2F2F2"/>
+          </a:solidFill>
+          <a:ln>
+            <a:noFill/>
+          </a:ln>
+        </p:spPr>
+        <p:style>
+          <a:lnRef idx="1">
+            <a:schemeClr val="accent1"/>
+          </a:lnRef>
+          <a:fillRef idx="3">
+            <a:schemeClr val="accent1"/>
+          </a:fillRef>
+          <a:effectRef idx="2">
+            <a:schemeClr val="accent1"/>
+          </a:effectRef>
+          <a:fontRef idx="minor">
+            <a:schemeClr val="lt1"/>
+          </a:fontRef>
+        </p:style>
+        <p:txBody>
+          <a:bodyPr rtlCol="0" anchor="ctr"/>
+          <a:lstStyle/>
+          <a:p>
+            <a:pPr algn="ctr"/>
+          </a:p>
+        </p:txBody>
+      </p:sp>
+      <p:sp>
+        <p:nvSpPr>
+          <p:cNvPr id="7" name="Rectangle 6"/>
+          <p:cNvSpPr/>
+          <p:nvPr/>
+        </p:nvSpPr>
+        <p:spPr>
+          <a:xfrm>
+            <a:off x="457200" y="1591056"/>
+            <a:ext cx="3624986" cy="64008"/>
+          </a:xfrm>
+          <a:prstGeom prst="rect">
+            <a:avLst/>
+          </a:prstGeom>
+          <a:solidFill>
+            <a:srgbClr val="095292"/>
+          </a:solidFill>
+          <a:ln>
+            <a:noFill/>
+          </a:ln>
+        </p:spPr>
+        <p:style>
+          <a:lnRef idx="1">
+            <a:schemeClr val="accent1"/>
+          </a:lnRef>
+          <a:fillRef idx="3">
+            <a:schemeClr val="accent1"/>
+          </a:fillRef>
+          <a:effectRef idx="2">
+            <a:schemeClr val="accent1"/>
+          </a:effectRef>
+          <a:fontRef idx="minor">
+            <a:schemeClr val="lt1"/>
+          </a:fontRef>
+        </p:style>
+        <p:txBody>
+          <a:bodyPr rtlCol="0" anchor="ctr"/>
+          <a:lstStyle/>
+          <a:p>
+            <a:pPr algn="ctr"/>
+          </a:p>
+        </p:txBody>
+      </p:sp>
+      <p:sp>
+        <p:nvSpPr>
+          <p:cNvPr id="8" name="Rectangle 7"/>
+          <p:cNvSpPr/>
+          <p:nvPr/>
+        </p:nvSpPr>
+        <p:spPr>
+          <a:xfrm>
+            <a:off x="457200" y="1655064"/>
+            <a:ext cx="3624986" cy="27432"/>
+          </a:xfrm>
+          <a:prstGeom prst="rect">
+            <a:avLst/>
+          </a:prstGeom>
+          <a:solidFill>
+            <a:srgbClr val="FFD000"/>
+          </a:solidFill>
+          <a:ln>
+            <a:noFill/>
+          </a:ln>
+        </p:spPr>
+        <p:style>
+          <a:lnRef idx="1">
+            <a:schemeClr val="accent1"/>
+          </a:lnRef>
+          <a:fillRef idx="3">
+            <a:schemeClr val="accent1"/>
+          </a:fillRef>
+          <a:effectRef idx="2">
+            <a:schemeClr val="accent1"/>
+          </a:effectRef>
+          <a:fontRef idx="minor">
+            <a:schemeClr val="lt1"/>
+          </a:fontRef>
+        </p:style>
+        <p:txBody>
+          <a:bodyPr rtlCol="0" anchor="ctr"/>
+          <a:lstStyle/>
+          <a:p>
+            <a:pPr algn="ctr"/>
+          </a:p>
+        </p:txBody>
+      </p:sp>
+      <p:pic>
+        <p:nvPicPr>
+          <p:cNvPr id="9" name="Picture 8" descr="drawio.png"/>
+          <p:cNvPicPr>
+            <a:picLocks noChangeAspect="1"/>
+          </p:cNvPicPr>
+          <p:nvPr/>
+        </p:nvPicPr>
+        <p:blipFill>
+          <a:blip r:embed="rId2"/>
+          <a:stretch>
+            <a:fillRect/>
+          </a:stretch>
+        </p:blipFill>
+        <p:spPr>
+          <a:xfrm>
+            <a:off x="1659331" y="1847087"/>
+            <a:ext cx="1220724" cy="1220724"/>
+          </a:xfrm>
+          <a:prstGeom prst="rect">
+            <a:avLst/>
+          </a:prstGeom>
+        </p:spPr>
+      </p:pic>
+      <p:sp>
+        <p:nvSpPr>
+          <p:cNvPr id="10" name="TextBox 9"/>
+          <p:cNvSpPr txBox="1"/>
+          <p:nvPr/>
+        </p:nvSpPr>
+        <p:spPr>
+          <a:xfrm>
+            <a:off x="530352" y="3159251"/>
+            <a:ext cx="3478682" cy="621792"/>
+          </a:xfrm>
+          <a:prstGeom prst="rect">
+            <a:avLst/>
+          </a:prstGeom>
+          <a:noFill/>
+        </p:spPr>
+        <p:txBody>
+          <a:bodyPr wrap="square" anchor="t"/>
+          <a:lstStyle/>
+          <a:p>
+            <a:pPr algn="ctr"/>
+            <a:r>
+              <a:rPr sz="1300" b="1" i="0">
+                <a:solidFill>
+                  <a:srgbClr val="095292"/>
+                </a:solidFill>
+                <a:latin typeface="Calibri"/>
+              </a:rPr>
+              <a:t>draw.io</a:t>
+            </a:r>
+          </a:p>
+          <a:p>
+            <a:pPr algn="ctr">
+              <a:spcBef>
+                <a:spcPts val="200"/>
+              </a:spcBef>
+            </a:pPr>
+            <a:r>
+              <a:rPr sz="1000" b="0" i="0">
+                <a:solidFill>
+                  <a:srgbClr val="666666"/>
+                </a:solidFill>
+                <a:latin typeface="Calibri"/>
+              </a:rPr>
+              <a:t>Deployment</a:t>
+            </a:r>
+          </a:p>
+        </p:txBody>
+      </p:sp>
+      <p:sp>
+        <p:nvSpPr>
+          <p:cNvPr id="11" name="Rounded Rectangle 10"/>
+          <p:cNvSpPr/>
+          <p:nvPr/>
+        </p:nvSpPr>
+        <p:spPr>
+          <a:xfrm>
+            <a:off x="4283354" y="1591056"/>
+            <a:ext cx="3624986" cy="2299716"/>
+          </a:xfrm>
+          <a:prstGeom prst="roundRect">
+            <a:avLst>
+              <a:gd name="adj" fmla="val 12000"/>
+            </a:avLst>
+          </a:prstGeom>
+          <a:solidFill>
+            <a:srgbClr val="F2F2F2"/>
+          </a:solidFill>
+          <a:ln>
+            <a:noFill/>
+          </a:ln>
+        </p:spPr>
+        <p:style>
+          <a:lnRef idx="1">
+            <a:schemeClr val="accent1"/>
+          </a:lnRef>
+          <a:fillRef idx="3">
+            <a:schemeClr val="accent1"/>
+          </a:fillRef>
+          <a:effectRef idx="2">
+            <a:schemeClr val="accent1"/>
+          </a:effectRef>
+          <a:fontRef idx="minor">
+            <a:schemeClr val="lt1"/>
+          </a:fontRef>
+        </p:style>
+        <p:txBody>
+          <a:bodyPr rtlCol="0" anchor="ctr"/>
+          <a:lstStyle/>
+          <a:p>
+            <a:pPr algn="ctr"/>
+          </a:p>
+        </p:txBody>
+      </p:sp>
+      <p:sp>
+        <p:nvSpPr>
+          <p:cNvPr id="12" name="Rectangle 11"/>
+          <p:cNvSpPr/>
+          <p:nvPr/>
+        </p:nvSpPr>
+        <p:spPr>
+          <a:xfrm>
+            <a:off x="4283354" y="1591056"/>
+            <a:ext cx="3624986" cy="64008"/>
+          </a:xfrm>
+          <a:prstGeom prst="rect">
+            <a:avLst/>
+          </a:prstGeom>
+          <a:solidFill>
+            <a:srgbClr val="095292"/>
+          </a:solidFill>
+          <a:ln>
+            <a:noFill/>
+          </a:ln>
+        </p:spPr>
+        <p:style>
+          <a:lnRef idx="1">
+            <a:schemeClr val="accent1"/>
+          </a:lnRef>
+          <a:fillRef idx="3">
+            <a:schemeClr val="accent1"/>
+          </a:fillRef>
+          <a:effectRef idx="2">
+            <a:schemeClr val="accent1"/>
+          </a:effectRef>
+          <a:fontRef idx="minor">
+            <a:schemeClr val="lt1"/>
+          </a:fontRef>
+        </p:style>
+        <p:txBody>
+          <a:bodyPr rtlCol="0" anchor="ctr"/>
+          <a:lstStyle/>
+          <a:p>
+            <a:pPr algn="ctr"/>
+          </a:p>
+        </p:txBody>
+      </p:sp>
+      <p:sp>
+        <p:nvSpPr>
+          <p:cNvPr id="13" name="Rectangle 12"/>
+          <p:cNvSpPr/>
+          <p:nvPr/>
+        </p:nvSpPr>
+        <p:spPr>
+          <a:xfrm>
+            <a:off x="4283354" y="1655064"/>
+            <a:ext cx="3624986" cy="27432"/>
+          </a:xfrm>
+          <a:prstGeom prst="rect">
+            <a:avLst/>
+          </a:prstGeom>
+          <a:solidFill>
+            <a:srgbClr val="FFD000"/>
+          </a:solidFill>
+          <a:ln>
+            <a:noFill/>
+          </a:ln>
+        </p:spPr>
+        <p:style>
+          <a:lnRef idx="1">
+            <a:schemeClr val="accent1"/>
+          </a:lnRef>
+          <a:fillRef idx="3">
+            <a:schemeClr val="accent1"/>
+          </a:fillRef>
+          <a:effectRef idx="2">
+            <a:schemeClr val="accent1"/>
+          </a:effectRef>
+          <a:fontRef idx="minor">
+            <a:schemeClr val="lt1"/>
+          </a:fontRef>
+        </p:style>
+        <p:txBody>
+          <a:bodyPr rtlCol="0" anchor="ctr"/>
+          <a:lstStyle/>
+          <a:p>
+            <a:pPr algn="ctr"/>
+          </a:p>
+        </p:txBody>
+      </p:sp>
+      <p:pic>
+        <p:nvPicPr>
+          <p:cNvPr id="14" name="Picture 13" descr="google_docs.png"/>
+          <p:cNvPicPr>
+            <a:picLocks noChangeAspect="1"/>
+          </p:cNvPicPr>
+          <p:nvPr/>
+        </p:nvPicPr>
+        <p:blipFill>
+          <a:blip r:embed="rId3"/>
+          <a:stretch>
+            <a:fillRect/>
+          </a:stretch>
+        </p:blipFill>
+        <p:spPr>
+          <a:xfrm>
+            <a:off x="5485485" y="1847087"/>
+            <a:ext cx="1220724" cy="1220724"/>
+          </a:xfrm>
+          <a:prstGeom prst="rect">
+            <a:avLst/>
+          </a:prstGeom>
+        </p:spPr>
+      </p:pic>
+      <p:sp>
+        <p:nvSpPr>
+          <p:cNvPr id="15" name="TextBox 14"/>
+          <p:cNvSpPr txBox="1"/>
+          <p:nvPr/>
+        </p:nvSpPr>
+        <p:spPr>
+          <a:xfrm>
+            <a:off x="4356506" y="3159251"/>
+            <a:ext cx="3478682" cy="621792"/>
+          </a:xfrm>
+          <a:prstGeom prst="rect">
+            <a:avLst/>
+          </a:prstGeom>
+          <a:noFill/>
+        </p:spPr>
+        <p:txBody>
+          <a:bodyPr wrap="square" anchor="t"/>
+          <a:lstStyle/>
+          <a:p>
+            <a:pPr algn="ctr"/>
+            <a:r>
+              <a:rPr sz="1300" b="1" i="0">
+                <a:solidFill>
+                  <a:srgbClr val="095292"/>
+                </a:solidFill>
+                <a:latin typeface="Calibri"/>
+              </a:rPr>
+              <a:t>Google Docs</a:t>
+            </a:r>
+          </a:p>
+          <a:p>
+            <a:pPr algn="ctr">
+              <a:spcBef>
+                <a:spcPts val="200"/>
+              </a:spcBef>
+            </a:pPr>
+            <a:r>
+              <a:rPr sz="1000" b="0" i="0">
+                <a:solidFill>
+                  <a:srgbClr val="666666"/>
+                </a:solidFill>
+                <a:latin typeface="Calibri"/>
+              </a:rPr>
+              <a:t>Informe PI</a:t>
+            </a:r>
+          </a:p>
+        </p:txBody>
+      </p:sp>
+      <p:sp>
+        <p:nvSpPr>
+          <p:cNvPr id="16" name="Rounded Rectangle 15"/>
+          <p:cNvSpPr/>
+          <p:nvPr/>
+        </p:nvSpPr>
+        <p:spPr>
+          <a:xfrm>
+            <a:off x="8109508" y="1591056"/>
+            <a:ext cx="3624986" cy="2299716"/>
+          </a:xfrm>
+          <a:prstGeom prst="roundRect">
+            <a:avLst>
+              <a:gd name="adj" fmla="val 12000"/>
+            </a:avLst>
+          </a:prstGeom>
+          <a:solidFill>
+            <a:srgbClr val="F2F2F2"/>
+          </a:solidFill>
+          <a:ln>
+            <a:noFill/>
+          </a:ln>
+        </p:spPr>
+        <p:style>
+          <a:lnRef idx="1">
+            <a:schemeClr val="accent1"/>
+          </a:lnRef>
+          <a:fillRef idx="3">
+            <a:schemeClr val="accent1"/>
+          </a:fillRef>
+          <a:effectRef idx="2">
+            <a:schemeClr val="accent1"/>
+          </a:effectRef>
+          <a:fontRef idx="minor">
+            <a:schemeClr val="lt1"/>
+          </a:fontRef>
+        </p:style>
+        <p:txBody>
+          <a:bodyPr rtlCol="0" anchor="ctr"/>
+          <a:lstStyle/>
+          <a:p>
+            <a:pPr algn="ctr"/>
+          </a:p>
+        </p:txBody>
+      </p:sp>
+      <p:sp>
+        <p:nvSpPr>
+          <p:cNvPr id="17" name="Rectangle 16"/>
+          <p:cNvSpPr/>
+          <p:nvPr/>
+        </p:nvSpPr>
+        <p:spPr>
+          <a:xfrm>
+            <a:off x="8109508" y="1591056"/>
+            <a:ext cx="3624986" cy="64008"/>
+          </a:xfrm>
+          <a:prstGeom prst="rect">
+            <a:avLst/>
+          </a:prstGeom>
+          <a:solidFill>
+            <a:srgbClr val="095292"/>
+          </a:solidFill>
+          <a:ln>
+            <a:noFill/>
+          </a:ln>
+        </p:spPr>
+        <p:style>
+          <a:lnRef idx="1">
+            <a:schemeClr val="accent1"/>
+          </a:lnRef>
+          <a:fillRef idx="3">
+            <a:schemeClr val="accent1"/>
+          </a:fillRef>
+          <a:effectRef idx="2">
+            <a:schemeClr val="accent1"/>
+          </a:effectRef>
+          <a:fontRef idx="minor">
+            <a:schemeClr val="lt1"/>
+          </a:fontRef>
+        </p:style>
+        <p:txBody>
+          <a:bodyPr rtlCol="0" anchor="ctr"/>
+          <a:lstStyle/>
+          <a:p>
+            <a:pPr algn="ctr"/>
+          </a:p>
+        </p:txBody>
+      </p:sp>
+      <p:sp>
+        <p:nvSpPr>
+          <p:cNvPr id="18" name="Rectangle 17"/>
+          <p:cNvSpPr/>
+          <p:nvPr/>
+        </p:nvSpPr>
+        <p:spPr>
+          <a:xfrm>
+            <a:off x="8109508" y="1655064"/>
+            <a:ext cx="3624986" cy="27432"/>
+          </a:xfrm>
+          <a:prstGeom prst="rect">
+            <a:avLst/>
+          </a:prstGeom>
+          <a:solidFill>
+            <a:srgbClr val="FFD000"/>
+          </a:solidFill>
+          <a:ln>
+            <a:noFill/>
+          </a:ln>
+        </p:spPr>
+        <p:style>
+          <a:lnRef idx="1">
+            <a:schemeClr val="accent1"/>
+          </a:lnRef>
+          <a:fillRef idx="3">
+            <a:schemeClr val="accent1"/>
+          </a:fillRef>
+          <a:effectRef idx="2">
+            <a:schemeClr val="accent1"/>
+          </a:effectRef>
+          <a:fontRef idx="minor">
+            <a:schemeClr val="lt1"/>
+          </a:fontRef>
+        </p:style>
+        <p:txBody>
+          <a:bodyPr rtlCol="0" anchor="ctr"/>
+          <a:lstStyle/>
+          <a:p>
+            <a:pPr algn="ctr"/>
+          </a:p>
+        </p:txBody>
+      </p:sp>
+      <p:pic>
+        <p:nvPicPr>
+          <p:cNvPr id="19" name="Picture 18" descr="mermaid.png"/>
+          <p:cNvPicPr>
+            <a:picLocks noChangeAspect="1"/>
+          </p:cNvPicPr>
+          <p:nvPr/>
+        </p:nvPicPr>
+        <p:blipFill>
+          <a:blip r:embed="rId4"/>
+          <a:stretch>
+            <a:fillRect/>
+          </a:stretch>
+        </p:blipFill>
+        <p:spPr>
+          <a:xfrm>
+            <a:off x="9311640" y="1847087"/>
+            <a:ext cx="1220724" cy="1220724"/>
+          </a:xfrm>
+          <a:prstGeom prst="rect">
+            <a:avLst/>
+          </a:prstGeom>
+        </p:spPr>
+      </p:pic>
+      <p:sp>
+        <p:nvSpPr>
+          <p:cNvPr id="20" name="TextBox 19"/>
+          <p:cNvSpPr txBox="1"/>
+          <p:nvPr/>
+        </p:nvSpPr>
+        <p:spPr>
+          <a:xfrm>
+            <a:off x="8182660" y="3159251"/>
+            <a:ext cx="3478682" cy="621792"/>
+          </a:xfrm>
+          <a:prstGeom prst="rect">
+            <a:avLst/>
+          </a:prstGeom>
+          <a:noFill/>
+        </p:spPr>
+        <p:txBody>
+          <a:bodyPr wrap="square" anchor="t"/>
+          <a:lstStyle/>
+          <a:p>
+            <a:pPr algn="ctr"/>
+            <a:r>
+              <a:rPr sz="1300" b="1" i="0">
+                <a:solidFill>
+                  <a:srgbClr val="095292"/>
+                </a:solidFill>
+                <a:latin typeface="Calibri"/>
+              </a:rPr>
+              <a:t>Mermaid</a:t>
+            </a:r>
+          </a:p>
+          <a:p>
+            <a:pPr algn="ctr">
+              <a:spcBef>
+                <a:spcPts val="200"/>
+              </a:spcBef>
+            </a:pPr>
+            <a:r>
+              <a:rPr sz="1000" b="0" i="0">
+                <a:solidFill>
+                  <a:srgbClr val="666666"/>
+                </a:solidFill>
+                <a:latin typeface="Calibri"/>
+              </a:rPr>
+              <a:t>Codigo del diagrama</a:t>
+            </a:r>
+          </a:p>
+        </p:txBody>
+      </p:sp>
+      <p:sp>
+        <p:nvSpPr>
+          <p:cNvPr id="21" name="Rounded Rectangle 20"/>
+          <p:cNvSpPr/>
+          <p:nvPr/>
+        </p:nvSpPr>
+        <p:spPr>
+          <a:xfrm>
+            <a:off x="4283354" y="4055364"/>
+            <a:ext cx="3624986" cy="2299716"/>
+          </a:xfrm>
+          <a:prstGeom prst="roundRect">
+            <a:avLst>
+              <a:gd name="adj" fmla="val 12000"/>
+            </a:avLst>
+          </a:prstGeom>
+          <a:solidFill>
+            <a:srgbClr val="F2F2F2"/>
+          </a:solidFill>
+          <a:ln>
+            <a:noFill/>
+          </a:ln>
+        </p:spPr>
+        <p:style>
+          <a:lnRef idx="1">
+            <a:schemeClr val="accent1"/>
+          </a:lnRef>
+          <a:fillRef idx="3">
+            <a:schemeClr val="accent1"/>
+          </a:fillRef>
+          <a:effectRef idx="2">
+            <a:schemeClr val="accent1"/>
+          </a:effectRef>
+          <a:fontRef idx="minor">
+            <a:schemeClr val="lt1"/>
+          </a:fontRef>
+        </p:style>
+        <p:txBody>
+          <a:bodyPr rtlCol="0" anchor="ctr"/>
+          <a:lstStyle/>
+          <a:p>
+            <a:pPr algn="ctr"/>
+          </a:p>
+        </p:txBody>
+      </p:sp>
+      <p:sp>
+        <p:nvSpPr>
+          <p:cNvPr id="22" name="Rectangle 21"/>
+          <p:cNvSpPr/>
+          <p:nvPr/>
+        </p:nvSpPr>
+        <p:spPr>
+          <a:xfrm>
+            <a:off x="4283354" y="4055364"/>
+            <a:ext cx="3624986" cy="64008"/>
+          </a:xfrm>
+          <a:prstGeom prst="rect">
+            <a:avLst/>
+          </a:prstGeom>
+          <a:solidFill>
+            <a:srgbClr val="095292"/>
+          </a:solidFill>
+          <a:ln>
+            <a:noFill/>
+          </a:ln>
+        </p:spPr>
+        <p:style>
+          <a:lnRef idx="1">
+            <a:schemeClr val="accent1"/>
+          </a:lnRef>
+          <a:fillRef idx="3">
+            <a:schemeClr val="accent1"/>
+          </a:fillRef>
+          <a:effectRef idx="2">
+            <a:schemeClr val="accent1"/>
+          </a:effectRef>
+          <a:fontRef idx="minor">
+            <a:schemeClr val="lt1"/>
+          </a:fontRef>
+        </p:style>
+        <p:txBody>
+          <a:bodyPr rtlCol="0" anchor="ctr"/>
+          <a:lstStyle/>
+          <a:p>
+            <a:pPr algn="ctr"/>
+          </a:p>
+        </p:txBody>
+      </p:sp>
+      <p:sp>
+        <p:nvSpPr>
+          <p:cNvPr id="23" name="Rectangle 22"/>
+          <p:cNvSpPr/>
+          <p:nvPr/>
+        </p:nvSpPr>
+        <p:spPr>
+          <a:xfrm>
+            <a:off x="4283354" y="4119372"/>
+            <a:ext cx="3624986" cy="27432"/>
+          </a:xfrm>
+          <a:prstGeom prst="rect">
+            <a:avLst/>
+          </a:prstGeom>
+          <a:solidFill>
+            <a:srgbClr val="FFD000"/>
+          </a:solidFill>
+          <a:ln>
+            <a:noFill/>
+          </a:ln>
+        </p:spPr>
+        <p:style>
+          <a:lnRef idx="1">
+            <a:schemeClr val="accent1"/>
+          </a:lnRef>
+          <a:fillRef idx="3">
+            <a:schemeClr val="accent1"/>
+          </a:fillRef>
+          <a:effectRef idx="2">
+            <a:schemeClr val="accent1"/>
+          </a:effectRef>
+          <a:fontRef idx="minor">
+            <a:schemeClr val="lt1"/>
+          </a:fontRef>
+        </p:style>
+        <p:txBody>
+          <a:bodyPr rtlCol="0" anchor="ctr"/>
+          <a:lstStyle/>
+          <a:p>
+            <a:pPr algn="ctr"/>
+          </a:p>
+        </p:txBody>
+      </p:sp>
+      <p:pic>
+        <p:nvPicPr>
+          <p:cNvPr id="24" name="Picture 23" descr="examlab.png"/>
+          <p:cNvPicPr>
+            <a:picLocks noChangeAspect="1"/>
+          </p:cNvPicPr>
+          <p:nvPr/>
+        </p:nvPicPr>
+        <p:blipFill>
+          <a:blip r:embed="rId5"/>
+          <a:stretch>
+            <a:fillRect/>
+          </a:stretch>
+        </p:blipFill>
+        <p:spPr>
+          <a:xfrm>
+            <a:off x="5485485" y="4311396"/>
+            <a:ext cx="1220724" cy="1220724"/>
+          </a:xfrm>
+          <a:prstGeom prst="rect">
+            <a:avLst/>
+          </a:prstGeom>
+        </p:spPr>
+      </p:pic>
+      <p:sp>
+        <p:nvSpPr>
+          <p:cNvPr id="25" name="TextBox 24"/>
+          <p:cNvSpPr txBox="1"/>
+          <p:nvPr/>
+        </p:nvSpPr>
+        <p:spPr>
+          <a:xfrm>
+            <a:off x="4356506" y="5623560"/>
+            <a:ext cx="3478682" cy="621792"/>
+          </a:xfrm>
+          <a:prstGeom prst="rect">
+            <a:avLst/>
+          </a:prstGeom>
+          <a:noFill/>
+        </p:spPr>
+        <p:txBody>
+          <a:bodyPr wrap="square" anchor="t"/>
+          <a:lstStyle/>
+          <a:p>
+            <a:pPr algn="ctr"/>
+            <a:r>
+              <a:rPr sz="1300" b="1" i="0">
+                <a:solidFill>
+                  <a:srgbClr val="095292"/>
+                </a:solidFill>
+                <a:latin typeface="Calibri"/>
+              </a:rPr>
+              <a:t>la plataforma del curso</a:t>
+            </a:r>
+          </a:p>
+          <a:p>
+            <a:pPr algn="ctr">
+              <a:spcBef>
+                <a:spcPts val="200"/>
+              </a:spcBef>
+            </a:pPr>
+            <a:r>
+              <a:rPr sz="1000" b="0" i="0">
+                <a:solidFill>
+                  <a:srgbClr val="666666"/>
+                </a:solidFill>
+                <a:latin typeface="Calibri"/>
+              </a:rPr>
+              <a:t>Donde se entrega</a:t>
+            </a:r>
+          </a:p>
+        </p:txBody>
+      </p:sp>
+      <p:sp>
+        <p:nvSpPr>
+          <p:cNvPr id="26" name="TextBox 25"/>
           <p:cNvSpPr txBox="1"/>
           <p:nvPr/>
         </p:nvSpPr>
@@ -12837,7 +12842,7 @@
         <p:spPr>
           <a:xfrm>
             <a:off x="0" y="0"/>
-            <a:ext cx="12191695" cy="960120"/>
+            <a:ext cx="12191695" cy="1170432"/>
           </a:xfrm>
           <a:prstGeom prst="rect">
             <a:avLst/>
@@ -12879,7 +12884,7 @@
         </p:nvSpPr>
         <p:spPr>
           <a:xfrm>
-            <a:off x="0" y="960120"/>
+            <a:off x="0" y="1170432"/>
             <a:ext cx="12191695" cy="41148"/>
           </a:xfrm>
           <a:prstGeom prst="rect">
@@ -12923,7 +12928,7 @@
         <p:spPr>
           <a:xfrm>
             <a:off x="457200" y="164592"/>
-            <a:ext cx="11277295" cy="502920"/>
+            <a:ext cx="11277295" cy="384048"/>
           </a:xfrm>
           <a:prstGeom prst="rect">
             <a:avLst/>
@@ -12943,7 +12948,7 @@
                 </a:solidFill>
                 <a:latin typeface="Calibri"/>
               </a:rPr>
-              <a:t>Manos a la obra (paso a paso)</a:t>
+              <a:t>Del boceto a la plataforma del curso (diagrama)</a:t>
             </a:r>
           </a:p>
         </p:txBody>
@@ -12956,8 +12961,8 @@
         </p:nvSpPr>
         <p:spPr>
           <a:xfrm>
-            <a:off x="457200" y="1170432"/>
-            <a:ext cx="11277295" cy="5230368"/>
+            <a:off x="457200" y="566928"/>
+            <a:ext cx="11277295" cy="411480"/>
           </a:xfrm>
           <a:prstGeom prst="rect">
             <a:avLst/>
@@ -12970,137 +12975,705 @@
           </a:bodyPr>
           <a:lstStyle/>
           <a:p>
-            <a:pPr>
-              <a:spcAft>
-                <a:spcPts val="800"/>
-              </a:spcAft>
-            </a:pPr>
-            <a:r>
-              <a:rPr sz="2000" b="1" i="0">
-                <a:solidFill>
-                  <a:srgbClr val="333333"/>
-                </a:solidFill>
-                <a:latin typeface="Calibri"/>
-              </a:rPr>
-              <a:t>1.</a:t>
-            </a:r>
-            <a:r>
-              <a:rPr sz="2000" b="0" i="0">
-                <a:solidFill>
-                  <a:srgbClr val="333333"/>
-                </a:solidFill>
-                <a:latin typeface="Calibri"/>
-              </a:rPr>
-              <a:t> Paso 1: dibuje primero el boceto del despliegue en Excalidraw o draw.io con las tres zonas (publica, privada y de datos), y despues pidale a una IA que lo traduzca a Mermaid; peguelo en la pregunta 4 y verifique en el diagrama ya renderizado que la base de datos NO quede en la zona publica.</a:t>
-            </a:r>
-          </a:p>
-          <a:p>
-            <a:pPr>
-              <a:spcAft>
-                <a:spcPts val="800"/>
-              </a:spcAft>
-            </a:pPr>
-            <a:r>
-              <a:rPr sz="2000" b="0" i="0">
-                <a:solidFill>
-                  <a:srgbClr val="333333"/>
-                </a:solidFill>
-                <a:latin typeface="Calibri"/>
-              </a:rPr>
-              <a:t>–   </a:t>
-            </a:r>
-            <a:r>
-              <a:rPr sz="2000" b="1" i="0">
-                <a:solidFill>
-                  <a:srgbClr val="333333"/>
-                </a:solidFill>
-                <a:latin typeface="Calibri"/>
-              </a:rPr>
-              <a:t>2.</a:t>
-            </a:r>
-            <a:r>
-              <a:rPr sz="2000" b="0" i="0">
-                <a:solidFill>
-                  <a:srgbClr val="333333"/>
-                </a:solidFill>
-                <a:latin typeface="Calibri"/>
-              </a:rPr>
-              <a:t> Paso 2: etiquete en ese mismo diagrama el puerto de cada componente y marque las fronteras de confianza, es decir donde termina lo que usted controla; verifique que no aparezcan nombres de subredes ni de servicios de un proveedor concreto.</a:t>
-            </a:r>
-          </a:p>
-          <a:p>
-            <a:pPr>
-              <a:spcAft>
-                <a:spcPts val="800"/>
-              </a:spcAft>
-            </a:pPr>
-            <a:r>
-              <a:rPr sz="2000" b="0" i="0">
-                <a:solidFill>
-                  <a:srgbClr val="333333"/>
-                </a:solidFill>
-                <a:latin typeface="Calibri"/>
-              </a:rPr>
-              <a:t>–   </a:t>
-            </a:r>
-            <a:r>
-              <a:rPr sz="2000" b="1" i="0">
-                <a:solidFill>
-                  <a:srgbClr val="333333"/>
-                </a:solidFill>
-                <a:latin typeface="Calibri"/>
-              </a:rPr>
-              <a:t>3.</a:t>
-            </a:r>
-            <a:r>
-              <a:rPr sz="2000" b="0" i="0">
-                <a:solidFill>
-                  <a:srgbClr val="333333"/>
-                </a:solidFill>
-                <a:latin typeface="Calibri"/>
-              </a:rPr>
-              <a:t> Paso 3: justifique en la pregunta 5 el tipo de almacenamiento de cada componente diciendo que caracteristica del dato lo exige; si su dominio no necesita almacenamiento de objetos, declarelo y justifiquelo en vez de agregarlo.</a:t>
-            </a:r>
-          </a:p>
-          <a:p>
-            <a:pPr>
-              <a:spcAft>
-                <a:spcPts val="800"/>
-              </a:spcAft>
-            </a:pPr>
-            <a:r>
-              <a:rPr sz="2000" b="0" i="0">
-                <a:solidFill>
-                  <a:srgbClr val="333333"/>
-                </a:solidFill>
-                <a:latin typeface="Calibri"/>
-              </a:rPr>
-              <a:t>–   </a:t>
-            </a:r>
-            <a:r>
-              <a:rPr sz="2000" b="1" i="0">
-                <a:solidFill>
-                  <a:srgbClr val="333333"/>
-                </a:solidFill>
-                <a:latin typeface="Calibri"/>
-              </a:rPr>
-              <a:t>4.</a:t>
-            </a:r>
-            <a:r>
-              <a:rPr sz="2000" b="0" i="0">
-                <a:solidFill>
-                  <a:srgbClr val="333333"/>
-                </a:solidFill>
-                <a:latin typeface="Calibri"/>
-              </a:rPr>
-              <a:t> Paso 4: complete en la pregunta 6 la tabla de correspondencia entre el C4 Containers y el Despliegue, con una fila por componente y su zona, y liste los renombres que aplico; si no hubo ninguno, digalo explicitamente.</a:t>
-            </a:r>
-          </a:p>
-        </p:txBody>
-      </p:sp>
-      <p:sp>
-        <p:nvSpPr>
-          <p:cNvPr id="6" name="TextBox 5"/>
+            <a:r>
+              <a:rPr sz="1400" b="0" i="0">
+                <a:solidFill>
+                  <a:srgbClr val="B8D8EE"/>
+                </a:solidFill>
+                <a:latin typeface="Calibri"/>
+              </a:rPr>
+              <a:t>El diagrama se entrega como código Mermaid dentro de la plataforma del curso, no como imagen</a:t>
+            </a:r>
+          </a:p>
+        </p:txBody>
+      </p:sp>
+      <p:sp>
+        <p:nvSpPr>
+          <p:cNvPr id="6" name="Rounded Rectangle 5"/>
+          <p:cNvSpPr/>
+          <p:nvPr/>
+        </p:nvSpPr>
+        <p:spPr>
+          <a:xfrm>
+            <a:off x="457200" y="1659636"/>
+            <a:ext cx="11277295" cy="1051560"/>
+          </a:xfrm>
+          <a:prstGeom prst="roundRect">
+            <a:avLst>
+              <a:gd name="adj" fmla="val 12000"/>
+            </a:avLst>
+          </a:prstGeom>
+          <a:solidFill>
+            <a:srgbClr val="F2F2F2"/>
+          </a:solidFill>
+          <a:ln>
+            <a:noFill/>
+          </a:ln>
+        </p:spPr>
+        <p:style>
+          <a:lnRef idx="1">
+            <a:schemeClr val="accent1"/>
+          </a:lnRef>
+          <a:fillRef idx="3">
+            <a:schemeClr val="accent1"/>
+          </a:fillRef>
+          <a:effectRef idx="2">
+            <a:schemeClr val="accent1"/>
+          </a:effectRef>
+          <a:fontRef idx="minor">
+            <a:schemeClr val="lt1"/>
+          </a:fontRef>
+        </p:style>
+        <p:txBody>
+          <a:bodyPr rtlCol="0" anchor="ctr"/>
+          <a:lstStyle/>
+          <a:p>
+            <a:pPr algn="ctr"/>
+          </a:p>
+        </p:txBody>
+      </p:sp>
+      <p:sp>
+        <p:nvSpPr>
+          <p:cNvPr id="7" name="Rounded Rectangle 6"/>
+          <p:cNvSpPr/>
+          <p:nvPr/>
+        </p:nvSpPr>
+        <p:spPr>
+          <a:xfrm>
+            <a:off x="594360" y="1965960"/>
+            <a:ext cx="438912" cy="438912"/>
+          </a:xfrm>
+          <a:prstGeom prst="roundRect">
+            <a:avLst>
+              <a:gd name="adj" fmla="val 12000"/>
+            </a:avLst>
+          </a:prstGeom>
+          <a:solidFill>
+            <a:srgbClr val="095292"/>
+          </a:solidFill>
+          <a:ln>
+            <a:noFill/>
+          </a:ln>
+        </p:spPr>
+        <p:style>
+          <a:lnRef idx="1">
+            <a:schemeClr val="accent1"/>
+          </a:lnRef>
+          <a:fillRef idx="3">
+            <a:schemeClr val="accent1"/>
+          </a:fillRef>
+          <a:effectRef idx="2">
+            <a:schemeClr val="accent1"/>
+          </a:effectRef>
+          <a:fontRef idx="minor">
+            <a:schemeClr val="lt1"/>
+          </a:fontRef>
+        </p:style>
+        <p:txBody>
+          <a:bodyPr rtlCol="0" anchor="ctr"/>
+          <a:lstStyle/>
+          <a:p>
+            <a:pPr algn="ctr"/>
+          </a:p>
+        </p:txBody>
+      </p:sp>
+      <p:sp>
+        <p:nvSpPr>
+          <p:cNvPr id="8" name="TextBox 7"/>
+          <p:cNvSpPr txBox="1"/>
+          <p:nvPr/>
+        </p:nvSpPr>
+        <p:spPr>
+          <a:xfrm>
+            <a:off x="594360" y="1965960"/>
+            <a:ext cx="438912" cy="438912"/>
+          </a:xfrm>
+          <a:prstGeom prst="rect">
+            <a:avLst/>
+          </a:prstGeom>
+          <a:noFill/>
+        </p:spPr>
+        <p:txBody>
+          <a:bodyPr wrap="square" anchor="ctr"/>
+          <a:lstStyle/>
+          <a:p>
+            <a:pPr algn="ctr"/>
+            <a:r>
+              <a:rPr sz="1600" b="1" i="0">
+                <a:solidFill>
+                  <a:srgbClr val="FFFFFF"/>
+                </a:solidFill>
+                <a:latin typeface="Calibri"/>
+              </a:rPr>
+              <a:t>1</a:t>
+            </a:r>
+          </a:p>
+        </p:txBody>
+      </p:sp>
+      <p:sp>
+        <p:nvSpPr>
+          <p:cNvPr id="9" name="TextBox 8"/>
+          <p:cNvSpPr txBox="1"/>
+          <p:nvPr/>
+        </p:nvSpPr>
+        <p:spPr>
+          <a:xfrm>
+            <a:off x="1188720" y="1751076"/>
+            <a:ext cx="10271455" cy="886968"/>
+          </a:xfrm>
+          <a:prstGeom prst="rect">
+            <a:avLst/>
+          </a:prstGeom>
+          <a:noFill/>
+        </p:spPr>
+        <p:txBody>
+          <a:bodyPr wrap="square" anchor="ctr"/>
+          <a:lstStyle/>
+          <a:p>
+            <a:r>
+              <a:rPr sz="1500" b="1" i="0">
+                <a:solidFill>
+                  <a:srgbClr val="095292"/>
+                </a:solidFill>
+                <a:latin typeface="Calibri"/>
+              </a:rPr>
+              <a:t>Disena visual</a:t>
+            </a:r>
+          </a:p>
+          <a:p>
+            <a:pPr>
+              <a:spcBef>
+                <a:spcPts val="200"/>
+              </a:spcBef>
+            </a:pPr>
+            <a:r>
+              <a:rPr sz="1300" b="0" i="0">
+                <a:solidFill>
+                  <a:srgbClr val="333333"/>
+                </a:solidFill>
+                <a:latin typeface="Calibri"/>
+              </a:rPr>
+              <a:t>Dibuja el diagrama como quieras en Excalidraw o draw.io: es mas rapido arrastrar cajas que escribir codigo, y ahi es donde piensas el modelo.</a:t>
+            </a:r>
+          </a:p>
+        </p:txBody>
+      </p:sp>
+      <p:sp>
+        <p:nvSpPr>
+          <p:cNvPr id="10" name="Rounded Rectangle 9"/>
+          <p:cNvSpPr/>
+          <p:nvPr/>
+        </p:nvSpPr>
+        <p:spPr>
+          <a:xfrm>
+            <a:off x="457200" y="2802636"/>
+            <a:ext cx="11277295" cy="1051560"/>
+          </a:xfrm>
+          <a:prstGeom prst="roundRect">
+            <a:avLst>
+              <a:gd name="adj" fmla="val 12000"/>
+            </a:avLst>
+          </a:prstGeom>
+          <a:solidFill>
+            <a:srgbClr val="E8F4FA"/>
+          </a:solidFill>
+          <a:ln>
+            <a:noFill/>
+          </a:ln>
+        </p:spPr>
+        <p:style>
+          <a:lnRef idx="1">
+            <a:schemeClr val="accent1"/>
+          </a:lnRef>
+          <a:fillRef idx="3">
+            <a:schemeClr val="accent1"/>
+          </a:fillRef>
+          <a:effectRef idx="2">
+            <a:schemeClr val="accent1"/>
+          </a:effectRef>
+          <a:fontRef idx="minor">
+            <a:schemeClr val="lt1"/>
+          </a:fontRef>
+        </p:style>
+        <p:txBody>
+          <a:bodyPr rtlCol="0" anchor="ctr"/>
+          <a:lstStyle/>
+          <a:p>
+            <a:pPr algn="ctr"/>
+          </a:p>
+        </p:txBody>
+      </p:sp>
+      <p:sp>
+        <p:nvSpPr>
+          <p:cNvPr id="11" name="Rounded Rectangle 10"/>
+          <p:cNvSpPr/>
+          <p:nvPr/>
+        </p:nvSpPr>
+        <p:spPr>
+          <a:xfrm>
+            <a:off x="594360" y="3108960"/>
+            <a:ext cx="438912" cy="438912"/>
+          </a:xfrm>
+          <a:prstGeom prst="roundRect">
+            <a:avLst>
+              <a:gd name="adj" fmla="val 12000"/>
+            </a:avLst>
+          </a:prstGeom>
+          <a:solidFill>
+            <a:srgbClr val="095292"/>
+          </a:solidFill>
+          <a:ln>
+            <a:noFill/>
+          </a:ln>
+        </p:spPr>
+        <p:style>
+          <a:lnRef idx="1">
+            <a:schemeClr val="accent1"/>
+          </a:lnRef>
+          <a:fillRef idx="3">
+            <a:schemeClr val="accent1"/>
+          </a:fillRef>
+          <a:effectRef idx="2">
+            <a:schemeClr val="accent1"/>
+          </a:effectRef>
+          <a:fontRef idx="minor">
+            <a:schemeClr val="lt1"/>
+          </a:fontRef>
+        </p:style>
+        <p:txBody>
+          <a:bodyPr rtlCol="0" anchor="ctr"/>
+          <a:lstStyle/>
+          <a:p>
+            <a:pPr algn="ctr"/>
+          </a:p>
+        </p:txBody>
+      </p:sp>
+      <p:sp>
+        <p:nvSpPr>
+          <p:cNvPr id="12" name="TextBox 11"/>
+          <p:cNvSpPr txBox="1"/>
+          <p:nvPr/>
+        </p:nvSpPr>
+        <p:spPr>
+          <a:xfrm>
+            <a:off x="594360" y="3108960"/>
+            <a:ext cx="438912" cy="438912"/>
+          </a:xfrm>
+          <a:prstGeom prst="rect">
+            <a:avLst/>
+          </a:prstGeom>
+          <a:noFill/>
+        </p:spPr>
+        <p:txBody>
+          <a:bodyPr wrap="square" anchor="ctr"/>
+          <a:lstStyle/>
+          <a:p>
+            <a:pPr algn="ctr"/>
+            <a:r>
+              <a:rPr sz="1600" b="1" i="0">
+                <a:solidFill>
+                  <a:srgbClr val="FFFFFF"/>
+                </a:solidFill>
+                <a:latin typeface="Calibri"/>
+              </a:rPr>
+              <a:t>2</a:t>
+            </a:r>
+          </a:p>
+        </p:txBody>
+      </p:sp>
+      <p:sp>
+        <p:nvSpPr>
+          <p:cNvPr id="13" name="TextBox 12"/>
+          <p:cNvSpPr txBox="1"/>
+          <p:nvPr/>
+        </p:nvSpPr>
+        <p:spPr>
+          <a:xfrm>
+            <a:off x="1188720" y="2894076"/>
+            <a:ext cx="10271455" cy="886968"/>
+          </a:xfrm>
+          <a:prstGeom prst="rect">
+            <a:avLst/>
+          </a:prstGeom>
+          <a:noFill/>
+        </p:spPr>
+        <p:txBody>
+          <a:bodyPr wrap="square" anchor="ctr"/>
+          <a:lstStyle/>
+          <a:p>
+            <a:r>
+              <a:rPr sz="1500" b="1" i="0">
+                <a:solidFill>
+                  <a:srgbClr val="095292"/>
+                </a:solidFill>
+                <a:latin typeface="Calibri"/>
+              </a:rPr>
+              <a:t>Traduce con IA</a:t>
+            </a:r>
+          </a:p>
+          <a:p>
+            <a:pPr>
+              <a:spcBef>
+                <a:spcPts val="200"/>
+              </a:spcBef>
+            </a:pPr>
+            <a:r>
+              <a:rPr sz="1300" b="0" i="0">
+                <a:solidFill>
+                  <a:srgbClr val="333333"/>
+                </a:solidFill>
+                <a:latin typeface="Calibri"/>
+              </a:rPr>
+              <a:t>Copia o describe tu boceto a una IA y pidele el codigo Mermaid: «convierte este diagrama a Mermaid usando flowchart». Revisa el resultado: la IA acierta la sintaxis, no tu modelo.</a:t>
+            </a:r>
+          </a:p>
+        </p:txBody>
+      </p:sp>
+      <p:sp>
+        <p:nvSpPr>
+          <p:cNvPr id="14" name="Rounded Rectangle 13"/>
+          <p:cNvSpPr/>
+          <p:nvPr/>
+        </p:nvSpPr>
+        <p:spPr>
+          <a:xfrm>
+            <a:off x="457200" y="3945636"/>
+            <a:ext cx="11277295" cy="1051560"/>
+          </a:xfrm>
+          <a:prstGeom prst="roundRect">
+            <a:avLst>
+              <a:gd name="adj" fmla="val 12000"/>
+            </a:avLst>
+          </a:prstGeom>
+          <a:solidFill>
+            <a:srgbClr val="F2F2F2"/>
+          </a:solidFill>
+          <a:ln>
+            <a:noFill/>
+          </a:ln>
+        </p:spPr>
+        <p:style>
+          <a:lnRef idx="1">
+            <a:schemeClr val="accent1"/>
+          </a:lnRef>
+          <a:fillRef idx="3">
+            <a:schemeClr val="accent1"/>
+          </a:fillRef>
+          <a:effectRef idx="2">
+            <a:schemeClr val="accent1"/>
+          </a:effectRef>
+          <a:fontRef idx="minor">
+            <a:schemeClr val="lt1"/>
+          </a:fontRef>
+        </p:style>
+        <p:txBody>
+          <a:bodyPr rtlCol="0" anchor="ctr"/>
+          <a:lstStyle/>
+          <a:p>
+            <a:pPr algn="ctr"/>
+          </a:p>
+        </p:txBody>
+      </p:sp>
+      <p:sp>
+        <p:nvSpPr>
+          <p:cNvPr id="15" name="Rounded Rectangle 14"/>
+          <p:cNvSpPr/>
+          <p:nvPr/>
+        </p:nvSpPr>
+        <p:spPr>
+          <a:xfrm>
+            <a:off x="594360" y="4251960"/>
+            <a:ext cx="438912" cy="438912"/>
+          </a:xfrm>
+          <a:prstGeom prst="roundRect">
+            <a:avLst>
+              <a:gd name="adj" fmla="val 12000"/>
+            </a:avLst>
+          </a:prstGeom>
+          <a:solidFill>
+            <a:srgbClr val="095292"/>
+          </a:solidFill>
+          <a:ln>
+            <a:noFill/>
+          </a:ln>
+        </p:spPr>
+        <p:style>
+          <a:lnRef idx="1">
+            <a:schemeClr val="accent1"/>
+          </a:lnRef>
+          <a:fillRef idx="3">
+            <a:schemeClr val="accent1"/>
+          </a:fillRef>
+          <a:effectRef idx="2">
+            <a:schemeClr val="accent1"/>
+          </a:effectRef>
+          <a:fontRef idx="minor">
+            <a:schemeClr val="lt1"/>
+          </a:fontRef>
+        </p:style>
+        <p:txBody>
+          <a:bodyPr rtlCol="0" anchor="ctr"/>
+          <a:lstStyle/>
+          <a:p>
+            <a:pPr algn="ctr"/>
+          </a:p>
+        </p:txBody>
+      </p:sp>
+      <p:sp>
+        <p:nvSpPr>
+          <p:cNvPr id="16" name="TextBox 15"/>
+          <p:cNvSpPr txBox="1"/>
+          <p:nvPr/>
+        </p:nvSpPr>
+        <p:spPr>
+          <a:xfrm>
+            <a:off x="594360" y="4251960"/>
+            <a:ext cx="438912" cy="438912"/>
+          </a:xfrm>
+          <a:prstGeom prst="rect">
+            <a:avLst/>
+          </a:prstGeom>
+          <a:noFill/>
+        </p:spPr>
+        <p:txBody>
+          <a:bodyPr wrap="square" anchor="ctr"/>
+          <a:lstStyle/>
+          <a:p>
+            <a:pPr algn="ctr"/>
+            <a:r>
+              <a:rPr sz="1600" b="1" i="0">
+                <a:solidFill>
+                  <a:srgbClr val="FFFFFF"/>
+                </a:solidFill>
+                <a:latin typeface="Calibri"/>
+              </a:rPr>
+              <a:t>3</a:t>
+            </a:r>
+          </a:p>
+        </p:txBody>
+      </p:sp>
+      <p:sp>
+        <p:nvSpPr>
+          <p:cNvPr id="17" name="TextBox 16"/>
+          <p:cNvSpPr txBox="1"/>
+          <p:nvPr/>
+        </p:nvSpPr>
+        <p:spPr>
+          <a:xfrm>
+            <a:off x="1188720" y="4037076"/>
+            <a:ext cx="10271455" cy="886968"/>
+          </a:xfrm>
+          <a:prstGeom prst="rect">
+            <a:avLst/>
+          </a:prstGeom>
+          <a:noFill/>
+        </p:spPr>
+        <p:txBody>
+          <a:bodyPr wrap="square" anchor="ctr"/>
+          <a:lstStyle/>
+          <a:p>
+            <a:r>
+              <a:rPr sz="1500" b="1" i="0">
+                <a:solidFill>
+                  <a:srgbClr val="095292"/>
+                </a:solidFill>
+                <a:latin typeface="Calibri"/>
+              </a:rPr>
+              <a:t>Pega y renderiza en la plataforma del curso</a:t>
+            </a:r>
+          </a:p>
+          <a:p>
+            <a:pPr>
+              <a:spcBef>
+                <a:spcPts val="200"/>
+              </a:spcBef>
+            </a:pPr>
+            <a:r>
+              <a:rPr sz="1300" b="0" i="0">
+                <a:solidFill>
+                  <a:srgbClr val="333333"/>
+                </a:solidFill>
+                <a:latin typeface="Calibri"/>
+              </a:rPr>
+              <a:t>Pega ese codigo en la caja de texto de la pregunta y mira como lo dibuja la plataforma. Si no renderiza, corrige ahi mismo: lo que se califica es el diagrama renderizado dentro de la plataforma del curso.</a:t>
+            </a:r>
+          </a:p>
+        </p:txBody>
+      </p:sp>
+      <p:sp>
+        <p:nvSpPr>
+          <p:cNvPr id="18" name="Rounded Rectangle 17"/>
+          <p:cNvSpPr/>
+          <p:nvPr/>
+        </p:nvSpPr>
+        <p:spPr>
+          <a:xfrm>
+            <a:off x="457200" y="5088636"/>
+            <a:ext cx="11277295" cy="1051560"/>
+          </a:xfrm>
+          <a:prstGeom prst="roundRect">
+            <a:avLst>
+              <a:gd name="adj" fmla="val 12000"/>
+            </a:avLst>
+          </a:prstGeom>
+          <a:solidFill>
+            <a:srgbClr val="E8F4FA"/>
+          </a:solidFill>
+          <a:ln>
+            <a:noFill/>
+          </a:ln>
+        </p:spPr>
+        <p:style>
+          <a:lnRef idx="1">
+            <a:schemeClr val="accent1"/>
+          </a:lnRef>
+          <a:fillRef idx="3">
+            <a:schemeClr val="accent1"/>
+          </a:fillRef>
+          <a:effectRef idx="2">
+            <a:schemeClr val="accent1"/>
+          </a:effectRef>
+          <a:fontRef idx="minor">
+            <a:schemeClr val="lt1"/>
+          </a:fontRef>
+        </p:style>
+        <p:txBody>
+          <a:bodyPr rtlCol="0" anchor="ctr"/>
+          <a:lstStyle/>
+          <a:p>
+            <a:pPr algn="ctr"/>
+          </a:p>
+        </p:txBody>
+      </p:sp>
+      <p:sp>
+        <p:nvSpPr>
+          <p:cNvPr id="19" name="Rounded Rectangle 18"/>
+          <p:cNvSpPr/>
+          <p:nvPr/>
+        </p:nvSpPr>
+        <p:spPr>
+          <a:xfrm>
+            <a:off x="594360" y="5394960"/>
+            <a:ext cx="438912" cy="438912"/>
+          </a:xfrm>
+          <a:prstGeom prst="roundRect">
+            <a:avLst>
+              <a:gd name="adj" fmla="val 12000"/>
+            </a:avLst>
+          </a:prstGeom>
+          <a:solidFill>
+            <a:srgbClr val="095292"/>
+          </a:solidFill>
+          <a:ln>
+            <a:noFill/>
+          </a:ln>
+        </p:spPr>
+        <p:style>
+          <a:lnRef idx="1">
+            <a:schemeClr val="accent1"/>
+          </a:lnRef>
+          <a:fillRef idx="3">
+            <a:schemeClr val="accent1"/>
+          </a:fillRef>
+          <a:effectRef idx="2">
+            <a:schemeClr val="accent1"/>
+          </a:effectRef>
+          <a:fontRef idx="minor">
+            <a:schemeClr val="lt1"/>
+          </a:fontRef>
+        </p:style>
+        <p:txBody>
+          <a:bodyPr rtlCol="0" anchor="ctr"/>
+          <a:lstStyle/>
+          <a:p>
+            <a:pPr algn="ctr"/>
+          </a:p>
+        </p:txBody>
+      </p:sp>
+      <p:sp>
+        <p:nvSpPr>
+          <p:cNvPr id="20" name="TextBox 19"/>
+          <p:cNvSpPr txBox="1"/>
+          <p:nvPr/>
+        </p:nvSpPr>
+        <p:spPr>
+          <a:xfrm>
+            <a:off x="594360" y="5394960"/>
+            <a:ext cx="438912" cy="438912"/>
+          </a:xfrm>
+          <a:prstGeom prst="rect">
+            <a:avLst/>
+          </a:prstGeom>
+          <a:noFill/>
+        </p:spPr>
+        <p:txBody>
+          <a:bodyPr wrap="square" anchor="ctr"/>
+          <a:lstStyle/>
+          <a:p>
+            <a:pPr algn="ctr"/>
+            <a:r>
+              <a:rPr sz="1600" b="1" i="0">
+                <a:solidFill>
+                  <a:srgbClr val="FFFFFF"/>
+                </a:solidFill>
+                <a:latin typeface="Calibri"/>
+              </a:rPr>
+              <a:t>4</a:t>
+            </a:r>
+          </a:p>
+        </p:txBody>
+      </p:sp>
+      <p:sp>
+        <p:nvSpPr>
+          <p:cNvPr id="21" name="TextBox 20"/>
+          <p:cNvSpPr txBox="1"/>
+          <p:nvPr/>
+        </p:nvSpPr>
+        <p:spPr>
+          <a:xfrm>
+            <a:off x="1188720" y="5180076"/>
+            <a:ext cx="10271455" cy="886968"/>
+          </a:xfrm>
+          <a:prstGeom prst="rect">
+            <a:avLst/>
+          </a:prstGeom>
+          <a:noFill/>
+        </p:spPr>
+        <p:txBody>
+          <a:bodyPr wrap="square" anchor="ctr"/>
+          <a:lstStyle/>
+          <a:p>
+            <a:r>
+              <a:rPr sz="1500" b="1" i="0">
+                <a:solidFill>
+                  <a:srgbClr val="095292"/>
+                </a:solidFill>
+                <a:latin typeface="Calibri"/>
+              </a:rPr>
+              <a:t>Guarda el PNG para tu PI</a:t>
+            </a:r>
+          </a:p>
+          <a:p>
+            <a:pPr>
+              <a:spcBef>
+                <a:spcPts val="200"/>
+              </a:spcBef>
+            </a:pPr>
+            <a:r>
+              <a:rPr sz="1300" b="0" i="0">
+                <a:solidFill>
+                  <a:srgbClr val="333333"/>
+                </a:solidFill>
+                <a:latin typeface="Calibri"/>
+              </a:rPr>
+              <a:t>Exporta tambien la imagen a la carpeta de tu Proyecto Integrador. Esa copia es para tu informe; no reemplaza la respuesta en la plataforma.</a:t>
+            </a:r>
+          </a:p>
+        </p:txBody>
+      </p:sp>
+      <p:sp>
+        <p:nvSpPr>
+          <p:cNvPr id="22" name="TextBox 21"/>
           <p:cNvSpPr txBox="1"/>
           <p:nvPr/>
         </p:nvSpPr>
@@ -13274,109 +13847,21 @@
                 </a:solidFill>
                 <a:latin typeface="Calibri"/>
               </a:rPr>
-              <a:t>Para continuar (PI)</a:t>
-            </a:r>
-          </a:p>
-        </p:txBody>
-      </p:sp>
-      <p:sp>
-        <p:nvSpPr>
-          <p:cNvPr id="5" name="Rounded Rectangle 4"/>
-          <p:cNvSpPr/>
-          <p:nvPr/>
-        </p:nvSpPr>
-        <p:spPr>
-          <a:xfrm>
-            <a:off x="457200" y="1261872"/>
-            <a:ext cx="11277295" cy="1051560"/>
-          </a:xfrm>
-          <a:prstGeom prst="roundRect">
-            <a:avLst>
-              <a:gd name="adj" fmla="val 12000"/>
-            </a:avLst>
-          </a:prstGeom>
-          <a:solidFill>
-            <a:srgbClr val="E8F4FA"/>
-          </a:solidFill>
-          <a:ln>
-            <a:noFill/>
-          </a:ln>
-        </p:spPr>
-        <p:style>
-          <a:lnRef idx="1">
-            <a:schemeClr val="accent1"/>
-          </a:lnRef>
-          <a:fillRef idx="3">
-            <a:schemeClr val="accent1"/>
-          </a:fillRef>
-          <a:effectRef idx="2">
-            <a:schemeClr val="accent1"/>
-          </a:effectRef>
-          <a:fontRef idx="minor">
-            <a:schemeClr val="lt1"/>
-          </a:fontRef>
-        </p:style>
-        <p:txBody>
-          <a:bodyPr rtlCol="0" anchor="ctr"/>
-          <a:lstStyle/>
-          <a:p>
-            <a:pPr algn="ctr"/>
-          </a:p>
-        </p:txBody>
-      </p:sp>
-      <p:sp>
-        <p:nvSpPr>
-          <p:cNvPr id="6" name="Rectangle 5"/>
-          <p:cNvSpPr/>
-          <p:nvPr/>
-        </p:nvSpPr>
-        <p:spPr>
-          <a:xfrm>
-            <a:off x="457200" y="1261872"/>
-            <a:ext cx="128016" cy="1051560"/>
-          </a:xfrm>
-          <a:prstGeom prst="rect">
-            <a:avLst/>
-          </a:prstGeom>
-          <a:solidFill>
-            <a:srgbClr val="269CCB"/>
-          </a:solidFill>
-          <a:ln>
-            <a:noFill/>
-          </a:ln>
-        </p:spPr>
-        <p:style>
-          <a:lnRef idx="1">
-            <a:schemeClr val="accent1"/>
-          </a:lnRef>
-          <a:fillRef idx="3">
-            <a:schemeClr val="accent1"/>
-          </a:fillRef>
-          <a:effectRef idx="2">
-            <a:schemeClr val="accent1"/>
-          </a:effectRef>
-          <a:fontRef idx="minor">
-            <a:schemeClr val="lt1"/>
-          </a:fontRef>
-        </p:style>
-        <p:txBody>
-          <a:bodyPr rtlCol="0" anchor="ctr"/>
-          <a:lstStyle/>
-          <a:p>
-            <a:pPr algn="ctr"/>
-          </a:p>
-        </p:txBody>
-      </p:sp>
-      <p:sp>
-        <p:nvSpPr>
-          <p:cNvPr id="7" name="TextBox 6"/>
+              <a:t>PI CloudLite — entregable de hoy</a:t>
+            </a:r>
+          </a:p>
+        </p:txBody>
+      </p:sp>
+      <p:sp>
+        <p:nvSpPr>
+          <p:cNvPr id="5" name="TextBox 4"/>
           <p:cNvSpPr txBox="1"/>
           <p:nvPr/>
         </p:nvSpPr>
         <p:spPr>
           <a:xfrm>
-            <a:off x="777240" y="1399031"/>
-            <a:ext cx="10774375" cy="822959"/>
+            <a:off x="457200" y="1170432"/>
+            <a:ext cx="11277295" cy="5230368"/>
           </a:xfrm>
           <a:prstGeom prst="rect">
             <a:avLst/>
@@ -13389,313 +13874,119 @@
           </a:bodyPr>
           <a:lstStyle/>
           <a:p>
-            <a:r>
-              <a:rPr sz="1200" b="1" i="0">
-                <a:solidFill>
-                  <a:srgbClr val="269CCB"/>
-                </a:solidFill>
-                <a:latin typeface="Calibri"/>
-              </a:rPr>
-              <a:t>Info</a:t>
-            </a:r>
-          </a:p>
-          <a:p>
-            <a:pPr>
-              <a:spcBef>
-                <a:spcPts val="400"/>
-              </a:spcBef>
-            </a:pPr>
-            <a:r>
-              <a:rPr sz="1400" b="0" i="0">
-                <a:solidFill>
-                  <a:srgbClr val="333333"/>
-                </a:solidFill>
-                <a:latin typeface="Calibri"/>
-              </a:rPr>
-              <a:t>Entregable: Diagrama Deployment en Mermaid dentro de la plataforma del curso (3 zonas + puertos) + tipo de almacenamiento por componente</a:t>
-            </a:r>
-          </a:p>
-        </p:txBody>
-      </p:sp>
-      <p:sp>
-        <p:nvSpPr>
-          <p:cNvPr id="8" name="Rounded Rectangle 7"/>
-          <p:cNvSpPr/>
-          <p:nvPr/>
-        </p:nvSpPr>
-        <p:spPr>
-          <a:xfrm>
-            <a:off x="457200" y="2478024"/>
-            <a:ext cx="11277295" cy="1051560"/>
-          </a:xfrm>
-          <a:prstGeom prst="roundRect">
-            <a:avLst>
-              <a:gd name="adj" fmla="val 12000"/>
-            </a:avLst>
-          </a:prstGeom>
-          <a:solidFill>
-            <a:srgbClr val="FFF8E1"/>
-          </a:solidFill>
-          <a:ln>
-            <a:noFill/>
-          </a:ln>
-        </p:spPr>
-        <p:style>
-          <a:lnRef idx="1">
-            <a:schemeClr val="accent1"/>
-          </a:lnRef>
-          <a:fillRef idx="3">
-            <a:schemeClr val="accent1"/>
-          </a:fillRef>
-          <a:effectRef idx="2">
-            <a:schemeClr val="accent1"/>
-          </a:effectRef>
-          <a:fontRef idx="minor">
-            <a:schemeClr val="lt1"/>
-          </a:fontRef>
-        </p:style>
-        <p:txBody>
-          <a:bodyPr rtlCol="0" anchor="ctr"/>
-          <a:lstStyle/>
-          <a:p>
-            <a:pPr algn="ctr"/>
-          </a:p>
-        </p:txBody>
-      </p:sp>
-      <p:sp>
-        <p:nvSpPr>
-          <p:cNvPr id="9" name="Rectangle 8"/>
-          <p:cNvSpPr/>
-          <p:nvPr/>
-        </p:nvSpPr>
-        <p:spPr>
-          <a:xfrm>
-            <a:off x="457200" y="2478024"/>
-            <a:ext cx="128016" cy="1051560"/>
-          </a:xfrm>
-          <a:prstGeom prst="rect">
-            <a:avLst/>
-          </a:prstGeom>
-          <a:solidFill>
-            <a:srgbClr val="FFD000"/>
-          </a:solidFill>
-          <a:ln>
-            <a:noFill/>
-          </a:ln>
-        </p:spPr>
-        <p:style>
-          <a:lnRef idx="1">
-            <a:schemeClr val="accent1"/>
-          </a:lnRef>
-          <a:fillRef idx="3">
-            <a:schemeClr val="accent1"/>
-          </a:fillRef>
-          <a:effectRef idx="2">
-            <a:schemeClr val="accent1"/>
-          </a:effectRef>
-          <a:fontRef idx="minor">
-            <a:schemeClr val="lt1"/>
-          </a:fontRef>
-        </p:style>
-        <p:txBody>
-          <a:bodyPr rtlCol="0" anchor="ctr"/>
-          <a:lstStyle/>
-          <a:p>
-            <a:pPr algn="ctr"/>
-          </a:p>
-        </p:txBody>
-      </p:sp>
-      <p:sp>
-        <p:nvSpPr>
-          <p:cNvPr id="10" name="TextBox 9"/>
-          <p:cNvSpPr txBox="1"/>
-          <p:nvPr/>
-        </p:nvSpPr>
-        <p:spPr>
-          <a:xfrm>
-            <a:off x="777240" y="2615184"/>
-            <a:ext cx="10774375" cy="822959"/>
-          </a:xfrm>
-          <a:prstGeom prst="rect">
-            <a:avLst/>
-          </a:prstGeom>
-          <a:noFill/>
-        </p:spPr>
-        <p:txBody>
-          <a:bodyPr wrap="square">
-            <a:spAutoFit/>
-          </a:bodyPr>
-          <a:lstStyle/>
-          <a:p>
-            <a:r>
-              <a:rPr sz="1200" b="1" i="0">
-                <a:solidFill>
-                  <a:srgbClr val="FFD000"/>
-                </a:solidFill>
-                <a:latin typeface="Calibri"/>
-              </a:rPr>
-              <a:t>Aclaración</a:t>
-            </a:r>
-          </a:p>
-          <a:p>
-            <a:pPr>
-              <a:spcBef>
-                <a:spcPts val="400"/>
-              </a:spcBef>
-            </a:pPr>
-            <a:r>
-              <a:rPr sz="1400" b="0" i="0">
-                <a:solidFill>
-                  <a:srgbClr val="333333"/>
-                </a:solidFill>
-                <a:latin typeface="Calibri"/>
-              </a:rPr>
-              <a:t>Subir evidencias al paquete CloudLite (Drive/repo) y a la plataforma del curso en la fecha que indique el docente.</a:t>
-            </a:r>
-          </a:p>
-        </p:txBody>
-      </p:sp>
-      <p:sp>
-        <p:nvSpPr>
-          <p:cNvPr id="11" name="Rounded Rectangle 10"/>
-          <p:cNvSpPr/>
-          <p:nvPr/>
-        </p:nvSpPr>
-        <p:spPr>
-          <a:xfrm>
-            <a:off x="457200" y="3694176"/>
-            <a:ext cx="11277295" cy="1051560"/>
-          </a:xfrm>
-          <a:prstGeom prst="roundRect">
-            <a:avLst>
-              <a:gd name="adj" fmla="val 12000"/>
-            </a:avLst>
-          </a:prstGeom>
-          <a:solidFill>
-            <a:srgbClr val="FBE4E4"/>
-          </a:solidFill>
-          <a:ln>
-            <a:noFill/>
-          </a:ln>
-        </p:spPr>
-        <p:style>
-          <a:lnRef idx="1">
-            <a:schemeClr val="accent1"/>
-          </a:lnRef>
-          <a:fillRef idx="3">
-            <a:schemeClr val="accent1"/>
-          </a:fillRef>
-          <a:effectRef idx="2">
-            <a:schemeClr val="accent1"/>
-          </a:effectRef>
-          <a:fontRef idx="minor">
-            <a:schemeClr val="lt1"/>
-          </a:fontRef>
-        </p:style>
-        <p:txBody>
-          <a:bodyPr rtlCol="0" anchor="ctr"/>
-          <a:lstStyle/>
-          <a:p>
-            <a:pPr algn="ctr"/>
-          </a:p>
-        </p:txBody>
-      </p:sp>
-      <p:sp>
-        <p:nvSpPr>
-          <p:cNvPr id="12" name="Rectangle 11"/>
-          <p:cNvSpPr/>
-          <p:nvPr/>
-        </p:nvSpPr>
-        <p:spPr>
-          <a:xfrm>
-            <a:off x="457200" y="3694176"/>
-            <a:ext cx="128016" cy="1051560"/>
-          </a:xfrm>
-          <a:prstGeom prst="rect">
-            <a:avLst/>
-          </a:prstGeom>
-          <a:solidFill>
-            <a:srgbClr val="A02030"/>
-          </a:solidFill>
-          <a:ln>
-            <a:noFill/>
-          </a:ln>
-        </p:spPr>
-        <p:style>
-          <a:lnRef idx="1">
-            <a:schemeClr val="accent1"/>
-          </a:lnRef>
-          <a:fillRef idx="3">
-            <a:schemeClr val="accent1"/>
-          </a:fillRef>
-          <a:effectRef idx="2">
-            <a:schemeClr val="accent1"/>
-          </a:effectRef>
-          <a:fontRef idx="minor">
-            <a:schemeClr val="lt1"/>
-          </a:fontRef>
-        </p:style>
-        <p:txBody>
-          <a:bodyPr rtlCol="0" anchor="ctr"/>
-          <a:lstStyle/>
-          <a:p>
-            <a:pPr algn="ctr"/>
-          </a:p>
-        </p:txBody>
-      </p:sp>
-      <p:sp>
-        <p:nvSpPr>
-          <p:cNvPr id="13" name="TextBox 12"/>
-          <p:cNvSpPr txBox="1"/>
-          <p:nvPr/>
-        </p:nvSpPr>
-        <p:spPr>
-          <a:xfrm>
-            <a:off x="777240" y="3831336"/>
-            <a:ext cx="10774375" cy="822959"/>
-          </a:xfrm>
-          <a:prstGeom prst="rect">
-            <a:avLst/>
-          </a:prstGeom>
-          <a:noFill/>
-        </p:spPr>
-        <p:txBody>
-          <a:bodyPr wrap="square">
-            <a:spAutoFit/>
-          </a:bodyPr>
-          <a:lstStyle/>
-          <a:p>
-            <a:r>
-              <a:rPr sz="1200" b="1" i="0">
-                <a:solidFill>
-                  <a:srgbClr val="A02030"/>
-                </a:solidFill>
-                <a:latin typeface="Calibri"/>
-              </a:rPr>
-              <a:t>Atención</a:t>
-            </a:r>
-          </a:p>
-          <a:p>
-            <a:pPr>
-              <a:spcBef>
-                <a:spcPts val="400"/>
-              </a:spcBef>
-            </a:pPr>
-            <a:r>
-              <a:rPr sz="1400" b="0" i="0">
-                <a:solidFill>
-                  <a:srgbClr val="333333"/>
-                </a:solidFill>
-                <a:latin typeface="Calibri"/>
-              </a:rPr>
-              <a:t>Sin cloud de pago ni instalaciones obligatorias de hipervisores/Docker Desktop.</a:t>
-            </a:r>
-          </a:p>
-        </p:txBody>
-      </p:sp>
-      <p:sp>
-        <p:nvSpPr>
-          <p:cNvPr id="14" name="TextBox 13"/>
+            <a:pPr>
+              <a:spcAft>
+                <a:spcPts val="800"/>
+              </a:spcAft>
+            </a:pPr>
+            <a:r>
+              <a:rPr sz="2000" b="0" i="0">
+                <a:solidFill>
+                  <a:srgbClr val="333333"/>
+                </a:solidFill>
+                <a:latin typeface="Calibri"/>
+              </a:rPr>
+              <a:t>–   </a:t>
+            </a:r>
+            <a:r>
+              <a:rPr sz="2000" b="1" i="0">
+                <a:solidFill>
+                  <a:srgbClr val="333333"/>
+                </a:solidFill>
+                <a:latin typeface="Calibri"/>
+              </a:rPr>
+              <a:t>Entregable:</a:t>
+            </a:r>
+            <a:r>
+              <a:rPr sz="2000" b="0" i="0">
+                <a:solidFill>
+                  <a:srgbClr val="333333"/>
+                </a:solidFill>
+                <a:latin typeface="Calibri"/>
+              </a:rPr>
+              <a:t> Diagrama Deployment en Mermaid dentro de la plataforma del curso (3 zonas + puertos) + tipo de almacenamiento por componente</a:t>
+            </a:r>
+          </a:p>
+          <a:p>
+            <a:pPr>
+              <a:spcAft>
+                <a:spcPts val="800"/>
+              </a:spcAft>
+            </a:pPr>
+            <a:r>
+              <a:rPr sz="2000" b="0" i="0">
+                <a:solidFill>
+                  <a:srgbClr val="333333"/>
+                </a:solidFill>
+                <a:latin typeface="Calibri"/>
+              </a:rPr>
+              <a:t>–   Herramienta: </a:t>
+            </a:r>
+            <a:r>
+              <a:rPr sz="2000" b="1" i="0">
+                <a:solidFill>
+                  <a:srgbClr val="333333"/>
+                </a:solidFill>
+                <a:latin typeface="Calibri"/>
+              </a:rPr>
+              <a:t>la plataforma del curso (Mermaid) · boceto en draw.io o Excalidraw</a:t>
+            </a:r>
+          </a:p>
+          <a:p>
+            <a:pPr>
+              <a:spcAft>
+                <a:spcPts val="800"/>
+              </a:spcAft>
+            </a:pPr>
+            <a:r>
+              <a:rPr sz="2000" b="0" i="0">
+                <a:solidFill>
+                  <a:srgbClr val="333333"/>
+                </a:solidFill>
+                <a:latin typeface="Calibri"/>
+              </a:rPr>
+              <a:t>–   Todo lo que construyan hoy entra al </a:t>
+            </a:r>
+            <a:r>
+              <a:rPr sz="2000" b="1" i="0">
+                <a:solidFill>
+                  <a:srgbClr val="333333"/>
+                </a:solidFill>
+                <a:latin typeface="Calibri"/>
+              </a:rPr>
+              <a:t>informe/repo del PI</a:t>
+            </a:r>
+            <a:r>
+              <a:rPr sz="2000" b="0" i="0">
+                <a:solidFill>
+                  <a:srgbClr val="333333"/>
+                </a:solidFill>
+                <a:latin typeface="Calibri"/>
+              </a:rPr>
+              <a:t> (no es lab suelto).</a:t>
+            </a:r>
+          </a:p>
+          <a:p>
+            <a:pPr>
+              <a:spcAft>
+                <a:spcPts val="800"/>
+              </a:spcAft>
+            </a:pPr>
+            <a:r>
+              <a:rPr sz="2000" b="0" i="0">
+                <a:solidFill>
+                  <a:srgbClr val="333333"/>
+                </a:solidFill>
+                <a:latin typeface="Calibri"/>
+              </a:rPr>
+              <a:t>–   Individual por defecto · el docente puede autorizar equipos de 2–3; la entrega en la plataforma del curso siempre es individual.</a:t>
+            </a:r>
+          </a:p>
+        </p:txBody>
+      </p:sp>
+      <p:sp>
+        <p:nvSpPr>
+          <p:cNvPr id="6" name="TextBox 5"/>
           <p:cNvSpPr txBox="1"/>
           <p:nvPr/>
         </p:nvSpPr>
@@ -13737,6 +14028,932 @@
 </file>
 
 <file path=ppt/slides/slide37.xml><?xml version="1.0" encoding="utf-8"?>
+<p:sld xmlns:a="http://schemas.openxmlformats.org/drawingml/2006/main" xmlns:p="http://schemas.openxmlformats.org/presentationml/2006/main" xmlns:r="http://schemas.openxmlformats.org/officeDocument/2006/relationships">
+  <p:cSld>
+    <p:bg>
+      <p:bgPr>
+        <a:solidFill>
+          <a:srgbClr val="FFFFFF"/>
+        </a:solidFill>
+        <a:effectLst/>
+      </p:bgPr>
+    </p:bg>
+    <p:spTree>
+      <p:nvGrpSpPr>
+        <p:cNvPr id="1" name=""/>
+        <p:cNvGrpSpPr/>
+        <p:nvPr/>
+      </p:nvGrpSpPr>
+      <p:grpSpPr/>
+      <p:sp>
+        <p:nvSpPr>
+          <p:cNvPr id="2" name="Rectangle 1"/>
+          <p:cNvSpPr/>
+          <p:nvPr/>
+        </p:nvSpPr>
+        <p:spPr>
+          <a:xfrm>
+            <a:off x="0" y="0"/>
+            <a:ext cx="12191695" cy="960120"/>
+          </a:xfrm>
+          <a:prstGeom prst="rect">
+            <a:avLst/>
+          </a:prstGeom>
+          <a:solidFill>
+            <a:srgbClr val="095292"/>
+          </a:solidFill>
+          <a:ln>
+            <a:noFill/>
+          </a:ln>
+        </p:spPr>
+        <p:style>
+          <a:lnRef idx="1">
+            <a:schemeClr val="accent1"/>
+          </a:lnRef>
+          <a:fillRef idx="3">
+            <a:schemeClr val="accent1"/>
+          </a:fillRef>
+          <a:effectRef idx="2">
+            <a:schemeClr val="accent1"/>
+          </a:effectRef>
+          <a:fontRef idx="minor">
+            <a:schemeClr val="lt1"/>
+          </a:fontRef>
+        </p:style>
+        <p:txBody>
+          <a:bodyPr rtlCol="0" anchor="ctr"/>
+          <a:lstStyle/>
+          <a:p>
+            <a:pPr algn="ctr"/>
+          </a:p>
+        </p:txBody>
+      </p:sp>
+      <p:sp>
+        <p:nvSpPr>
+          <p:cNvPr id="3" name="Rectangle 2"/>
+          <p:cNvSpPr/>
+          <p:nvPr/>
+        </p:nvSpPr>
+        <p:spPr>
+          <a:xfrm>
+            <a:off x="0" y="960120"/>
+            <a:ext cx="12191695" cy="41148"/>
+          </a:xfrm>
+          <a:prstGeom prst="rect">
+            <a:avLst/>
+          </a:prstGeom>
+          <a:solidFill>
+            <a:srgbClr val="FFD000"/>
+          </a:solidFill>
+          <a:ln>
+            <a:noFill/>
+          </a:ln>
+        </p:spPr>
+        <p:style>
+          <a:lnRef idx="1">
+            <a:schemeClr val="accent1"/>
+          </a:lnRef>
+          <a:fillRef idx="3">
+            <a:schemeClr val="accent1"/>
+          </a:fillRef>
+          <a:effectRef idx="2">
+            <a:schemeClr val="accent1"/>
+          </a:effectRef>
+          <a:fontRef idx="minor">
+            <a:schemeClr val="lt1"/>
+          </a:fontRef>
+        </p:style>
+        <p:txBody>
+          <a:bodyPr rtlCol="0" anchor="ctr"/>
+          <a:lstStyle/>
+          <a:p>
+            <a:pPr algn="ctr"/>
+          </a:p>
+        </p:txBody>
+      </p:sp>
+      <p:sp>
+        <p:nvSpPr>
+          <p:cNvPr id="4" name="TextBox 3"/>
+          <p:cNvSpPr txBox="1"/>
+          <p:nvPr/>
+        </p:nvSpPr>
+        <p:spPr>
+          <a:xfrm>
+            <a:off x="457200" y="164592"/>
+            <a:ext cx="11277295" cy="502920"/>
+          </a:xfrm>
+          <a:prstGeom prst="rect">
+            <a:avLst/>
+          </a:prstGeom>
+          <a:noFill/>
+        </p:spPr>
+        <p:txBody>
+          <a:bodyPr wrap="square">
+            <a:spAutoFit/>
+          </a:bodyPr>
+          <a:lstStyle/>
+          <a:p>
+            <a:r>
+              <a:rPr sz="2600" b="1" i="0">
+                <a:solidFill>
+                  <a:srgbClr val="FFFFFF"/>
+                </a:solidFill>
+                <a:latin typeface="Calibri"/>
+              </a:rPr>
+              <a:t>Manos a la obra (paso a paso)</a:t>
+            </a:r>
+          </a:p>
+        </p:txBody>
+      </p:sp>
+      <p:sp>
+        <p:nvSpPr>
+          <p:cNvPr id="5" name="TextBox 4"/>
+          <p:cNvSpPr txBox="1"/>
+          <p:nvPr/>
+        </p:nvSpPr>
+        <p:spPr>
+          <a:xfrm>
+            <a:off x="457200" y="1170432"/>
+            <a:ext cx="11277295" cy="5230368"/>
+          </a:xfrm>
+          <a:prstGeom prst="rect">
+            <a:avLst/>
+          </a:prstGeom>
+          <a:noFill/>
+        </p:spPr>
+        <p:txBody>
+          <a:bodyPr wrap="square">
+            <a:spAutoFit/>
+          </a:bodyPr>
+          <a:lstStyle/>
+          <a:p>
+            <a:pPr>
+              <a:spcAft>
+                <a:spcPts val="800"/>
+              </a:spcAft>
+            </a:pPr>
+            <a:r>
+              <a:rPr sz="2000" b="1" i="0">
+                <a:solidFill>
+                  <a:srgbClr val="333333"/>
+                </a:solidFill>
+                <a:latin typeface="Calibri"/>
+              </a:rPr>
+              <a:t>1.</a:t>
+            </a:r>
+            <a:r>
+              <a:rPr sz="2000" b="0" i="0">
+                <a:solidFill>
+                  <a:srgbClr val="333333"/>
+                </a:solidFill>
+                <a:latin typeface="Calibri"/>
+              </a:rPr>
+              <a:t> Paso 1: dibuje primero el boceto del despliegue en Excalidraw o draw.io con las tres zonas (publica, privada y de datos), y despues pidale a una IA que lo traduzca a Mermaid; peguelo en la pregunta 4 y verifique en el diagrama ya renderizado que la base de datos NO quede en la zona publica.</a:t>
+            </a:r>
+          </a:p>
+          <a:p>
+            <a:pPr>
+              <a:spcAft>
+                <a:spcPts val="800"/>
+              </a:spcAft>
+            </a:pPr>
+            <a:r>
+              <a:rPr sz="2000" b="0" i="0">
+                <a:solidFill>
+                  <a:srgbClr val="333333"/>
+                </a:solidFill>
+                <a:latin typeface="Calibri"/>
+              </a:rPr>
+              <a:t>–   </a:t>
+            </a:r>
+            <a:r>
+              <a:rPr sz="2000" b="1" i="0">
+                <a:solidFill>
+                  <a:srgbClr val="333333"/>
+                </a:solidFill>
+                <a:latin typeface="Calibri"/>
+              </a:rPr>
+              <a:t>2.</a:t>
+            </a:r>
+            <a:r>
+              <a:rPr sz="2000" b="0" i="0">
+                <a:solidFill>
+                  <a:srgbClr val="333333"/>
+                </a:solidFill>
+                <a:latin typeface="Calibri"/>
+              </a:rPr>
+              <a:t> Paso 2: etiquete en ese mismo diagrama el puerto de cada componente y marque las fronteras de confianza, es decir donde termina lo que usted controla; verifique que no aparezcan nombres de subredes ni de servicios de un proveedor concreto.</a:t>
+            </a:r>
+          </a:p>
+          <a:p>
+            <a:pPr>
+              <a:spcAft>
+                <a:spcPts val="800"/>
+              </a:spcAft>
+            </a:pPr>
+            <a:r>
+              <a:rPr sz="2000" b="0" i="0">
+                <a:solidFill>
+                  <a:srgbClr val="333333"/>
+                </a:solidFill>
+                <a:latin typeface="Calibri"/>
+              </a:rPr>
+              <a:t>–   </a:t>
+            </a:r>
+            <a:r>
+              <a:rPr sz="2000" b="1" i="0">
+                <a:solidFill>
+                  <a:srgbClr val="333333"/>
+                </a:solidFill>
+                <a:latin typeface="Calibri"/>
+              </a:rPr>
+              <a:t>3.</a:t>
+            </a:r>
+            <a:r>
+              <a:rPr sz="2000" b="0" i="0">
+                <a:solidFill>
+                  <a:srgbClr val="333333"/>
+                </a:solidFill>
+                <a:latin typeface="Calibri"/>
+              </a:rPr>
+              <a:t> Paso 3: justifique en la pregunta 5 el tipo de almacenamiento de cada componente diciendo que caracteristica del dato lo exige; si su dominio no necesita almacenamiento de objetos, declarelo y justifiquelo en vez de agregarlo.</a:t>
+            </a:r>
+          </a:p>
+          <a:p>
+            <a:pPr>
+              <a:spcAft>
+                <a:spcPts val="800"/>
+              </a:spcAft>
+            </a:pPr>
+            <a:r>
+              <a:rPr sz="2000" b="0" i="0">
+                <a:solidFill>
+                  <a:srgbClr val="333333"/>
+                </a:solidFill>
+                <a:latin typeface="Calibri"/>
+              </a:rPr>
+              <a:t>–   </a:t>
+            </a:r>
+            <a:r>
+              <a:rPr sz="2000" b="1" i="0">
+                <a:solidFill>
+                  <a:srgbClr val="333333"/>
+                </a:solidFill>
+                <a:latin typeface="Calibri"/>
+              </a:rPr>
+              <a:t>4.</a:t>
+            </a:r>
+            <a:r>
+              <a:rPr sz="2000" b="0" i="0">
+                <a:solidFill>
+                  <a:srgbClr val="333333"/>
+                </a:solidFill>
+                <a:latin typeface="Calibri"/>
+              </a:rPr>
+              <a:t> Paso 4: complete en la pregunta 6 la tabla de correspondencia entre el C4 Containers y el Despliegue, con una fila por componente y su zona, y liste los renombres que aplico; si no hubo ninguno, digalo explicitamente.</a:t>
+            </a:r>
+          </a:p>
+        </p:txBody>
+      </p:sp>
+      <p:sp>
+        <p:nvSpPr>
+          <p:cNvPr id="6" name="TextBox 5"/>
+          <p:cNvSpPr txBox="1"/>
+          <p:nvPr/>
+        </p:nvSpPr>
+        <p:spPr>
+          <a:xfrm>
+            <a:off x="11185855" y="6473952"/>
+            <a:ext cx="640080" cy="274320"/>
+          </a:xfrm>
+          <a:prstGeom prst="rect">
+            <a:avLst/>
+          </a:prstGeom>
+          <a:noFill/>
+        </p:spPr>
+        <p:txBody>
+          <a:bodyPr wrap="square">
+            <a:spAutoFit/>
+          </a:bodyPr>
+          <a:lstStyle/>
+          <a:p>
+            <a:pPr algn="r"/>
+            <a:r>
+              <a:rPr sz="1100" b="0" i="0">
+                <a:solidFill>
+                  <a:srgbClr val="666666"/>
+                </a:solidFill>
+                <a:latin typeface="Calibri"/>
+              </a:rPr>
+              <a:t>37</a:t>
+            </a:r>
+          </a:p>
+        </p:txBody>
+      </p:sp>
+    </p:spTree>
+  </p:cSld>
+  <p:clrMapOvr>
+    <a:masterClrMapping/>
+  </p:clrMapOvr>
+</p:sld>
+</file>
+
+<file path=ppt/slides/slide38.xml><?xml version="1.0" encoding="utf-8"?>
+<p:sld xmlns:a="http://schemas.openxmlformats.org/drawingml/2006/main" xmlns:p="http://schemas.openxmlformats.org/presentationml/2006/main" xmlns:r="http://schemas.openxmlformats.org/officeDocument/2006/relationships">
+  <p:cSld>
+    <p:bg>
+      <p:bgPr>
+        <a:solidFill>
+          <a:srgbClr val="FFFFFF"/>
+        </a:solidFill>
+        <a:effectLst/>
+      </p:bgPr>
+    </p:bg>
+    <p:spTree>
+      <p:nvGrpSpPr>
+        <p:cNvPr id="1" name=""/>
+        <p:cNvGrpSpPr/>
+        <p:nvPr/>
+      </p:nvGrpSpPr>
+      <p:grpSpPr/>
+      <p:sp>
+        <p:nvSpPr>
+          <p:cNvPr id="2" name="Rectangle 1"/>
+          <p:cNvSpPr/>
+          <p:nvPr/>
+        </p:nvSpPr>
+        <p:spPr>
+          <a:xfrm>
+            <a:off x="0" y="0"/>
+            <a:ext cx="12191695" cy="960120"/>
+          </a:xfrm>
+          <a:prstGeom prst="rect">
+            <a:avLst/>
+          </a:prstGeom>
+          <a:solidFill>
+            <a:srgbClr val="095292"/>
+          </a:solidFill>
+          <a:ln>
+            <a:noFill/>
+          </a:ln>
+        </p:spPr>
+        <p:style>
+          <a:lnRef idx="1">
+            <a:schemeClr val="accent1"/>
+          </a:lnRef>
+          <a:fillRef idx="3">
+            <a:schemeClr val="accent1"/>
+          </a:fillRef>
+          <a:effectRef idx="2">
+            <a:schemeClr val="accent1"/>
+          </a:effectRef>
+          <a:fontRef idx="minor">
+            <a:schemeClr val="lt1"/>
+          </a:fontRef>
+        </p:style>
+        <p:txBody>
+          <a:bodyPr rtlCol="0" anchor="ctr"/>
+          <a:lstStyle/>
+          <a:p>
+            <a:pPr algn="ctr"/>
+          </a:p>
+        </p:txBody>
+      </p:sp>
+      <p:sp>
+        <p:nvSpPr>
+          <p:cNvPr id="3" name="Rectangle 2"/>
+          <p:cNvSpPr/>
+          <p:nvPr/>
+        </p:nvSpPr>
+        <p:spPr>
+          <a:xfrm>
+            <a:off x="0" y="960120"/>
+            <a:ext cx="12191695" cy="41148"/>
+          </a:xfrm>
+          <a:prstGeom prst="rect">
+            <a:avLst/>
+          </a:prstGeom>
+          <a:solidFill>
+            <a:srgbClr val="FFD000"/>
+          </a:solidFill>
+          <a:ln>
+            <a:noFill/>
+          </a:ln>
+        </p:spPr>
+        <p:style>
+          <a:lnRef idx="1">
+            <a:schemeClr val="accent1"/>
+          </a:lnRef>
+          <a:fillRef idx="3">
+            <a:schemeClr val="accent1"/>
+          </a:fillRef>
+          <a:effectRef idx="2">
+            <a:schemeClr val="accent1"/>
+          </a:effectRef>
+          <a:fontRef idx="minor">
+            <a:schemeClr val="lt1"/>
+          </a:fontRef>
+        </p:style>
+        <p:txBody>
+          <a:bodyPr rtlCol="0" anchor="ctr"/>
+          <a:lstStyle/>
+          <a:p>
+            <a:pPr algn="ctr"/>
+          </a:p>
+        </p:txBody>
+      </p:sp>
+      <p:sp>
+        <p:nvSpPr>
+          <p:cNvPr id="4" name="TextBox 3"/>
+          <p:cNvSpPr txBox="1"/>
+          <p:nvPr/>
+        </p:nvSpPr>
+        <p:spPr>
+          <a:xfrm>
+            <a:off x="457200" y="164592"/>
+            <a:ext cx="11277295" cy="502920"/>
+          </a:xfrm>
+          <a:prstGeom prst="rect">
+            <a:avLst/>
+          </a:prstGeom>
+          <a:noFill/>
+        </p:spPr>
+        <p:txBody>
+          <a:bodyPr wrap="square">
+            <a:spAutoFit/>
+          </a:bodyPr>
+          <a:lstStyle/>
+          <a:p>
+            <a:r>
+              <a:rPr sz="2600" b="1" i="0">
+                <a:solidFill>
+                  <a:srgbClr val="FFFFFF"/>
+                </a:solidFill>
+                <a:latin typeface="Calibri"/>
+              </a:rPr>
+              <a:t>Para continuar (PI)</a:t>
+            </a:r>
+          </a:p>
+        </p:txBody>
+      </p:sp>
+      <p:sp>
+        <p:nvSpPr>
+          <p:cNvPr id="5" name="Rounded Rectangle 4"/>
+          <p:cNvSpPr/>
+          <p:nvPr/>
+        </p:nvSpPr>
+        <p:spPr>
+          <a:xfrm>
+            <a:off x="457200" y="1261872"/>
+            <a:ext cx="11277295" cy="1051560"/>
+          </a:xfrm>
+          <a:prstGeom prst="roundRect">
+            <a:avLst>
+              <a:gd name="adj" fmla="val 12000"/>
+            </a:avLst>
+          </a:prstGeom>
+          <a:solidFill>
+            <a:srgbClr val="E8F4FA"/>
+          </a:solidFill>
+          <a:ln>
+            <a:noFill/>
+          </a:ln>
+        </p:spPr>
+        <p:style>
+          <a:lnRef idx="1">
+            <a:schemeClr val="accent1"/>
+          </a:lnRef>
+          <a:fillRef idx="3">
+            <a:schemeClr val="accent1"/>
+          </a:fillRef>
+          <a:effectRef idx="2">
+            <a:schemeClr val="accent1"/>
+          </a:effectRef>
+          <a:fontRef idx="minor">
+            <a:schemeClr val="lt1"/>
+          </a:fontRef>
+        </p:style>
+        <p:txBody>
+          <a:bodyPr rtlCol="0" anchor="ctr"/>
+          <a:lstStyle/>
+          <a:p>
+            <a:pPr algn="ctr"/>
+          </a:p>
+        </p:txBody>
+      </p:sp>
+      <p:sp>
+        <p:nvSpPr>
+          <p:cNvPr id="6" name="Rectangle 5"/>
+          <p:cNvSpPr/>
+          <p:nvPr/>
+        </p:nvSpPr>
+        <p:spPr>
+          <a:xfrm>
+            <a:off x="457200" y="1261872"/>
+            <a:ext cx="128016" cy="1051560"/>
+          </a:xfrm>
+          <a:prstGeom prst="rect">
+            <a:avLst/>
+          </a:prstGeom>
+          <a:solidFill>
+            <a:srgbClr val="269CCB"/>
+          </a:solidFill>
+          <a:ln>
+            <a:noFill/>
+          </a:ln>
+        </p:spPr>
+        <p:style>
+          <a:lnRef idx="1">
+            <a:schemeClr val="accent1"/>
+          </a:lnRef>
+          <a:fillRef idx="3">
+            <a:schemeClr val="accent1"/>
+          </a:fillRef>
+          <a:effectRef idx="2">
+            <a:schemeClr val="accent1"/>
+          </a:effectRef>
+          <a:fontRef idx="minor">
+            <a:schemeClr val="lt1"/>
+          </a:fontRef>
+        </p:style>
+        <p:txBody>
+          <a:bodyPr rtlCol="0" anchor="ctr"/>
+          <a:lstStyle/>
+          <a:p>
+            <a:pPr algn="ctr"/>
+          </a:p>
+        </p:txBody>
+      </p:sp>
+      <p:sp>
+        <p:nvSpPr>
+          <p:cNvPr id="7" name="TextBox 6"/>
+          <p:cNvSpPr txBox="1"/>
+          <p:nvPr/>
+        </p:nvSpPr>
+        <p:spPr>
+          <a:xfrm>
+            <a:off x="777240" y="1399031"/>
+            <a:ext cx="10774375" cy="822959"/>
+          </a:xfrm>
+          <a:prstGeom prst="rect">
+            <a:avLst/>
+          </a:prstGeom>
+          <a:noFill/>
+        </p:spPr>
+        <p:txBody>
+          <a:bodyPr wrap="square">
+            <a:spAutoFit/>
+          </a:bodyPr>
+          <a:lstStyle/>
+          <a:p>
+            <a:r>
+              <a:rPr sz="1200" b="1" i="0">
+                <a:solidFill>
+                  <a:srgbClr val="269CCB"/>
+                </a:solidFill>
+                <a:latin typeface="Calibri"/>
+              </a:rPr>
+              <a:t>Info</a:t>
+            </a:r>
+          </a:p>
+          <a:p>
+            <a:pPr>
+              <a:spcBef>
+                <a:spcPts val="400"/>
+              </a:spcBef>
+            </a:pPr>
+            <a:r>
+              <a:rPr sz="1400" b="0" i="0">
+                <a:solidFill>
+                  <a:srgbClr val="333333"/>
+                </a:solidFill>
+                <a:latin typeface="Calibri"/>
+              </a:rPr>
+              <a:t>Entregable: Diagrama Deployment en Mermaid dentro de la plataforma del curso (3 zonas + puertos) + tipo de almacenamiento por componente</a:t>
+            </a:r>
+          </a:p>
+        </p:txBody>
+      </p:sp>
+      <p:sp>
+        <p:nvSpPr>
+          <p:cNvPr id="8" name="Rounded Rectangle 7"/>
+          <p:cNvSpPr/>
+          <p:nvPr/>
+        </p:nvSpPr>
+        <p:spPr>
+          <a:xfrm>
+            <a:off x="457200" y="2478024"/>
+            <a:ext cx="11277295" cy="1051560"/>
+          </a:xfrm>
+          <a:prstGeom prst="roundRect">
+            <a:avLst>
+              <a:gd name="adj" fmla="val 12000"/>
+            </a:avLst>
+          </a:prstGeom>
+          <a:solidFill>
+            <a:srgbClr val="FFF8E1"/>
+          </a:solidFill>
+          <a:ln>
+            <a:noFill/>
+          </a:ln>
+        </p:spPr>
+        <p:style>
+          <a:lnRef idx="1">
+            <a:schemeClr val="accent1"/>
+          </a:lnRef>
+          <a:fillRef idx="3">
+            <a:schemeClr val="accent1"/>
+          </a:fillRef>
+          <a:effectRef idx="2">
+            <a:schemeClr val="accent1"/>
+          </a:effectRef>
+          <a:fontRef idx="minor">
+            <a:schemeClr val="lt1"/>
+          </a:fontRef>
+        </p:style>
+        <p:txBody>
+          <a:bodyPr rtlCol="0" anchor="ctr"/>
+          <a:lstStyle/>
+          <a:p>
+            <a:pPr algn="ctr"/>
+          </a:p>
+        </p:txBody>
+      </p:sp>
+      <p:sp>
+        <p:nvSpPr>
+          <p:cNvPr id="9" name="Rectangle 8"/>
+          <p:cNvSpPr/>
+          <p:nvPr/>
+        </p:nvSpPr>
+        <p:spPr>
+          <a:xfrm>
+            <a:off x="457200" y="2478024"/>
+            <a:ext cx="128016" cy="1051560"/>
+          </a:xfrm>
+          <a:prstGeom prst="rect">
+            <a:avLst/>
+          </a:prstGeom>
+          <a:solidFill>
+            <a:srgbClr val="FFD000"/>
+          </a:solidFill>
+          <a:ln>
+            <a:noFill/>
+          </a:ln>
+        </p:spPr>
+        <p:style>
+          <a:lnRef idx="1">
+            <a:schemeClr val="accent1"/>
+          </a:lnRef>
+          <a:fillRef idx="3">
+            <a:schemeClr val="accent1"/>
+          </a:fillRef>
+          <a:effectRef idx="2">
+            <a:schemeClr val="accent1"/>
+          </a:effectRef>
+          <a:fontRef idx="minor">
+            <a:schemeClr val="lt1"/>
+          </a:fontRef>
+        </p:style>
+        <p:txBody>
+          <a:bodyPr rtlCol="0" anchor="ctr"/>
+          <a:lstStyle/>
+          <a:p>
+            <a:pPr algn="ctr"/>
+          </a:p>
+        </p:txBody>
+      </p:sp>
+      <p:sp>
+        <p:nvSpPr>
+          <p:cNvPr id="10" name="TextBox 9"/>
+          <p:cNvSpPr txBox="1"/>
+          <p:nvPr/>
+        </p:nvSpPr>
+        <p:spPr>
+          <a:xfrm>
+            <a:off x="777240" y="2615184"/>
+            <a:ext cx="10774375" cy="822959"/>
+          </a:xfrm>
+          <a:prstGeom prst="rect">
+            <a:avLst/>
+          </a:prstGeom>
+          <a:noFill/>
+        </p:spPr>
+        <p:txBody>
+          <a:bodyPr wrap="square">
+            <a:spAutoFit/>
+          </a:bodyPr>
+          <a:lstStyle/>
+          <a:p>
+            <a:r>
+              <a:rPr sz="1200" b="1" i="0">
+                <a:solidFill>
+                  <a:srgbClr val="FFD000"/>
+                </a:solidFill>
+                <a:latin typeface="Calibri"/>
+              </a:rPr>
+              <a:t>Aclaración</a:t>
+            </a:r>
+          </a:p>
+          <a:p>
+            <a:pPr>
+              <a:spcBef>
+                <a:spcPts val="400"/>
+              </a:spcBef>
+            </a:pPr>
+            <a:r>
+              <a:rPr sz="1400" b="0" i="0">
+                <a:solidFill>
+                  <a:srgbClr val="333333"/>
+                </a:solidFill>
+                <a:latin typeface="Calibri"/>
+              </a:rPr>
+              <a:t>Subir evidencias al paquete CloudLite (Drive/repo) y a la plataforma del curso en la fecha que indique el docente.</a:t>
+            </a:r>
+          </a:p>
+        </p:txBody>
+      </p:sp>
+      <p:sp>
+        <p:nvSpPr>
+          <p:cNvPr id="11" name="Rounded Rectangle 10"/>
+          <p:cNvSpPr/>
+          <p:nvPr/>
+        </p:nvSpPr>
+        <p:spPr>
+          <a:xfrm>
+            <a:off x="457200" y="3694176"/>
+            <a:ext cx="11277295" cy="1051560"/>
+          </a:xfrm>
+          <a:prstGeom prst="roundRect">
+            <a:avLst>
+              <a:gd name="adj" fmla="val 12000"/>
+            </a:avLst>
+          </a:prstGeom>
+          <a:solidFill>
+            <a:srgbClr val="FBE4E4"/>
+          </a:solidFill>
+          <a:ln>
+            <a:noFill/>
+          </a:ln>
+        </p:spPr>
+        <p:style>
+          <a:lnRef idx="1">
+            <a:schemeClr val="accent1"/>
+          </a:lnRef>
+          <a:fillRef idx="3">
+            <a:schemeClr val="accent1"/>
+          </a:fillRef>
+          <a:effectRef idx="2">
+            <a:schemeClr val="accent1"/>
+          </a:effectRef>
+          <a:fontRef idx="minor">
+            <a:schemeClr val="lt1"/>
+          </a:fontRef>
+        </p:style>
+        <p:txBody>
+          <a:bodyPr rtlCol="0" anchor="ctr"/>
+          <a:lstStyle/>
+          <a:p>
+            <a:pPr algn="ctr"/>
+          </a:p>
+        </p:txBody>
+      </p:sp>
+      <p:sp>
+        <p:nvSpPr>
+          <p:cNvPr id="12" name="Rectangle 11"/>
+          <p:cNvSpPr/>
+          <p:nvPr/>
+        </p:nvSpPr>
+        <p:spPr>
+          <a:xfrm>
+            <a:off x="457200" y="3694176"/>
+            <a:ext cx="128016" cy="1051560"/>
+          </a:xfrm>
+          <a:prstGeom prst="rect">
+            <a:avLst/>
+          </a:prstGeom>
+          <a:solidFill>
+            <a:srgbClr val="A02030"/>
+          </a:solidFill>
+          <a:ln>
+            <a:noFill/>
+          </a:ln>
+        </p:spPr>
+        <p:style>
+          <a:lnRef idx="1">
+            <a:schemeClr val="accent1"/>
+          </a:lnRef>
+          <a:fillRef idx="3">
+            <a:schemeClr val="accent1"/>
+          </a:fillRef>
+          <a:effectRef idx="2">
+            <a:schemeClr val="accent1"/>
+          </a:effectRef>
+          <a:fontRef idx="minor">
+            <a:schemeClr val="lt1"/>
+          </a:fontRef>
+        </p:style>
+        <p:txBody>
+          <a:bodyPr rtlCol="0" anchor="ctr"/>
+          <a:lstStyle/>
+          <a:p>
+            <a:pPr algn="ctr"/>
+          </a:p>
+        </p:txBody>
+      </p:sp>
+      <p:sp>
+        <p:nvSpPr>
+          <p:cNvPr id="13" name="TextBox 12"/>
+          <p:cNvSpPr txBox="1"/>
+          <p:nvPr/>
+        </p:nvSpPr>
+        <p:spPr>
+          <a:xfrm>
+            <a:off x="777240" y="3831336"/>
+            <a:ext cx="10774375" cy="822959"/>
+          </a:xfrm>
+          <a:prstGeom prst="rect">
+            <a:avLst/>
+          </a:prstGeom>
+          <a:noFill/>
+        </p:spPr>
+        <p:txBody>
+          <a:bodyPr wrap="square">
+            <a:spAutoFit/>
+          </a:bodyPr>
+          <a:lstStyle/>
+          <a:p>
+            <a:r>
+              <a:rPr sz="1200" b="1" i="0">
+                <a:solidFill>
+                  <a:srgbClr val="A02030"/>
+                </a:solidFill>
+                <a:latin typeface="Calibri"/>
+              </a:rPr>
+              <a:t>Atención</a:t>
+            </a:r>
+          </a:p>
+          <a:p>
+            <a:pPr>
+              <a:spcBef>
+                <a:spcPts val="400"/>
+              </a:spcBef>
+            </a:pPr>
+            <a:r>
+              <a:rPr sz="1400" b="0" i="0">
+                <a:solidFill>
+                  <a:srgbClr val="333333"/>
+                </a:solidFill>
+                <a:latin typeface="Calibri"/>
+              </a:rPr>
+              <a:t>Sin cloud de pago ni instalaciones obligatorias de hipervisores/Docker Desktop.</a:t>
+            </a:r>
+          </a:p>
+        </p:txBody>
+      </p:sp>
+      <p:sp>
+        <p:nvSpPr>
+          <p:cNvPr id="14" name="TextBox 13"/>
+          <p:cNvSpPr txBox="1"/>
+          <p:nvPr/>
+        </p:nvSpPr>
+        <p:spPr>
+          <a:xfrm>
+            <a:off x="11185855" y="6473952"/>
+            <a:ext cx="640080" cy="274320"/>
+          </a:xfrm>
+          <a:prstGeom prst="rect">
+            <a:avLst/>
+          </a:prstGeom>
+          <a:noFill/>
+        </p:spPr>
+        <p:txBody>
+          <a:bodyPr wrap="square">
+            <a:spAutoFit/>
+          </a:bodyPr>
+          <a:lstStyle/>
+          <a:p>
+            <a:pPr algn="r"/>
+            <a:r>
+              <a:rPr sz="1100" b="0" i="0">
+                <a:solidFill>
+                  <a:srgbClr val="666666"/>
+                </a:solidFill>
+                <a:latin typeface="Calibri"/>
+              </a:rPr>
+              <a:t>38</a:t>
+            </a:r>
+          </a:p>
+        </p:txBody>
+      </p:sp>
+    </p:spTree>
+  </p:cSld>
+  <p:clrMapOvr>
+    <a:masterClrMapping/>
+  </p:clrMapOvr>
+</p:sld>
+</file>
+
+<file path=ppt/slides/slide39.xml><?xml version="1.0" encoding="utf-8"?>
 <p:sld xmlns:a="http://schemas.openxmlformats.org/drawingml/2006/main" xmlns:p="http://schemas.openxmlformats.org/presentationml/2006/main" xmlns:r="http://schemas.openxmlformats.org/officeDocument/2006/relationships">
   <p:cSld>
     <p:bg>

--- a/Arquitectura de Sistemas Computacionales/Clases/Clase 7 - Redes y almacenamiento cloud/Presentacion.pptx
+++ b/Arquitectura de Sistemas Computacionales/Clases/Clase 7 - Redes y almacenamiento cloud/Presentacion.pptx
@@ -12982,7 +12982,7 @@
                 </a:solidFill>
                 <a:latin typeface="Calibri"/>
               </a:rPr>
-              <a:t>El diagrama se entrega como código Mermaid dentro de la plataforma del curso, no como imagen</a:t>
+              <a:t>El diagrama se entrega como código Mermaid en la plataforma del curso, no como imagen</a:t>
             </a:r>
           </a:p>
         </p:txBody>
@@ -13904,7 +13904,7 @@
                 </a:solidFill>
                 <a:latin typeface="Calibri"/>
               </a:rPr>
-              <a:t> Diagrama Deployment en Mermaid dentro de la plataforma del curso (3 zonas + puertos) + tipo de almacenamiento por componente</a:t>
+              <a:t> Diagrama Deployment en Mermaid en la plataforma del curso (3 zonas + puertos) + tipo de almacenamiento por componente</a:t>
             </a:r>
           </a:p>
           <a:p>
@@ -13929,7 +13929,7 @@
                 </a:solidFill>
                 <a:latin typeface="Calibri"/>
               </a:rPr>
-              <a:t>la plataforma del curso (Mermaid) · boceto en draw.io o Excalidraw</a:t>
+              <a:t>Navegador · editor de diagramas del curso (Mermaid) · boceto libre opcional</a:t>
             </a:r>
           </a:p>
           <a:p>
@@ -14629,7 +14629,7 @@
                 </a:solidFill>
                 <a:latin typeface="Calibri"/>
               </a:rPr>
-              <a:t>Entregable: Diagrama Deployment en Mermaid dentro de la plataforma del curso (3 zonas + puertos) + tipo de almacenamiento por componente</a:t>
+              <a:t>Entregable: Diagrama Deployment en Mermaid en la plataforma del curso (3 zonas + puertos) + tipo de almacenamiento por componente</a:t>
             </a:r>
           </a:p>
         </p:txBody>
@@ -14767,7 +14767,7 @@
                 </a:solidFill>
                 <a:latin typeface="Calibri"/>
               </a:rPr>
-              <a:t>Subir evidencias al paquete CloudLite (Drive/repo) y a la plataforma del curso en la fecha que indique el docente.</a:t>
+              <a:t>Subir evidencias al paquete CloudLite (Drive/repo) y a la plataforma del curso (la plataforma del curso) en la fecha que indique el docente.</a:t>
             </a:r>
           </a:p>
         </p:txBody>
@@ -15121,7 +15121,7 @@
                 </a:solidFill>
                 <a:latin typeface="Calibri"/>
               </a:rPr>
-              <a:t>Evidencia: Diagrama Deployment en Mermaid dentro de la plataforma del curso (3 zonas + puertos) + tipo de almacenamiento por componente</a:t>
+              <a:t>Evidencia: Diagrama Deployment en Mermaid en la plataforma del curso (3 zonas + puertos) + tipo de almacenamiento por componente</a:t>
             </a:r>
           </a:p>
           <a:p>
@@ -16089,7 +16089,7 @@
                 </a:solidFill>
                 <a:latin typeface="Calibri"/>
               </a:rPr>
-              <a:t> en la plataforma del curso.</a:t>
+              <a:t> en la plataforma.</a:t>
             </a:r>
           </a:p>
           <a:p>
@@ -16641,7 +16641,7 @@
                 </a:solidFill>
                 <a:latin typeface="Calibri"/>
               </a:rPr>
-              <a:t>–   La pregunta 4 se responde con codigo Mermaid pegado dentro de la plataforma del curso, que la plataforma renderiza en la misma pantalla, y 2 de esos 14 puntos son literalmente que renderice sin error.</a:t>
+              <a:t>–   La pregunta 4 se responde con codigo Mermaid pegado en la plataforma del curso, que la plataforma renderiza en la misma pantalla, y 2 de esos 14 puntos son literalmente que renderice sin error.</a:t>
             </a:r>
           </a:p>
           <a:p>

--- a/Arquitectura de Sistemas Computacionales/Clases/Clase 7 - Redes y almacenamiento cloud/Presentacion.pptx
+++ b/Arquitectura de Sistemas Computacionales/Clases/Clase 7 - Redes y almacenamiento cloud/Presentacion.pptx
@@ -12,38 +12,33 @@
     <p:sldId id="260" r:id="rId11"/>
     <p:sldId id="261" r:id="rId12"/>
     <p:sldId id="262" r:id="rId13"/>
-    <p:sldId id="263" r:id="rId14"/>
-    <p:sldId id="264" r:id="rId15"/>
-    <p:sldId id="265" r:id="rId16"/>
-    <p:sldId id="266" r:id="rId17"/>
-    <p:sldId id="267" r:id="rId18"/>
-    <p:sldId id="268" r:id="rId19"/>
-    <p:sldId id="269" r:id="rId20"/>
-    <p:sldId id="270" r:id="rId21"/>
-    <p:sldId id="271" r:id="rId22"/>
-    <p:sldId id="272" r:id="rId23"/>
-    <p:sldId id="273" r:id="rId24"/>
-    <p:sldId id="274" r:id="rId25"/>
-    <p:sldId id="275" r:id="rId26"/>
-    <p:sldId id="276" r:id="rId27"/>
-    <p:sldId id="277" r:id="rId28"/>
-    <p:sldId id="278" r:id="rId29"/>
-    <p:sldId id="279" r:id="rId30"/>
-    <p:sldId id="280" r:id="rId31"/>
-    <p:sldId id="281" r:id="rId32"/>
-    <p:sldId id="282" r:id="rId33"/>
-    <p:sldId id="283" r:id="rId34"/>
-    <p:sldId id="284" r:id="rId35"/>
-    <p:sldId id="285" r:id="rId36"/>
-    <p:sldId id="286" r:id="rId37"/>
-    <p:sldId id="287" r:id="rId38"/>
-    <p:sldId id="288" r:id="rId39"/>
-    <p:sldId id="289" r:id="rId40"/>
-    <p:sldId id="290" r:id="rId41"/>
-    <p:sldId id="291" r:id="rId42"/>
-    <p:sldId id="292" r:id="rId43"/>
-    <p:sldId id="293" r:id="rId44"/>
-    <p:sldId id="294" r:id="rId45"/>
+    <p:sldId id="263" r:id="rId15"/>
+    <p:sldId id="264" r:id="rId16"/>
+    <p:sldId id="265" r:id="rId17"/>
+    <p:sldId id="266" r:id="rId18"/>
+    <p:sldId id="267" r:id="rId19"/>
+    <p:sldId id="268" r:id="rId20"/>
+    <p:sldId id="269" r:id="rId21"/>
+    <p:sldId id="270" r:id="rId22"/>
+    <p:sldId id="271" r:id="rId23"/>
+    <p:sldId id="272" r:id="rId24"/>
+    <p:sldId id="273" r:id="rId25"/>
+    <p:sldId id="274" r:id="rId26"/>
+    <p:sldId id="275" r:id="rId27"/>
+    <p:sldId id="276" r:id="rId28"/>
+    <p:sldId id="277" r:id="rId29"/>
+    <p:sldId id="278" r:id="rId30"/>
+    <p:sldId id="279" r:id="rId31"/>
+    <p:sldId id="280" r:id="rId32"/>
+    <p:sldId id="281" r:id="rId33"/>
+    <p:sldId id="282" r:id="rId34"/>
+    <p:sldId id="283" r:id="rId35"/>
+    <p:sldId id="284" r:id="rId36"/>
+    <p:sldId id="285" r:id="rId37"/>
+    <p:sldId id="286" r:id="rId38"/>
+    <p:sldId id="287" r:id="rId39"/>
+    <p:sldId id="288" r:id="rId40"/>
+    <p:sldId id="289" r:id="rId41"/>
   </p:sldIdLst>
   <p:sldSz cx="12191695" cy="6858000" type="screen4x3"/>
   <p:notesSz cx="6858000" cy="9144000"/>
@@ -143,6 +138,1052 @@
     </a:lvl9pPr>
   </p:defaultTextStyle>
 </p:presentation>
+</file>
+
+<file path=ppt/notesMasters/notesMaster1.xml><?xml version="1.0" encoding="utf-8"?>
+<p:notesMaster xmlns:a="http://schemas.openxmlformats.org/drawingml/2006/main" xmlns:p="http://schemas.openxmlformats.org/presentationml/2006/main" xmlns:r="http://schemas.openxmlformats.org/officeDocument/2006/relationships">
+  <p:cSld>
+    <p:bg>
+      <p:bgRef idx="1001">
+        <a:schemeClr val="bg1"/>
+      </p:bgRef>
+    </p:bg>
+    <p:spTree>
+      <p:nvGrpSpPr>
+        <p:cNvPr id="1" name=""/>
+        <p:cNvGrpSpPr/>
+        <p:nvPr/>
+      </p:nvGrpSpPr>
+      <p:grpSpPr>
+        <a:xfrm>
+          <a:off x="0" y="0"/>
+          <a:ext cx="0" cy="0"/>
+          <a:chOff x="0" y="0"/>
+          <a:chExt cx="0" cy="0"/>
+        </a:xfrm>
+      </p:grpSpPr>
+      <p:sp>
+        <p:nvSpPr>
+          <p:cNvPr id="2" name="Header Placeholder 1"/>
+          <p:cNvSpPr>
+            <a:spLocks noGrp="1"/>
+          </p:cNvSpPr>
+          <p:nvPr>
+            <p:ph type="hdr" sz="quarter"/>
+          </p:nvPr>
+        </p:nvSpPr>
+        <p:spPr>
+          <a:xfrm>
+            <a:off x="0" y="0"/>
+            <a:ext cx="2971800" cy="457200"/>
+          </a:xfrm>
+          <a:prstGeom prst="rect">
+            <a:avLst/>
+          </a:prstGeom>
+        </p:spPr>
+        <p:txBody>
+          <a:bodyPr vert="horz" lIns="91440" tIns="45720" rIns="91440" bIns="45720" rtlCol="0"/>
+          <a:lstStyle>
+            <a:lvl1pPr algn="l">
+              <a:defRPr sz="1200"/>
+            </a:lvl1pPr>
+          </a:lstStyle>
+          <a:p>
+            <a:endParaRPr lang="en-US"/>
+          </a:p>
+        </p:txBody>
+      </p:sp>
+      <p:sp>
+        <p:nvSpPr>
+          <p:cNvPr id="3" name="Date Placeholder 2"/>
+          <p:cNvSpPr>
+            <a:spLocks noGrp="1"/>
+          </p:cNvSpPr>
+          <p:nvPr>
+            <p:ph type="dt" idx="1"/>
+          </p:nvPr>
+        </p:nvSpPr>
+        <p:spPr>
+          <a:xfrm>
+            <a:off x="3884613" y="0"/>
+            <a:ext cx="2971800" cy="457200"/>
+          </a:xfrm>
+          <a:prstGeom prst="rect">
+            <a:avLst/>
+          </a:prstGeom>
+        </p:spPr>
+        <p:txBody>
+          <a:bodyPr vert="horz" lIns="91440" tIns="45720" rIns="91440" bIns="45720" rtlCol="0"/>
+          <a:lstStyle>
+            <a:lvl1pPr algn="r">
+              <a:defRPr sz="1200"/>
+            </a:lvl1pPr>
+          </a:lstStyle>
+          <a:p>
+            <a:fld id="{0F89C1C7-3DCD-1040-A9CF-14679D8B5DDD}" type="datetimeFigureOut">
+              <a:rPr lang="en-US" smtClean="0"/>
+              <a:t>10/17/16</a:t>
+            </a:fld>
+            <a:endParaRPr lang="en-US"/>
+          </a:p>
+        </p:txBody>
+      </p:sp>
+      <p:sp>
+        <p:nvSpPr>
+          <p:cNvPr id="4" name="Slide Image Placeholder 3"/>
+          <p:cNvSpPr>
+            <a:spLocks noGrp="1" noRot="1" noChangeAspect="1"/>
+          </p:cNvSpPr>
+          <p:nvPr>
+            <p:ph type="sldImg" idx="2"/>
+          </p:nvPr>
+        </p:nvSpPr>
+        <p:spPr>
+          <a:xfrm>
+            <a:off x="1143000" y="685800"/>
+            <a:ext cx="4572000" cy="3429000"/>
+          </a:xfrm>
+          <a:prstGeom prst="rect">
+            <a:avLst/>
+          </a:prstGeom>
+          <a:noFill/>
+          <a:ln w="12700">
+            <a:solidFill>
+              <a:prstClr val="black"/>
+            </a:solidFill>
+          </a:ln>
+        </p:spPr>
+        <p:txBody>
+          <a:bodyPr vert="horz" lIns="91440" tIns="45720" rIns="91440" bIns="45720" rtlCol="0" anchor="ctr"/>
+          <a:lstStyle/>
+          <a:p>
+            <a:endParaRPr lang="en-US"/>
+          </a:p>
+        </p:txBody>
+      </p:sp>
+      <p:sp>
+        <p:nvSpPr>
+          <p:cNvPr id="5" name="Notes Placeholder 4"/>
+          <p:cNvSpPr>
+            <a:spLocks noGrp="1"/>
+          </p:cNvSpPr>
+          <p:nvPr>
+            <p:ph type="body" sz="quarter" idx="3"/>
+          </p:nvPr>
+        </p:nvSpPr>
+        <p:spPr>
+          <a:xfrm>
+            <a:off x="685800" y="4343400"/>
+            <a:ext cx="5486400" cy="4114800"/>
+          </a:xfrm>
+          <a:prstGeom prst="rect">
+            <a:avLst/>
+          </a:prstGeom>
+        </p:spPr>
+        <p:txBody>
+          <a:bodyPr vert="horz" lIns="91440" tIns="45720" rIns="91440" bIns="45720" rtlCol="0"/>
+          <a:lstStyle/>
+          <a:p>
+            <a:pPr lvl="0"/>
+            <a:r>
+              <a:rPr lang="en-US" smtClean="0"/>
+              <a:t>Click to edit Master text styles</a:t>
+            </a:r>
+          </a:p>
+          <a:p>
+            <a:pPr lvl="1"/>
+            <a:r>
+              <a:rPr lang="en-US" smtClean="0"/>
+              <a:t>Second level</a:t>
+            </a:r>
+          </a:p>
+          <a:p>
+            <a:pPr lvl="2"/>
+            <a:r>
+              <a:rPr lang="en-US" smtClean="0"/>
+              <a:t>Third level</a:t>
+            </a:r>
+          </a:p>
+          <a:p>
+            <a:pPr lvl="3"/>
+            <a:r>
+              <a:rPr lang="en-US" smtClean="0"/>
+              <a:t>Fourth level</a:t>
+            </a:r>
+          </a:p>
+          <a:p>
+            <a:pPr lvl="4"/>
+            <a:r>
+              <a:rPr lang="en-US" smtClean="0"/>
+              <a:t>Fifth level</a:t>
+            </a:r>
+            <a:endParaRPr lang="en-US"/>
+          </a:p>
+        </p:txBody>
+      </p:sp>
+      <p:sp>
+        <p:nvSpPr>
+          <p:cNvPr id="6" name="Footer Placeholder 5"/>
+          <p:cNvSpPr>
+            <a:spLocks noGrp="1"/>
+          </p:cNvSpPr>
+          <p:nvPr>
+            <p:ph type="ftr" sz="quarter" idx="4"/>
+          </p:nvPr>
+        </p:nvSpPr>
+        <p:spPr>
+          <a:xfrm>
+            <a:off x="0" y="8685213"/>
+            <a:ext cx="2971800" cy="457200"/>
+          </a:xfrm>
+          <a:prstGeom prst="rect">
+            <a:avLst/>
+          </a:prstGeom>
+        </p:spPr>
+        <p:txBody>
+          <a:bodyPr vert="horz" lIns="91440" tIns="45720" rIns="91440" bIns="45720" rtlCol="0" anchor="b"/>
+          <a:lstStyle>
+            <a:lvl1pPr algn="l">
+              <a:defRPr sz="1200"/>
+            </a:lvl1pPr>
+          </a:lstStyle>
+          <a:p>
+            <a:endParaRPr lang="en-US"/>
+          </a:p>
+        </p:txBody>
+      </p:sp>
+      <p:sp>
+        <p:nvSpPr>
+          <p:cNvPr id="7" name="Slide Number Placeholder 6"/>
+          <p:cNvSpPr>
+            <a:spLocks noGrp="1"/>
+          </p:cNvSpPr>
+          <p:nvPr>
+            <p:ph type="sldNum" sz="quarter" idx="5"/>
+          </p:nvPr>
+        </p:nvSpPr>
+        <p:spPr>
+          <a:xfrm>
+            <a:off x="3884613" y="8685213"/>
+            <a:ext cx="2971800" cy="457200"/>
+          </a:xfrm>
+          <a:prstGeom prst="rect">
+            <a:avLst/>
+          </a:prstGeom>
+        </p:spPr>
+        <p:txBody>
+          <a:bodyPr vert="horz" lIns="91440" tIns="45720" rIns="91440" bIns="45720" rtlCol="0" anchor="b"/>
+          <a:lstStyle>
+            <a:lvl1pPr algn="r">
+              <a:defRPr sz="1200"/>
+            </a:lvl1pPr>
+          </a:lstStyle>
+          <a:p>
+            <a:fld id="{BB5E49A5-4136-284D-997B-48E1D791AD67}" type="slidenum">
+              <a:rPr lang="en-US" smtClean="0"/>
+              <a:t>‹#›</a:t>
+            </a:fld>
+            <a:endParaRPr lang="en-US"/>
+          </a:p>
+        </p:txBody>
+      </p:sp>
+    </p:spTree>
+    <p:extLst>
+      <p:ext uri="{BB962C8B-B14F-4D97-AF65-F5344CB8AC3E}">
+        <p14:creationId xmlns:p14="http://schemas.microsoft.com/office/powerpoint/2010/main" val="2623252185"/>
+      </p:ext>
+    </p:extLst>
+  </p:cSld>
+  <p:clrMap bg1="lt1" tx1="dk1" bg2="lt2" tx2="dk2" accent1="accent1" accent2="accent2" accent3="accent3" accent4="accent4" accent5="accent5" accent6="accent6" hlink="hlink" folHlink="folHlink"/>
+  <p:notesStyle>
+    <a:lvl1pPr marL="0" algn="l" defTabSz="457200" rtl="0" eaLnBrk="1" latinLnBrk="0" hangingPunct="1">
+      <a:defRPr sz="1200" kern="1200">
+        <a:solidFill>
+          <a:schemeClr val="tx1"/>
+        </a:solidFill>
+        <a:latin typeface="+mn-lt"/>
+        <a:ea typeface="+mn-ea"/>
+        <a:cs typeface="+mn-cs"/>
+      </a:defRPr>
+    </a:lvl1pPr>
+    <a:lvl2pPr marL="457200" algn="l" defTabSz="457200" rtl="0" eaLnBrk="1" latinLnBrk="0" hangingPunct="1">
+      <a:defRPr sz="1200" kern="1200">
+        <a:solidFill>
+          <a:schemeClr val="tx1"/>
+        </a:solidFill>
+        <a:latin typeface="+mn-lt"/>
+        <a:ea typeface="+mn-ea"/>
+        <a:cs typeface="+mn-cs"/>
+      </a:defRPr>
+    </a:lvl2pPr>
+    <a:lvl3pPr marL="914400" algn="l" defTabSz="457200" rtl="0" eaLnBrk="1" latinLnBrk="0" hangingPunct="1">
+      <a:defRPr sz="1200" kern="1200">
+        <a:solidFill>
+          <a:schemeClr val="tx1"/>
+        </a:solidFill>
+        <a:latin typeface="+mn-lt"/>
+        <a:ea typeface="+mn-ea"/>
+        <a:cs typeface="+mn-cs"/>
+      </a:defRPr>
+    </a:lvl3pPr>
+    <a:lvl4pPr marL="1371600" algn="l" defTabSz="457200" rtl="0" eaLnBrk="1" latinLnBrk="0" hangingPunct="1">
+      <a:defRPr sz="1200" kern="1200">
+        <a:solidFill>
+          <a:schemeClr val="tx1"/>
+        </a:solidFill>
+        <a:latin typeface="+mn-lt"/>
+        <a:ea typeface="+mn-ea"/>
+        <a:cs typeface="+mn-cs"/>
+      </a:defRPr>
+    </a:lvl4pPr>
+    <a:lvl5pPr marL="1828800" algn="l" defTabSz="457200" rtl="0" eaLnBrk="1" latinLnBrk="0" hangingPunct="1">
+      <a:defRPr sz="1200" kern="1200">
+        <a:solidFill>
+          <a:schemeClr val="tx1"/>
+        </a:solidFill>
+        <a:latin typeface="+mn-lt"/>
+        <a:ea typeface="+mn-ea"/>
+        <a:cs typeface="+mn-cs"/>
+      </a:defRPr>
+    </a:lvl5pPr>
+    <a:lvl6pPr marL="2286000" algn="l" defTabSz="457200" rtl="0" eaLnBrk="1" latinLnBrk="0" hangingPunct="1">
+      <a:defRPr sz="1200" kern="1200">
+        <a:solidFill>
+          <a:schemeClr val="tx1"/>
+        </a:solidFill>
+        <a:latin typeface="+mn-lt"/>
+        <a:ea typeface="+mn-ea"/>
+        <a:cs typeface="+mn-cs"/>
+      </a:defRPr>
+    </a:lvl6pPr>
+    <a:lvl7pPr marL="2743200" algn="l" defTabSz="457200" rtl="0" eaLnBrk="1" latinLnBrk="0" hangingPunct="1">
+      <a:defRPr sz="1200" kern="1200">
+        <a:solidFill>
+          <a:schemeClr val="tx1"/>
+        </a:solidFill>
+        <a:latin typeface="+mn-lt"/>
+        <a:ea typeface="+mn-ea"/>
+        <a:cs typeface="+mn-cs"/>
+      </a:defRPr>
+    </a:lvl7pPr>
+    <a:lvl8pPr marL="3200400" algn="l" defTabSz="457200" rtl="0" eaLnBrk="1" latinLnBrk="0" hangingPunct="1">
+      <a:defRPr sz="1200" kern="1200">
+        <a:solidFill>
+          <a:schemeClr val="tx1"/>
+        </a:solidFill>
+        <a:latin typeface="+mn-lt"/>
+        <a:ea typeface="+mn-ea"/>
+        <a:cs typeface="+mn-cs"/>
+      </a:defRPr>
+    </a:lvl8pPr>
+    <a:lvl9pPr marL="3657600" algn="l" defTabSz="457200" rtl="0" eaLnBrk="1" latinLnBrk="0" hangingPunct="1">
+      <a:defRPr sz="1200" kern="1200">
+        <a:solidFill>
+          <a:schemeClr val="tx1"/>
+        </a:solidFill>
+        <a:latin typeface="+mn-lt"/>
+        <a:ea typeface="+mn-ea"/>
+        <a:cs typeface="+mn-cs"/>
+      </a:defRPr>
+    </a:lvl9pPr>
+  </p:notesStyle>
+</p:notesMaster>
+</file>
+
+<file path=ppt/notesSlides/notesSlide1.xml><?xml version="1.0" encoding="utf-8"?>
+<p:notes xmlns:a="http://schemas.openxmlformats.org/drawingml/2006/main" xmlns:p="http://schemas.openxmlformats.org/presentationml/2006/main" xmlns:r="http://schemas.openxmlformats.org/officeDocument/2006/relationships">
+  <p:cSld>
+    <p:spTree>
+      <p:nvGrpSpPr>
+        <p:cNvPr id="1" name=""/>
+        <p:cNvGrpSpPr/>
+        <p:nvPr/>
+      </p:nvGrpSpPr>
+      <p:grpSpPr>
+        <a:xfrm>
+          <a:off x="0" y="0"/>
+          <a:ext cx="0" cy="0"/>
+          <a:chOff x="0" y="0"/>
+          <a:chExt cx="0" cy="0"/>
+        </a:xfrm>
+      </p:grpSpPr>
+      <p:sp>
+        <p:nvSpPr>
+          <p:cNvPr id="2" name="Slide Image Placeholder 1"/>
+          <p:cNvSpPr>
+            <a:spLocks noGrp="1"/>
+          </p:cNvSpPr>
+          <p:nvPr>
+            <p:ph type="sldImg" idx="2"/>
+          </p:nvPr>
+        </p:nvSpPr>
+        <p:spPr/>
+      </p:sp>
+      <p:sp>
+        <p:nvSpPr>
+          <p:cNvPr id="3" name="Notes Placeholder 2"/>
+          <p:cNvSpPr>
+            <a:spLocks noGrp="1"/>
+          </p:cNvSpPr>
+          <p:nvPr>
+            <p:ph type="body" idx="3" sz="quarter"/>
+          </p:nvPr>
+        </p:nvSpPr>
+        <p:spPr/>
+        <p:txBody>
+          <a:bodyPr/>
+          <a:lstStyle/>
+          <a:p>
+            <a:r>
+              <a:t>Conviene tener claro el mapa de los tres diagramas del curso, porque el estudiante cree que dibuja lo mismo tres veces.</a:t>
+            </a:r>
+          </a:p>
+          <a:p/>
+          <a:p>
+            <a:r>
+              <a:t>Lo que se califica hoy son 25 de los 100 puntos de la actividad del Corte 2, en tres preguntas: 14 puntos el diagrama de despliegue, 5.5 el tipo de almacenamiento de cada componente y 5.5 la tabla de correspondencia con el C4 Containers.</a:t>
+            </a:r>
+          </a:p>
+        </p:txBody>
+      </p:sp>
+      <p:sp>
+        <p:nvSpPr>
+          <p:cNvPr id="4" name="Slide Number Placeholder 3"/>
+          <p:cNvSpPr>
+            <a:spLocks noGrp="1"/>
+          </p:cNvSpPr>
+          <p:nvPr>
+            <p:ph type="sldNum" idx="5" sz="quarter"/>
+          </p:nvPr>
+        </p:nvSpPr>
+        <p:spPr/>
+      </p:sp>
+    </p:spTree>
+  </p:cSld>
+  <p:clrMapOvr>
+    <a:masterClrMapping/>
+  </p:clrMapOvr>
+</p:notes>
+</file>
+
+<file path=ppt/notesSlides/notesSlide2.xml><?xml version="1.0" encoding="utf-8"?>
+<p:notes xmlns:a="http://schemas.openxmlformats.org/drawingml/2006/main" xmlns:p="http://schemas.openxmlformats.org/presentationml/2006/main" xmlns:r="http://schemas.openxmlformats.org/officeDocument/2006/relationships">
+  <p:cSld>
+    <p:spTree>
+      <p:nvGrpSpPr>
+        <p:cNvPr id="1" name=""/>
+        <p:cNvGrpSpPr/>
+        <p:nvPr/>
+      </p:nvGrpSpPr>
+      <p:grpSpPr>
+        <a:xfrm>
+          <a:off x="0" y="0"/>
+          <a:ext cx="0" cy="0"/>
+          <a:chOff x="0" y="0"/>
+          <a:chExt cx="0" cy="0"/>
+        </a:xfrm>
+      </p:grpSpPr>
+      <p:sp>
+        <p:nvSpPr>
+          <p:cNvPr id="2" name="Slide Image Placeholder 1"/>
+          <p:cNvSpPr>
+            <a:spLocks noGrp="1"/>
+          </p:cNvSpPr>
+          <p:nvPr>
+            <p:ph type="sldImg" idx="2"/>
+          </p:nvPr>
+        </p:nvSpPr>
+        <p:spPr/>
+      </p:sp>
+      <p:sp>
+        <p:nvSpPr>
+          <p:cNvPr id="3" name="Notes Placeholder 2"/>
+          <p:cNvSpPr>
+            <a:spLocks noGrp="1"/>
+          </p:cNvSpPr>
+          <p:nvPr>
+            <p:ph type="body" idx="3" sz="quarter"/>
+          </p:nvPr>
+        </p:nvSpPr>
+        <p:spPr/>
+        <p:txBody>
+          <a:bodyPr/>
+          <a:lstStyle/>
+          <a:p>
+            <a:r>
+              <a:t>Para etiquetar ese diagrama hacen falta tres conceptos de red que el docente debe definir en una frase.</a:t>
+            </a:r>
+          </a:p>
+          <a:p/>
+          <a:p>
+            <a:r>
+              <a:t>Una direccion IP identifica una maquina dentro de una red.</a:t>
+            </a:r>
+          </a:p>
+          <a:p/>
+          <a:p>
+            <a:r>
+              <a:t>Ahi esta el amarre: cuando en Killercoda se ejecuto el contenedor publicando un puerto, esa linea era la decision de que superficie queda expuesta, tema de la Clase 6, y hoy esa decision se dibuja.</a:t>
+            </a:r>
+          </a:p>
+        </p:txBody>
+      </p:sp>
+      <p:sp>
+        <p:nvSpPr>
+          <p:cNvPr id="4" name="Slide Number Placeholder 3"/>
+          <p:cNvSpPr>
+            <a:spLocks noGrp="1"/>
+          </p:cNvSpPr>
+          <p:nvPr>
+            <p:ph type="sldNum" idx="5" sz="quarter"/>
+          </p:nvPr>
+        </p:nvSpPr>
+        <p:spPr/>
+      </p:sp>
+    </p:spTree>
+  </p:cSld>
+  <p:clrMapOvr>
+    <a:masterClrMapping/>
+  </p:clrMapOvr>
+</p:notes>
+</file>
+
+<file path=ppt/notesSlides/notesSlide3.xml><?xml version="1.0" encoding="utf-8"?>
+<p:notes xmlns:a="http://schemas.openxmlformats.org/drawingml/2006/main" xmlns:p="http://schemas.openxmlformats.org/presentationml/2006/main" xmlns:r="http://schemas.openxmlformats.org/officeDocument/2006/relationships">
+  <p:cSld>
+    <p:spTree>
+      <p:nvGrpSpPr>
+        <p:cNvPr id="1" name=""/>
+        <p:cNvGrpSpPr/>
+        <p:nvPr/>
+      </p:nvGrpSpPr>
+      <p:grpSpPr>
+        <a:xfrm>
+          <a:off x="0" y="0"/>
+          <a:ext cx="0" cy="0"/>
+          <a:chOff x="0" y="0"/>
+          <a:chExt cx="0" cy="0"/>
+        </a:xfrm>
+      </p:grpSpPr>
+      <p:sp>
+        <p:nvSpPr>
+          <p:cNvPr id="2" name="Slide Image Placeholder 1"/>
+          <p:cNvSpPr>
+            <a:spLocks noGrp="1"/>
+          </p:cNvSpPr>
+          <p:nvPr>
+            <p:ph type="sldImg" idx="2"/>
+          </p:nvPr>
+        </p:nvSpPr>
+        <p:spPr/>
+      </p:sp>
+      <p:sp>
+        <p:nvSpPr>
+          <p:cNvPr id="3" name="Notes Placeholder 2"/>
+          <p:cNvSpPr>
+            <a:spLocks noGrp="1"/>
+          </p:cNvSpPr>
+          <p:nvPr>
+            <p:ph type="body" idx="3" sz="quarter"/>
+          </p:nvPr>
+        </p:nvSpPr>
+        <p:spPr/>
+        <p:txBody>
+          <a:bodyPr/>
+          <a:lstStyle/>
+          <a:p>
+            <a:r>
+              <a:t>Una privada no lo tiene; solo se alcanza desde dentro, aunque normalmente si puede salir para descargar actualizaciones.</a:t>
+            </a:r>
+          </a:p>
+          <a:p/>
+          <a:p>
+            <a:r>
+              <a:t>Conviene ademas nombrar la frontera de confianza, que vale 2 puntos: es la linea donde termina lo que el estudiante controla y empieza lo que no.</a:t>
+            </a:r>
+          </a:p>
+        </p:txBody>
+      </p:sp>
+      <p:sp>
+        <p:nvSpPr>
+          <p:cNvPr id="4" name="Slide Number Placeholder 3"/>
+          <p:cNvSpPr>
+            <a:spLocks noGrp="1"/>
+          </p:cNvSpPr>
+          <p:nvPr>
+            <p:ph type="sldNum" idx="5" sz="quarter"/>
+          </p:nvPr>
+        </p:nvSpPr>
+        <p:spPr/>
+      </p:sp>
+    </p:spTree>
+  </p:cSld>
+  <p:clrMapOvr>
+    <a:masterClrMapping/>
+  </p:clrMapOvr>
+</p:notes>
+</file>
+
+<file path=ppt/notesSlides/notesSlide4.xml><?xml version="1.0" encoding="utf-8"?>
+<p:notes xmlns:a="http://schemas.openxmlformats.org/drawingml/2006/main" xmlns:p="http://schemas.openxmlformats.org/presentationml/2006/main" xmlns:r="http://schemas.openxmlformats.org/officeDocument/2006/relationships">
+  <p:cSld>
+    <p:spTree>
+      <p:nvGrpSpPr>
+        <p:cNvPr id="1" name=""/>
+        <p:cNvGrpSpPr/>
+        <p:nvPr/>
+      </p:nvGrpSpPr>
+      <p:grpSpPr>
+        <a:xfrm>
+          <a:off x="0" y="0"/>
+          <a:ext cx="0" cy="0"/>
+          <a:chOff x="0" y="0"/>
+          <a:chExt cx="0" cy="0"/>
+        </a:xfrm>
+      </p:grpSpPr>
+      <p:sp>
+        <p:nvSpPr>
+          <p:cNvPr id="2" name="Slide Image Placeholder 1"/>
+          <p:cNvSpPr>
+            <a:spLocks noGrp="1"/>
+          </p:cNvSpPr>
+          <p:nvPr>
+            <p:ph type="sldImg" idx="2"/>
+          </p:nvPr>
+        </p:nvSpPr>
+        <p:spPr/>
+      </p:sp>
+      <p:sp>
+        <p:nvSpPr>
+          <p:cNvPr id="3" name="Notes Placeholder 2"/>
+          <p:cNvSpPr>
+            <a:spLocks noGrp="1"/>
+          </p:cNvSpPr>
+          <p:nvPr>
+            <p:ph type="body" idx="3" sz="quarter"/>
+          </p:nvPr>
+        </p:nvSpPr>
+        <p:spPr/>
+        <p:txBody>
+          <a:bodyPr/>
+          <a:lstStyle/>
+          <a:p>
+            <a:r>
+              <a:t>El balanceador de carga recibe todas las peticiones y las reparte entre varias instancias iguales del mismo servicio, con algoritmos como round robin o menor numero de conexiones activas.</a:t>
+            </a:r>
+          </a:p>
+        </p:txBody>
+      </p:sp>
+      <p:sp>
+        <p:nvSpPr>
+          <p:cNvPr id="4" name="Slide Number Placeholder 3"/>
+          <p:cNvSpPr>
+            <a:spLocks noGrp="1"/>
+          </p:cNvSpPr>
+          <p:nvPr>
+            <p:ph type="sldNum" idx="5" sz="quarter"/>
+          </p:nvPr>
+        </p:nvSpPr>
+        <p:spPr/>
+      </p:sp>
+    </p:spTree>
+  </p:cSld>
+  <p:clrMapOvr>
+    <a:masterClrMapping/>
+  </p:clrMapOvr>
+</p:notes>
+</file>
+
+<file path=ppt/notesSlides/notesSlide5.xml><?xml version="1.0" encoding="utf-8"?>
+<p:notes xmlns:a="http://schemas.openxmlformats.org/drawingml/2006/main" xmlns:p="http://schemas.openxmlformats.org/presentationml/2006/main" xmlns:r="http://schemas.openxmlformats.org/officeDocument/2006/relationships">
+  <p:cSld>
+    <p:spTree>
+      <p:nvGrpSpPr>
+        <p:cNvPr id="1" name=""/>
+        <p:cNvGrpSpPr/>
+        <p:nvPr/>
+      </p:nvGrpSpPr>
+      <p:grpSpPr>
+        <a:xfrm>
+          <a:off x="0" y="0"/>
+          <a:ext cx="0" cy="0"/>
+          <a:chOff x="0" y="0"/>
+          <a:chExt cx="0" cy="0"/>
+        </a:xfrm>
+      </p:grpSpPr>
+      <p:sp>
+        <p:nvSpPr>
+          <p:cNvPr id="2" name="Slide Image Placeholder 1"/>
+          <p:cNvSpPr>
+            <a:spLocks noGrp="1"/>
+          </p:cNvSpPr>
+          <p:nvPr>
+            <p:ph type="sldImg" idx="2"/>
+          </p:nvPr>
+        </p:nvSpPr>
+        <p:spPr/>
+      </p:sp>
+      <p:sp>
+        <p:nvSpPr>
+          <p:cNvPr id="3" name="Notes Placeholder 2"/>
+          <p:cNvSpPr>
+            <a:spLocks noGrp="1"/>
+          </p:cNvSpPr>
+          <p:nvPr>
+            <p:ph type="body" idx="3" sz="quarter"/>
+          </p:nvPr>
+        </p:nvSpPr>
+        <p:spPr/>
+        <p:txBody>
+          <a:bodyPr/>
+          <a:lstStyle/>
+          <a:p>
+            <a:r>
+              <a:t>Vale la pena escribirlas en el tablero y sostenerlas toda la clase.</a:t>
+            </a:r>
+          </a:p>
+        </p:txBody>
+      </p:sp>
+      <p:sp>
+        <p:nvSpPr>
+          <p:cNvPr id="4" name="Slide Number Placeholder 3"/>
+          <p:cNvSpPr>
+            <a:spLocks noGrp="1"/>
+          </p:cNvSpPr>
+          <p:nvPr>
+            <p:ph type="sldNum" idx="5" sz="quarter"/>
+          </p:nvPr>
+        </p:nvSpPr>
+        <p:spPr/>
+      </p:sp>
+    </p:spTree>
+  </p:cSld>
+  <p:clrMapOvr>
+    <a:masterClrMapping/>
+  </p:clrMapOvr>
+</p:notes>
+</file>
+
+<file path=ppt/notesSlides/notesSlide6.xml><?xml version="1.0" encoding="utf-8"?>
+<p:notes xmlns:a="http://schemas.openxmlformats.org/drawingml/2006/main" xmlns:p="http://schemas.openxmlformats.org/presentationml/2006/main" xmlns:r="http://schemas.openxmlformats.org/officeDocument/2006/relationships">
+  <p:cSld>
+    <p:spTree>
+      <p:nvGrpSpPr>
+        <p:cNvPr id="1" name=""/>
+        <p:cNvGrpSpPr/>
+        <p:nvPr/>
+      </p:nvGrpSpPr>
+      <p:grpSpPr>
+        <a:xfrm>
+          <a:off x="0" y="0"/>
+          <a:ext cx="0" cy="0"/>
+          <a:chOff x="0" y="0"/>
+          <a:chExt cx="0" cy="0"/>
+        </a:xfrm>
+      </p:grpSpPr>
+      <p:sp>
+        <p:nvSpPr>
+          <p:cNvPr id="2" name="Slide Image Placeholder 1"/>
+          <p:cNvSpPr>
+            <a:spLocks noGrp="1"/>
+          </p:cNvSpPr>
+          <p:nvPr>
+            <p:ph type="sldImg" idx="2"/>
+          </p:nvPr>
+        </p:nvSpPr>
+        <p:spPr/>
+      </p:sp>
+      <p:sp>
+        <p:nvSpPr>
+          <p:cNvPr id="3" name="Notes Placeholder 2"/>
+          <p:cNvSpPr>
+            <a:spLocks noGrp="1"/>
+          </p:cNvSpPr>
+          <p:nvPr>
+            <p:ph type="body" idx="3" sz="quarter"/>
+          </p:nvPr>
+        </p:nvSpPr>
+        <p:spPr/>
+        <p:txBody>
+          <a:bodyPr/>
+          <a:lstStyle/>
+          <a:p>
+            <a:r>
+              <a:t>Y ahora la otra mitad, que es la que sorprende al docente: si el dominio del estudiante no maneja archivos, imagenes ni documentos adjuntos, la respuesta correcta y completa es declarar que NO necesita almacenamiento de objetos y explicar por que.</a:t>
+            </a:r>
+          </a:p>
+        </p:txBody>
+      </p:sp>
+      <p:sp>
+        <p:nvSpPr>
+          <p:cNvPr id="4" name="Slide Number Placeholder 3"/>
+          <p:cNvSpPr>
+            <a:spLocks noGrp="1"/>
+          </p:cNvSpPr>
+          <p:nvPr>
+            <p:ph type="sldNum" idx="5" sz="quarter"/>
+          </p:nvPr>
+        </p:nvSpPr>
+        <p:spPr/>
+      </p:sp>
+    </p:spTree>
+  </p:cSld>
+  <p:clrMapOvr>
+    <a:masterClrMapping/>
+  </p:clrMapOvr>
+</p:notes>
+</file>
+
+<file path=ppt/notesSlides/notesSlide7.xml><?xml version="1.0" encoding="utf-8"?>
+<p:notes xmlns:a="http://schemas.openxmlformats.org/drawingml/2006/main" xmlns:p="http://schemas.openxmlformats.org/presentationml/2006/main" xmlns:r="http://schemas.openxmlformats.org/officeDocument/2006/relationships">
+  <p:cSld>
+    <p:spTree>
+      <p:nvGrpSpPr>
+        <p:cNvPr id="1" name=""/>
+        <p:cNvGrpSpPr/>
+        <p:nvPr/>
+      </p:nvGrpSpPr>
+      <p:grpSpPr>
+        <a:xfrm>
+          <a:off x="0" y="0"/>
+          <a:ext cx="0" cy="0"/>
+          <a:chOff x="0" y="0"/>
+          <a:chExt cx="0" cy="0"/>
+        </a:xfrm>
+      </p:grpSpPr>
+      <p:sp>
+        <p:nvSpPr>
+          <p:cNvPr id="2" name="Slide Image Placeholder 1"/>
+          <p:cNvSpPr>
+            <a:spLocks noGrp="1"/>
+          </p:cNvSpPr>
+          <p:nvPr>
+            <p:ph type="sldImg" idx="2"/>
+          </p:nvPr>
+        </p:nvSpPr>
+        <p:spPr/>
+      </p:sp>
+      <p:sp>
+        <p:nvSpPr>
+          <p:cNvPr id="3" name="Notes Placeholder 2"/>
+          <p:cNvSpPr>
+            <a:spLocks noGrp="1"/>
+          </p:cNvSpPr>
+          <p:nvPr>
+            <p:ph type="body" idx="3" sz="quarter"/>
+          </p:nvPr>
+        </p:nvSpPr>
+        <p:spPr/>
+        <p:txBody>
+          <a:bodyPr/>
+          <a:lstStyle/>
+          <a:p>
+            <a:r>
+              <a:t>Queda la trazabilidad, donde mas puntos se pierden y donde vive una pregunta entera.</a:t>
+            </a:r>
+          </a:p>
+        </p:txBody>
+      </p:sp>
+      <p:sp>
+        <p:nvSpPr>
+          <p:cNvPr id="4" name="Slide Number Placeholder 3"/>
+          <p:cNvSpPr>
+            <a:spLocks noGrp="1"/>
+          </p:cNvSpPr>
+          <p:nvPr>
+            <p:ph type="sldNum" idx="5" sz="quarter"/>
+          </p:nvPr>
+        </p:nvSpPr>
+        <p:spPr/>
+      </p:sp>
+    </p:spTree>
+  </p:cSld>
+  <p:clrMapOvr>
+    <a:masterClrMapping/>
+  </p:clrMapOvr>
+</p:notes>
+</file>
+
+<file path=ppt/notesSlides/notesSlide8.xml><?xml version="1.0" encoding="utf-8"?>
+<p:notes xmlns:a="http://schemas.openxmlformats.org/drawingml/2006/main" xmlns:p="http://schemas.openxmlformats.org/presentationml/2006/main" xmlns:r="http://schemas.openxmlformats.org/officeDocument/2006/relationships">
+  <p:cSld>
+    <p:spTree>
+      <p:nvGrpSpPr>
+        <p:cNvPr id="1" name=""/>
+        <p:cNvGrpSpPr/>
+        <p:nvPr/>
+      </p:nvGrpSpPr>
+      <p:grpSpPr>
+        <a:xfrm>
+          <a:off x="0" y="0"/>
+          <a:ext cx="0" cy="0"/>
+          <a:chOff x="0" y="0"/>
+          <a:chExt cx="0" cy="0"/>
+        </a:xfrm>
+      </p:grpSpPr>
+      <p:sp>
+        <p:nvSpPr>
+          <p:cNvPr id="2" name="Slide Image Placeholder 1"/>
+          <p:cNvSpPr>
+            <a:spLocks noGrp="1"/>
+          </p:cNvSpPr>
+          <p:nvPr>
+            <p:ph type="sldImg" idx="2"/>
+          </p:nvPr>
+        </p:nvSpPr>
+        <p:spPr/>
+      </p:sp>
+      <p:sp>
+        <p:nvSpPr>
+          <p:cNvPr id="3" name="Notes Placeholder 2"/>
+          <p:cNvSpPr>
+            <a:spLocks noGrp="1"/>
+          </p:cNvSpPr>
+          <p:nvPr>
+            <p:ph type="body" idx="3" sz="quarter"/>
+          </p:nvPr>
+        </p:nvSpPr>
+        <p:spPr/>
+        <p:txBody>
+          <a:bodyPr/>
+          <a:lstStyle/>
+          <a:p>
+            <a:r>
+              <a:t>Hay cinco cosas que el docente debe poder explicar sin titubear.</a:t>
+            </a:r>
+          </a:p>
+          <a:p/>
+          <a:p>
+            <a:r>
+              <a:t>Se escribe flowchart LR, donde LR significa de izquierda a derecha, y es lo que hace que el recorrido cliente, edge, aplicacion, datos se lea como un flujo y no como una torre.</a:t>
+            </a:r>
+          </a:p>
+          <a:p/>
+          <a:p>
+            <a:r>
+              <a:t>Vale la pena senalar la caja de la base de datos y decir «esta forma, dentro de este subgraph, son 4 de los 14 puntos».</a:t>
+            </a:r>
+          </a:p>
+          <a:p/>
+          <a:p>
+            <a:r>
+              <a:t>Dos advertencias practicas.</a:t>
+            </a:r>
+          </a:p>
+          <a:p/>
+          <a:p>
+            <a:r>
+              <a:t>Sirven para dejar una nota al evaluador, no para responder.</a:t>
+            </a:r>
+          </a:p>
+        </p:txBody>
+      </p:sp>
+      <p:sp>
+        <p:nvSpPr>
+          <p:cNvPr id="4" name="Slide Number Placeholder 3"/>
+          <p:cNvSpPr>
+            <a:spLocks noGrp="1"/>
+          </p:cNvSpPr>
+          <p:nvPr>
+            <p:ph type="sldNum" idx="5" sz="quarter"/>
+          </p:nvPr>
+        </p:nvSpPr>
+        <p:spPr/>
+      </p:sp>
+    </p:spTree>
+  </p:cSld>
+  <p:clrMapOvr>
+    <a:masterClrMapping/>
+  </p:clrMapOvr>
+</p:notes>
+</file>
+
+<file path=ppt/notesSlides/notesSlide9.xml><?xml version="1.0" encoding="utf-8"?>
+<p:notes xmlns:a="http://schemas.openxmlformats.org/drawingml/2006/main" xmlns:p="http://schemas.openxmlformats.org/presentationml/2006/main" xmlns:r="http://schemas.openxmlformats.org/officeDocument/2006/relationships">
+  <p:cSld>
+    <p:spTree>
+      <p:nvGrpSpPr>
+        <p:cNvPr id="1" name=""/>
+        <p:cNvGrpSpPr/>
+        <p:nvPr/>
+      </p:nvGrpSpPr>
+      <p:grpSpPr>
+        <a:xfrm>
+          <a:off x="0" y="0"/>
+          <a:ext cx="0" cy="0"/>
+          <a:chOff x="0" y="0"/>
+          <a:chExt cx="0" cy="0"/>
+        </a:xfrm>
+      </p:grpSpPr>
+      <p:sp>
+        <p:nvSpPr>
+          <p:cNvPr id="2" name="Slide Image Placeholder 1"/>
+          <p:cNvSpPr>
+            <a:spLocks noGrp="1"/>
+          </p:cNvSpPr>
+          <p:nvPr>
+            <p:ph type="sldImg" idx="2"/>
+          </p:nvPr>
+        </p:nvSpPr>
+        <p:spPr/>
+      </p:sp>
+      <p:sp>
+        <p:nvSpPr>
+          <p:cNvPr id="3" name="Notes Placeholder 2"/>
+          <p:cNvSpPr>
+            <a:spLocks noGrp="1"/>
+          </p:cNvSpPr>
+          <p:nvPr>
+            <p:ph type="body" idx="3" sz="quarter"/>
+          </p:nvPr>
+        </p:nvSpPr>
+        <p:spPr/>
+        <p:txBody>
+          <a:bodyPr/>
+          <a:lstStyle/>
+          <a:p>
+            <a:r>
+              <a:t>Estas cuatro aparecen todos los semestres y las cuatro se responden con material que ya esta proyectado.</a:t>
+            </a:r>
+          </a:p>
+          <a:p/>
+          <a:p>
+            <a:r>
+              <a:t>Si un desarrollador necesita entrar, se hace por un unico host intermedio controlado, llamado bastion.</a:t>
+            </a:r>
+          </a:p>
+          <a:p/>
+          <a:p>
+            <a:r>
+              <a:t>Por eso las zonas se llaman Publica, Privada y Datos.</a:t>
+            </a:r>
+          </a:p>
+          <a:p/>
+          <a:p>
+            <a:r>
+              <a:t>El PNG exportado va a la carpeta del Proyecto Integrador, para el informe, y no reemplaza la respuesta.</a:t>
+            </a:r>
+          </a:p>
+        </p:txBody>
+      </p:sp>
+      <p:sp>
+        <p:nvSpPr>
+          <p:cNvPr id="4" name="Slide Number Placeholder 3"/>
+          <p:cNvSpPr>
+            <a:spLocks noGrp="1"/>
+          </p:cNvSpPr>
+          <p:nvPr>
+            <p:ph type="sldNum" idx="5" sz="quarter"/>
+          </p:nvPr>
+        </p:nvSpPr>
+        <p:spPr/>
+      </p:sp>
+    </p:spTree>
+  </p:cSld>
+  <p:clrMapOvr>
+    <a:masterClrMapping/>
+  </p:clrMapOvr>
+</p:notes>
 </file>
 
 <file path=ppt/slideLayouts/slideLayout1.xml><?xml version="1.0" encoding="utf-8"?>
@@ -3356,13 +4397,22 @@
               </a:spcAft>
             </a:pPr>
             <a:r>
+              <a:rPr sz="1500" b="0" i="0">
+                <a:solidFill>
+                  <a:srgbClr val="333333"/>
+                </a:solidFill>
+                <a:latin typeface="Calibri"/>
+              </a:rPr>
+              <a:t>Bloque </a:t>
+            </a:r>
+            <a:r>
               <a:rPr sz="1500" b="1" i="0">
                 <a:solidFill>
                   <a:srgbClr val="333333"/>
                 </a:solidFill>
                 <a:latin typeface="Calibri"/>
               </a:rPr>
-              <a:t>Hoy avanzamos el PI en:</a:t>
+              <a:t>120 min</a:t>
             </a:r>
             <a:r>
               <a:rPr sz="1500" b="0" i="0">
@@ -3371,7 +4421,25 @@
                 </a:solidFill>
                 <a:latin typeface="Calibri"/>
               </a:rPr>
-              <a:t> Diagrama de despliegue: red, zonas, almacenamiento</a:t>
+              <a:t> · sesión </a:t>
+            </a:r>
+            <a:r>
+              <a:rPr sz="1500" b="1" i="0">
+                <a:solidFill>
+                  <a:srgbClr val="333333"/>
+                </a:solidFill>
+                <a:latin typeface="Calibri"/>
+              </a:rPr>
+              <a:t>virtual síncrona</a:t>
+            </a:r>
+            <a:r>
+              <a:rPr sz="1500" b="0" i="0">
+                <a:solidFill>
+                  <a:srgbClr val="333333"/>
+                </a:solidFill>
+                <a:latin typeface="Calibri"/>
+              </a:rPr>
+              <a:t> por Google Meet.</a:t>
             </a:r>
           </a:p>
           <a:p>
@@ -3387,41 +4455,7 @@
                 </a:solidFill>
                 <a:latin typeface="Calibri"/>
               </a:rPr>
-              <a:t>Bloque </a:t>
-            </a:r>
-            <a:r>
-              <a:rPr sz="1500" b="1" i="0">
-                <a:solidFill>
-                  <a:srgbClr val="333333"/>
-                </a:solidFill>
-                <a:latin typeface="Calibri"/>
-              </a:rPr>
-              <a:t>120 min</a:t>
-            </a:r>
-            <a:r>
-              <a:rPr sz="1500" b="0" i="0">
-                <a:solidFill>
-                  <a:srgbClr val="333333"/>
-                </a:solidFill>
-                <a:latin typeface="Calibri"/>
-              </a:rPr>
-              <a:t> · Teoría breve · Taller PI · cierre.</a:t>
-            </a:r>
-          </a:p>
-          <a:p>
-            <a:pPr>
-              <a:spcAft>
-                <a:spcPts val="800"/>
-              </a:spcAft>
-            </a:pPr>
-            <a:r>
-              <a:rPr sz="1500" b="0" i="0">
-                <a:solidFill>
-                  <a:srgbClr val="333333"/>
-                </a:solidFill>
-                <a:latin typeface="Calibri"/>
-              </a:rPr>
-              <a:t>Herramientas gratis + navegador · sin AWS/GCP/Oracle Cloud.</a:t>
+              <a:t>Conceptos del tema, ejemplos resueltos sobre CloudLite y cierre conceptual.</a:t>
             </a:r>
           </a:p>
         </p:txBody>
@@ -6323,7 +7357,7 @@
                 </a:solidFill>
                 <a:latin typeface="Calibri"/>
               </a:rPr>
-              <a:t> Encuadre: hoy avanzamos el PI en… + entregable concreto.</a:t>
+              <a:t> Encuadre del tema y objetivos de la clase.</a:t>
             </a:r>
           </a:p>
           <a:p>
@@ -6339,7 +7373,7 @@
                 </a:solidFill>
                 <a:latin typeface="Calibri"/>
               </a:rPr>
-              <a:t>10–40</a:t>
+              <a:t>10–70</a:t>
             </a:r>
             <a:r>
               <a:rPr sz="2000" b="0" i="0">
@@ -6348,7 +7382,7 @@
                 </a:solidFill>
                 <a:latin typeface="Calibri"/>
               </a:rPr>
-              <a:t> Teoría Core breve (solo lo necesario para el taller PI).</a:t>
+              <a:t> Conceptos del tema, uno por lámina, con ejemplos sobre CloudLite.</a:t>
             </a:r>
           </a:p>
           <a:p>
@@ -6373,7 +7407,7 @@
                 </a:solidFill>
                 <a:latin typeface="Calibri"/>
               </a:rPr>
-              <a:t>40–100</a:t>
+              <a:t>70–100</a:t>
             </a:r>
             <a:r>
               <a:rPr sz="2000" b="0" i="0">
@@ -6382,7 +7416,7 @@
                 </a:solidFill>
                 <a:latin typeface="Calibri"/>
               </a:rPr>
-              <a:t> Trabajo guiado del PI (demo en vivo + avance individual).</a:t>
+              <a:t> Ejemplos resueltos y demo del docente sobre el tema.</a:t>
             </a:r>
           </a:p>
           <a:p>
@@ -6407,7 +7441,7 @@
                 </a:solidFill>
                 <a:latin typeface="Calibri"/>
               </a:rPr>
-              <a:t> Revisión de evidencias del PI.</a:t>
+              <a:t> Práctica (opcional, guía en la carpeta de la clase).</a:t>
             </a:r>
           </a:p>
           <a:p>
@@ -6432,7 +7466,7 @@
                 </a:solidFill>
                 <a:latin typeface="Calibri"/>
               </a:rPr>
-              <a:t> Cierre: criterio de éxito + plazo en la fecha que indique el docente.</a:t>
+              <a:t> Preguntas y cierre conceptual.</a:t>
             </a:r>
           </a:p>
         </p:txBody>
@@ -11811,13 +12845,13 @@
         <p:spPr>
           <a:xfrm>
             <a:off x="0" y="0"/>
-            <a:ext cx="12191695" cy="1170432"/>
+            <a:ext cx="12191695" cy="164592"/>
           </a:xfrm>
           <a:prstGeom prst="rect">
             <a:avLst/>
           </a:prstGeom>
           <a:solidFill>
-            <a:srgbClr val="095292"/>
+            <a:srgbClr val="269CCB"/>
           </a:solidFill>
           <a:ln>
             <a:noFill/>
@@ -11845,251 +12879,9 @@
           </a:p>
         </p:txBody>
       </p:sp>
-      <p:sp>
-        <p:nvSpPr>
-          <p:cNvPr id="3" name="Rectangle 2"/>
-          <p:cNvSpPr/>
-          <p:nvPr/>
-        </p:nvSpPr>
-        <p:spPr>
-          <a:xfrm>
-            <a:off x="0" y="1170432"/>
-            <a:ext cx="12191695" cy="41148"/>
-          </a:xfrm>
-          <a:prstGeom prst="rect">
-            <a:avLst/>
-          </a:prstGeom>
-          <a:solidFill>
-            <a:srgbClr val="FFD000"/>
-          </a:solidFill>
-          <a:ln>
-            <a:noFill/>
-          </a:ln>
-        </p:spPr>
-        <p:style>
-          <a:lnRef idx="1">
-            <a:schemeClr val="accent1"/>
-          </a:lnRef>
-          <a:fillRef idx="3">
-            <a:schemeClr val="accent1"/>
-          </a:fillRef>
-          <a:effectRef idx="2">
-            <a:schemeClr val="accent1"/>
-          </a:effectRef>
-          <a:fontRef idx="minor">
-            <a:schemeClr val="lt1"/>
-          </a:fontRef>
-        </p:style>
-        <p:txBody>
-          <a:bodyPr rtlCol="0" anchor="ctr"/>
-          <a:lstStyle/>
-          <a:p>
-            <a:pPr algn="ctr"/>
-          </a:p>
-        </p:txBody>
-      </p:sp>
-      <p:sp>
-        <p:nvSpPr>
-          <p:cNvPr id="4" name="TextBox 3"/>
-          <p:cNvSpPr txBox="1"/>
-          <p:nvPr/>
-        </p:nvSpPr>
-        <p:spPr>
-          <a:xfrm>
-            <a:off x="457200" y="164592"/>
-            <a:ext cx="11277295" cy="384048"/>
-          </a:xfrm>
-          <a:prstGeom prst="rect">
-            <a:avLst/>
-          </a:prstGeom>
-          <a:noFill/>
-        </p:spPr>
-        <p:txBody>
-          <a:bodyPr wrap="square">
-            <a:spAutoFit/>
-          </a:bodyPr>
-          <a:lstStyle/>
-          <a:p>
-            <a:r>
-              <a:rPr sz="2600" b="1" i="0">
-                <a:solidFill>
-                  <a:srgbClr val="FFFFFF"/>
-                </a:solidFill>
-                <a:latin typeface="Calibri"/>
-              </a:rPr>
-              <a:t>Herramientas de hoy</a:t>
-            </a:r>
-          </a:p>
-        </p:txBody>
-      </p:sp>
-      <p:sp>
-        <p:nvSpPr>
-          <p:cNvPr id="5" name="TextBox 4"/>
-          <p:cNvSpPr txBox="1"/>
-          <p:nvPr/>
-        </p:nvSpPr>
-        <p:spPr>
-          <a:xfrm>
-            <a:off x="457200" y="566928"/>
-            <a:ext cx="11277295" cy="411480"/>
-          </a:xfrm>
-          <a:prstGeom prst="rect">
-            <a:avLst/>
-          </a:prstGeom>
-          <a:noFill/>
-        </p:spPr>
-        <p:txBody>
-          <a:bodyPr wrap="square">
-            <a:spAutoFit/>
-          </a:bodyPr>
-          <a:lstStyle/>
-          <a:p>
-            <a:r>
-              <a:rPr sz="1400" b="0" i="0">
-                <a:solidFill>
-                  <a:srgbClr val="B8D8EE"/>
-                </a:solidFill>
-                <a:latin typeface="Calibri"/>
-              </a:rPr>
-              <a:t>Gratis · navegador o free tier · sin cuenta de pago</a:t>
-            </a:r>
-          </a:p>
-        </p:txBody>
-      </p:sp>
-      <p:sp>
-        <p:nvSpPr>
-          <p:cNvPr id="6" name="Rounded Rectangle 5"/>
-          <p:cNvSpPr/>
-          <p:nvPr/>
-        </p:nvSpPr>
-        <p:spPr>
-          <a:xfrm>
-            <a:off x="457200" y="1591056"/>
-            <a:ext cx="3624986" cy="2299716"/>
-          </a:xfrm>
-          <a:prstGeom prst="roundRect">
-            <a:avLst>
-              <a:gd name="adj" fmla="val 12000"/>
-            </a:avLst>
-          </a:prstGeom>
-          <a:solidFill>
-            <a:srgbClr val="F2F2F2"/>
-          </a:solidFill>
-          <a:ln>
-            <a:noFill/>
-          </a:ln>
-        </p:spPr>
-        <p:style>
-          <a:lnRef idx="1">
-            <a:schemeClr val="accent1"/>
-          </a:lnRef>
-          <a:fillRef idx="3">
-            <a:schemeClr val="accent1"/>
-          </a:fillRef>
-          <a:effectRef idx="2">
-            <a:schemeClr val="accent1"/>
-          </a:effectRef>
-          <a:fontRef idx="minor">
-            <a:schemeClr val="lt1"/>
-          </a:fontRef>
-        </p:style>
-        <p:txBody>
-          <a:bodyPr rtlCol="0" anchor="ctr"/>
-          <a:lstStyle/>
-          <a:p>
-            <a:pPr algn="ctr"/>
-          </a:p>
-        </p:txBody>
-      </p:sp>
-      <p:sp>
-        <p:nvSpPr>
-          <p:cNvPr id="7" name="Rectangle 6"/>
-          <p:cNvSpPr/>
-          <p:nvPr/>
-        </p:nvSpPr>
-        <p:spPr>
-          <a:xfrm>
-            <a:off x="457200" y="1591056"/>
-            <a:ext cx="3624986" cy="64008"/>
-          </a:xfrm>
-          <a:prstGeom prst="rect">
-            <a:avLst/>
-          </a:prstGeom>
-          <a:solidFill>
-            <a:srgbClr val="095292"/>
-          </a:solidFill>
-          <a:ln>
-            <a:noFill/>
-          </a:ln>
-        </p:spPr>
-        <p:style>
-          <a:lnRef idx="1">
-            <a:schemeClr val="accent1"/>
-          </a:lnRef>
-          <a:fillRef idx="3">
-            <a:schemeClr val="accent1"/>
-          </a:fillRef>
-          <a:effectRef idx="2">
-            <a:schemeClr val="accent1"/>
-          </a:effectRef>
-          <a:fontRef idx="minor">
-            <a:schemeClr val="lt1"/>
-          </a:fontRef>
-        </p:style>
-        <p:txBody>
-          <a:bodyPr rtlCol="0" anchor="ctr"/>
-          <a:lstStyle/>
-          <a:p>
-            <a:pPr algn="ctr"/>
-          </a:p>
-        </p:txBody>
-      </p:sp>
-      <p:sp>
-        <p:nvSpPr>
-          <p:cNvPr id="8" name="Rectangle 7"/>
-          <p:cNvSpPr/>
-          <p:nvPr/>
-        </p:nvSpPr>
-        <p:spPr>
-          <a:xfrm>
-            <a:off x="457200" y="1655064"/>
-            <a:ext cx="3624986" cy="27432"/>
-          </a:xfrm>
-          <a:prstGeom prst="rect">
-            <a:avLst/>
-          </a:prstGeom>
-          <a:solidFill>
-            <a:srgbClr val="FFD000"/>
-          </a:solidFill>
-          <a:ln>
-            <a:noFill/>
-          </a:ln>
-        </p:spPr>
-        <p:style>
-          <a:lnRef idx="1">
-            <a:schemeClr val="accent1"/>
-          </a:lnRef>
-          <a:fillRef idx="3">
-            <a:schemeClr val="accent1"/>
-          </a:fillRef>
-          <a:effectRef idx="2">
-            <a:schemeClr val="accent1"/>
-          </a:effectRef>
-          <a:fontRef idx="minor">
-            <a:schemeClr val="lt1"/>
-          </a:fontRef>
-        </p:style>
-        <p:txBody>
-          <a:bodyPr rtlCol="0" anchor="ctr"/>
-          <a:lstStyle/>
-          <a:p>
-            <a:pPr algn="ctr"/>
-          </a:p>
-        </p:txBody>
-      </p:sp>
       <p:pic>
         <p:nvPicPr>
-          <p:cNvPr id="9" name="Picture 8" descr="drawio.png"/>
+          <p:cNvPr id="3" name="Picture 2" descr="logo_uniajc_color.png"/>
           <p:cNvPicPr>
             <a:picLocks noChangeAspect="1"/>
           </p:cNvPicPr>
@@ -12103,8 +12895,8 @@
         </p:blipFill>
         <p:spPr>
           <a:xfrm>
-            <a:off x="1659331" y="1847087"/>
-            <a:ext cx="1220724" cy="1220724"/>
+            <a:off x="10271455" y="5998464"/>
+            <a:ext cx="1463040" cy="643233"/>
           </a:xfrm>
           <a:prstGeom prst="rect">
             <a:avLst/>
@@ -12113,14 +12905,14 @@
       </p:pic>
       <p:sp>
         <p:nvSpPr>
-          <p:cNvPr id="10" name="TextBox 9"/>
+          <p:cNvPr id="4" name="TextBox 3"/>
           <p:cNvSpPr txBox="1"/>
           <p:nvPr/>
         </p:nvSpPr>
         <p:spPr>
           <a:xfrm>
-            <a:off x="530352" y="3159251"/>
-            <a:ext cx="3478682" cy="621792"/>
+            <a:off x="457200" y="1737360"/>
+            <a:ext cx="11277295" cy="1097280"/>
           </a:xfrm>
           <a:prstGeom prst="rect">
             <a:avLst/>
@@ -12128,660 +12920,32 @@
           <a:noFill/>
         </p:spPr>
         <p:txBody>
-          <a:bodyPr wrap="square" anchor="t"/>
+          <a:bodyPr wrap="square" anchor="ctr"/>
           <a:lstStyle/>
           <a:p>
             <a:pPr algn="ctr"/>
             <a:r>
-              <a:rPr sz="1300" b="1" i="0">
+              <a:rPr sz="3400" b="1" i="0">
                 <a:solidFill>
                   <a:srgbClr val="095292"/>
                 </a:solidFill>
                 <a:latin typeface="Calibri"/>
               </a:rPr>
-              <a:t>draw.io</a:t>
-            </a:r>
-          </a:p>
-          <a:p>
-            <a:pPr algn="ctr">
-              <a:spcBef>
-                <a:spcPts val="200"/>
-              </a:spcBef>
-            </a:pPr>
-            <a:r>
-              <a:rPr sz="1000" b="0" i="0">
-                <a:solidFill>
-                  <a:srgbClr val="666666"/>
-                </a:solidFill>
-                <a:latin typeface="Calibri"/>
-              </a:rPr>
-              <a:t>Deployment</a:t>
-            </a:r>
-          </a:p>
-        </p:txBody>
-      </p:sp>
-      <p:sp>
-        <p:nvSpPr>
-          <p:cNvPr id="11" name="Rounded Rectangle 10"/>
-          <p:cNvSpPr/>
-          <p:nvPr/>
-        </p:nvSpPr>
-        <p:spPr>
-          <a:xfrm>
-            <a:off x="4283354" y="1591056"/>
-            <a:ext cx="3624986" cy="2299716"/>
-          </a:xfrm>
-          <a:prstGeom prst="roundRect">
-            <a:avLst>
-              <a:gd name="adj" fmla="val 12000"/>
-            </a:avLst>
-          </a:prstGeom>
-          <a:solidFill>
-            <a:srgbClr val="F2F2F2"/>
-          </a:solidFill>
-          <a:ln>
-            <a:noFill/>
-          </a:ln>
-        </p:spPr>
-        <p:style>
-          <a:lnRef idx="1">
-            <a:schemeClr val="accent1"/>
-          </a:lnRef>
-          <a:fillRef idx="3">
-            <a:schemeClr val="accent1"/>
-          </a:fillRef>
-          <a:effectRef idx="2">
-            <a:schemeClr val="accent1"/>
-          </a:effectRef>
-          <a:fontRef idx="minor">
-            <a:schemeClr val="lt1"/>
-          </a:fontRef>
-        </p:style>
-        <p:txBody>
-          <a:bodyPr rtlCol="0" anchor="ctr"/>
-          <a:lstStyle/>
-          <a:p>
-            <a:pPr algn="ctr"/>
-          </a:p>
-        </p:txBody>
-      </p:sp>
-      <p:sp>
-        <p:nvSpPr>
-          <p:cNvPr id="12" name="Rectangle 11"/>
-          <p:cNvSpPr/>
-          <p:nvPr/>
-        </p:nvSpPr>
-        <p:spPr>
-          <a:xfrm>
-            <a:off x="4283354" y="1591056"/>
-            <a:ext cx="3624986" cy="64008"/>
-          </a:xfrm>
-          <a:prstGeom prst="rect">
-            <a:avLst/>
-          </a:prstGeom>
-          <a:solidFill>
-            <a:srgbClr val="095292"/>
-          </a:solidFill>
-          <a:ln>
-            <a:noFill/>
-          </a:ln>
-        </p:spPr>
-        <p:style>
-          <a:lnRef idx="1">
-            <a:schemeClr val="accent1"/>
-          </a:lnRef>
-          <a:fillRef idx="3">
-            <a:schemeClr val="accent1"/>
-          </a:fillRef>
-          <a:effectRef idx="2">
-            <a:schemeClr val="accent1"/>
-          </a:effectRef>
-          <a:fontRef idx="minor">
-            <a:schemeClr val="lt1"/>
-          </a:fontRef>
-        </p:style>
-        <p:txBody>
-          <a:bodyPr rtlCol="0" anchor="ctr"/>
-          <a:lstStyle/>
-          <a:p>
-            <a:pPr algn="ctr"/>
-          </a:p>
-        </p:txBody>
-      </p:sp>
-      <p:sp>
-        <p:nvSpPr>
-          <p:cNvPr id="13" name="Rectangle 12"/>
-          <p:cNvSpPr/>
-          <p:nvPr/>
-        </p:nvSpPr>
-        <p:spPr>
-          <a:xfrm>
-            <a:off x="4283354" y="1655064"/>
-            <a:ext cx="3624986" cy="27432"/>
-          </a:xfrm>
-          <a:prstGeom prst="rect">
-            <a:avLst/>
-          </a:prstGeom>
-          <a:solidFill>
-            <a:srgbClr val="FFD000"/>
-          </a:solidFill>
-          <a:ln>
-            <a:noFill/>
-          </a:ln>
-        </p:spPr>
-        <p:style>
-          <a:lnRef idx="1">
-            <a:schemeClr val="accent1"/>
-          </a:lnRef>
-          <a:fillRef idx="3">
-            <a:schemeClr val="accent1"/>
-          </a:fillRef>
-          <a:effectRef idx="2">
-            <a:schemeClr val="accent1"/>
-          </a:effectRef>
-          <a:fontRef idx="minor">
-            <a:schemeClr val="lt1"/>
-          </a:fontRef>
-        </p:style>
-        <p:txBody>
-          <a:bodyPr rtlCol="0" anchor="ctr"/>
-          <a:lstStyle/>
-          <a:p>
-            <a:pPr algn="ctr"/>
-          </a:p>
-        </p:txBody>
-      </p:sp>
-      <p:pic>
-        <p:nvPicPr>
-          <p:cNvPr id="14" name="Picture 13" descr="google_docs.png"/>
-          <p:cNvPicPr>
-            <a:picLocks noChangeAspect="1"/>
-          </p:cNvPicPr>
-          <p:nvPr/>
-        </p:nvPicPr>
-        <p:blipFill>
-          <a:blip r:embed="rId3"/>
-          <a:stretch>
-            <a:fillRect/>
-          </a:stretch>
-        </p:blipFill>
-        <p:spPr>
-          <a:xfrm>
-            <a:off x="5485485" y="1847087"/>
-            <a:ext cx="1220724" cy="1220724"/>
-          </a:xfrm>
-          <a:prstGeom prst="rect">
-            <a:avLst/>
-          </a:prstGeom>
-        </p:spPr>
-      </p:pic>
-      <p:sp>
-        <p:nvSpPr>
-          <p:cNvPr id="15" name="TextBox 14"/>
+              <a:t>Clase 7 · cierre conceptual</a:t>
+            </a:r>
+          </a:p>
+        </p:txBody>
+      </p:sp>
+      <p:sp>
+        <p:nvSpPr>
+          <p:cNvPr id="5" name="TextBox 4"/>
           <p:cNvSpPr txBox="1"/>
           <p:nvPr/>
         </p:nvSpPr>
         <p:spPr>
           <a:xfrm>
-            <a:off x="4356506" y="3159251"/>
-            <a:ext cx="3478682" cy="621792"/>
-          </a:xfrm>
-          <a:prstGeom prst="rect">
-            <a:avLst/>
-          </a:prstGeom>
-          <a:noFill/>
-        </p:spPr>
-        <p:txBody>
-          <a:bodyPr wrap="square" anchor="t"/>
-          <a:lstStyle/>
-          <a:p>
-            <a:pPr algn="ctr"/>
-            <a:r>
-              <a:rPr sz="1300" b="1" i="0">
-                <a:solidFill>
-                  <a:srgbClr val="095292"/>
-                </a:solidFill>
-                <a:latin typeface="Calibri"/>
-              </a:rPr>
-              <a:t>Google Docs</a:t>
-            </a:r>
-          </a:p>
-          <a:p>
-            <a:pPr algn="ctr">
-              <a:spcBef>
-                <a:spcPts val="200"/>
-              </a:spcBef>
-            </a:pPr>
-            <a:r>
-              <a:rPr sz="1000" b="0" i="0">
-                <a:solidFill>
-                  <a:srgbClr val="666666"/>
-                </a:solidFill>
-                <a:latin typeface="Calibri"/>
-              </a:rPr>
-              <a:t>Informe PI</a:t>
-            </a:r>
-          </a:p>
-        </p:txBody>
-      </p:sp>
-      <p:sp>
-        <p:nvSpPr>
-          <p:cNvPr id="16" name="Rounded Rectangle 15"/>
-          <p:cNvSpPr/>
-          <p:nvPr/>
-        </p:nvSpPr>
-        <p:spPr>
-          <a:xfrm>
-            <a:off x="8109508" y="1591056"/>
-            <a:ext cx="3624986" cy="2299716"/>
-          </a:xfrm>
-          <a:prstGeom prst="roundRect">
-            <a:avLst>
-              <a:gd name="adj" fmla="val 12000"/>
-            </a:avLst>
-          </a:prstGeom>
-          <a:solidFill>
-            <a:srgbClr val="F2F2F2"/>
-          </a:solidFill>
-          <a:ln>
-            <a:noFill/>
-          </a:ln>
-        </p:spPr>
-        <p:style>
-          <a:lnRef idx="1">
-            <a:schemeClr val="accent1"/>
-          </a:lnRef>
-          <a:fillRef idx="3">
-            <a:schemeClr val="accent1"/>
-          </a:fillRef>
-          <a:effectRef idx="2">
-            <a:schemeClr val="accent1"/>
-          </a:effectRef>
-          <a:fontRef idx="minor">
-            <a:schemeClr val="lt1"/>
-          </a:fontRef>
-        </p:style>
-        <p:txBody>
-          <a:bodyPr rtlCol="0" anchor="ctr"/>
-          <a:lstStyle/>
-          <a:p>
-            <a:pPr algn="ctr"/>
-          </a:p>
-        </p:txBody>
-      </p:sp>
-      <p:sp>
-        <p:nvSpPr>
-          <p:cNvPr id="17" name="Rectangle 16"/>
-          <p:cNvSpPr/>
-          <p:nvPr/>
-        </p:nvSpPr>
-        <p:spPr>
-          <a:xfrm>
-            <a:off x="8109508" y="1591056"/>
-            <a:ext cx="3624986" cy="64008"/>
-          </a:xfrm>
-          <a:prstGeom prst="rect">
-            <a:avLst/>
-          </a:prstGeom>
-          <a:solidFill>
-            <a:srgbClr val="095292"/>
-          </a:solidFill>
-          <a:ln>
-            <a:noFill/>
-          </a:ln>
-        </p:spPr>
-        <p:style>
-          <a:lnRef idx="1">
-            <a:schemeClr val="accent1"/>
-          </a:lnRef>
-          <a:fillRef idx="3">
-            <a:schemeClr val="accent1"/>
-          </a:fillRef>
-          <a:effectRef idx="2">
-            <a:schemeClr val="accent1"/>
-          </a:effectRef>
-          <a:fontRef idx="minor">
-            <a:schemeClr val="lt1"/>
-          </a:fontRef>
-        </p:style>
-        <p:txBody>
-          <a:bodyPr rtlCol="0" anchor="ctr"/>
-          <a:lstStyle/>
-          <a:p>
-            <a:pPr algn="ctr"/>
-          </a:p>
-        </p:txBody>
-      </p:sp>
-      <p:sp>
-        <p:nvSpPr>
-          <p:cNvPr id="18" name="Rectangle 17"/>
-          <p:cNvSpPr/>
-          <p:nvPr/>
-        </p:nvSpPr>
-        <p:spPr>
-          <a:xfrm>
-            <a:off x="8109508" y="1655064"/>
-            <a:ext cx="3624986" cy="27432"/>
-          </a:xfrm>
-          <a:prstGeom prst="rect">
-            <a:avLst/>
-          </a:prstGeom>
-          <a:solidFill>
-            <a:srgbClr val="FFD000"/>
-          </a:solidFill>
-          <a:ln>
-            <a:noFill/>
-          </a:ln>
-        </p:spPr>
-        <p:style>
-          <a:lnRef idx="1">
-            <a:schemeClr val="accent1"/>
-          </a:lnRef>
-          <a:fillRef idx="3">
-            <a:schemeClr val="accent1"/>
-          </a:fillRef>
-          <a:effectRef idx="2">
-            <a:schemeClr val="accent1"/>
-          </a:effectRef>
-          <a:fontRef idx="minor">
-            <a:schemeClr val="lt1"/>
-          </a:fontRef>
-        </p:style>
-        <p:txBody>
-          <a:bodyPr rtlCol="0" anchor="ctr"/>
-          <a:lstStyle/>
-          <a:p>
-            <a:pPr algn="ctr"/>
-          </a:p>
-        </p:txBody>
-      </p:sp>
-      <p:pic>
-        <p:nvPicPr>
-          <p:cNvPr id="19" name="Picture 18" descr="mermaid.png"/>
-          <p:cNvPicPr>
-            <a:picLocks noChangeAspect="1"/>
-          </p:cNvPicPr>
-          <p:nvPr/>
-        </p:nvPicPr>
-        <p:blipFill>
-          <a:blip r:embed="rId4"/>
-          <a:stretch>
-            <a:fillRect/>
-          </a:stretch>
-        </p:blipFill>
-        <p:spPr>
-          <a:xfrm>
-            <a:off x="9311640" y="1847087"/>
-            <a:ext cx="1220724" cy="1220724"/>
-          </a:xfrm>
-          <a:prstGeom prst="rect">
-            <a:avLst/>
-          </a:prstGeom>
-        </p:spPr>
-      </p:pic>
-      <p:sp>
-        <p:nvSpPr>
-          <p:cNvPr id="20" name="TextBox 19"/>
-          <p:cNvSpPr txBox="1"/>
-          <p:nvPr/>
-        </p:nvSpPr>
-        <p:spPr>
-          <a:xfrm>
-            <a:off x="8182660" y="3159251"/>
-            <a:ext cx="3478682" cy="621792"/>
-          </a:xfrm>
-          <a:prstGeom prst="rect">
-            <a:avLst/>
-          </a:prstGeom>
-          <a:noFill/>
-        </p:spPr>
-        <p:txBody>
-          <a:bodyPr wrap="square" anchor="t"/>
-          <a:lstStyle/>
-          <a:p>
-            <a:pPr algn="ctr"/>
-            <a:r>
-              <a:rPr sz="1300" b="1" i="0">
-                <a:solidFill>
-                  <a:srgbClr val="095292"/>
-                </a:solidFill>
-                <a:latin typeface="Calibri"/>
-              </a:rPr>
-              <a:t>Mermaid</a:t>
-            </a:r>
-          </a:p>
-          <a:p>
-            <a:pPr algn="ctr">
-              <a:spcBef>
-                <a:spcPts val="200"/>
-              </a:spcBef>
-            </a:pPr>
-            <a:r>
-              <a:rPr sz="1000" b="0" i="0">
-                <a:solidFill>
-                  <a:srgbClr val="666666"/>
-                </a:solidFill>
-                <a:latin typeface="Calibri"/>
-              </a:rPr>
-              <a:t>Codigo del diagrama</a:t>
-            </a:r>
-          </a:p>
-        </p:txBody>
-      </p:sp>
-      <p:sp>
-        <p:nvSpPr>
-          <p:cNvPr id="21" name="Rounded Rectangle 20"/>
-          <p:cNvSpPr/>
-          <p:nvPr/>
-        </p:nvSpPr>
-        <p:spPr>
-          <a:xfrm>
-            <a:off x="4283354" y="4055364"/>
-            <a:ext cx="3624986" cy="2299716"/>
-          </a:xfrm>
-          <a:prstGeom prst="roundRect">
-            <a:avLst>
-              <a:gd name="adj" fmla="val 12000"/>
-            </a:avLst>
-          </a:prstGeom>
-          <a:solidFill>
-            <a:srgbClr val="F2F2F2"/>
-          </a:solidFill>
-          <a:ln>
-            <a:noFill/>
-          </a:ln>
-        </p:spPr>
-        <p:style>
-          <a:lnRef idx="1">
-            <a:schemeClr val="accent1"/>
-          </a:lnRef>
-          <a:fillRef idx="3">
-            <a:schemeClr val="accent1"/>
-          </a:fillRef>
-          <a:effectRef idx="2">
-            <a:schemeClr val="accent1"/>
-          </a:effectRef>
-          <a:fontRef idx="minor">
-            <a:schemeClr val="lt1"/>
-          </a:fontRef>
-        </p:style>
-        <p:txBody>
-          <a:bodyPr rtlCol="0" anchor="ctr"/>
-          <a:lstStyle/>
-          <a:p>
-            <a:pPr algn="ctr"/>
-          </a:p>
-        </p:txBody>
-      </p:sp>
-      <p:sp>
-        <p:nvSpPr>
-          <p:cNvPr id="22" name="Rectangle 21"/>
-          <p:cNvSpPr/>
-          <p:nvPr/>
-        </p:nvSpPr>
-        <p:spPr>
-          <a:xfrm>
-            <a:off x="4283354" y="4055364"/>
-            <a:ext cx="3624986" cy="64008"/>
-          </a:xfrm>
-          <a:prstGeom prst="rect">
-            <a:avLst/>
-          </a:prstGeom>
-          <a:solidFill>
-            <a:srgbClr val="095292"/>
-          </a:solidFill>
-          <a:ln>
-            <a:noFill/>
-          </a:ln>
-        </p:spPr>
-        <p:style>
-          <a:lnRef idx="1">
-            <a:schemeClr val="accent1"/>
-          </a:lnRef>
-          <a:fillRef idx="3">
-            <a:schemeClr val="accent1"/>
-          </a:fillRef>
-          <a:effectRef idx="2">
-            <a:schemeClr val="accent1"/>
-          </a:effectRef>
-          <a:fontRef idx="minor">
-            <a:schemeClr val="lt1"/>
-          </a:fontRef>
-        </p:style>
-        <p:txBody>
-          <a:bodyPr rtlCol="0" anchor="ctr"/>
-          <a:lstStyle/>
-          <a:p>
-            <a:pPr algn="ctr"/>
-          </a:p>
-        </p:txBody>
-      </p:sp>
-      <p:sp>
-        <p:nvSpPr>
-          <p:cNvPr id="23" name="Rectangle 22"/>
-          <p:cNvSpPr/>
-          <p:nvPr/>
-        </p:nvSpPr>
-        <p:spPr>
-          <a:xfrm>
-            <a:off x="4283354" y="4119372"/>
-            <a:ext cx="3624986" cy="27432"/>
-          </a:xfrm>
-          <a:prstGeom prst="rect">
-            <a:avLst/>
-          </a:prstGeom>
-          <a:solidFill>
-            <a:srgbClr val="FFD000"/>
-          </a:solidFill>
-          <a:ln>
-            <a:noFill/>
-          </a:ln>
-        </p:spPr>
-        <p:style>
-          <a:lnRef idx="1">
-            <a:schemeClr val="accent1"/>
-          </a:lnRef>
-          <a:fillRef idx="3">
-            <a:schemeClr val="accent1"/>
-          </a:fillRef>
-          <a:effectRef idx="2">
-            <a:schemeClr val="accent1"/>
-          </a:effectRef>
-          <a:fontRef idx="minor">
-            <a:schemeClr val="lt1"/>
-          </a:fontRef>
-        </p:style>
-        <p:txBody>
-          <a:bodyPr rtlCol="0" anchor="ctr"/>
-          <a:lstStyle/>
-          <a:p>
-            <a:pPr algn="ctr"/>
-          </a:p>
-        </p:txBody>
-      </p:sp>
-      <p:pic>
-        <p:nvPicPr>
-          <p:cNvPr id="24" name="Picture 23" descr="examlab.png"/>
-          <p:cNvPicPr>
-            <a:picLocks noChangeAspect="1"/>
-          </p:cNvPicPr>
-          <p:nvPr/>
-        </p:nvPicPr>
-        <p:blipFill>
-          <a:blip r:embed="rId5"/>
-          <a:stretch>
-            <a:fillRect/>
-          </a:stretch>
-        </p:blipFill>
-        <p:spPr>
-          <a:xfrm>
-            <a:off x="5485485" y="4311396"/>
-            <a:ext cx="1220724" cy="1220724"/>
-          </a:xfrm>
-          <a:prstGeom prst="rect">
-            <a:avLst/>
-          </a:prstGeom>
-        </p:spPr>
-      </p:pic>
-      <p:sp>
-        <p:nvSpPr>
-          <p:cNvPr id="25" name="TextBox 24"/>
-          <p:cNvSpPr txBox="1"/>
-          <p:nvPr/>
-        </p:nvSpPr>
-        <p:spPr>
-          <a:xfrm>
-            <a:off x="4356506" y="5623560"/>
-            <a:ext cx="3478682" cy="621792"/>
-          </a:xfrm>
-          <a:prstGeom prst="rect">
-            <a:avLst/>
-          </a:prstGeom>
-          <a:noFill/>
-        </p:spPr>
-        <p:txBody>
-          <a:bodyPr wrap="square" anchor="t"/>
-          <a:lstStyle/>
-          <a:p>
-            <a:pPr algn="ctr"/>
-            <a:r>
-              <a:rPr sz="1300" b="1" i="0">
-                <a:solidFill>
-                  <a:srgbClr val="095292"/>
-                </a:solidFill>
-                <a:latin typeface="Calibri"/>
-              </a:rPr>
-              <a:t>la plataforma del curso</a:t>
-            </a:r>
-          </a:p>
-          <a:p>
-            <a:pPr algn="ctr">
-              <a:spcBef>
-                <a:spcPts val="200"/>
-              </a:spcBef>
-            </a:pPr>
-            <a:r>
-              <a:rPr sz="1000" b="0" i="0">
-                <a:solidFill>
-                  <a:srgbClr val="666666"/>
-                </a:solidFill>
-                <a:latin typeface="Calibri"/>
-              </a:rPr>
-              <a:t>Donde se entrega</a:t>
-            </a:r>
-          </a:p>
-        </p:txBody>
-      </p:sp>
-      <p:sp>
-        <p:nvSpPr>
-          <p:cNvPr id="26" name="TextBox 25"/>
-          <p:cNvSpPr txBox="1"/>
-          <p:nvPr/>
-        </p:nvSpPr>
-        <p:spPr>
-          <a:xfrm>
-            <a:off x="11185855" y="6473952"/>
-            <a:ext cx="640080" cy="274320"/>
+            <a:off x="457200" y="3017520"/>
+            <a:ext cx="11277295" cy="1645920"/>
           </a:xfrm>
           <a:prstGeom prst="rect">
             <a:avLst/>
@@ -12794,141 +12958,65 @@
           </a:bodyPr>
           <a:lstStyle/>
           <a:p>
-            <a:pPr algn="r"/>
-            <a:r>
-              <a:rPr sz="1100" b="0" i="0">
-                <a:solidFill>
-                  <a:srgbClr val="666666"/>
-                </a:solidFill>
-                <a:latin typeface="Calibri"/>
-              </a:rPr>
-              <a:t>34</a:t>
-            </a:r>
-          </a:p>
-        </p:txBody>
-      </p:sp>
-    </p:spTree>
-  </p:cSld>
-  <p:clrMapOvr>
-    <a:masterClrMapping/>
-  </p:clrMapOvr>
-</p:sld>
-</file>
-
-<file path=ppt/slides/slide35.xml><?xml version="1.0" encoding="utf-8"?>
-<p:sld xmlns:a="http://schemas.openxmlformats.org/drawingml/2006/main" xmlns:p="http://schemas.openxmlformats.org/presentationml/2006/main" xmlns:r="http://schemas.openxmlformats.org/officeDocument/2006/relationships">
-  <p:cSld>
-    <p:bg>
-      <p:bgPr>
-        <a:solidFill>
-          <a:srgbClr val="FFFFFF"/>
-        </a:solidFill>
-        <a:effectLst/>
-      </p:bgPr>
-    </p:bg>
-    <p:spTree>
-      <p:nvGrpSpPr>
-        <p:cNvPr id="1" name=""/>
-        <p:cNvGrpSpPr/>
-        <p:nvPr/>
-      </p:nvGrpSpPr>
-      <p:grpSpPr/>
-      <p:sp>
-        <p:nvSpPr>
-          <p:cNvPr id="2" name="Rectangle 1"/>
-          <p:cNvSpPr/>
-          <p:nvPr/>
-        </p:nvSpPr>
-        <p:spPr>
-          <a:xfrm>
-            <a:off x="0" y="0"/>
-            <a:ext cx="12191695" cy="1170432"/>
-          </a:xfrm>
-          <a:prstGeom prst="rect">
-            <a:avLst/>
-          </a:prstGeom>
-          <a:solidFill>
-            <a:srgbClr val="095292"/>
-          </a:solidFill>
-          <a:ln>
-            <a:noFill/>
-          </a:ln>
-        </p:spPr>
-        <p:style>
-          <a:lnRef idx="1">
-            <a:schemeClr val="accent1"/>
-          </a:lnRef>
-          <a:fillRef idx="3">
-            <a:schemeClr val="accent1"/>
-          </a:fillRef>
-          <a:effectRef idx="2">
-            <a:schemeClr val="accent1"/>
-          </a:effectRef>
-          <a:fontRef idx="minor">
-            <a:schemeClr val="lt1"/>
-          </a:fontRef>
-        </p:style>
-        <p:txBody>
-          <a:bodyPr rtlCol="0" anchor="ctr"/>
-          <a:lstStyle/>
-          <a:p>
-            <a:pPr algn="ctr"/>
-          </a:p>
-        </p:txBody>
-      </p:sp>
-      <p:sp>
-        <p:nvSpPr>
-          <p:cNvPr id="3" name="Rectangle 2"/>
-          <p:cNvSpPr/>
-          <p:nvPr/>
-        </p:nvSpPr>
-        <p:spPr>
-          <a:xfrm>
-            <a:off x="0" y="1170432"/>
-            <a:ext cx="12191695" cy="41148"/>
-          </a:xfrm>
-          <a:prstGeom prst="rect">
-            <a:avLst/>
-          </a:prstGeom>
-          <a:solidFill>
-            <a:srgbClr val="FFD000"/>
-          </a:solidFill>
-          <a:ln>
-            <a:noFill/>
-          </a:ln>
-        </p:spPr>
-        <p:style>
-          <a:lnRef idx="1">
-            <a:schemeClr val="accent1"/>
-          </a:lnRef>
-          <a:fillRef idx="3">
-            <a:schemeClr val="accent1"/>
-          </a:fillRef>
-          <a:effectRef idx="2">
-            <a:schemeClr val="accent1"/>
-          </a:effectRef>
-          <a:fontRef idx="minor">
-            <a:schemeClr val="lt1"/>
-          </a:fontRef>
-        </p:style>
-        <p:txBody>
-          <a:bodyPr rtlCol="0" anchor="ctr"/>
-          <a:lstStyle/>
-          <a:p>
-            <a:pPr algn="ctr"/>
-          </a:p>
-        </p:txBody>
-      </p:sp>
-      <p:sp>
-        <p:nvSpPr>
-          <p:cNvPr id="4" name="TextBox 3"/>
+            <a:pPr algn="ctr">
+              <a:spcAft>
+                <a:spcPts val="600"/>
+              </a:spcAft>
+            </a:pPr>
+            <a:r>
+              <a:rPr sz="1600" b="0" i="0">
+                <a:solidFill>
+                  <a:srgbClr val="333333"/>
+                </a:solidFill>
+                <a:latin typeface="Calibri"/>
+              </a:rPr>
+              <a:t>Modelar red lógica (cliente, edge, app, datos) sin VPC de pago.</a:t>
+            </a:r>
+          </a:p>
+          <a:p>
+            <a:pPr algn="ctr">
+              <a:spcAft>
+                <a:spcPts val="600"/>
+              </a:spcAft>
+            </a:pPr>
+            <a:r>
+              <a:rPr sz="1600" b="0" i="0">
+                <a:solidFill>
+                  <a:srgbClr val="333333"/>
+                </a:solidFill>
+                <a:latin typeface="Calibri"/>
+              </a:rPr>
+              <a:t>Elegir tipo de almacenamiento según el caso de uso CloudLite.</a:t>
+            </a:r>
+          </a:p>
+          <a:p>
+            <a:pPr algn="ctr">
+              <a:spcAft>
+                <a:spcPts val="600"/>
+              </a:spcAft>
+            </a:pPr>
+            <a:r>
+              <a:rPr sz="1600" b="0" i="0">
+                <a:solidFill>
+                  <a:srgbClr val="333333"/>
+                </a:solidFill>
+                <a:latin typeface="Calibri"/>
+              </a:rPr>
+              <a:t>Completar el diagrama de despliegue del PI.</a:t>
+            </a:r>
+          </a:p>
+        </p:txBody>
+      </p:sp>
+      <p:sp>
+        <p:nvSpPr>
+          <p:cNvPr id="6" name="TextBox 5"/>
           <p:cNvSpPr txBox="1"/>
           <p:nvPr/>
         </p:nvSpPr>
         <p:spPr>
           <a:xfrm>
-            <a:off x="457200" y="164592"/>
-            <a:ext cx="11277295" cy="384048"/>
+            <a:off x="457200" y="4754880"/>
+            <a:ext cx="11277295" cy="640080"/>
           </a:xfrm>
           <a:prstGeom prst="rect">
             <a:avLst/>
@@ -12941,2238 +13029,15 @@
           </a:bodyPr>
           <a:lstStyle/>
           <a:p>
-            <a:r>
-              <a:rPr sz="2600" b="1" i="0">
-                <a:solidFill>
-                  <a:srgbClr val="FFFFFF"/>
-                </a:solidFill>
-                <a:latin typeface="Calibri"/>
-              </a:rPr>
-              <a:t>Del boceto a la plataforma del curso (diagrama)</a:t>
-            </a:r>
-          </a:p>
-        </p:txBody>
-      </p:sp>
-      <p:sp>
-        <p:nvSpPr>
-          <p:cNvPr id="5" name="TextBox 4"/>
-          <p:cNvSpPr txBox="1"/>
-          <p:nvPr/>
-        </p:nvSpPr>
-        <p:spPr>
-          <a:xfrm>
-            <a:off x="457200" y="566928"/>
-            <a:ext cx="11277295" cy="411480"/>
-          </a:xfrm>
-          <a:prstGeom prst="rect">
-            <a:avLst/>
-          </a:prstGeom>
-          <a:noFill/>
-        </p:spPr>
-        <p:txBody>
-          <a:bodyPr wrap="square">
-            <a:spAutoFit/>
-          </a:bodyPr>
-          <a:lstStyle/>
-          <a:p>
-            <a:r>
-              <a:rPr sz="1400" b="0" i="0">
-                <a:solidFill>
-                  <a:srgbClr val="B8D8EE"/>
-                </a:solidFill>
-                <a:latin typeface="Calibri"/>
-              </a:rPr>
-              <a:t>El diagrama se entrega como código Mermaid en la plataforma del curso, no como imagen</a:t>
-            </a:r>
-          </a:p>
-        </p:txBody>
-      </p:sp>
-      <p:sp>
-        <p:nvSpPr>
-          <p:cNvPr id="6" name="Rounded Rectangle 5"/>
-          <p:cNvSpPr/>
-          <p:nvPr/>
-        </p:nvSpPr>
-        <p:spPr>
-          <a:xfrm>
-            <a:off x="457200" y="1659636"/>
-            <a:ext cx="11277295" cy="1051560"/>
-          </a:xfrm>
-          <a:prstGeom prst="roundRect">
-            <a:avLst>
-              <a:gd name="adj" fmla="val 12000"/>
-            </a:avLst>
-          </a:prstGeom>
-          <a:solidFill>
-            <a:srgbClr val="F2F2F2"/>
-          </a:solidFill>
-          <a:ln>
-            <a:noFill/>
-          </a:ln>
-        </p:spPr>
-        <p:style>
-          <a:lnRef idx="1">
-            <a:schemeClr val="accent1"/>
-          </a:lnRef>
-          <a:fillRef idx="3">
-            <a:schemeClr val="accent1"/>
-          </a:fillRef>
-          <a:effectRef idx="2">
-            <a:schemeClr val="accent1"/>
-          </a:effectRef>
-          <a:fontRef idx="minor">
-            <a:schemeClr val="lt1"/>
-          </a:fontRef>
-        </p:style>
-        <p:txBody>
-          <a:bodyPr rtlCol="0" anchor="ctr"/>
-          <a:lstStyle/>
-          <a:p>
             <a:pPr algn="ctr"/>
-          </a:p>
-        </p:txBody>
-      </p:sp>
-      <p:sp>
-        <p:nvSpPr>
-          <p:cNvPr id="7" name="Rounded Rectangle 6"/>
-          <p:cNvSpPr/>
-          <p:nvPr/>
-        </p:nvSpPr>
-        <p:spPr>
-          <a:xfrm>
-            <a:off x="594360" y="1965960"/>
-            <a:ext cx="438912" cy="438912"/>
-          </a:xfrm>
-          <a:prstGeom prst="roundRect">
-            <a:avLst>
-              <a:gd name="adj" fmla="val 12000"/>
-            </a:avLst>
-          </a:prstGeom>
-          <a:solidFill>
-            <a:srgbClr val="095292"/>
-          </a:solidFill>
-          <a:ln>
-            <a:noFill/>
-          </a:ln>
-        </p:spPr>
-        <p:style>
-          <a:lnRef idx="1">
-            <a:schemeClr val="accent1"/>
-          </a:lnRef>
-          <a:fillRef idx="3">
-            <a:schemeClr val="accent1"/>
-          </a:fillRef>
-          <a:effectRef idx="2">
-            <a:schemeClr val="accent1"/>
-          </a:effectRef>
-          <a:fontRef idx="minor">
-            <a:schemeClr val="lt1"/>
-          </a:fontRef>
-        </p:style>
-        <p:txBody>
-          <a:bodyPr rtlCol="0" anchor="ctr"/>
-          <a:lstStyle/>
-          <a:p>
-            <a:pPr algn="ctr"/>
-          </a:p>
-        </p:txBody>
-      </p:sp>
-      <p:sp>
-        <p:nvSpPr>
-          <p:cNvPr id="8" name="TextBox 7"/>
-          <p:cNvSpPr txBox="1"/>
-          <p:nvPr/>
-        </p:nvSpPr>
-        <p:spPr>
-          <a:xfrm>
-            <a:off x="594360" y="1965960"/>
-            <a:ext cx="438912" cy="438912"/>
-          </a:xfrm>
-          <a:prstGeom prst="rect">
-            <a:avLst/>
-          </a:prstGeom>
-          <a:noFill/>
-        </p:spPr>
-        <p:txBody>
-          <a:bodyPr wrap="square" anchor="ctr"/>
-          <a:lstStyle/>
-          <a:p>
-            <a:pPr algn="ctr"/>
-            <a:r>
-              <a:rPr sz="1600" b="1" i="0">
-                <a:solidFill>
-                  <a:srgbClr val="FFFFFF"/>
-                </a:solidFill>
-                <a:latin typeface="Calibri"/>
-              </a:rPr>
-              <a:t>1</a:t>
-            </a:r>
-          </a:p>
-        </p:txBody>
-      </p:sp>
-      <p:sp>
-        <p:nvSpPr>
-          <p:cNvPr id="9" name="TextBox 8"/>
-          <p:cNvSpPr txBox="1"/>
-          <p:nvPr/>
-        </p:nvSpPr>
-        <p:spPr>
-          <a:xfrm>
-            <a:off x="1188720" y="1751076"/>
-            <a:ext cx="10271455" cy="886968"/>
-          </a:xfrm>
-          <a:prstGeom prst="rect">
-            <a:avLst/>
-          </a:prstGeom>
-          <a:noFill/>
-        </p:spPr>
-        <p:txBody>
-          <a:bodyPr wrap="square" anchor="ctr"/>
-          <a:lstStyle/>
-          <a:p>
-            <a:r>
-              <a:rPr sz="1500" b="1" i="0">
-                <a:solidFill>
-                  <a:srgbClr val="095292"/>
-                </a:solidFill>
-                <a:latin typeface="Calibri"/>
-              </a:rPr>
-              <a:t>Disena visual</a:t>
-            </a:r>
-          </a:p>
-          <a:p>
-            <a:pPr>
-              <a:spcBef>
-                <a:spcPts val="200"/>
-              </a:spcBef>
-            </a:pPr>
-            <a:r>
-              <a:rPr sz="1300" b="0" i="0">
-                <a:solidFill>
-                  <a:srgbClr val="333333"/>
-                </a:solidFill>
-                <a:latin typeface="Calibri"/>
-              </a:rPr>
-              <a:t>Dibuja el diagrama como quieras en Excalidraw o draw.io: es mas rapido arrastrar cajas que escribir codigo, y ahi es donde piensas el modelo.</a:t>
-            </a:r>
-          </a:p>
-        </p:txBody>
-      </p:sp>
-      <p:sp>
-        <p:nvSpPr>
-          <p:cNvPr id="10" name="Rounded Rectangle 9"/>
-          <p:cNvSpPr/>
-          <p:nvPr/>
-        </p:nvSpPr>
-        <p:spPr>
-          <a:xfrm>
-            <a:off x="457200" y="2802636"/>
-            <a:ext cx="11277295" cy="1051560"/>
-          </a:xfrm>
-          <a:prstGeom prst="roundRect">
-            <a:avLst>
-              <a:gd name="adj" fmla="val 12000"/>
-            </a:avLst>
-          </a:prstGeom>
-          <a:solidFill>
-            <a:srgbClr val="E8F4FA"/>
-          </a:solidFill>
-          <a:ln>
-            <a:noFill/>
-          </a:ln>
-        </p:spPr>
-        <p:style>
-          <a:lnRef idx="1">
-            <a:schemeClr val="accent1"/>
-          </a:lnRef>
-          <a:fillRef idx="3">
-            <a:schemeClr val="accent1"/>
-          </a:fillRef>
-          <a:effectRef idx="2">
-            <a:schemeClr val="accent1"/>
-          </a:effectRef>
-          <a:fontRef idx="minor">
-            <a:schemeClr val="lt1"/>
-          </a:fontRef>
-        </p:style>
-        <p:txBody>
-          <a:bodyPr rtlCol="0" anchor="ctr"/>
-          <a:lstStyle/>
-          <a:p>
-            <a:pPr algn="ctr"/>
-          </a:p>
-        </p:txBody>
-      </p:sp>
-      <p:sp>
-        <p:nvSpPr>
-          <p:cNvPr id="11" name="Rounded Rectangle 10"/>
-          <p:cNvSpPr/>
-          <p:nvPr/>
-        </p:nvSpPr>
-        <p:spPr>
-          <a:xfrm>
-            <a:off x="594360" y="3108960"/>
-            <a:ext cx="438912" cy="438912"/>
-          </a:xfrm>
-          <a:prstGeom prst="roundRect">
-            <a:avLst>
-              <a:gd name="adj" fmla="val 12000"/>
-            </a:avLst>
-          </a:prstGeom>
-          <a:solidFill>
-            <a:srgbClr val="095292"/>
-          </a:solidFill>
-          <a:ln>
-            <a:noFill/>
-          </a:ln>
-        </p:spPr>
-        <p:style>
-          <a:lnRef idx="1">
-            <a:schemeClr val="accent1"/>
-          </a:lnRef>
-          <a:fillRef idx="3">
-            <a:schemeClr val="accent1"/>
-          </a:fillRef>
-          <a:effectRef idx="2">
-            <a:schemeClr val="accent1"/>
-          </a:effectRef>
-          <a:fontRef idx="minor">
-            <a:schemeClr val="lt1"/>
-          </a:fontRef>
-        </p:style>
-        <p:txBody>
-          <a:bodyPr rtlCol="0" anchor="ctr"/>
-          <a:lstStyle/>
-          <a:p>
-            <a:pPr algn="ctr"/>
-          </a:p>
-        </p:txBody>
-      </p:sp>
-      <p:sp>
-        <p:nvSpPr>
-          <p:cNvPr id="12" name="TextBox 11"/>
-          <p:cNvSpPr txBox="1"/>
-          <p:nvPr/>
-        </p:nvSpPr>
-        <p:spPr>
-          <a:xfrm>
-            <a:off x="594360" y="3108960"/>
-            <a:ext cx="438912" cy="438912"/>
-          </a:xfrm>
-          <a:prstGeom prst="rect">
-            <a:avLst/>
-          </a:prstGeom>
-          <a:noFill/>
-        </p:spPr>
-        <p:txBody>
-          <a:bodyPr wrap="square" anchor="ctr"/>
-          <a:lstStyle/>
-          <a:p>
-            <a:pPr algn="ctr"/>
-            <a:r>
-              <a:rPr sz="1600" b="1" i="0">
-                <a:solidFill>
-                  <a:srgbClr val="FFFFFF"/>
-                </a:solidFill>
-                <a:latin typeface="Calibri"/>
-              </a:rPr>
-              <a:t>2</a:t>
-            </a:r>
-          </a:p>
-        </p:txBody>
-      </p:sp>
-      <p:sp>
-        <p:nvSpPr>
-          <p:cNvPr id="13" name="TextBox 12"/>
-          <p:cNvSpPr txBox="1"/>
-          <p:nvPr/>
-        </p:nvSpPr>
-        <p:spPr>
-          <a:xfrm>
-            <a:off x="1188720" y="2894076"/>
-            <a:ext cx="10271455" cy="886968"/>
-          </a:xfrm>
-          <a:prstGeom prst="rect">
-            <a:avLst/>
-          </a:prstGeom>
-          <a:noFill/>
-        </p:spPr>
-        <p:txBody>
-          <a:bodyPr wrap="square" anchor="ctr"/>
-          <a:lstStyle/>
-          <a:p>
-            <a:r>
-              <a:rPr sz="1500" b="1" i="0">
-                <a:solidFill>
-                  <a:srgbClr val="095292"/>
-                </a:solidFill>
-                <a:latin typeface="Calibri"/>
-              </a:rPr>
-              <a:t>Traduce con IA</a:t>
-            </a:r>
-          </a:p>
-          <a:p>
-            <a:pPr>
-              <a:spcBef>
-                <a:spcPts val="200"/>
-              </a:spcBef>
-            </a:pPr>
-            <a:r>
-              <a:rPr sz="1300" b="0" i="0">
-                <a:solidFill>
-                  <a:srgbClr val="333333"/>
-                </a:solidFill>
-                <a:latin typeface="Calibri"/>
-              </a:rPr>
-              <a:t>Copia o describe tu boceto a una IA y pidele el codigo Mermaid: «convierte este diagrama a Mermaid usando flowchart». Revisa el resultado: la IA acierta la sintaxis, no tu modelo.</a:t>
-            </a:r>
-          </a:p>
-        </p:txBody>
-      </p:sp>
-      <p:sp>
-        <p:nvSpPr>
-          <p:cNvPr id="14" name="Rounded Rectangle 13"/>
-          <p:cNvSpPr/>
-          <p:nvPr/>
-        </p:nvSpPr>
-        <p:spPr>
-          <a:xfrm>
-            <a:off x="457200" y="3945636"/>
-            <a:ext cx="11277295" cy="1051560"/>
-          </a:xfrm>
-          <a:prstGeom prst="roundRect">
-            <a:avLst>
-              <a:gd name="adj" fmla="val 12000"/>
-            </a:avLst>
-          </a:prstGeom>
-          <a:solidFill>
-            <a:srgbClr val="F2F2F2"/>
-          </a:solidFill>
-          <a:ln>
-            <a:noFill/>
-          </a:ln>
-        </p:spPr>
-        <p:style>
-          <a:lnRef idx="1">
-            <a:schemeClr val="accent1"/>
-          </a:lnRef>
-          <a:fillRef idx="3">
-            <a:schemeClr val="accent1"/>
-          </a:fillRef>
-          <a:effectRef idx="2">
-            <a:schemeClr val="accent1"/>
-          </a:effectRef>
-          <a:fontRef idx="minor">
-            <a:schemeClr val="lt1"/>
-          </a:fontRef>
-        </p:style>
-        <p:txBody>
-          <a:bodyPr rtlCol="0" anchor="ctr"/>
-          <a:lstStyle/>
-          <a:p>
-            <a:pPr algn="ctr"/>
-          </a:p>
-        </p:txBody>
-      </p:sp>
-      <p:sp>
-        <p:nvSpPr>
-          <p:cNvPr id="15" name="Rounded Rectangle 14"/>
-          <p:cNvSpPr/>
-          <p:nvPr/>
-        </p:nvSpPr>
-        <p:spPr>
-          <a:xfrm>
-            <a:off x="594360" y="4251960"/>
-            <a:ext cx="438912" cy="438912"/>
-          </a:xfrm>
-          <a:prstGeom prst="roundRect">
-            <a:avLst>
-              <a:gd name="adj" fmla="val 12000"/>
-            </a:avLst>
-          </a:prstGeom>
-          <a:solidFill>
-            <a:srgbClr val="095292"/>
-          </a:solidFill>
-          <a:ln>
-            <a:noFill/>
-          </a:ln>
-        </p:spPr>
-        <p:style>
-          <a:lnRef idx="1">
-            <a:schemeClr val="accent1"/>
-          </a:lnRef>
-          <a:fillRef idx="3">
-            <a:schemeClr val="accent1"/>
-          </a:fillRef>
-          <a:effectRef idx="2">
-            <a:schemeClr val="accent1"/>
-          </a:effectRef>
-          <a:fontRef idx="minor">
-            <a:schemeClr val="lt1"/>
-          </a:fontRef>
-        </p:style>
-        <p:txBody>
-          <a:bodyPr rtlCol="0" anchor="ctr"/>
-          <a:lstStyle/>
-          <a:p>
-            <a:pPr algn="ctr"/>
-          </a:p>
-        </p:txBody>
-      </p:sp>
-      <p:sp>
-        <p:nvSpPr>
-          <p:cNvPr id="16" name="TextBox 15"/>
-          <p:cNvSpPr txBox="1"/>
-          <p:nvPr/>
-        </p:nvSpPr>
-        <p:spPr>
-          <a:xfrm>
-            <a:off x="594360" y="4251960"/>
-            <a:ext cx="438912" cy="438912"/>
-          </a:xfrm>
-          <a:prstGeom prst="rect">
-            <a:avLst/>
-          </a:prstGeom>
-          <a:noFill/>
-        </p:spPr>
-        <p:txBody>
-          <a:bodyPr wrap="square" anchor="ctr"/>
-          <a:lstStyle/>
-          <a:p>
-            <a:pPr algn="ctr"/>
-            <a:r>
-              <a:rPr sz="1600" b="1" i="0">
-                <a:solidFill>
-                  <a:srgbClr val="FFFFFF"/>
-                </a:solidFill>
-                <a:latin typeface="Calibri"/>
-              </a:rPr>
-              <a:t>3</a:t>
-            </a:r>
-          </a:p>
-        </p:txBody>
-      </p:sp>
-      <p:sp>
-        <p:nvSpPr>
-          <p:cNvPr id="17" name="TextBox 16"/>
-          <p:cNvSpPr txBox="1"/>
-          <p:nvPr/>
-        </p:nvSpPr>
-        <p:spPr>
-          <a:xfrm>
-            <a:off x="1188720" y="4037076"/>
-            <a:ext cx="10271455" cy="886968"/>
-          </a:xfrm>
-          <a:prstGeom prst="rect">
-            <a:avLst/>
-          </a:prstGeom>
-          <a:noFill/>
-        </p:spPr>
-        <p:txBody>
-          <a:bodyPr wrap="square" anchor="ctr"/>
-          <a:lstStyle/>
-          <a:p>
-            <a:r>
-              <a:rPr sz="1500" b="1" i="0">
-                <a:solidFill>
-                  <a:srgbClr val="095292"/>
-                </a:solidFill>
-                <a:latin typeface="Calibri"/>
-              </a:rPr>
-              <a:t>Pega y renderiza en la plataforma del curso</a:t>
-            </a:r>
-          </a:p>
-          <a:p>
-            <a:pPr>
-              <a:spcBef>
-                <a:spcPts val="200"/>
-              </a:spcBef>
-            </a:pPr>
-            <a:r>
-              <a:rPr sz="1300" b="0" i="0">
-                <a:solidFill>
-                  <a:srgbClr val="333333"/>
-                </a:solidFill>
-                <a:latin typeface="Calibri"/>
-              </a:rPr>
-              <a:t>Pega ese codigo en la caja de texto de la pregunta y mira como lo dibuja la plataforma. Si no renderiza, corrige ahi mismo: lo que se califica es el diagrama renderizado dentro de la plataforma del curso.</a:t>
-            </a:r>
-          </a:p>
-        </p:txBody>
-      </p:sp>
-      <p:sp>
-        <p:nvSpPr>
-          <p:cNvPr id="18" name="Rounded Rectangle 17"/>
-          <p:cNvSpPr/>
-          <p:nvPr/>
-        </p:nvSpPr>
-        <p:spPr>
-          <a:xfrm>
-            <a:off x="457200" y="5088636"/>
-            <a:ext cx="11277295" cy="1051560"/>
-          </a:xfrm>
-          <a:prstGeom prst="roundRect">
-            <a:avLst>
-              <a:gd name="adj" fmla="val 12000"/>
-            </a:avLst>
-          </a:prstGeom>
-          <a:solidFill>
-            <a:srgbClr val="E8F4FA"/>
-          </a:solidFill>
-          <a:ln>
-            <a:noFill/>
-          </a:ln>
-        </p:spPr>
-        <p:style>
-          <a:lnRef idx="1">
-            <a:schemeClr val="accent1"/>
-          </a:lnRef>
-          <a:fillRef idx="3">
-            <a:schemeClr val="accent1"/>
-          </a:fillRef>
-          <a:effectRef idx="2">
-            <a:schemeClr val="accent1"/>
-          </a:effectRef>
-          <a:fontRef idx="minor">
-            <a:schemeClr val="lt1"/>
-          </a:fontRef>
-        </p:style>
-        <p:txBody>
-          <a:bodyPr rtlCol="0" anchor="ctr"/>
-          <a:lstStyle/>
-          <a:p>
-            <a:pPr algn="ctr"/>
-          </a:p>
-        </p:txBody>
-      </p:sp>
-      <p:sp>
-        <p:nvSpPr>
-          <p:cNvPr id="19" name="Rounded Rectangle 18"/>
-          <p:cNvSpPr/>
-          <p:nvPr/>
-        </p:nvSpPr>
-        <p:spPr>
-          <a:xfrm>
-            <a:off x="594360" y="5394960"/>
-            <a:ext cx="438912" cy="438912"/>
-          </a:xfrm>
-          <a:prstGeom prst="roundRect">
-            <a:avLst>
-              <a:gd name="adj" fmla="val 12000"/>
-            </a:avLst>
-          </a:prstGeom>
-          <a:solidFill>
-            <a:srgbClr val="095292"/>
-          </a:solidFill>
-          <a:ln>
-            <a:noFill/>
-          </a:ln>
-        </p:spPr>
-        <p:style>
-          <a:lnRef idx="1">
-            <a:schemeClr val="accent1"/>
-          </a:lnRef>
-          <a:fillRef idx="3">
-            <a:schemeClr val="accent1"/>
-          </a:fillRef>
-          <a:effectRef idx="2">
-            <a:schemeClr val="accent1"/>
-          </a:effectRef>
-          <a:fontRef idx="minor">
-            <a:schemeClr val="lt1"/>
-          </a:fontRef>
-        </p:style>
-        <p:txBody>
-          <a:bodyPr rtlCol="0" anchor="ctr"/>
-          <a:lstStyle/>
-          <a:p>
-            <a:pPr algn="ctr"/>
-          </a:p>
-        </p:txBody>
-      </p:sp>
-      <p:sp>
-        <p:nvSpPr>
-          <p:cNvPr id="20" name="TextBox 19"/>
-          <p:cNvSpPr txBox="1"/>
-          <p:nvPr/>
-        </p:nvSpPr>
-        <p:spPr>
-          <a:xfrm>
-            <a:off x="594360" y="5394960"/>
-            <a:ext cx="438912" cy="438912"/>
-          </a:xfrm>
-          <a:prstGeom prst="rect">
-            <a:avLst/>
-          </a:prstGeom>
-          <a:noFill/>
-        </p:spPr>
-        <p:txBody>
-          <a:bodyPr wrap="square" anchor="ctr"/>
-          <a:lstStyle/>
-          <a:p>
-            <a:pPr algn="ctr"/>
-            <a:r>
-              <a:rPr sz="1600" b="1" i="0">
-                <a:solidFill>
-                  <a:srgbClr val="FFFFFF"/>
-                </a:solidFill>
-                <a:latin typeface="Calibri"/>
-              </a:rPr>
-              <a:t>4</a:t>
-            </a:r>
-          </a:p>
-        </p:txBody>
-      </p:sp>
-      <p:sp>
-        <p:nvSpPr>
-          <p:cNvPr id="21" name="TextBox 20"/>
-          <p:cNvSpPr txBox="1"/>
-          <p:nvPr/>
-        </p:nvSpPr>
-        <p:spPr>
-          <a:xfrm>
-            <a:off x="1188720" y="5180076"/>
-            <a:ext cx="10271455" cy="886968"/>
-          </a:xfrm>
-          <a:prstGeom prst="rect">
-            <a:avLst/>
-          </a:prstGeom>
-          <a:noFill/>
-        </p:spPr>
-        <p:txBody>
-          <a:bodyPr wrap="square" anchor="ctr"/>
-          <a:lstStyle/>
-          <a:p>
-            <a:r>
-              <a:rPr sz="1500" b="1" i="0">
-                <a:solidFill>
-                  <a:srgbClr val="095292"/>
-                </a:solidFill>
-                <a:latin typeface="Calibri"/>
-              </a:rPr>
-              <a:t>Guarda el PNG para tu PI</a:t>
-            </a:r>
-          </a:p>
-          <a:p>
-            <a:pPr>
-              <a:spcBef>
-                <a:spcPts val="200"/>
-              </a:spcBef>
-            </a:pPr>
-            <a:r>
-              <a:rPr sz="1300" b="0" i="0">
-                <a:solidFill>
-                  <a:srgbClr val="333333"/>
-                </a:solidFill>
-                <a:latin typeface="Calibri"/>
-              </a:rPr>
-              <a:t>Exporta tambien la imagen a la carpeta de tu Proyecto Integrador. Esa copia es para tu informe; no reemplaza la respuesta en la plataforma.</a:t>
-            </a:r>
-          </a:p>
-        </p:txBody>
-      </p:sp>
-      <p:sp>
-        <p:nvSpPr>
-          <p:cNvPr id="22" name="TextBox 21"/>
-          <p:cNvSpPr txBox="1"/>
-          <p:nvPr/>
-        </p:nvSpPr>
-        <p:spPr>
-          <a:xfrm>
-            <a:off x="11185855" y="6473952"/>
-            <a:ext cx="640080" cy="274320"/>
-          </a:xfrm>
-          <a:prstGeom prst="rect">
-            <a:avLst/>
-          </a:prstGeom>
-          <a:noFill/>
-        </p:spPr>
-        <p:txBody>
-          <a:bodyPr wrap="square">
-            <a:spAutoFit/>
-          </a:bodyPr>
-          <a:lstStyle/>
-          <a:p>
-            <a:pPr algn="r"/>
-            <a:r>
-              <a:rPr sz="1100" b="0" i="0">
-                <a:solidFill>
-                  <a:srgbClr val="666666"/>
-                </a:solidFill>
-                <a:latin typeface="Calibri"/>
-              </a:rPr>
-              <a:t>35</a:t>
-            </a:r>
-          </a:p>
-        </p:txBody>
-      </p:sp>
-    </p:spTree>
-  </p:cSld>
-  <p:clrMapOvr>
-    <a:masterClrMapping/>
-  </p:clrMapOvr>
-</p:sld>
-</file>
-
-<file path=ppt/slides/slide36.xml><?xml version="1.0" encoding="utf-8"?>
-<p:sld xmlns:a="http://schemas.openxmlformats.org/drawingml/2006/main" xmlns:p="http://schemas.openxmlformats.org/presentationml/2006/main" xmlns:r="http://schemas.openxmlformats.org/officeDocument/2006/relationships">
-  <p:cSld>
-    <p:bg>
-      <p:bgPr>
-        <a:solidFill>
-          <a:srgbClr val="FFFFFF"/>
-        </a:solidFill>
-        <a:effectLst/>
-      </p:bgPr>
-    </p:bg>
-    <p:spTree>
-      <p:nvGrpSpPr>
-        <p:cNvPr id="1" name=""/>
-        <p:cNvGrpSpPr/>
-        <p:nvPr/>
-      </p:nvGrpSpPr>
-      <p:grpSpPr/>
-      <p:sp>
-        <p:nvSpPr>
-          <p:cNvPr id="2" name="Rectangle 1"/>
-          <p:cNvSpPr/>
-          <p:nvPr/>
-        </p:nvSpPr>
-        <p:spPr>
-          <a:xfrm>
-            <a:off x="0" y="0"/>
-            <a:ext cx="12191695" cy="960120"/>
-          </a:xfrm>
-          <a:prstGeom prst="rect">
-            <a:avLst/>
-          </a:prstGeom>
-          <a:solidFill>
-            <a:srgbClr val="095292"/>
-          </a:solidFill>
-          <a:ln>
-            <a:noFill/>
-          </a:ln>
-        </p:spPr>
-        <p:style>
-          <a:lnRef idx="1">
-            <a:schemeClr val="accent1"/>
-          </a:lnRef>
-          <a:fillRef idx="3">
-            <a:schemeClr val="accent1"/>
-          </a:fillRef>
-          <a:effectRef idx="2">
-            <a:schemeClr val="accent1"/>
-          </a:effectRef>
-          <a:fontRef idx="minor">
-            <a:schemeClr val="lt1"/>
-          </a:fontRef>
-        </p:style>
-        <p:txBody>
-          <a:bodyPr rtlCol="0" anchor="ctr"/>
-          <a:lstStyle/>
-          <a:p>
-            <a:pPr algn="ctr"/>
-          </a:p>
-        </p:txBody>
-      </p:sp>
-      <p:sp>
-        <p:nvSpPr>
-          <p:cNvPr id="3" name="Rectangle 2"/>
-          <p:cNvSpPr/>
-          <p:nvPr/>
-        </p:nvSpPr>
-        <p:spPr>
-          <a:xfrm>
-            <a:off x="0" y="960120"/>
-            <a:ext cx="12191695" cy="41148"/>
-          </a:xfrm>
-          <a:prstGeom prst="rect">
-            <a:avLst/>
-          </a:prstGeom>
-          <a:solidFill>
-            <a:srgbClr val="FFD000"/>
-          </a:solidFill>
-          <a:ln>
-            <a:noFill/>
-          </a:ln>
-        </p:spPr>
-        <p:style>
-          <a:lnRef idx="1">
-            <a:schemeClr val="accent1"/>
-          </a:lnRef>
-          <a:fillRef idx="3">
-            <a:schemeClr val="accent1"/>
-          </a:fillRef>
-          <a:effectRef idx="2">
-            <a:schemeClr val="accent1"/>
-          </a:effectRef>
-          <a:fontRef idx="minor">
-            <a:schemeClr val="lt1"/>
-          </a:fontRef>
-        </p:style>
-        <p:txBody>
-          <a:bodyPr rtlCol="0" anchor="ctr"/>
-          <a:lstStyle/>
-          <a:p>
-            <a:pPr algn="ctr"/>
-          </a:p>
-        </p:txBody>
-      </p:sp>
-      <p:sp>
-        <p:nvSpPr>
-          <p:cNvPr id="4" name="TextBox 3"/>
-          <p:cNvSpPr txBox="1"/>
-          <p:nvPr/>
-        </p:nvSpPr>
-        <p:spPr>
-          <a:xfrm>
-            <a:off x="457200" y="164592"/>
-            <a:ext cx="11277295" cy="502920"/>
-          </a:xfrm>
-          <a:prstGeom prst="rect">
-            <a:avLst/>
-          </a:prstGeom>
-          <a:noFill/>
-        </p:spPr>
-        <p:txBody>
-          <a:bodyPr wrap="square">
-            <a:spAutoFit/>
-          </a:bodyPr>
-          <a:lstStyle/>
-          <a:p>
-            <a:r>
-              <a:rPr sz="2600" b="1" i="0">
-                <a:solidFill>
-                  <a:srgbClr val="FFFFFF"/>
-                </a:solidFill>
-                <a:latin typeface="Calibri"/>
-              </a:rPr>
-              <a:t>PI CloudLite — entregable de hoy</a:t>
-            </a:r>
-          </a:p>
-        </p:txBody>
-      </p:sp>
-      <p:sp>
-        <p:nvSpPr>
-          <p:cNvPr id="5" name="TextBox 4"/>
-          <p:cNvSpPr txBox="1"/>
-          <p:nvPr/>
-        </p:nvSpPr>
-        <p:spPr>
-          <a:xfrm>
-            <a:off x="457200" y="1170432"/>
-            <a:ext cx="11277295" cy="5230368"/>
-          </a:xfrm>
-          <a:prstGeom prst="rect">
-            <a:avLst/>
-          </a:prstGeom>
-          <a:noFill/>
-        </p:spPr>
-        <p:txBody>
-          <a:bodyPr wrap="square">
-            <a:spAutoFit/>
-          </a:bodyPr>
-          <a:lstStyle/>
-          <a:p>
-            <a:pPr>
-              <a:spcAft>
-                <a:spcPts val="800"/>
-              </a:spcAft>
-            </a:pPr>
-            <a:r>
-              <a:rPr sz="2000" b="0" i="0">
-                <a:solidFill>
-                  <a:srgbClr val="333333"/>
-                </a:solidFill>
-                <a:latin typeface="Calibri"/>
-              </a:rPr>
-              <a:t>–   </a:t>
-            </a:r>
             <a:r>
               <a:rPr sz="2000" b="1" i="0">
                 <a:solidFill>
-                  <a:srgbClr val="333333"/>
-                </a:solidFill>
-                <a:latin typeface="Calibri"/>
-              </a:rPr>
-              <a:t>Entregable:</a:t>
-            </a:r>
-            <a:r>
-              <a:rPr sz="2000" b="0" i="0">
-                <a:solidFill>
-                  <a:srgbClr val="333333"/>
-                </a:solidFill>
-                <a:latin typeface="Calibri"/>
-              </a:rPr>
-              <a:t> Diagrama Deployment en Mermaid en la plataforma del curso (3 zonas + puertos) + tipo de almacenamiento por componente</a:t>
-            </a:r>
-          </a:p>
-          <a:p>
-            <a:pPr>
-              <a:spcAft>
-                <a:spcPts val="800"/>
-              </a:spcAft>
-            </a:pPr>
-            <a:r>
-              <a:rPr sz="2000" b="0" i="0">
-                <a:solidFill>
-                  <a:srgbClr val="333333"/>
-                </a:solidFill>
-                <a:latin typeface="Calibri"/>
-              </a:rPr>
-              <a:t>–   Herramienta: </a:t>
-            </a:r>
-            <a:r>
-              <a:rPr sz="2000" b="1" i="0">
-                <a:solidFill>
-                  <a:srgbClr val="333333"/>
-                </a:solidFill>
-                <a:latin typeface="Calibri"/>
-              </a:rPr>
-              <a:t>Navegador · editor de diagramas del curso (Mermaid) · boceto libre opcional</a:t>
-            </a:r>
-          </a:p>
-          <a:p>
-            <a:pPr>
-              <a:spcAft>
-                <a:spcPts val="800"/>
-              </a:spcAft>
-            </a:pPr>
-            <a:r>
-              <a:rPr sz="2000" b="0" i="0">
-                <a:solidFill>
-                  <a:srgbClr val="333333"/>
-                </a:solidFill>
-                <a:latin typeface="Calibri"/>
-              </a:rPr>
-              <a:t>–   Todo lo que construyan hoy entra al </a:t>
-            </a:r>
-            <a:r>
-              <a:rPr sz="2000" b="1" i="0">
-                <a:solidFill>
-                  <a:srgbClr val="333333"/>
-                </a:solidFill>
-                <a:latin typeface="Calibri"/>
-              </a:rPr>
-              <a:t>informe/repo del PI</a:t>
-            </a:r>
-            <a:r>
-              <a:rPr sz="2000" b="0" i="0">
-                <a:solidFill>
-                  <a:srgbClr val="333333"/>
-                </a:solidFill>
-                <a:latin typeface="Calibri"/>
-              </a:rPr>
-              <a:t> (no es lab suelto).</a:t>
-            </a:r>
-          </a:p>
-          <a:p>
-            <a:pPr>
-              <a:spcAft>
-                <a:spcPts val="800"/>
-              </a:spcAft>
-            </a:pPr>
-            <a:r>
-              <a:rPr sz="2000" b="0" i="0">
-                <a:solidFill>
-                  <a:srgbClr val="333333"/>
-                </a:solidFill>
-                <a:latin typeface="Calibri"/>
-              </a:rPr>
-              <a:t>–   Individual por defecto · el docente puede autorizar equipos de 2–3; la entrega en la plataforma del curso siempre es individual.</a:t>
-            </a:r>
-          </a:p>
-        </p:txBody>
-      </p:sp>
-      <p:sp>
-        <p:nvSpPr>
-          <p:cNvPr id="6" name="TextBox 5"/>
-          <p:cNvSpPr txBox="1"/>
-          <p:nvPr/>
-        </p:nvSpPr>
-        <p:spPr>
-          <a:xfrm>
-            <a:off x="11185855" y="6473952"/>
-            <a:ext cx="640080" cy="274320"/>
-          </a:xfrm>
-          <a:prstGeom prst="rect">
-            <a:avLst/>
-          </a:prstGeom>
-          <a:noFill/>
-        </p:spPr>
-        <p:txBody>
-          <a:bodyPr wrap="square">
-            <a:spAutoFit/>
-          </a:bodyPr>
-          <a:lstStyle/>
-          <a:p>
-            <a:pPr algn="r"/>
-            <a:r>
-              <a:rPr sz="1100" b="0" i="0">
-                <a:solidFill>
-                  <a:srgbClr val="666666"/>
-                </a:solidFill>
-                <a:latin typeface="Calibri"/>
-              </a:rPr>
-              <a:t>36</a:t>
-            </a:r>
-          </a:p>
-        </p:txBody>
-      </p:sp>
-    </p:spTree>
-  </p:cSld>
-  <p:clrMapOvr>
-    <a:masterClrMapping/>
-  </p:clrMapOvr>
-</p:sld>
-</file>
-
-<file path=ppt/slides/slide37.xml><?xml version="1.0" encoding="utf-8"?>
-<p:sld xmlns:a="http://schemas.openxmlformats.org/drawingml/2006/main" xmlns:p="http://schemas.openxmlformats.org/presentationml/2006/main" xmlns:r="http://schemas.openxmlformats.org/officeDocument/2006/relationships">
-  <p:cSld>
-    <p:bg>
-      <p:bgPr>
-        <a:solidFill>
-          <a:srgbClr val="FFFFFF"/>
-        </a:solidFill>
-        <a:effectLst/>
-      </p:bgPr>
-    </p:bg>
-    <p:spTree>
-      <p:nvGrpSpPr>
-        <p:cNvPr id="1" name=""/>
-        <p:cNvGrpSpPr/>
-        <p:nvPr/>
-      </p:nvGrpSpPr>
-      <p:grpSpPr/>
-      <p:sp>
-        <p:nvSpPr>
-          <p:cNvPr id="2" name="Rectangle 1"/>
-          <p:cNvSpPr/>
-          <p:nvPr/>
-        </p:nvSpPr>
-        <p:spPr>
-          <a:xfrm>
-            <a:off x="0" y="0"/>
-            <a:ext cx="12191695" cy="960120"/>
-          </a:xfrm>
-          <a:prstGeom prst="rect">
-            <a:avLst/>
-          </a:prstGeom>
-          <a:solidFill>
-            <a:srgbClr val="095292"/>
-          </a:solidFill>
-          <a:ln>
-            <a:noFill/>
-          </a:ln>
-        </p:spPr>
-        <p:style>
-          <a:lnRef idx="1">
-            <a:schemeClr val="accent1"/>
-          </a:lnRef>
-          <a:fillRef idx="3">
-            <a:schemeClr val="accent1"/>
-          </a:fillRef>
-          <a:effectRef idx="2">
-            <a:schemeClr val="accent1"/>
-          </a:effectRef>
-          <a:fontRef idx="minor">
-            <a:schemeClr val="lt1"/>
-          </a:fontRef>
-        </p:style>
-        <p:txBody>
-          <a:bodyPr rtlCol="0" anchor="ctr"/>
-          <a:lstStyle/>
-          <a:p>
-            <a:pPr algn="ctr"/>
-          </a:p>
-        </p:txBody>
-      </p:sp>
-      <p:sp>
-        <p:nvSpPr>
-          <p:cNvPr id="3" name="Rectangle 2"/>
-          <p:cNvSpPr/>
-          <p:nvPr/>
-        </p:nvSpPr>
-        <p:spPr>
-          <a:xfrm>
-            <a:off x="0" y="960120"/>
-            <a:ext cx="12191695" cy="41148"/>
-          </a:xfrm>
-          <a:prstGeom prst="rect">
-            <a:avLst/>
-          </a:prstGeom>
-          <a:solidFill>
-            <a:srgbClr val="FFD000"/>
-          </a:solidFill>
-          <a:ln>
-            <a:noFill/>
-          </a:ln>
-        </p:spPr>
-        <p:style>
-          <a:lnRef idx="1">
-            <a:schemeClr val="accent1"/>
-          </a:lnRef>
-          <a:fillRef idx="3">
-            <a:schemeClr val="accent1"/>
-          </a:fillRef>
-          <a:effectRef idx="2">
-            <a:schemeClr val="accent1"/>
-          </a:effectRef>
-          <a:fontRef idx="minor">
-            <a:schemeClr val="lt1"/>
-          </a:fontRef>
-        </p:style>
-        <p:txBody>
-          <a:bodyPr rtlCol="0" anchor="ctr"/>
-          <a:lstStyle/>
-          <a:p>
-            <a:pPr algn="ctr"/>
-          </a:p>
-        </p:txBody>
-      </p:sp>
-      <p:sp>
-        <p:nvSpPr>
-          <p:cNvPr id="4" name="TextBox 3"/>
-          <p:cNvSpPr txBox="1"/>
-          <p:nvPr/>
-        </p:nvSpPr>
-        <p:spPr>
-          <a:xfrm>
-            <a:off x="457200" y="164592"/>
-            <a:ext cx="11277295" cy="502920"/>
-          </a:xfrm>
-          <a:prstGeom prst="rect">
-            <a:avLst/>
-          </a:prstGeom>
-          <a:noFill/>
-        </p:spPr>
-        <p:txBody>
-          <a:bodyPr wrap="square">
-            <a:spAutoFit/>
-          </a:bodyPr>
-          <a:lstStyle/>
-          <a:p>
-            <a:r>
-              <a:rPr sz="2600" b="1" i="0">
-                <a:solidFill>
-                  <a:srgbClr val="FFFFFF"/>
-                </a:solidFill>
-                <a:latin typeface="Calibri"/>
-              </a:rPr>
-              <a:t>Manos a la obra (paso a paso)</a:t>
-            </a:r>
-          </a:p>
-        </p:txBody>
-      </p:sp>
-      <p:sp>
-        <p:nvSpPr>
-          <p:cNvPr id="5" name="TextBox 4"/>
-          <p:cNvSpPr txBox="1"/>
-          <p:nvPr/>
-        </p:nvSpPr>
-        <p:spPr>
-          <a:xfrm>
-            <a:off x="457200" y="1170432"/>
-            <a:ext cx="11277295" cy="5230368"/>
-          </a:xfrm>
-          <a:prstGeom prst="rect">
-            <a:avLst/>
-          </a:prstGeom>
-          <a:noFill/>
-        </p:spPr>
-        <p:txBody>
-          <a:bodyPr wrap="square">
-            <a:spAutoFit/>
-          </a:bodyPr>
-          <a:lstStyle/>
-          <a:p>
-            <a:pPr>
-              <a:spcAft>
-                <a:spcPts val="800"/>
-              </a:spcAft>
-            </a:pPr>
-            <a:r>
-              <a:rPr sz="2000" b="1" i="0">
-                <a:solidFill>
-                  <a:srgbClr val="333333"/>
-                </a:solidFill>
-                <a:latin typeface="Calibri"/>
-              </a:rPr>
-              <a:t>1.</a:t>
-            </a:r>
-            <a:r>
-              <a:rPr sz="2000" b="0" i="0">
-                <a:solidFill>
-                  <a:srgbClr val="333333"/>
-                </a:solidFill>
-                <a:latin typeface="Calibri"/>
-              </a:rPr>
-              <a:t> Paso 1: dibuje primero el boceto del despliegue en Excalidraw o draw.io con las tres zonas (publica, privada y de datos), y despues pidale a una IA que lo traduzca a Mermaid; peguelo en la pregunta 4 y verifique en el diagrama ya renderizado que la base de datos NO quede en la zona publica.</a:t>
-            </a:r>
-          </a:p>
-          <a:p>
-            <a:pPr>
-              <a:spcAft>
-                <a:spcPts val="800"/>
-              </a:spcAft>
-            </a:pPr>
-            <a:r>
-              <a:rPr sz="2000" b="0" i="0">
-                <a:solidFill>
-                  <a:srgbClr val="333333"/>
-                </a:solidFill>
-                <a:latin typeface="Calibri"/>
-              </a:rPr>
-              <a:t>–   </a:t>
-            </a:r>
-            <a:r>
-              <a:rPr sz="2000" b="1" i="0">
-                <a:solidFill>
-                  <a:srgbClr val="333333"/>
-                </a:solidFill>
-                <a:latin typeface="Calibri"/>
-              </a:rPr>
-              <a:t>2.</a:t>
-            </a:r>
-            <a:r>
-              <a:rPr sz="2000" b="0" i="0">
-                <a:solidFill>
-                  <a:srgbClr val="333333"/>
-                </a:solidFill>
-                <a:latin typeface="Calibri"/>
-              </a:rPr>
-              <a:t> Paso 2: etiquete en ese mismo diagrama el puerto de cada componente y marque las fronteras de confianza, es decir donde termina lo que usted controla; verifique que no aparezcan nombres de subredes ni de servicios de un proveedor concreto.</a:t>
-            </a:r>
-          </a:p>
-          <a:p>
-            <a:pPr>
-              <a:spcAft>
-                <a:spcPts val="800"/>
-              </a:spcAft>
-            </a:pPr>
-            <a:r>
-              <a:rPr sz="2000" b="0" i="0">
-                <a:solidFill>
-                  <a:srgbClr val="333333"/>
-                </a:solidFill>
-                <a:latin typeface="Calibri"/>
-              </a:rPr>
-              <a:t>–   </a:t>
-            </a:r>
-            <a:r>
-              <a:rPr sz="2000" b="1" i="0">
-                <a:solidFill>
-                  <a:srgbClr val="333333"/>
-                </a:solidFill>
-                <a:latin typeface="Calibri"/>
-              </a:rPr>
-              <a:t>3.</a:t>
-            </a:r>
-            <a:r>
-              <a:rPr sz="2000" b="0" i="0">
-                <a:solidFill>
-                  <a:srgbClr val="333333"/>
-                </a:solidFill>
-                <a:latin typeface="Calibri"/>
-              </a:rPr>
-              <a:t> Paso 3: justifique en la pregunta 5 el tipo de almacenamiento de cada componente diciendo que caracteristica del dato lo exige; si su dominio no necesita almacenamiento de objetos, declarelo y justifiquelo en vez de agregarlo.</a:t>
-            </a:r>
-          </a:p>
-          <a:p>
-            <a:pPr>
-              <a:spcAft>
-                <a:spcPts val="800"/>
-              </a:spcAft>
-            </a:pPr>
-            <a:r>
-              <a:rPr sz="2000" b="0" i="0">
-                <a:solidFill>
-                  <a:srgbClr val="333333"/>
-                </a:solidFill>
-                <a:latin typeface="Calibri"/>
-              </a:rPr>
-              <a:t>–   </a:t>
-            </a:r>
-            <a:r>
-              <a:rPr sz="2000" b="1" i="0">
-                <a:solidFill>
-                  <a:srgbClr val="333333"/>
-                </a:solidFill>
-                <a:latin typeface="Calibri"/>
-              </a:rPr>
-              <a:t>4.</a:t>
-            </a:r>
-            <a:r>
-              <a:rPr sz="2000" b="0" i="0">
-                <a:solidFill>
-                  <a:srgbClr val="333333"/>
-                </a:solidFill>
-                <a:latin typeface="Calibri"/>
-              </a:rPr>
-              <a:t> Paso 4: complete en la pregunta 6 la tabla de correspondencia entre el C4 Containers y el Despliegue, con una fila por componente y su zona, y liste los renombres que aplico; si no hubo ninguno, digalo explicitamente.</a:t>
-            </a:r>
-          </a:p>
-        </p:txBody>
-      </p:sp>
-      <p:sp>
-        <p:nvSpPr>
-          <p:cNvPr id="6" name="TextBox 5"/>
-          <p:cNvSpPr txBox="1"/>
-          <p:nvPr/>
-        </p:nvSpPr>
-        <p:spPr>
-          <a:xfrm>
-            <a:off x="11185855" y="6473952"/>
-            <a:ext cx="640080" cy="274320"/>
-          </a:xfrm>
-          <a:prstGeom prst="rect">
-            <a:avLst/>
-          </a:prstGeom>
-          <a:noFill/>
-        </p:spPr>
-        <p:txBody>
-          <a:bodyPr wrap="square">
-            <a:spAutoFit/>
-          </a:bodyPr>
-          <a:lstStyle/>
-          <a:p>
-            <a:pPr algn="r"/>
-            <a:r>
-              <a:rPr sz="1100" b="0" i="0">
-                <a:solidFill>
-                  <a:srgbClr val="666666"/>
-                </a:solidFill>
-                <a:latin typeface="Calibri"/>
-              </a:rPr>
-              <a:t>37</a:t>
-            </a:r>
-          </a:p>
-        </p:txBody>
-      </p:sp>
-    </p:spTree>
-  </p:cSld>
-  <p:clrMapOvr>
-    <a:masterClrMapping/>
-  </p:clrMapOvr>
-</p:sld>
-</file>
-
-<file path=ppt/slides/slide38.xml><?xml version="1.0" encoding="utf-8"?>
-<p:sld xmlns:a="http://schemas.openxmlformats.org/drawingml/2006/main" xmlns:p="http://schemas.openxmlformats.org/presentationml/2006/main" xmlns:r="http://schemas.openxmlformats.org/officeDocument/2006/relationships">
-  <p:cSld>
-    <p:bg>
-      <p:bgPr>
-        <a:solidFill>
-          <a:srgbClr val="FFFFFF"/>
-        </a:solidFill>
-        <a:effectLst/>
-      </p:bgPr>
-    </p:bg>
-    <p:spTree>
-      <p:nvGrpSpPr>
-        <p:cNvPr id="1" name=""/>
-        <p:cNvGrpSpPr/>
-        <p:nvPr/>
-      </p:nvGrpSpPr>
-      <p:grpSpPr/>
-      <p:sp>
-        <p:nvSpPr>
-          <p:cNvPr id="2" name="Rectangle 1"/>
-          <p:cNvSpPr/>
-          <p:nvPr/>
-        </p:nvSpPr>
-        <p:spPr>
-          <a:xfrm>
-            <a:off x="0" y="0"/>
-            <a:ext cx="12191695" cy="960120"/>
-          </a:xfrm>
-          <a:prstGeom prst="rect">
-            <a:avLst/>
-          </a:prstGeom>
-          <a:solidFill>
-            <a:srgbClr val="095292"/>
-          </a:solidFill>
-          <a:ln>
-            <a:noFill/>
-          </a:ln>
-        </p:spPr>
-        <p:style>
-          <a:lnRef idx="1">
-            <a:schemeClr val="accent1"/>
-          </a:lnRef>
-          <a:fillRef idx="3">
-            <a:schemeClr val="accent1"/>
-          </a:fillRef>
-          <a:effectRef idx="2">
-            <a:schemeClr val="accent1"/>
-          </a:effectRef>
-          <a:fontRef idx="minor">
-            <a:schemeClr val="lt1"/>
-          </a:fontRef>
-        </p:style>
-        <p:txBody>
-          <a:bodyPr rtlCol="0" anchor="ctr"/>
-          <a:lstStyle/>
-          <a:p>
-            <a:pPr algn="ctr"/>
-          </a:p>
-        </p:txBody>
-      </p:sp>
-      <p:sp>
-        <p:nvSpPr>
-          <p:cNvPr id="3" name="Rectangle 2"/>
-          <p:cNvSpPr/>
-          <p:nvPr/>
-        </p:nvSpPr>
-        <p:spPr>
-          <a:xfrm>
-            <a:off x="0" y="960120"/>
-            <a:ext cx="12191695" cy="41148"/>
-          </a:xfrm>
-          <a:prstGeom prst="rect">
-            <a:avLst/>
-          </a:prstGeom>
-          <a:solidFill>
-            <a:srgbClr val="FFD000"/>
-          </a:solidFill>
-          <a:ln>
-            <a:noFill/>
-          </a:ln>
-        </p:spPr>
-        <p:style>
-          <a:lnRef idx="1">
-            <a:schemeClr val="accent1"/>
-          </a:lnRef>
-          <a:fillRef idx="3">
-            <a:schemeClr val="accent1"/>
-          </a:fillRef>
-          <a:effectRef idx="2">
-            <a:schemeClr val="accent1"/>
-          </a:effectRef>
-          <a:fontRef idx="minor">
-            <a:schemeClr val="lt1"/>
-          </a:fontRef>
-        </p:style>
-        <p:txBody>
-          <a:bodyPr rtlCol="0" anchor="ctr"/>
-          <a:lstStyle/>
-          <a:p>
-            <a:pPr algn="ctr"/>
-          </a:p>
-        </p:txBody>
-      </p:sp>
-      <p:sp>
-        <p:nvSpPr>
-          <p:cNvPr id="4" name="TextBox 3"/>
-          <p:cNvSpPr txBox="1"/>
-          <p:nvPr/>
-        </p:nvSpPr>
-        <p:spPr>
-          <a:xfrm>
-            <a:off x="457200" y="164592"/>
-            <a:ext cx="11277295" cy="502920"/>
-          </a:xfrm>
-          <a:prstGeom prst="rect">
-            <a:avLst/>
-          </a:prstGeom>
-          <a:noFill/>
-        </p:spPr>
-        <p:txBody>
-          <a:bodyPr wrap="square">
-            <a:spAutoFit/>
-          </a:bodyPr>
-          <a:lstStyle/>
-          <a:p>
-            <a:r>
-              <a:rPr sz="2600" b="1" i="0">
-                <a:solidFill>
-                  <a:srgbClr val="FFFFFF"/>
-                </a:solidFill>
-                <a:latin typeface="Calibri"/>
-              </a:rPr>
-              <a:t>Para continuar (PI)</a:t>
-            </a:r>
-          </a:p>
-        </p:txBody>
-      </p:sp>
-      <p:sp>
-        <p:nvSpPr>
-          <p:cNvPr id="5" name="Rounded Rectangle 4"/>
-          <p:cNvSpPr/>
-          <p:nvPr/>
-        </p:nvSpPr>
-        <p:spPr>
-          <a:xfrm>
-            <a:off x="457200" y="1261872"/>
-            <a:ext cx="11277295" cy="1051560"/>
-          </a:xfrm>
-          <a:prstGeom prst="roundRect">
-            <a:avLst>
-              <a:gd name="adj" fmla="val 12000"/>
-            </a:avLst>
-          </a:prstGeom>
-          <a:solidFill>
-            <a:srgbClr val="E8F4FA"/>
-          </a:solidFill>
-          <a:ln>
-            <a:noFill/>
-          </a:ln>
-        </p:spPr>
-        <p:style>
-          <a:lnRef idx="1">
-            <a:schemeClr val="accent1"/>
-          </a:lnRef>
-          <a:fillRef idx="3">
-            <a:schemeClr val="accent1"/>
-          </a:fillRef>
-          <a:effectRef idx="2">
-            <a:schemeClr val="accent1"/>
-          </a:effectRef>
-          <a:fontRef idx="minor">
-            <a:schemeClr val="lt1"/>
-          </a:fontRef>
-        </p:style>
-        <p:txBody>
-          <a:bodyPr rtlCol="0" anchor="ctr"/>
-          <a:lstStyle/>
-          <a:p>
-            <a:pPr algn="ctr"/>
-          </a:p>
-        </p:txBody>
-      </p:sp>
-      <p:sp>
-        <p:nvSpPr>
-          <p:cNvPr id="6" name="Rectangle 5"/>
-          <p:cNvSpPr/>
-          <p:nvPr/>
-        </p:nvSpPr>
-        <p:spPr>
-          <a:xfrm>
-            <a:off x="457200" y="1261872"/>
-            <a:ext cx="128016" cy="1051560"/>
-          </a:xfrm>
-          <a:prstGeom prst="rect">
-            <a:avLst/>
-          </a:prstGeom>
-          <a:solidFill>
-            <a:srgbClr val="269CCB"/>
-          </a:solidFill>
-          <a:ln>
-            <a:noFill/>
-          </a:ln>
-        </p:spPr>
-        <p:style>
-          <a:lnRef idx="1">
-            <a:schemeClr val="accent1"/>
-          </a:lnRef>
-          <a:fillRef idx="3">
-            <a:schemeClr val="accent1"/>
-          </a:fillRef>
-          <a:effectRef idx="2">
-            <a:schemeClr val="accent1"/>
-          </a:effectRef>
-          <a:fontRef idx="minor">
-            <a:schemeClr val="lt1"/>
-          </a:fontRef>
-        </p:style>
-        <p:txBody>
-          <a:bodyPr rtlCol="0" anchor="ctr"/>
-          <a:lstStyle/>
-          <a:p>
-            <a:pPr algn="ctr"/>
-          </a:p>
-        </p:txBody>
-      </p:sp>
-      <p:sp>
-        <p:nvSpPr>
-          <p:cNvPr id="7" name="TextBox 6"/>
-          <p:cNvSpPr txBox="1"/>
-          <p:nvPr/>
-        </p:nvSpPr>
-        <p:spPr>
-          <a:xfrm>
-            <a:off x="777240" y="1399031"/>
-            <a:ext cx="10774375" cy="822959"/>
-          </a:xfrm>
-          <a:prstGeom prst="rect">
-            <a:avLst/>
-          </a:prstGeom>
-          <a:noFill/>
-        </p:spPr>
-        <p:txBody>
-          <a:bodyPr wrap="square">
-            <a:spAutoFit/>
-          </a:bodyPr>
-          <a:lstStyle/>
-          <a:p>
-            <a:r>
-              <a:rPr sz="1200" b="1" i="0">
-                <a:solidFill>
                   <a:srgbClr val="269CCB"/>
                 </a:solidFill>
                 <a:latin typeface="Calibri"/>
               </a:rPr>
-              <a:t>Info</a:t>
-            </a:r>
-          </a:p>
-          <a:p>
-            <a:pPr>
-              <a:spcBef>
-                <a:spcPts val="400"/>
-              </a:spcBef>
-            </a:pPr>
-            <a:r>
-              <a:rPr sz="1400" b="0" i="0">
-                <a:solidFill>
-                  <a:srgbClr val="333333"/>
-                </a:solidFill>
-                <a:latin typeface="Calibri"/>
-              </a:rPr>
-              <a:t>Entregable: Diagrama Deployment en Mermaid en la plataforma del curso (3 zonas + puertos) + tipo de almacenamiento por componente</a:t>
-            </a:r>
-          </a:p>
-        </p:txBody>
-      </p:sp>
-      <p:sp>
-        <p:nvSpPr>
-          <p:cNvPr id="8" name="Rounded Rectangle 7"/>
-          <p:cNvSpPr/>
-          <p:nvPr/>
-        </p:nvSpPr>
-        <p:spPr>
-          <a:xfrm>
-            <a:off x="457200" y="2478024"/>
-            <a:ext cx="11277295" cy="1051560"/>
-          </a:xfrm>
-          <a:prstGeom prst="roundRect">
-            <a:avLst>
-              <a:gd name="adj" fmla="val 12000"/>
-            </a:avLst>
-          </a:prstGeom>
-          <a:solidFill>
-            <a:srgbClr val="FFF8E1"/>
-          </a:solidFill>
-          <a:ln>
-            <a:noFill/>
-          </a:ln>
-        </p:spPr>
-        <p:style>
-          <a:lnRef idx="1">
-            <a:schemeClr val="accent1"/>
-          </a:lnRef>
-          <a:fillRef idx="3">
-            <a:schemeClr val="accent1"/>
-          </a:fillRef>
-          <a:effectRef idx="2">
-            <a:schemeClr val="accent1"/>
-          </a:effectRef>
-          <a:fontRef idx="minor">
-            <a:schemeClr val="lt1"/>
-          </a:fontRef>
-        </p:style>
-        <p:txBody>
-          <a:bodyPr rtlCol="0" anchor="ctr"/>
-          <a:lstStyle/>
-          <a:p>
-            <a:pPr algn="ctr"/>
-          </a:p>
-        </p:txBody>
-      </p:sp>
-      <p:sp>
-        <p:nvSpPr>
-          <p:cNvPr id="9" name="Rectangle 8"/>
-          <p:cNvSpPr/>
-          <p:nvPr/>
-        </p:nvSpPr>
-        <p:spPr>
-          <a:xfrm>
-            <a:off x="457200" y="2478024"/>
-            <a:ext cx="128016" cy="1051560"/>
-          </a:xfrm>
-          <a:prstGeom prst="rect">
-            <a:avLst/>
-          </a:prstGeom>
-          <a:solidFill>
-            <a:srgbClr val="FFD000"/>
-          </a:solidFill>
-          <a:ln>
-            <a:noFill/>
-          </a:ln>
-        </p:spPr>
-        <p:style>
-          <a:lnRef idx="1">
-            <a:schemeClr val="accent1"/>
-          </a:lnRef>
-          <a:fillRef idx="3">
-            <a:schemeClr val="accent1"/>
-          </a:fillRef>
-          <a:effectRef idx="2">
-            <a:schemeClr val="accent1"/>
-          </a:effectRef>
-          <a:fontRef idx="minor">
-            <a:schemeClr val="lt1"/>
-          </a:fontRef>
-        </p:style>
-        <p:txBody>
-          <a:bodyPr rtlCol="0" anchor="ctr"/>
-          <a:lstStyle/>
-          <a:p>
-            <a:pPr algn="ctr"/>
-          </a:p>
-        </p:txBody>
-      </p:sp>
-      <p:sp>
-        <p:nvSpPr>
-          <p:cNvPr id="10" name="TextBox 9"/>
-          <p:cNvSpPr txBox="1"/>
-          <p:nvPr/>
-        </p:nvSpPr>
-        <p:spPr>
-          <a:xfrm>
-            <a:off x="777240" y="2615184"/>
-            <a:ext cx="10774375" cy="822959"/>
-          </a:xfrm>
-          <a:prstGeom prst="rect">
-            <a:avLst/>
-          </a:prstGeom>
-          <a:noFill/>
-        </p:spPr>
-        <p:txBody>
-          <a:bodyPr wrap="square">
-            <a:spAutoFit/>
-          </a:bodyPr>
-          <a:lstStyle/>
-          <a:p>
-            <a:r>
-              <a:rPr sz="1200" b="1" i="0">
-                <a:solidFill>
-                  <a:srgbClr val="FFD000"/>
-                </a:solidFill>
-                <a:latin typeface="Calibri"/>
-              </a:rPr>
-              <a:t>Aclaración</a:t>
-            </a:r>
-          </a:p>
-          <a:p>
-            <a:pPr>
-              <a:spcBef>
-                <a:spcPts val="400"/>
-              </a:spcBef>
-            </a:pPr>
-            <a:r>
-              <a:rPr sz="1400" b="0" i="0">
-                <a:solidFill>
-                  <a:srgbClr val="333333"/>
-                </a:solidFill>
-                <a:latin typeface="Calibri"/>
-              </a:rPr>
-              <a:t>Subir evidencias al paquete CloudLite (Drive/repo) y a la plataforma del curso (la plataforma del curso) en la fecha que indique el docente.</a:t>
-            </a:r>
-          </a:p>
-        </p:txBody>
-      </p:sp>
-      <p:sp>
-        <p:nvSpPr>
-          <p:cNvPr id="11" name="Rounded Rectangle 10"/>
-          <p:cNvSpPr/>
-          <p:nvPr/>
-        </p:nvSpPr>
-        <p:spPr>
-          <a:xfrm>
-            <a:off x="457200" y="3694176"/>
-            <a:ext cx="11277295" cy="1051560"/>
-          </a:xfrm>
-          <a:prstGeom prst="roundRect">
-            <a:avLst>
-              <a:gd name="adj" fmla="val 12000"/>
-            </a:avLst>
-          </a:prstGeom>
-          <a:solidFill>
-            <a:srgbClr val="FBE4E4"/>
-          </a:solidFill>
-          <a:ln>
-            <a:noFill/>
-          </a:ln>
-        </p:spPr>
-        <p:style>
-          <a:lnRef idx="1">
-            <a:schemeClr val="accent1"/>
-          </a:lnRef>
-          <a:fillRef idx="3">
-            <a:schemeClr val="accent1"/>
-          </a:fillRef>
-          <a:effectRef idx="2">
-            <a:schemeClr val="accent1"/>
-          </a:effectRef>
-          <a:fontRef idx="minor">
-            <a:schemeClr val="lt1"/>
-          </a:fontRef>
-        </p:style>
-        <p:txBody>
-          <a:bodyPr rtlCol="0" anchor="ctr"/>
-          <a:lstStyle/>
-          <a:p>
-            <a:pPr algn="ctr"/>
-          </a:p>
-        </p:txBody>
-      </p:sp>
-      <p:sp>
-        <p:nvSpPr>
-          <p:cNvPr id="12" name="Rectangle 11"/>
-          <p:cNvSpPr/>
-          <p:nvPr/>
-        </p:nvSpPr>
-        <p:spPr>
-          <a:xfrm>
-            <a:off x="457200" y="3694176"/>
-            <a:ext cx="128016" cy="1051560"/>
-          </a:xfrm>
-          <a:prstGeom prst="rect">
-            <a:avLst/>
-          </a:prstGeom>
-          <a:solidFill>
-            <a:srgbClr val="A02030"/>
-          </a:solidFill>
-          <a:ln>
-            <a:noFill/>
-          </a:ln>
-        </p:spPr>
-        <p:style>
-          <a:lnRef idx="1">
-            <a:schemeClr val="accent1"/>
-          </a:lnRef>
-          <a:fillRef idx="3">
-            <a:schemeClr val="accent1"/>
-          </a:fillRef>
-          <a:effectRef idx="2">
-            <a:schemeClr val="accent1"/>
-          </a:effectRef>
-          <a:fontRef idx="minor">
-            <a:schemeClr val="lt1"/>
-          </a:fontRef>
-        </p:style>
-        <p:txBody>
-          <a:bodyPr rtlCol="0" anchor="ctr"/>
-          <a:lstStyle/>
-          <a:p>
-            <a:pPr algn="ctr"/>
-          </a:p>
-        </p:txBody>
-      </p:sp>
-      <p:sp>
-        <p:nvSpPr>
-          <p:cNvPr id="13" name="TextBox 12"/>
-          <p:cNvSpPr txBox="1"/>
-          <p:nvPr/>
-        </p:nvSpPr>
-        <p:spPr>
-          <a:xfrm>
-            <a:off x="777240" y="3831336"/>
-            <a:ext cx="10774375" cy="822959"/>
-          </a:xfrm>
-          <a:prstGeom prst="rect">
-            <a:avLst/>
-          </a:prstGeom>
-          <a:noFill/>
-        </p:spPr>
-        <p:txBody>
-          <a:bodyPr wrap="square">
-            <a:spAutoFit/>
-          </a:bodyPr>
-          <a:lstStyle/>
-          <a:p>
-            <a:r>
-              <a:rPr sz="1200" b="1" i="0">
-                <a:solidFill>
-                  <a:srgbClr val="A02030"/>
-                </a:solidFill>
-                <a:latin typeface="Calibri"/>
-              </a:rPr>
-              <a:t>Atención</a:t>
-            </a:r>
-          </a:p>
-          <a:p>
-            <a:pPr>
-              <a:spcBef>
-                <a:spcPts val="400"/>
-              </a:spcBef>
-            </a:pPr>
-            <a:r>
-              <a:rPr sz="1400" b="0" i="0">
-                <a:solidFill>
-                  <a:srgbClr val="333333"/>
-                </a:solidFill>
-                <a:latin typeface="Calibri"/>
-              </a:rPr>
-              <a:t>Sin cloud de pago ni instalaciones obligatorias de hipervisores/Docker Desktop.</a:t>
-            </a:r>
-          </a:p>
-        </p:txBody>
-      </p:sp>
-      <p:sp>
-        <p:nvSpPr>
-          <p:cNvPr id="14" name="TextBox 13"/>
-          <p:cNvSpPr txBox="1"/>
-          <p:nvPr/>
-        </p:nvSpPr>
-        <p:spPr>
-          <a:xfrm>
-            <a:off x="11185855" y="6473952"/>
-            <a:ext cx="640080" cy="274320"/>
-          </a:xfrm>
-          <a:prstGeom prst="rect">
-            <a:avLst/>
-          </a:prstGeom>
-          <a:noFill/>
-        </p:spPr>
-        <p:txBody>
-          <a:bodyPr wrap="square">
-            <a:spAutoFit/>
-          </a:bodyPr>
-          <a:lstStyle/>
-          <a:p>
-            <a:pPr algn="r"/>
-            <a:r>
-              <a:rPr sz="1100" b="0" i="0">
-                <a:solidFill>
-                  <a:srgbClr val="666666"/>
-                </a:solidFill>
-                <a:latin typeface="Calibri"/>
-              </a:rPr>
-              <a:t>38</a:t>
-            </a:r>
-          </a:p>
-        </p:txBody>
-      </p:sp>
-    </p:spTree>
-  </p:cSld>
-  <p:clrMapOvr>
-    <a:masterClrMapping/>
-  </p:clrMapOvr>
-</p:sld>
-</file>
-
-<file path=ppt/slides/slide39.xml><?xml version="1.0" encoding="utf-8"?>
-<p:sld xmlns:a="http://schemas.openxmlformats.org/drawingml/2006/main" xmlns:p="http://schemas.openxmlformats.org/presentationml/2006/main" xmlns:r="http://schemas.openxmlformats.org/officeDocument/2006/relationships">
-  <p:cSld>
-    <p:bg>
-      <p:bgPr>
-        <a:solidFill>
-          <a:srgbClr val="FFFFFF"/>
-        </a:solidFill>
-        <a:effectLst/>
-      </p:bgPr>
-    </p:bg>
-    <p:spTree>
-      <p:nvGrpSpPr>
-        <p:cNvPr id="1" name=""/>
-        <p:cNvGrpSpPr/>
-        <p:nvPr/>
-      </p:nvGrpSpPr>
-      <p:grpSpPr/>
-      <p:sp>
-        <p:nvSpPr>
-          <p:cNvPr id="2" name="Rectangle 1"/>
-          <p:cNvSpPr/>
-          <p:nvPr/>
-        </p:nvSpPr>
-        <p:spPr>
-          <a:xfrm>
-            <a:off x="0" y="0"/>
-            <a:ext cx="12191695" cy="164592"/>
-          </a:xfrm>
-          <a:prstGeom prst="rect">
-            <a:avLst/>
-          </a:prstGeom>
-          <a:solidFill>
-            <a:srgbClr val="269CCB"/>
-          </a:solidFill>
-          <a:ln>
-            <a:noFill/>
-          </a:ln>
-        </p:spPr>
-        <p:style>
-          <a:lnRef idx="1">
-            <a:schemeClr val="accent1"/>
-          </a:lnRef>
-          <a:fillRef idx="3">
-            <a:schemeClr val="accent1"/>
-          </a:fillRef>
-          <a:effectRef idx="2">
-            <a:schemeClr val="accent1"/>
-          </a:effectRef>
-          <a:fontRef idx="minor">
-            <a:schemeClr val="lt1"/>
-          </a:fontRef>
-        </p:style>
-        <p:txBody>
-          <a:bodyPr rtlCol="0" anchor="ctr"/>
-          <a:lstStyle/>
-          <a:p>
-            <a:pPr algn="ctr"/>
-          </a:p>
-        </p:txBody>
-      </p:sp>
-      <p:pic>
-        <p:nvPicPr>
-          <p:cNvPr id="3" name="Picture 2" descr="logo_uniajc_color.png"/>
-          <p:cNvPicPr>
-            <a:picLocks noChangeAspect="1"/>
-          </p:cNvPicPr>
-          <p:nvPr/>
-        </p:nvPicPr>
-        <p:blipFill>
-          <a:blip r:embed="rId2"/>
-          <a:stretch>
-            <a:fillRect/>
-          </a:stretch>
-        </p:blipFill>
-        <p:spPr>
-          <a:xfrm>
-            <a:off x="10271455" y="5998464"/>
-            <a:ext cx="1463040" cy="643233"/>
-          </a:xfrm>
-          <a:prstGeom prst="rect">
-            <a:avLst/>
-          </a:prstGeom>
-        </p:spPr>
-      </p:pic>
-      <p:sp>
-        <p:nvSpPr>
-          <p:cNvPr id="4" name="TextBox 3"/>
-          <p:cNvSpPr txBox="1"/>
-          <p:nvPr/>
-        </p:nvSpPr>
-        <p:spPr>
-          <a:xfrm>
-            <a:off x="457200" y="1737360"/>
-            <a:ext cx="11277295" cy="1097280"/>
-          </a:xfrm>
-          <a:prstGeom prst="rect">
-            <a:avLst/>
-          </a:prstGeom>
-          <a:noFill/>
-        </p:spPr>
-        <p:txBody>
-          <a:bodyPr wrap="square" anchor="ctr"/>
-          <a:lstStyle/>
-          <a:p>
-            <a:pPr algn="ctr"/>
-            <a:r>
-              <a:rPr sz="3400" b="1" i="0">
-                <a:solidFill>
-                  <a:srgbClr val="095292"/>
-                </a:solidFill>
-                <a:latin typeface="Calibri"/>
-              </a:rPr>
-              <a:t>Clase 7 · PI en movimiento</a:t>
-            </a:r>
-          </a:p>
-        </p:txBody>
-      </p:sp>
-      <p:sp>
-        <p:nvSpPr>
-          <p:cNvPr id="5" name="TextBox 4"/>
-          <p:cNvSpPr txBox="1"/>
-          <p:nvPr/>
-        </p:nvSpPr>
-        <p:spPr>
-          <a:xfrm>
-            <a:off x="457200" y="3017520"/>
-            <a:ext cx="11277295" cy="1645920"/>
-          </a:xfrm>
-          <a:prstGeom prst="rect">
-            <a:avLst/>
-          </a:prstGeom>
-          <a:noFill/>
-        </p:spPr>
-        <p:txBody>
-          <a:bodyPr wrap="square">
-            <a:spAutoFit/>
-          </a:bodyPr>
-          <a:lstStyle/>
-          <a:p>
-            <a:pPr algn="ctr">
-              <a:spcAft>
-                <a:spcPts val="600"/>
-              </a:spcAft>
-            </a:pPr>
-            <a:r>
-              <a:rPr sz="1600" b="0" i="0">
-                <a:solidFill>
-                  <a:srgbClr val="333333"/>
-                </a:solidFill>
-                <a:latin typeface="Calibri"/>
-              </a:rPr>
-              <a:t>Diagrama de despliegue: red, zonas, almacenamiento</a:t>
-            </a:r>
-          </a:p>
-          <a:p>
-            <a:pPr algn="ctr">
-              <a:spcAft>
-                <a:spcPts val="600"/>
-              </a:spcAft>
-            </a:pPr>
-            <a:r>
-              <a:rPr sz="1600" b="0" i="0">
-                <a:solidFill>
-                  <a:srgbClr val="333333"/>
-                </a:solidFill>
-                <a:latin typeface="Calibri"/>
-              </a:rPr>
-              <a:t>Evidencia: Diagrama Deployment en Mermaid en la plataforma del curso (3 zonas + puertos) + tipo de almacenamiento por componente</a:t>
-            </a:r>
-          </a:p>
-          <a:p>
-            <a:pPr algn="ctr">
-              <a:spcAft>
-                <a:spcPts val="600"/>
-              </a:spcAft>
-            </a:pPr>
-            <a:r>
-              <a:rPr sz="1600" b="0" i="0">
-                <a:solidFill>
-                  <a:srgbClr val="333333"/>
-                </a:solidFill>
-                <a:latin typeface="Calibri"/>
-              </a:rPr>
-              <a:t>Siguiente paso = siguiente hito del PI CloudLite</a:t>
-            </a:r>
-          </a:p>
-        </p:txBody>
-      </p:sp>
-      <p:sp>
-        <p:nvSpPr>
-          <p:cNvPr id="6" name="TextBox 5"/>
-          <p:cNvSpPr txBox="1"/>
-          <p:nvPr/>
-        </p:nvSpPr>
-        <p:spPr>
-          <a:xfrm>
-            <a:off x="457200" y="4754880"/>
-            <a:ext cx="11277295" cy="640080"/>
-          </a:xfrm>
-          <a:prstGeom prst="rect">
-            <a:avLst/>
-          </a:prstGeom>
-          <a:noFill/>
-        </p:spPr>
-        <p:txBody>
-          <a:bodyPr wrap="square">
-            <a:spAutoFit/>
-          </a:bodyPr>
-          <a:lstStyle/>
-          <a:p>
-            <a:pPr algn="ctr"/>
-            <a:r>
-              <a:rPr sz="2000" b="1" i="0">
-                <a:solidFill>
-                  <a:srgbClr val="269CCB"/>
-                </a:solidFill>
-                <a:latin typeface="Calibri"/>
-              </a:rPr>
-              <a:t>Teoría al servicio del proyecto</a:t>
+              <a:t>Teoría al servicio del diseño</a:t>
             </a:r>
           </a:p>
         </p:txBody>
@@ -17275,4 +15140,324 @@
   </a:objectDefaults>
   <a:extraClrSchemeLst/>
 </a:theme>
+</file>
+
+<file path=ppt/theme/theme2.xml><?xml version="1.0" encoding="utf-8"?>
+<a:theme xmlns:a="http://schemas.openxmlformats.org/drawingml/2006/main" name="Office Theme">
+  <a:themeElements>
+    <a:clrScheme name="Office">
+      <a:dk1>
+        <a:sysClr val="windowText" lastClr="000000"/>
+      </a:dk1>
+      <a:lt1>
+        <a:sysClr val="window" lastClr="FFFFFF"/>
+      </a:lt1>
+      <a:dk2>
+        <a:srgbClr val="1F497D"/>
+      </a:dk2>
+      <a:lt2>
+        <a:srgbClr val="EEECE1"/>
+      </a:lt2>
+      <a:accent1>
+        <a:srgbClr val="4F81BD"/>
+      </a:accent1>
+      <a:accent2>
+        <a:srgbClr val="C0504D"/>
+      </a:accent2>
+      <a:accent3>
+        <a:srgbClr val="9BBB59"/>
+      </a:accent3>
+      <a:accent4>
+        <a:srgbClr val="8064A2"/>
+      </a:accent4>
+      <a:accent5>
+        <a:srgbClr val="4BACC6"/>
+      </a:accent5>
+      <a:accent6>
+        <a:srgbClr val="F79646"/>
+      </a:accent6>
+      <a:hlink>
+        <a:srgbClr val="0000FF"/>
+      </a:hlink>
+      <a:folHlink>
+        <a:srgbClr val="800080"/>
+      </a:folHlink>
+    </a:clrScheme>
+    <a:fontScheme name="Office">
+      <a:majorFont>
+        <a:latin typeface="Calibri"/>
+        <a:ea typeface=""/>
+        <a:cs typeface=""/>
+        <a:font script="Jpan" typeface="ＭＳ Ｐゴシック"/>
+        <a:font script="Hang" typeface="맑은 고딕"/>
+        <a:font script="Hans" typeface="宋体"/>
+        <a:font script="Hant" typeface="新細明體"/>
+        <a:font script="Arab" typeface="Times New Roman"/>
+        <a:font script="Hebr" typeface="Times New Roman"/>
+        <a:font script="Thai" typeface="Angsana New"/>
+        <a:font script="Ethi" typeface="Nyala"/>
+        <a:font script="Beng" typeface="Vrinda"/>
+        <a:font script="Gujr" typeface="Shruti"/>
+        <a:font script="Khmr" typeface="MoolBoran"/>
+        <a:font script="Knda" typeface="Tunga"/>
+        <a:font script="Guru" typeface="Raavi"/>
+        <a:font script="Cans" typeface="Euphemia"/>
+        <a:font script="Cher" typeface="Plantagenet Cherokee"/>
+        <a:font script="Yiii" typeface="Microsoft Yi Baiti"/>
+        <a:font script="Tibt" typeface="Microsoft Himalaya"/>
+        <a:font script="Thaa" typeface="MV Boli"/>
+        <a:font script="Deva" typeface="Mangal"/>
+        <a:font script="Telu" typeface="Gautami"/>
+        <a:font script="Taml" typeface="Latha"/>
+        <a:font script="Syrc" typeface="Estrangelo Edessa"/>
+        <a:font script="Orya" typeface="Kalinga"/>
+        <a:font script="Mlym" typeface="Kartika"/>
+        <a:font script="Laoo" typeface="DokChampa"/>
+        <a:font script="Sinh" typeface="Iskoola Pota"/>
+        <a:font script="Mong" typeface="Mongolian Baiti"/>
+        <a:font script="Viet" typeface="Times New Roman"/>
+        <a:font script="Uigh" typeface="Microsoft Uighur"/>
+        <a:font script="Geor" typeface="Sylfaen"/>
+      </a:majorFont>
+      <a:minorFont>
+        <a:latin typeface="Calibri"/>
+        <a:ea typeface=""/>
+        <a:cs typeface=""/>
+        <a:font script="Jpan" typeface="ＭＳ Ｐゴシック"/>
+        <a:font script="Hang" typeface="맑은 고딕"/>
+        <a:font script="Hans" typeface="宋体"/>
+        <a:font script="Hant" typeface="新細明體"/>
+        <a:font script="Arab" typeface="Arial"/>
+        <a:font script="Hebr" typeface="Arial"/>
+        <a:font script="Thai" typeface="Cordia New"/>
+        <a:font script="Ethi" typeface="Nyala"/>
+        <a:font script="Beng" typeface="Vrinda"/>
+        <a:font script="Gujr" typeface="Shruti"/>
+        <a:font script="Khmr" typeface="DaunPenh"/>
+        <a:font script="Knda" typeface="Tunga"/>
+        <a:font script="Guru" typeface="Raavi"/>
+        <a:font script="Cans" typeface="Euphemia"/>
+        <a:font script="Cher" typeface="Plantagenet Cherokee"/>
+        <a:font script="Yiii" typeface="Microsoft Yi Baiti"/>
+        <a:font script="Tibt" typeface="Microsoft Himalaya"/>
+        <a:font script="Thaa" typeface="MV Boli"/>
+        <a:font script="Deva" typeface="Mangal"/>
+        <a:font script="Telu" typeface="Gautami"/>
+        <a:font script="Taml" typeface="Latha"/>
+        <a:font script="Syrc" typeface="Estrangelo Edessa"/>
+        <a:font script="Orya" typeface="Kalinga"/>
+        <a:font script="Mlym" typeface="Kartika"/>
+        <a:font script="Laoo" typeface="DokChampa"/>
+        <a:font script="Sinh" typeface="Iskoola Pota"/>
+        <a:font script="Mong" typeface="Mongolian Baiti"/>
+        <a:font script="Viet" typeface="Arial"/>
+        <a:font script="Uigh" typeface="Microsoft Uighur"/>
+        <a:font script="Geor" typeface="Sylfaen"/>
+      </a:minorFont>
+    </a:fontScheme>
+    <a:fmtScheme name="Office">
+      <a:fillStyleLst>
+        <a:solidFill>
+          <a:schemeClr val="phClr"/>
+        </a:solidFill>
+        <a:gradFill rotWithShape="1">
+          <a:gsLst>
+            <a:gs pos="0">
+              <a:schemeClr val="phClr">
+                <a:tint val="50000"/>
+                <a:satMod val="300000"/>
+              </a:schemeClr>
+            </a:gs>
+            <a:gs pos="35000">
+              <a:schemeClr val="phClr">
+                <a:tint val="37000"/>
+                <a:satMod val="300000"/>
+              </a:schemeClr>
+            </a:gs>
+            <a:gs pos="100000">
+              <a:schemeClr val="phClr">
+                <a:tint val="15000"/>
+                <a:satMod val="350000"/>
+              </a:schemeClr>
+            </a:gs>
+          </a:gsLst>
+          <a:lin ang="16200000" scaled="1"/>
+        </a:gradFill>
+        <a:gradFill rotWithShape="1">
+          <a:gsLst>
+            <a:gs pos="0">
+              <a:schemeClr val="phClr">
+                <a:tint val="100000"/>
+                <a:shade val="100000"/>
+                <a:satMod val="130000"/>
+              </a:schemeClr>
+            </a:gs>
+            <a:gs pos="100000">
+              <a:schemeClr val="phClr">
+                <a:tint val="50000"/>
+                <a:shade val="100000"/>
+                <a:satMod val="350000"/>
+              </a:schemeClr>
+            </a:gs>
+          </a:gsLst>
+          <a:lin ang="16200000" scaled="0"/>
+        </a:gradFill>
+      </a:fillStyleLst>
+      <a:lnStyleLst>
+        <a:ln w="9525" cap="flat" cmpd="sng" algn="ctr">
+          <a:solidFill>
+            <a:schemeClr val="phClr">
+              <a:shade val="95000"/>
+              <a:satMod val="105000"/>
+            </a:schemeClr>
+          </a:solidFill>
+          <a:prstDash val="solid"/>
+        </a:ln>
+        <a:ln w="25400" cap="flat" cmpd="sng" algn="ctr">
+          <a:solidFill>
+            <a:schemeClr val="phClr"/>
+          </a:solidFill>
+          <a:prstDash val="solid"/>
+        </a:ln>
+        <a:ln w="38100" cap="flat" cmpd="sng" algn="ctr">
+          <a:solidFill>
+            <a:schemeClr val="phClr"/>
+          </a:solidFill>
+          <a:prstDash val="solid"/>
+        </a:ln>
+      </a:lnStyleLst>
+      <a:effectStyleLst>
+        <a:effectStyle>
+          <a:effectLst>
+            <a:outerShdw blurRad="40000" dist="20000" dir="5400000" rotWithShape="0">
+              <a:srgbClr val="000000">
+                <a:alpha val="38000"/>
+              </a:srgbClr>
+            </a:outerShdw>
+          </a:effectLst>
+        </a:effectStyle>
+        <a:effectStyle>
+          <a:effectLst>
+            <a:outerShdw blurRad="40000" dist="23000" dir="5400000" rotWithShape="0">
+              <a:srgbClr val="000000">
+                <a:alpha val="35000"/>
+              </a:srgbClr>
+            </a:outerShdw>
+          </a:effectLst>
+        </a:effectStyle>
+        <a:effectStyle>
+          <a:effectLst>
+            <a:outerShdw blurRad="40000" dist="23000" dir="5400000" rotWithShape="0">
+              <a:srgbClr val="000000">
+                <a:alpha val="35000"/>
+              </a:srgbClr>
+            </a:outerShdw>
+          </a:effectLst>
+          <a:scene3d>
+            <a:camera prst="orthographicFront">
+              <a:rot lat="0" lon="0" rev="0"/>
+            </a:camera>
+            <a:lightRig rig="threePt" dir="t">
+              <a:rot lat="0" lon="0" rev="1200000"/>
+            </a:lightRig>
+          </a:scene3d>
+          <a:sp3d>
+            <a:bevelT w="63500" h="25400"/>
+          </a:sp3d>
+        </a:effectStyle>
+      </a:effectStyleLst>
+      <a:bgFillStyleLst>
+        <a:solidFill>
+          <a:schemeClr val="phClr"/>
+        </a:solidFill>
+        <a:gradFill rotWithShape="1">
+          <a:gsLst>
+            <a:gs pos="0">
+              <a:schemeClr val="phClr">
+                <a:tint val="40000"/>
+                <a:satMod val="350000"/>
+              </a:schemeClr>
+            </a:gs>
+            <a:gs pos="40000">
+              <a:schemeClr val="phClr">
+                <a:tint val="45000"/>
+                <a:shade val="99000"/>
+                <a:satMod val="350000"/>
+              </a:schemeClr>
+            </a:gs>
+            <a:gs pos="100000">
+              <a:schemeClr val="phClr">
+                <a:shade val="20000"/>
+                <a:satMod val="255000"/>
+              </a:schemeClr>
+            </a:gs>
+          </a:gsLst>
+          <a:path path="circle">
+            <a:fillToRect l="50000" t="-80000" r="50000" b="180000"/>
+          </a:path>
+        </a:gradFill>
+        <a:gradFill rotWithShape="1">
+          <a:gsLst>
+            <a:gs pos="0">
+              <a:schemeClr val="phClr">
+                <a:tint val="80000"/>
+                <a:satMod val="300000"/>
+              </a:schemeClr>
+            </a:gs>
+            <a:gs pos="100000">
+              <a:schemeClr val="phClr">
+                <a:shade val="30000"/>
+                <a:satMod val="200000"/>
+              </a:schemeClr>
+            </a:gs>
+          </a:gsLst>
+          <a:path path="circle">
+            <a:fillToRect l="50000" t="50000" r="50000" b="50000"/>
+          </a:path>
+        </a:gradFill>
+      </a:bgFillStyleLst>
+    </a:fmtScheme>
+  </a:themeElements>
+  <a:objectDefaults>
+    <a:spDef>
+      <a:spPr/>
+      <a:bodyPr/>
+      <a:lstStyle/>
+      <a:style>
+        <a:lnRef idx="1">
+          <a:schemeClr val="accent1"/>
+        </a:lnRef>
+        <a:fillRef idx="3">
+          <a:schemeClr val="accent1"/>
+        </a:fillRef>
+        <a:effectRef idx="2">
+          <a:schemeClr val="accent1"/>
+        </a:effectRef>
+        <a:fontRef idx="minor">
+          <a:schemeClr val="lt1"/>
+        </a:fontRef>
+      </a:style>
+    </a:spDef>
+    <a:lnDef>
+      <a:spPr/>
+      <a:bodyPr/>
+      <a:lstStyle/>
+      <a:style>
+        <a:lnRef idx="2">
+          <a:schemeClr val="accent1"/>
+        </a:lnRef>
+        <a:fillRef idx="0">
+          <a:schemeClr val="accent1"/>
+        </a:fillRef>
+        <a:effectRef idx="1">
+          <a:schemeClr val="accent1"/>
+        </a:effectRef>
+        <a:fontRef idx="minor">
+          <a:schemeClr val="tx1"/>
+        </a:fontRef>
+      </a:style>
+    </a:lnDef>
+  </a:objectDefaults>
+  <a:extraClrSchemeLst/>
+</a:theme>
 </file>
--- a/Arquitectura de Sistemas Computacionales/Clases/Clase 7 - Redes y almacenamiento cloud/Presentacion.pptx
+++ b/Arquitectura de Sistemas Computacionales/Clases/Clase 7 - Redes y almacenamiento cloud/Presentacion.pptx
@@ -36,9 +36,6 @@
     <p:sldId id="284" r:id="rId36"/>
     <p:sldId id="285" r:id="rId37"/>
     <p:sldId id="286" r:id="rId38"/>
-    <p:sldId id="287" r:id="rId39"/>
-    <p:sldId id="288" r:id="rId40"/>
-    <p:sldId id="289" r:id="rId41"/>
   </p:sldIdLst>
   <p:sldSz cx="12191695" cy="6858000" type="screen4x3"/>
   <p:notesSz cx="6858000" cy="9144000"/>
@@ -541,7 +538,131 @@
           <a:p/>
           <a:p>
             <a:r>
-              <a:t>Lo que se califica hoy son 25 de los 100 puntos de la actividad del Corte 2, en tres preguntas: 14 puntos el diagrama de despliegue, 5.5 el tipo de almacenamiento de cada componente y 5.5 la tabla de correspondencia con el C4 Containers.</a:t>
+              <a:t>(Sobre la actividad, no se proyecta) Lo que se califica hoy son 25 de los 100 puntos de la actividad del Corte 2, en tres preguntas: 14 puntos el diagrama de despliegue, 5.5 el tipo de almacenamiento de cada componente y 5.5 la tabla de correspondencia con el C4 Containers.</a:t>
+            </a:r>
+          </a:p>
+          <a:p/>
+          <a:p>
+            <a:r>
+              <a:t>(Sobre la actividad, no se proyecta) Y hay un dato que cambia como se dicta la clase: el entregable NO es una imagen.</a:t>
+            </a:r>
+          </a:p>
+          <a:p/>
+          <a:p>
+            <a:r>
+              <a:t>(Sobre la actividad, no se proyecta) La pregunta 4 se responde con codigo Mermaid pegado en la plataforma del curso, que la plataforma renderiza en la misma pantalla, y 2 de esos 14 puntos son literalmente que renderice sin error.</a:t>
+            </a:r>
+          </a:p>
+          <a:p/>
+          <a:p>
+            <a:r>
+              <a:t>(Sobre la actividad, no se proyecta) El boceto en draw.io o en Excalidraw sigue sirviendo, y es el paso 1 del metodo que se proyecta hoy, pero es un borrador de trabajo: no se entrega y no se califica.</a:t>
+            </a:r>
+          </a:p>
+        </p:txBody>
+      </p:sp>
+      <p:sp>
+        <p:nvSpPr>
+          <p:cNvPr id="4" name="Slide Number Placeholder 3"/>
+          <p:cNvSpPr>
+            <a:spLocks noGrp="1"/>
+          </p:cNvSpPr>
+          <p:nvPr>
+            <p:ph type="sldNum" idx="5" sz="quarter"/>
+          </p:nvPr>
+        </p:nvSpPr>
+        <p:spPr/>
+      </p:sp>
+    </p:spTree>
+  </p:cSld>
+  <p:clrMapOvr>
+    <a:masterClrMapping/>
+  </p:clrMapOvr>
+</p:notes>
+</file>
+
+<file path=ppt/notesSlides/notesSlide10.xml><?xml version="1.0" encoding="utf-8"?>
+<p:notes xmlns:a="http://schemas.openxmlformats.org/drawingml/2006/main" xmlns:p="http://schemas.openxmlformats.org/presentationml/2006/main" xmlns:r="http://schemas.openxmlformats.org/officeDocument/2006/relationships">
+  <p:cSld>
+    <p:spTree>
+      <p:nvGrpSpPr>
+        <p:cNvPr id="1" name=""/>
+        <p:cNvGrpSpPr/>
+        <p:nvPr/>
+      </p:nvGrpSpPr>
+      <p:grpSpPr>
+        <a:xfrm>
+          <a:off x="0" y="0"/>
+          <a:ext cx="0" cy="0"/>
+          <a:chOff x="0" y="0"/>
+          <a:chExt cx="0" cy="0"/>
+        </a:xfrm>
+      </p:grpSpPr>
+      <p:sp>
+        <p:nvSpPr>
+          <p:cNvPr id="2" name="Slide Image Placeholder 1"/>
+          <p:cNvSpPr>
+            <a:spLocks noGrp="1"/>
+          </p:cNvSpPr>
+          <p:nvPr>
+            <p:ph type="sldImg" idx="2"/>
+          </p:nvPr>
+        </p:nvSpPr>
+        <p:spPr/>
+      </p:sp>
+      <p:sp>
+        <p:nvSpPr>
+          <p:cNvPr id="3" name="Notes Placeholder 2"/>
+          <p:cNvSpPr>
+            <a:spLocks noGrp="1"/>
+          </p:cNvSpPr>
+          <p:nvPr>
+            <p:ph type="body" idx="3" sz="quarter"/>
+          </p:nvPr>
+        </p:nvSpPr>
+        <p:spPr/>
+        <p:txBody>
+          <a:bodyPr/>
+          <a:lstStyle/>
+          <a:p>
+            <a:r>
+              <a:t>Estas cuatro aparecen todos los semestres y las cuatro se responden con material que ya esta proyectado.</a:t>
+            </a:r>
+          </a:p>
+          <a:p/>
+          <a:p>
+            <a:r>
+              <a:t>Si un desarrollador necesita entrar, se hace por un unico host intermedio controlado, llamado bastion.</a:t>
+            </a:r>
+          </a:p>
+          <a:p/>
+          <a:p>
+            <a:r>
+              <a:t>Por eso las zonas se llaman Publica, Privada y Datos.</a:t>
+            </a:r>
+          </a:p>
+          <a:p/>
+          <a:p>
+            <a:r>
+              <a:t>El PNG exportado va a la carpeta del Proyecto Integrador, para el informe, y no reemplaza la respuesta.</a:t>
+            </a:r>
+          </a:p>
+          <a:p/>
+          <a:p>
+            <a:r>
+              <a:t>(Sobre la actividad, no se proyecta) Es mas: la rubrica DESCUENTA por nombrar subredes o servicios de un proveedor concreto, asi que escribir VPC, el nombre de una zona de disponibilidad o el de un servicio de marca resta en vez de sumar.</a:t>
+            </a:r>
+          </a:p>
+          <a:p/>
+          <a:p>
+            <a:r>
+              <a:t>(Sobre la actividad, no se proyecta) «Puedo subir mi imagen del diagrama en vez del codigo Mermaid?» No para la pregunta 4: lo que se califica es el diagrama renderizado dentro de la plataforma.</a:t>
+            </a:r>
+          </a:p>
+          <a:p/>
+          <a:p>
+            <a:r>
+              <a:t>(Sobre la actividad, no se proyecta) «Mi sistema es pequeno, solo tiene la aplicacion y la base de datos; igual necesito tres zonas?» Si, y no es burocracia: las tres zonas son 4 puntos y el sentido de la separacion es justamente que el punto de entrada, la logica y los datos tengan grados de exposicion distintos.</a:t>
             </a:r>
           </a:p>
         </p:txBody>
@@ -626,6 +747,12 @@
               <a:t>Ahi esta el amarre: cuando en Killercoda se ejecuto el contenedor publicando un puerto, esa linea era la decision de que superficie queda expuesta, tema de la Clase 6, y hoy esa decision se dibuja.</a:t>
             </a:r>
           </a:p>
+          <a:p/>
+          <a:p>
+            <a:r>
+              <a:t>(Sobre la actividad, no se proyecta) Esto no es decorativo: la pregunta 4 da 2 puntos por que cada componente lleve su puerto etiquetado, y el diagrama de referencia usa exactamente tres, 443 en el edge, 8080 en la API y 5432 en la base de datos, que son los mismos que el estudiante ya escribio en el EXPOSE de su Dockerfile de la Clase 3.</a:t>
+            </a:r>
+          </a:p>
         </p:txBody>
       </p:sp>
       <p:sp>
@@ -699,7 +826,19 @@
           <a:p/>
           <a:p>
             <a:r>
-              <a:t>Conviene ademas nombrar la frontera de confianza, que vale 2 puntos: es la linea donde termina lo que el estudiante controla y empieza lo que no.</a:t>
+              <a:t>Conviene ademas nombrar la frontera de confianza: es la linea donde termina lo que el estudiante controla y empieza lo que no.</a:t>
+            </a:r>
+          </a:p>
+          <a:p/>
+          <a:p>
+            <a:r>
+              <a:t>(Sobre la actividad, no se proyecta) Los 4 puntos de ubicacion de la pregunta 4 se pierden COMPLETOS si la base de datos queda en la zona publica: no es un descuento parcial, es el error que la pregunta esta disenada para detectar.</a:t>
+            </a:r>
+          </a:p>
+          <a:p/>
+          <a:p>
+            <a:r>
+              <a:t>(Sobre la actividad, no se proyecta) Y las tres zonas rotuladas valen otros 4 puntos por si mismas, asi que un diagrama de dos zonas, aunque tenga la base de datos bien puesta, ya empezo perdiendo.</a:t>
             </a:r>
           </a:p>
         </p:txBody>
@@ -842,6 +981,12 @@
               <a:t>Vale la pena escribirlas en el tablero y sostenerlas toda la clase.</a:t>
             </a:r>
           </a:p>
+          <a:p/>
+          <a:p>
+            <a:r>
+              <a:t>Y cada eleccion se justifica nombrando la caracteristica del dato.</a:t>
+            </a:r>
+          </a:p>
         </p:txBody>
       </p:sp>
       <p:sp>
@@ -912,6 +1057,18 @@
               <a:t>Y ahora la otra mitad, que es la que sorprende al docente: si el dominio del estudiante no maneja archivos, imagenes ni documentos adjuntos, la respuesta correcta y completa es declarar que NO necesita almacenamiento de objetos y explicar por que.</a:t>
             </a:r>
           </a:p>
+          <a:p/>
+          <a:p>
+            <a:r>
+              <a:t>(Sobre la actividad, no se proyecta) La rubrica lo dice al reves de como el grupo lo espera: suma completo quien lo declare y justifique, y se descuenta a quien agregue un almacen de objetos sin un dato que lo pida.</a:t>
+            </a:r>
+          </a:p>
+          <a:p/>
+          <a:p>
+            <a:r>
+              <a:t>(Sobre la actividad, no se proyecta) Hay que anunciarlo antes del taller, porque si no medio salon inventa un bucket «porque suena a cloud» y pierde puntos por agregar.</a:t>
+            </a:r>
+          </a:p>
         </p:txBody>
       </p:sp>
       <p:sp>
@@ -979,7 +1136,19 @@
           <a:lstStyle/>
           <a:p>
             <a:r>
-              <a:t>Queda la trazabilidad, donde mas puntos se pierden y donde vive una pregunta entera.</a:t>
+              <a:t>(Sobre la actividad, no se proyecta) Queda la trazabilidad, donde mas puntos se pierden y donde vive una pregunta entera.</a:t>
+            </a:r>
+          </a:p>
+          <a:p/>
+          <a:p>
+            <a:r>
+              <a:t>(Sobre la actividad, no se proyecta) Los 5.5 puntos se reparten asi, y conviene decirlo en voz alta: 2 puntos la explicacion de por que los nombres deben coincidir, y la respuesta esperada es que los dos diagramas son el MISMO sistema visto desde angulos distintos, uno dice que piezas hay y el otro donde se ejecutan; 2.5 puntos la tabla completa, con una fila por componente y su zona; y 1 punto listar los renombres que se aplicaron, o declarar explicitamente que no hubo ninguno, que tambien vale.</a:t>
+            </a:r>
+          </a:p>
+          <a:p/>
+          <a:p>
+            <a:r>
+              <a:t>(Sobre la actividad, no se proyecta) La trampa esta en la palabra completa: se descuenta si la tabla deja fuera un componente que si aparece en alguno de los dos diagramas, asi que hay que instruir el gesto de llenarla con los dos diagramas abiertos al lado y contando cajas.</a:t>
             </a:r>
           </a:p>
         </p:txBody>
@@ -1049,31 +1218,7 @@
           <a:lstStyle/>
           <a:p>
             <a:r>
-              <a:t>Hay cinco cosas que el docente debe poder explicar sin titubear.</a:t>
-            </a:r>
-          </a:p>
-          <a:p/>
-          <a:p>
-            <a:r>
-              <a:t>Se escribe flowchart LR, donde LR significa de izquierda a derecha, y es lo que hace que el recorrido cliente, edge, aplicacion, datos se lea como un flujo y no como una torre.</a:t>
-            </a:r>
-          </a:p>
-          <a:p/>
-          <a:p>
-            <a:r>
-              <a:t>Vale la pena senalar la caja de la base de datos y decir «esta forma, dentro de este subgraph, son 4 de los 14 puntos».</a:t>
-            </a:r>
-          </a:p>
-          <a:p/>
-          <a:p>
-            <a:r>
-              <a:t>Dos advertencias practicas.</a:t>
-            </a:r>
-          </a:p>
-          <a:p/>
-          <a:p>
-            <a:r>
-              <a:t>Sirven para dejar una nota al evaluador, no para responder.</a:t>
+              <a:t>(Sobre la actividad, no se proyecta) Ese recorrido, con cada flecha etiquetada con protocolo y puerto y cada caja dentro de su zona, es la estructura que la pregunta 4 califica; lo que se pega en la plataforma es su version en Mermaid, que es la seccion siguiente.</a:t>
             </a:r>
           </a:p>
         </p:txBody>
@@ -1143,25 +1288,43 @@
           <a:lstStyle/>
           <a:p>
             <a:r>
-              <a:t>Estas cuatro aparecen todos los semestres y las cuatro se responden con material que ya esta proyectado.</a:t>
+              <a:t>Hay cinco cosas que el docente debe poder explicar sin titubear.</a:t>
             </a:r>
           </a:p>
           <a:p/>
           <a:p>
             <a:r>
-              <a:t>Si un desarrollador necesita entrar, se hace por un unico host intermedio controlado, llamado bastion.</a:t>
+              <a:t>Se escribe flowchart LR, donde LR significa de izquierda a derecha, y es lo que hace que el recorrido cliente, edge, aplicacion, datos se lea como un flujo y no como una torre.</a:t>
             </a:r>
           </a:p>
           <a:p/>
           <a:p>
             <a:r>
-              <a:t>Por eso las zonas se llaman Publica, Privada y Datos.</a:t>
+              <a:t>Dos advertencias practicas.</a:t>
             </a:r>
           </a:p>
           <a:p/>
           <a:p>
             <a:r>
-              <a:t>El PNG exportado va a la carpeta del Proyecto Integrador, para el informe, y no reemplaza la respuesta.</a:t>
+              <a:t>Sirven para dejar una nota al evaluador, no para responder.</a:t>
+            </a:r>
+          </a:p>
+          <a:p/>
+          <a:p>
+            <a:r>
+              <a:t>(Sobre la actividad, no se proyecta) La diapositiva del molde existe porque el estudiante puede tener el modelo correcto en la cabeza y perder puntos por sintaxis, y porque 2 de los 14 son que el diagrama renderice.</a:t>
+            </a:r>
+          </a:p>
+          <a:p/>
+          <a:p>
+            <a:r>
+              <a:t>(Sobre la actividad, no se proyecta) Vale la pena senalar la caja de la base de datos y decir «esta forma, dentro de este subgraph, son 4 de los 14 puntos».</a:t>
+            </a:r>
+          </a:p>
+          <a:p/>
+          <a:p>
+            <a:r>
+              <a:t>(Sobre la actividad, no se proyecta) Si no se dibuja, se corrige ahi mismo; nadie califica un codigo que no dibuja.</a:t>
             </a:r>
           </a:p>
         </p:txBody>
@@ -4636,7 +4799,7 @@
                 </a:solidFill>
                 <a:latin typeface="Calibri"/>
               </a:rPr>
-              <a:t>IP, puerto y protocolo: las tres etiquetas de cada flecha (2/2)</a:t>
+              <a:t>Subred publica y privada: lo definen las rutas, no el nombre (1/2)</a:t>
             </a:r>
           </a:p>
         </p:txBody>
@@ -4675,7 +4838,7 @@
                 </a:solidFill>
                 <a:latin typeface="Calibri"/>
               </a:rPr>
-              <a:t>–   Nada impide correr una base de datos en el 9999, pero cambiar la convencion confunde a quien opera.</a:t>
+              <a:t>–   Una subred es una subdivision de una red, y lo que la hace publica o privada no es su nombre sino sus rutas.</a:t>
             </a:r>
           </a:p>
           <a:p>
@@ -4691,7 +4854,7 @@
                 </a:solidFill>
                 <a:latin typeface="Calibri"/>
               </a:rPr>
-              <a:t>–   Esto no es decorativo: la pregunta 4 da 2 puntos por que cada componente lleve su puerto etiquetado</a:t>
+              <a:t>–   Una subred publica tiene camino de entrada desde internet: alguien de afuera puede iniciar una conexion hacia lo que vive ahi.</a:t>
             </a:r>
           </a:p>
           <a:p>
@@ -4707,7 +4870,23 @@
                 </a:solidFill>
                 <a:latin typeface="Calibri"/>
               </a:rPr>
-              <a:t>–   Y el diagrama de referencia usa exactamente tres, 443 en el edge, 8080 en la API y 5432 en la base de datos, que son los mismos que el estudiante ya escribio en el EXPOSE de su Dockerfile de la Clase 3.</a:t>
+              <a:t>–   Sobre esa distincion se construye la regla de las zonas, con tres nombres exactos porque son tres zonas y no dos: en la zona PUBLICA van el punto de entrada, el balanceador o proxy inverso</a:t>
+            </a:r>
+          </a:p>
+          <a:p>
+            <a:pPr>
+              <a:spcAft>
+                <a:spcPts val="800"/>
+              </a:spcAft>
+            </a:pPr>
+            <a:r>
+              <a:rPr sz="2000" b="0" i="0">
+                <a:solidFill>
+                  <a:srgbClr val="333333"/>
+                </a:solidFill>
+                <a:latin typeface="Calibri"/>
+              </a:rPr>
+              <a:t>–   Y la aplicacion web estatica, que es publica sin que eso sea una fuga porque no lleva secretos dentro; el cliente que llega de internet se dibuja FUERA de las tres zonas</a:t>
             </a:r>
           </a:p>
         </p:txBody>
@@ -4888,7 +5067,7 @@
                 </a:solidFill>
                 <a:latin typeface="Calibri"/>
               </a:rPr>
-              <a:t>Subred publica y privada: lo definen las rutas, no el nombre (1/2)</a:t>
+              <a:t>Subred publica y privada: lo definen las rutas, no el nombre (2/2)</a:t>
             </a:r>
           </a:p>
         </p:txBody>
@@ -4927,7 +5106,7 @@
                 </a:solidFill>
                 <a:latin typeface="Calibri"/>
               </a:rPr>
-              <a:t>–   Una subred es una subdivision de una red, y lo que la hace publica o privada no es su nombre sino sus rutas.</a:t>
+              <a:t>–   Porque es el actor y no una pieza que el estudiante despliegue; la API va en la zona PRIVADA, alcanzable solo desde el edge; y los datos van en una tercera zona, la de DATOS, que solo acepta conexiones desde la aplicacion y no tiene salida a internet.</a:t>
             </a:r>
           </a:p>
           <a:p>
@@ -4943,55 +5122,7 @@
                 </a:solidFill>
                 <a:latin typeface="Calibri"/>
               </a:rPr>
-              <a:t>–   Una subred publica tiene camino de entrada desde internet: alguien de afuera puede iniciar una conexion hacia lo que vive ahi.</a:t>
-            </a:r>
-          </a:p>
-          <a:p>
-            <a:pPr>
-              <a:spcAft>
-                <a:spcPts val="800"/>
-              </a:spcAft>
-            </a:pPr>
-            <a:r>
-              <a:rPr sz="2000" b="0" i="0">
-                <a:solidFill>
-                  <a:srgbClr val="333333"/>
-                </a:solidFill>
-                <a:latin typeface="Calibri"/>
-              </a:rPr>
-              <a:t>–   Sobre esa distincion se construye la regla que se evalua hoy, y hay que decirla con los tres nombres exactos porque son tres zonas y no dos: en la zona PUBLICA van el punto de entrada, el balanceador o proxy inverso</a:t>
-            </a:r>
-          </a:p>
-          <a:p>
-            <a:pPr>
-              <a:spcAft>
-                <a:spcPts val="800"/>
-              </a:spcAft>
-            </a:pPr>
-            <a:r>
-              <a:rPr sz="2000" b="0" i="0">
-                <a:solidFill>
-                  <a:srgbClr val="333333"/>
-                </a:solidFill>
-                <a:latin typeface="Calibri"/>
-              </a:rPr>
-              <a:t>–   Y la aplicacion web estatica, que es publica sin que eso sea una fuga porque no lleva secretos dentro; el cliente que llega de internet se dibuja FUERA de las tres zonas, porque es el actor y no una pieza que el estudiante despliegue</a:t>
-            </a:r>
-          </a:p>
-          <a:p>
-            <a:pPr>
-              <a:spcAft>
-                <a:spcPts val="800"/>
-              </a:spcAft>
-            </a:pPr>
-            <a:r>
-              <a:rPr sz="2000" b="0" i="0">
-                <a:solidFill>
-                  <a:srgbClr val="333333"/>
-                </a:solidFill>
-                <a:latin typeface="Calibri"/>
-              </a:rPr>
-              <a:t>–   Y por eso es una de las dos filas sin par de la tabla de la pregunta 6; la API va en la zona PRIVADA, alcanzable solo desde el edge; y los datos van en una tercera zona, la de DATOS, que solo acepta conexiones desde la aplicacion y no tiene salida a internet.</a:t>
+              <a:t>–   En CloudLite las mas faciles de senalar son las dos flechas que salen a lo que no es suyo, la pasarela de pagos y el correo transaccional: ninguno de los dos esta en las tres zonas, y la del molde que se proyecta es la de la pasarela.</a:t>
             </a:r>
           </a:p>
         </p:txBody>
@@ -5172,7 +5303,7 @@
                 </a:solidFill>
                 <a:latin typeface="Calibri"/>
               </a:rPr>
-              <a:t>Subred publica y privada: lo definen las rutas, no el nombre (2/2)</a:t>
+              <a:t>DNS y balanceador de carga (1/2)</a:t>
             </a:r>
           </a:p>
         </p:txBody>
@@ -5211,7 +5342,7 @@
                 </a:solidFill>
                 <a:latin typeface="Calibri"/>
               </a:rPr>
-              <a:t>–   Los 4 puntos de ubicacion de la pregunta 4 se pierden COMPLETOS si la base de datos queda en la zona publica: no es un descuento parcial, es el error que la pregunta esta disenada para detectar.</a:t>
+              <a:t>–   Dos piezas mas hay que explicar sin titubear.</a:t>
             </a:r>
           </a:p>
           <a:p>
@@ -5227,7 +5358,7 @@
                 </a:solidFill>
                 <a:latin typeface="Calibri"/>
               </a:rPr>
-              <a:t>–   Y las tres zonas rotuladas valen otros 4 puntos por si mismas, asi que un diagrama de dos zonas, aunque tenga la base de datos bien puesta, ya empezo perdiendo.</a:t>
+              <a:t>–   El DNS es el directorio distribuido que traduce un nombre legible, como cloudlite.example, en la direccion IP donde atiende el servicio; el registro tipo A apunta un nombre a una IP y el CNAME apunta un nombre a otro nombre.</a:t>
             </a:r>
           </a:p>
           <a:p>
@@ -5243,7 +5374,23 @@
                 </a:solidFill>
                 <a:latin typeface="Calibri"/>
               </a:rPr>
-              <a:t>–   En CloudLite las mas faciles de senalar son las dos flechas que salen a lo que no es suyo, la pasarela de pagos y el correo transaccional: ninguno de los dos esta en las tres zonas, y la del molde que se proyecta es la de la pasarela.</a:t>
+              <a:t>–   Cada registro tiene un TTL, los segundos que los demas guardan la respuesta en cache; tipicamente de 300 a 3600, asi que un cambio de direccion no es instantaneo para todos.</a:t>
+            </a:r>
+          </a:p>
+          <a:p>
+            <a:pPr>
+              <a:spcAft>
+                <a:spcPts val="800"/>
+              </a:spcAft>
+            </a:pPr>
+            <a:r>
+              <a:rPr sz="2000" b="0" i="0">
+                <a:solidFill>
+                  <a:srgbClr val="333333"/>
+                </a:solidFill>
+                <a:latin typeface="Calibri"/>
+              </a:rPr>
+              <a:t>–   Su funcion menos obvia y mas importante es el chequeo de salud: consulta un endpoint como /health, por convencion cada 10 a 30 segundos, y si falla dos o tres veces seguidas retira esa instancia de la rotacion hasta que responda.</a:t>
             </a:r>
           </a:p>
         </p:txBody>
@@ -5424,7 +5571,7 @@
                 </a:solidFill>
                 <a:latin typeface="Calibri"/>
               </a:rPr>
-              <a:t>DNS y balanceador de carga (1/2)</a:t>
+              <a:t>DNS y balanceador de carga (2/2)</a:t>
             </a:r>
           </a:p>
         </p:txBody>
@@ -5463,7 +5610,7 @@
                 </a:solidFill>
                 <a:latin typeface="Calibri"/>
               </a:rPr>
-              <a:t>–   Dos piezas mas hay que explicar sin titubear.</a:t>
+              <a:t>–   Es tambien donde termina el TLS, es decir donde se descifra HTTPS.</a:t>
             </a:r>
           </a:p>
           <a:p>
@@ -5479,39 +5626,7 @@
                 </a:solidFill>
                 <a:latin typeface="Calibri"/>
               </a:rPr>
-              <a:t>–   El DNS es el directorio distribuido que traduce un nombre legible, como cloudlite.example, en la direccion IP donde atiende el servicio; el registro tipo A apunta un nombre a una IP y el CNAME apunta un nombre a otro nombre.</a:t>
-            </a:r>
-          </a:p>
-          <a:p>
-            <a:pPr>
-              <a:spcAft>
-                <a:spcPts val="800"/>
-              </a:spcAft>
-            </a:pPr>
-            <a:r>
-              <a:rPr sz="2000" b="0" i="0">
-                <a:solidFill>
-                  <a:srgbClr val="333333"/>
-                </a:solidFill>
-                <a:latin typeface="Calibri"/>
-              </a:rPr>
-              <a:t>–   Cada registro tiene un TTL, los segundos que los demas guardan la respuesta en cache; tipicamente de 300 a 3600, asi que un cambio de direccion no es instantaneo para todos.</a:t>
-            </a:r>
-          </a:p>
-          <a:p>
-            <a:pPr>
-              <a:spcAft>
-                <a:spcPts val="800"/>
-              </a:spcAft>
-            </a:pPr>
-            <a:r>
-              <a:rPr sz="2000" b="0" i="0">
-                <a:solidFill>
-                  <a:srgbClr val="333333"/>
-                </a:solidFill>
-                <a:latin typeface="Calibri"/>
-              </a:rPr>
-              <a:t>–   Su funcion menos obvia y mas importante es el chequeo de salud: consulta un endpoint como /health, por convencion cada 10 a 30 segundos, y si falla dos o tres veces seguidas retira esa instancia de la rotacion hasta que responda.</a:t>
+              <a:t>–   En el diagrama de hoy el balanceador es el habitante de la zona publica, y el /health que consulta es el mismo contrato de salud que se verifico con curl en la Clase 3 y el primer monitoreo real de la Clase 8.</a:t>
             </a:r>
           </a:p>
         </p:txBody>
@@ -5692,7 +5807,7 @@
                 </a:solidFill>
                 <a:latin typeface="Calibri"/>
               </a:rPr>
-              <a:t>DNS y balanceador de carga (2/2)</a:t>
+              <a:t>Los tres nombres de almacenamiento (1/3)</a:t>
             </a:r>
           </a:p>
         </p:txBody>
@@ -5731,7 +5846,7 @@
                 </a:solidFill>
                 <a:latin typeface="Calibri"/>
               </a:rPr>
-              <a:t>–   Es tambien donde termina el TLS, es decir donde se descifra HTTPS.</a:t>
+              <a:t>–   El almacenamiento se decide por la caracteristica del dato, y aqui hay que ser estricto con el vocabulario: se usan TRES palabras y no mas: Relacional, Bloque y Objeto.</a:t>
             </a:r>
           </a:p>
           <a:p>
@@ -5747,7 +5862,39 @@
                 </a:solidFill>
                 <a:latin typeface="Calibri"/>
               </a:rPr>
-              <a:t>–   En el diagrama de hoy el balanceador es el habitante de la zona publica, y el /health que consulta es el mismo contrato de salud que se verifico con curl en la Clase 3 y el primer monitoreo real de la Clase 8.</a:t>
+              <a:t>–   RELACIONAL es el motor de base de datos que guarda registros estructurados y permite cruzarlos con consultas y transacciones; la caracteristica del dato que lo exige es que ese dato se cruza con otro dato, y la prueba es que existe una consulta que los junta.</a:t>
+            </a:r>
+          </a:p>
+          <a:p>
+            <a:pPr>
+              <a:spcAft>
+                <a:spcPts val="800"/>
+              </a:spcAft>
+            </a:pPr>
+            <a:r>
+              <a:rPr sz="2000" b="0" i="0">
+                <a:solidFill>
+                  <a:srgbClr val="333333"/>
+                </a:solidFill>
+                <a:latin typeface="Calibri"/>
+              </a:rPr>
+              <a:t>–   BLOQUE es un disco crudo que el sistema operativo formatea y monta; se conecta a una sola instancia a la vez, es lo que hay debajo del volumen de un contenedor</a:t>
+            </a:r>
+          </a:p>
+          <a:p>
+            <a:pPr>
+              <a:spcAft>
+                <a:spcPts val="800"/>
+              </a:spcAft>
+            </a:pPr>
+            <a:r>
+              <a:rPr sz="2000" b="0" i="0">
+                <a:solidFill>
+                  <a:srgbClr val="333333"/>
+                </a:solidFill>
+                <a:latin typeface="Calibri"/>
+              </a:rPr>
+              <a:t>–   Y se mide en gigabytes y en IOPS, operaciones de lectura y escritura por segundo; la caracteristica que lo exige es que el dato lo monta un solo proceso y se escribe por partes, sin recuperarse entero.</a:t>
             </a:r>
           </a:p>
         </p:txBody>
@@ -5928,7 +6075,7 @@
                 </a:solidFill>
                 <a:latin typeface="Calibri"/>
               </a:rPr>
-              <a:t>Los tres nombres de almacenamiento que califica la pregunta 5 (1/3)</a:t>
+              <a:t>Los tres nombres de almacenamiento (2/3)</a:t>
             </a:r>
           </a:p>
         </p:txBody>
@@ -5967,7 +6114,7 @@
                 </a:solidFill>
                 <a:latin typeface="Calibri"/>
               </a:rPr>
-              <a:t>–   El almacenamiento se decide por la caracteristica del dato, y aqui hay que ser estricto con el vocabulario porque la pregunta 5 admite TRES palabras y no mas: Relacional, Bloque y Objeto.</a:t>
+              <a:t>–   OBJETO no tiene carpetas reales: es un espacio plano de contenedores llamados buckets donde cada objeto se guarda bajo una clave, se lee y escribe por HTTP y se reemplaza completo en vez de editarse por partes</a:t>
             </a:r>
           </a:p>
           <a:p>
@@ -5983,7 +6130,7 @@
                 </a:solidFill>
                 <a:latin typeface="Calibri"/>
               </a:rPr>
-              <a:t>–   RELACIONAL es el motor de base de datos que guarda registros estructurados y permite cruzarlos con consultas y transacciones; la caracteristica del dato que lo exige es que ese dato se cruza con otro dato, y la prueba es que existe una consulta que los junta.</a:t>
+              <a:t>–   Es practicamente ilimitado, barato y accesible por URL; la caracteristica que lo exige es que el dato se recupera entero, sin partes.</a:t>
             </a:r>
           </a:p>
           <a:p>
@@ -5999,7 +6146,7 @@
                 </a:solidFill>
                 <a:latin typeface="Calibri"/>
               </a:rPr>
-              <a:t>–   BLOQUE es un disco crudo que el sistema operativo formatea y monta; se conecta a una sola instancia a la vez, es lo que hay debajo del volumen de un contenedor</a:t>
+              <a:t>–   Hay una cuarta categoria en la literatura, el almacenamiento de ARCHIVOS, un sistema de archivos compartido que varias instancias montan por red</a:t>
             </a:r>
           </a:p>
           <a:p>
@@ -6015,7 +6162,23 @@
                 </a:solidFill>
                 <a:latin typeface="Calibri"/>
               </a:rPr>
-              <a:t>–   Y se mide en gigabytes y en IOPS, operaciones de lectura y escritura por segundo; la caracteristica que lo exige es que el dato lo monta un solo proceso y se escribe por partes, sin recuperarse entero.</a:t>
+              <a:t>–   Conviene nombrarla como contraste para que nadie se sienta enganado, pero no es una de las tres palabras que la pregunta admite</a:t>
+            </a:r>
+          </a:p>
+          <a:p>
+            <a:pPr>
+              <a:spcAft>
+                <a:spcPts val="800"/>
+              </a:spcAft>
+            </a:pPr>
+            <a:r>
+              <a:rPr sz="2000" b="0" i="0">
+                <a:solidFill>
+                  <a:srgbClr val="333333"/>
+                </a:solidFill>
+                <a:latin typeface="Calibri"/>
+              </a:rPr>
+              <a:t>–   Y quien cree necesitarla casi siempre esta describiendo un caso que en la nube se resuelve con objeto.</a:t>
             </a:r>
           </a:p>
         </p:txBody>
@@ -6196,7 +6359,7 @@
                 </a:solidFill>
                 <a:latin typeface="Calibri"/>
               </a:rPr>
-              <a:t>Los tres nombres de almacenamiento que califica la pregunta 5 (2/3)</a:t>
+              <a:t>Los tres nombres de almacenamiento (3/3)</a:t>
             </a:r>
           </a:p>
         </p:txBody>
@@ -6235,7 +6398,7 @@
                 </a:solidFill>
                 <a:latin typeface="Calibri"/>
               </a:rPr>
-              <a:t>–   OBJETO no tiene carpetas reales: es un espacio plano de contenedores llamados buckets donde cada objeto se guarda bajo una clave, se lee y escribe por HTTP y se reemplaza completo en vez de editarse por partes</a:t>
+              <a:t>–   El numero que ordena la decision es el precio relativo: un gigabyte al mes en objetos cuesta del orden de dos a tres centavos de dolar, en disco de bloque cerca de cuatro veces mas, y en base de datos gestionada aun mas porque se paga computo.</a:t>
             </a:r>
           </a:p>
           <a:p>
@@ -6251,7 +6414,7 @@
                 </a:solidFill>
                 <a:latin typeface="Calibri"/>
               </a:rPr>
-              <a:t>–   Es practicamente ilimitado, barato y accesible por URL; la caracteristica que lo exige es que el dato se recupera entero, sin partes.</a:t>
+              <a:t>–   Son referencias de mercado, no reglas fijas, y aqui no se aprovisiona nada de pago: el valor esta en justificar.</a:t>
             </a:r>
           </a:p>
           <a:p>
@@ -6267,55 +6430,7 @@
                 </a:solidFill>
                 <a:latin typeface="Calibri"/>
               </a:rPr>
-              <a:t>–   Hay una cuarta categoria en la literatura, el almacenamiento de ARCHIVOS, un sistema de archivos compartido que varias instancias montan por red</a:t>
-            </a:r>
-          </a:p>
-          <a:p>
-            <a:pPr>
-              <a:spcAft>
-                <a:spcPts val="800"/>
-              </a:spcAft>
-            </a:pPr>
-            <a:r>
-              <a:rPr sz="2000" b="0" i="0">
-                <a:solidFill>
-                  <a:srgbClr val="333333"/>
-                </a:solidFill>
-                <a:latin typeface="Calibri"/>
-              </a:rPr>
-              <a:t>–   Conviene nombrarla como contraste para que nadie se sienta enganado, pero no es una de las tres palabras que la pregunta admite</a:t>
-            </a:r>
-          </a:p>
-          <a:p>
-            <a:pPr>
-              <a:spcAft>
-                <a:spcPts val="800"/>
-              </a:spcAft>
-            </a:pPr>
-            <a:r>
-              <a:rPr sz="2000" b="0" i="0">
-                <a:solidFill>
-                  <a:srgbClr val="333333"/>
-                </a:solidFill>
-                <a:latin typeface="Calibri"/>
-              </a:rPr>
-              <a:t>–   Y quien cree necesitarla casi siempre esta describiendo un caso que en la nube se resuelve con objeto.</a:t>
-            </a:r>
-          </a:p>
-          <a:p>
-            <a:pPr>
-              <a:spcAft>
-                <a:spcPts val="800"/>
-              </a:spcAft>
-            </a:pPr>
-            <a:r>
-              <a:rPr sz="2000" b="0" i="0">
-                <a:solidFill>
-                  <a:srgbClr val="333333"/>
-                </a:solidFill>
-                <a:latin typeface="Calibri"/>
-              </a:rPr>
-              <a:t>–   El numero que ordena la decision es el precio relativo: un gigabyte al mes en objetos cuesta del orden de dos a tres centavos de dolar, en disco de bloque cerca de cuatro veces mas, y en base de datos gestionada aun mas porque se paga computo.</a:t>
+              <a:t>–   «Es mas rapido», «es lo que usa todo el mundo» o «es lo normal» no son caracteristicas del dato y no suman ni un punto, aunque el tipo elegido sea el correcto.</a:t>
             </a:r>
           </a:p>
         </p:txBody>
@@ -6496,7 +6611,7 @@
                 </a:solidFill>
                 <a:latin typeface="Calibri"/>
               </a:rPr>
-              <a:t>Los tres nombres de almacenamiento que califica la pregunta 5 (3/3)</a:t>
+              <a:t>El caso de la foto de perfil, y cuando la respuesta correcta es «no necesito objeto» (1/2)</a:t>
             </a:r>
           </a:p>
         </p:txBody>
@@ -6535,7 +6650,7 @@
                 </a:solidFill>
                 <a:latin typeface="Calibri"/>
               </a:rPr>
-              <a:t>–   Son referencias de mercado, no reglas fijas, y aqui no se aprovisiona nada de pago: el valor esta en justificar.</a:t>
+              <a:t>–   El ejemplo que hace visible la decision, y el error de diseno que conviene provocar: CloudLite permite subir una foto de perfil o adjuntar un PDF.</a:t>
             </a:r>
           </a:p>
           <a:p>
@@ -6551,7 +6666,7 @@
                 </a:solidFill>
                 <a:latin typeface="Calibri"/>
               </a:rPr>
-              <a:t>–   Y la justificacion se califica aparte, 2.5 de los 5.5 puntos: cada fila tiene que nombrar la caracteristica del dato.</a:t>
+              <a:t>–   La solucion ingenua es guardar el archivo en una columna binaria de la base de datos.</a:t>
             </a:r>
           </a:p>
           <a:p>
@@ -6567,7 +6682,23 @@
                 </a:solidFill>
                 <a:latin typeface="Calibri"/>
               </a:rPr>
-              <a:t>–   «Es mas rapido», «es lo que usa todo el mundo» o «es lo normal» no son caracteristicas del dato y no suman ni un punto, aunque el tipo elegido sea el correcto.</a:t>
+              <a:t>–   Hay que dejar que el estudiante la proponga y luego cuantificarla: dos megabytes por usuario y cinco mil usuarios son diez gigabytes de binarios dentro de una base cuyos datos utiles podrian ser doscientos megabytes</a:t>
+            </a:r>
+          </a:p>
+          <a:p>
+            <a:pPr>
+              <a:spcAft>
+                <a:spcPts val="800"/>
+              </a:spcAft>
+            </a:pPr>
+            <a:r>
+              <a:rPr sz="2000" b="0" i="0">
+                <a:solidFill>
+                  <a:srgbClr val="333333"/>
+                </a:solidFill>
+                <a:latin typeface="Calibri"/>
+              </a:rPr>
+              <a:t>–   Cada respaldo arrastra esos diez gigabytes y la cache del motor se llena de bytes que ninguna consulta filtra.</a:t>
             </a:r>
           </a:p>
         </p:txBody>
@@ -6748,7 +6879,7 @@
                 </a:solidFill>
                 <a:latin typeface="Calibri"/>
               </a:rPr>
-              <a:t>El caso de la foto de perfil, y cuando la respuesta correcta es «no necesito objeto» (1/2)</a:t>
+              <a:t>El caso de la foto de perfil, y cuando la respuesta correcta es «no necesito objeto» (2/2)</a:t>
             </a:r>
           </a:p>
         </p:txBody>
@@ -6787,7 +6918,7 @@
                 </a:solidFill>
                 <a:latin typeface="Calibri"/>
               </a:rPr>
-              <a:t>–   El ejemplo que hace visible la decision, y el error de diseno que conviene provocar: CloudLite permite subir una foto de perfil o adjuntar un PDF.</a:t>
+              <a:t>–   El diseno correcto separa: el archivo va a almacenamiento de objetos y la base guarda una fila con la clave del objeto, el dueno, el tamano, el tipo de contenido y la fecha.</a:t>
             </a:r>
           </a:p>
           <a:p>
@@ -6803,7 +6934,7 @@
                 </a:solidFill>
                 <a:latin typeface="Calibri"/>
               </a:rPr>
-              <a:t>–   La solucion ingenua es guardar el archivo en una columna binaria de la base de datos.</a:t>
+              <a:t>–   Hay una razon adicional: un contenedor es efimero, lo que se escriba en su sistema de archivos desaparece cuando se reemplaza, y con dos instancias detras del balanceador el archivo subido a una no existe en la otra.</a:t>
             </a:r>
           </a:p>
           <a:p>
@@ -6819,39 +6950,7 @@
                 </a:solidFill>
                 <a:latin typeface="Calibri"/>
               </a:rPr>
-              <a:t>–   Hay que dejar que el estudiante la proponga y luego cuantificarla: dos megabytes por usuario y cinco mil usuarios son diez gigabytes de binarios dentro de una base cuyos datos utiles podrian ser doscientos megabytes</a:t>
-            </a:r>
-          </a:p>
-          <a:p>
-            <a:pPr>
-              <a:spcAft>
-                <a:spcPts val="800"/>
-              </a:spcAft>
-            </a:pPr>
-            <a:r>
-              <a:rPr sz="2000" b="0" i="0">
-                <a:solidFill>
-                  <a:srgbClr val="333333"/>
-                </a:solidFill>
-                <a:latin typeface="Calibri"/>
-              </a:rPr>
-              <a:t>–   Cada respaldo arrastra esos diez gigabytes y la cache del motor se llena de bytes que ninguna consulta filtra.</a:t>
-            </a:r>
-          </a:p>
-          <a:p>
-            <a:pPr>
-              <a:spcAft>
-                <a:spcPts val="800"/>
-              </a:spcAft>
-            </a:pPr>
-            <a:r>
-              <a:rPr sz="2000" b="0" i="0">
-                <a:solidFill>
-                  <a:srgbClr val="333333"/>
-                </a:solidFill>
-                <a:latin typeface="Calibri"/>
-              </a:rPr>
-              <a:t>–   El diseno correcto separa: el archivo va a almacenamiento de objetos y la base guarda una fila con la clave del objeto, el dueno, el tamano, el tipo de contenido y la fecha.</a:t>
+              <a:t>–   Mantener los contenedores sin estado es la condicion del escalado horizontal de la Clase 13.</a:t>
             </a:r>
           </a:p>
         </p:txBody>
@@ -7032,7 +7131,7 @@
                 </a:solidFill>
                 <a:latin typeface="Calibri"/>
               </a:rPr>
-              <a:t>El caso de la foto de perfil, y cuando la respuesta correcta es «no necesito objeto» (2/2)</a:t>
+              <a:t>Trazabilidad: la tabla de correspondencia (1/2)</a:t>
             </a:r>
           </a:p>
         </p:txBody>
@@ -7071,7 +7170,7 @@
                 </a:solidFill>
                 <a:latin typeface="Calibri"/>
               </a:rPr>
-              <a:t>–   Hay una razon adicional: un contenedor es efimero, lo que se escriba en su sistema de archivos desaparece cuando se reemplaza, y con dos instancias detras del balanceador el archivo subido a una no existe en la otra.</a:t>
+              <a:t>–   Los nombres de las cajas del despliegue deben ser los mismos que los contenedores del C4 Containers de la Clase 4: si alli el servicio se llamaba api-citas, hoy no puede aparecer como backend, ni puede aparecer una caja nueva que nadie declaro.</a:t>
             </a:r>
           </a:p>
           <a:p>
@@ -7087,7 +7186,7 @@
                 </a:solidFill>
                 <a:latin typeface="Calibri"/>
               </a:rPr>
-              <a:t>–   Mantener los contenedores sin estado es la condicion del escalado horizontal de la Clase 13.</a:t>
+              <a:t>–   Se demuestra con una tabla de tres columnas: «Componente en el C4 Containers», «Componente en el Despliegue» y «Zona».</a:t>
             </a:r>
           </a:p>
           <a:p>
@@ -7103,23 +7202,7 @@
                 </a:solidFill>
                 <a:latin typeface="Calibri"/>
               </a:rPr>
-              <a:t>–   La rubrica lo dice al reves de como el grupo lo espera: suma completo quien lo declare y justifique, y se descuenta a quien agregue un almacen de objetos sin un dato que lo pida.</a:t>
-            </a:r>
-          </a:p>
-          <a:p>
-            <a:pPr>
-              <a:spcAft>
-                <a:spcPts val="800"/>
-              </a:spcAft>
-            </a:pPr>
-            <a:r>
-              <a:rPr sz="2000" b="0" i="0">
-                <a:solidFill>
-                  <a:srgbClr val="333333"/>
-                </a:solidFill>
-                <a:latin typeface="Calibri"/>
-              </a:rPr>
-              <a:t>–   Hay que anunciarlo antes del taller, porque si no medio salon inventa un bucket «porque suena a cloud» y pierde puntos por agregar.</a:t>
+              <a:t>–   La cadena aguas abajo es directa: la Clase 6 identifico amenazas y fronteras de confianza en texto y hoy esas fronteras se vuelven zonas dibujadas; la Clase 8 tomara cada flecha para definir que se mide en ella</a:t>
             </a:r>
           </a:p>
         </p:txBody>
@@ -7647,7 +7730,7 @@
                 </a:solidFill>
                 <a:latin typeface="Calibri"/>
               </a:rPr>
-              <a:t>Trazabilidad: la tabla de correspondencia de la pregunta 6 (1/3)</a:t>
+              <a:t>Trazabilidad: la tabla de correspondencia (2/2)</a:t>
             </a:r>
           </a:p>
         </p:txBody>
@@ -7686,7 +7769,7 @@
                 </a:solidFill>
                 <a:latin typeface="Calibri"/>
               </a:rPr>
-              <a:t>–   Los nombres de las cajas del despliegue deben ser los mismos que los contenedores del C4 Containers de la Clase 4: si alli el servicio se llamaba api-citas, hoy no puede aparecer como backend, ni puede aparecer una caja nueva que nadie declaro.</a:t>
+              <a:t>–   Porque no se puede monitorear un camino que no esta dibujado; la Clase 10 costeara estas mismas cajas, asi que la eleccion de almacenamiento es tambien decision de costo; y la Clase 13 discutira cual caja se replica y cual no.</a:t>
             </a:r>
           </a:p>
           <a:p>
@@ -7702,23 +7785,7 @@
                 </a:solidFill>
                 <a:latin typeface="Calibri"/>
               </a:rPr>
-              <a:t>–   La pregunta 6 pide demostrarlo con una tabla de tres columnas cuyos nombres hay que dictar tal cual: «Componente en el C4 Containers», «Componente en el Despliegue» y «Zona».</a:t>
-            </a:r>
-          </a:p>
-          <a:p>
-            <a:pPr>
-              <a:spcAft>
-                <a:spcPts val="800"/>
-              </a:spcAft>
-            </a:pPr>
-            <a:r>
-              <a:rPr sz="2000" b="0" i="0">
-                <a:solidFill>
-                  <a:srgbClr val="333333"/>
-                </a:solidFill>
-                <a:latin typeface="Calibri"/>
-              </a:rPr>
-              <a:t>–   Los 5.5 puntos se reparten asi, y conviene decirlo en voz alta: 2 puntos la explicacion de por que los nombres deben coincidir</a:t>
+              <a:t>–   Todo el bloque se evalua en el Parcial 2 de la Clase 9.</a:t>
             </a:r>
           </a:p>
         </p:txBody>
@@ -7899,7 +7966,7 @@
                 </a:solidFill>
                 <a:latin typeface="Calibri"/>
               </a:rPr>
-              <a:t>Trazabilidad: la tabla de correspondencia de la pregunta 6 (2/3)</a:t>
+              <a:t>Recorrer una peticion de CloudLite de punta a punta (1/2)</a:t>
             </a:r>
           </a:p>
         </p:txBody>
@@ -7938,7 +8005,7 @@
                 </a:solidFill>
                 <a:latin typeface="Calibri"/>
               </a:rPr>
-              <a:t>–   Y la respuesta esperada es que los dos diagramas son el MISMO sistema visto desde angulos distintos, uno dice que piezas hay y el otro donde se ejecutan</a:t>
+              <a:t>–   La mejor forma de dictar la clase es seguir una peticion de CloudLite de punta a punta sobre el diagrama proyectado.</a:t>
             </a:r>
           </a:p>
           <a:p>
@@ -7954,7 +8021,7 @@
                 </a:solidFill>
                 <a:latin typeface="Calibri"/>
               </a:rPr>
-              <a:t>–   2.5 puntos la tabla completa, con una fila por componente y su zona; y 1 punto listar los renombres que se aplicaron, o declarar explicitamente que no hubo ninguno, que tambien vale.</a:t>
+              <a:t>–   Un usuario final abre cloudlite.example en su telefono; el DNS resuelve el nombre a la IP publica del balanceador; el navegador abre una conexion HTTPS al puerto 443 de ese balanceador</a:t>
             </a:r>
           </a:p>
           <a:p>
@@ -7970,7 +8037,23 @@
                 </a:solidFill>
                 <a:latin typeface="Calibri"/>
               </a:rPr>
-              <a:t>–   La trampa esta en la palabra completa: se descuenta si la tabla deja fuera un componente que si aparece en alguno de los dos diagramas, asi que hay que instruir el gesto de llenarla con los dos diagramas abiertos al lado y contando cajas.</a:t>
+              <a:t>–   Que vive en la zona publica; el balanceador elige una de las dos instancias del contenedor de la API, en la zona privada</a:t>
+            </a:r>
+          </a:p>
+          <a:p>
+            <a:pPr>
+              <a:spcAft>
+                <a:spcPts val="800"/>
+              </a:spcAft>
+            </a:pPr>
+            <a:r>
+              <a:rPr sz="2000" b="0" i="0">
+                <a:solidFill>
+                  <a:srgbClr val="333333"/>
+                </a:solidFill>
+                <a:latin typeface="Calibri"/>
+              </a:rPr>
+              <a:t>–   Y le reenvia la peticion por HTTP al puerto 8080; la API consulta el motor de base de datos en la zona de datos por el puerto 5432 y devuelve JSON por el mismo camino.</a:t>
             </a:r>
           </a:p>
         </p:txBody>
@@ -8151,7 +8234,7 @@
                 </a:solidFill>
                 <a:latin typeface="Calibri"/>
               </a:rPr>
-              <a:t>Trazabilidad: la tabla de correspondencia de la pregunta 6 (3/3)</a:t>
+              <a:t>Recorrer una peticion de CloudLite de punta a punta (2/2)</a:t>
             </a:r>
           </a:p>
         </p:txBody>
@@ -8190,7 +8273,7 @@
                 </a:solidFill>
                 <a:latin typeface="Calibri"/>
               </a:rPr>
-              <a:t>–   La cadena aguas abajo es directa: la Clase 6 identifico amenazas y fronteras de confianza en texto y hoy esas fronteras se vuelven zonas dibujadas; la Clase 8 tomara cada flecha para definir que se mide en ella</a:t>
+              <a:t>–   Sirve tambien para citar numeros: una consulta simple bien indexada responde entre 1 y 20 milisegundos, y el objetivo que se formalizara en la Clase 12 suele fijarse por convencion en menos de 300 milisegundos para el 95 por ciento de las peticiones.</a:t>
             </a:r>
           </a:p>
           <a:p>
@@ -8206,23 +8289,7 @@
                 </a:solidFill>
                 <a:latin typeface="Calibri"/>
               </a:rPr>
-              <a:t>–   Porque no se puede monitorear un camino que no esta dibujado; la Clase 10 costeara estas mismas cajas, asi que la eleccion de almacenamiento es tambien decision de costo; y la Clase 13 discutira cual caja se replica y cual no.</a:t>
-            </a:r>
-          </a:p>
-          <a:p>
-            <a:pPr>
-              <a:spcAft>
-                <a:spcPts val="800"/>
-              </a:spcAft>
-            </a:pPr>
-            <a:r>
-              <a:rPr sz="2000" b="0" i="0">
-                <a:solidFill>
-                  <a:srgbClr val="333333"/>
-                </a:solidFill>
-                <a:latin typeface="Calibri"/>
-              </a:rPr>
-              <a:t>–   Todo el bloque se evalua en el Parcial 2 de la Clase 9.</a:t>
+              <a:t>–   Con eso el grupo ve que si una pantalla dispara veinte consultas encadenadas el problema es de diseno y no de servidor.</a:t>
             </a:r>
           </a:p>
         </p:txBody>
@@ -8403,7 +8470,7 @@
                 </a:solidFill>
                 <a:latin typeface="Calibri"/>
               </a:rPr>
-              <a:t>Recorrer una peticion de CloudLite de punta a punta (1/2)</a:t>
+              <a:t>El molde de Mermaid, linea por linea (1/2)</a:t>
             </a:r>
           </a:p>
         </p:txBody>
@@ -8442,7 +8509,7 @@
                 </a:solidFill>
                 <a:latin typeface="Calibri"/>
               </a:rPr>
-              <a:t>–   La mejor forma de dictar la clase es seguir una peticion de CloudLite de punta a punta sobre el diagrama proyectado.</a:t>
+              <a:t>–   Primera: la palabra inicial.</a:t>
             </a:r>
           </a:p>
           <a:p>
@@ -8458,7 +8525,7 @@
                 </a:solidFill>
                 <a:latin typeface="Calibri"/>
               </a:rPr>
-              <a:t>–   Un usuario final abre cloudlite.example en su telefono; el DNS resuelve el nombre a la IP publica del balanceador; el navegador abre una conexion HTTPS al puerto 443 de ese balanceador</a:t>
+              <a:t>–   Segunda: cada zona es un subgraph con su rotulo entre comillas y su propio end.</a:t>
             </a:r>
           </a:p>
           <a:p>
@@ -8474,7 +8541,7 @@
                 </a:solidFill>
                 <a:latin typeface="Calibri"/>
               </a:rPr>
-              <a:t>–   Que vive en la zona publica; el balanceador elige una de las dos instancias del contenedor de la API, en la zona privada</a:t>
+              <a:t>–   Los subgraph son las tres zonas; olvidar un end es la causa numero uno de que el diagrama no se dibuje, porque el bloque queda abierto.</a:t>
             </a:r>
           </a:p>
           <a:p>
@@ -8490,7 +8557,7 @@
                 </a:solidFill>
                 <a:latin typeface="Calibri"/>
               </a:rPr>
-              <a:t>–   Y le reenvia la peticion por HTTP al puerto 8080; la API consulta el motor de base de datos en la zona de datos por el puerto 5432 y devuelve JSON por el mismo camino.</a:t>
+              <a:t>–   Tercera: la forma de la caja dice que es la pieza.</a:t>
             </a:r>
           </a:p>
           <a:p>
@@ -8506,7 +8573,23 @@
                 </a:solidFill>
                 <a:latin typeface="Calibri"/>
               </a:rPr>
-              <a:t>–   Ese recorrido, con cada flecha etiquetada con protocolo y puerto y cada caja dentro de su zona, es la estructura que la pregunta 4 califica; lo que se pega en la plataforma es su version en Mermaid, que es la seccion siguiente.</a:t>
+              <a:t>–   Los corchetes rectos son un proceso o servicio, y la combinacion de corchete y parentesis, es decir abrir corchete parentesis, es la base de datos, que se lee como cilindro.</a:t>
+            </a:r>
+          </a:p>
+          <a:p>
+            <a:pPr>
+              <a:spcAft>
+                <a:spcPts val="800"/>
+              </a:spcAft>
+            </a:pPr>
+            <a:r>
+              <a:rPr sz="2000" b="0" i="0">
+                <a:solidFill>
+                  <a:srgbClr val="333333"/>
+                </a:solidFill>
+                <a:latin typeface="Calibri"/>
+              </a:rPr>
+              <a:t>–   Cuarta: el puerto va DENTRO del rotulo de la caja, separado con la etiqueta de salto de linea de HTML, y la etiqueta de la flecha va entre barras verticales y comillas, con el protocolo y el puerto.</a:t>
             </a:r>
           </a:p>
         </p:txBody>
@@ -8687,7 +8770,7 @@
                 </a:solidFill>
                 <a:latin typeface="Calibri"/>
               </a:rPr>
-              <a:t>Recorrer una peticion de CloudLite de punta a punta (2/2)</a:t>
+              <a:t>El molde de Mermaid, linea por linea (2/2)</a:t>
             </a:r>
           </a:p>
         </p:txBody>
@@ -8726,7 +8809,7 @@
                 </a:solidFill>
                 <a:latin typeface="Calibri"/>
               </a:rPr>
-              <a:t>–   Sirve tambien para citar numeros: una consulta simple bien indexada responde entre 1 y 20 milisegundos, y el objetivo que se formalizara en la Clase 12 suele fijarse por convencion en menos de 300 milisegundos para el 95 por ciento de las peticiones.</a:t>
+              <a:t>–   Es la forma mas segura de etiquetar los puertos sin ensuciar el dibujo.</a:t>
             </a:r>
           </a:p>
           <a:p>
@@ -8742,7 +8825,71 @@
                 </a:solidFill>
                 <a:latin typeface="Calibri"/>
               </a:rPr>
-              <a:t>–   Con eso el grupo ve que si una pantalla dispara veinte consultas encadenadas el problema es de diseno y no de servidor.</a:t>
+              <a:t>–   Quinta: el servicio externo se declara FUERA de los tres subgraph, y la flecha que llega a el se rotula como frontera de confianza; asi las fronteras quedan visibles en el propio dibujo y no en un comentario aparte.</a:t>
+            </a:r>
+          </a:p>
+          <a:p>
+            <a:pPr>
+              <a:spcAft>
+                <a:spcPts val="800"/>
+              </a:spcAft>
+            </a:pPr>
+            <a:r>
+              <a:rPr sz="2000" b="0" i="0">
+                <a:solidFill>
+                  <a:srgbClr val="333333"/>
+                </a:solidFill>
+                <a:latin typeface="Calibri"/>
+              </a:rPr>
+              <a:t>–   Los comentarios de Mermaid empiezan con dos signos de porcentaje, no se dibujan y tienen que ir en LINEA PROPIA: uno pegado al final de la linea de un nodo puede tumbar el renderizado.</a:t>
+            </a:r>
+          </a:p>
+          <a:p>
+            <a:pPr>
+              <a:spcAft>
+                <a:spcPts val="800"/>
+              </a:spcAft>
+            </a:pPr>
+            <a:r>
+              <a:rPr sz="2000" b="0" i="0">
+                <a:solidFill>
+                  <a:srgbClr val="333333"/>
+                </a:solidFill>
+                <a:latin typeface="Calibri"/>
+              </a:rPr>
+              <a:t>–   Y si un rotulo lleva parentesis, dos signos de puntuacion o comillas, hay que envolverlo en comillas dobles, porque sin ellas el analizador se detiene ahi.</a:t>
+            </a:r>
+          </a:p>
+          <a:p>
+            <a:pPr>
+              <a:spcAft>
+                <a:spcPts val="800"/>
+              </a:spcAft>
+            </a:pPr>
+            <a:r>
+              <a:rPr sz="2000" b="0" i="0">
+                <a:solidFill>
+                  <a:srgbClr val="333333"/>
+                </a:solidFill>
+                <a:latin typeface="Calibri"/>
+              </a:rPr>
+              <a:t>–   El procedimiento que se proyecta en la demo es el que conviene repetir tres veces: dibujar el boceto donde sea, traducirlo a Mermaid (una IA lo hace bien</a:t>
+            </a:r>
+          </a:p>
+          <a:p>
+            <a:pPr>
+              <a:spcAft>
+                <a:spcPts val="800"/>
+              </a:spcAft>
+            </a:pPr>
+            <a:r>
+              <a:rPr sz="2000" b="0" i="0">
+                <a:solidFill>
+                  <a:srgbClr val="333333"/>
+                </a:solidFill>
+                <a:latin typeface="Calibri"/>
+              </a:rPr>
+              <a:t>–   Y ahi hay que decir la frase exacta: la IA acierta la sintaxis, no el modelo), pegarlo en un visor Mermaid y MIRARLO RENDERIZADO.</a:t>
             </a:r>
           </a:p>
         </p:txBody>
@@ -8923,7 +9070,7 @@
                 </a:solidFill>
                 <a:latin typeface="Calibri"/>
               </a:rPr>
-              <a:t>El molde de Mermaid, linea por linea (1/3)</a:t>
+              <a:t>Preguntas frecuentes del grupo</a:t>
             </a:r>
           </a:p>
         </p:txBody>
@@ -8962,7 +9109,7 @@
                 </a:solidFill>
                 <a:latin typeface="Calibri"/>
               </a:rPr>
-              <a:t>–   La diapositiva del molde existe porque el estudiante puede tener el modelo correcto en la cabeza y perder puntos por sintaxis, y porque 2 de los 14 son que el diagrama renderice.</a:t>
+              <a:t>–   «Si la base de datos es privada, como se conecta la API?» Privado significa inalcanzable desde internet</a:t>
             </a:r>
           </a:p>
           <a:p>
@@ -8978,7 +9125,7 @@
                 </a:solidFill>
                 <a:latin typeface="Calibri"/>
               </a:rPr>
-              <a:t>–   Primera: la palabra inicial.</a:t>
+              <a:t>–   No inalcanzable en absoluto: la API esta en la misma red y llega por el nombre interno y el puerto del motor; quien no puede llegar es el usuario final ni un atacante externo.</a:t>
             </a:r>
           </a:p>
           <a:p>
@@ -8994,7 +9141,7 @@
                 </a:solidFill>
                 <a:latin typeface="Calibri"/>
               </a:rPr>
-              <a:t>–   Segunda: cada zona es un subgraph con su rotulo entre comillas y su propio end.</a:t>
+              <a:t>–   «Esto no esta mal por no ser una VPC real de un proveedor?» Lo que se evalua es el razonamiento sobre zonas, puertos y ubicacion de los datos, no la sintaxis de una marca; el curso usa herramientas gratis en navegador y no pide cuenta de pago ni tarjeta.</a:t>
             </a:r>
           </a:p>
           <a:p>
@@ -9010,7 +9157,7 @@
                 </a:solidFill>
                 <a:latin typeface="Calibri"/>
               </a:rPr>
-              <a:t>–   Los subgraph son las tres zonas, y son las que valen 4 puntos; olvidar un end es la causa numero uno de que la plataforma no dibuje nada, porque el bloque queda abierto.</a:t>
+              <a:t>–   Un sistema de dos cajas se dibuja con cliente y edge en la publica, la aplicacion en la privada y la base en la de datos</a:t>
             </a:r>
           </a:p>
           <a:p>
@@ -9026,23 +9173,7 @@
                 </a:solidFill>
                 <a:latin typeface="Calibri"/>
               </a:rPr>
-              <a:t>–   Tercera: la forma de la caja dice que es la pieza.</a:t>
-            </a:r>
-          </a:p>
-          <a:p>
-            <a:pPr>
-              <a:spcAft>
-                <a:spcPts val="800"/>
-              </a:spcAft>
-            </a:pPr>
-            <a:r>
-              <a:rPr sz="2000" b="0" i="0">
-                <a:solidFill>
-                  <a:srgbClr val="333333"/>
-                </a:solidFill>
-                <a:latin typeface="Calibri"/>
-              </a:rPr>
-              <a:t>–   Los corchetes rectos son un proceso o servicio, y la combinacion de corchete y parentesis, es decir abrir corchete parentesis, es la base de datos, que se lee como cilindro.</a:t>
+              <a:t>–   Si de verdad no hay balanceador, el punto de entrada es el servidor web o el proxy que atiende el 443, y ese es el habitante de la zona publica.</a:t>
             </a:r>
           </a:p>
         </p:txBody>
@@ -9223,21 +9354,141 @@
                 </a:solidFill>
                 <a:latin typeface="Calibri"/>
               </a:rPr>
-              <a:t>El molde de Mermaid, linea por linea (2/3)</a:t>
-            </a:r>
-          </a:p>
-        </p:txBody>
-      </p:sp>
-      <p:sp>
-        <p:nvSpPr>
-          <p:cNvPr id="5" name="TextBox 4"/>
+              <a:t>El diagrama de Despliegue: donde corre cada cosa</a:t>
+            </a:r>
+          </a:p>
+        </p:txBody>
+      </p:sp>
+      <p:sp>
+        <p:nvSpPr>
+          <p:cNvPr id="5" name="Rounded Rectangle 4"/>
+          <p:cNvSpPr/>
+          <p:nvPr/>
+        </p:nvSpPr>
+        <p:spPr>
+          <a:xfrm>
+            <a:off x="457200" y="1261872"/>
+            <a:ext cx="11277295" cy="5093208"/>
+          </a:xfrm>
+          <a:prstGeom prst="roundRect">
+            <a:avLst>
+              <a:gd name="adj" fmla="val 12000"/>
+            </a:avLst>
+          </a:prstGeom>
+          <a:solidFill>
+            <a:srgbClr val="1E2A38"/>
+          </a:solidFill>
+          <a:ln>
+            <a:noFill/>
+          </a:ln>
+        </p:spPr>
+        <p:style>
+          <a:lnRef idx="1">
+            <a:schemeClr val="accent1"/>
+          </a:lnRef>
+          <a:fillRef idx="3">
+            <a:schemeClr val="accent1"/>
+          </a:fillRef>
+          <a:effectRef idx="2">
+            <a:schemeClr val="accent1"/>
+          </a:effectRef>
+          <a:fontRef idx="minor">
+            <a:schemeClr val="lt1"/>
+          </a:fontRef>
+        </p:style>
+        <p:txBody>
+          <a:bodyPr rtlCol="0" anchor="ctr"/>
+          <a:lstStyle/>
+          <a:p>
+            <a:pPr algn="ctr"/>
+          </a:p>
+        </p:txBody>
+      </p:sp>
+      <p:sp>
+        <p:nvSpPr>
+          <p:cNvPr id="6" name="Rectangle 5"/>
+          <p:cNvSpPr/>
+          <p:nvPr/>
+        </p:nvSpPr>
+        <p:spPr>
+          <a:xfrm>
+            <a:off x="457200" y="1261872"/>
+            <a:ext cx="11277295" cy="320040"/>
+          </a:xfrm>
+          <a:prstGeom prst="rect">
+            <a:avLst/>
+          </a:prstGeom>
+          <a:solidFill>
+            <a:srgbClr val="095292"/>
+          </a:solidFill>
+          <a:ln>
+            <a:noFill/>
+          </a:ln>
+        </p:spPr>
+        <p:style>
+          <a:lnRef idx="1">
+            <a:schemeClr val="accent1"/>
+          </a:lnRef>
+          <a:fillRef idx="3">
+            <a:schemeClr val="accent1"/>
+          </a:fillRef>
+          <a:effectRef idx="2">
+            <a:schemeClr val="accent1"/>
+          </a:effectRef>
+          <a:fontRef idx="minor">
+            <a:schemeClr val="lt1"/>
+          </a:fontRef>
+        </p:style>
+        <p:txBody>
+          <a:bodyPr rtlCol="0" anchor="ctr"/>
+          <a:lstStyle/>
+          <a:p>
+            <a:pPr algn="ctr"/>
+          </a:p>
+        </p:txBody>
+      </p:sp>
+      <p:sp>
+        <p:nvSpPr>
+          <p:cNvPr id="7" name="TextBox 6"/>
           <p:cNvSpPr txBox="1"/>
           <p:nvPr/>
         </p:nvSpPr>
         <p:spPr>
           <a:xfrm>
-            <a:off x="457200" y="1170432"/>
-            <a:ext cx="11277295" cy="5230368"/>
+            <a:off x="685800" y="1307592"/>
+            <a:ext cx="10820095" cy="256032"/>
+          </a:xfrm>
+          <a:prstGeom prst="rect">
+            <a:avLst/>
+          </a:prstGeom>
+          <a:noFill/>
+        </p:spPr>
+        <p:txBody>
+          <a:bodyPr wrap="square" anchor="ctr"/>
+          <a:lstStyle/>
+          <a:p>
+            <a:r>
+              <a:rPr sz="1000" b="1" i="0">
+                <a:solidFill>
+                  <a:srgbClr val="269CCB"/>
+                </a:solidFill>
+                <a:latin typeface="Calibri"/>
+              </a:rPr>
+              <a:t>● ● ●</a:t>
+            </a:r>
+          </a:p>
+        </p:txBody>
+      </p:sp>
+      <p:sp>
+        <p:nvSpPr>
+          <p:cNvPr id="8" name="TextBox 7"/>
+          <p:cNvSpPr txBox="1"/>
+          <p:nvPr/>
+        </p:nvSpPr>
+        <p:spPr>
+          <a:xfrm>
+            <a:off x="777240" y="1719072"/>
+            <a:ext cx="5181447" cy="4453128"/>
           </a:xfrm>
           <a:prstGeom prst="rect">
             <a:avLst/>
@@ -9252,72 +9503,399 @@
           <a:p>
             <a:pPr>
               <a:spcAft>
-                <a:spcPts val="800"/>
+                <a:spcPts val="400"/>
               </a:spcAft>
             </a:pPr>
             <a:r>
-              <a:rPr sz="2000" b="0" i="0">
-                <a:solidFill>
-                  <a:srgbClr val="333333"/>
-                </a:solidFill>
-                <a:latin typeface="Calibri"/>
-              </a:rPr>
-              <a:t>–   Cuarta: el puerto va DENTRO del rotulo de la caja, separado con la etiqueta de salto de linea de HTML, y la etiqueta de la flecha va entre barras verticales y comillas, con el protocolo y el puerto.</a:t>
+              <a:rPr sz="1400" b="0" i="0">
+                <a:solidFill>
+                  <a:srgbClr val="FFFFFF"/>
+                </a:solidFill>
+                <a:latin typeface="Calibri"/>
+              </a:rPr>
+              <a:t>flowchart TB</a:t>
             </a:r>
           </a:p>
           <a:p>
             <a:pPr>
               <a:spcAft>
-                <a:spcPts val="800"/>
+                <a:spcPts val="400"/>
               </a:spcAft>
             </a:pPr>
             <a:r>
-              <a:rPr sz="2000" b="0" i="0">
-                <a:solidFill>
-                  <a:srgbClr val="333333"/>
-                </a:solidFill>
-                <a:latin typeface="Calibri"/>
-              </a:rPr>
-              <a:t>–   Es la forma mas segura de cumplir los 2 puntos de puertos sin ensuciar el dibujo.</a:t>
+              <a:rPr sz="1400" b="0" i="0">
+                <a:solidFill>
+                  <a:srgbClr val="FFFFFF"/>
+                </a:solidFill>
+                <a:latin typeface="Calibri"/>
+              </a:rPr>
+              <a:t>  subgraph internet[Internet]</a:t>
             </a:r>
           </a:p>
           <a:p>
             <a:pPr>
               <a:spcAft>
-                <a:spcPts val="800"/>
+                <a:spcPts val="400"/>
               </a:spcAft>
             </a:pPr>
             <a:r>
-              <a:rPr sz="2000" b="0" i="0">
-                <a:solidFill>
-                  <a:srgbClr val="333333"/>
-                </a:solidFill>
-                <a:latin typeface="Calibri"/>
-              </a:rPr>
-              <a:t>–   Quinta: el servicio externo se declara FUERA de los tres subgraph, y la flecha que llega a el se rotula como frontera de confianza; asi los 2 puntos de fronteras quedan visibles en el propio dibujo y no en un comentario aparte.</a:t>
+              <a:rPr sz="1400" b="0" i="0">
+                <a:solidFill>
+                  <a:srgbClr val="FFFFFF"/>
+                </a:solidFill>
+                <a:latin typeface="Calibri"/>
+              </a:rPr>
+              <a:t>    nav([Navegador del usuario])</a:t>
             </a:r>
           </a:p>
           <a:p>
             <a:pPr>
               <a:spcAft>
-                <a:spcPts val="800"/>
+                <a:spcPts val="400"/>
               </a:spcAft>
             </a:pPr>
             <a:r>
-              <a:rPr sz="2000" b="0" i="0">
-                <a:solidFill>
-                  <a:srgbClr val="333333"/>
-                </a:solidFill>
-                <a:latin typeface="Calibri"/>
-              </a:rPr>
-              <a:t>–   Los comentarios de Mermaid empiezan con dos signos de porcentaje, no se dibujan y tienen que ir en LINEA PROPIA: uno pegado al final de la linea de un nodo puede tumbar el renderizado, y ahi se van los 2 puntos.</a:t>
-            </a:r>
-          </a:p>
-        </p:txBody>
-      </p:sp>
-      <p:sp>
-        <p:nvSpPr>
-          <p:cNvPr id="6" name="TextBox 5"/>
+              <a:rPr sz="1400" b="0" i="0">
+                <a:solidFill>
+                  <a:srgbClr val="FFFFFF"/>
+                </a:solidFill>
+                <a:latin typeface="Calibri"/>
+              </a:rPr>
+              <a:t>  end</a:t>
+            </a:r>
+          </a:p>
+          <a:p>
+            <a:pPr>
+              <a:spcAft>
+                <a:spcPts val="400"/>
+              </a:spcAft>
+            </a:pPr>
+            <a:r>
+              <a:rPr sz="1400" b="0" i="0">
+                <a:solidFill>
+                  <a:srgbClr val="FFFFFF"/>
+                </a:solidFill>
+                <a:latin typeface="Calibri"/>
+              </a:rPr>
+              <a:t/>
+            </a:r>
+          </a:p>
+          <a:p>
+            <a:pPr>
+              <a:spcAft>
+                <a:spcPts val="400"/>
+              </a:spcAft>
+            </a:pPr>
+            <a:r>
+              <a:rPr sz="1400" b="0" i="0">
+                <a:solidFill>
+                  <a:srgbClr val="FFFFFF"/>
+                </a:solidFill>
+                <a:latin typeface="Calibri"/>
+              </a:rPr>
+              <a:t>  subgraph nube[Proveedor cloud - region &lt;su region&gt;]</a:t>
+            </a:r>
+          </a:p>
+          <a:p>
+            <a:pPr>
+              <a:spcAft>
+                <a:spcPts val="400"/>
+              </a:spcAft>
+            </a:pPr>
+            <a:r>
+              <a:rPr sz="1400" b="0" i="0">
+                <a:solidFill>
+                  <a:srgbClr val="FFFFFF"/>
+                </a:solidFill>
+                <a:latin typeface="Calibri"/>
+              </a:rPr>
+              <a:t>    subgraph edge[CDN / Edge]</a:t>
+            </a:r>
+          </a:p>
+          <a:p>
+            <a:pPr>
+              <a:spcAft>
+                <a:spcPts val="400"/>
+              </a:spcAft>
+            </a:pPr>
+            <a:r>
+              <a:rPr sz="1400" b="0" i="0">
+                <a:solidFill>
+                  <a:srgbClr val="FFFFFF"/>
+                </a:solidFill>
+                <a:latin typeface="Calibri"/>
+              </a:rPr>
+              <a:t>      estatico[/Archivos estaticos&lt;br/&gt;build de la SPA/]</a:t>
+            </a:r>
+          </a:p>
+          <a:p>
+            <a:pPr>
+              <a:spcAft>
+                <a:spcPts val="400"/>
+              </a:spcAft>
+            </a:pPr>
+            <a:r>
+              <a:rPr sz="1400" b="0" i="0">
+                <a:solidFill>
+                  <a:srgbClr val="FFFFFF"/>
+                </a:solidFill>
+                <a:latin typeface="Calibri"/>
+              </a:rPr>
+              <a:t>    end</a:t>
+            </a:r>
+          </a:p>
+          <a:p>
+            <a:pPr>
+              <a:spcAft>
+                <a:spcPts val="400"/>
+              </a:spcAft>
+            </a:pPr>
+            <a:r>
+              <a:rPr sz="1400" b="0" i="0">
+                <a:solidFill>
+                  <a:srgbClr val="FFFFFF"/>
+                </a:solidFill>
+                <a:latin typeface="Calibri"/>
+              </a:rPr>
+              <a:t>    subgraph app[Servicio de aplicacion]</a:t>
+            </a:r>
+          </a:p>
+          <a:p>
+            <a:pPr>
+              <a:spcAft>
+                <a:spcPts val="400"/>
+              </a:spcAft>
+            </a:pPr>
+            <a:r>
+              <a:rPr sz="1400" b="0" i="0">
+                <a:solidFill>
+                  <a:srgbClr val="FFFFFF"/>
+                </a:solidFill>
+                <a:latin typeface="Calibri"/>
+              </a:rPr>
+              <a:t>      api1[Instancia API 1]</a:t>
+            </a:r>
+          </a:p>
+          <a:p>
+            <a:pPr>
+              <a:spcAft>
+                <a:spcPts val="400"/>
+              </a:spcAft>
+            </a:pPr>
+            <a:r>
+              <a:rPr sz="1400" b="0" i="0">
+                <a:solidFill>
+                  <a:srgbClr val="FFFFFF"/>
+                </a:solidFill>
+                <a:latin typeface="Calibri"/>
+              </a:rPr>
+              <a:t>      api2[Instancia API 2]</a:t>
+            </a:r>
+          </a:p>
+        </p:txBody>
+      </p:sp>
+      <p:sp>
+        <p:nvSpPr>
+          <p:cNvPr id="9" name="TextBox 8"/>
+          <p:cNvSpPr txBox="1"/>
+          <p:nvPr/>
+        </p:nvSpPr>
+        <p:spPr>
+          <a:xfrm>
+            <a:off x="6233007" y="1719072"/>
+            <a:ext cx="5181447" cy="4453128"/>
+          </a:xfrm>
+          <a:prstGeom prst="rect">
+            <a:avLst/>
+          </a:prstGeom>
+          <a:noFill/>
+        </p:spPr>
+        <p:txBody>
+          <a:bodyPr wrap="square">
+            <a:spAutoFit/>
+          </a:bodyPr>
+          <a:lstStyle/>
+          <a:p>
+            <a:pPr>
+              <a:spcAft>
+                <a:spcPts val="400"/>
+              </a:spcAft>
+            </a:pPr>
+            <a:r>
+              <a:rPr sz="1400" b="0" i="0">
+                <a:solidFill>
+                  <a:srgbClr val="FFFFFF"/>
+                </a:solidFill>
+                <a:latin typeface="Calibri"/>
+              </a:rPr>
+              <a:t>    end</a:t>
+            </a:r>
+          </a:p>
+          <a:p>
+            <a:pPr>
+              <a:spcAft>
+                <a:spcPts val="400"/>
+              </a:spcAft>
+            </a:pPr>
+            <a:r>
+              <a:rPr sz="1400" b="0" i="0">
+                <a:solidFill>
+                  <a:srgbClr val="FFFFFF"/>
+                </a:solidFill>
+                <a:latin typeface="Calibri"/>
+              </a:rPr>
+              <a:t>    subgraph datos[Servicio gestionado]</a:t>
+            </a:r>
+          </a:p>
+          <a:p>
+            <a:pPr>
+              <a:spcAft>
+                <a:spcPts val="400"/>
+              </a:spcAft>
+            </a:pPr>
+            <a:r>
+              <a:rPr sz="1400" b="0" i="0">
+                <a:solidFill>
+                  <a:srgbClr val="FFFFFF"/>
+                </a:solidFill>
+                <a:latin typeface="Calibri"/>
+              </a:rPr>
+              <a:t>      pg[(PostgreSQL&lt;br/&gt;con respaldo diario)]</a:t>
+            </a:r>
+          </a:p>
+          <a:p>
+            <a:pPr>
+              <a:spcAft>
+                <a:spcPts val="400"/>
+              </a:spcAft>
+            </a:pPr>
+            <a:r>
+              <a:rPr sz="1400" b="0" i="0">
+                <a:solidFill>
+                  <a:srgbClr val="FFFFFF"/>
+                </a:solidFill>
+                <a:latin typeface="Calibri"/>
+              </a:rPr>
+              <a:t>      obj[(Almacenamiento de objetos&lt;br/&gt;adjuntos)]</a:t>
+            </a:r>
+          </a:p>
+          <a:p>
+            <a:pPr>
+              <a:spcAft>
+                <a:spcPts val="400"/>
+              </a:spcAft>
+            </a:pPr>
+            <a:r>
+              <a:rPr sz="1400" b="0" i="0">
+                <a:solidFill>
+                  <a:srgbClr val="FFFFFF"/>
+                </a:solidFill>
+                <a:latin typeface="Calibri"/>
+              </a:rPr>
+              <a:t>    end</a:t>
+            </a:r>
+          </a:p>
+          <a:p>
+            <a:pPr>
+              <a:spcAft>
+                <a:spcPts val="400"/>
+              </a:spcAft>
+            </a:pPr>
+            <a:r>
+              <a:rPr sz="1400" b="0" i="0">
+                <a:solidFill>
+                  <a:srgbClr val="FFFFFF"/>
+                </a:solidFill>
+                <a:latin typeface="Calibri"/>
+              </a:rPr>
+              <a:t>  end</a:t>
+            </a:r>
+          </a:p>
+          <a:p>
+            <a:pPr>
+              <a:spcAft>
+                <a:spcPts val="400"/>
+              </a:spcAft>
+            </a:pPr>
+            <a:r>
+              <a:rPr sz="1400" b="0" i="0">
+                <a:solidFill>
+                  <a:srgbClr val="FFFFFF"/>
+                </a:solidFill>
+                <a:latin typeface="Calibri"/>
+              </a:rPr>
+              <a:t/>
+            </a:r>
+          </a:p>
+          <a:p>
+            <a:pPr>
+              <a:spcAft>
+                <a:spcPts val="400"/>
+              </a:spcAft>
+            </a:pPr>
+            <a:r>
+              <a:rPr sz="1400" b="0" i="0">
+                <a:solidFill>
+                  <a:srgbClr val="FFFFFF"/>
+                </a:solidFill>
+                <a:latin typeface="Calibri"/>
+              </a:rPr>
+              <a:t>  nav --&gt; estatico</a:t>
+            </a:r>
+          </a:p>
+          <a:p>
+            <a:pPr>
+              <a:spcAft>
+                <a:spcPts val="400"/>
+              </a:spcAft>
+            </a:pPr>
+            <a:r>
+              <a:rPr sz="1400" b="0" i="0">
+                <a:solidFill>
+                  <a:srgbClr val="FFFFFF"/>
+                </a:solidFill>
+                <a:latin typeface="Calibri"/>
+              </a:rPr>
+              <a:t>  nav --&gt; api1 &amp; api2</a:t>
+            </a:r>
+          </a:p>
+          <a:p>
+            <a:pPr>
+              <a:spcAft>
+                <a:spcPts val="400"/>
+              </a:spcAft>
+            </a:pPr>
+            <a:r>
+              <a:rPr sz="1400" b="0" i="0">
+                <a:solidFill>
+                  <a:srgbClr val="FFFFFF"/>
+                </a:solidFill>
+                <a:latin typeface="Calibri"/>
+              </a:rPr>
+              <a:t>  api1 &amp; api2 --&gt; pg</a:t>
+            </a:r>
+          </a:p>
+          <a:p>
+            <a:pPr>
+              <a:spcAft>
+                <a:spcPts val="400"/>
+              </a:spcAft>
+            </a:pPr>
+            <a:r>
+              <a:rPr sz="1400" b="0" i="0">
+                <a:solidFill>
+                  <a:srgbClr val="FFFFFF"/>
+                </a:solidFill>
+                <a:latin typeface="Calibri"/>
+              </a:rPr>
+              <a:t>  api1 &amp; api2 --&gt; obj</a:t>
+            </a:r>
+          </a:p>
+        </p:txBody>
+      </p:sp>
+      <p:sp>
+        <p:nvSpPr>
+          <p:cNvPr id="10" name="TextBox 9"/>
           <p:cNvSpPr txBox="1"/>
           <p:nvPr/>
         </p:nvSpPr>
@@ -9491,21 +10069,141 @@
                 </a:solidFill>
                 <a:latin typeface="Calibri"/>
               </a:rPr>
-              <a:t>El molde de Mermaid, linea por linea (3/3)</a:t>
-            </a:r>
-          </a:p>
-        </p:txBody>
-      </p:sp>
-      <p:sp>
-        <p:nvSpPr>
-          <p:cNvPr id="5" name="TextBox 4"/>
+              <a:t>Que tipo de almacenamiento pide cada componente</a:t>
+            </a:r>
+          </a:p>
+        </p:txBody>
+      </p:sp>
+      <p:sp>
+        <p:nvSpPr>
+          <p:cNvPr id="5" name="Rounded Rectangle 4"/>
+          <p:cNvSpPr/>
+          <p:nvPr/>
+        </p:nvSpPr>
+        <p:spPr>
+          <a:xfrm>
+            <a:off x="457200" y="1261872"/>
+            <a:ext cx="11277295" cy="5093208"/>
+          </a:xfrm>
+          <a:prstGeom prst="roundRect">
+            <a:avLst>
+              <a:gd name="adj" fmla="val 12000"/>
+            </a:avLst>
+          </a:prstGeom>
+          <a:solidFill>
+            <a:srgbClr val="1E2A38"/>
+          </a:solidFill>
+          <a:ln>
+            <a:noFill/>
+          </a:ln>
+        </p:spPr>
+        <p:style>
+          <a:lnRef idx="1">
+            <a:schemeClr val="accent1"/>
+          </a:lnRef>
+          <a:fillRef idx="3">
+            <a:schemeClr val="accent1"/>
+          </a:fillRef>
+          <a:effectRef idx="2">
+            <a:schemeClr val="accent1"/>
+          </a:effectRef>
+          <a:fontRef idx="minor">
+            <a:schemeClr val="lt1"/>
+          </a:fontRef>
+        </p:style>
+        <p:txBody>
+          <a:bodyPr rtlCol="0" anchor="ctr"/>
+          <a:lstStyle/>
+          <a:p>
+            <a:pPr algn="ctr"/>
+          </a:p>
+        </p:txBody>
+      </p:sp>
+      <p:sp>
+        <p:nvSpPr>
+          <p:cNvPr id="6" name="Rectangle 5"/>
+          <p:cNvSpPr/>
+          <p:nvPr/>
+        </p:nvSpPr>
+        <p:spPr>
+          <a:xfrm>
+            <a:off x="457200" y="1261872"/>
+            <a:ext cx="11277295" cy="320040"/>
+          </a:xfrm>
+          <a:prstGeom prst="rect">
+            <a:avLst/>
+          </a:prstGeom>
+          <a:solidFill>
+            <a:srgbClr val="095292"/>
+          </a:solidFill>
+          <a:ln>
+            <a:noFill/>
+          </a:ln>
+        </p:spPr>
+        <p:style>
+          <a:lnRef idx="1">
+            <a:schemeClr val="accent1"/>
+          </a:lnRef>
+          <a:fillRef idx="3">
+            <a:schemeClr val="accent1"/>
+          </a:fillRef>
+          <a:effectRef idx="2">
+            <a:schemeClr val="accent1"/>
+          </a:effectRef>
+          <a:fontRef idx="minor">
+            <a:schemeClr val="lt1"/>
+          </a:fontRef>
+        </p:style>
+        <p:txBody>
+          <a:bodyPr rtlCol="0" anchor="ctr"/>
+          <a:lstStyle/>
+          <a:p>
+            <a:pPr algn="ctr"/>
+          </a:p>
+        </p:txBody>
+      </p:sp>
+      <p:sp>
+        <p:nvSpPr>
+          <p:cNvPr id="7" name="TextBox 6"/>
           <p:cNvSpPr txBox="1"/>
           <p:nvPr/>
         </p:nvSpPr>
         <p:spPr>
           <a:xfrm>
-            <a:off x="457200" y="1170432"/>
-            <a:ext cx="11277295" cy="5230368"/>
+            <a:off x="685800" y="1307592"/>
+            <a:ext cx="10820095" cy="256032"/>
+          </a:xfrm>
+          <a:prstGeom prst="rect">
+            <a:avLst/>
+          </a:prstGeom>
+          <a:noFill/>
+        </p:spPr>
+        <p:txBody>
+          <a:bodyPr wrap="square" anchor="ctr"/>
+          <a:lstStyle/>
+          <a:p>
+            <a:r>
+              <a:rPr sz="1000" b="1" i="0">
+                <a:solidFill>
+                  <a:srgbClr val="269CCB"/>
+                </a:solidFill>
+                <a:latin typeface="Calibri"/>
+              </a:rPr>
+              <a:t>● ● ●</a:t>
+            </a:r>
+          </a:p>
+        </p:txBody>
+      </p:sp>
+      <p:sp>
+        <p:nvSpPr>
+          <p:cNvPr id="8" name="TextBox 7"/>
+          <p:cNvSpPr txBox="1"/>
+          <p:nvPr/>
+        </p:nvSpPr>
+        <p:spPr>
+          <a:xfrm>
+            <a:off x="777240" y="1719072"/>
+            <a:ext cx="10637215" cy="4453128"/>
           </a:xfrm>
           <a:prstGeom prst="rect">
             <a:avLst/>
@@ -9520,72 +10218,184 @@
           <a:p>
             <a:pPr>
               <a:spcAft>
-                <a:spcPts val="800"/>
+                <a:spcPts val="400"/>
               </a:spcAft>
             </a:pPr>
             <a:r>
-              <a:rPr sz="2000" b="0" i="0">
-                <a:solidFill>
-                  <a:srgbClr val="333333"/>
-                </a:solidFill>
-                <a:latin typeface="Calibri"/>
-              </a:rPr>
-              <a:t>–   Y si un rotulo lleva parentesis, dos puntos o comillas, hay que envolverlo en comillas dobles, porque sin ellas el analizador se detiene ahi.</a:t>
+              <a:rPr sz="1400" b="0" i="0">
+                <a:solidFill>
+                  <a:srgbClr val="FFFFFF"/>
+                </a:solidFill>
+                <a:latin typeface="Calibri"/>
+              </a:rPr>
+              <a:t>%% BLOQUE (disco de la instancia): rapido, se va con la instancia.</a:t>
             </a:r>
           </a:p>
           <a:p>
             <a:pPr>
               <a:spcAft>
-                <a:spcPts val="800"/>
+                <a:spcPts val="400"/>
               </a:spcAft>
             </a:pPr>
             <a:r>
-              <a:rPr sz="2000" b="0" i="0">
-                <a:solidFill>
-                  <a:srgbClr val="333333"/>
-                </a:solidFill>
-                <a:latin typeface="Calibri"/>
-              </a:rPr>
-              <a:t>–   El procedimiento que se proyecta en la demo es el que conviene repetir tres veces: dibujar el boceto donde sea, traducirlo a Mermaid (una IA lo hace bien</a:t>
+              <a:rPr sz="1400" b="0" i="0">
+                <a:solidFill>
+                  <a:srgbClr val="FFFFFF"/>
+                </a:solidFill>
+                <a:latin typeface="Calibri"/>
+              </a:rPr>
+              <a:t>%%   -&gt; cache local, archivos temporales. NUNCA el dato que importa.</a:t>
             </a:r>
           </a:p>
           <a:p>
             <a:pPr>
               <a:spcAft>
-                <a:spcPts val="800"/>
+                <a:spcPts val="400"/>
               </a:spcAft>
             </a:pPr>
             <a:r>
-              <a:rPr sz="2000" b="0" i="0">
-                <a:solidFill>
-                  <a:srgbClr val="333333"/>
-                </a:solidFill>
-                <a:latin typeface="Calibri"/>
-              </a:rPr>
-              <a:t>–   Y ahi hay que decir la frase exacta: la IA acierta la sintaxis, no el modelo), pegarlo en la pregunta 4 y MIRARLO RENDERIZADO antes de enviar.</a:t>
+              <a:rPr sz="1400" b="0" i="0">
+                <a:solidFill>
+                  <a:srgbClr val="FFFFFF"/>
+                </a:solidFill>
+                <a:latin typeface="Calibri"/>
+              </a:rPr>
+              <a:t/>
             </a:r>
           </a:p>
           <a:p>
             <a:pPr>
               <a:spcAft>
-                <a:spcPts val="800"/>
+                <a:spcPts val="400"/>
               </a:spcAft>
             </a:pPr>
             <a:r>
-              <a:rPr sz="2000" b="0" i="0">
-                <a:solidFill>
-                  <a:srgbClr val="333333"/>
-                </a:solidFill>
-                <a:latin typeface="Calibri"/>
-              </a:rPr>
-              <a:t>–   Si no se dibuja, se corrige ahi mismo; nadie califica un codigo que no dibuja.</a:t>
-            </a:r>
-          </a:p>
-        </p:txBody>
-      </p:sp>
-      <p:sp>
-        <p:nvSpPr>
-          <p:cNvPr id="6" name="TextBox 5"/>
+              <a:rPr sz="1400" b="0" i="0">
+                <a:solidFill>
+                  <a:srgbClr val="FFFFFF"/>
+                </a:solidFill>
+                <a:latin typeface="Calibri"/>
+              </a:rPr>
+              <a:t>%% OBJETOS (S3 y equivalentes): barato, por HTTP, no se monta como disco.</a:t>
+            </a:r>
+          </a:p>
+          <a:p>
+            <a:pPr>
+              <a:spcAft>
+                <a:spcPts val="400"/>
+              </a:spcAft>
+            </a:pPr>
+            <a:r>
+              <a:rPr sz="1400" b="0" i="0">
+                <a:solidFill>
+                  <a:srgbClr val="FFFFFF"/>
+                </a:solidFill>
+                <a:latin typeface="Calibri"/>
+              </a:rPr>
+              <a:t>%%   -&gt; adjuntos, imagenes, respaldos, el build de la SPA.</a:t>
+            </a:r>
+          </a:p>
+          <a:p>
+            <a:pPr>
+              <a:spcAft>
+                <a:spcPts val="400"/>
+              </a:spcAft>
+            </a:pPr>
+            <a:r>
+              <a:rPr sz="1400" b="0" i="0">
+                <a:solidFill>
+                  <a:srgbClr val="FFFFFF"/>
+                </a:solidFill>
+                <a:latin typeface="Calibri"/>
+              </a:rPr>
+              <a:t/>
+            </a:r>
+          </a:p>
+          <a:p>
+            <a:pPr>
+              <a:spcAft>
+                <a:spcPts val="400"/>
+              </a:spcAft>
+            </a:pPr>
+            <a:r>
+              <a:rPr sz="1400" b="0" i="0">
+                <a:solidFill>
+                  <a:srgbClr val="FFFFFF"/>
+                </a:solidFill>
+                <a:latin typeface="Calibri"/>
+              </a:rPr>
+              <a:t>%% BASE RELACIONAL GESTIONADA: transaccional, con respaldo y replica.</a:t>
+            </a:r>
+          </a:p>
+          <a:p>
+            <a:pPr>
+              <a:spcAft>
+                <a:spcPts val="400"/>
+              </a:spcAft>
+            </a:pPr>
+            <a:r>
+              <a:rPr sz="1400" b="0" i="0">
+                <a:solidFill>
+                  <a:srgbClr val="FFFFFF"/>
+                </a:solidFill>
+                <a:latin typeface="Calibri"/>
+              </a:rPr>
+              <a:t>%%   -&gt; lo que necesita integridad y consultas.</a:t>
+            </a:r>
+          </a:p>
+          <a:p>
+            <a:pPr>
+              <a:spcAft>
+                <a:spcPts val="400"/>
+              </a:spcAft>
+            </a:pPr>
+            <a:r>
+              <a:rPr sz="1400" b="0" i="0">
+                <a:solidFill>
+                  <a:srgbClr val="FFFFFF"/>
+                </a:solidFill>
+                <a:latin typeface="Calibri"/>
+              </a:rPr>
+              <a:t/>
+            </a:r>
+          </a:p>
+          <a:p>
+            <a:pPr>
+              <a:spcAft>
+                <a:spcPts val="400"/>
+              </a:spcAft>
+            </a:pPr>
+            <a:r>
+              <a:rPr sz="1400" b="0" i="0">
+                <a:solidFill>
+                  <a:srgbClr val="FFFFFF"/>
+                </a:solidFill>
+                <a:latin typeface="Calibri"/>
+              </a:rPr>
+              <a:t>%% La pregunta que decide: si esta instancia desaparece ahora mismo,</a:t>
+            </a:r>
+          </a:p>
+          <a:p>
+            <a:pPr>
+              <a:spcAft>
+                <a:spcPts val="400"/>
+              </a:spcAft>
+            </a:pPr>
+            <a:r>
+              <a:rPr sz="1400" b="0" i="0">
+                <a:solidFill>
+                  <a:srgbClr val="FFFFFF"/>
+                </a:solidFill>
+                <a:latin typeface="Calibri"/>
+              </a:rPr>
+              <a:t>%% que dato se pierde? Si la respuesta no es «ninguno», esta mal ubicado.</a:t>
+            </a:r>
+          </a:p>
+        </p:txBody>
+      </p:sp>
+      <p:sp>
+        <p:nvSpPr>
+          <p:cNvPr id="9" name="TextBox 8"/>
           <p:cNvSpPr txBox="1"/>
           <p:nvPr/>
         </p:nvSpPr>
@@ -9653,7 +10463,7 @@
         <p:spPr>
           <a:xfrm>
             <a:off x="0" y="0"/>
-            <a:ext cx="12191695" cy="960120"/>
+            <a:ext cx="12191695" cy="1170432"/>
           </a:xfrm>
           <a:prstGeom prst="rect">
             <a:avLst/>
@@ -9695,7 +10505,7 @@
         </p:nvSpPr>
         <p:spPr>
           <a:xfrm>
-            <a:off x="0" y="960120"/>
+            <a:off x="0" y="1170432"/>
             <a:ext cx="12191695" cy="41148"/>
           </a:xfrm>
           <a:prstGeom prst="rect">
@@ -9739,7 +10549,7 @@
         <p:spPr>
           <a:xfrm>
             <a:off x="457200" y="164592"/>
-            <a:ext cx="11277295" cy="502920"/>
+            <a:ext cx="11277295" cy="384048"/>
           </a:xfrm>
           <a:prstGeom prst="rect">
             <a:avLst/>
@@ -9759,7 +10569,7 @@
                 </a:solidFill>
                 <a:latin typeface="Calibri"/>
               </a:rPr>
-              <a:t>Preguntas frecuentes del grupo (1/2)</a:t>
+              <a:t>Ejemplo de diagrama de despliegue (Deployment)</a:t>
             </a:r>
           </a:p>
         </p:txBody>
@@ -9772,8 +10582,8 @@
         </p:nvSpPr>
         <p:spPr>
           <a:xfrm>
-            <a:off x="457200" y="1170432"/>
-            <a:ext cx="11277295" cy="5230368"/>
+            <a:off x="457200" y="566928"/>
+            <a:ext cx="11277295" cy="411480"/>
           </a:xfrm>
           <a:prstGeom prst="rect">
             <a:avLst/>
@@ -9786,74 +10596,362 @@
           </a:bodyPr>
           <a:lstStyle/>
           <a:p>
-            <a:pPr>
-              <a:spcAft>
-                <a:spcPts val="800"/>
-              </a:spcAft>
-            </a:pPr>
-            <a:r>
-              <a:rPr sz="2000" b="0" i="0">
-                <a:solidFill>
-                  <a:srgbClr val="333333"/>
-                </a:solidFill>
-                <a:latin typeface="Calibri"/>
-              </a:rPr>
-              <a:t>–   «Si la base de datos es privada, como se conecta la API?» Privado significa inalcanzable desde internet</a:t>
-            </a:r>
-          </a:p>
-          <a:p>
-            <a:pPr>
-              <a:spcAft>
-                <a:spcPts val="800"/>
-              </a:spcAft>
-            </a:pPr>
-            <a:r>
-              <a:rPr sz="2000" b="0" i="0">
-                <a:solidFill>
-                  <a:srgbClr val="333333"/>
-                </a:solidFill>
-                <a:latin typeface="Calibri"/>
-              </a:rPr>
-              <a:t>–   No inalcanzable en absoluto: la API esta en la misma red y llega por el nombre interno y el puerto del motor; quien no puede llegar es el usuario final ni un atacante externo.</a:t>
-            </a:r>
-          </a:p>
-          <a:p>
-            <a:pPr>
-              <a:spcAft>
-                <a:spcPts val="800"/>
-              </a:spcAft>
-            </a:pPr>
-            <a:r>
-              <a:rPr sz="2000" b="0" i="0">
-                <a:solidFill>
-                  <a:srgbClr val="333333"/>
-                </a:solidFill>
-                <a:latin typeface="Calibri"/>
-              </a:rPr>
-              <a:t>–   «Esto no esta mal por no ser una VPC real de un proveedor?» Lo que se evalua es el razonamiento sobre zonas, puertos y ubicacion de los datos, no la sintaxis de una marca; el curso usa herramientas gratis en navegador y no pide cuenta de pago ni tarjeta.</a:t>
-            </a:r>
-          </a:p>
-          <a:p>
-            <a:pPr>
-              <a:spcAft>
-                <a:spcPts val="800"/>
-              </a:spcAft>
-            </a:pPr>
-            <a:r>
-              <a:rPr sz="2000" b="0" i="0">
-                <a:solidFill>
-                  <a:srgbClr val="333333"/>
-                </a:solidFill>
-                <a:latin typeface="Calibri"/>
-              </a:rPr>
-              <a:t>–   Es mas: la rubrica DESCUENTA por nombrar subredes o servicios de un proveedor concreto, asi que escribir VPC, el nombre de una zona de disponibilidad o el de un servicio de marca resta en vez de sumar.</a:t>
-            </a:r>
-          </a:p>
-        </p:txBody>
-      </p:sp>
-      <p:sp>
-        <p:nvSpPr>
-          <p:cNvPr id="6" name="TextBox 5"/>
+            <a:r>
+              <a:rPr sz="1400" b="0" i="0">
+                <a:solidFill>
+                  <a:srgbClr val="B8D8EE"/>
+                </a:solidFill>
+                <a:latin typeface="Calibri"/>
+              </a:rPr>
+              <a:t>Zonas de confianza: qué es público, qué es privado, dónde viven los datos</a:t>
+            </a:r>
+          </a:p>
+        </p:txBody>
+      </p:sp>
+      <p:sp>
+        <p:nvSpPr>
+          <p:cNvPr id="6" name="Rounded Rectangle 5"/>
+          <p:cNvSpPr/>
+          <p:nvPr/>
+        </p:nvSpPr>
+        <p:spPr>
+          <a:xfrm>
+            <a:off x="822960" y="2194560"/>
+            <a:ext cx="3291840" cy="1005840"/>
+          </a:xfrm>
+          <a:prstGeom prst="roundRect">
+            <a:avLst>
+              <a:gd name="adj" fmla="val 12000"/>
+            </a:avLst>
+          </a:prstGeom>
+          <a:solidFill>
+            <a:srgbClr val="FFD000"/>
+          </a:solidFill>
+          <a:ln>
+            <a:noFill/>
+          </a:ln>
+        </p:spPr>
+        <p:style>
+          <a:lnRef idx="1">
+            <a:schemeClr val="accent1"/>
+          </a:lnRef>
+          <a:fillRef idx="3">
+            <a:schemeClr val="accent1"/>
+          </a:fillRef>
+          <a:effectRef idx="2">
+            <a:schemeClr val="accent1"/>
+          </a:effectRef>
+          <a:fontRef idx="minor">
+            <a:schemeClr val="lt1"/>
+          </a:fontRef>
+        </p:style>
+        <p:txBody>
+          <a:bodyPr rtlCol="0" anchor="ctr" wrap="square"/>
+          <a:lstStyle/>
+          <a:p>
+            <a:pPr algn="ctr"/>
+            <a:r>
+              <a:rPr sz="1300" b="1" i="0">
+                <a:solidFill>
+                  <a:srgbClr val="095292"/>
+                </a:solidFill>
+                <a:latin typeface="Calibri"/>
+              </a:rPr>
+              <a:t>Zona pública
+(balanceador / edge)</a:t>
+            </a:r>
+          </a:p>
+        </p:txBody>
+      </p:sp>
+      <p:sp>
+        <p:nvSpPr>
+          <p:cNvPr id="7" name="Rounded Rectangle 6"/>
+          <p:cNvSpPr/>
+          <p:nvPr/>
+        </p:nvSpPr>
+        <p:spPr>
+          <a:xfrm>
+            <a:off x="4754880" y="2194560"/>
+            <a:ext cx="3291840" cy="1005840"/>
+          </a:xfrm>
+          <a:prstGeom prst="roundRect">
+            <a:avLst>
+              <a:gd name="adj" fmla="val 12000"/>
+            </a:avLst>
+          </a:prstGeom>
+          <a:solidFill>
+            <a:srgbClr val="095292"/>
+          </a:solidFill>
+          <a:ln>
+            <a:noFill/>
+          </a:ln>
+        </p:spPr>
+        <p:style>
+          <a:lnRef idx="1">
+            <a:schemeClr val="accent1"/>
+          </a:lnRef>
+          <a:fillRef idx="3">
+            <a:schemeClr val="accent1"/>
+          </a:fillRef>
+          <a:effectRef idx="2">
+            <a:schemeClr val="accent1"/>
+          </a:effectRef>
+          <a:fontRef idx="minor">
+            <a:schemeClr val="lt1"/>
+          </a:fontRef>
+        </p:style>
+        <p:txBody>
+          <a:bodyPr rtlCol="0" anchor="ctr" wrap="square"/>
+          <a:lstStyle/>
+          <a:p>
+            <a:pPr algn="ctr"/>
+            <a:r>
+              <a:rPr sz="1300" b="1" i="0">
+                <a:solidFill>
+                  <a:srgbClr val="FFFFFF"/>
+                </a:solidFill>
+                <a:latin typeface="Calibri"/>
+              </a:rPr>
+              <a:t>Zona privada
+(app CloudLite)</a:t>
+            </a:r>
+          </a:p>
+        </p:txBody>
+      </p:sp>
+      <p:sp>
+        <p:nvSpPr>
+          <p:cNvPr id="8" name="Rounded Rectangle 7"/>
+          <p:cNvSpPr/>
+          <p:nvPr/>
+        </p:nvSpPr>
+        <p:spPr>
+          <a:xfrm>
+            <a:off x="8595360" y="2194560"/>
+            <a:ext cx="3291840" cy="1005840"/>
+          </a:xfrm>
+          <a:prstGeom prst="roundRect">
+            <a:avLst>
+              <a:gd name="adj" fmla="val 12000"/>
+            </a:avLst>
+          </a:prstGeom>
+          <a:solidFill>
+            <a:srgbClr val="269CCB"/>
+          </a:solidFill>
+          <a:ln>
+            <a:noFill/>
+          </a:ln>
+        </p:spPr>
+        <p:style>
+          <a:lnRef idx="1">
+            <a:schemeClr val="accent1"/>
+          </a:lnRef>
+          <a:fillRef idx="3">
+            <a:schemeClr val="accent1"/>
+          </a:fillRef>
+          <a:effectRef idx="2">
+            <a:schemeClr val="accent1"/>
+          </a:effectRef>
+          <a:fontRef idx="minor">
+            <a:schemeClr val="lt1"/>
+          </a:fontRef>
+        </p:style>
+        <p:txBody>
+          <a:bodyPr rtlCol="0" anchor="ctr" wrap="square"/>
+          <a:lstStyle/>
+          <a:p>
+            <a:pPr algn="ctr"/>
+            <a:r>
+              <a:rPr sz="1300" b="1" i="0">
+                <a:solidFill>
+                  <a:srgbClr val="FFFFFF"/>
+                </a:solidFill>
+                <a:latin typeface="Calibri"/>
+              </a:rPr>
+              <a:t>Zona de datos
+(base de datos)</a:t>
+            </a:r>
+          </a:p>
+        </p:txBody>
+      </p:sp>
+      <p:cxnSp>
+        <p:nvCxnSpPr>
+          <p:cNvPr id="9" name="Connector 8"/>
+          <p:cNvCxnSpPr/>
+          <p:nvPr/>
+        </p:nvCxnSpPr>
+        <p:spPr>
+          <a:xfrm>
+            <a:off x="4114800" y="2697480"/>
+            <a:ext cx="640080" cy="0"/>
+          </a:xfrm>
+          <a:prstGeom prst="line">
+            <a:avLst/>
+          </a:prstGeom>
+          <a:ln w="22225">
+            <a:solidFill>
+              <a:srgbClr val="666666"/>
+            </a:solidFill>
+            <a:tailEnd type="triangle" w="med" len="med"/>
+          </a:ln>
+        </p:spPr>
+        <p:style>
+          <a:lnRef idx="2">
+            <a:schemeClr val="accent1"/>
+          </a:lnRef>
+          <a:fillRef idx="0">
+            <a:schemeClr val="accent1"/>
+          </a:fillRef>
+          <a:effectRef idx="1">
+            <a:schemeClr val="accent1"/>
+          </a:effectRef>
+          <a:fontRef idx="minor">
+            <a:schemeClr val="tx1"/>
+          </a:fontRef>
+        </p:style>
+      </p:cxnSp>
+      <p:sp>
+        <p:nvSpPr>
+          <p:cNvPr id="10" name="TextBox 9"/>
+          <p:cNvSpPr txBox="1"/>
+          <p:nvPr/>
+        </p:nvSpPr>
+        <p:spPr>
+          <a:xfrm>
+            <a:off x="3611879" y="2496312"/>
+            <a:ext cx="1645920" cy="320040"/>
+          </a:xfrm>
+          <a:prstGeom prst="rect">
+            <a:avLst/>
+          </a:prstGeom>
+          <a:noFill/>
+        </p:spPr>
+        <p:txBody>
+          <a:bodyPr wrap="square">
+            <a:spAutoFit/>
+          </a:bodyPr>
+          <a:lstStyle/>
+          <a:p>
+            <a:pPr algn="ctr"/>
+            <a:r>
+              <a:rPr sz="1000" b="0" i="1">
+                <a:solidFill>
+                  <a:srgbClr val="666666"/>
+                </a:solidFill>
+                <a:latin typeface="Calibri"/>
+              </a:rPr>
+              <a:t>solo el 8080</a:t>
+            </a:r>
+          </a:p>
+        </p:txBody>
+      </p:sp>
+      <p:cxnSp>
+        <p:nvCxnSpPr>
+          <p:cNvPr id="11" name="Connector 10"/>
+          <p:cNvCxnSpPr/>
+          <p:nvPr/>
+        </p:nvCxnSpPr>
+        <p:spPr>
+          <a:xfrm>
+            <a:off x="8046720" y="2697480"/>
+            <a:ext cx="548640" cy="0"/>
+          </a:xfrm>
+          <a:prstGeom prst="line">
+            <a:avLst/>
+          </a:prstGeom>
+          <a:ln w="22225">
+            <a:solidFill>
+              <a:srgbClr val="666666"/>
+            </a:solidFill>
+            <a:tailEnd type="triangle" w="med" len="med"/>
+          </a:ln>
+        </p:spPr>
+        <p:style>
+          <a:lnRef idx="2">
+            <a:schemeClr val="accent1"/>
+          </a:lnRef>
+          <a:fillRef idx="0">
+            <a:schemeClr val="accent1"/>
+          </a:fillRef>
+          <a:effectRef idx="1">
+            <a:schemeClr val="accent1"/>
+          </a:effectRef>
+          <a:fontRef idx="minor">
+            <a:schemeClr val="tx1"/>
+          </a:fontRef>
+        </p:style>
+      </p:cxnSp>
+      <p:sp>
+        <p:nvSpPr>
+          <p:cNvPr id="12" name="TextBox 11"/>
+          <p:cNvSpPr txBox="1"/>
+          <p:nvPr/>
+        </p:nvSpPr>
+        <p:spPr>
+          <a:xfrm>
+            <a:off x="7498080" y="2496312"/>
+            <a:ext cx="1645920" cy="320040"/>
+          </a:xfrm>
+          <a:prstGeom prst="rect">
+            <a:avLst/>
+          </a:prstGeom>
+          <a:noFill/>
+        </p:spPr>
+        <p:txBody>
+          <a:bodyPr wrap="square">
+            <a:spAutoFit/>
+          </a:bodyPr>
+          <a:lstStyle/>
+          <a:p>
+            <a:pPr algn="ctr"/>
+            <a:r>
+              <a:rPr sz="1000" b="0" i="1">
+                <a:solidFill>
+                  <a:srgbClr val="666666"/>
+                </a:solidFill>
+                <a:latin typeface="Calibri"/>
+              </a:rPr>
+              <a:t>solo el 5432</a:t>
+            </a:r>
+          </a:p>
+        </p:txBody>
+      </p:sp>
+      <p:sp>
+        <p:nvSpPr>
+          <p:cNvPr id="13" name="TextBox 12"/>
+          <p:cNvSpPr txBox="1"/>
+          <p:nvPr/>
+        </p:nvSpPr>
+        <p:spPr>
+          <a:xfrm>
+            <a:off x="457200" y="6263640"/>
+            <a:ext cx="11277295" cy="411480"/>
+          </a:xfrm>
+          <a:prstGeom prst="rect">
+            <a:avLst/>
+          </a:prstGeom>
+          <a:noFill/>
+        </p:spPr>
+        <p:txBody>
+          <a:bodyPr wrap="square">
+            <a:spAutoFit/>
+          </a:bodyPr>
+          <a:lstStyle/>
+          <a:p>
+            <a:r>
+              <a:rPr sz="1100" b="0" i="1">
+                <a:solidFill>
+                  <a:srgbClr val="666666"/>
+                </a:solidFill>
+                <a:latin typeface="Calibri"/>
+              </a:rPr>
+              <a:t>La base de datos NUNCA vive en la zona pública. Los nombres deben coincidir con los del C4 Containers (Clase 4) — mismo sistema, otro ángulo.</a:t>
+            </a:r>
+          </a:p>
+        </p:txBody>
+      </p:sp>
+      <p:sp>
+        <p:nvSpPr>
+          <p:cNvPr id="14" name="TextBox 13"/>
           <p:cNvSpPr txBox="1"/>
           <p:nvPr/>
         </p:nvSpPr>
@@ -10027,21 +11125,141 @@
                 </a:solidFill>
                 <a:latin typeface="Calibri"/>
               </a:rPr>
-              <a:t>Preguntas frecuentes del grupo (2/2)</a:t>
-            </a:r>
-          </a:p>
-        </p:txBody>
-      </p:sp>
-      <p:sp>
-        <p:nvSpPr>
-          <p:cNvPr id="5" name="TextBox 4"/>
+              <a:t>El Despliegue en Mermaid: el molde que un visor renderiza</a:t>
+            </a:r>
+          </a:p>
+        </p:txBody>
+      </p:sp>
+      <p:sp>
+        <p:nvSpPr>
+          <p:cNvPr id="5" name="Rounded Rectangle 4"/>
+          <p:cNvSpPr/>
+          <p:nvPr/>
+        </p:nvSpPr>
+        <p:spPr>
+          <a:xfrm>
+            <a:off x="457200" y="1261872"/>
+            <a:ext cx="11277295" cy="4773168"/>
+          </a:xfrm>
+          <a:prstGeom prst="roundRect">
+            <a:avLst>
+              <a:gd name="adj" fmla="val 12000"/>
+            </a:avLst>
+          </a:prstGeom>
+          <a:solidFill>
+            <a:srgbClr val="1E2A38"/>
+          </a:solidFill>
+          <a:ln>
+            <a:noFill/>
+          </a:ln>
+        </p:spPr>
+        <p:style>
+          <a:lnRef idx="1">
+            <a:schemeClr val="accent1"/>
+          </a:lnRef>
+          <a:fillRef idx="3">
+            <a:schemeClr val="accent1"/>
+          </a:fillRef>
+          <a:effectRef idx="2">
+            <a:schemeClr val="accent1"/>
+          </a:effectRef>
+          <a:fontRef idx="minor">
+            <a:schemeClr val="lt1"/>
+          </a:fontRef>
+        </p:style>
+        <p:txBody>
+          <a:bodyPr rtlCol="0" anchor="ctr"/>
+          <a:lstStyle/>
+          <a:p>
+            <a:pPr algn="ctr"/>
+          </a:p>
+        </p:txBody>
+      </p:sp>
+      <p:sp>
+        <p:nvSpPr>
+          <p:cNvPr id="6" name="Rectangle 5"/>
+          <p:cNvSpPr/>
+          <p:nvPr/>
+        </p:nvSpPr>
+        <p:spPr>
+          <a:xfrm>
+            <a:off x="457200" y="1261872"/>
+            <a:ext cx="11277295" cy="320040"/>
+          </a:xfrm>
+          <a:prstGeom prst="rect">
+            <a:avLst/>
+          </a:prstGeom>
+          <a:solidFill>
+            <a:srgbClr val="095292"/>
+          </a:solidFill>
+          <a:ln>
+            <a:noFill/>
+          </a:ln>
+        </p:spPr>
+        <p:style>
+          <a:lnRef idx="1">
+            <a:schemeClr val="accent1"/>
+          </a:lnRef>
+          <a:fillRef idx="3">
+            <a:schemeClr val="accent1"/>
+          </a:fillRef>
+          <a:effectRef idx="2">
+            <a:schemeClr val="accent1"/>
+          </a:effectRef>
+          <a:fontRef idx="minor">
+            <a:schemeClr val="lt1"/>
+          </a:fontRef>
+        </p:style>
+        <p:txBody>
+          <a:bodyPr rtlCol="0" anchor="ctr"/>
+          <a:lstStyle/>
+          <a:p>
+            <a:pPr algn="ctr"/>
+          </a:p>
+        </p:txBody>
+      </p:sp>
+      <p:sp>
+        <p:nvSpPr>
+          <p:cNvPr id="7" name="TextBox 6"/>
           <p:cNvSpPr txBox="1"/>
           <p:nvPr/>
         </p:nvSpPr>
         <p:spPr>
           <a:xfrm>
-            <a:off x="457200" y="1170432"/>
-            <a:ext cx="11277295" cy="5230368"/>
+            <a:off x="685800" y="1307592"/>
+            <a:ext cx="10820095" cy="256032"/>
+          </a:xfrm>
+          <a:prstGeom prst="rect">
+            <a:avLst/>
+          </a:prstGeom>
+          <a:noFill/>
+        </p:spPr>
+        <p:txBody>
+          <a:bodyPr wrap="square" anchor="ctr"/>
+          <a:lstStyle/>
+          <a:p>
+            <a:r>
+              <a:rPr sz="1000" b="1" i="0">
+                <a:solidFill>
+                  <a:srgbClr val="269CCB"/>
+                </a:solidFill>
+                <a:latin typeface="Calibri"/>
+              </a:rPr>
+              <a:t>● ● ●</a:t>
+            </a:r>
+          </a:p>
+        </p:txBody>
+      </p:sp>
+      <p:sp>
+        <p:nvSpPr>
+          <p:cNvPr id="8" name="TextBox 7"/>
+          <p:cNvSpPr txBox="1"/>
+          <p:nvPr/>
+        </p:nvSpPr>
+        <p:spPr>
+          <a:xfrm>
+            <a:off x="777240" y="1719072"/>
+            <a:ext cx="10637215" cy="4133087"/>
           </a:xfrm>
           <a:prstGeom prst="rect">
             <a:avLst/>
@@ -10056,88 +11274,283 @@
           <a:p>
             <a:pPr>
               <a:spcAft>
-                <a:spcPts val="800"/>
+                <a:spcPts val="400"/>
               </a:spcAft>
             </a:pPr>
             <a:r>
-              <a:rPr sz="2000" b="0" i="0">
-                <a:solidFill>
-                  <a:srgbClr val="333333"/>
-                </a:solidFill>
-                <a:latin typeface="Calibri"/>
-              </a:rPr>
-              <a:t>–   «Puedo subir mi imagen del diagrama en vez del codigo Mermaid?» No para la pregunta 4: lo que se califica es el diagrama renderizado dentro de la plataforma.</a:t>
+              <a:rPr sz="1400" b="0" i="0">
+                <a:solidFill>
+                  <a:srgbClr val="FFFFFF"/>
+                </a:solidFill>
+                <a:latin typeface="Calibri"/>
+              </a:rPr>
+              <a:t>flowchart LR</a:t>
             </a:r>
           </a:p>
           <a:p>
             <a:pPr>
               <a:spcAft>
-                <a:spcPts val="800"/>
+                <a:spcPts val="400"/>
               </a:spcAft>
             </a:pPr>
             <a:r>
-              <a:rPr sz="2000" b="0" i="0">
-                <a:solidFill>
-                  <a:srgbClr val="333333"/>
-                </a:solidFill>
-                <a:latin typeface="Calibri"/>
-              </a:rPr>
-              <a:t>–   «Mi sistema es pequeno, solo tiene la aplicacion y la base de datos; igual necesito tres zonas?» Si</a:t>
+              <a:rPr sz="1400" b="0" i="0">
+                <a:solidFill>
+                  <a:srgbClr val="FFFFFF"/>
+                </a:solidFill>
+                <a:latin typeface="Calibri"/>
+              </a:rPr>
+              <a:t>  subgraph publica["Zona publica - internet"]</a:t>
             </a:r>
           </a:p>
           <a:p>
             <a:pPr>
               <a:spcAft>
-                <a:spcPts val="800"/>
+                <a:spcPts val="400"/>
               </a:spcAft>
             </a:pPr>
             <a:r>
-              <a:rPr sz="2000" b="0" i="0">
-                <a:solidFill>
-                  <a:srgbClr val="333333"/>
-                </a:solidFill>
-                <a:latin typeface="Calibri"/>
-              </a:rPr>
-              <a:t>–   Y no es burocracia: las tres zonas son 4 puntos y el sentido de la separacion es justamente que el punto de entrada, la logica y los datos tengan grados de exposicion distintos.</a:t>
+              <a:rPr sz="1400" b="0" i="0">
+                <a:solidFill>
+                  <a:srgbClr val="FFFFFF"/>
+                </a:solidFill>
+                <a:latin typeface="Calibri"/>
+              </a:rPr>
+              <a:t>    web["App web&lt;br/&gt;React estatico - 443"]</a:t>
             </a:r>
           </a:p>
           <a:p>
             <a:pPr>
               <a:spcAft>
-                <a:spcPts val="800"/>
+                <a:spcPts val="400"/>
               </a:spcAft>
             </a:pPr>
             <a:r>
-              <a:rPr sz="2000" b="0" i="0">
-                <a:solidFill>
-                  <a:srgbClr val="333333"/>
-                </a:solidFill>
-                <a:latin typeface="Calibri"/>
-              </a:rPr>
-              <a:t>–   Un sistema de dos cajas se dibuja con cliente y edge en la publica, la aplicacion en la privada y la base en la de datos</a:t>
+              <a:rPr sz="1400" b="0" i="0">
+                <a:solidFill>
+                  <a:srgbClr val="FFFFFF"/>
+                </a:solidFill>
+                <a:latin typeface="Calibri"/>
+              </a:rPr>
+              <a:t>    edge["Edge / balanceador&lt;br/&gt;443 HTTPS"]</a:t>
             </a:r>
           </a:p>
           <a:p>
             <a:pPr>
               <a:spcAft>
-                <a:spcPts val="800"/>
+                <a:spcPts val="400"/>
               </a:spcAft>
             </a:pPr>
             <a:r>
-              <a:rPr sz="2000" b="0" i="0">
-                <a:solidFill>
-                  <a:srgbClr val="333333"/>
-                </a:solidFill>
-                <a:latin typeface="Calibri"/>
-              </a:rPr>
-              <a:t>–   Si de verdad no hay balanceador, el punto de entrada es el servidor web o el proxy que atiende el 443, y ese es el habitante de la zona publica.</a:t>
-            </a:r>
-          </a:p>
-        </p:txBody>
-      </p:sp>
-      <p:sp>
-        <p:nvSpPr>
-          <p:cNvPr id="6" name="TextBox 5"/>
+              <a:rPr sz="1400" b="0" i="0">
+                <a:solidFill>
+                  <a:srgbClr val="FFFFFF"/>
+                </a:solidFill>
+                <a:latin typeface="Calibri"/>
+              </a:rPr>
+              <a:t>  end</a:t>
+            </a:r>
+          </a:p>
+          <a:p>
+            <a:pPr>
+              <a:spcAft>
+                <a:spcPts val="400"/>
+              </a:spcAft>
+            </a:pPr>
+            <a:r>
+              <a:rPr sz="1400" b="0" i="0">
+                <a:solidFill>
+                  <a:srgbClr val="FFFFFF"/>
+                </a:solidFill>
+                <a:latin typeface="Calibri"/>
+              </a:rPr>
+              <a:t>  subgraph privada["Zona privada - solo desde el edge"]</a:t>
+            </a:r>
+          </a:p>
+          <a:p>
+            <a:pPr>
+              <a:spcAft>
+                <a:spcPts val="400"/>
+              </a:spcAft>
+            </a:pPr>
+            <a:r>
+              <a:rPr sz="1400" b="0" i="0">
+                <a:solidFill>
+                  <a:srgbClr val="FFFFFF"/>
+                </a:solidFill>
+                <a:latin typeface="Calibri"/>
+              </a:rPr>
+              <a:t>    api["API CloudLite&lt;br/&gt;8080 HTTP"]</a:t>
+            </a:r>
+          </a:p>
+          <a:p>
+            <a:pPr>
+              <a:spcAft>
+                <a:spcPts val="400"/>
+              </a:spcAft>
+            </a:pPr>
+            <a:r>
+              <a:rPr sz="1400" b="0" i="0">
+                <a:solidFill>
+                  <a:srgbClr val="FFFFFF"/>
+                </a:solidFill>
+                <a:latin typeface="Calibri"/>
+              </a:rPr>
+              <a:t>  end</a:t>
+            </a:r>
+          </a:p>
+          <a:p>
+            <a:pPr>
+              <a:spcAft>
+                <a:spcPts val="400"/>
+              </a:spcAft>
+            </a:pPr>
+            <a:r>
+              <a:rPr sz="1400" b="0" i="0">
+                <a:solidFill>
+                  <a:srgbClr val="FFFFFF"/>
+                </a:solidFill>
+                <a:latin typeface="Calibri"/>
+              </a:rPr>
+              <a:t>  subgraph datos["Zona de datos - sin internet: la BD va AQUI"]</a:t>
+            </a:r>
+          </a:p>
+          <a:p>
+            <a:pPr>
+              <a:spcAft>
+                <a:spcPts val="400"/>
+              </a:spcAft>
+            </a:pPr>
+            <a:r>
+              <a:rPr sz="1400" b="0" i="0">
+                <a:solidFill>
+                  <a:srgbClr val="FFFFFF"/>
+                </a:solidFill>
+                <a:latin typeface="Calibri"/>
+              </a:rPr>
+              <a:t>    db[("Base de datos&lt;br/&gt;5432 TCP")]</a:t>
+            </a:r>
+          </a:p>
+          <a:p>
+            <a:pPr>
+              <a:spcAft>
+                <a:spcPts val="400"/>
+              </a:spcAft>
+            </a:pPr>
+            <a:r>
+              <a:rPr sz="1400" b="0" i="0">
+                <a:solidFill>
+                  <a:srgbClr val="FFFFFF"/>
+                </a:solidFill>
+                <a:latin typeface="Calibri"/>
+              </a:rPr>
+              <a:t>  end</a:t>
+            </a:r>
+          </a:p>
+          <a:p>
+            <a:pPr>
+              <a:spcAft>
+                <a:spcPts val="400"/>
+              </a:spcAft>
+            </a:pPr>
+            <a:r>
+              <a:rPr sz="1400" b="0" i="0">
+                <a:solidFill>
+                  <a:srgbClr val="FFFFFF"/>
+                </a:solidFill>
+                <a:latin typeface="Calibri"/>
+              </a:rPr>
+              <a:t>  web --&gt;|"HTTPS 443"| edge</a:t>
+            </a:r>
+          </a:p>
+          <a:p>
+            <a:pPr>
+              <a:spcAft>
+                <a:spcPts val="400"/>
+              </a:spcAft>
+            </a:pPr>
+            <a:r>
+              <a:rPr sz="1400" b="0" i="0">
+                <a:solidFill>
+                  <a:srgbClr val="FFFFFF"/>
+                </a:solidFill>
+                <a:latin typeface="Calibri"/>
+              </a:rPr>
+              <a:t>  edge --&gt;|"HTTP 8080"| api</a:t>
+            </a:r>
+          </a:p>
+          <a:p>
+            <a:pPr>
+              <a:spcAft>
+                <a:spcPts val="400"/>
+              </a:spcAft>
+            </a:pPr>
+            <a:r>
+              <a:rPr sz="1400" b="0" i="0">
+                <a:solidFill>
+                  <a:srgbClr val="FFFFFF"/>
+                </a:solidFill>
+                <a:latin typeface="Calibri"/>
+              </a:rPr>
+              <a:t>  api --&gt;|"TCP 5432"| db</a:t>
+            </a:r>
+          </a:p>
+          <a:p>
+            <a:pPr>
+              <a:spcAft>
+                <a:spcPts val="400"/>
+              </a:spcAft>
+            </a:pPr>
+            <a:r>
+              <a:rPr sz="1400" b="0" i="0">
+                <a:solidFill>
+                  <a:srgbClr val="FFFFFF"/>
+                </a:solidFill>
+                <a:latin typeface="Calibri"/>
+              </a:rPr>
+              <a:t>  api --&gt;|"HTTPS 443 - frontera de confianza"| pagos["Pasarela de pagos externa"]</a:t>
+            </a:r>
+          </a:p>
+        </p:txBody>
+      </p:sp>
+      <p:sp>
+        <p:nvSpPr>
+          <p:cNvPr id="9" name="TextBox 8"/>
+          <p:cNvSpPr txBox="1"/>
+          <p:nvPr/>
+        </p:nvSpPr>
+        <p:spPr>
+          <a:xfrm>
+            <a:off x="457200" y="6080760"/>
+            <a:ext cx="11277295" cy="320040"/>
+          </a:xfrm>
+          <a:prstGeom prst="rect">
+            <a:avLst/>
+          </a:prstGeom>
+          <a:noFill/>
+        </p:spPr>
+        <p:txBody>
+          <a:bodyPr wrap="square">
+            <a:spAutoFit/>
+          </a:bodyPr>
+          <a:lstStyle/>
+          <a:p>
+            <a:pPr algn="ctr"/>
+            <a:r>
+              <a:rPr sz="1200" b="0" i="1">
+                <a:solidFill>
+                  <a:srgbClr val="666666"/>
+                </a:solidFill>
+                <a:latin typeface="Calibri"/>
+              </a:rPr>
+              <a:t>Una «subgraph» por zona, el puerto en cada caja y la base con «[( )]». La flecha al externo ES la frontera de confianza. Nombres: los mismos del C4 Containers de la Clase 4.</a:t>
+            </a:r>
+          </a:p>
+        </p:txBody>
+      </p:sp>
+      <p:sp>
+        <p:nvSpPr>
+          <p:cNvPr id="10" name="TextBox 9"/>
           <p:cNvSpPr txBox="1"/>
           <p:nvPr/>
         </p:nvSpPr>
@@ -10475,7 +11888,7 @@
         <p:spPr>
           <a:xfrm>
             <a:off x="0" y="0"/>
-            <a:ext cx="12191695" cy="960120"/>
+            <a:ext cx="12191695" cy="1170432"/>
           </a:xfrm>
           <a:prstGeom prst="rect">
             <a:avLst/>
@@ -10517,7 +11930,7 @@
         </p:nvSpPr>
         <p:spPr>
           <a:xfrm>
-            <a:off x="0" y="960120"/>
+            <a:off x="0" y="1170432"/>
             <a:ext cx="12191695" cy="41148"/>
           </a:xfrm>
           <a:prstGeom prst="rect">
@@ -10561,7 +11974,7 @@
         <p:spPr>
           <a:xfrm>
             <a:off x="457200" y="164592"/>
-            <a:ext cx="11277295" cy="502920"/>
+            <a:ext cx="11277295" cy="384048"/>
           </a:xfrm>
           <a:prstGeom prst="rect">
             <a:avLst/>
@@ -10581,21 +11994,55 @@
                 </a:solidFill>
                 <a:latin typeface="Calibri"/>
               </a:rPr>
-              <a:t>El diagrama de Despliegue: donde corre cada cosa</a:t>
-            </a:r>
-          </a:p>
-        </p:txBody>
-      </p:sp>
-      <p:sp>
-        <p:nvSpPr>
-          <p:cNvPr id="5" name="Rounded Rectangle 4"/>
+              <a:t>Del boceto al código Mermaid</a:t>
+            </a:r>
+          </a:p>
+        </p:txBody>
+      </p:sp>
+      <p:sp>
+        <p:nvSpPr>
+          <p:cNvPr id="5" name="TextBox 4"/>
+          <p:cNvSpPr txBox="1"/>
+          <p:nvPr/>
+        </p:nvSpPr>
+        <p:spPr>
+          <a:xfrm>
+            <a:off x="457200" y="566928"/>
+            <a:ext cx="11277295" cy="411480"/>
+          </a:xfrm>
+          <a:prstGeom prst="rect">
+            <a:avLst/>
+          </a:prstGeom>
+          <a:noFill/>
+        </p:spPr>
+        <p:txBody>
+          <a:bodyPr wrap="square">
+            <a:spAutoFit/>
+          </a:bodyPr>
+          <a:lstStyle/>
+          <a:p>
+            <a:r>
+              <a:rPr sz="1400" b="0" i="0">
+                <a:solidFill>
+                  <a:srgbClr val="B8D8EE"/>
+                </a:solidFill>
+                <a:latin typeface="Calibri"/>
+              </a:rPr>
+              <a:t>El diagrama se escribe como código: se versiona, se compara y se corrige</a:t>
+            </a:r>
+          </a:p>
+        </p:txBody>
+      </p:sp>
+      <p:sp>
+        <p:nvSpPr>
+          <p:cNvPr id="6" name="Rounded Rectangle 5"/>
           <p:cNvSpPr/>
           <p:nvPr/>
         </p:nvSpPr>
         <p:spPr>
           <a:xfrm>
-            <a:off x="457200" y="1261872"/>
-            <a:ext cx="11277295" cy="5093208"/>
+            <a:off x="457200" y="1659636"/>
+            <a:ext cx="11277295" cy="1051560"/>
           </a:xfrm>
           <a:prstGeom prst="roundRect">
             <a:avLst>
@@ -10603,7 +12050,7 @@
             </a:avLst>
           </a:prstGeom>
           <a:solidFill>
-            <a:srgbClr val="1E2A38"/>
+            <a:srgbClr val="F2F2F2"/>
           </a:solidFill>
           <a:ln>
             <a:noFill/>
@@ -10633,17 +12080,19 @@
       </p:sp>
       <p:sp>
         <p:nvSpPr>
-          <p:cNvPr id="6" name="Rectangle 5"/>
+          <p:cNvPr id="7" name="Rounded Rectangle 6"/>
           <p:cNvSpPr/>
           <p:nvPr/>
         </p:nvSpPr>
         <p:spPr>
           <a:xfrm>
-            <a:off x="457200" y="1261872"/>
-            <a:ext cx="11277295" cy="320040"/>
-          </a:xfrm>
-          <a:prstGeom prst="rect">
-            <a:avLst/>
+            <a:off x="594360" y="1965960"/>
+            <a:ext cx="438912" cy="438912"/>
+          </a:xfrm>
+          <a:prstGeom prst="roundRect">
+            <a:avLst>
+              <a:gd name="adj" fmla="val 12000"/>
+            </a:avLst>
           </a:prstGeom>
           <a:solidFill>
             <a:srgbClr val="095292"/>
@@ -10676,46 +12125,14 @@
       </p:sp>
       <p:sp>
         <p:nvSpPr>
-          <p:cNvPr id="7" name="TextBox 6"/>
-          <p:cNvSpPr txBox="1"/>
-          <p:nvPr/>
-        </p:nvSpPr>
-        <p:spPr>
-          <a:xfrm>
-            <a:off x="685800" y="1307592"/>
-            <a:ext cx="10820095" cy="256032"/>
-          </a:xfrm>
-          <a:prstGeom prst="rect">
-            <a:avLst/>
-          </a:prstGeom>
-          <a:noFill/>
-        </p:spPr>
-        <p:txBody>
-          <a:bodyPr wrap="square" anchor="ctr"/>
-          <a:lstStyle/>
-          <a:p>
-            <a:r>
-              <a:rPr sz="1000" b="1" i="0">
-                <a:solidFill>
-                  <a:srgbClr val="269CCB"/>
-                </a:solidFill>
-                <a:latin typeface="Calibri"/>
-              </a:rPr>
-              <a:t>● ● ●</a:t>
-            </a:r>
-          </a:p>
-        </p:txBody>
-      </p:sp>
-      <p:sp>
-        <p:nvSpPr>
           <p:cNvPr id="8" name="TextBox 7"/>
           <p:cNvSpPr txBox="1"/>
           <p:nvPr/>
         </p:nvSpPr>
         <p:spPr>
           <a:xfrm>
-            <a:off x="777240" y="1719072"/>
-            <a:ext cx="5181447" cy="4453128"/>
+            <a:off x="594360" y="1965960"/>
+            <a:ext cx="438912" cy="438912"/>
           </a:xfrm>
           <a:prstGeom prst="rect">
             <a:avLst/>
@@ -10723,200 +12140,18 @@
           <a:noFill/>
         </p:spPr>
         <p:txBody>
-          <a:bodyPr wrap="square">
-            <a:spAutoFit/>
-          </a:bodyPr>
-          <a:lstStyle/>
-          <a:p>
-            <a:pPr>
-              <a:spcAft>
-                <a:spcPts val="400"/>
-              </a:spcAft>
-            </a:pPr>
-            <a:r>
-              <a:rPr sz="1400" b="0" i="0">
+          <a:bodyPr wrap="square" anchor="ctr"/>
+          <a:lstStyle/>
+          <a:p>
+            <a:pPr algn="ctr"/>
+            <a:r>
+              <a:rPr sz="1600" b="1" i="0">
                 <a:solidFill>
                   <a:srgbClr val="FFFFFF"/>
                 </a:solidFill>
                 <a:latin typeface="Calibri"/>
               </a:rPr>
-              <a:t>flowchart TB</a:t>
-            </a:r>
-          </a:p>
-          <a:p>
-            <a:pPr>
-              <a:spcAft>
-                <a:spcPts val="400"/>
-              </a:spcAft>
-            </a:pPr>
-            <a:r>
-              <a:rPr sz="1400" b="0" i="0">
-                <a:solidFill>
-                  <a:srgbClr val="FFFFFF"/>
-                </a:solidFill>
-                <a:latin typeface="Calibri"/>
-              </a:rPr>
-              <a:t>  subgraph internet[Internet]</a:t>
-            </a:r>
-          </a:p>
-          <a:p>
-            <a:pPr>
-              <a:spcAft>
-                <a:spcPts val="400"/>
-              </a:spcAft>
-            </a:pPr>
-            <a:r>
-              <a:rPr sz="1400" b="0" i="0">
-                <a:solidFill>
-                  <a:srgbClr val="FFFFFF"/>
-                </a:solidFill>
-                <a:latin typeface="Calibri"/>
-              </a:rPr>
-              <a:t>    nav([Navegador del usuario])</a:t>
-            </a:r>
-          </a:p>
-          <a:p>
-            <a:pPr>
-              <a:spcAft>
-                <a:spcPts val="400"/>
-              </a:spcAft>
-            </a:pPr>
-            <a:r>
-              <a:rPr sz="1400" b="0" i="0">
-                <a:solidFill>
-                  <a:srgbClr val="FFFFFF"/>
-                </a:solidFill>
-                <a:latin typeface="Calibri"/>
-              </a:rPr>
-              <a:t>  end</a:t>
-            </a:r>
-          </a:p>
-          <a:p>
-            <a:pPr>
-              <a:spcAft>
-                <a:spcPts val="400"/>
-              </a:spcAft>
-            </a:pPr>
-            <a:r>
-              <a:rPr sz="1400" b="0" i="0">
-                <a:solidFill>
-                  <a:srgbClr val="FFFFFF"/>
-                </a:solidFill>
-                <a:latin typeface="Calibri"/>
-              </a:rPr>
-              <a:t/>
-            </a:r>
-          </a:p>
-          <a:p>
-            <a:pPr>
-              <a:spcAft>
-                <a:spcPts val="400"/>
-              </a:spcAft>
-            </a:pPr>
-            <a:r>
-              <a:rPr sz="1400" b="0" i="0">
-                <a:solidFill>
-                  <a:srgbClr val="FFFFFF"/>
-                </a:solidFill>
-                <a:latin typeface="Calibri"/>
-              </a:rPr>
-              <a:t>  subgraph nube[Proveedor cloud - region &lt;su region&gt;]</a:t>
-            </a:r>
-          </a:p>
-          <a:p>
-            <a:pPr>
-              <a:spcAft>
-                <a:spcPts val="400"/>
-              </a:spcAft>
-            </a:pPr>
-            <a:r>
-              <a:rPr sz="1400" b="0" i="0">
-                <a:solidFill>
-                  <a:srgbClr val="FFFFFF"/>
-                </a:solidFill>
-                <a:latin typeface="Calibri"/>
-              </a:rPr>
-              <a:t>    subgraph edge[CDN / Edge]</a:t>
-            </a:r>
-          </a:p>
-          <a:p>
-            <a:pPr>
-              <a:spcAft>
-                <a:spcPts val="400"/>
-              </a:spcAft>
-            </a:pPr>
-            <a:r>
-              <a:rPr sz="1400" b="0" i="0">
-                <a:solidFill>
-                  <a:srgbClr val="FFFFFF"/>
-                </a:solidFill>
-                <a:latin typeface="Calibri"/>
-              </a:rPr>
-              <a:t>      estatico[/Archivos estaticos&lt;br/&gt;build de la SPA/]</a:t>
-            </a:r>
-          </a:p>
-          <a:p>
-            <a:pPr>
-              <a:spcAft>
-                <a:spcPts val="400"/>
-              </a:spcAft>
-            </a:pPr>
-            <a:r>
-              <a:rPr sz="1400" b="0" i="0">
-                <a:solidFill>
-                  <a:srgbClr val="FFFFFF"/>
-                </a:solidFill>
-                <a:latin typeface="Calibri"/>
-              </a:rPr>
-              <a:t>    end</a:t>
-            </a:r>
-          </a:p>
-          <a:p>
-            <a:pPr>
-              <a:spcAft>
-                <a:spcPts val="400"/>
-              </a:spcAft>
-            </a:pPr>
-            <a:r>
-              <a:rPr sz="1400" b="0" i="0">
-                <a:solidFill>
-                  <a:srgbClr val="FFFFFF"/>
-                </a:solidFill>
-                <a:latin typeface="Calibri"/>
-              </a:rPr>
-              <a:t>    subgraph app[Servicio de aplicacion]</a:t>
-            </a:r>
-          </a:p>
-          <a:p>
-            <a:pPr>
-              <a:spcAft>
-                <a:spcPts val="400"/>
-              </a:spcAft>
-            </a:pPr>
-            <a:r>
-              <a:rPr sz="1400" b="0" i="0">
-                <a:solidFill>
-                  <a:srgbClr val="FFFFFF"/>
-                </a:solidFill>
-                <a:latin typeface="Calibri"/>
-              </a:rPr>
-              <a:t>      api1[Instancia API 1]</a:t>
-            </a:r>
-          </a:p>
-          <a:p>
-            <a:pPr>
-              <a:spcAft>
-                <a:spcPts val="400"/>
-              </a:spcAft>
-            </a:pPr>
-            <a:r>
-              <a:rPr sz="1400" b="0" i="0">
-                <a:solidFill>
-                  <a:srgbClr val="FFFFFF"/>
-                </a:solidFill>
-                <a:latin typeface="Calibri"/>
-              </a:rPr>
-              <a:t>      api2[Instancia API 2]</a:t>
+              <a:t>1</a:t>
             </a:r>
           </a:p>
         </p:txBody>
@@ -10929,8 +12164,8 @@
         </p:nvSpPr>
         <p:spPr>
           <a:xfrm>
-            <a:off x="6233007" y="1719072"/>
-            <a:ext cx="5181447" cy="4453128"/>
+            <a:off x="1188720" y="1751076"/>
+            <a:ext cx="10271455" cy="886968"/>
           </a:xfrm>
           <a:prstGeom prst="rect">
             <a:avLst/>
@@ -10938,191 +12173,553 @@
           <a:noFill/>
         </p:spPr>
         <p:txBody>
-          <a:bodyPr wrap="square">
-            <a:spAutoFit/>
-          </a:bodyPr>
-          <a:lstStyle/>
+          <a:bodyPr wrap="square" anchor="ctr"/>
+          <a:lstStyle/>
+          <a:p>
+            <a:r>
+              <a:rPr sz="1500" b="1" i="0">
+                <a:solidFill>
+                  <a:srgbClr val="095292"/>
+                </a:solidFill>
+                <a:latin typeface="Calibri"/>
+              </a:rPr>
+              <a:t>Diseña visual</a:t>
+            </a:r>
+          </a:p>
           <a:p>
             <a:pPr>
-              <a:spcAft>
-                <a:spcPts val="400"/>
-              </a:spcAft>
+              <a:spcBef>
+                <a:spcPts val="200"/>
+              </a:spcBef>
             </a:pPr>
             <a:r>
-              <a:rPr sz="1400" b="0" i="0">
+              <a:rPr sz="1300" b="0" i="0">
+                <a:solidFill>
+                  <a:srgbClr val="333333"/>
+                </a:solidFill>
+                <a:latin typeface="Calibri"/>
+              </a:rPr>
+              <a:t>Dibuja el diagrama como quieras en Excalidraw o draw.io: es más rápido arrastrar cajas que escribir código, y ahí es donde se piensa el modelo.</a:t>
+            </a:r>
+          </a:p>
+        </p:txBody>
+      </p:sp>
+      <p:sp>
+        <p:nvSpPr>
+          <p:cNvPr id="10" name="Rounded Rectangle 9"/>
+          <p:cNvSpPr/>
+          <p:nvPr/>
+        </p:nvSpPr>
+        <p:spPr>
+          <a:xfrm>
+            <a:off x="457200" y="2802636"/>
+            <a:ext cx="11277295" cy="1051560"/>
+          </a:xfrm>
+          <a:prstGeom prst="roundRect">
+            <a:avLst>
+              <a:gd name="adj" fmla="val 12000"/>
+            </a:avLst>
+          </a:prstGeom>
+          <a:solidFill>
+            <a:srgbClr val="E8F4FA"/>
+          </a:solidFill>
+          <a:ln>
+            <a:noFill/>
+          </a:ln>
+        </p:spPr>
+        <p:style>
+          <a:lnRef idx="1">
+            <a:schemeClr val="accent1"/>
+          </a:lnRef>
+          <a:fillRef idx="3">
+            <a:schemeClr val="accent1"/>
+          </a:fillRef>
+          <a:effectRef idx="2">
+            <a:schemeClr val="accent1"/>
+          </a:effectRef>
+          <a:fontRef idx="minor">
+            <a:schemeClr val="lt1"/>
+          </a:fontRef>
+        </p:style>
+        <p:txBody>
+          <a:bodyPr rtlCol="0" anchor="ctr"/>
+          <a:lstStyle/>
+          <a:p>
+            <a:pPr algn="ctr"/>
+          </a:p>
+        </p:txBody>
+      </p:sp>
+      <p:sp>
+        <p:nvSpPr>
+          <p:cNvPr id="11" name="Rounded Rectangle 10"/>
+          <p:cNvSpPr/>
+          <p:nvPr/>
+        </p:nvSpPr>
+        <p:spPr>
+          <a:xfrm>
+            <a:off x="594360" y="3108960"/>
+            <a:ext cx="438912" cy="438912"/>
+          </a:xfrm>
+          <a:prstGeom prst="roundRect">
+            <a:avLst>
+              <a:gd name="adj" fmla="val 12000"/>
+            </a:avLst>
+          </a:prstGeom>
+          <a:solidFill>
+            <a:srgbClr val="095292"/>
+          </a:solidFill>
+          <a:ln>
+            <a:noFill/>
+          </a:ln>
+        </p:spPr>
+        <p:style>
+          <a:lnRef idx="1">
+            <a:schemeClr val="accent1"/>
+          </a:lnRef>
+          <a:fillRef idx="3">
+            <a:schemeClr val="accent1"/>
+          </a:fillRef>
+          <a:effectRef idx="2">
+            <a:schemeClr val="accent1"/>
+          </a:effectRef>
+          <a:fontRef idx="minor">
+            <a:schemeClr val="lt1"/>
+          </a:fontRef>
+        </p:style>
+        <p:txBody>
+          <a:bodyPr rtlCol="0" anchor="ctr"/>
+          <a:lstStyle/>
+          <a:p>
+            <a:pPr algn="ctr"/>
+          </a:p>
+        </p:txBody>
+      </p:sp>
+      <p:sp>
+        <p:nvSpPr>
+          <p:cNvPr id="12" name="TextBox 11"/>
+          <p:cNvSpPr txBox="1"/>
+          <p:nvPr/>
+        </p:nvSpPr>
+        <p:spPr>
+          <a:xfrm>
+            <a:off x="594360" y="3108960"/>
+            <a:ext cx="438912" cy="438912"/>
+          </a:xfrm>
+          <a:prstGeom prst="rect">
+            <a:avLst/>
+          </a:prstGeom>
+          <a:noFill/>
+        </p:spPr>
+        <p:txBody>
+          <a:bodyPr wrap="square" anchor="ctr"/>
+          <a:lstStyle/>
+          <a:p>
+            <a:pPr algn="ctr"/>
+            <a:r>
+              <a:rPr sz="1600" b="1" i="0">
                 <a:solidFill>
                   <a:srgbClr val="FFFFFF"/>
                 </a:solidFill>
                 <a:latin typeface="Calibri"/>
               </a:rPr>
-              <a:t>    end</a:t>
+              <a:t>2</a:t>
+            </a:r>
+          </a:p>
+        </p:txBody>
+      </p:sp>
+      <p:sp>
+        <p:nvSpPr>
+          <p:cNvPr id="13" name="TextBox 12"/>
+          <p:cNvSpPr txBox="1"/>
+          <p:nvPr/>
+        </p:nvSpPr>
+        <p:spPr>
+          <a:xfrm>
+            <a:off x="1188720" y="2894076"/>
+            <a:ext cx="10271455" cy="886968"/>
+          </a:xfrm>
+          <a:prstGeom prst="rect">
+            <a:avLst/>
+          </a:prstGeom>
+          <a:noFill/>
+        </p:spPr>
+        <p:txBody>
+          <a:bodyPr wrap="square" anchor="ctr"/>
+          <a:lstStyle/>
+          <a:p>
+            <a:r>
+              <a:rPr sz="1500" b="1" i="0">
+                <a:solidFill>
+                  <a:srgbClr val="095292"/>
+                </a:solidFill>
+                <a:latin typeface="Calibri"/>
+              </a:rPr>
+              <a:t>Traduce con IA</a:t>
             </a:r>
           </a:p>
           <a:p>
             <a:pPr>
-              <a:spcAft>
-                <a:spcPts val="400"/>
-              </a:spcAft>
+              <a:spcBef>
+                <a:spcPts val="200"/>
+              </a:spcBef>
             </a:pPr>
             <a:r>
-              <a:rPr sz="1400" b="0" i="0">
+              <a:rPr sz="1300" b="0" i="0">
+                <a:solidFill>
+                  <a:srgbClr val="333333"/>
+                </a:solidFill>
+                <a:latin typeface="Calibri"/>
+              </a:rPr>
+              <a:t>Describe tu boceto a una IA y pídele el código Mermaid usando flowchart. Revisa el resultado: la IA acierta la sintaxis, no tu modelo.</a:t>
+            </a:r>
+          </a:p>
+        </p:txBody>
+      </p:sp>
+      <p:sp>
+        <p:nvSpPr>
+          <p:cNvPr id="14" name="Rounded Rectangle 13"/>
+          <p:cNvSpPr/>
+          <p:nvPr/>
+        </p:nvSpPr>
+        <p:spPr>
+          <a:xfrm>
+            <a:off x="457200" y="3945636"/>
+            <a:ext cx="11277295" cy="1051560"/>
+          </a:xfrm>
+          <a:prstGeom prst="roundRect">
+            <a:avLst>
+              <a:gd name="adj" fmla="val 12000"/>
+            </a:avLst>
+          </a:prstGeom>
+          <a:solidFill>
+            <a:srgbClr val="F2F2F2"/>
+          </a:solidFill>
+          <a:ln>
+            <a:noFill/>
+          </a:ln>
+        </p:spPr>
+        <p:style>
+          <a:lnRef idx="1">
+            <a:schemeClr val="accent1"/>
+          </a:lnRef>
+          <a:fillRef idx="3">
+            <a:schemeClr val="accent1"/>
+          </a:fillRef>
+          <a:effectRef idx="2">
+            <a:schemeClr val="accent1"/>
+          </a:effectRef>
+          <a:fontRef idx="minor">
+            <a:schemeClr val="lt1"/>
+          </a:fontRef>
+        </p:style>
+        <p:txBody>
+          <a:bodyPr rtlCol="0" anchor="ctr"/>
+          <a:lstStyle/>
+          <a:p>
+            <a:pPr algn="ctr"/>
+          </a:p>
+        </p:txBody>
+      </p:sp>
+      <p:sp>
+        <p:nvSpPr>
+          <p:cNvPr id="15" name="Rounded Rectangle 14"/>
+          <p:cNvSpPr/>
+          <p:nvPr/>
+        </p:nvSpPr>
+        <p:spPr>
+          <a:xfrm>
+            <a:off x="594360" y="4251960"/>
+            <a:ext cx="438912" cy="438912"/>
+          </a:xfrm>
+          <a:prstGeom prst="roundRect">
+            <a:avLst>
+              <a:gd name="adj" fmla="val 12000"/>
+            </a:avLst>
+          </a:prstGeom>
+          <a:solidFill>
+            <a:srgbClr val="095292"/>
+          </a:solidFill>
+          <a:ln>
+            <a:noFill/>
+          </a:ln>
+        </p:spPr>
+        <p:style>
+          <a:lnRef idx="1">
+            <a:schemeClr val="accent1"/>
+          </a:lnRef>
+          <a:fillRef idx="3">
+            <a:schemeClr val="accent1"/>
+          </a:fillRef>
+          <a:effectRef idx="2">
+            <a:schemeClr val="accent1"/>
+          </a:effectRef>
+          <a:fontRef idx="minor">
+            <a:schemeClr val="lt1"/>
+          </a:fontRef>
+        </p:style>
+        <p:txBody>
+          <a:bodyPr rtlCol="0" anchor="ctr"/>
+          <a:lstStyle/>
+          <a:p>
+            <a:pPr algn="ctr"/>
+          </a:p>
+        </p:txBody>
+      </p:sp>
+      <p:sp>
+        <p:nvSpPr>
+          <p:cNvPr id="16" name="TextBox 15"/>
+          <p:cNvSpPr txBox="1"/>
+          <p:nvPr/>
+        </p:nvSpPr>
+        <p:spPr>
+          <a:xfrm>
+            <a:off x="594360" y="4251960"/>
+            <a:ext cx="438912" cy="438912"/>
+          </a:xfrm>
+          <a:prstGeom prst="rect">
+            <a:avLst/>
+          </a:prstGeom>
+          <a:noFill/>
+        </p:spPr>
+        <p:txBody>
+          <a:bodyPr wrap="square" anchor="ctr"/>
+          <a:lstStyle/>
+          <a:p>
+            <a:pPr algn="ctr"/>
+            <a:r>
+              <a:rPr sz="1600" b="1" i="0">
                 <a:solidFill>
                   <a:srgbClr val="FFFFFF"/>
                 </a:solidFill>
                 <a:latin typeface="Calibri"/>
               </a:rPr>
-              <a:t>    subgraph datos[Servicio gestionado]</a:t>
+              <a:t>3</a:t>
+            </a:r>
+          </a:p>
+        </p:txBody>
+      </p:sp>
+      <p:sp>
+        <p:nvSpPr>
+          <p:cNvPr id="17" name="TextBox 16"/>
+          <p:cNvSpPr txBox="1"/>
+          <p:nvPr/>
+        </p:nvSpPr>
+        <p:spPr>
+          <a:xfrm>
+            <a:off x="1188720" y="4037076"/>
+            <a:ext cx="10271455" cy="886968"/>
+          </a:xfrm>
+          <a:prstGeom prst="rect">
+            <a:avLst/>
+          </a:prstGeom>
+          <a:noFill/>
+        </p:spPr>
+        <p:txBody>
+          <a:bodyPr wrap="square" anchor="ctr"/>
+          <a:lstStyle/>
+          <a:p>
+            <a:r>
+              <a:rPr sz="1500" b="1" i="0">
+                <a:solidFill>
+                  <a:srgbClr val="095292"/>
+                </a:solidFill>
+                <a:latin typeface="Calibri"/>
+              </a:rPr>
+              <a:t>Renderiza en un visor</a:t>
             </a:r>
           </a:p>
           <a:p>
             <a:pPr>
-              <a:spcAft>
-                <a:spcPts val="400"/>
-              </a:spcAft>
+              <a:spcBef>
+                <a:spcPts val="200"/>
+              </a:spcBef>
             </a:pPr>
             <a:r>
-              <a:rPr sz="1400" b="0" i="0">
+              <a:rPr sz="1300" b="0" i="0">
+                <a:solidFill>
+                  <a:srgbClr val="333333"/>
+                </a:solidFill>
+                <a:latin typeface="Calibri"/>
+              </a:rPr>
+              <a:t>Pega el código en un visor Mermaid (mermaid.live o la vista previa de tu editor) y míralo dibujado. Si no renderiza, corrige ahí: un end faltante o un rótulo sin comillas.</a:t>
+            </a:r>
+          </a:p>
+        </p:txBody>
+      </p:sp>
+      <p:sp>
+        <p:nvSpPr>
+          <p:cNvPr id="18" name="Rounded Rectangle 17"/>
+          <p:cNvSpPr/>
+          <p:nvPr/>
+        </p:nvSpPr>
+        <p:spPr>
+          <a:xfrm>
+            <a:off x="457200" y="5088636"/>
+            <a:ext cx="11277295" cy="1051560"/>
+          </a:xfrm>
+          <a:prstGeom prst="roundRect">
+            <a:avLst>
+              <a:gd name="adj" fmla="val 12000"/>
+            </a:avLst>
+          </a:prstGeom>
+          <a:solidFill>
+            <a:srgbClr val="E8F4FA"/>
+          </a:solidFill>
+          <a:ln>
+            <a:noFill/>
+          </a:ln>
+        </p:spPr>
+        <p:style>
+          <a:lnRef idx="1">
+            <a:schemeClr val="accent1"/>
+          </a:lnRef>
+          <a:fillRef idx="3">
+            <a:schemeClr val="accent1"/>
+          </a:fillRef>
+          <a:effectRef idx="2">
+            <a:schemeClr val="accent1"/>
+          </a:effectRef>
+          <a:fontRef idx="minor">
+            <a:schemeClr val="lt1"/>
+          </a:fontRef>
+        </p:style>
+        <p:txBody>
+          <a:bodyPr rtlCol="0" anchor="ctr"/>
+          <a:lstStyle/>
+          <a:p>
+            <a:pPr algn="ctr"/>
+          </a:p>
+        </p:txBody>
+      </p:sp>
+      <p:sp>
+        <p:nvSpPr>
+          <p:cNvPr id="19" name="Rounded Rectangle 18"/>
+          <p:cNvSpPr/>
+          <p:nvPr/>
+        </p:nvSpPr>
+        <p:spPr>
+          <a:xfrm>
+            <a:off x="594360" y="5394960"/>
+            <a:ext cx="438912" cy="438912"/>
+          </a:xfrm>
+          <a:prstGeom prst="roundRect">
+            <a:avLst>
+              <a:gd name="adj" fmla="val 12000"/>
+            </a:avLst>
+          </a:prstGeom>
+          <a:solidFill>
+            <a:srgbClr val="095292"/>
+          </a:solidFill>
+          <a:ln>
+            <a:noFill/>
+          </a:ln>
+        </p:spPr>
+        <p:style>
+          <a:lnRef idx="1">
+            <a:schemeClr val="accent1"/>
+          </a:lnRef>
+          <a:fillRef idx="3">
+            <a:schemeClr val="accent1"/>
+          </a:fillRef>
+          <a:effectRef idx="2">
+            <a:schemeClr val="accent1"/>
+          </a:effectRef>
+          <a:fontRef idx="minor">
+            <a:schemeClr val="lt1"/>
+          </a:fontRef>
+        </p:style>
+        <p:txBody>
+          <a:bodyPr rtlCol="0" anchor="ctr"/>
+          <a:lstStyle/>
+          <a:p>
+            <a:pPr algn="ctr"/>
+          </a:p>
+        </p:txBody>
+      </p:sp>
+      <p:sp>
+        <p:nvSpPr>
+          <p:cNvPr id="20" name="TextBox 19"/>
+          <p:cNvSpPr txBox="1"/>
+          <p:nvPr/>
+        </p:nvSpPr>
+        <p:spPr>
+          <a:xfrm>
+            <a:off x="594360" y="5394960"/>
+            <a:ext cx="438912" cy="438912"/>
+          </a:xfrm>
+          <a:prstGeom prst="rect">
+            <a:avLst/>
+          </a:prstGeom>
+          <a:noFill/>
+        </p:spPr>
+        <p:txBody>
+          <a:bodyPr wrap="square" anchor="ctr"/>
+          <a:lstStyle/>
+          <a:p>
+            <a:pPr algn="ctr"/>
+            <a:r>
+              <a:rPr sz="1600" b="1" i="0">
                 <a:solidFill>
                   <a:srgbClr val="FFFFFF"/>
                 </a:solidFill>
                 <a:latin typeface="Calibri"/>
               </a:rPr>
-              <a:t>      pg[(PostgreSQL&lt;br/&gt;con respaldo diario)]</a:t>
+              <a:t>4</a:t>
+            </a:r>
+          </a:p>
+        </p:txBody>
+      </p:sp>
+      <p:sp>
+        <p:nvSpPr>
+          <p:cNvPr id="21" name="TextBox 20"/>
+          <p:cNvSpPr txBox="1"/>
+          <p:nvPr/>
+        </p:nvSpPr>
+        <p:spPr>
+          <a:xfrm>
+            <a:off x="1188720" y="5180076"/>
+            <a:ext cx="10271455" cy="886968"/>
+          </a:xfrm>
+          <a:prstGeom prst="rect">
+            <a:avLst/>
+          </a:prstGeom>
+          <a:noFill/>
+        </p:spPr>
+        <p:txBody>
+          <a:bodyPr wrap="square" anchor="ctr"/>
+          <a:lstStyle/>
+          <a:p>
+            <a:r>
+              <a:rPr sz="1500" b="1" i="0">
+                <a:solidFill>
+                  <a:srgbClr val="095292"/>
+                </a:solidFill>
+                <a:latin typeface="Calibri"/>
+              </a:rPr>
+              <a:t>Guarda código e imagen</a:t>
             </a:r>
           </a:p>
           <a:p>
             <a:pPr>
-              <a:spcAft>
-                <a:spcPts val="400"/>
-              </a:spcAft>
+              <a:spcBef>
+                <a:spcPts val="200"/>
+              </a:spcBef>
             </a:pPr>
             <a:r>
-              <a:rPr sz="1400" b="0" i="0">
-                <a:solidFill>
-                  <a:srgbClr val="FFFFFF"/>
-                </a:solidFill>
-                <a:latin typeface="Calibri"/>
-              </a:rPr>
-              <a:t>      obj[(Almacenamiento de objetos&lt;br/&gt;adjuntos)]</a:t>
-            </a:r>
-          </a:p>
-          <a:p>
-            <a:pPr>
-              <a:spcAft>
-                <a:spcPts val="400"/>
-              </a:spcAft>
-            </a:pPr>
-            <a:r>
-              <a:rPr sz="1400" b="0" i="0">
-                <a:solidFill>
-                  <a:srgbClr val="FFFFFF"/>
-                </a:solidFill>
-                <a:latin typeface="Calibri"/>
-              </a:rPr>
-              <a:t>    end</a:t>
-            </a:r>
-          </a:p>
-          <a:p>
-            <a:pPr>
-              <a:spcAft>
-                <a:spcPts val="400"/>
-              </a:spcAft>
-            </a:pPr>
-            <a:r>
-              <a:rPr sz="1400" b="0" i="0">
-                <a:solidFill>
-                  <a:srgbClr val="FFFFFF"/>
-                </a:solidFill>
-                <a:latin typeface="Calibri"/>
-              </a:rPr>
-              <a:t>  end</a:t>
-            </a:r>
-          </a:p>
-          <a:p>
-            <a:pPr>
-              <a:spcAft>
-                <a:spcPts val="400"/>
-              </a:spcAft>
-            </a:pPr>
-            <a:r>
-              <a:rPr sz="1400" b="0" i="0">
-                <a:solidFill>
-                  <a:srgbClr val="FFFFFF"/>
-                </a:solidFill>
-                <a:latin typeface="Calibri"/>
-              </a:rPr>
-              <a:t/>
-            </a:r>
-          </a:p>
-          <a:p>
-            <a:pPr>
-              <a:spcAft>
-                <a:spcPts val="400"/>
-              </a:spcAft>
-            </a:pPr>
-            <a:r>
-              <a:rPr sz="1400" b="0" i="0">
-                <a:solidFill>
-                  <a:srgbClr val="FFFFFF"/>
-                </a:solidFill>
-                <a:latin typeface="Calibri"/>
-              </a:rPr>
-              <a:t>  nav --&gt; estatico</a:t>
-            </a:r>
-          </a:p>
-          <a:p>
-            <a:pPr>
-              <a:spcAft>
-                <a:spcPts val="400"/>
-              </a:spcAft>
-            </a:pPr>
-            <a:r>
-              <a:rPr sz="1400" b="0" i="0">
-                <a:solidFill>
-                  <a:srgbClr val="FFFFFF"/>
-                </a:solidFill>
-                <a:latin typeface="Calibri"/>
-              </a:rPr>
-              <a:t>  nav --&gt; api1 &amp; api2</a:t>
-            </a:r>
-          </a:p>
-          <a:p>
-            <a:pPr>
-              <a:spcAft>
-                <a:spcPts val="400"/>
-              </a:spcAft>
-            </a:pPr>
-            <a:r>
-              <a:rPr sz="1400" b="0" i="0">
-                <a:solidFill>
-                  <a:srgbClr val="FFFFFF"/>
-                </a:solidFill>
-                <a:latin typeface="Calibri"/>
-              </a:rPr>
-              <a:t>  api1 &amp; api2 --&gt; pg</a:t>
-            </a:r>
-          </a:p>
-          <a:p>
-            <a:pPr>
-              <a:spcAft>
-                <a:spcPts val="400"/>
-              </a:spcAft>
-            </a:pPr>
-            <a:r>
-              <a:rPr sz="1400" b="0" i="0">
-                <a:solidFill>
-                  <a:srgbClr val="FFFFFF"/>
-                </a:solidFill>
-                <a:latin typeface="Calibri"/>
-              </a:rPr>
-              <a:t>  api1 &amp; api2 --&gt; obj</a:t>
-            </a:r>
-          </a:p>
-        </p:txBody>
-      </p:sp>
-      <p:sp>
-        <p:nvSpPr>
-          <p:cNvPr id="10" name="TextBox 9"/>
+              <a:rPr sz="1300" b="0" i="0">
+                <a:solidFill>
+                  <a:srgbClr val="333333"/>
+                </a:solidFill>
+                <a:latin typeface="Calibri"/>
+              </a:rPr>
+              <a:t>El código es la fuente del diagrama: guárdalo con tu proyecto junto con el PNG exportado.</a:t>
+            </a:r>
+          </a:p>
+        </p:txBody>
+      </p:sp>
+      <p:sp>
+        <p:nvSpPr>
+          <p:cNvPr id="22" name="TextBox 21"/>
           <p:cNvSpPr txBox="1"/>
           <p:nvPr/>
         </p:nvSpPr>
@@ -11190,1661 +12787,6 @@
         <p:spPr>
           <a:xfrm>
             <a:off x="0" y="0"/>
-            <a:ext cx="12191695" cy="960120"/>
-          </a:xfrm>
-          <a:prstGeom prst="rect">
-            <a:avLst/>
-          </a:prstGeom>
-          <a:solidFill>
-            <a:srgbClr val="095292"/>
-          </a:solidFill>
-          <a:ln>
-            <a:noFill/>
-          </a:ln>
-        </p:spPr>
-        <p:style>
-          <a:lnRef idx="1">
-            <a:schemeClr val="accent1"/>
-          </a:lnRef>
-          <a:fillRef idx="3">
-            <a:schemeClr val="accent1"/>
-          </a:fillRef>
-          <a:effectRef idx="2">
-            <a:schemeClr val="accent1"/>
-          </a:effectRef>
-          <a:fontRef idx="minor">
-            <a:schemeClr val="lt1"/>
-          </a:fontRef>
-        </p:style>
-        <p:txBody>
-          <a:bodyPr rtlCol="0" anchor="ctr"/>
-          <a:lstStyle/>
-          <a:p>
-            <a:pPr algn="ctr"/>
-          </a:p>
-        </p:txBody>
-      </p:sp>
-      <p:sp>
-        <p:nvSpPr>
-          <p:cNvPr id="3" name="Rectangle 2"/>
-          <p:cNvSpPr/>
-          <p:nvPr/>
-        </p:nvSpPr>
-        <p:spPr>
-          <a:xfrm>
-            <a:off x="0" y="960120"/>
-            <a:ext cx="12191695" cy="41148"/>
-          </a:xfrm>
-          <a:prstGeom prst="rect">
-            <a:avLst/>
-          </a:prstGeom>
-          <a:solidFill>
-            <a:srgbClr val="FFD000"/>
-          </a:solidFill>
-          <a:ln>
-            <a:noFill/>
-          </a:ln>
-        </p:spPr>
-        <p:style>
-          <a:lnRef idx="1">
-            <a:schemeClr val="accent1"/>
-          </a:lnRef>
-          <a:fillRef idx="3">
-            <a:schemeClr val="accent1"/>
-          </a:fillRef>
-          <a:effectRef idx="2">
-            <a:schemeClr val="accent1"/>
-          </a:effectRef>
-          <a:fontRef idx="minor">
-            <a:schemeClr val="lt1"/>
-          </a:fontRef>
-        </p:style>
-        <p:txBody>
-          <a:bodyPr rtlCol="0" anchor="ctr"/>
-          <a:lstStyle/>
-          <a:p>
-            <a:pPr algn="ctr"/>
-          </a:p>
-        </p:txBody>
-      </p:sp>
-      <p:sp>
-        <p:nvSpPr>
-          <p:cNvPr id="4" name="TextBox 3"/>
-          <p:cNvSpPr txBox="1"/>
-          <p:nvPr/>
-        </p:nvSpPr>
-        <p:spPr>
-          <a:xfrm>
-            <a:off x="457200" y="164592"/>
-            <a:ext cx="11277295" cy="502920"/>
-          </a:xfrm>
-          <a:prstGeom prst="rect">
-            <a:avLst/>
-          </a:prstGeom>
-          <a:noFill/>
-        </p:spPr>
-        <p:txBody>
-          <a:bodyPr wrap="square">
-            <a:spAutoFit/>
-          </a:bodyPr>
-          <a:lstStyle/>
-          <a:p>
-            <a:r>
-              <a:rPr sz="2600" b="1" i="0">
-                <a:solidFill>
-                  <a:srgbClr val="FFFFFF"/>
-                </a:solidFill>
-                <a:latin typeface="Calibri"/>
-              </a:rPr>
-              <a:t>Que tipo de almacenamiento pide cada componente</a:t>
-            </a:r>
-          </a:p>
-        </p:txBody>
-      </p:sp>
-      <p:sp>
-        <p:nvSpPr>
-          <p:cNvPr id="5" name="Rounded Rectangle 4"/>
-          <p:cNvSpPr/>
-          <p:nvPr/>
-        </p:nvSpPr>
-        <p:spPr>
-          <a:xfrm>
-            <a:off x="457200" y="1261872"/>
-            <a:ext cx="11277295" cy="5093208"/>
-          </a:xfrm>
-          <a:prstGeom prst="roundRect">
-            <a:avLst>
-              <a:gd name="adj" fmla="val 12000"/>
-            </a:avLst>
-          </a:prstGeom>
-          <a:solidFill>
-            <a:srgbClr val="1E2A38"/>
-          </a:solidFill>
-          <a:ln>
-            <a:noFill/>
-          </a:ln>
-        </p:spPr>
-        <p:style>
-          <a:lnRef idx="1">
-            <a:schemeClr val="accent1"/>
-          </a:lnRef>
-          <a:fillRef idx="3">
-            <a:schemeClr val="accent1"/>
-          </a:fillRef>
-          <a:effectRef idx="2">
-            <a:schemeClr val="accent1"/>
-          </a:effectRef>
-          <a:fontRef idx="minor">
-            <a:schemeClr val="lt1"/>
-          </a:fontRef>
-        </p:style>
-        <p:txBody>
-          <a:bodyPr rtlCol="0" anchor="ctr"/>
-          <a:lstStyle/>
-          <a:p>
-            <a:pPr algn="ctr"/>
-          </a:p>
-        </p:txBody>
-      </p:sp>
-      <p:sp>
-        <p:nvSpPr>
-          <p:cNvPr id="6" name="Rectangle 5"/>
-          <p:cNvSpPr/>
-          <p:nvPr/>
-        </p:nvSpPr>
-        <p:spPr>
-          <a:xfrm>
-            <a:off x="457200" y="1261872"/>
-            <a:ext cx="11277295" cy="320040"/>
-          </a:xfrm>
-          <a:prstGeom prst="rect">
-            <a:avLst/>
-          </a:prstGeom>
-          <a:solidFill>
-            <a:srgbClr val="095292"/>
-          </a:solidFill>
-          <a:ln>
-            <a:noFill/>
-          </a:ln>
-        </p:spPr>
-        <p:style>
-          <a:lnRef idx="1">
-            <a:schemeClr val="accent1"/>
-          </a:lnRef>
-          <a:fillRef idx="3">
-            <a:schemeClr val="accent1"/>
-          </a:fillRef>
-          <a:effectRef idx="2">
-            <a:schemeClr val="accent1"/>
-          </a:effectRef>
-          <a:fontRef idx="minor">
-            <a:schemeClr val="lt1"/>
-          </a:fontRef>
-        </p:style>
-        <p:txBody>
-          <a:bodyPr rtlCol="0" anchor="ctr"/>
-          <a:lstStyle/>
-          <a:p>
-            <a:pPr algn="ctr"/>
-          </a:p>
-        </p:txBody>
-      </p:sp>
-      <p:sp>
-        <p:nvSpPr>
-          <p:cNvPr id="7" name="TextBox 6"/>
-          <p:cNvSpPr txBox="1"/>
-          <p:nvPr/>
-        </p:nvSpPr>
-        <p:spPr>
-          <a:xfrm>
-            <a:off x="685800" y="1307592"/>
-            <a:ext cx="10820095" cy="256032"/>
-          </a:xfrm>
-          <a:prstGeom prst="rect">
-            <a:avLst/>
-          </a:prstGeom>
-          <a:noFill/>
-        </p:spPr>
-        <p:txBody>
-          <a:bodyPr wrap="square" anchor="ctr"/>
-          <a:lstStyle/>
-          <a:p>
-            <a:r>
-              <a:rPr sz="1000" b="1" i="0">
-                <a:solidFill>
-                  <a:srgbClr val="269CCB"/>
-                </a:solidFill>
-                <a:latin typeface="Calibri"/>
-              </a:rPr>
-              <a:t>● ● ●</a:t>
-            </a:r>
-          </a:p>
-        </p:txBody>
-      </p:sp>
-      <p:sp>
-        <p:nvSpPr>
-          <p:cNvPr id="8" name="TextBox 7"/>
-          <p:cNvSpPr txBox="1"/>
-          <p:nvPr/>
-        </p:nvSpPr>
-        <p:spPr>
-          <a:xfrm>
-            <a:off x="777240" y="1719072"/>
-            <a:ext cx="10637215" cy="4453128"/>
-          </a:xfrm>
-          <a:prstGeom prst="rect">
-            <a:avLst/>
-          </a:prstGeom>
-          <a:noFill/>
-        </p:spPr>
-        <p:txBody>
-          <a:bodyPr wrap="square">
-            <a:spAutoFit/>
-          </a:bodyPr>
-          <a:lstStyle/>
-          <a:p>
-            <a:pPr>
-              <a:spcAft>
-                <a:spcPts val="400"/>
-              </a:spcAft>
-            </a:pPr>
-            <a:r>
-              <a:rPr sz="1400" b="0" i="0">
-                <a:solidFill>
-                  <a:srgbClr val="FFFFFF"/>
-                </a:solidFill>
-                <a:latin typeface="Calibri"/>
-              </a:rPr>
-              <a:t>%% BLOQUE (disco de la instancia): rapido, se va con la instancia.</a:t>
-            </a:r>
-          </a:p>
-          <a:p>
-            <a:pPr>
-              <a:spcAft>
-                <a:spcPts val="400"/>
-              </a:spcAft>
-            </a:pPr>
-            <a:r>
-              <a:rPr sz="1400" b="0" i="0">
-                <a:solidFill>
-                  <a:srgbClr val="FFFFFF"/>
-                </a:solidFill>
-                <a:latin typeface="Calibri"/>
-              </a:rPr>
-              <a:t>%%   -&gt; cache local, archivos temporales. NUNCA el dato que importa.</a:t>
-            </a:r>
-          </a:p>
-          <a:p>
-            <a:pPr>
-              <a:spcAft>
-                <a:spcPts val="400"/>
-              </a:spcAft>
-            </a:pPr>
-            <a:r>
-              <a:rPr sz="1400" b="0" i="0">
-                <a:solidFill>
-                  <a:srgbClr val="FFFFFF"/>
-                </a:solidFill>
-                <a:latin typeface="Calibri"/>
-              </a:rPr>
-              <a:t/>
-            </a:r>
-          </a:p>
-          <a:p>
-            <a:pPr>
-              <a:spcAft>
-                <a:spcPts val="400"/>
-              </a:spcAft>
-            </a:pPr>
-            <a:r>
-              <a:rPr sz="1400" b="0" i="0">
-                <a:solidFill>
-                  <a:srgbClr val="FFFFFF"/>
-                </a:solidFill>
-                <a:latin typeface="Calibri"/>
-              </a:rPr>
-              <a:t>%% OBJETOS (S3 y equivalentes): barato, por HTTP, no se monta como disco.</a:t>
-            </a:r>
-          </a:p>
-          <a:p>
-            <a:pPr>
-              <a:spcAft>
-                <a:spcPts val="400"/>
-              </a:spcAft>
-            </a:pPr>
-            <a:r>
-              <a:rPr sz="1400" b="0" i="0">
-                <a:solidFill>
-                  <a:srgbClr val="FFFFFF"/>
-                </a:solidFill>
-                <a:latin typeface="Calibri"/>
-              </a:rPr>
-              <a:t>%%   -&gt; adjuntos, imagenes, respaldos, el build de la SPA.</a:t>
-            </a:r>
-          </a:p>
-          <a:p>
-            <a:pPr>
-              <a:spcAft>
-                <a:spcPts val="400"/>
-              </a:spcAft>
-            </a:pPr>
-            <a:r>
-              <a:rPr sz="1400" b="0" i="0">
-                <a:solidFill>
-                  <a:srgbClr val="FFFFFF"/>
-                </a:solidFill>
-                <a:latin typeface="Calibri"/>
-              </a:rPr>
-              <a:t/>
-            </a:r>
-          </a:p>
-          <a:p>
-            <a:pPr>
-              <a:spcAft>
-                <a:spcPts val="400"/>
-              </a:spcAft>
-            </a:pPr>
-            <a:r>
-              <a:rPr sz="1400" b="0" i="0">
-                <a:solidFill>
-                  <a:srgbClr val="FFFFFF"/>
-                </a:solidFill>
-                <a:latin typeface="Calibri"/>
-              </a:rPr>
-              <a:t>%% BASE RELACIONAL GESTIONADA: transaccional, con respaldo y replica.</a:t>
-            </a:r>
-          </a:p>
-          <a:p>
-            <a:pPr>
-              <a:spcAft>
-                <a:spcPts val="400"/>
-              </a:spcAft>
-            </a:pPr>
-            <a:r>
-              <a:rPr sz="1400" b="0" i="0">
-                <a:solidFill>
-                  <a:srgbClr val="FFFFFF"/>
-                </a:solidFill>
-                <a:latin typeface="Calibri"/>
-              </a:rPr>
-              <a:t>%%   -&gt; lo que necesita integridad y consultas.</a:t>
-            </a:r>
-          </a:p>
-          <a:p>
-            <a:pPr>
-              <a:spcAft>
-                <a:spcPts val="400"/>
-              </a:spcAft>
-            </a:pPr>
-            <a:r>
-              <a:rPr sz="1400" b="0" i="0">
-                <a:solidFill>
-                  <a:srgbClr val="FFFFFF"/>
-                </a:solidFill>
-                <a:latin typeface="Calibri"/>
-              </a:rPr>
-              <a:t/>
-            </a:r>
-          </a:p>
-          <a:p>
-            <a:pPr>
-              <a:spcAft>
-                <a:spcPts val="400"/>
-              </a:spcAft>
-            </a:pPr>
-            <a:r>
-              <a:rPr sz="1400" b="0" i="0">
-                <a:solidFill>
-                  <a:srgbClr val="FFFFFF"/>
-                </a:solidFill>
-                <a:latin typeface="Calibri"/>
-              </a:rPr>
-              <a:t>%% La pregunta que decide: si esta instancia desaparece ahora mismo,</a:t>
-            </a:r>
-          </a:p>
-          <a:p>
-            <a:pPr>
-              <a:spcAft>
-                <a:spcPts val="400"/>
-              </a:spcAft>
-            </a:pPr>
-            <a:r>
-              <a:rPr sz="1400" b="0" i="0">
-                <a:solidFill>
-                  <a:srgbClr val="FFFFFF"/>
-                </a:solidFill>
-                <a:latin typeface="Calibri"/>
-              </a:rPr>
-              <a:t>%% que dato se pierde? Si la respuesta no es «ninguno», esta mal ubicado.</a:t>
-            </a:r>
-          </a:p>
-        </p:txBody>
-      </p:sp>
-      <p:sp>
-        <p:nvSpPr>
-          <p:cNvPr id="9" name="TextBox 8"/>
-          <p:cNvSpPr txBox="1"/>
-          <p:nvPr/>
-        </p:nvSpPr>
-        <p:spPr>
-          <a:xfrm>
-            <a:off x="11185855" y="6473952"/>
-            <a:ext cx="640080" cy="274320"/>
-          </a:xfrm>
-          <a:prstGeom prst="rect">
-            <a:avLst/>
-          </a:prstGeom>
-          <a:noFill/>
-        </p:spPr>
-        <p:txBody>
-          <a:bodyPr wrap="square">
-            <a:spAutoFit/>
-          </a:bodyPr>
-          <a:lstStyle/>
-          <a:p>
-            <a:pPr algn="r"/>
-            <a:r>
-              <a:rPr sz="1100" b="0" i="0">
-                <a:solidFill>
-                  <a:srgbClr val="666666"/>
-                </a:solidFill>
-                <a:latin typeface="Calibri"/>
-              </a:rPr>
-              <a:t>31</a:t>
-            </a:r>
-          </a:p>
-        </p:txBody>
-      </p:sp>
-    </p:spTree>
-  </p:cSld>
-  <p:clrMapOvr>
-    <a:masterClrMapping/>
-  </p:clrMapOvr>
-</p:sld>
-</file>
-
-<file path=ppt/slides/slide32.xml><?xml version="1.0" encoding="utf-8"?>
-<p:sld xmlns:a="http://schemas.openxmlformats.org/drawingml/2006/main" xmlns:p="http://schemas.openxmlformats.org/presentationml/2006/main" xmlns:r="http://schemas.openxmlformats.org/officeDocument/2006/relationships">
-  <p:cSld>
-    <p:bg>
-      <p:bgPr>
-        <a:solidFill>
-          <a:srgbClr val="FFFFFF"/>
-        </a:solidFill>
-        <a:effectLst/>
-      </p:bgPr>
-    </p:bg>
-    <p:spTree>
-      <p:nvGrpSpPr>
-        <p:cNvPr id="1" name=""/>
-        <p:cNvGrpSpPr/>
-        <p:nvPr/>
-      </p:nvGrpSpPr>
-      <p:grpSpPr/>
-      <p:sp>
-        <p:nvSpPr>
-          <p:cNvPr id="2" name="Rectangle 1"/>
-          <p:cNvSpPr/>
-          <p:nvPr/>
-        </p:nvSpPr>
-        <p:spPr>
-          <a:xfrm>
-            <a:off x="0" y="0"/>
-            <a:ext cx="12191695" cy="1170432"/>
-          </a:xfrm>
-          <a:prstGeom prst="rect">
-            <a:avLst/>
-          </a:prstGeom>
-          <a:solidFill>
-            <a:srgbClr val="095292"/>
-          </a:solidFill>
-          <a:ln>
-            <a:noFill/>
-          </a:ln>
-        </p:spPr>
-        <p:style>
-          <a:lnRef idx="1">
-            <a:schemeClr val="accent1"/>
-          </a:lnRef>
-          <a:fillRef idx="3">
-            <a:schemeClr val="accent1"/>
-          </a:fillRef>
-          <a:effectRef idx="2">
-            <a:schemeClr val="accent1"/>
-          </a:effectRef>
-          <a:fontRef idx="minor">
-            <a:schemeClr val="lt1"/>
-          </a:fontRef>
-        </p:style>
-        <p:txBody>
-          <a:bodyPr rtlCol="0" anchor="ctr"/>
-          <a:lstStyle/>
-          <a:p>
-            <a:pPr algn="ctr"/>
-          </a:p>
-        </p:txBody>
-      </p:sp>
-      <p:sp>
-        <p:nvSpPr>
-          <p:cNvPr id="3" name="Rectangle 2"/>
-          <p:cNvSpPr/>
-          <p:nvPr/>
-        </p:nvSpPr>
-        <p:spPr>
-          <a:xfrm>
-            <a:off x="0" y="1170432"/>
-            <a:ext cx="12191695" cy="41148"/>
-          </a:xfrm>
-          <a:prstGeom prst="rect">
-            <a:avLst/>
-          </a:prstGeom>
-          <a:solidFill>
-            <a:srgbClr val="FFD000"/>
-          </a:solidFill>
-          <a:ln>
-            <a:noFill/>
-          </a:ln>
-        </p:spPr>
-        <p:style>
-          <a:lnRef idx="1">
-            <a:schemeClr val="accent1"/>
-          </a:lnRef>
-          <a:fillRef idx="3">
-            <a:schemeClr val="accent1"/>
-          </a:fillRef>
-          <a:effectRef idx="2">
-            <a:schemeClr val="accent1"/>
-          </a:effectRef>
-          <a:fontRef idx="minor">
-            <a:schemeClr val="lt1"/>
-          </a:fontRef>
-        </p:style>
-        <p:txBody>
-          <a:bodyPr rtlCol="0" anchor="ctr"/>
-          <a:lstStyle/>
-          <a:p>
-            <a:pPr algn="ctr"/>
-          </a:p>
-        </p:txBody>
-      </p:sp>
-      <p:sp>
-        <p:nvSpPr>
-          <p:cNvPr id="4" name="TextBox 3"/>
-          <p:cNvSpPr txBox="1"/>
-          <p:nvPr/>
-        </p:nvSpPr>
-        <p:spPr>
-          <a:xfrm>
-            <a:off x="457200" y="164592"/>
-            <a:ext cx="11277295" cy="384048"/>
-          </a:xfrm>
-          <a:prstGeom prst="rect">
-            <a:avLst/>
-          </a:prstGeom>
-          <a:noFill/>
-        </p:spPr>
-        <p:txBody>
-          <a:bodyPr wrap="square">
-            <a:spAutoFit/>
-          </a:bodyPr>
-          <a:lstStyle/>
-          <a:p>
-            <a:r>
-              <a:rPr sz="2600" b="1" i="0">
-                <a:solidFill>
-                  <a:srgbClr val="FFFFFF"/>
-                </a:solidFill>
-                <a:latin typeface="Calibri"/>
-              </a:rPr>
-              <a:t>Ejemplo de diagrama de despliegue (Deployment)</a:t>
-            </a:r>
-          </a:p>
-        </p:txBody>
-      </p:sp>
-      <p:sp>
-        <p:nvSpPr>
-          <p:cNvPr id="5" name="TextBox 4"/>
-          <p:cNvSpPr txBox="1"/>
-          <p:nvPr/>
-        </p:nvSpPr>
-        <p:spPr>
-          <a:xfrm>
-            <a:off x="457200" y="566928"/>
-            <a:ext cx="11277295" cy="411480"/>
-          </a:xfrm>
-          <a:prstGeom prst="rect">
-            <a:avLst/>
-          </a:prstGeom>
-          <a:noFill/>
-        </p:spPr>
-        <p:txBody>
-          <a:bodyPr wrap="square">
-            <a:spAutoFit/>
-          </a:bodyPr>
-          <a:lstStyle/>
-          <a:p>
-            <a:r>
-              <a:rPr sz="1400" b="0" i="0">
-                <a:solidFill>
-                  <a:srgbClr val="B8D8EE"/>
-                </a:solidFill>
-                <a:latin typeface="Calibri"/>
-              </a:rPr>
-              <a:t>Zonas de confianza: qué es público, qué es privado, dónde viven los datos</a:t>
-            </a:r>
-          </a:p>
-        </p:txBody>
-      </p:sp>
-      <p:sp>
-        <p:nvSpPr>
-          <p:cNvPr id="6" name="Rounded Rectangle 5"/>
-          <p:cNvSpPr/>
-          <p:nvPr/>
-        </p:nvSpPr>
-        <p:spPr>
-          <a:xfrm>
-            <a:off x="822960" y="2194560"/>
-            <a:ext cx="3291840" cy="1005840"/>
-          </a:xfrm>
-          <a:prstGeom prst="roundRect">
-            <a:avLst>
-              <a:gd name="adj" fmla="val 12000"/>
-            </a:avLst>
-          </a:prstGeom>
-          <a:solidFill>
-            <a:srgbClr val="FFD000"/>
-          </a:solidFill>
-          <a:ln>
-            <a:noFill/>
-          </a:ln>
-        </p:spPr>
-        <p:style>
-          <a:lnRef idx="1">
-            <a:schemeClr val="accent1"/>
-          </a:lnRef>
-          <a:fillRef idx="3">
-            <a:schemeClr val="accent1"/>
-          </a:fillRef>
-          <a:effectRef idx="2">
-            <a:schemeClr val="accent1"/>
-          </a:effectRef>
-          <a:fontRef idx="minor">
-            <a:schemeClr val="lt1"/>
-          </a:fontRef>
-        </p:style>
-        <p:txBody>
-          <a:bodyPr rtlCol="0" anchor="ctr" wrap="square"/>
-          <a:lstStyle/>
-          <a:p>
-            <a:pPr algn="ctr"/>
-            <a:r>
-              <a:rPr sz="1300" b="1" i="0">
-                <a:solidFill>
-                  <a:srgbClr val="095292"/>
-                </a:solidFill>
-                <a:latin typeface="Calibri"/>
-              </a:rPr>
-              <a:t>Zona pública
-(balanceador / edge)</a:t>
-            </a:r>
-          </a:p>
-        </p:txBody>
-      </p:sp>
-      <p:sp>
-        <p:nvSpPr>
-          <p:cNvPr id="7" name="Rounded Rectangle 6"/>
-          <p:cNvSpPr/>
-          <p:nvPr/>
-        </p:nvSpPr>
-        <p:spPr>
-          <a:xfrm>
-            <a:off x="4754880" y="2194560"/>
-            <a:ext cx="3291840" cy="1005840"/>
-          </a:xfrm>
-          <a:prstGeom prst="roundRect">
-            <a:avLst>
-              <a:gd name="adj" fmla="val 12000"/>
-            </a:avLst>
-          </a:prstGeom>
-          <a:solidFill>
-            <a:srgbClr val="095292"/>
-          </a:solidFill>
-          <a:ln>
-            <a:noFill/>
-          </a:ln>
-        </p:spPr>
-        <p:style>
-          <a:lnRef idx="1">
-            <a:schemeClr val="accent1"/>
-          </a:lnRef>
-          <a:fillRef idx="3">
-            <a:schemeClr val="accent1"/>
-          </a:fillRef>
-          <a:effectRef idx="2">
-            <a:schemeClr val="accent1"/>
-          </a:effectRef>
-          <a:fontRef idx="minor">
-            <a:schemeClr val="lt1"/>
-          </a:fontRef>
-        </p:style>
-        <p:txBody>
-          <a:bodyPr rtlCol="0" anchor="ctr" wrap="square"/>
-          <a:lstStyle/>
-          <a:p>
-            <a:pPr algn="ctr"/>
-            <a:r>
-              <a:rPr sz="1300" b="1" i="0">
-                <a:solidFill>
-                  <a:srgbClr val="FFFFFF"/>
-                </a:solidFill>
-                <a:latin typeface="Calibri"/>
-              </a:rPr>
-              <a:t>Zona privada
-(app CloudLite)</a:t>
-            </a:r>
-          </a:p>
-        </p:txBody>
-      </p:sp>
-      <p:sp>
-        <p:nvSpPr>
-          <p:cNvPr id="8" name="Rounded Rectangle 7"/>
-          <p:cNvSpPr/>
-          <p:nvPr/>
-        </p:nvSpPr>
-        <p:spPr>
-          <a:xfrm>
-            <a:off x="8595360" y="2194560"/>
-            <a:ext cx="3291840" cy="1005840"/>
-          </a:xfrm>
-          <a:prstGeom prst="roundRect">
-            <a:avLst>
-              <a:gd name="adj" fmla="val 12000"/>
-            </a:avLst>
-          </a:prstGeom>
-          <a:solidFill>
-            <a:srgbClr val="269CCB"/>
-          </a:solidFill>
-          <a:ln>
-            <a:noFill/>
-          </a:ln>
-        </p:spPr>
-        <p:style>
-          <a:lnRef idx="1">
-            <a:schemeClr val="accent1"/>
-          </a:lnRef>
-          <a:fillRef idx="3">
-            <a:schemeClr val="accent1"/>
-          </a:fillRef>
-          <a:effectRef idx="2">
-            <a:schemeClr val="accent1"/>
-          </a:effectRef>
-          <a:fontRef idx="minor">
-            <a:schemeClr val="lt1"/>
-          </a:fontRef>
-        </p:style>
-        <p:txBody>
-          <a:bodyPr rtlCol="0" anchor="ctr" wrap="square"/>
-          <a:lstStyle/>
-          <a:p>
-            <a:pPr algn="ctr"/>
-            <a:r>
-              <a:rPr sz="1300" b="1" i="0">
-                <a:solidFill>
-                  <a:srgbClr val="FFFFFF"/>
-                </a:solidFill>
-                <a:latin typeface="Calibri"/>
-              </a:rPr>
-              <a:t>Zona de datos
-(base de datos)</a:t>
-            </a:r>
-          </a:p>
-        </p:txBody>
-      </p:sp>
-      <p:cxnSp>
-        <p:nvCxnSpPr>
-          <p:cNvPr id="9" name="Connector 8"/>
-          <p:cNvCxnSpPr/>
-          <p:nvPr/>
-        </p:nvCxnSpPr>
-        <p:spPr>
-          <a:xfrm>
-            <a:off x="4114800" y="2697480"/>
-            <a:ext cx="640080" cy="0"/>
-          </a:xfrm>
-          <a:prstGeom prst="line">
-            <a:avLst/>
-          </a:prstGeom>
-          <a:ln w="22225">
-            <a:solidFill>
-              <a:srgbClr val="666666"/>
-            </a:solidFill>
-            <a:tailEnd type="triangle" w="med" len="med"/>
-          </a:ln>
-        </p:spPr>
-        <p:style>
-          <a:lnRef idx="2">
-            <a:schemeClr val="accent1"/>
-          </a:lnRef>
-          <a:fillRef idx="0">
-            <a:schemeClr val="accent1"/>
-          </a:fillRef>
-          <a:effectRef idx="1">
-            <a:schemeClr val="accent1"/>
-          </a:effectRef>
-          <a:fontRef idx="minor">
-            <a:schemeClr val="tx1"/>
-          </a:fontRef>
-        </p:style>
-      </p:cxnSp>
-      <p:sp>
-        <p:nvSpPr>
-          <p:cNvPr id="10" name="TextBox 9"/>
-          <p:cNvSpPr txBox="1"/>
-          <p:nvPr/>
-        </p:nvSpPr>
-        <p:spPr>
-          <a:xfrm>
-            <a:off x="3611879" y="2496312"/>
-            <a:ext cx="1645920" cy="320040"/>
-          </a:xfrm>
-          <a:prstGeom prst="rect">
-            <a:avLst/>
-          </a:prstGeom>
-          <a:noFill/>
-        </p:spPr>
-        <p:txBody>
-          <a:bodyPr wrap="square">
-            <a:spAutoFit/>
-          </a:bodyPr>
-          <a:lstStyle/>
-          <a:p>
-            <a:pPr algn="ctr"/>
-            <a:r>
-              <a:rPr sz="1000" b="0" i="1">
-                <a:solidFill>
-                  <a:srgbClr val="666666"/>
-                </a:solidFill>
-                <a:latin typeface="Calibri"/>
-              </a:rPr>
-              <a:t>solo el 8080</a:t>
-            </a:r>
-          </a:p>
-        </p:txBody>
-      </p:sp>
-      <p:cxnSp>
-        <p:nvCxnSpPr>
-          <p:cNvPr id="11" name="Connector 10"/>
-          <p:cNvCxnSpPr/>
-          <p:nvPr/>
-        </p:nvCxnSpPr>
-        <p:spPr>
-          <a:xfrm>
-            <a:off x="8046720" y="2697480"/>
-            <a:ext cx="548640" cy="0"/>
-          </a:xfrm>
-          <a:prstGeom prst="line">
-            <a:avLst/>
-          </a:prstGeom>
-          <a:ln w="22225">
-            <a:solidFill>
-              <a:srgbClr val="666666"/>
-            </a:solidFill>
-            <a:tailEnd type="triangle" w="med" len="med"/>
-          </a:ln>
-        </p:spPr>
-        <p:style>
-          <a:lnRef idx="2">
-            <a:schemeClr val="accent1"/>
-          </a:lnRef>
-          <a:fillRef idx="0">
-            <a:schemeClr val="accent1"/>
-          </a:fillRef>
-          <a:effectRef idx="1">
-            <a:schemeClr val="accent1"/>
-          </a:effectRef>
-          <a:fontRef idx="minor">
-            <a:schemeClr val="tx1"/>
-          </a:fontRef>
-        </p:style>
-      </p:cxnSp>
-      <p:sp>
-        <p:nvSpPr>
-          <p:cNvPr id="12" name="TextBox 11"/>
-          <p:cNvSpPr txBox="1"/>
-          <p:nvPr/>
-        </p:nvSpPr>
-        <p:spPr>
-          <a:xfrm>
-            <a:off x="7498080" y="2496312"/>
-            <a:ext cx="1645920" cy="320040"/>
-          </a:xfrm>
-          <a:prstGeom prst="rect">
-            <a:avLst/>
-          </a:prstGeom>
-          <a:noFill/>
-        </p:spPr>
-        <p:txBody>
-          <a:bodyPr wrap="square">
-            <a:spAutoFit/>
-          </a:bodyPr>
-          <a:lstStyle/>
-          <a:p>
-            <a:pPr algn="ctr"/>
-            <a:r>
-              <a:rPr sz="1000" b="0" i="1">
-                <a:solidFill>
-                  <a:srgbClr val="666666"/>
-                </a:solidFill>
-                <a:latin typeface="Calibri"/>
-              </a:rPr>
-              <a:t>solo el 5432</a:t>
-            </a:r>
-          </a:p>
-        </p:txBody>
-      </p:sp>
-      <p:sp>
-        <p:nvSpPr>
-          <p:cNvPr id="13" name="TextBox 12"/>
-          <p:cNvSpPr txBox="1"/>
-          <p:nvPr/>
-        </p:nvSpPr>
-        <p:spPr>
-          <a:xfrm>
-            <a:off x="457200" y="6263640"/>
-            <a:ext cx="11277295" cy="411480"/>
-          </a:xfrm>
-          <a:prstGeom prst="rect">
-            <a:avLst/>
-          </a:prstGeom>
-          <a:noFill/>
-        </p:spPr>
-        <p:txBody>
-          <a:bodyPr wrap="square">
-            <a:spAutoFit/>
-          </a:bodyPr>
-          <a:lstStyle/>
-          <a:p>
-            <a:r>
-              <a:rPr sz="1100" b="0" i="1">
-                <a:solidFill>
-                  <a:srgbClr val="666666"/>
-                </a:solidFill>
-                <a:latin typeface="Calibri"/>
-              </a:rPr>
-              <a:t>La base de datos NUNCA vive en la zona pública. Los nombres deben coincidir con los del C4 Containers (Clase 4) — mismo sistema, otro ángulo.</a:t>
-            </a:r>
-          </a:p>
-        </p:txBody>
-      </p:sp>
-      <p:sp>
-        <p:nvSpPr>
-          <p:cNvPr id="14" name="TextBox 13"/>
-          <p:cNvSpPr txBox="1"/>
-          <p:nvPr/>
-        </p:nvSpPr>
-        <p:spPr>
-          <a:xfrm>
-            <a:off x="11185855" y="6473952"/>
-            <a:ext cx="640080" cy="274320"/>
-          </a:xfrm>
-          <a:prstGeom prst="rect">
-            <a:avLst/>
-          </a:prstGeom>
-          <a:noFill/>
-        </p:spPr>
-        <p:txBody>
-          <a:bodyPr wrap="square">
-            <a:spAutoFit/>
-          </a:bodyPr>
-          <a:lstStyle/>
-          <a:p>
-            <a:pPr algn="r"/>
-            <a:r>
-              <a:rPr sz="1100" b="0" i="0">
-                <a:solidFill>
-                  <a:srgbClr val="666666"/>
-                </a:solidFill>
-                <a:latin typeface="Calibri"/>
-              </a:rPr>
-              <a:t>32</a:t>
-            </a:r>
-          </a:p>
-        </p:txBody>
-      </p:sp>
-    </p:spTree>
-  </p:cSld>
-  <p:clrMapOvr>
-    <a:masterClrMapping/>
-  </p:clrMapOvr>
-</p:sld>
-</file>
-
-<file path=ppt/slides/slide33.xml><?xml version="1.0" encoding="utf-8"?>
-<p:sld xmlns:a="http://schemas.openxmlformats.org/drawingml/2006/main" xmlns:p="http://schemas.openxmlformats.org/presentationml/2006/main" xmlns:r="http://schemas.openxmlformats.org/officeDocument/2006/relationships">
-  <p:cSld>
-    <p:bg>
-      <p:bgPr>
-        <a:solidFill>
-          <a:srgbClr val="FFFFFF"/>
-        </a:solidFill>
-        <a:effectLst/>
-      </p:bgPr>
-    </p:bg>
-    <p:spTree>
-      <p:nvGrpSpPr>
-        <p:cNvPr id="1" name=""/>
-        <p:cNvGrpSpPr/>
-        <p:nvPr/>
-      </p:nvGrpSpPr>
-      <p:grpSpPr/>
-      <p:sp>
-        <p:nvSpPr>
-          <p:cNvPr id="2" name="Rectangle 1"/>
-          <p:cNvSpPr/>
-          <p:nvPr/>
-        </p:nvSpPr>
-        <p:spPr>
-          <a:xfrm>
-            <a:off x="0" y="0"/>
-            <a:ext cx="12191695" cy="960120"/>
-          </a:xfrm>
-          <a:prstGeom prst="rect">
-            <a:avLst/>
-          </a:prstGeom>
-          <a:solidFill>
-            <a:srgbClr val="095292"/>
-          </a:solidFill>
-          <a:ln>
-            <a:noFill/>
-          </a:ln>
-        </p:spPr>
-        <p:style>
-          <a:lnRef idx="1">
-            <a:schemeClr val="accent1"/>
-          </a:lnRef>
-          <a:fillRef idx="3">
-            <a:schemeClr val="accent1"/>
-          </a:fillRef>
-          <a:effectRef idx="2">
-            <a:schemeClr val="accent1"/>
-          </a:effectRef>
-          <a:fontRef idx="minor">
-            <a:schemeClr val="lt1"/>
-          </a:fontRef>
-        </p:style>
-        <p:txBody>
-          <a:bodyPr rtlCol="0" anchor="ctr"/>
-          <a:lstStyle/>
-          <a:p>
-            <a:pPr algn="ctr"/>
-          </a:p>
-        </p:txBody>
-      </p:sp>
-      <p:sp>
-        <p:nvSpPr>
-          <p:cNvPr id="3" name="Rectangle 2"/>
-          <p:cNvSpPr/>
-          <p:nvPr/>
-        </p:nvSpPr>
-        <p:spPr>
-          <a:xfrm>
-            <a:off x="0" y="960120"/>
-            <a:ext cx="12191695" cy="41148"/>
-          </a:xfrm>
-          <a:prstGeom prst="rect">
-            <a:avLst/>
-          </a:prstGeom>
-          <a:solidFill>
-            <a:srgbClr val="FFD000"/>
-          </a:solidFill>
-          <a:ln>
-            <a:noFill/>
-          </a:ln>
-        </p:spPr>
-        <p:style>
-          <a:lnRef idx="1">
-            <a:schemeClr val="accent1"/>
-          </a:lnRef>
-          <a:fillRef idx="3">
-            <a:schemeClr val="accent1"/>
-          </a:fillRef>
-          <a:effectRef idx="2">
-            <a:schemeClr val="accent1"/>
-          </a:effectRef>
-          <a:fontRef idx="minor">
-            <a:schemeClr val="lt1"/>
-          </a:fontRef>
-        </p:style>
-        <p:txBody>
-          <a:bodyPr rtlCol="0" anchor="ctr"/>
-          <a:lstStyle/>
-          <a:p>
-            <a:pPr algn="ctr"/>
-          </a:p>
-        </p:txBody>
-      </p:sp>
-      <p:sp>
-        <p:nvSpPr>
-          <p:cNvPr id="4" name="TextBox 3"/>
-          <p:cNvSpPr txBox="1"/>
-          <p:nvPr/>
-        </p:nvSpPr>
-        <p:spPr>
-          <a:xfrm>
-            <a:off x="457200" y="164592"/>
-            <a:ext cx="11277295" cy="502920"/>
-          </a:xfrm>
-          <a:prstGeom prst="rect">
-            <a:avLst/>
-          </a:prstGeom>
-          <a:noFill/>
-        </p:spPr>
-        <p:txBody>
-          <a:bodyPr wrap="square">
-            <a:spAutoFit/>
-          </a:bodyPr>
-          <a:lstStyle/>
-          <a:p>
-            <a:r>
-              <a:rPr sz="2600" b="1" i="0">
-                <a:solidFill>
-                  <a:srgbClr val="FFFFFF"/>
-                </a:solidFill>
-                <a:latin typeface="Calibri"/>
-              </a:rPr>
-              <a:t>El Despliegue en Mermaid: el molde que la plataforma del curso renderiza</a:t>
-            </a:r>
-          </a:p>
-        </p:txBody>
-      </p:sp>
-      <p:sp>
-        <p:nvSpPr>
-          <p:cNvPr id="5" name="Rounded Rectangle 4"/>
-          <p:cNvSpPr/>
-          <p:nvPr/>
-        </p:nvSpPr>
-        <p:spPr>
-          <a:xfrm>
-            <a:off x="457200" y="1261872"/>
-            <a:ext cx="11277295" cy="4773168"/>
-          </a:xfrm>
-          <a:prstGeom prst="roundRect">
-            <a:avLst>
-              <a:gd name="adj" fmla="val 12000"/>
-            </a:avLst>
-          </a:prstGeom>
-          <a:solidFill>
-            <a:srgbClr val="1E2A38"/>
-          </a:solidFill>
-          <a:ln>
-            <a:noFill/>
-          </a:ln>
-        </p:spPr>
-        <p:style>
-          <a:lnRef idx="1">
-            <a:schemeClr val="accent1"/>
-          </a:lnRef>
-          <a:fillRef idx="3">
-            <a:schemeClr val="accent1"/>
-          </a:fillRef>
-          <a:effectRef idx="2">
-            <a:schemeClr val="accent1"/>
-          </a:effectRef>
-          <a:fontRef idx="minor">
-            <a:schemeClr val="lt1"/>
-          </a:fontRef>
-        </p:style>
-        <p:txBody>
-          <a:bodyPr rtlCol="0" anchor="ctr"/>
-          <a:lstStyle/>
-          <a:p>
-            <a:pPr algn="ctr"/>
-          </a:p>
-        </p:txBody>
-      </p:sp>
-      <p:sp>
-        <p:nvSpPr>
-          <p:cNvPr id="6" name="Rectangle 5"/>
-          <p:cNvSpPr/>
-          <p:nvPr/>
-        </p:nvSpPr>
-        <p:spPr>
-          <a:xfrm>
-            <a:off x="457200" y="1261872"/>
-            <a:ext cx="11277295" cy="320040"/>
-          </a:xfrm>
-          <a:prstGeom prst="rect">
-            <a:avLst/>
-          </a:prstGeom>
-          <a:solidFill>
-            <a:srgbClr val="095292"/>
-          </a:solidFill>
-          <a:ln>
-            <a:noFill/>
-          </a:ln>
-        </p:spPr>
-        <p:style>
-          <a:lnRef idx="1">
-            <a:schemeClr val="accent1"/>
-          </a:lnRef>
-          <a:fillRef idx="3">
-            <a:schemeClr val="accent1"/>
-          </a:fillRef>
-          <a:effectRef idx="2">
-            <a:schemeClr val="accent1"/>
-          </a:effectRef>
-          <a:fontRef idx="minor">
-            <a:schemeClr val="lt1"/>
-          </a:fontRef>
-        </p:style>
-        <p:txBody>
-          <a:bodyPr rtlCol="0" anchor="ctr"/>
-          <a:lstStyle/>
-          <a:p>
-            <a:pPr algn="ctr"/>
-          </a:p>
-        </p:txBody>
-      </p:sp>
-      <p:sp>
-        <p:nvSpPr>
-          <p:cNvPr id="7" name="TextBox 6"/>
-          <p:cNvSpPr txBox="1"/>
-          <p:nvPr/>
-        </p:nvSpPr>
-        <p:spPr>
-          <a:xfrm>
-            <a:off x="685800" y="1307592"/>
-            <a:ext cx="10820095" cy="256032"/>
-          </a:xfrm>
-          <a:prstGeom prst="rect">
-            <a:avLst/>
-          </a:prstGeom>
-          <a:noFill/>
-        </p:spPr>
-        <p:txBody>
-          <a:bodyPr wrap="square" anchor="ctr"/>
-          <a:lstStyle/>
-          <a:p>
-            <a:r>
-              <a:rPr sz="1000" b="1" i="0">
-                <a:solidFill>
-                  <a:srgbClr val="269CCB"/>
-                </a:solidFill>
-                <a:latin typeface="Calibri"/>
-              </a:rPr>
-              <a:t>● ● ●</a:t>
-            </a:r>
-          </a:p>
-        </p:txBody>
-      </p:sp>
-      <p:sp>
-        <p:nvSpPr>
-          <p:cNvPr id="8" name="TextBox 7"/>
-          <p:cNvSpPr txBox="1"/>
-          <p:nvPr/>
-        </p:nvSpPr>
-        <p:spPr>
-          <a:xfrm>
-            <a:off x="777240" y="1719072"/>
-            <a:ext cx="10637215" cy="4133087"/>
-          </a:xfrm>
-          <a:prstGeom prst="rect">
-            <a:avLst/>
-          </a:prstGeom>
-          <a:noFill/>
-        </p:spPr>
-        <p:txBody>
-          <a:bodyPr wrap="square">
-            <a:spAutoFit/>
-          </a:bodyPr>
-          <a:lstStyle/>
-          <a:p>
-            <a:pPr>
-              <a:spcAft>
-                <a:spcPts val="400"/>
-              </a:spcAft>
-            </a:pPr>
-            <a:r>
-              <a:rPr sz="1400" b="0" i="0">
-                <a:solidFill>
-                  <a:srgbClr val="FFFFFF"/>
-                </a:solidFill>
-                <a:latin typeface="Calibri"/>
-              </a:rPr>
-              <a:t>flowchart LR</a:t>
-            </a:r>
-          </a:p>
-          <a:p>
-            <a:pPr>
-              <a:spcAft>
-                <a:spcPts val="400"/>
-              </a:spcAft>
-            </a:pPr>
-            <a:r>
-              <a:rPr sz="1400" b="0" i="0">
-                <a:solidFill>
-                  <a:srgbClr val="FFFFFF"/>
-                </a:solidFill>
-                <a:latin typeface="Calibri"/>
-              </a:rPr>
-              <a:t>  subgraph publica["Zona publica - internet"]</a:t>
-            </a:r>
-          </a:p>
-          <a:p>
-            <a:pPr>
-              <a:spcAft>
-                <a:spcPts val="400"/>
-              </a:spcAft>
-            </a:pPr>
-            <a:r>
-              <a:rPr sz="1400" b="0" i="0">
-                <a:solidFill>
-                  <a:srgbClr val="FFFFFF"/>
-                </a:solidFill>
-                <a:latin typeface="Calibri"/>
-              </a:rPr>
-              <a:t>    web["App web&lt;br/&gt;React estatico - 443"]</a:t>
-            </a:r>
-          </a:p>
-          <a:p>
-            <a:pPr>
-              <a:spcAft>
-                <a:spcPts val="400"/>
-              </a:spcAft>
-            </a:pPr>
-            <a:r>
-              <a:rPr sz="1400" b="0" i="0">
-                <a:solidFill>
-                  <a:srgbClr val="FFFFFF"/>
-                </a:solidFill>
-                <a:latin typeface="Calibri"/>
-              </a:rPr>
-              <a:t>    edge["Edge / balanceador&lt;br/&gt;443 HTTPS"]</a:t>
-            </a:r>
-          </a:p>
-          <a:p>
-            <a:pPr>
-              <a:spcAft>
-                <a:spcPts val="400"/>
-              </a:spcAft>
-            </a:pPr>
-            <a:r>
-              <a:rPr sz="1400" b="0" i="0">
-                <a:solidFill>
-                  <a:srgbClr val="FFFFFF"/>
-                </a:solidFill>
-                <a:latin typeface="Calibri"/>
-              </a:rPr>
-              <a:t>  end</a:t>
-            </a:r>
-          </a:p>
-          <a:p>
-            <a:pPr>
-              <a:spcAft>
-                <a:spcPts val="400"/>
-              </a:spcAft>
-            </a:pPr>
-            <a:r>
-              <a:rPr sz="1400" b="0" i="0">
-                <a:solidFill>
-                  <a:srgbClr val="FFFFFF"/>
-                </a:solidFill>
-                <a:latin typeface="Calibri"/>
-              </a:rPr>
-              <a:t>  subgraph privada["Zona privada - solo desde el edge"]</a:t>
-            </a:r>
-          </a:p>
-          <a:p>
-            <a:pPr>
-              <a:spcAft>
-                <a:spcPts val="400"/>
-              </a:spcAft>
-            </a:pPr>
-            <a:r>
-              <a:rPr sz="1400" b="0" i="0">
-                <a:solidFill>
-                  <a:srgbClr val="FFFFFF"/>
-                </a:solidFill>
-                <a:latin typeface="Calibri"/>
-              </a:rPr>
-              <a:t>    api["API CloudLite&lt;br/&gt;8080 HTTP"]</a:t>
-            </a:r>
-          </a:p>
-          <a:p>
-            <a:pPr>
-              <a:spcAft>
-                <a:spcPts val="400"/>
-              </a:spcAft>
-            </a:pPr>
-            <a:r>
-              <a:rPr sz="1400" b="0" i="0">
-                <a:solidFill>
-                  <a:srgbClr val="FFFFFF"/>
-                </a:solidFill>
-                <a:latin typeface="Calibri"/>
-              </a:rPr>
-              <a:t>  end</a:t>
-            </a:r>
-          </a:p>
-          <a:p>
-            <a:pPr>
-              <a:spcAft>
-                <a:spcPts val="400"/>
-              </a:spcAft>
-            </a:pPr>
-            <a:r>
-              <a:rPr sz="1400" b="0" i="0">
-                <a:solidFill>
-                  <a:srgbClr val="FFFFFF"/>
-                </a:solidFill>
-                <a:latin typeface="Calibri"/>
-              </a:rPr>
-              <a:t>  subgraph datos["Zona de datos - sin internet: la BD va AQUI"]</a:t>
-            </a:r>
-          </a:p>
-          <a:p>
-            <a:pPr>
-              <a:spcAft>
-                <a:spcPts val="400"/>
-              </a:spcAft>
-            </a:pPr>
-            <a:r>
-              <a:rPr sz="1400" b="0" i="0">
-                <a:solidFill>
-                  <a:srgbClr val="FFFFFF"/>
-                </a:solidFill>
-                <a:latin typeface="Calibri"/>
-              </a:rPr>
-              <a:t>    db[("Base de datos&lt;br/&gt;5432 TCP")]</a:t>
-            </a:r>
-          </a:p>
-          <a:p>
-            <a:pPr>
-              <a:spcAft>
-                <a:spcPts val="400"/>
-              </a:spcAft>
-            </a:pPr>
-            <a:r>
-              <a:rPr sz="1400" b="0" i="0">
-                <a:solidFill>
-                  <a:srgbClr val="FFFFFF"/>
-                </a:solidFill>
-                <a:latin typeface="Calibri"/>
-              </a:rPr>
-              <a:t>  end</a:t>
-            </a:r>
-          </a:p>
-          <a:p>
-            <a:pPr>
-              <a:spcAft>
-                <a:spcPts val="400"/>
-              </a:spcAft>
-            </a:pPr>
-            <a:r>
-              <a:rPr sz="1400" b="0" i="0">
-                <a:solidFill>
-                  <a:srgbClr val="FFFFFF"/>
-                </a:solidFill>
-                <a:latin typeface="Calibri"/>
-              </a:rPr>
-              <a:t>  web --&gt;|"HTTPS 443"| edge</a:t>
-            </a:r>
-          </a:p>
-          <a:p>
-            <a:pPr>
-              <a:spcAft>
-                <a:spcPts val="400"/>
-              </a:spcAft>
-            </a:pPr>
-            <a:r>
-              <a:rPr sz="1400" b="0" i="0">
-                <a:solidFill>
-                  <a:srgbClr val="FFFFFF"/>
-                </a:solidFill>
-                <a:latin typeface="Calibri"/>
-              </a:rPr>
-              <a:t>  edge --&gt;|"HTTP 8080"| api</a:t>
-            </a:r>
-          </a:p>
-          <a:p>
-            <a:pPr>
-              <a:spcAft>
-                <a:spcPts val="400"/>
-              </a:spcAft>
-            </a:pPr>
-            <a:r>
-              <a:rPr sz="1400" b="0" i="0">
-                <a:solidFill>
-                  <a:srgbClr val="FFFFFF"/>
-                </a:solidFill>
-                <a:latin typeface="Calibri"/>
-              </a:rPr>
-              <a:t>  api --&gt;|"TCP 5432"| db</a:t>
-            </a:r>
-          </a:p>
-          <a:p>
-            <a:pPr>
-              <a:spcAft>
-                <a:spcPts val="400"/>
-              </a:spcAft>
-            </a:pPr>
-            <a:r>
-              <a:rPr sz="1400" b="0" i="0">
-                <a:solidFill>
-                  <a:srgbClr val="FFFFFF"/>
-                </a:solidFill>
-                <a:latin typeface="Calibri"/>
-              </a:rPr>
-              <a:t>  api --&gt;|"HTTPS 443 - frontera de confianza"| pagos["Pasarela de pagos externa"]</a:t>
-            </a:r>
-          </a:p>
-        </p:txBody>
-      </p:sp>
-      <p:sp>
-        <p:nvSpPr>
-          <p:cNvPr id="9" name="TextBox 8"/>
-          <p:cNvSpPr txBox="1"/>
-          <p:nvPr/>
-        </p:nvSpPr>
-        <p:spPr>
-          <a:xfrm>
-            <a:off x="457200" y="6080760"/>
-            <a:ext cx="11277295" cy="320040"/>
-          </a:xfrm>
-          <a:prstGeom prst="rect">
-            <a:avLst/>
-          </a:prstGeom>
-          <a:noFill/>
-        </p:spPr>
-        <p:txBody>
-          <a:bodyPr wrap="square">
-            <a:spAutoFit/>
-          </a:bodyPr>
-          <a:lstStyle/>
-          <a:p>
-            <a:pPr algn="ctr"/>
-            <a:r>
-              <a:rPr sz="1200" b="0" i="1">
-                <a:solidFill>
-                  <a:srgbClr val="666666"/>
-                </a:solidFill>
-                <a:latin typeface="Calibri"/>
-              </a:rPr>
-              <a:t>Una «subgraph» por zona, el puerto en cada caja y la base con «[( )]». La flecha al externo ES la frontera de confianza. Nombres: los mismos del C4 Containers de la Clase 4.</a:t>
-            </a:r>
-          </a:p>
-        </p:txBody>
-      </p:sp>
-      <p:sp>
-        <p:nvSpPr>
-          <p:cNvPr id="10" name="TextBox 9"/>
-          <p:cNvSpPr txBox="1"/>
-          <p:nvPr/>
-        </p:nvSpPr>
-        <p:spPr>
-          <a:xfrm>
-            <a:off x="11185855" y="6473952"/>
-            <a:ext cx="640080" cy="274320"/>
-          </a:xfrm>
-          <a:prstGeom prst="rect">
-            <a:avLst/>
-          </a:prstGeom>
-          <a:noFill/>
-        </p:spPr>
-        <p:txBody>
-          <a:bodyPr wrap="square">
-            <a:spAutoFit/>
-          </a:bodyPr>
-          <a:lstStyle/>
-          <a:p>
-            <a:pPr algn="r"/>
-            <a:r>
-              <a:rPr sz="1100" b="0" i="0">
-                <a:solidFill>
-                  <a:srgbClr val="666666"/>
-                </a:solidFill>
-                <a:latin typeface="Calibri"/>
-              </a:rPr>
-              <a:t>33</a:t>
-            </a:r>
-          </a:p>
-        </p:txBody>
-      </p:sp>
-    </p:spTree>
-  </p:cSld>
-  <p:clrMapOvr>
-    <a:masterClrMapping/>
-  </p:clrMapOvr>
-</p:sld>
-</file>
-
-<file path=ppt/slides/slide34.xml><?xml version="1.0" encoding="utf-8"?>
-<p:sld xmlns:a="http://schemas.openxmlformats.org/drawingml/2006/main" xmlns:p="http://schemas.openxmlformats.org/presentationml/2006/main" xmlns:r="http://schemas.openxmlformats.org/officeDocument/2006/relationships">
-  <p:cSld>
-    <p:bg>
-      <p:bgPr>
-        <a:solidFill>
-          <a:srgbClr val="FFFFFF"/>
-        </a:solidFill>
-        <a:effectLst/>
-      </p:bgPr>
-    </p:bg>
-    <p:spTree>
-      <p:nvGrpSpPr>
-        <p:cNvPr id="1" name=""/>
-        <p:cNvGrpSpPr/>
-        <p:nvPr/>
-      </p:nvGrpSpPr>
-      <p:grpSpPr/>
-      <p:sp>
-        <p:nvSpPr>
-          <p:cNvPr id="2" name="Rectangle 1"/>
-          <p:cNvSpPr/>
-          <p:nvPr/>
-        </p:nvSpPr>
-        <p:spPr>
-          <a:xfrm>
-            <a:off x="0" y="0"/>
             <a:ext cx="12191695" cy="164592"/>
           </a:xfrm>
           <a:prstGeom prst="rect">
@@ -13954,7 +13896,7 @@
                 </a:solidFill>
                 <a:latin typeface="Calibri"/>
               </a:rPr>
-              <a:t> en la plataforma.</a:t>
+              <a:t> en un visor Mermaid.</a:t>
             </a:r>
           </a:p>
           <a:p>
@@ -14241,22 +14183,6 @@
               <a:t>–   Hoy se hace el despliegue: en que nodos se ejecutan esos contenedores, en que zona de red esta cada nodo, por que puerto y protocolo pasa cada flecha, y donde quedan los datos; responde DONDE.</a:t>
             </a:r>
           </a:p>
-          <a:p>
-            <a:pPr>
-              <a:spcAft>
-                <a:spcPts val="800"/>
-              </a:spcAft>
-            </a:pPr>
-            <a:r>
-              <a:rPr sz="2000" b="0" i="0">
-                <a:solidFill>
-                  <a:srgbClr val="333333"/>
-                </a:solidFill>
-                <a:latin typeface="Calibri"/>
-              </a:rPr>
-              <a:t>–   Un nodo es cualquier lugar de ejecucion: una maquina virtual, un host de contenedores, un servicio gestionado.</a:t>
-            </a:r>
-          </a:p>
         </p:txBody>
       </p:sp>
       <p:sp>
@@ -14474,7 +14400,7 @@
                 </a:solidFill>
                 <a:latin typeface="Calibri"/>
               </a:rPr>
-              <a:t>–   Es el mismo sistema desde un tercer angulo, no un sistema nuevo, y por eso los nombres deben coincidir con los de la Clase 4.</a:t>
+              <a:t>–   Un nodo es cualquier lugar de ejecucion: una maquina virtual, un host de contenedores, un servicio gestionado.</a:t>
             </a:r>
           </a:p>
           <a:p>
@@ -14490,39 +14416,7 @@
                 </a:solidFill>
                 <a:latin typeface="Calibri"/>
               </a:rPr>
-              <a:t>–   Y hay un dato que cambia como se dicta la clase: el entregable NO es una imagen.</a:t>
-            </a:r>
-          </a:p>
-          <a:p>
-            <a:pPr>
-              <a:spcAft>
-                <a:spcPts val="800"/>
-              </a:spcAft>
-            </a:pPr>
-            <a:r>
-              <a:rPr sz="2000" b="0" i="0">
-                <a:solidFill>
-                  <a:srgbClr val="333333"/>
-                </a:solidFill>
-                <a:latin typeface="Calibri"/>
-              </a:rPr>
-              <a:t>–   La pregunta 4 se responde con codigo Mermaid pegado en la plataforma del curso, que la plataforma renderiza en la misma pantalla, y 2 de esos 14 puntos son literalmente que renderice sin error.</a:t>
-            </a:r>
-          </a:p>
-          <a:p>
-            <a:pPr>
-              <a:spcAft>
-                <a:spcPts val="800"/>
-              </a:spcAft>
-            </a:pPr>
-            <a:r>
-              <a:rPr sz="2000" b="0" i="0">
-                <a:solidFill>
-                  <a:srgbClr val="333333"/>
-                </a:solidFill>
-                <a:latin typeface="Calibri"/>
-              </a:rPr>
-              <a:t>–   El boceto en draw.io o en Excalidraw sigue sirviendo, y es el paso 1 del metodo que se proyecta hoy, pero es un borrador de trabajo: no se entrega y no se califica.</a:t>
+              <a:t>–   Es el mismo sistema desde un tercer angulo, no un sistema nuevo, y por eso los nombres deben coincidir con los de la Clase 4.</a:t>
             </a:r>
           </a:p>
         </p:txBody>
@@ -14703,7 +14597,7 @@
                 </a:solidFill>
                 <a:latin typeface="Calibri"/>
               </a:rPr>
-              <a:t>IP, puerto y protocolo: las tres etiquetas de cada flecha (1/2)</a:t>
+              <a:t>IP, puerto y protocolo: las tres etiquetas de cada flecha</a:t>
             </a:r>
           </a:p>
         </p:txBody>
@@ -14775,6 +14669,22 @@
                 <a:latin typeface="Calibri"/>
               </a:rPr>
               <a:t>–   Hay puertos fijados por convencion registrada, no por ley fisica: 80 para HTTP, 443 para HTTPS, 5432 para PostgreSQL, 3306 para MySQL, 8080 para desarrollo.</a:t>
+            </a:r>
+          </a:p>
+          <a:p>
+            <a:pPr>
+              <a:spcAft>
+                <a:spcPts val="800"/>
+              </a:spcAft>
+            </a:pPr>
+            <a:r>
+              <a:rPr sz="2000" b="0" i="0">
+                <a:solidFill>
+                  <a:srgbClr val="333333"/>
+                </a:solidFill>
+                <a:latin typeface="Calibri"/>
+              </a:rPr>
+              <a:t>–   Nada impide correr una base de datos en el 9999, pero cambiar la convencion confunde a quien opera.</a:t>
             </a:r>
           </a:p>
         </p:txBody>

--- a/Arquitectura de Sistemas Computacionales/Clases/Clase 7 - Redes y almacenamiento cloud/Presentacion.pptx
+++ b/Arquitectura de Sistemas Computacionales/Clases/Clase 7 - Redes y almacenamiento cloud/Presentacion.pptx
@@ -5629,6 +5629,38 @@
               <a:t>–   En el diagrama de hoy el balanceador es el habitante de la zona publica, y el /health que consulta es el mismo contrato de salud que se verifico con curl en la Clase 3 y el primer monitoreo real de la Clase 8.</a:t>
             </a:r>
           </a:p>
+          <a:p>
+            <a:pPr>
+              <a:spcAft>
+                <a:spcPts val="800"/>
+              </a:spcAft>
+            </a:pPr>
+            <a:r>
+              <a:rPr sz="2000" b="0" i="0">
+                <a:solidFill>
+                  <a:srgbClr val="333333"/>
+                </a:solidFill>
+                <a:latin typeface="Calibri"/>
+              </a:rPr>
+              <a:t>–   En CloudLite el recorrido es concreto: cloudlite.example resuelve a la IP del balanceador, que escucha en el 443, termina el TLS y reenvia la peticion a una instancia de la API en el 8080.</a:t>
+            </a:r>
+          </a:p>
+          <a:p>
+            <a:pPr>
+              <a:spcAft>
+                <a:spcPts val="800"/>
+              </a:spcAft>
+            </a:pPr>
+            <a:r>
+              <a:rPr sz="2000" b="0" i="0">
+                <a:solidFill>
+                  <a:srgbClr val="333333"/>
+                </a:solidFill>
+                <a:latin typeface="Calibri"/>
+              </a:rPr>
+              <a:t>–   Si una instancia no responde a su /health, el balanceador deja de enviarle trafico: es la primera forma de disponibilidad que el sistema obtiene sin escribir codigo.</a:t>
+            </a:r>
+          </a:p>
         </p:txBody>
       </p:sp>
       <p:sp>
@@ -7785,7 +7817,23 @@
                 </a:solidFill>
                 <a:latin typeface="Calibri"/>
               </a:rPr>
-              <a:t>–   Todo el bloque se evalua en el Parcial 2 de la Clase 9.</a:t>
+              <a:t>–   Un ejemplo de fila completa es: «API de turnos» en el Containers, «API de turnos (contenedor, 8080)» en el Despliegue, zona Privada.</a:t>
+            </a:r>
+          </a:p>
+          <a:p>
+            <a:pPr>
+              <a:spcAft>
+                <a:spcPts val="800"/>
+              </a:spcAft>
+            </a:pPr>
+            <a:r>
+              <a:rPr sz="2000" b="0" i="0">
+                <a:solidFill>
+                  <a:srgbClr val="333333"/>
+                </a:solidFill>
+                <a:latin typeface="Calibri"/>
+              </a:rPr>
+              <a:t>–   El cliente y el proveedor de correo son las filas sin par: aparecen en los diagramas, pero no se despliegan dentro del sistema.</a:t>
             </a:r>
           </a:p>
         </p:txBody>
@@ -8056,6 +8104,22 @@
               <a:t>–   Y le reenvia la peticion por HTTP al puerto 8080; la API consulta el motor de base de datos en la zona de datos por el puerto 5432 y devuelve JSON por el mismo camino.</a:t>
             </a:r>
           </a:p>
+          <a:p>
+            <a:pPr>
+              <a:spcAft>
+                <a:spcPts val="800"/>
+              </a:spcAft>
+            </a:pPr>
+            <a:r>
+              <a:rPr sz="2000" b="0" i="0">
+                <a:solidFill>
+                  <a:srgbClr val="333333"/>
+                </a:solidFill>
+                <a:latin typeface="Calibri"/>
+              </a:rPr>
+              <a:t>–   Sirve tambien para citar numeros: una consulta simple bien indexada responde entre 1 y 20 milisegundos, y el objetivo que se formalizara en la Clase 12 suele fijarse por convencion en menos de 300 milisegundos para el 95 por ciento de las peticiones.</a:t>
+            </a:r>
+          </a:p>
         </p:txBody>
       </p:sp>
       <p:sp>
@@ -8273,7 +8337,7 @@
                 </a:solidFill>
                 <a:latin typeface="Calibri"/>
               </a:rPr>
-              <a:t>–   Sirve tambien para citar numeros: una consulta simple bien indexada responde entre 1 y 20 milisegundos, y el objetivo que se formalizara en la Clase 12 suele fijarse por convencion en menos de 300 milisegundos para el 95 por ciento de las peticiones.</a:t>
+              <a:t>–   Con eso el grupo ve que si una pantalla dispara veinte consultas encadenadas el problema es de diseno y no de servidor.</a:t>
             </a:r>
           </a:p>
           <a:p>
@@ -8289,7 +8353,23 @@
                 </a:solidFill>
                 <a:latin typeface="Calibri"/>
               </a:rPr>
-              <a:t>–   Con eso el grupo ve que si una pantalla dispara veinte consultas encadenadas el problema es de diseno y no de servidor.</a:t>
+              <a:t>–   El recorrido completo tiene 4 saltos: DNS, balanceador en la zona publica, API en la zona privada y base de datos en la zona de datos.</a:t>
+            </a:r>
+          </a:p>
+          <a:p>
+            <a:pPr>
+              <a:spcAft>
+                <a:spcPts val="800"/>
+              </a:spcAft>
+            </a:pPr>
+            <a:r>
+              <a:rPr sz="2000" b="0" i="0">
+                <a:solidFill>
+                  <a:srgbClr val="333333"/>
+                </a:solidFill>
+                <a:latin typeface="Calibri"/>
+              </a:rPr>
+              <a:t>–   Cada salto de red dentro de un mismo centro de datos suma del orden de 1 milisegundo, y por eso un diseno que encadena servicios innecesarios es lento aunque cada pieza sea rapida.</a:t>
             </a:r>
           </a:p>
         </p:txBody>
@@ -10944,7 +11024,7 @@
                 </a:solidFill>
                 <a:latin typeface="Calibri"/>
               </a:rPr>
-              <a:t>La base de datos NUNCA vive en la zona pública. Los nombres deben coincidir con los del C4 Containers (Clase 4) — mismo sistema, otro ángulo.</a:t>
+              <a:t>La base de datos NUNCA vive en la zona pública: solo acepta conexiones de la API por el 5432. Los nombres coinciden con los del C4 Containers (Clase 4) — mismo sistema, otro ángulo. El correo externo queda fuera de las zonas.</a:t>
             </a:r>
           </a:p>
         </p:txBody>
@@ -13216,7 +13296,7 @@
                 </a:solidFill>
                 <a:latin typeface="Calibri"/>
               </a:rPr>
-              <a:t>, nunca en la pública: es el error que la nota castiga.</a:t>
+              <a:t>, nunca en la pública: es el error más grave del diagrama.</a:t>
             </a:r>
           </a:p>
           <a:p>
@@ -13285,6 +13365,22 @@
                 <a:latin typeface="Calibri"/>
               </a:rPr>
               <a:t>.</a:t>
+            </a:r>
+          </a:p>
+          <a:p>
+            <a:pPr>
+              <a:spcAft>
+                <a:spcPts val="800"/>
+              </a:spcAft>
+            </a:pPr>
+            <a:r>
+              <a:rPr sz="2000" b="0" i="0">
+                <a:solidFill>
+                  <a:srgbClr val="333333"/>
+                </a:solidFill>
+                <a:latin typeface="Calibri"/>
+              </a:rPr>
+              <a:t>–   Pública: balanceador y web estática · Privada: la API · Datos: la base, que solo acepta conexiones desde la API.</a:t>
             </a:r>
           </a:p>
         </p:txBody>
@@ -13642,7 +13738,23 @@
                 </a:solidFill>
                 <a:latin typeface="Calibri"/>
               </a:rPr>
-              <a:t>: eso suma.</a:t>
+              <a:t>: es una decisión válida.</a:t>
+            </a:r>
+          </a:p>
+          <a:p>
+            <a:pPr>
+              <a:spcAft>
+                <a:spcPts val="800"/>
+              </a:spcAft>
+            </a:pPr>
+            <a:r>
+              <a:rPr sz="2000" b="0" i="0">
+                <a:solidFill>
+                  <a:srgbClr val="333333"/>
+                </a:solidFill>
+                <a:latin typeface="Calibri"/>
+              </a:rPr>
+              <a:t>–   Ejemplos: turnos → Relacional · disco de una VM → Bloque · fotos de perfil → Objeto.</a:t>
             </a:r>
           </a:p>
         </p:txBody>
@@ -13915,6 +14027,38 @@
               <a:t>–   Debe alinearse con el C4 Containers (mismos nombres).</a:t>
             </a:r>
           </a:p>
+          <a:p>
+            <a:pPr>
+              <a:spcAft>
+                <a:spcPts val="800"/>
+              </a:spcAft>
+            </a:pPr>
+            <a:r>
+              <a:rPr sz="2000" b="0" i="0">
+                <a:solidFill>
+                  <a:srgbClr val="333333"/>
+                </a:solidFill>
+                <a:latin typeface="Calibri"/>
+              </a:rPr>
+              <a:t>–   Cada flecha lleva protocolo y puerto: HTTPS 443 al edge, HTTP 8080 a la API, PostgreSQL 5432 a la base.</a:t>
+            </a:r>
+          </a:p>
+          <a:p>
+            <a:pPr>
+              <a:spcAft>
+                <a:spcPts val="800"/>
+              </a:spcAft>
+            </a:pPr>
+            <a:r>
+              <a:rPr sz="2000" b="0" i="0">
+                <a:solidFill>
+                  <a:srgbClr val="333333"/>
+                </a:solidFill>
+                <a:latin typeface="Calibri"/>
+              </a:rPr>
+              <a:t>–   Los servicios externos (correo, pagos) se dibujan fuera de las tres zonas: ahí está la frontera de confianza.</a:t>
+            </a:r>
+          </a:p>
         </p:txBody>
       </p:sp>
       <p:sp>
@@ -14183,6 +14327,22 @@
               <a:t>–   Hoy se hace el despliegue: en que nodos se ejecutan esos contenedores, en que zona de red esta cada nodo, por que puerto y protocolo pasa cada flecha, y donde quedan los datos; responde DONDE.</a:t>
             </a:r>
           </a:p>
+          <a:p>
+            <a:pPr>
+              <a:spcAft>
+                <a:spcPts val="800"/>
+              </a:spcAft>
+            </a:pPr>
+            <a:r>
+              <a:rPr sz="2000" b="0" i="0">
+                <a:solidFill>
+                  <a:srgbClr val="333333"/>
+                </a:solidFill>
+                <a:latin typeface="Calibri"/>
+              </a:rPr>
+              <a:t>–   Un nodo es cualquier lugar de ejecucion: una maquina virtual, un host de contenedores, un servicio gestionado.</a:t>
+            </a:r>
+          </a:p>
         </p:txBody>
       </p:sp>
       <p:sp>
@@ -14400,7 +14560,7 @@
                 </a:solidFill>
                 <a:latin typeface="Calibri"/>
               </a:rPr>
-              <a:t>–   Un nodo es cualquier lugar de ejecucion: una maquina virtual, un host de contenedores, un servicio gestionado.</a:t>
+              <a:t>–   Es el mismo sistema desde un tercer angulo, no un sistema nuevo, y por eso los nombres deben coincidir con los de la Clase 4.</a:t>
             </a:r>
           </a:p>
           <a:p>
@@ -14416,7 +14576,23 @@
                 </a:solidFill>
                 <a:latin typeface="Calibri"/>
               </a:rPr>
-              <a:t>–   Es el mismo sistema desde un tercer angulo, no un sistema nuevo, y por eso los nombres deben coincidir con los de la Clase 4.</a:t>
+              <a:t>–   Los tres diagramas del curso son tres preguntas sobre el mismo sistema: el Context responde quien lo usa y de que depende, el Containers responde que piezas lo forman y como se hablan, y el Despliegue responde donde corre cada pieza y por que camino de red.</a:t>
+            </a:r>
+          </a:p>
+          <a:p>
+            <a:pPr>
+              <a:spcAft>
+                <a:spcPts val="800"/>
+              </a:spcAft>
+            </a:pPr>
+            <a:r>
+              <a:rPr sz="2000" b="0" i="0">
+                <a:solidFill>
+                  <a:srgbClr val="333333"/>
+                </a:solidFill>
+                <a:latin typeface="Calibri"/>
+              </a:rPr>
+              <a:t>–   Un error comun es dibujar en el Despliegue cajas que no existian en el Containers: si aparece una pieza nueva, primero se agrega al Containers.</a:t>
             </a:r>
           </a:p>
         </p:txBody>

--- a/Arquitectura de Sistemas Computacionales/Clases/Clase 7 - Redes y almacenamiento cloud/Presentacion.pptx
+++ b/Arquitectura de Sistemas Computacionales/Clases/Clase 7 - Redes y almacenamiento cloud/Presentacion.pptx
@@ -4527,7 +4527,7 @@
                 </a:solidFill>
                 <a:latin typeface="Calibri"/>
               </a:rPr>
-              <a:t>Diagrama de despliegue CloudLite</a:t>
+              <a:t>Diagrama de despliegue de la app</a:t>
             </a:r>
           </a:p>
         </p:txBody>
@@ -4618,7 +4618,7 @@
                 </a:solidFill>
                 <a:latin typeface="Calibri"/>
               </a:rPr>
-              <a:t>Conceptos del tema, ejemplos resueltos sobre CloudLite y cierre conceptual.</a:t>
+              <a:t>Conceptos del tema, ejemplos resueltos sobre la app y cierre conceptual.</a:t>
             </a:r>
           </a:p>
         </p:txBody>
@@ -5122,7 +5122,7 @@
                 </a:solidFill>
                 <a:latin typeface="Calibri"/>
               </a:rPr>
-              <a:t>–   En CloudLite las mas faciles de senalar son las dos flechas que salen a lo que no es suyo, la pasarela de pagos y el correo transaccional: ninguno de los dos esta en las tres zonas, y la del molde que se proyecta es la de la pasarela.</a:t>
+              <a:t>–   En la app las mas faciles de senalar son las dos flechas que salen a lo que no es suyo, la pasarela de pagos y el correo transaccional: ninguno de los dos esta en las tres zonas, y la del molde que se proyecta es la de la pasarela.</a:t>
             </a:r>
           </a:p>
         </p:txBody>
@@ -5358,7 +5358,7 @@
                 </a:solidFill>
                 <a:latin typeface="Calibri"/>
               </a:rPr>
-              <a:t>–   El DNS es el directorio distribuido que traduce un nombre legible, como cloudlite.example, en la direccion IP donde atiende el servicio; el registro tipo A apunta un nombre a una IP y el CNAME apunta un nombre a otro nombre.</a:t>
+              <a:t>–   El DNS es el directorio distribuido que traduce un nombre legible, como turnos.example, en la direccion IP donde atiende el servicio; el registro tipo A apunta un nombre a una IP y el CNAME apunta un nombre a otro nombre.</a:t>
             </a:r>
           </a:p>
           <a:p>
@@ -5642,7 +5642,7 @@
                 </a:solidFill>
                 <a:latin typeface="Calibri"/>
               </a:rPr>
-              <a:t>–   En CloudLite el recorrido es concreto: cloudlite.example resuelve a la IP del balanceador, que escucha en el 443, termina el TLS y reenvia la peticion a una instancia de la API en el 8080.</a:t>
+              <a:t>–   En la app el recorrido es concreto: turnos.example resuelve a la IP del balanceador, que escucha en el 443, termina el TLS y reenvia la peticion a una instancia de la API en el 8080.</a:t>
             </a:r>
           </a:p>
           <a:p>
@@ -6682,7 +6682,7 @@
                 </a:solidFill>
                 <a:latin typeface="Calibri"/>
               </a:rPr>
-              <a:t>–   El ejemplo que hace visible la decision, y el error de diseno que conviene provocar: CloudLite permite subir una foto de perfil o adjuntar un PDF.</a:t>
+              <a:t>–   El ejemplo que hace visible la decision, y el error de diseno que conviene provocar: La app permite subir una foto de perfil o adjuntar un PDF.</a:t>
             </a:r>
           </a:p>
           <a:p>
@@ -7497,7 +7497,7 @@
                 </a:solidFill>
                 <a:latin typeface="Calibri"/>
               </a:rPr>
-              <a:t> Conceptos del tema, uno por lámina, con ejemplos sobre CloudLite.</a:t>
+              <a:t> Conceptos del tema, uno por lámina, con ejemplos sobre la app.</a:t>
             </a:r>
           </a:p>
           <a:p>
@@ -8014,7 +8014,7 @@
                 </a:solidFill>
                 <a:latin typeface="Calibri"/>
               </a:rPr>
-              <a:t>Recorrer una peticion de CloudLite de punta a punta (1/2)</a:t>
+              <a:t>Recorrer una peticion de la app de punta a punta (1/2)</a:t>
             </a:r>
           </a:p>
         </p:txBody>
@@ -8053,7 +8053,7 @@
                 </a:solidFill>
                 <a:latin typeface="Calibri"/>
               </a:rPr>
-              <a:t>–   La mejor forma de dictar la clase es seguir una peticion de CloudLite de punta a punta sobre el diagrama proyectado.</a:t>
+              <a:t>–   La mejor forma de dictar la clase es seguir una peticion de la app de punta a punta sobre el diagrama proyectado.</a:t>
             </a:r>
           </a:p>
           <a:p>
@@ -8069,7 +8069,7 @@
                 </a:solidFill>
                 <a:latin typeface="Calibri"/>
               </a:rPr>
-              <a:t>–   Un usuario final abre cloudlite.example en su telefono; el DNS resuelve el nombre a la IP publica del balanceador; el navegador abre una conexion HTTPS al puerto 443 de ese balanceador</a:t>
+              <a:t>–   Un usuario final abre turnos.example en su telefono; el DNS resuelve el nombre a la IP publica del balanceador; el navegador abre una conexion HTTPS al puerto 443 de ese balanceador</a:t>
             </a:r>
           </a:p>
           <a:p>
@@ -8298,7 +8298,7 @@
                 </a:solidFill>
                 <a:latin typeface="Calibri"/>
               </a:rPr>
-              <a:t>Recorrer una peticion de CloudLite de punta a punta (2/2)</a:t>
+              <a:t>Recorrer una peticion de la app de punta a punta (2/2)</a:t>
             </a:r>
           </a:p>
         </p:txBody>
@@ -10793,7 +10793,7 @@
                 <a:latin typeface="Calibri"/>
               </a:rPr>
               <a:t>Zona privada
-(app CloudLite)</a:t>
+(app de la app)</a:t>
             </a:r>
           </a:p>
         </p:txBody>
@@ -11460,7 +11460,7 @@
                 </a:solidFill>
                 <a:latin typeface="Calibri"/>
               </a:rPr>
-              <a:t>    api["API CloudLite&lt;br/&gt;8080 HTTP"]</a:t>
+              <a:t>    api["API de la app&lt;br/&gt;8080 HTTP"]</a:t>
             </a:r>
           </a:p>
           <a:p>
@@ -11859,7 +11859,7 @@
                 </a:solidFill>
                 <a:latin typeface="Calibri"/>
               </a:rPr>
-              <a:t>–   Elegir tipo de almacenamiento según el caso de uso CloudLite.</a:t>
+              <a:t>–   Elegir tipo de almacenamiento según el caso de uso de la app.</a:t>
             </a:r>
           </a:p>
           <a:p>
@@ -11893,7 +11893,7 @@
                 </a:solidFill>
                 <a:latin typeface="Calibri"/>
               </a:rPr>
-              <a:t> del PI.</a:t>
+              <a:t>.</a:t>
             </a:r>
           </a:p>
         </p:txBody>
@@ -13008,7 +13008,7 @@
                 </a:solidFill>
                 <a:latin typeface="Calibri"/>
               </a:rPr>
-              <a:t>Elegir tipo de almacenamiento según el caso de uso CloudLite.</a:t>
+              <a:t>Elegir tipo de almacenamiento según el caso de uso de la app.</a:t>
             </a:r>
           </a:p>
           <a:p>
@@ -13024,7 +13024,7 @@
                 </a:solidFill>
                 <a:latin typeface="Calibri"/>
               </a:rPr>
-              <a:t>Completar el diagrama de despliegue del PI.</a:t>
+              <a:t>Completar el diagrama de despliegue.</a:t>
             </a:r>
           </a:p>
         </p:txBody>

--- a/Arquitectura de Sistemas Computacionales/Clases/Clase 7 - Redes y almacenamiento cloud/Presentacion.pptx
+++ b/Arquitectura de Sistemas Computacionales/Clases/Clase 7 - Redes y almacenamiento cloud/Presentacion.pptx
@@ -31,11 +31,6 @@
     <p:sldId id="279" r:id="rId31"/>
     <p:sldId id="280" r:id="rId32"/>
     <p:sldId id="281" r:id="rId33"/>
-    <p:sldId id="282" r:id="rId34"/>
-    <p:sldId id="283" r:id="rId35"/>
-    <p:sldId id="284" r:id="rId36"/>
-    <p:sldId id="285" r:id="rId37"/>
-    <p:sldId id="286" r:id="rId38"/>
   </p:sldIdLst>
   <p:sldSz cx="12191695" cy="6858000" type="screen4x3"/>
   <p:notesSz cx="6858000" cy="9144000"/>
@@ -532,31 +527,49 @@
           <a:lstStyle/>
           <a:p>
             <a:r>
-              <a:t>Conviene tener claro el mapa de los tres diagramas del curso, porque el estudiante cree que dibuja lo mismo tres veces.</a:t>
+              <a:t>(No se proyecta) Conviene tener claro el mapa de los tres diagramas del curso, porque el estudiante cree que dibuja lo mismo tres veces.</a:t>
             </a:r>
           </a:p>
           <a:p/>
           <a:p>
             <a:r>
-              <a:t>(Sobre la actividad, no se proyecta) Lo que se califica hoy son 25 de los 100 puntos de la actividad del Corte 2, en tres preguntas: 14 puntos el diagrama de despliegue, 5.5 el tipo de almacenamiento de cada componente y 5.5 la tabla de correspondencia con el C4 Containers.</a:t>
+              <a:t>(No se proyecta) En la Clase 1 se hizo C4 Context: el sistema como una caja, quien lo usa y con que sistemas externos habla; responde QUIEN.</a:t>
             </a:r>
           </a:p>
           <a:p/>
           <a:p>
             <a:r>
-              <a:t>(Sobre la actividad, no se proyecta) Y hay un dato que cambia como se dicta la clase: el entregable NO es una imagen.</a:t>
+              <a:t>(No se proyecta) En la Clase 4 se hizo C4 Containers: que aplicaciones, servicios y bases de datos lo componen por dentro y con que contratos se comunican; responde QUE.</a:t>
             </a:r>
           </a:p>
           <a:p/>
           <a:p>
             <a:r>
-              <a:t>(Sobre la actividad, no se proyecta) La pregunta 4 se responde con codigo Mermaid pegado en la plataforma del curso, que la plataforma renderiza en la misma pantalla, y 2 de esos 14 puntos son literalmente que renderice sin error.</a:t>
+              <a:t>(No se proyecta) Es el mismo sistema desde un tercer angulo, no un sistema nuevo, y por eso los nombres deben coincidir con los de la Clase 4.</a:t>
             </a:r>
           </a:p>
           <a:p/>
           <a:p>
             <a:r>
-              <a:t>(Sobre la actividad, no se proyecta) El boceto en draw.io o en Excalidraw sigue sirviendo, y es el paso 1 del metodo que se proyecta hoy, pero es un borrador de trabajo: no se entrega y no se califica.</a:t>
+              <a:t>(No se proyecta) Lo que se califica hoy son 25 de los 100 puntos de la actividad del Corte 2, en tres preguntas: 14 puntos el diagrama de despliegue, 5.5 el tipo de almacenamiento de cada componente y 5.5 la tabla de correspondencia con el C4 Containers.</a:t>
+            </a:r>
+          </a:p>
+          <a:p/>
+          <a:p>
+            <a:r>
+              <a:t>(No se proyecta) Y hay un dato que cambia como se dicta la clase: el entregable NO es una imagen.</a:t>
+            </a:r>
+          </a:p>
+          <a:p/>
+          <a:p>
+            <a:r>
+              <a:t>(No se proyecta) La pregunta 4 se responde con codigo Mermaid pegado en la plataforma del curso, que la plataforma renderiza en la misma pantalla, y 2 de esos 14 puntos son literalmente que renderice sin error.</a:t>
+            </a:r>
+          </a:p>
+          <a:p/>
+          <a:p>
+            <a:r>
+              <a:t>(No se proyecta) El boceto en draw.io o en Excalidraw sigue sirviendo, y es el paso 1 del metodo que se proyecta hoy, pero es un borrador de trabajo: no se entrega y no se califica.</a:t>
             </a:r>
           </a:p>
         </p:txBody>
@@ -650,19 +663,19 @@
           <a:p/>
           <a:p>
             <a:r>
-              <a:t>(Sobre la actividad, no se proyecta) Es mas: la rubrica DESCUENTA por nombrar subredes o servicios de un proveedor concreto, asi que escribir VPC, el nombre de una zona de disponibilidad o el de un servicio de marca resta en vez de sumar.</a:t>
+              <a:t>(No se proyecta) Es mas: la rubrica DESCUENTA por nombrar subredes o servicios de un proveedor concreto, asi que escribir VPC, el nombre de una zona de disponibilidad o el de un servicio de marca resta en vez de sumar.</a:t>
             </a:r>
           </a:p>
           <a:p/>
           <a:p>
             <a:r>
-              <a:t>(Sobre la actividad, no se proyecta) «Puedo subir mi imagen del diagrama en vez del codigo Mermaid?» No para la pregunta 4: lo que se califica es el diagrama renderizado dentro de la plataforma.</a:t>
+              <a:t>(No se proyecta) «Puedo subir mi imagen del diagrama en vez del codigo Mermaid?» No para la pregunta 4: lo que se califica es el diagrama renderizado dentro de la plataforma.</a:t>
             </a:r>
           </a:p>
           <a:p/>
           <a:p>
             <a:r>
-              <a:t>(Sobre la actividad, no se proyecta) «Mi sistema es pequeno, solo tiene la aplicacion y la base de datos; igual necesito tres zonas?» Si, y no es burocracia: las tres zonas son 4 puntos y el sentido de la separacion es justamente que el punto de entrada, la logica y los datos tengan grados de exposicion distintos.</a:t>
+              <a:t>(No se proyecta) «Mi sistema es pequeno, solo tiene la aplicacion y la base de datos; igual necesito tres zonas?» Si, y no es burocracia: las tres zonas son 4 puntos y el sentido de la separacion es justamente que el punto de entrada, la logica y los datos tengan grados de exposicion distintos.</a:t>
             </a:r>
           </a:p>
         </p:txBody>
@@ -732,25 +745,25 @@
           <a:lstStyle/>
           <a:p>
             <a:r>
-              <a:t>Para etiquetar ese diagrama hacen falta tres conceptos de red que el docente debe definir en una frase.</a:t>
+              <a:t>Una direccion IP identifica una maquina dentro de una red.</a:t>
             </a:r>
           </a:p>
           <a:p/>
           <a:p>
             <a:r>
-              <a:t>Una direccion IP identifica una maquina dentro de una red.</a:t>
+              <a:t>(No se proyecta) Para etiquetar ese diagrama hacen falta tres conceptos de red que el docente debe definir en una frase.</a:t>
             </a:r>
           </a:p>
           <a:p/>
           <a:p>
             <a:r>
-              <a:t>Ahi esta el amarre: cuando en Killercoda se ejecuto el contenedor publicando un puerto, esa linea era la decision de que superficie queda expuesta, tema de la Clase 6, y hoy esa decision se dibuja.</a:t>
+              <a:t>(No se proyecta) Esto no es decorativo: la pregunta 4 da 2 puntos por que cada componente lleve su puerto etiquetado, y el diagrama de referencia usa exactamente tres, 443 en el edge, 8080 en la API y 5432 en la base de datos, que son los mismos que el estudiante ya escribio en el EXPOSE de su Dockerfile de la Clase 3.</a:t>
             </a:r>
           </a:p>
           <a:p/>
           <a:p>
             <a:r>
-              <a:t>(Sobre la actividad, no se proyecta) Esto no es decorativo: la pregunta 4 da 2 puntos por que cada componente lleve su puerto etiquetado, y el diagrama de referencia usa exactamente tres, 443 en el edge, 8080 en la API y 5432 en la base de datos, que son los mismos que el estudiante ya escribio en el EXPOSE de su Dockerfile de la Clase 3.</a:t>
+              <a:t>(No se proyecta) Ahi esta el amarre: cuando en Killercoda se ejecuto el contenedor publicando un puerto, esa linea era la decision de que superficie queda expuesta, tema de la Clase 6, y hoy esa decision se dibuja.</a:t>
             </a:r>
           </a:p>
         </p:txBody>
@@ -826,19 +839,25 @@
           <a:p/>
           <a:p>
             <a:r>
-              <a:t>Conviene ademas nombrar la frontera de confianza: es la linea donde termina lo que el estudiante controla y empieza lo que no.</a:t>
+              <a:t>(No se proyecta) Sobre esa distincion se construye la regla de las zonas, con tres nombres exactos porque son tres zonas y no dos: en la zona PUBLICA van el punto de entrada, el balanceador o proxy inverso, y la aplicacion web estatica, que es publica sin que eso sea una fuga porque no lleva secretos dentro; el cliente que llega de internet se dibuja FUERA de las tres zonas, porque es el actor y no una pieza que el estudiante despliegue; la API va en la zona PRIVADA, alcanzable solo desde el edge; y los datos van en una tercera zona, la de DATOS, que solo acepta conexiones desde la aplicacion y no tiene salida a internet.</a:t>
             </a:r>
           </a:p>
           <a:p/>
           <a:p>
             <a:r>
-              <a:t>(Sobre la actividad, no se proyecta) Los 4 puntos de ubicacion de la pregunta 4 se pierden COMPLETOS si la base de datos queda en la zona publica: no es un descuento parcial, es el error que la pregunta esta disenada para detectar.</a:t>
+              <a:t>(No se proyecta) Los 4 puntos de ubicacion de la pregunta 4 se pierden COMPLETOS si la base de datos queda en la zona publica: no es un descuento parcial, es el error que la pregunta esta disenada para detectar.</a:t>
             </a:r>
           </a:p>
           <a:p/>
           <a:p>
             <a:r>
-              <a:t>(Sobre la actividad, no se proyecta) Y las tres zonas rotuladas valen otros 4 puntos por si mismas, asi que un diagrama de dos zonas, aunque tenga la base de datos bien puesta, ya empezo perdiendo.</a:t>
+              <a:t>(No se proyecta) Y las tres zonas rotuladas valen otros 4 puntos por si mismas, asi que un diagrama de dos zonas, aunque tenga la base de datos bien puesta, ya empezo perdiendo.</a:t>
+            </a:r>
+          </a:p>
+          <a:p/>
+          <a:p>
+            <a:r>
+              <a:t>(No se proyecta) Conviene ademas nombrar la frontera de confianza: es la linea donde termina lo que el estudiante controla y empieza lo que no.</a:t>
             </a:r>
           </a:p>
         </p:txBody>
@@ -911,6 +930,18 @@
               <a:t>El balanceador de carga recibe todas las peticiones y las reparte entre varias instancias iguales del mismo servicio, con algoritmos como round robin o menor numero de conexiones activas.</a:t>
             </a:r>
           </a:p>
+          <a:p/>
+          <a:p>
+            <a:r>
+              <a:t>(No se proyecta) Dos piezas mas hay que explicar sin titubear.</a:t>
+            </a:r>
+          </a:p>
+          <a:p/>
+          <a:p>
+            <a:r>
+              <a:t>(No se proyecta) En el diagrama de hoy el balanceador es el habitante de la zona publica, y el /health que consulta es el mismo contrato de salud que se verifico con curl en la Clase 3 y el primer monitoreo real de la Clase 8.</a:t>
+            </a:r>
+          </a:p>
         </p:txBody>
       </p:sp>
       <p:sp>
@@ -978,13 +1009,37 @@
           <a:lstStyle/>
           <a:p>
             <a:r>
-              <a:t>Vale la pena escribirlas en el tablero y sostenerlas toda la clase.</a:t>
+              <a:t>Y cada eleccion se justifica nombrando la caracteristica del dato.</a:t>
             </a:r>
           </a:p>
           <a:p/>
           <a:p>
             <a:r>
-              <a:t>Y cada eleccion se justifica nombrando la caracteristica del dato.</a:t>
+              <a:t>Bloque cuando un solo proceso monta un disco y escribe en el como si fuera local</a:t>
+            </a:r>
+          </a:p>
+          <a:p/>
+          <a:p>
+            <a:r>
+              <a:t>Objeto cuando el archivo se guarda y se recupera entero por una clave o una URL.</a:t>
+            </a:r>
+          </a:p>
+          <a:p/>
+          <a:p>
+            <a:r>
+              <a:t>(No se proyecta) Vale la pena escribirlas en el tablero y sostenerlas toda la clase.</a:t>
+            </a:r>
+          </a:p>
+          <a:p/>
+          <a:p>
+            <a:r>
+              <a:t>(No se proyecta) Hay una cuarta categoria en la literatura, el almacenamiento de ARCHIVOS, un sistema de archivos compartido que varias instancias montan por red; conviene nombrarla como contraste para que nadie se sienta enganado, pero no es una de las tres palabras que la pregunta admite, y quien cree necesitarla casi siempre esta describiendo un caso que en la nube se resuelve con objeto.</a:t>
+            </a:r>
+          </a:p>
+          <a:p/>
+          <a:p>
+            <a:r>
+              <a:t>(No se proyecta) «Es mas rapido», «es lo que usa todo el mundo» o «es lo normal» no son caracteristicas del dato y no suman ni un punto, aunque el tipo elegido sea el correcto.</a:t>
             </a:r>
           </a:p>
         </p:txBody>
@@ -1054,19 +1109,37 @@
           <a:lstStyle/>
           <a:p>
             <a:r>
-              <a:t>Y ahora la otra mitad, que es la que sorprende al docente: si el dominio del estudiante no maneja archivos, imagenes ni documentos adjuntos, la respuesta correcta y completa es declarar que NO necesita almacenamiento de objetos y explicar por que.</a:t>
+              <a:t>(No se proyecta) El ejemplo que hace visible la decision, y el error de diseno que conviene provocar: CloudLite permite subir una foto de perfil o adjuntar un PDF.</a:t>
             </a:r>
           </a:p>
           <a:p/>
           <a:p>
             <a:r>
-              <a:t>(Sobre la actividad, no se proyecta) La rubrica lo dice al reves de como el grupo lo espera: suma completo quien lo declare y justifique, y se descuenta a quien agregue un almacen de objetos sin un dato que lo pida.</a:t>
+              <a:t>(No se proyecta) Hay que dejar que el estudiante la proponga y luego cuantificarla: dos megabytes por usuario y cinco mil usuarios son diez gigabytes de binarios dentro de una base cuyos datos utiles podrian ser doscientos megabytes; cada respaldo arrastra esos diez gigabytes y la cache del motor se llena de bytes que ninguna consulta filtra.</a:t>
             </a:r>
           </a:p>
           <a:p/>
           <a:p>
             <a:r>
-              <a:t>(Sobre la actividad, no se proyecta) Hay que anunciarlo antes del taller, porque si no medio salon inventa un bucket «porque suena a cloud» y pierde puntos por agregar.</a:t>
+              <a:t>(No se proyecta) Mantener los contenedores sin estado es la condicion del escalado horizontal de la Clase 13.</a:t>
+            </a:r>
+          </a:p>
+          <a:p/>
+          <a:p>
+            <a:r>
+              <a:t>(No se proyecta) Y ahora la otra mitad, que es la que sorprende al docente: si el dominio del estudiante no maneja archivos, imagenes ni documentos adjuntos, la respuesta correcta y completa es declarar que NO necesita almacenamiento de objetos y explicar por que.</a:t>
+            </a:r>
+          </a:p>
+          <a:p/>
+          <a:p>
+            <a:r>
+              <a:t>(No se proyecta) La rubrica lo dice al reves de como el grupo lo espera: suma completo quien lo declare y justifique, y se descuenta a quien agregue un almacen de objetos sin un dato que lo pida.</a:t>
+            </a:r>
+          </a:p>
+          <a:p/>
+          <a:p>
+            <a:r>
+              <a:t>(No se proyecta) Hay que anunciarlo antes del taller, porque si no medio salon inventa un bucket «porque suena a cloud» y pierde puntos por agregar.</a:t>
             </a:r>
           </a:p>
         </p:txBody>
@@ -1136,19 +1209,31 @@
           <a:lstStyle/>
           <a:p>
             <a:r>
-              <a:t>(Sobre la actividad, no se proyecta) Queda la trazabilidad, donde mas puntos se pierden y donde vive una pregunta entera.</a:t>
+              <a:t>(No se proyecta) Queda la trazabilidad, donde mas puntos se pierden y donde vive una pregunta entera.</a:t>
             </a:r>
           </a:p>
           <a:p/>
           <a:p>
             <a:r>
-              <a:t>(Sobre la actividad, no se proyecta) Los 5.5 puntos se reparten asi, y conviene decirlo en voz alta: 2 puntos la explicacion de por que los nombres deben coincidir, y la respuesta esperada es que los dos diagramas son el MISMO sistema visto desde angulos distintos, uno dice que piezas hay y el otro donde se ejecutan; 2.5 puntos la tabla completa, con una fila por componente y su zona; y 1 punto listar los renombres que se aplicaron, o declarar explicitamente que no hubo ninguno, que tambien vale.</a:t>
+              <a:t>(No se proyecta) Los nombres de las cajas del despliegue deben ser los mismos que los contenedores del C4 Containers de la Clase 4: si alli el servicio se llamaba api-citas, hoy no puede aparecer como backend, ni puede aparecer una caja nueva que nadie declaro.</a:t>
             </a:r>
           </a:p>
           <a:p/>
           <a:p>
             <a:r>
-              <a:t>(Sobre la actividad, no se proyecta) La trampa esta en la palabra completa: se descuenta si la tabla deja fuera un componente que si aparece en alguno de los dos diagramas, asi que hay que instruir el gesto de llenarla con los dos diagramas abiertos al lado y contando cajas.</a:t>
+              <a:t>(No se proyecta) Los 5.5 puntos se reparten asi, y conviene decirlo en voz alta: 2 puntos la explicacion de por que los nombres deben coincidir, y la respuesta esperada es que los dos diagramas son el MISMO sistema visto desde angulos distintos, uno dice que piezas hay y el otro donde se ejecutan; 2.5 puntos la tabla completa, con una fila por componente y su zona; y 1 punto listar los renombres que se aplicaron, o declarar explicitamente que no hubo ninguno, que tambien vale.</a:t>
+            </a:r>
+          </a:p>
+          <a:p/>
+          <a:p>
+            <a:r>
+              <a:t>(No se proyecta) La trampa esta en la palabra completa: se descuenta si la tabla deja fuera un componente que si aparece en alguno de los dos diagramas, asi que hay que instruir el gesto de llenarla con los dos diagramas abiertos al lado y contando cajas.</a:t>
+            </a:r>
+          </a:p>
+          <a:p/>
+          <a:p>
+            <a:r>
+              <a:t>(No se proyecta) La cadena aguas abajo es directa: la Clase 6 identifico amenazas y fronteras de confianza en texto y hoy esas fronteras se vuelven zonas dibujadas; la Clase 8 tomara cada flecha para definir que se mide en ella, porque no se puede monitorear un camino que no esta dibujado; la Clase 10 costeara estas mismas cajas, asi que la eleccion de almacenamiento es tambien decision de costo; y la Clase 13 discutira cual caja se replica y cual no.</a:t>
             </a:r>
           </a:p>
         </p:txBody>
@@ -1218,7 +1303,25 @@
           <a:lstStyle/>
           <a:p>
             <a:r>
-              <a:t>(Sobre la actividad, no se proyecta) Ese recorrido, con cada flecha etiquetada con protocolo y puerto y cada caja dentro de su zona, es la estructura que la pregunta 4 califica; lo que se pega en la plataforma es su version en Mermaid, que es la seccion siguiente.</a:t>
+              <a:t>(No se proyecta) La mejor forma de dictar la clase es seguir una peticion de CloudLite de punta a punta sobre el diagrama proyectado.</a:t>
+            </a:r>
+          </a:p>
+          <a:p/>
+          <a:p>
+            <a:r>
+              <a:t>(No se proyecta) Ese recorrido, con cada flecha etiquetada con protocolo y puerto y cada caja dentro de su zona, es la estructura que la pregunta 4 califica; lo que se pega en la plataforma es su version en Mermaid, que es la seccion siguiente.</a:t>
+            </a:r>
+          </a:p>
+          <a:p/>
+          <a:p>
+            <a:r>
+              <a:t>(No se proyecta) Sirve tambien para citar numeros: una consulta simple bien indexada responde entre 1 y 20 milisegundos, y el objetivo que se formalizara en la Clase 12 suele fijarse por convencion en menos de 300 milisegundos para el 95 por ciento de las peticiones.</a:t>
+            </a:r>
+          </a:p>
+          <a:p/>
+          <a:p>
+            <a:r>
+              <a:t>(No se proyecta) Con eso el grupo ve que si una pantalla dispara veinte consultas encadenadas el problema es de diseno y no de servidor.</a:t>
             </a:r>
           </a:p>
         </p:txBody>
@@ -1288,43 +1391,49 @@
           <a:lstStyle/>
           <a:p>
             <a:r>
-              <a:t>Hay cinco cosas que el docente debe poder explicar sin titubear.</a:t>
+              <a:t>Se escribe flowchart LR, donde LR significa de izquierda a derecha, y es lo que hace que el recorrido cliente, edge, aplicacion, datos se lea como un flujo y no como una torre.</a:t>
             </a:r>
           </a:p>
           <a:p/>
           <a:p>
             <a:r>
-              <a:t>Se escribe flowchart LR, donde LR significa de izquierda a derecha, y es lo que hace que el recorrido cliente, edge, aplicacion, datos se lea como un flujo y no como una torre.</a:t>
+              <a:t>Dos advertencias practicas.</a:t>
             </a:r>
           </a:p>
           <a:p/>
           <a:p>
             <a:r>
-              <a:t>Dos advertencias practicas.</a:t>
+              <a:t>Sirven para dejar una nota al evaluador, no para responder.</a:t>
             </a:r>
           </a:p>
           <a:p/>
           <a:p>
             <a:r>
-              <a:t>Sirven para dejar una nota al evaluador, no para responder.</a:t>
+              <a:t>(No se proyecta) La diapositiva del molde existe porque el estudiante puede tener el modelo correcto en la cabeza y perder puntos por sintaxis, y porque 2 de los 14 son que el diagrama renderice.</a:t>
             </a:r>
           </a:p>
           <a:p/>
           <a:p>
             <a:r>
-              <a:t>(Sobre la actividad, no se proyecta) La diapositiva del molde existe porque el estudiante puede tener el modelo correcto en la cabeza y perder puntos por sintaxis, y porque 2 de los 14 son que el diagrama renderice.</a:t>
+              <a:t>(No se proyecta) Hay cinco cosas que el docente debe poder explicar sin titubear.</a:t>
             </a:r>
           </a:p>
           <a:p/>
           <a:p>
             <a:r>
-              <a:t>(Sobre la actividad, no se proyecta) Vale la pena senalar la caja de la base de datos y decir «esta forma, dentro de este subgraph, son 4 de los 14 puntos».</a:t>
+              <a:t>(No se proyecta) Vale la pena senalar la caja de la base de datos y decir «esta forma, dentro de este subgraph, son 4 de los 14 puntos».</a:t>
             </a:r>
           </a:p>
           <a:p/>
           <a:p>
             <a:r>
-              <a:t>(Sobre la actividad, no se proyecta) Si no se dibuja, se corrige ahi mismo; nadie califica un codigo que no dibuja.</a:t>
+              <a:t>(No se proyecta) El procedimiento que se proyecta en la demo es el que conviene repetir tres veces: dibujar el boceto donde sea, traducirlo a Mermaid (una IA lo hace bien, y ahi hay que decir la frase exacta: la IA acierta la sintaxis, no el modelo), pegarlo en un visor Mermaid y MIRARLO RENDERIZADO.</a:t>
+            </a:r>
+          </a:p>
+          <a:p/>
+          <a:p>
+            <a:r>
+              <a:t>(No se proyecta) Si no se dibuja, se corrige ahi mismo; nadie califica un codigo que no dibuja.</a:t>
             </a:r>
           </a:p>
         </p:txBody>
@@ -4799,7 +4908,7 @@
                 </a:solidFill>
                 <a:latin typeface="Calibri"/>
               </a:rPr>
-              <a:t>Subred publica y privada: lo definen las rutas, no el nombre (1/2)</a:t>
+              <a:t>Subred publica y privada: lo definen las rutas, no el nombre</a:t>
             </a:r>
           </a:p>
         </p:txBody>
@@ -4870,23 +4979,7 @@
                 </a:solidFill>
                 <a:latin typeface="Calibri"/>
               </a:rPr>
-              <a:t>–   Sobre esa distincion se construye la regla de las zonas, con tres nombres exactos porque son tres zonas y no dos: en la zona PUBLICA van el punto de entrada, el balanceador o proxy inverso</a:t>
-            </a:r>
-          </a:p>
-          <a:p>
-            <a:pPr>
-              <a:spcAft>
-                <a:spcPts val="800"/>
-              </a:spcAft>
-            </a:pPr>
-            <a:r>
-              <a:rPr sz="2000" b="0" i="0">
-                <a:solidFill>
-                  <a:srgbClr val="333333"/>
-                </a:solidFill>
-                <a:latin typeface="Calibri"/>
-              </a:rPr>
-              <a:t>–   Y la aplicacion web estatica, que es publica sin que eso sea una fuga porque no lleva secretos dentro; el cliente que llega de internet se dibuja FUERA de las tres zonas</a:t>
+              <a:t>–   En la app las mas faciles de senalar son las dos flechas que salen a lo que no es suyo, la pasarela de pagos y el correo transaccional: ninguno de los dos esta en las tres zonas, y la del molde que se proyecta es la de la pasarela.</a:t>
             </a:r>
           </a:p>
         </p:txBody>
@@ -5067,7 +5160,7 @@
                 </a:solidFill>
                 <a:latin typeface="Calibri"/>
               </a:rPr>
-              <a:t>Subred publica y privada: lo definen las rutas, no el nombre (2/2)</a:t>
+              <a:t>DNS y balanceador de carga (1/2)</a:t>
             </a:r>
           </a:p>
         </p:txBody>
@@ -5106,7 +5199,7 @@
                 </a:solidFill>
                 <a:latin typeface="Calibri"/>
               </a:rPr>
-              <a:t>–   Porque es el actor y no una pieza que el estudiante despliegue; la API va en la zona PRIVADA, alcanzable solo desde el edge; y los datos van en una tercera zona, la de DATOS, que solo acepta conexiones desde la aplicacion y no tiene salida a internet.</a:t>
+              <a:t>–   El DNS es el directorio distribuido que traduce un nombre legible, como turnos.example, en la direccion IP donde atiende el servicio; el registro tipo A apunta un nombre a una IP y el CNAME apunta un nombre a otro nombre.</a:t>
             </a:r>
           </a:p>
           <a:p>
@@ -5122,7 +5215,23 @@
                 </a:solidFill>
                 <a:latin typeface="Calibri"/>
               </a:rPr>
-              <a:t>–   En la app las mas faciles de senalar son las dos flechas que salen a lo que no es suyo, la pasarela de pagos y el correo transaccional: ninguno de los dos esta en las tres zonas, y la del molde que se proyecta es la de la pasarela.</a:t>
+              <a:t>–   Cada registro tiene un TTL, los segundos que los demas guardan la respuesta en cache; tipicamente de 300 a 3600, asi que un cambio de direccion no es instantaneo para todos.</a:t>
+            </a:r>
+          </a:p>
+          <a:p>
+            <a:pPr>
+              <a:spcAft>
+                <a:spcPts val="800"/>
+              </a:spcAft>
+            </a:pPr>
+            <a:r>
+              <a:rPr sz="2000" b="0" i="0">
+                <a:solidFill>
+                  <a:srgbClr val="333333"/>
+                </a:solidFill>
+                <a:latin typeface="Calibri"/>
+              </a:rPr>
+              <a:t>–   Su funcion menos obvia y mas importante es el chequeo de salud: consulta un endpoint como /health, por convencion cada 10 a 30 segundos, y si falla dos o tres veces seguidas retira esa instancia de la rotacion hasta que responda.</a:t>
             </a:r>
           </a:p>
         </p:txBody>
@@ -5303,7 +5412,7 @@
                 </a:solidFill>
                 <a:latin typeface="Calibri"/>
               </a:rPr>
-              <a:t>DNS y balanceador de carga (1/2)</a:t>
+              <a:t>DNS y balanceador de carga (2/2)</a:t>
             </a:r>
           </a:p>
         </p:txBody>
@@ -5342,7 +5451,7 @@
                 </a:solidFill>
                 <a:latin typeface="Calibri"/>
               </a:rPr>
-              <a:t>–   Dos piezas mas hay que explicar sin titubear.</a:t>
+              <a:t>–   Es tambien donde termina el TLS, es decir donde se descifra HTTPS.</a:t>
             </a:r>
           </a:p>
           <a:p>
@@ -5358,7 +5467,7 @@
                 </a:solidFill>
                 <a:latin typeface="Calibri"/>
               </a:rPr>
-              <a:t>–   El DNS es el directorio distribuido que traduce un nombre legible, como turnos.example, en la direccion IP donde atiende el servicio; el registro tipo A apunta un nombre a una IP y el CNAME apunta un nombre a otro nombre.</a:t>
+              <a:t>–   En la app el recorrido es concreto: turnos.example resuelve a la IP del balanceador, que escucha en el 443, termina el TLS y reenvia la peticion a una instancia de la API en el 8080.</a:t>
             </a:r>
           </a:p>
           <a:p>
@@ -5374,23 +5483,7 @@
                 </a:solidFill>
                 <a:latin typeface="Calibri"/>
               </a:rPr>
-              <a:t>–   Cada registro tiene un TTL, los segundos que los demas guardan la respuesta en cache; tipicamente de 300 a 3600, asi que un cambio de direccion no es instantaneo para todos.</a:t>
-            </a:r>
-          </a:p>
-          <a:p>
-            <a:pPr>
-              <a:spcAft>
-                <a:spcPts val="800"/>
-              </a:spcAft>
-            </a:pPr>
-            <a:r>
-              <a:rPr sz="2000" b="0" i="0">
-                <a:solidFill>
-                  <a:srgbClr val="333333"/>
-                </a:solidFill>
-                <a:latin typeface="Calibri"/>
-              </a:rPr>
-              <a:t>–   Su funcion menos obvia y mas importante es el chequeo de salud: consulta un endpoint como /health, por convencion cada 10 a 30 segundos, y si falla dos o tres veces seguidas retira esa instancia de la rotacion hasta que responda.</a:t>
+              <a:t>–   Si una instancia no responde a su /health, el balanceador deja de enviarle trafico: es la primera forma de disponibilidad que el sistema obtiene sin escribir codigo.</a:t>
             </a:r>
           </a:p>
         </p:txBody>
@@ -5571,7 +5664,7 @@
                 </a:solidFill>
                 <a:latin typeface="Calibri"/>
               </a:rPr>
-              <a:t>DNS y balanceador de carga (2/2)</a:t>
+              <a:t>Los tres nombres de almacenamiento (1/2)</a:t>
             </a:r>
           </a:p>
         </p:txBody>
@@ -5610,7 +5703,7 @@
                 </a:solidFill>
                 <a:latin typeface="Calibri"/>
               </a:rPr>
-              <a:t>–   Es tambien donde termina el TLS, es decir donde se descifra HTTPS.</a:t>
+              <a:t>–   El almacenamiento se decide por la caracteristica del dato, y aqui hay que ser estricto con el vocabulario: se usan TRES palabras y no mas: Relacional, Bloque y Objeto.</a:t>
             </a:r>
           </a:p>
           <a:p>
@@ -5626,7 +5719,7 @@
                 </a:solidFill>
                 <a:latin typeface="Calibri"/>
               </a:rPr>
-              <a:t>–   En el diagrama de hoy el balanceador es el habitante de la zona publica, y el /health que consulta es el mismo contrato de salud que se verifico con curl en la Clase 3 y el primer monitoreo real de la Clase 8.</a:t>
+              <a:t>–   RELACIONAL es el motor de base de datos que guarda registros estructurados y permite cruzarlos con consultas y transacciones; la caracteristica del dato que lo exige es que ese dato se cruza con otro dato, y la prueba es que existe una consulta que los junta.</a:t>
             </a:r>
           </a:p>
           <a:p>
@@ -5642,7 +5735,7 @@
                 </a:solidFill>
                 <a:latin typeface="Calibri"/>
               </a:rPr>
-              <a:t>–   En la app el recorrido es concreto: turnos.example resuelve a la IP del balanceador, que escucha en el 443, termina el TLS y reenvia la peticion a una instancia de la API en el 8080.</a:t>
+              <a:t>–   BLOQUE es un disco crudo que el sistema operativo formatea y monta; se conecta a una sola instancia a la vez, es lo que hay debajo del volumen de un contenedor</a:t>
             </a:r>
           </a:p>
           <a:p>
@@ -5658,7 +5751,23 @@
                 </a:solidFill>
                 <a:latin typeface="Calibri"/>
               </a:rPr>
-              <a:t>–   Si una instancia no responde a su /health, el balanceador deja de enviarle trafico: es la primera forma de disponibilidad que el sistema obtiene sin escribir codigo.</a:t>
+              <a:t>–   Y se mide en gigabytes y en IOPS, operaciones de lectura y escritura por segundo; la caracteristica que lo exige es que el dato lo monta un solo proceso y se escribe por partes, sin recuperarse entero.</a:t>
+            </a:r>
+          </a:p>
+          <a:p>
+            <a:pPr>
+              <a:spcAft>
+                <a:spcPts val="800"/>
+              </a:spcAft>
+            </a:pPr>
+            <a:r>
+              <a:rPr sz="2000" b="0" i="0">
+                <a:solidFill>
+                  <a:srgbClr val="333333"/>
+                </a:solidFill>
+                <a:latin typeface="Calibri"/>
+              </a:rPr>
+              <a:t>–   OBJETO no tiene carpetas reales: es un espacio plano de contenedores llamados buckets donde cada objeto se guarda bajo una clave, se lee y escribe por HTTP y se reemplaza completo en vez de editarse por partes</a:t>
             </a:r>
           </a:p>
         </p:txBody>
@@ -5839,7 +5948,7 @@
                 </a:solidFill>
                 <a:latin typeface="Calibri"/>
               </a:rPr>
-              <a:t>Los tres nombres de almacenamiento (1/3)</a:t>
+              <a:t>Los tres nombres de almacenamiento (2/2)</a:t>
             </a:r>
           </a:p>
         </p:txBody>
@@ -5878,7 +5987,7 @@
                 </a:solidFill>
                 <a:latin typeface="Calibri"/>
               </a:rPr>
-              <a:t>–   El almacenamiento se decide por la caracteristica del dato, y aqui hay que ser estricto con el vocabulario: se usan TRES palabras y no mas: Relacional, Bloque y Objeto.</a:t>
+              <a:t>–   Es practicamente ilimitado, barato y accesible por URL; la caracteristica que lo exige es que el dato se recupera entero, sin partes.</a:t>
             </a:r>
           </a:p>
           <a:p>
@@ -5894,7 +6003,7 @@
                 </a:solidFill>
                 <a:latin typeface="Calibri"/>
               </a:rPr>
-              <a:t>–   RELACIONAL es el motor de base de datos que guarda registros estructurados y permite cruzarlos con consultas y transacciones; la caracteristica del dato que lo exige es que ese dato se cruza con otro dato, y la prueba es que existe una consulta que los junta.</a:t>
+              <a:t>–   El numero que ordena la decision es el precio relativo: un gigabyte al mes en objetos cuesta del orden de dos a tres centavos de dolar, en disco de bloque cerca de cuatro veces mas, y en base de datos gestionada aun mas porque se paga computo.</a:t>
             </a:r>
           </a:p>
           <a:p>
@@ -5910,7 +6019,7 @@
                 </a:solidFill>
                 <a:latin typeface="Calibri"/>
               </a:rPr>
-              <a:t>–   BLOQUE es un disco crudo que el sistema operativo formatea y monta; se conecta a una sola instancia a la vez, es lo que hay debajo del volumen de un contenedor</a:t>
+              <a:t>–   Son referencias de mercado, no reglas fijas, y aqui no se aprovisiona nada de pago: el valor esta en justificar.</a:t>
             </a:r>
           </a:p>
           <a:p>
@@ -5926,7 +6035,7 @@
                 </a:solidFill>
                 <a:latin typeface="Calibri"/>
               </a:rPr>
-              <a:t>–   Y se mide en gigabytes y en IOPS, operaciones de lectura y escritura por segundo; la caracteristica que lo exige es que el dato lo monta un solo proceso y se escribe por partes, sin recuperarse entero.</a:t>
+              <a:t>–   El resumen operativo es: Relacional cuando el dato se consulta cruzado con otro y necesita transacciones</a:t>
             </a:r>
           </a:p>
         </p:txBody>
@@ -6107,7 +6216,7 @@
                 </a:solidFill>
                 <a:latin typeface="Calibri"/>
               </a:rPr>
-              <a:t>Los tres nombres de almacenamiento (2/3)</a:t>
+              <a:t>El caso de la foto de perfil, y cuando la respuesta correcta es «no necesito objeto»</a:t>
             </a:r>
           </a:p>
         </p:txBody>
@@ -6146,7 +6255,7 @@
                 </a:solidFill>
                 <a:latin typeface="Calibri"/>
               </a:rPr>
-              <a:t>–   OBJETO no tiene carpetas reales: es un espacio plano de contenedores llamados buckets donde cada objeto se guarda bajo una clave, se lee y escribe por HTTP y se reemplaza completo en vez de editarse por partes</a:t>
+              <a:t>–   La solucion ingenua es guardar el archivo en una columna binaria de la base de datos.</a:t>
             </a:r>
           </a:p>
           <a:p>
@@ -6162,7 +6271,7 @@
                 </a:solidFill>
                 <a:latin typeface="Calibri"/>
               </a:rPr>
-              <a:t>–   Es practicamente ilimitado, barato y accesible por URL; la caracteristica que lo exige es que el dato se recupera entero, sin partes.</a:t>
+              <a:t>–   El diseno correcto separa: el archivo va a almacenamiento de objetos y la base guarda una fila con la clave del objeto, el dueno, el tamano, el tipo de contenido y la fecha.</a:t>
             </a:r>
           </a:p>
           <a:p>
@@ -6178,39 +6287,7 @@
                 </a:solidFill>
                 <a:latin typeface="Calibri"/>
               </a:rPr>
-              <a:t>–   Hay una cuarta categoria en la literatura, el almacenamiento de ARCHIVOS, un sistema de archivos compartido que varias instancias montan por red</a:t>
-            </a:r>
-          </a:p>
-          <a:p>
-            <a:pPr>
-              <a:spcAft>
-                <a:spcPts val="800"/>
-              </a:spcAft>
-            </a:pPr>
-            <a:r>
-              <a:rPr sz="2000" b="0" i="0">
-                <a:solidFill>
-                  <a:srgbClr val="333333"/>
-                </a:solidFill>
-                <a:latin typeface="Calibri"/>
-              </a:rPr>
-              <a:t>–   Conviene nombrarla como contraste para que nadie se sienta enganado, pero no es una de las tres palabras que la pregunta admite</a:t>
-            </a:r>
-          </a:p>
-          <a:p>
-            <a:pPr>
-              <a:spcAft>
-                <a:spcPts val="800"/>
-              </a:spcAft>
-            </a:pPr>
-            <a:r>
-              <a:rPr sz="2000" b="0" i="0">
-                <a:solidFill>
-                  <a:srgbClr val="333333"/>
-                </a:solidFill>
-                <a:latin typeface="Calibri"/>
-              </a:rPr>
-              <a:t>–   Y quien cree necesitarla casi siempre esta describiendo un caso que en la nube se resuelve con objeto.</a:t>
+              <a:t>–   Hay una razon adicional: un contenedor es efimero, lo que se escriba en su sistema de archivos desaparece cuando se reemplaza, y con dos instancias detras del balanceador el archivo subido a una no existe en la otra.</a:t>
             </a:r>
           </a:p>
         </p:txBody>
@@ -6391,7 +6468,7 @@
                 </a:solidFill>
                 <a:latin typeface="Calibri"/>
               </a:rPr>
-              <a:t>Los tres nombres de almacenamiento (3/3)</a:t>
+              <a:t>Trazabilidad: la tabla de correspondencia</a:t>
             </a:r>
           </a:p>
         </p:txBody>
@@ -6430,7 +6507,7 @@
                 </a:solidFill>
                 <a:latin typeface="Calibri"/>
               </a:rPr>
-              <a:t>–   El numero que ordena la decision es el precio relativo: un gigabyte al mes en objetos cuesta del orden de dos a tres centavos de dolar, en disco de bloque cerca de cuatro veces mas, y en base de datos gestionada aun mas porque se paga computo.</a:t>
+              <a:t>–   Se demuestra con una tabla de tres columnas: «Componente en el C4 Containers», «Componente en el Despliegue» y «Zona».</a:t>
             </a:r>
           </a:p>
           <a:p>
@@ -6446,7 +6523,7 @@
                 </a:solidFill>
                 <a:latin typeface="Calibri"/>
               </a:rPr>
-              <a:t>–   Son referencias de mercado, no reglas fijas, y aqui no se aprovisiona nada de pago: el valor esta en justificar.</a:t>
+              <a:t>–   Un ejemplo de fila completa es: «API de turnos» en el Containers, «API de turnos (contenedor, 8080)» en el Despliegue, zona Privada.</a:t>
             </a:r>
           </a:p>
           <a:p>
@@ -6462,7 +6539,39 @@
                 </a:solidFill>
                 <a:latin typeface="Calibri"/>
               </a:rPr>
-              <a:t>–   «Es mas rapido», «es lo que usa todo el mundo» o «es lo normal» no son caracteristicas del dato y no suman ni un punto, aunque el tipo elegido sea el correcto.</a:t>
+              <a:t>–   El cliente y el proveedor de correo son las filas sin par: aparecen en los diagramas, pero no se despliegan dentro del sistema.</a:t>
+            </a:r>
+          </a:p>
+          <a:p>
+            <a:pPr>
+              <a:spcAft>
+                <a:spcPts val="800"/>
+              </a:spcAft>
+            </a:pPr>
+            <a:r>
+              <a:rPr sz="2000" b="0" i="0">
+                <a:solidFill>
+                  <a:srgbClr val="333333"/>
+                </a:solidFill>
+                <a:latin typeface="Calibri"/>
+              </a:rPr>
+              <a:t>–   Un error comun es renombrar en el Despliegue: «backend» en lugar de «API de turnos».</a:t>
+            </a:r>
+          </a:p>
+          <a:p>
+            <a:pPr>
+              <a:spcAft>
+                <a:spcPts val="800"/>
+              </a:spcAft>
+            </a:pPr>
+            <a:r>
+              <a:rPr sz="2000" b="0" i="0">
+                <a:solidFill>
+                  <a:srgbClr val="333333"/>
+                </a:solidFill>
+                <a:latin typeface="Calibri"/>
+              </a:rPr>
+              <a:t>–   Para quien lee son dos piezas distintas, y nadie puede saber si el despliegue cubre todo el sistema.</a:t>
             </a:r>
           </a:p>
         </p:txBody>
@@ -6643,7 +6752,7 @@
                 </a:solidFill>
                 <a:latin typeface="Calibri"/>
               </a:rPr>
-              <a:t>El caso de la foto de perfil, y cuando la respuesta correcta es «no necesito objeto» (1/2)</a:t>
+              <a:t>Recorrer una peticion de la app de punta a punta</a:t>
             </a:r>
           </a:p>
         </p:txBody>
@@ -6682,7 +6791,7 @@
                 </a:solidFill>
                 <a:latin typeface="Calibri"/>
               </a:rPr>
-              <a:t>–   El ejemplo que hace visible la decision, y el error de diseno que conviene provocar: La app permite subir una foto de perfil o adjuntar un PDF.</a:t>
+              <a:t>–   Un usuario final abre turnos.example en su telefono; el DNS resuelve el nombre a la IP publica del balanceador; el navegador abre una conexion HTTPS al puerto 443 de ese balanceador</a:t>
             </a:r>
           </a:p>
           <a:p>
@@ -6698,7 +6807,7 @@
                 </a:solidFill>
                 <a:latin typeface="Calibri"/>
               </a:rPr>
-              <a:t>–   La solucion ingenua es guardar el archivo en una columna binaria de la base de datos.</a:t>
+              <a:t>–   Que vive en la zona publica; el balanceador elige una de las dos instancias del contenedor de la API, en la zona privada</a:t>
             </a:r>
           </a:p>
           <a:p>
@@ -6714,7 +6823,7 @@
                 </a:solidFill>
                 <a:latin typeface="Calibri"/>
               </a:rPr>
-              <a:t>–   Hay que dejar que el estudiante la proponga y luego cuantificarla: dos megabytes por usuario y cinco mil usuarios son diez gigabytes de binarios dentro de una base cuyos datos utiles podrian ser doscientos megabytes</a:t>
+              <a:t>–   Y le reenvia la peticion por HTTP al puerto 8080; la API consulta el motor de base de datos en la zona de datos por el puerto 5432 y devuelve JSON por el mismo camino.</a:t>
             </a:r>
           </a:p>
           <a:p>
@@ -6730,7 +6839,23 @@
                 </a:solidFill>
                 <a:latin typeface="Calibri"/>
               </a:rPr>
-              <a:t>–   Cada respaldo arrastra esos diez gigabytes y la cache del motor se llena de bytes que ninguna consulta filtra.</a:t>
+              <a:t>–   El recorrido completo tiene 4 saltos: DNS, balanceador en la zona publica, API en la zona privada y base de datos en la zona de datos.</a:t>
+            </a:r>
+          </a:p>
+          <a:p>
+            <a:pPr>
+              <a:spcAft>
+                <a:spcPts val="800"/>
+              </a:spcAft>
+            </a:pPr>
+            <a:r>
+              <a:rPr sz="2000" b="0" i="0">
+                <a:solidFill>
+                  <a:srgbClr val="333333"/>
+                </a:solidFill>
+                <a:latin typeface="Calibri"/>
+              </a:rPr>
+              <a:t>–   Cada salto de red dentro de un mismo centro de datos suma del orden de 1 milisegundo, y por eso un diseno que encadena servicios innecesarios es lento aunque cada pieza sea rapida.</a:t>
             </a:r>
           </a:p>
         </p:txBody>
@@ -6911,7 +7036,7 @@
                 </a:solidFill>
                 <a:latin typeface="Calibri"/>
               </a:rPr>
-              <a:t>El caso de la foto de perfil, y cuando la respuesta correcta es «no necesito objeto» (2/2)</a:t>
+              <a:t>El molde de Mermaid, linea por linea (1/2)</a:t>
             </a:r>
           </a:p>
         </p:txBody>
@@ -6950,7 +7075,7 @@
                 </a:solidFill>
                 <a:latin typeface="Calibri"/>
               </a:rPr>
-              <a:t>–   El diseno correcto separa: el archivo va a almacenamiento de objetos y la base guarda una fila con la clave del objeto, el dueno, el tamano, el tipo de contenido y la fecha.</a:t>
+              <a:t>–   Primera: la palabra inicial.</a:t>
             </a:r>
           </a:p>
           <a:p>
@@ -6966,7 +7091,7 @@
                 </a:solidFill>
                 <a:latin typeface="Calibri"/>
               </a:rPr>
-              <a:t>–   Hay una razon adicional: un contenedor es efimero, lo que se escriba en su sistema de archivos desaparece cuando se reemplaza, y con dos instancias detras del balanceador el archivo subido a una no existe en la otra.</a:t>
+              <a:t>–   Segunda: cada zona es un subgraph con su rotulo entre comillas y su propio end.</a:t>
             </a:r>
           </a:p>
           <a:p>
@@ -6982,7 +7107,55 @@
                 </a:solidFill>
                 <a:latin typeface="Calibri"/>
               </a:rPr>
-              <a:t>–   Mantener los contenedores sin estado es la condicion del escalado horizontal de la Clase 13.</a:t>
+              <a:t>–   Los subgraph son las tres zonas; olvidar un end es la causa numero uno de que el diagrama no se dibuje, porque el bloque queda abierto.</a:t>
+            </a:r>
+          </a:p>
+          <a:p>
+            <a:pPr>
+              <a:spcAft>
+                <a:spcPts val="800"/>
+              </a:spcAft>
+            </a:pPr>
+            <a:r>
+              <a:rPr sz="2000" b="0" i="0">
+                <a:solidFill>
+                  <a:srgbClr val="333333"/>
+                </a:solidFill>
+                <a:latin typeface="Calibri"/>
+              </a:rPr>
+              <a:t>–   Tercera: la forma de la caja dice que es la pieza.</a:t>
+            </a:r>
+          </a:p>
+          <a:p>
+            <a:pPr>
+              <a:spcAft>
+                <a:spcPts val="800"/>
+              </a:spcAft>
+            </a:pPr>
+            <a:r>
+              <a:rPr sz="2000" b="0" i="0">
+                <a:solidFill>
+                  <a:srgbClr val="333333"/>
+                </a:solidFill>
+                <a:latin typeface="Calibri"/>
+              </a:rPr>
+              <a:t>–   Los corchetes rectos son un proceso o servicio, y la combinacion de corchete y parentesis, es decir abrir corchete parentesis, es la base de datos, que se lee como cilindro.</a:t>
+            </a:r>
+          </a:p>
+          <a:p>
+            <a:pPr>
+              <a:spcAft>
+                <a:spcPts val="800"/>
+              </a:spcAft>
+            </a:pPr>
+            <a:r>
+              <a:rPr sz="2000" b="0" i="0">
+                <a:solidFill>
+                  <a:srgbClr val="333333"/>
+                </a:solidFill>
+                <a:latin typeface="Calibri"/>
+              </a:rPr>
+              <a:t>–   Cuarta: el puerto va DENTRO del rotulo de la caja, separado con la etiqueta de salto de linea de HTML, y la etiqueta de la flecha va entre barras verticales y comillas, con el protocolo y el puerto.</a:t>
             </a:r>
           </a:p>
         </p:txBody>
@@ -7163,7 +7336,7 @@
                 </a:solidFill>
                 <a:latin typeface="Calibri"/>
               </a:rPr>
-              <a:t>Trazabilidad: la tabla de correspondencia (1/2)</a:t>
+              <a:t>El molde de Mermaid, linea por linea (2/2)</a:t>
             </a:r>
           </a:p>
         </p:txBody>
@@ -7202,7 +7375,7 @@
                 </a:solidFill>
                 <a:latin typeface="Calibri"/>
               </a:rPr>
-              <a:t>–   Los nombres de las cajas del despliegue deben ser los mismos que los contenedores del C4 Containers de la Clase 4: si alli el servicio se llamaba api-citas, hoy no puede aparecer como backend, ni puede aparecer una caja nueva que nadie declaro.</a:t>
+              <a:t>–   Es la forma mas segura de etiquetar los puertos sin ensuciar el dibujo.</a:t>
             </a:r>
           </a:p>
           <a:p>
@@ -7218,7 +7391,7 @@
                 </a:solidFill>
                 <a:latin typeface="Calibri"/>
               </a:rPr>
-              <a:t>–   Se demuestra con una tabla de tres columnas: «Componente en el C4 Containers», «Componente en el Despliegue» y «Zona».</a:t>
+              <a:t>–   Quinta: el servicio externo se declara FUERA de los tres subgraph, y la flecha que llega a el se rotula como frontera de confianza; asi las fronteras quedan visibles en el propio dibujo y no en un comentario aparte.</a:t>
             </a:r>
           </a:p>
           <a:p>
@@ -7234,7 +7407,23 @@
                 </a:solidFill>
                 <a:latin typeface="Calibri"/>
               </a:rPr>
-              <a:t>–   La cadena aguas abajo es directa: la Clase 6 identifico amenazas y fronteras de confianza en texto y hoy esas fronteras se vuelven zonas dibujadas; la Clase 8 tomara cada flecha para definir que se mide en ella</a:t>
+              <a:t>–   Los comentarios de Mermaid empiezan con dos signos de porcentaje, no se dibujan y tienen que ir en LINEA PROPIA: uno pegado al final de la linea de un nodo puede tumbar el renderizado.</a:t>
+            </a:r>
+          </a:p>
+          <a:p>
+            <a:pPr>
+              <a:spcAft>
+                <a:spcPts val="800"/>
+              </a:spcAft>
+            </a:pPr>
+            <a:r>
+              <a:rPr sz="2000" b="0" i="0">
+                <a:solidFill>
+                  <a:srgbClr val="333333"/>
+                </a:solidFill>
+                <a:latin typeface="Calibri"/>
+              </a:rPr>
+              <a:t>–   Y si un rotulo lleva parentesis, dos signos de puntuacion o comillas, hay que envolverlo en comillas dobles, porque sin ellas el analizador se detiene ahi.</a:t>
             </a:r>
           </a:p>
         </p:txBody>
@@ -7531,7 +7720,7 @@
                 </a:solidFill>
                 <a:latin typeface="Calibri"/>
               </a:rPr>
-              <a:t> Ejemplos resueltos y demo del docente sobre el tema.</a:t>
+              <a:t> Ejemplos resueltos y demostración sobre el tema.</a:t>
             </a:r>
           </a:p>
           <a:p>
@@ -7762,7 +7951,7 @@
                 </a:solidFill>
                 <a:latin typeface="Calibri"/>
               </a:rPr>
-              <a:t>Trazabilidad: la tabla de correspondencia (2/2)</a:t>
+              <a:t>Preguntas frecuentes del grupo</a:t>
             </a:r>
           </a:p>
         </p:txBody>
@@ -7801,7 +7990,7 @@
                 </a:solidFill>
                 <a:latin typeface="Calibri"/>
               </a:rPr>
-              <a:t>–   Porque no se puede monitorear un camino que no esta dibujado; la Clase 10 costeara estas mismas cajas, asi que la eleccion de almacenamiento es tambien decision de costo; y la Clase 13 discutira cual caja se replica y cual no.</a:t>
+              <a:t>–   «Si la base de datos es privada, como se conecta la API?» Privado significa inalcanzable desde internet</a:t>
             </a:r>
           </a:p>
           <a:p>
@@ -7817,7 +8006,7 @@
                 </a:solidFill>
                 <a:latin typeface="Calibri"/>
               </a:rPr>
-              <a:t>–   Un ejemplo de fila completa es: «API de turnos» en el Containers, «API de turnos (contenedor, 8080)» en el Despliegue, zona Privada.</a:t>
+              <a:t>–   No inalcanzable en absoluto: la API esta en la misma red y llega por el nombre interno y el puerto del motor; quien no puede llegar es el usuario final ni un atacante externo.</a:t>
             </a:r>
           </a:p>
           <a:p>
@@ -7833,7 +8022,39 @@
                 </a:solidFill>
                 <a:latin typeface="Calibri"/>
               </a:rPr>
-              <a:t>–   El cliente y el proveedor de correo son las filas sin par: aparecen en los diagramas, pero no se despliegan dentro del sistema.</a:t>
+              <a:t>–   «Esto no esta mal por no ser una VPC real de un proveedor?» Lo que se evalua es el razonamiento sobre zonas, puertos y ubicacion de los datos, no la sintaxis de una marca; el curso usa herramientas gratis en navegador y no pide cuenta de pago ni tarjeta.</a:t>
+            </a:r>
+          </a:p>
+          <a:p>
+            <a:pPr>
+              <a:spcAft>
+                <a:spcPts val="800"/>
+              </a:spcAft>
+            </a:pPr>
+            <a:r>
+              <a:rPr sz="2000" b="0" i="0">
+                <a:solidFill>
+                  <a:srgbClr val="333333"/>
+                </a:solidFill>
+                <a:latin typeface="Calibri"/>
+              </a:rPr>
+              <a:t>–   Un sistema de dos cajas se dibuja con cliente y edge en la publica, la aplicacion en la privada y la base en la de datos</a:t>
+            </a:r>
+          </a:p>
+          <a:p>
+            <a:pPr>
+              <a:spcAft>
+                <a:spcPts val="800"/>
+              </a:spcAft>
+            </a:pPr>
+            <a:r>
+              <a:rPr sz="2000" b="0" i="0">
+                <a:solidFill>
+                  <a:srgbClr val="333333"/>
+                </a:solidFill>
+                <a:latin typeface="Calibri"/>
+              </a:rPr>
+              <a:t>–   Si de verdad no hay balanceador, el punto de entrada es el servidor web o el proxy que atiende el 443, y ese es el habitante de la zona publica.</a:t>
             </a:r>
           </a:p>
         </p:txBody>
@@ -8014,21 +8235,141 @@
                 </a:solidFill>
                 <a:latin typeface="Calibri"/>
               </a:rPr>
-              <a:t>Recorrer una peticion de la app de punta a punta (1/2)</a:t>
-            </a:r>
-          </a:p>
-        </p:txBody>
-      </p:sp>
-      <p:sp>
-        <p:nvSpPr>
-          <p:cNvPr id="5" name="TextBox 4"/>
+              <a:t>El diagrama de Despliegue: donde corre cada cosa</a:t>
+            </a:r>
+          </a:p>
+        </p:txBody>
+      </p:sp>
+      <p:sp>
+        <p:nvSpPr>
+          <p:cNvPr id="5" name="Rounded Rectangle 4"/>
+          <p:cNvSpPr/>
+          <p:nvPr/>
+        </p:nvSpPr>
+        <p:spPr>
+          <a:xfrm>
+            <a:off x="457200" y="1261872"/>
+            <a:ext cx="11277295" cy="5093208"/>
+          </a:xfrm>
+          <a:prstGeom prst="roundRect">
+            <a:avLst>
+              <a:gd name="adj" fmla="val 12000"/>
+            </a:avLst>
+          </a:prstGeom>
+          <a:solidFill>
+            <a:srgbClr val="1E2A38"/>
+          </a:solidFill>
+          <a:ln>
+            <a:noFill/>
+          </a:ln>
+        </p:spPr>
+        <p:style>
+          <a:lnRef idx="1">
+            <a:schemeClr val="accent1"/>
+          </a:lnRef>
+          <a:fillRef idx="3">
+            <a:schemeClr val="accent1"/>
+          </a:fillRef>
+          <a:effectRef idx="2">
+            <a:schemeClr val="accent1"/>
+          </a:effectRef>
+          <a:fontRef idx="minor">
+            <a:schemeClr val="lt1"/>
+          </a:fontRef>
+        </p:style>
+        <p:txBody>
+          <a:bodyPr rtlCol="0" anchor="ctr"/>
+          <a:lstStyle/>
+          <a:p>
+            <a:pPr algn="ctr"/>
+          </a:p>
+        </p:txBody>
+      </p:sp>
+      <p:sp>
+        <p:nvSpPr>
+          <p:cNvPr id="6" name="Rectangle 5"/>
+          <p:cNvSpPr/>
+          <p:nvPr/>
+        </p:nvSpPr>
+        <p:spPr>
+          <a:xfrm>
+            <a:off x="457200" y="1261872"/>
+            <a:ext cx="11277295" cy="320040"/>
+          </a:xfrm>
+          <a:prstGeom prst="rect">
+            <a:avLst/>
+          </a:prstGeom>
+          <a:solidFill>
+            <a:srgbClr val="095292"/>
+          </a:solidFill>
+          <a:ln>
+            <a:noFill/>
+          </a:ln>
+        </p:spPr>
+        <p:style>
+          <a:lnRef idx="1">
+            <a:schemeClr val="accent1"/>
+          </a:lnRef>
+          <a:fillRef idx="3">
+            <a:schemeClr val="accent1"/>
+          </a:fillRef>
+          <a:effectRef idx="2">
+            <a:schemeClr val="accent1"/>
+          </a:effectRef>
+          <a:fontRef idx="minor">
+            <a:schemeClr val="lt1"/>
+          </a:fontRef>
+        </p:style>
+        <p:txBody>
+          <a:bodyPr rtlCol="0" anchor="ctr"/>
+          <a:lstStyle/>
+          <a:p>
+            <a:pPr algn="ctr"/>
+          </a:p>
+        </p:txBody>
+      </p:sp>
+      <p:sp>
+        <p:nvSpPr>
+          <p:cNvPr id="7" name="TextBox 6"/>
           <p:cNvSpPr txBox="1"/>
           <p:nvPr/>
         </p:nvSpPr>
         <p:spPr>
           <a:xfrm>
-            <a:off x="457200" y="1170432"/>
-            <a:ext cx="11277295" cy="5230368"/>
+            <a:off x="685800" y="1307592"/>
+            <a:ext cx="10820095" cy="256032"/>
+          </a:xfrm>
+          <a:prstGeom prst="rect">
+            <a:avLst/>
+          </a:prstGeom>
+          <a:noFill/>
+        </p:spPr>
+        <p:txBody>
+          <a:bodyPr wrap="square" anchor="ctr"/>
+          <a:lstStyle/>
+          <a:p>
+            <a:r>
+              <a:rPr sz="1000" b="1" i="0">
+                <a:solidFill>
+                  <a:srgbClr val="269CCB"/>
+                </a:solidFill>
+                <a:latin typeface="Calibri"/>
+              </a:rPr>
+              <a:t>● ● ●</a:t>
+            </a:r>
+          </a:p>
+        </p:txBody>
+      </p:sp>
+      <p:sp>
+        <p:nvSpPr>
+          <p:cNvPr id="8" name="TextBox 7"/>
+          <p:cNvSpPr txBox="1"/>
+          <p:nvPr/>
+        </p:nvSpPr>
+        <p:spPr>
+          <a:xfrm>
+            <a:off x="777240" y="1719072"/>
+            <a:ext cx="5181447" cy="4453128"/>
           </a:xfrm>
           <a:prstGeom prst="rect">
             <a:avLst/>
@@ -8043,88 +8384,399 @@
           <a:p>
             <a:pPr>
               <a:spcAft>
-                <a:spcPts val="800"/>
+                <a:spcPts val="400"/>
               </a:spcAft>
             </a:pPr>
             <a:r>
-              <a:rPr sz="2000" b="0" i="0">
-                <a:solidFill>
-                  <a:srgbClr val="333333"/>
-                </a:solidFill>
-                <a:latin typeface="Calibri"/>
-              </a:rPr>
-              <a:t>–   La mejor forma de dictar la clase es seguir una peticion de la app de punta a punta sobre el diagrama proyectado.</a:t>
+              <a:rPr sz="1400" b="0" i="0">
+                <a:solidFill>
+                  <a:srgbClr val="FFFFFF"/>
+                </a:solidFill>
+                <a:latin typeface="Calibri"/>
+              </a:rPr>
+              <a:t>flowchart TB</a:t>
             </a:r>
           </a:p>
           <a:p>
             <a:pPr>
               <a:spcAft>
-                <a:spcPts val="800"/>
+                <a:spcPts val="400"/>
               </a:spcAft>
             </a:pPr>
             <a:r>
-              <a:rPr sz="2000" b="0" i="0">
-                <a:solidFill>
-                  <a:srgbClr val="333333"/>
-                </a:solidFill>
-                <a:latin typeface="Calibri"/>
-              </a:rPr>
-              <a:t>–   Un usuario final abre turnos.example en su telefono; el DNS resuelve el nombre a la IP publica del balanceador; el navegador abre una conexion HTTPS al puerto 443 de ese balanceador</a:t>
+              <a:rPr sz="1400" b="0" i="0">
+                <a:solidFill>
+                  <a:srgbClr val="FFFFFF"/>
+                </a:solidFill>
+                <a:latin typeface="Calibri"/>
+              </a:rPr>
+              <a:t>  subgraph internet[Internet]</a:t>
             </a:r>
           </a:p>
           <a:p>
             <a:pPr>
               <a:spcAft>
-                <a:spcPts val="800"/>
+                <a:spcPts val="400"/>
               </a:spcAft>
             </a:pPr>
             <a:r>
-              <a:rPr sz="2000" b="0" i="0">
-                <a:solidFill>
-                  <a:srgbClr val="333333"/>
-                </a:solidFill>
-                <a:latin typeface="Calibri"/>
-              </a:rPr>
-              <a:t>–   Que vive en la zona publica; el balanceador elige una de las dos instancias del contenedor de la API, en la zona privada</a:t>
+              <a:rPr sz="1400" b="0" i="0">
+                <a:solidFill>
+                  <a:srgbClr val="FFFFFF"/>
+                </a:solidFill>
+                <a:latin typeface="Calibri"/>
+              </a:rPr>
+              <a:t>    nav([Navegador del usuario])</a:t>
             </a:r>
           </a:p>
           <a:p>
             <a:pPr>
               <a:spcAft>
-                <a:spcPts val="800"/>
+                <a:spcPts val="400"/>
               </a:spcAft>
             </a:pPr>
             <a:r>
-              <a:rPr sz="2000" b="0" i="0">
-                <a:solidFill>
-                  <a:srgbClr val="333333"/>
-                </a:solidFill>
-                <a:latin typeface="Calibri"/>
-              </a:rPr>
-              <a:t>–   Y le reenvia la peticion por HTTP al puerto 8080; la API consulta el motor de base de datos en la zona de datos por el puerto 5432 y devuelve JSON por el mismo camino.</a:t>
+              <a:rPr sz="1400" b="0" i="0">
+                <a:solidFill>
+                  <a:srgbClr val="FFFFFF"/>
+                </a:solidFill>
+                <a:latin typeface="Calibri"/>
+              </a:rPr>
+              <a:t>  end</a:t>
             </a:r>
           </a:p>
           <a:p>
             <a:pPr>
               <a:spcAft>
-                <a:spcPts val="800"/>
+                <a:spcPts val="400"/>
               </a:spcAft>
             </a:pPr>
             <a:r>
-              <a:rPr sz="2000" b="0" i="0">
-                <a:solidFill>
-                  <a:srgbClr val="333333"/>
-                </a:solidFill>
-                <a:latin typeface="Calibri"/>
-              </a:rPr>
-              <a:t>–   Sirve tambien para citar numeros: una consulta simple bien indexada responde entre 1 y 20 milisegundos, y el objetivo que se formalizara en la Clase 12 suele fijarse por convencion en menos de 300 milisegundos para el 95 por ciento de las peticiones.</a:t>
-            </a:r>
-          </a:p>
-        </p:txBody>
-      </p:sp>
-      <p:sp>
-        <p:nvSpPr>
-          <p:cNvPr id="6" name="TextBox 5"/>
+              <a:rPr sz="1400" b="0" i="0">
+                <a:solidFill>
+                  <a:srgbClr val="FFFFFF"/>
+                </a:solidFill>
+                <a:latin typeface="Calibri"/>
+              </a:rPr>
+              <a:t/>
+            </a:r>
+          </a:p>
+          <a:p>
+            <a:pPr>
+              <a:spcAft>
+                <a:spcPts val="400"/>
+              </a:spcAft>
+            </a:pPr>
+            <a:r>
+              <a:rPr sz="1400" b="0" i="0">
+                <a:solidFill>
+                  <a:srgbClr val="FFFFFF"/>
+                </a:solidFill>
+                <a:latin typeface="Calibri"/>
+              </a:rPr>
+              <a:t>  subgraph nube[Proveedor cloud - region &lt;su region&gt;]</a:t>
+            </a:r>
+          </a:p>
+          <a:p>
+            <a:pPr>
+              <a:spcAft>
+                <a:spcPts val="400"/>
+              </a:spcAft>
+            </a:pPr>
+            <a:r>
+              <a:rPr sz="1400" b="0" i="0">
+                <a:solidFill>
+                  <a:srgbClr val="FFFFFF"/>
+                </a:solidFill>
+                <a:latin typeface="Calibri"/>
+              </a:rPr>
+              <a:t>    subgraph edge[CDN / Edge]</a:t>
+            </a:r>
+          </a:p>
+          <a:p>
+            <a:pPr>
+              <a:spcAft>
+                <a:spcPts val="400"/>
+              </a:spcAft>
+            </a:pPr>
+            <a:r>
+              <a:rPr sz="1400" b="0" i="0">
+                <a:solidFill>
+                  <a:srgbClr val="FFFFFF"/>
+                </a:solidFill>
+                <a:latin typeface="Calibri"/>
+              </a:rPr>
+              <a:t>      estatico[/Archivos estaticos&lt;br/&gt;build de la SPA/]</a:t>
+            </a:r>
+          </a:p>
+          <a:p>
+            <a:pPr>
+              <a:spcAft>
+                <a:spcPts val="400"/>
+              </a:spcAft>
+            </a:pPr>
+            <a:r>
+              <a:rPr sz="1400" b="0" i="0">
+                <a:solidFill>
+                  <a:srgbClr val="FFFFFF"/>
+                </a:solidFill>
+                <a:latin typeface="Calibri"/>
+              </a:rPr>
+              <a:t>    end</a:t>
+            </a:r>
+          </a:p>
+          <a:p>
+            <a:pPr>
+              <a:spcAft>
+                <a:spcPts val="400"/>
+              </a:spcAft>
+            </a:pPr>
+            <a:r>
+              <a:rPr sz="1400" b="0" i="0">
+                <a:solidFill>
+                  <a:srgbClr val="FFFFFF"/>
+                </a:solidFill>
+                <a:latin typeface="Calibri"/>
+              </a:rPr>
+              <a:t>    subgraph app[Servicio de aplicacion]</a:t>
+            </a:r>
+          </a:p>
+          <a:p>
+            <a:pPr>
+              <a:spcAft>
+                <a:spcPts val="400"/>
+              </a:spcAft>
+            </a:pPr>
+            <a:r>
+              <a:rPr sz="1400" b="0" i="0">
+                <a:solidFill>
+                  <a:srgbClr val="FFFFFF"/>
+                </a:solidFill>
+                <a:latin typeface="Calibri"/>
+              </a:rPr>
+              <a:t>      api1[Instancia API 1]</a:t>
+            </a:r>
+          </a:p>
+          <a:p>
+            <a:pPr>
+              <a:spcAft>
+                <a:spcPts val="400"/>
+              </a:spcAft>
+            </a:pPr>
+            <a:r>
+              <a:rPr sz="1400" b="0" i="0">
+                <a:solidFill>
+                  <a:srgbClr val="FFFFFF"/>
+                </a:solidFill>
+                <a:latin typeface="Calibri"/>
+              </a:rPr>
+              <a:t>      api2[Instancia API 2]</a:t>
+            </a:r>
+          </a:p>
+        </p:txBody>
+      </p:sp>
+      <p:sp>
+        <p:nvSpPr>
+          <p:cNvPr id="9" name="TextBox 8"/>
+          <p:cNvSpPr txBox="1"/>
+          <p:nvPr/>
+        </p:nvSpPr>
+        <p:spPr>
+          <a:xfrm>
+            <a:off x="6233007" y="1719072"/>
+            <a:ext cx="5181447" cy="4453128"/>
+          </a:xfrm>
+          <a:prstGeom prst="rect">
+            <a:avLst/>
+          </a:prstGeom>
+          <a:noFill/>
+        </p:spPr>
+        <p:txBody>
+          <a:bodyPr wrap="square">
+            <a:spAutoFit/>
+          </a:bodyPr>
+          <a:lstStyle/>
+          <a:p>
+            <a:pPr>
+              <a:spcAft>
+                <a:spcPts val="400"/>
+              </a:spcAft>
+            </a:pPr>
+            <a:r>
+              <a:rPr sz="1400" b="0" i="0">
+                <a:solidFill>
+                  <a:srgbClr val="FFFFFF"/>
+                </a:solidFill>
+                <a:latin typeface="Calibri"/>
+              </a:rPr>
+              <a:t>    end</a:t>
+            </a:r>
+          </a:p>
+          <a:p>
+            <a:pPr>
+              <a:spcAft>
+                <a:spcPts val="400"/>
+              </a:spcAft>
+            </a:pPr>
+            <a:r>
+              <a:rPr sz="1400" b="0" i="0">
+                <a:solidFill>
+                  <a:srgbClr val="FFFFFF"/>
+                </a:solidFill>
+                <a:latin typeface="Calibri"/>
+              </a:rPr>
+              <a:t>    subgraph datos[Servicio gestionado]</a:t>
+            </a:r>
+          </a:p>
+          <a:p>
+            <a:pPr>
+              <a:spcAft>
+                <a:spcPts val="400"/>
+              </a:spcAft>
+            </a:pPr>
+            <a:r>
+              <a:rPr sz="1400" b="0" i="0">
+                <a:solidFill>
+                  <a:srgbClr val="FFFFFF"/>
+                </a:solidFill>
+                <a:latin typeface="Calibri"/>
+              </a:rPr>
+              <a:t>      pg[(PostgreSQL&lt;br/&gt;con respaldo diario)]</a:t>
+            </a:r>
+          </a:p>
+          <a:p>
+            <a:pPr>
+              <a:spcAft>
+                <a:spcPts val="400"/>
+              </a:spcAft>
+            </a:pPr>
+            <a:r>
+              <a:rPr sz="1400" b="0" i="0">
+                <a:solidFill>
+                  <a:srgbClr val="FFFFFF"/>
+                </a:solidFill>
+                <a:latin typeface="Calibri"/>
+              </a:rPr>
+              <a:t>      obj[(Almacenamiento de objetos&lt;br/&gt;adjuntos)]</a:t>
+            </a:r>
+          </a:p>
+          <a:p>
+            <a:pPr>
+              <a:spcAft>
+                <a:spcPts val="400"/>
+              </a:spcAft>
+            </a:pPr>
+            <a:r>
+              <a:rPr sz="1400" b="0" i="0">
+                <a:solidFill>
+                  <a:srgbClr val="FFFFFF"/>
+                </a:solidFill>
+                <a:latin typeface="Calibri"/>
+              </a:rPr>
+              <a:t>    end</a:t>
+            </a:r>
+          </a:p>
+          <a:p>
+            <a:pPr>
+              <a:spcAft>
+                <a:spcPts val="400"/>
+              </a:spcAft>
+            </a:pPr>
+            <a:r>
+              <a:rPr sz="1400" b="0" i="0">
+                <a:solidFill>
+                  <a:srgbClr val="FFFFFF"/>
+                </a:solidFill>
+                <a:latin typeface="Calibri"/>
+              </a:rPr>
+              <a:t>  end</a:t>
+            </a:r>
+          </a:p>
+          <a:p>
+            <a:pPr>
+              <a:spcAft>
+                <a:spcPts val="400"/>
+              </a:spcAft>
+            </a:pPr>
+            <a:r>
+              <a:rPr sz="1400" b="0" i="0">
+                <a:solidFill>
+                  <a:srgbClr val="FFFFFF"/>
+                </a:solidFill>
+                <a:latin typeface="Calibri"/>
+              </a:rPr>
+              <a:t/>
+            </a:r>
+          </a:p>
+          <a:p>
+            <a:pPr>
+              <a:spcAft>
+                <a:spcPts val="400"/>
+              </a:spcAft>
+            </a:pPr>
+            <a:r>
+              <a:rPr sz="1400" b="0" i="0">
+                <a:solidFill>
+                  <a:srgbClr val="FFFFFF"/>
+                </a:solidFill>
+                <a:latin typeface="Calibri"/>
+              </a:rPr>
+              <a:t>  nav --&gt; estatico</a:t>
+            </a:r>
+          </a:p>
+          <a:p>
+            <a:pPr>
+              <a:spcAft>
+                <a:spcPts val="400"/>
+              </a:spcAft>
+            </a:pPr>
+            <a:r>
+              <a:rPr sz="1400" b="0" i="0">
+                <a:solidFill>
+                  <a:srgbClr val="FFFFFF"/>
+                </a:solidFill>
+                <a:latin typeface="Calibri"/>
+              </a:rPr>
+              <a:t>  nav --&gt; api1 &amp; api2</a:t>
+            </a:r>
+          </a:p>
+          <a:p>
+            <a:pPr>
+              <a:spcAft>
+                <a:spcPts val="400"/>
+              </a:spcAft>
+            </a:pPr>
+            <a:r>
+              <a:rPr sz="1400" b="0" i="0">
+                <a:solidFill>
+                  <a:srgbClr val="FFFFFF"/>
+                </a:solidFill>
+                <a:latin typeface="Calibri"/>
+              </a:rPr>
+              <a:t>  api1 &amp; api2 --&gt; pg</a:t>
+            </a:r>
+          </a:p>
+          <a:p>
+            <a:pPr>
+              <a:spcAft>
+                <a:spcPts val="400"/>
+              </a:spcAft>
+            </a:pPr>
+            <a:r>
+              <a:rPr sz="1400" b="0" i="0">
+                <a:solidFill>
+                  <a:srgbClr val="FFFFFF"/>
+                </a:solidFill>
+                <a:latin typeface="Calibri"/>
+              </a:rPr>
+              <a:t>  api1 &amp; api2 --&gt; obj</a:t>
+            </a:r>
+          </a:p>
+        </p:txBody>
+      </p:sp>
+      <p:sp>
+        <p:nvSpPr>
+          <p:cNvPr id="10" name="TextBox 9"/>
           <p:cNvSpPr txBox="1"/>
           <p:nvPr/>
         </p:nvSpPr>
@@ -8298,21 +8950,141 @@
                 </a:solidFill>
                 <a:latin typeface="Calibri"/>
               </a:rPr>
-              <a:t>Recorrer una peticion de la app de punta a punta (2/2)</a:t>
-            </a:r>
-          </a:p>
-        </p:txBody>
-      </p:sp>
-      <p:sp>
-        <p:nvSpPr>
-          <p:cNvPr id="5" name="TextBox 4"/>
+              <a:t>Que tipo de almacenamiento pide cada componente</a:t>
+            </a:r>
+          </a:p>
+        </p:txBody>
+      </p:sp>
+      <p:sp>
+        <p:nvSpPr>
+          <p:cNvPr id="5" name="Rounded Rectangle 4"/>
+          <p:cNvSpPr/>
+          <p:nvPr/>
+        </p:nvSpPr>
+        <p:spPr>
+          <a:xfrm>
+            <a:off x="457200" y="1261872"/>
+            <a:ext cx="11277295" cy="5093208"/>
+          </a:xfrm>
+          <a:prstGeom prst="roundRect">
+            <a:avLst>
+              <a:gd name="adj" fmla="val 12000"/>
+            </a:avLst>
+          </a:prstGeom>
+          <a:solidFill>
+            <a:srgbClr val="1E2A38"/>
+          </a:solidFill>
+          <a:ln>
+            <a:noFill/>
+          </a:ln>
+        </p:spPr>
+        <p:style>
+          <a:lnRef idx="1">
+            <a:schemeClr val="accent1"/>
+          </a:lnRef>
+          <a:fillRef idx="3">
+            <a:schemeClr val="accent1"/>
+          </a:fillRef>
+          <a:effectRef idx="2">
+            <a:schemeClr val="accent1"/>
+          </a:effectRef>
+          <a:fontRef idx="minor">
+            <a:schemeClr val="lt1"/>
+          </a:fontRef>
+        </p:style>
+        <p:txBody>
+          <a:bodyPr rtlCol="0" anchor="ctr"/>
+          <a:lstStyle/>
+          <a:p>
+            <a:pPr algn="ctr"/>
+          </a:p>
+        </p:txBody>
+      </p:sp>
+      <p:sp>
+        <p:nvSpPr>
+          <p:cNvPr id="6" name="Rectangle 5"/>
+          <p:cNvSpPr/>
+          <p:nvPr/>
+        </p:nvSpPr>
+        <p:spPr>
+          <a:xfrm>
+            <a:off x="457200" y="1261872"/>
+            <a:ext cx="11277295" cy="320040"/>
+          </a:xfrm>
+          <a:prstGeom prst="rect">
+            <a:avLst/>
+          </a:prstGeom>
+          <a:solidFill>
+            <a:srgbClr val="095292"/>
+          </a:solidFill>
+          <a:ln>
+            <a:noFill/>
+          </a:ln>
+        </p:spPr>
+        <p:style>
+          <a:lnRef idx="1">
+            <a:schemeClr val="accent1"/>
+          </a:lnRef>
+          <a:fillRef idx="3">
+            <a:schemeClr val="accent1"/>
+          </a:fillRef>
+          <a:effectRef idx="2">
+            <a:schemeClr val="accent1"/>
+          </a:effectRef>
+          <a:fontRef idx="minor">
+            <a:schemeClr val="lt1"/>
+          </a:fontRef>
+        </p:style>
+        <p:txBody>
+          <a:bodyPr rtlCol="0" anchor="ctr"/>
+          <a:lstStyle/>
+          <a:p>
+            <a:pPr algn="ctr"/>
+          </a:p>
+        </p:txBody>
+      </p:sp>
+      <p:sp>
+        <p:nvSpPr>
+          <p:cNvPr id="7" name="TextBox 6"/>
           <p:cNvSpPr txBox="1"/>
           <p:nvPr/>
         </p:nvSpPr>
         <p:spPr>
           <a:xfrm>
-            <a:off x="457200" y="1170432"/>
-            <a:ext cx="11277295" cy="5230368"/>
+            <a:off x="685800" y="1307592"/>
+            <a:ext cx="10820095" cy="256032"/>
+          </a:xfrm>
+          <a:prstGeom prst="rect">
+            <a:avLst/>
+          </a:prstGeom>
+          <a:noFill/>
+        </p:spPr>
+        <p:txBody>
+          <a:bodyPr wrap="square" anchor="ctr"/>
+          <a:lstStyle/>
+          <a:p>
+            <a:r>
+              <a:rPr sz="1000" b="1" i="0">
+                <a:solidFill>
+                  <a:srgbClr val="269CCB"/>
+                </a:solidFill>
+                <a:latin typeface="Calibri"/>
+              </a:rPr>
+              <a:t>● ● ●</a:t>
+            </a:r>
+          </a:p>
+        </p:txBody>
+      </p:sp>
+      <p:sp>
+        <p:nvSpPr>
+          <p:cNvPr id="8" name="TextBox 7"/>
+          <p:cNvSpPr txBox="1"/>
+          <p:nvPr/>
+        </p:nvSpPr>
+        <p:spPr>
+          <a:xfrm>
+            <a:off x="777240" y="1719072"/>
+            <a:ext cx="10637215" cy="4453128"/>
           </a:xfrm>
           <a:prstGeom prst="rect">
             <a:avLst/>
@@ -8327,56 +9099,184 @@
           <a:p>
             <a:pPr>
               <a:spcAft>
-                <a:spcPts val="800"/>
+                <a:spcPts val="400"/>
               </a:spcAft>
             </a:pPr>
             <a:r>
-              <a:rPr sz="2000" b="0" i="0">
-                <a:solidFill>
-                  <a:srgbClr val="333333"/>
-                </a:solidFill>
-                <a:latin typeface="Calibri"/>
-              </a:rPr>
-              <a:t>–   Con eso el grupo ve que si una pantalla dispara veinte consultas encadenadas el problema es de diseno y no de servidor.</a:t>
+              <a:rPr sz="1400" b="0" i="0">
+                <a:solidFill>
+                  <a:srgbClr val="FFFFFF"/>
+                </a:solidFill>
+                <a:latin typeface="Calibri"/>
+              </a:rPr>
+              <a:t>%% BLOQUE (disco de la instancia): rapido, se va con la instancia.</a:t>
             </a:r>
           </a:p>
           <a:p>
             <a:pPr>
               <a:spcAft>
-                <a:spcPts val="800"/>
+                <a:spcPts val="400"/>
               </a:spcAft>
             </a:pPr>
             <a:r>
-              <a:rPr sz="2000" b="0" i="0">
-                <a:solidFill>
-                  <a:srgbClr val="333333"/>
-                </a:solidFill>
-                <a:latin typeface="Calibri"/>
-              </a:rPr>
-              <a:t>–   El recorrido completo tiene 4 saltos: DNS, balanceador en la zona publica, API en la zona privada y base de datos en la zona de datos.</a:t>
+              <a:rPr sz="1400" b="0" i="0">
+                <a:solidFill>
+                  <a:srgbClr val="FFFFFF"/>
+                </a:solidFill>
+                <a:latin typeface="Calibri"/>
+              </a:rPr>
+              <a:t>%%   -&gt; cache local, archivos temporales. NUNCA el dato que importa.</a:t>
             </a:r>
           </a:p>
           <a:p>
             <a:pPr>
               <a:spcAft>
-                <a:spcPts val="800"/>
+                <a:spcPts val="400"/>
               </a:spcAft>
             </a:pPr>
             <a:r>
-              <a:rPr sz="2000" b="0" i="0">
-                <a:solidFill>
-                  <a:srgbClr val="333333"/>
-                </a:solidFill>
-                <a:latin typeface="Calibri"/>
-              </a:rPr>
-              <a:t>–   Cada salto de red dentro de un mismo centro de datos suma del orden de 1 milisegundo, y por eso un diseno que encadena servicios innecesarios es lento aunque cada pieza sea rapida.</a:t>
-            </a:r>
-          </a:p>
-        </p:txBody>
-      </p:sp>
-      <p:sp>
-        <p:nvSpPr>
-          <p:cNvPr id="6" name="TextBox 5"/>
+              <a:rPr sz="1400" b="0" i="0">
+                <a:solidFill>
+                  <a:srgbClr val="FFFFFF"/>
+                </a:solidFill>
+                <a:latin typeface="Calibri"/>
+              </a:rPr>
+              <a:t/>
+            </a:r>
+          </a:p>
+          <a:p>
+            <a:pPr>
+              <a:spcAft>
+                <a:spcPts val="400"/>
+              </a:spcAft>
+            </a:pPr>
+            <a:r>
+              <a:rPr sz="1400" b="0" i="0">
+                <a:solidFill>
+                  <a:srgbClr val="FFFFFF"/>
+                </a:solidFill>
+                <a:latin typeface="Calibri"/>
+              </a:rPr>
+              <a:t>%% OBJETOS (S3 y equivalentes): barato, por HTTP, no se monta como disco.</a:t>
+            </a:r>
+          </a:p>
+          <a:p>
+            <a:pPr>
+              <a:spcAft>
+                <a:spcPts val="400"/>
+              </a:spcAft>
+            </a:pPr>
+            <a:r>
+              <a:rPr sz="1400" b="0" i="0">
+                <a:solidFill>
+                  <a:srgbClr val="FFFFFF"/>
+                </a:solidFill>
+                <a:latin typeface="Calibri"/>
+              </a:rPr>
+              <a:t>%%   -&gt; adjuntos, imagenes, respaldos, el build de la SPA.</a:t>
+            </a:r>
+          </a:p>
+          <a:p>
+            <a:pPr>
+              <a:spcAft>
+                <a:spcPts val="400"/>
+              </a:spcAft>
+            </a:pPr>
+            <a:r>
+              <a:rPr sz="1400" b="0" i="0">
+                <a:solidFill>
+                  <a:srgbClr val="FFFFFF"/>
+                </a:solidFill>
+                <a:latin typeface="Calibri"/>
+              </a:rPr>
+              <a:t/>
+            </a:r>
+          </a:p>
+          <a:p>
+            <a:pPr>
+              <a:spcAft>
+                <a:spcPts val="400"/>
+              </a:spcAft>
+            </a:pPr>
+            <a:r>
+              <a:rPr sz="1400" b="0" i="0">
+                <a:solidFill>
+                  <a:srgbClr val="FFFFFF"/>
+                </a:solidFill>
+                <a:latin typeface="Calibri"/>
+              </a:rPr>
+              <a:t>%% BASE RELACIONAL GESTIONADA: transaccional, con respaldo y replica.</a:t>
+            </a:r>
+          </a:p>
+          <a:p>
+            <a:pPr>
+              <a:spcAft>
+                <a:spcPts val="400"/>
+              </a:spcAft>
+            </a:pPr>
+            <a:r>
+              <a:rPr sz="1400" b="0" i="0">
+                <a:solidFill>
+                  <a:srgbClr val="FFFFFF"/>
+                </a:solidFill>
+                <a:latin typeface="Calibri"/>
+              </a:rPr>
+              <a:t>%%   -&gt; lo que necesita integridad y consultas.</a:t>
+            </a:r>
+          </a:p>
+          <a:p>
+            <a:pPr>
+              <a:spcAft>
+                <a:spcPts val="400"/>
+              </a:spcAft>
+            </a:pPr>
+            <a:r>
+              <a:rPr sz="1400" b="0" i="0">
+                <a:solidFill>
+                  <a:srgbClr val="FFFFFF"/>
+                </a:solidFill>
+                <a:latin typeface="Calibri"/>
+              </a:rPr>
+              <a:t/>
+            </a:r>
+          </a:p>
+          <a:p>
+            <a:pPr>
+              <a:spcAft>
+                <a:spcPts val="400"/>
+              </a:spcAft>
+            </a:pPr>
+            <a:r>
+              <a:rPr sz="1400" b="0" i="0">
+                <a:solidFill>
+                  <a:srgbClr val="FFFFFF"/>
+                </a:solidFill>
+                <a:latin typeface="Calibri"/>
+              </a:rPr>
+              <a:t>%% La pregunta que decide: si esta instancia desaparece ahora mismo,</a:t>
+            </a:r>
+          </a:p>
+          <a:p>
+            <a:pPr>
+              <a:spcAft>
+                <a:spcPts val="400"/>
+              </a:spcAft>
+            </a:pPr>
+            <a:r>
+              <a:rPr sz="1400" b="0" i="0">
+                <a:solidFill>
+                  <a:srgbClr val="FFFFFF"/>
+                </a:solidFill>
+                <a:latin typeface="Calibri"/>
+              </a:rPr>
+              <a:t>%% que dato se pierde? Si la respuesta no es «ninguno», esta mal ubicado.</a:t>
+            </a:r>
+          </a:p>
+        </p:txBody>
+      </p:sp>
+      <p:sp>
+        <p:nvSpPr>
+          <p:cNvPr id="9" name="TextBox 8"/>
           <p:cNvSpPr txBox="1"/>
           <p:nvPr/>
         </p:nvSpPr>
@@ -8444,7 +9344,7 @@
         <p:spPr>
           <a:xfrm>
             <a:off x="0" y="0"/>
-            <a:ext cx="12191695" cy="960120"/>
+            <a:ext cx="12191695" cy="1170432"/>
           </a:xfrm>
           <a:prstGeom prst="rect">
             <a:avLst/>
@@ -8486,7 +9386,7 @@
         </p:nvSpPr>
         <p:spPr>
           <a:xfrm>
-            <a:off x="0" y="960120"/>
+            <a:off x="0" y="1170432"/>
             <a:ext cx="12191695" cy="41148"/>
           </a:xfrm>
           <a:prstGeom prst="rect">
@@ -8530,7 +9430,7 @@
         <p:spPr>
           <a:xfrm>
             <a:off x="457200" y="164592"/>
-            <a:ext cx="11277295" cy="502920"/>
+            <a:ext cx="11277295" cy="384048"/>
           </a:xfrm>
           <a:prstGeom prst="rect">
             <a:avLst/>
@@ -8550,7 +9450,7 @@
                 </a:solidFill>
                 <a:latin typeface="Calibri"/>
               </a:rPr>
-              <a:t>El molde de Mermaid, linea por linea (1/2)</a:t>
+              <a:t>Ejemplo de diagrama de despliegue (Deployment)</a:t>
             </a:r>
           </a:p>
         </p:txBody>
@@ -8563,8 +9463,8 @@
         </p:nvSpPr>
         <p:spPr>
           <a:xfrm>
-            <a:off x="457200" y="1170432"/>
-            <a:ext cx="11277295" cy="5230368"/>
+            <a:off x="457200" y="566928"/>
+            <a:ext cx="11277295" cy="411480"/>
           </a:xfrm>
           <a:prstGeom prst="rect">
             <a:avLst/>
@@ -8577,106 +9477,362 @@
           </a:bodyPr>
           <a:lstStyle/>
           <a:p>
-            <a:pPr>
-              <a:spcAft>
-                <a:spcPts val="800"/>
-              </a:spcAft>
-            </a:pPr>
-            <a:r>
-              <a:rPr sz="2000" b="0" i="0">
-                <a:solidFill>
-                  <a:srgbClr val="333333"/>
-                </a:solidFill>
-                <a:latin typeface="Calibri"/>
-              </a:rPr>
-              <a:t>–   Primera: la palabra inicial.</a:t>
-            </a:r>
-          </a:p>
-          <a:p>
-            <a:pPr>
-              <a:spcAft>
-                <a:spcPts val="800"/>
-              </a:spcAft>
-            </a:pPr>
-            <a:r>
-              <a:rPr sz="2000" b="0" i="0">
-                <a:solidFill>
-                  <a:srgbClr val="333333"/>
-                </a:solidFill>
-                <a:latin typeface="Calibri"/>
-              </a:rPr>
-              <a:t>–   Segunda: cada zona es un subgraph con su rotulo entre comillas y su propio end.</a:t>
-            </a:r>
-          </a:p>
-          <a:p>
-            <a:pPr>
-              <a:spcAft>
-                <a:spcPts val="800"/>
-              </a:spcAft>
-            </a:pPr>
-            <a:r>
-              <a:rPr sz="2000" b="0" i="0">
-                <a:solidFill>
-                  <a:srgbClr val="333333"/>
-                </a:solidFill>
-                <a:latin typeface="Calibri"/>
-              </a:rPr>
-              <a:t>–   Los subgraph son las tres zonas; olvidar un end es la causa numero uno de que el diagrama no se dibuje, porque el bloque queda abierto.</a:t>
-            </a:r>
-          </a:p>
-          <a:p>
-            <a:pPr>
-              <a:spcAft>
-                <a:spcPts val="800"/>
-              </a:spcAft>
-            </a:pPr>
-            <a:r>
-              <a:rPr sz="2000" b="0" i="0">
-                <a:solidFill>
-                  <a:srgbClr val="333333"/>
-                </a:solidFill>
-                <a:latin typeface="Calibri"/>
-              </a:rPr>
-              <a:t>–   Tercera: la forma de la caja dice que es la pieza.</a:t>
-            </a:r>
-          </a:p>
-          <a:p>
-            <a:pPr>
-              <a:spcAft>
-                <a:spcPts val="800"/>
-              </a:spcAft>
-            </a:pPr>
-            <a:r>
-              <a:rPr sz="2000" b="0" i="0">
-                <a:solidFill>
-                  <a:srgbClr val="333333"/>
-                </a:solidFill>
-                <a:latin typeface="Calibri"/>
-              </a:rPr>
-              <a:t>–   Los corchetes rectos son un proceso o servicio, y la combinacion de corchete y parentesis, es decir abrir corchete parentesis, es la base de datos, que se lee como cilindro.</a:t>
-            </a:r>
-          </a:p>
-          <a:p>
-            <a:pPr>
-              <a:spcAft>
-                <a:spcPts val="800"/>
-              </a:spcAft>
-            </a:pPr>
-            <a:r>
-              <a:rPr sz="2000" b="0" i="0">
-                <a:solidFill>
-                  <a:srgbClr val="333333"/>
-                </a:solidFill>
-                <a:latin typeface="Calibri"/>
-              </a:rPr>
-              <a:t>–   Cuarta: el puerto va DENTRO del rotulo de la caja, separado con la etiqueta de salto de linea de HTML, y la etiqueta de la flecha va entre barras verticales y comillas, con el protocolo y el puerto.</a:t>
-            </a:r>
-          </a:p>
-        </p:txBody>
-      </p:sp>
-      <p:sp>
-        <p:nvSpPr>
-          <p:cNvPr id="6" name="TextBox 5"/>
+            <a:r>
+              <a:rPr sz="1400" b="0" i="0">
+                <a:solidFill>
+                  <a:srgbClr val="B8D8EE"/>
+                </a:solidFill>
+                <a:latin typeface="Calibri"/>
+              </a:rPr>
+              <a:t>Zonas de confianza: qué es público, qué es privado, dónde viven los datos</a:t>
+            </a:r>
+          </a:p>
+        </p:txBody>
+      </p:sp>
+      <p:sp>
+        <p:nvSpPr>
+          <p:cNvPr id="6" name="Rounded Rectangle 5"/>
+          <p:cNvSpPr/>
+          <p:nvPr/>
+        </p:nvSpPr>
+        <p:spPr>
+          <a:xfrm>
+            <a:off x="822960" y="2194560"/>
+            <a:ext cx="3291840" cy="1005840"/>
+          </a:xfrm>
+          <a:prstGeom prst="roundRect">
+            <a:avLst>
+              <a:gd name="adj" fmla="val 12000"/>
+            </a:avLst>
+          </a:prstGeom>
+          <a:solidFill>
+            <a:srgbClr val="FFD000"/>
+          </a:solidFill>
+          <a:ln>
+            <a:noFill/>
+          </a:ln>
+        </p:spPr>
+        <p:style>
+          <a:lnRef idx="1">
+            <a:schemeClr val="accent1"/>
+          </a:lnRef>
+          <a:fillRef idx="3">
+            <a:schemeClr val="accent1"/>
+          </a:fillRef>
+          <a:effectRef idx="2">
+            <a:schemeClr val="accent1"/>
+          </a:effectRef>
+          <a:fontRef idx="minor">
+            <a:schemeClr val="lt1"/>
+          </a:fontRef>
+        </p:style>
+        <p:txBody>
+          <a:bodyPr rtlCol="0" anchor="ctr" wrap="square"/>
+          <a:lstStyle/>
+          <a:p>
+            <a:pPr algn="ctr"/>
+            <a:r>
+              <a:rPr sz="1300" b="1" i="0">
+                <a:solidFill>
+                  <a:srgbClr val="095292"/>
+                </a:solidFill>
+                <a:latin typeface="Calibri"/>
+              </a:rPr>
+              <a:t>Zona pública
+(balanceador / edge)</a:t>
+            </a:r>
+          </a:p>
+        </p:txBody>
+      </p:sp>
+      <p:sp>
+        <p:nvSpPr>
+          <p:cNvPr id="7" name="Rounded Rectangle 6"/>
+          <p:cNvSpPr/>
+          <p:nvPr/>
+        </p:nvSpPr>
+        <p:spPr>
+          <a:xfrm>
+            <a:off x="4754880" y="2194560"/>
+            <a:ext cx="3291840" cy="1005840"/>
+          </a:xfrm>
+          <a:prstGeom prst="roundRect">
+            <a:avLst>
+              <a:gd name="adj" fmla="val 12000"/>
+            </a:avLst>
+          </a:prstGeom>
+          <a:solidFill>
+            <a:srgbClr val="095292"/>
+          </a:solidFill>
+          <a:ln>
+            <a:noFill/>
+          </a:ln>
+        </p:spPr>
+        <p:style>
+          <a:lnRef idx="1">
+            <a:schemeClr val="accent1"/>
+          </a:lnRef>
+          <a:fillRef idx="3">
+            <a:schemeClr val="accent1"/>
+          </a:fillRef>
+          <a:effectRef idx="2">
+            <a:schemeClr val="accent1"/>
+          </a:effectRef>
+          <a:fontRef idx="minor">
+            <a:schemeClr val="lt1"/>
+          </a:fontRef>
+        </p:style>
+        <p:txBody>
+          <a:bodyPr rtlCol="0" anchor="ctr" wrap="square"/>
+          <a:lstStyle/>
+          <a:p>
+            <a:pPr algn="ctr"/>
+            <a:r>
+              <a:rPr sz="1300" b="1" i="0">
+                <a:solidFill>
+                  <a:srgbClr val="FFFFFF"/>
+                </a:solidFill>
+                <a:latin typeface="Calibri"/>
+              </a:rPr>
+              <a:t>Zona privada
+(app de la app)</a:t>
+            </a:r>
+          </a:p>
+        </p:txBody>
+      </p:sp>
+      <p:sp>
+        <p:nvSpPr>
+          <p:cNvPr id="8" name="Rounded Rectangle 7"/>
+          <p:cNvSpPr/>
+          <p:nvPr/>
+        </p:nvSpPr>
+        <p:spPr>
+          <a:xfrm>
+            <a:off x="8595360" y="2194560"/>
+            <a:ext cx="3291840" cy="1005840"/>
+          </a:xfrm>
+          <a:prstGeom prst="roundRect">
+            <a:avLst>
+              <a:gd name="adj" fmla="val 12000"/>
+            </a:avLst>
+          </a:prstGeom>
+          <a:solidFill>
+            <a:srgbClr val="269CCB"/>
+          </a:solidFill>
+          <a:ln>
+            <a:noFill/>
+          </a:ln>
+        </p:spPr>
+        <p:style>
+          <a:lnRef idx="1">
+            <a:schemeClr val="accent1"/>
+          </a:lnRef>
+          <a:fillRef idx="3">
+            <a:schemeClr val="accent1"/>
+          </a:fillRef>
+          <a:effectRef idx="2">
+            <a:schemeClr val="accent1"/>
+          </a:effectRef>
+          <a:fontRef idx="minor">
+            <a:schemeClr val="lt1"/>
+          </a:fontRef>
+        </p:style>
+        <p:txBody>
+          <a:bodyPr rtlCol="0" anchor="ctr" wrap="square"/>
+          <a:lstStyle/>
+          <a:p>
+            <a:pPr algn="ctr"/>
+            <a:r>
+              <a:rPr sz="1300" b="1" i="0">
+                <a:solidFill>
+                  <a:srgbClr val="FFFFFF"/>
+                </a:solidFill>
+                <a:latin typeface="Calibri"/>
+              </a:rPr>
+              <a:t>Zona de datos
+(base de datos)</a:t>
+            </a:r>
+          </a:p>
+        </p:txBody>
+      </p:sp>
+      <p:cxnSp>
+        <p:nvCxnSpPr>
+          <p:cNvPr id="9" name="Connector 8"/>
+          <p:cNvCxnSpPr/>
+          <p:nvPr/>
+        </p:nvCxnSpPr>
+        <p:spPr>
+          <a:xfrm>
+            <a:off x="4114800" y="2697480"/>
+            <a:ext cx="640080" cy="0"/>
+          </a:xfrm>
+          <a:prstGeom prst="line">
+            <a:avLst/>
+          </a:prstGeom>
+          <a:ln w="22225">
+            <a:solidFill>
+              <a:srgbClr val="666666"/>
+            </a:solidFill>
+            <a:tailEnd type="triangle" w="med" len="med"/>
+          </a:ln>
+        </p:spPr>
+        <p:style>
+          <a:lnRef idx="2">
+            <a:schemeClr val="accent1"/>
+          </a:lnRef>
+          <a:fillRef idx="0">
+            <a:schemeClr val="accent1"/>
+          </a:fillRef>
+          <a:effectRef idx="1">
+            <a:schemeClr val="accent1"/>
+          </a:effectRef>
+          <a:fontRef idx="minor">
+            <a:schemeClr val="tx1"/>
+          </a:fontRef>
+        </p:style>
+      </p:cxnSp>
+      <p:sp>
+        <p:nvSpPr>
+          <p:cNvPr id="10" name="TextBox 9"/>
+          <p:cNvSpPr txBox="1"/>
+          <p:nvPr/>
+        </p:nvSpPr>
+        <p:spPr>
+          <a:xfrm>
+            <a:off x="3611879" y="2496312"/>
+            <a:ext cx="1645920" cy="320040"/>
+          </a:xfrm>
+          <a:prstGeom prst="rect">
+            <a:avLst/>
+          </a:prstGeom>
+          <a:noFill/>
+        </p:spPr>
+        <p:txBody>
+          <a:bodyPr wrap="square">
+            <a:spAutoFit/>
+          </a:bodyPr>
+          <a:lstStyle/>
+          <a:p>
+            <a:pPr algn="ctr"/>
+            <a:r>
+              <a:rPr sz="1000" b="0" i="1">
+                <a:solidFill>
+                  <a:srgbClr val="666666"/>
+                </a:solidFill>
+                <a:latin typeface="Calibri"/>
+              </a:rPr>
+              <a:t>solo el 8080</a:t>
+            </a:r>
+          </a:p>
+        </p:txBody>
+      </p:sp>
+      <p:cxnSp>
+        <p:nvCxnSpPr>
+          <p:cNvPr id="11" name="Connector 10"/>
+          <p:cNvCxnSpPr/>
+          <p:nvPr/>
+        </p:nvCxnSpPr>
+        <p:spPr>
+          <a:xfrm>
+            <a:off x="8046720" y="2697480"/>
+            <a:ext cx="548640" cy="0"/>
+          </a:xfrm>
+          <a:prstGeom prst="line">
+            <a:avLst/>
+          </a:prstGeom>
+          <a:ln w="22225">
+            <a:solidFill>
+              <a:srgbClr val="666666"/>
+            </a:solidFill>
+            <a:tailEnd type="triangle" w="med" len="med"/>
+          </a:ln>
+        </p:spPr>
+        <p:style>
+          <a:lnRef idx="2">
+            <a:schemeClr val="accent1"/>
+          </a:lnRef>
+          <a:fillRef idx="0">
+            <a:schemeClr val="accent1"/>
+          </a:fillRef>
+          <a:effectRef idx="1">
+            <a:schemeClr val="accent1"/>
+          </a:effectRef>
+          <a:fontRef idx="minor">
+            <a:schemeClr val="tx1"/>
+          </a:fontRef>
+        </p:style>
+      </p:cxnSp>
+      <p:sp>
+        <p:nvSpPr>
+          <p:cNvPr id="12" name="TextBox 11"/>
+          <p:cNvSpPr txBox="1"/>
+          <p:nvPr/>
+        </p:nvSpPr>
+        <p:spPr>
+          <a:xfrm>
+            <a:off x="7498080" y="2496312"/>
+            <a:ext cx="1645920" cy="320040"/>
+          </a:xfrm>
+          <a:prstGeom prst="rect">
+            <a:avLst/>
+          </a:prstGeom>
+          <a:noFill/>
+        </p:spPr>
+        <p:txBody>
+          <a:bodyPr wrap="square">
+            <a:spAutoFit/>
+          </a:bodyPr>
+          <a:lstStyle/>
+          <a:p>
+            <a:pPr algn="ctr"/>
+            <a:r>
+              <a:rPr sz="1000" b="0" i="1">
+                <a:solidFill>
+                  <a:srgbClr val="666666"/>
+                </a:solidFill>
+                <a:latin typeface="Calibri"/>
+              </a:rPr>
+              <a:t>solo el 5432</a:t>
+            </a:r>
+          </a:p>
+        </p:txBody>
+      </p:sp>
+      <p:sp>
+        <p:nvSpPr>
+          <p:cNvPr id="13" name="TextBox 12"/>
+          <p:cNvSpPr txBox="1"/>
+          <p:nvPr/>
+        </p:nvSpPr>
+        <p:spPr>
+          <a:xfrm>
+            <a:off x="457200" y="6263640"/>
+            <a:ext cx="11277295" cy="411480"/>
+          </a:xfrm>
+          <a:prstGeom prst="rect">
+            <a:avLst/>
+          </a:prstGeom>
+          <a:noFill/>
+        </p:spPr>
+        <p:txBody>
+          <a:bodyPr wrap="square">
+            <a:spAutoFit/>
+          </a:bodyPr>
+          <a:lstStyle/>
+          <a:p>
+            <a:r>
+              <a:rPr sz="1100" b="0" i="1">
+                <a:solidFill>
+                  <a:srgbClr val="666666"/>
+                </a:solidFill>
+                <a:latin typeface="Calibri"/>
+              </a:rPr>
+              <a:t>La base de datos NUNCA vive en la zona pública: solo acepta conexiones de la API por el 5432. Los nombres coinciden con los del C4 Containers (Clase 4) — mismo sistema, otro ángulo. El correo externo queda fuera de las zonas.</a:t>
+            </a:r>
+          </a:p>
+        </p:txBody>
+      </p:sp>
+      <p:sp>
+        <p:nvSpPr>
+          <p:cNvPr id="14" name="TextBox 13"/>
           <p:cNvSpPr txBox="1"/>
           <p:nvPr/>
         </p:nvSpPr>
@@ -8850,21 +10006,141 @@
                 </a:solidFill>
                 <a:latin typeface="Calibri"/>
               </a:rPr>
-              <a:t>El molde de Mermaid, linea por linea (2/2)</a:t>
-            </a:r>
-          </a:p>
-        </p:txBody>
-      </p:sp>
-      <p:sp>
-        <p:nvSpPr>
-          <p:cNvPr id="5" name="TextBox 4"/>
+              <a:t>El Despliegue en Mermaid: el molde que un visor renderiza</a:t>
+            </a:r>
+          </a:p>
+        </p:txBody>
+      </p:sp>
+      <p:sp>
+        <p:nvSpPr>
+          <p:cNvPr id="5" name="Rounded Rectangle 4"/>
+          <p:cNvSpPr/>
+          <p:nvPr/>
+        </p:nvSpPr>
+        <p:spPr>
+          <a:xfrm>
+            <a:off x="457200" y="1261872"/>
+            <a:ext cx="11277295" cy="4773168"/>
+          </a:xfrm>
+          <a:prstGeom prst="roundRect">
+            <a:avLst>
+              <a:gd name="adj" fmla="val 12000"/>
+            </a:avLst>
+          </a:prstGeom>
+          <a:solidFill>
+            <a:srgbClr val="1E2A38"/>
+          </a:solidFill>
+          <a:ln>
+            <a:noFill/>
+          </a:ln>
+        </p:spPr>
+        <p:style>
+          <a:lnRef idx="1">
+            <a:schemeClr val="accent1"/>
+          </a:lnRef>
+          <a:fillRef idx="3">
+            <a:schemeClr val="accent1"/>
+          </a:fillRef>
+          <a:effectRef idx="2">
+            <a:schemeClr val="accent1"/>
+          </a:effectRef>
+          <a:fontRef idx="minor">
+            <a:schemeClr val="lt1"/>
+          </a:fontRef>
+        </p:style>
+        <p:txBody>
+          <a:bodyPr rtlCol="0" anchor="ctr"/>
+          <a:lstStyle/>
+          <a:p>
+            <a:pPr algn="ctr"/>
+          </a:p>
+        </p:txBody>
+      </p:sp>
+      <p:sp>
+        <p:nvSpPr>
+          <p:cNvPr id="6" name="Rectangle 5"/>
+          <p:cNvSpPr/>
+          <p:nvPr/>
+        </p:nvSpPr>
+        <p:spPr>
+          <a:xfrm>
+            <a:off x="457200" y="1261872"/>
+            <a:ext cx="11277295" cy="320040"/>
+          </a:xfrm>
+          <a:prstGeom prst="rect">
+            <a:avLst/>
+          </a:prstGeom>
+          <a:solidFill>
+            <a:srgbClr val="095292"/>
+          </a:solidFill>
+          <a:ln>
+            <a:noFill/>
+          </a:ln>
+        </p:spPr>
+        <p:style>
+          <a:lnRef idx="1">
+            <a:schemeClr val="accent1"/>
+          </a:lnRef>
+          <a:fillRef idx="3">
+            <a:schemeClr val="accent1"/>
+          </a:fillRef>
+          <a:effectRef idx="2">
+            <a:schemeClr val="accent1"/>
+          </a:effectRef>
+          <a:fontRef idx="minor">
+            <a:schemeClr val="lt1"/>
+          </a:fontRef>
+        </p:style>
+        <p:txBody>
+          <a:bodyPr rtlCol="0" anchor="ctr"/>
+          <a:lstStyle/>
+          <a:p>
+            <a:pPr algn="ctr"/>
+          </a:p>
+        </p:txBody>
+      </p:sp>
+      <p:sp>
+        <p:nvSpPr>
+          <p:cNvPr id="7" name="TextBox 6"/>
           <p:cNvSpPr txBox="1"/>
           <p:nvPr/>
         </p:nvSpPr>
         <p:spPr>
           <a:xfrm>
-            <a:off x="457200" y="1170432"/>
-            <a:ext cx="11277295" cy="5230368"/>
+            <a:off x="685800" y="1307592"/>
+            <a:ext cx="10820095" cy="256032"/>
+          </a:xfrm>
+          <a:prstGeom prst="rect">
+            <a:avLst/>
+          </a:prstGeom>
+          <a:noFill/>
+        </p:spPr>
+        <p:txBody>
+          <a:bodyPr wrap="square" anchor="ctr"/>
+          <a:lstStyle/>
+          <a:p>
+            <a:r>
+              <a:rPr sz="1000" b="1" i="0">
+                <a:solidFill>
+                  <a:srgbClr val="269CCB"/>
+                </a:solidFill>
+                <a:latin typeface="Calibri"/>
+              </a:rPr>
+              <a:t>● ● ●</a:t>
+            </a:r>
+          </a:p>
+        </p:txBody>
+      </p:sp>
+      <p:sp>
+        <p:nvSpPr>
+          <p:cNvPr id="8" name="TextBox 7"/>
+          <p:cNvSpPr txBox="1"/>
+          <p:nvPr/>
+        </p:nvSpPr>
+        <p:spPr>
+          <a:xfrm>
+            <a:off x="777240" y="1719072"/>
+            <a:ext cx="10637215" cy="4133087"/>
           </a:xfrm>
           <a:prstGeom prst="rect">
             <a:avLst/>
@@ -8879,104 +10155,283 @@
           <a:p>
             <a:pPr>
               <a:spcAft>
-                <a:spcPts val="800"/>
+                <a:spcPts val="400"/>
               </a:spcAft>
             </a:pPr>
             <a:r>
-              <a:rPr sz="2000" b="0" i="0">
-                <a:solidFill>
-                  <a:srgbClr val="333333"/>
-                </a:solidFill>
-                <a:latin typeface="Calibri"/>
-              </a:rPr>
-              <a:t>–   Es la forma mas segura de etiquetar los puertos sin ensuciar el dibujo.</a:t>
+              <a:rPr sz="1400" b="0" i="0">
+                <a:solidFill>
+                  <a:srgbClr val="FFFFFF"/>
+                </a:solidFill>
+                <a:latin typeface="Calibri"/>
+              </a:rPr>
+              <a:t>flowchart LR</a:t>
             </a:r>
           </a:p>
           <a:p>
             <a:pPr>
               <a:spcAft>
-                <a:spcPts val="800"/>
+                <a:spcPts val="400"/>
               </a:spcAft>
             </a:pPr>
             <a:r>
-              <a:rPr sz="2000" b="0" i="0">
-                <a:solidFill>
-                  <a:srgbClr val="333333"/>
-                </a:solidFill>
-                <a:latin typeface="Calibri"/>
-              </a:rPr>
-              <a:t>–   Quinta: el servicio externo se declara FUERA de los tres subgraph, y la flecha que llega a el se rotula como frontera de confianza; asi las fronteras quedan visibles en el propio dibujo y no en un comentario aparte.</a:t>
+              <a:rPr sz="1400" b="0" i="0">
+                <a:solidFill>
+                  <a:srgbClr val="FFFFFF"/>
+                </a:solidFill>
+                <a:latin typeface="Calibri"/>
+              </a:rPr>
+              <a:t>  subgraph publica["Zona publica - internet"]</a:t>
             </a:r>
           </a:p>
           <a:p>
             <a:pPr>
               <a:spcAft>
-                <a:spcPts val="800"/>
+                <a:spcPts val="400"/>
               </a:spcAft>
             </a:pPr>
             <a:r>
-              <a:rPr sz="2000" b="0" i="0">
-                <a:solidFill>
-                  <a:srgbClr val="333333"/>
-                </a:solidFill>
-                <a:latin typeface="Calibri"/>
-              </a:rPr>
-              <a:t>–   Los comentarios de Mermaid empiezan con dos signos de porcentaje, no se dibujan y tienen que ir en LINEA PROPIA: uno pegado al final de la linea de un nodo puede tumbar el renderizado.</a:t>
+              <a:rPr sz="1400" b="0" i="0">
+                <a:solidFill>
+                  <a:srgbClr val="FFFFFF"/>
+                </a:solidFill>
+                <a:latin typeface="Calibri"/>
+              </a:rPr>
+              <a:t>    web["App web&lt;br/&gt;React estatico - 443"]</a:t>
             </a:r>
           </a:p>
           <a:p>
             <a:pPr>
               <a:spcAft>
-                <a:spcPts val="800"/>
+                <a:spcPts val="400"/>
               </a:spcAft>
             </a:pPr>
             <a:r>
-              <a:rPr sz="2000" b="0" i="0">
-                <a:solidFill>
-                  <a:srgbClr val="333333"/>
-                </a:solidFill>
-                <a:latin typeface="Calibri"/>
-              </a:rPr>
-              <a:t>–   Y si un rotulo lleva parentesis, dos signos de puntuacion o comillas, hay que envolverlo en comillas dobles, porque sin ellas el analizador se detiene ahi.</a:t>
+              <a:rPr sz="1400" b="0" i="0">
+                <a:solidFill>
+                  <a:srgbClr val="FFFFFF"/>
+                </a:solidFill>
+                <a:latin typeface="Calibri"/>
+              </a:rPr>
+              <a:t>    edge["Edge / balanceador&lt;br/&gt;443 HTTPS"]</a:t>
             </a:r>
           </a:p>
           <a:p>
             <a:pPr>
               <a:spcAft>
-                <a:spcPts val="800"/>
+                <a:spcPts val="400"/>
               </a:spcAft>
             </a:pPr>
             <a:r>
-              <a:rPr sz="2000" b="0" i="0">
-                <a:solidFill>
-                  <a:srgbClr val="333333"/>
-                </a:solidFill>
-                <a:latin typeface="Calibri"/>
-              </a:rPr>
-              <a:t>–   El procedimiento que se proyecta en la demo es el que conviene repetir tres veces: dibujar el boceto donde sea, traducirlo a Mermaid (una IA lo hace bien</a:t>
+              <a:rPr sz="1400" b="0" i="0">
+                <a:solidFill>
+                  <a:srgbClr val="FFFFFF"/>
+                </a:solidFill>
+                <a:latin typeface="Calibri"/>
+              </a:rPr>
+              <a:t>  end</a:t>
             </a:r>
           </a:p>
           <a:p>
             <a:pPr>
               <a:spcAft>
-                <a:spcPts val="800"/>
+                <a:spcPts val="400"/>
               </a:spcAft>
             </a:pPr>
             <a:r>
-              <a:rPr sz="2000" b="0" i="0">
-                <a:solidFill>
-                  <a:srgbClr val="333333"/>
-                </a:solidFill>
-                <a:latin typeface="Calibri"/>
-              </a:rPr>
-              <a:t>–   Y ahi hay que decir la frase exacta: la IA acierta la sintaxis, no el modelo), pegarlo en un visor Mermaid y MIRARLO RENDERIZADO.</a:t>
-            </a:r>
-          </a:p>
-        </p:txBody>
-      </p:sp>
-      <p:sp>
-        <p:nvSpPr>
-          <p:cNvPr id="6" name="TextBox 5"/>
+              <a:rPr sz="1400" b="0" i="0">
+                <a:solidFill>
+                  <a:srgbClr val="FFFFFF"/>
+                </a:solidFill>
+                <a:latin typeface="Calibri"/>
+              </a:rPr>
+              <a:t>  subgraph privada["Zona privada - solo desde el edge"]</a:t>
+            </a:r>
+          </a:p>
+          <a:p>
+            <a:pPr>
+              <a:spcAft>
+                <a:spcPts val="400"/>
+              </a:spcAft>
+            </a:pPr>
+            <a:r>
+              <a:rPr sz="1400" b="0" i="0">
+                <a:solidFill>
+                  <a:srgbClr val="FFFFFF"/>
+                </a:solidFill>
+                <a:latin typeface="Calibri"/>
+              </a:rPr>
+              <a:t>    api["API de la app&lt;br/&gt;8080 HTTP"]</a:t>
+            </a:r>
+          </a:p>
+          <a:p>
+            <a:pPr>
+              <a:spcAft>
+                <a:spcPts val="400"/>
+              </a:spcAft>
+            </a:pPr>
+            <a:r>
+              <a:rPr sz="1400" b="0" i="0">
+                <a:solidFill>
+                  <a:srgbClr val="FFFFFF"/>
+                </a:solidFill>
+                <a:latin typeface="Calibri"/>
+              </a:rPr>
+              <a:t>  end</a:t>
+            </a:r>
+          </a:p>
+          <a:p>
+            <a:pPr>
+              <a:spcAft>
+                <a:spcPts val="400"/>
+              </a:spcAft>
+            </a:pPr>
+            <a:r>
+              <a:rPr sz="1400" b="0" i="0">
+                <a:solidFill>
+                  <a:srgbClr val="FFFFFF"/>
+                </a:solidFill>
+                <a:latin typeface="Calibri"/>
+              </a:rPr>
+              <a:t>  subgraph datos["Zona de datos - sin internet: la BD va AQUI"]</a:t>
+            </a:r>
+          </a:p>
+          <a:p>
+            <a:pPr>
+              <a:spcAft>
+                <a:spcPts val="400"/>
+              </a:spcAft>
+            </a:pPr>
+            <a:r>
+              <a:rPr sz="1400" b="0" i="0">
+                <a:solidFill>
+                  <a:srgbClr val="FFFFFF"/>
+                </a:solidFill>
+                <a:latin typeface="Calibri"/>
+              </a:rPr>
+              <a:t>    db[("Base de datos&lt;br/&gt;5432 TCP")]</a:t>
+            </a:r>
+          </a:p>
+          <a:p>
+            <a:pPr>
+              <a:spcAft>
+                <a:spcPts val="400"/>
+              </a:spcAft>
+            </a:pPr>
+            <a:r>
+              <a:rPr sz="1400" b="0" i="0">
+                <a:solidFill>
+                  <a:srgbClr val="FFFFFF"/>
+                </a:solidFill>
+                <a:latin typeface="Calibri"/>
+              </a:rPr>
+              <a:t>  end</a:t>
+            </a:r>
+          </a:p>
+          <a:p>
+            <a:pPr>
+              <a:spcAft>
+                <a:spcPts val="400"/>
+              </a:spcAft>
+            </a:pPr>
+            <a:r>
+              <a:rPr sz="1400" b="0" i="0">
+                <a:solidFill>
+                  <a:srgbClr val="FFFFFF"/>
+                </a:solidFill>
+                <a:latin typeface="Calibri"/>
+              </a:rPr>
+              <a:t>  web --&gt;|"HTTPS 443"| edge</a:t>
+            </a:r>
+          </a:p>
+          <a:p>
+            <a:pPr>
+              <a:spcAft>
+                <a:spcPts val="400"/>
+              </a:spcAft>
+            </a:pPr>
+            <a:r>
+              <a:rPr sz="1400" b="0" i="0">
+                <a:solidFill>
+                  <a:srgbClr val="FFFFFF"/>
+                </a:solidFill>
+                <a:latin typeface="Calibri"/>
+              </a:rPr>
+              <a:t>  edge --&gt;|"HTTP 8080"| api</a:t>
+            </a:r>
+          </a:p>
+          <a:p>
+            <a:pPr>
+              <a:spcAft>
+                <a:spcPts val="400"/>
+              </a:spcAft>
+            </a:pPr>
+            <a:r>
+              <a:rPr sz="1400" b="0" i="0">
+                <a:solidFill>
+                  <a:srgbClr val="FFFFFF"/>
+                </a:solidFill>
+                <a:latin typeface="Calibri"/>
+              </a:rPr>
+              <a:t>  api --&gt;|"TCP 5432"| db</a:t>
+            </a:r>
+          </a:p>
+          <a:p>
+            <a:pPr>
+              <a:spcAft>
+                <a:spcPts val="400"/>
+              </a:spcAft>
+            </a:pPr>
+            <a:r>
+              <a:rPr sz="1400" b="0" i="0">
+                <a:solidFill>
+                  <a:srgbClr val="FFFFFF"/>
+                </a:solidFill>
+                <a:latin typeface="Calibri"/>
+              </a:rPr>
+              <a:t>  api --&gt;|"HTTPS 443 - frontera de confianza"| pagos["Pasarela de pagos externa"]</a:t>
+            </a:r>
+          </a:p>
+        </p:txBody>
+      </p:sp>
+      <p:sp>
+        <p:nvSpPr>
+          <p:cNvPr id="9" name="TextBox 8"/>
+          <p:cNvSpPr txBox="1"/>
+          <p:nvPr/>
+        </p:nvSpPr>
+        <p:spPr>
+          <a:xfrm>
+            <a:off x="457200" y="6080760"/>
+            <a:ext cx="11277295" cy="320040"/>
+          </a:xfrm>
+          <a:prstGeom prst="rect">
+            <a:avLst/>
+          </a:prstGeom>
+          <a:noFill/>
+        </p:spPr>
+        <p:txBody>
+          <a:bodyPr wrap="square">
+            <a:spAutoFit/>
+          </a:bodyPr>
+          <a:lstStyle/>
+          <a:p>
+            <a:pPr algn="ctr"/>
+            <a:r>
+              <a:rPr sz="1200" b="0" i="1">
+                <a:solidFill>
+                  <a:srgbClr val="666666"/>
+                </a:solidFill>
+                <a:latin typeface="Calibri"/>
+              </a:rPr>
+              <a:t>Una «subgraph» por zona, el puerto en cada caja y la base con «[( )]». La flecha al externo ES la frontera de confianza. Nombres: los mismos del C4 Containers de la Clase 4.</a:t>
+            </a:r>
+          </a:p>
+        </p:txBody>
+      </p:sp>
+      <p:sp>
+        <p:nvSpPr>
+          <p:cNvPr id="10" name="TextBox 9"/>
           <p:cNvSpPr txBox="1"/>
           <p:nvPr/>
         </p:nvSpPr>
@@ -9044,7 +10499,7 @@
         <p:spPr>
           <a:xfrm>
             <a:off x="0" y="0"/>
-            <a:ext cx="12191695" cy="960120"/>
+            <a:ext cx="12191695" cy="1170432"/>
           </a:xfrm>
           <a:prstGeom prst="rect">
             <a:avLst/>
@@ -9086,7 +10541,7 @@
         </p:nvSpPr>
         <p:spPr>
           <a:xfrm>
-            <a:off x="0" y="960120"/>
+            <a:off x="0" y="1170432"/>
             <a:ext cx="12191695" cy="41148"/>
           </a:xfrm>
           <a:prstGeom prst="rect">
@@ -9130,7 +10585,7 @@
         <p:spPr>
           <a:xfrm>
             <a:off x="457200" y="164592"/>
-            <a:ext cx="11277295" cy="502920"/>
+            <a:ext cx="11277295" cy="384048"/>
           </a:xfrm>
           <a:prstGeom prst="rect">
             <a:avLst/>
@@ -9150,7 +10605,7 @@
                 </a:solidFill>
                 <a:latin typeface="Calibri"/>
               </a:rPr>
-              <a:t>Preguntas frecuentes del grupo</a:t>
+              <a:t>Del boceto al código Mermaid</a:t>
             </a:r>
           </a:p>
         </p:txBody>
@@ -9163,8 +10618,8 @@
         </p:nvSpPr>
         <p:spPr>
           <a:xfrm>
-            <a:off x="457200" y="1170432"/>
-            <a:ext cx="11277295" cy="5230368"/>
+            <a:off x="457200" y="566928"/>
+            <a:ext cx="11277295" cy="411480"/>
           </a:xfrm>
           <a:prstGeom prst="rect">
             <a:avLst/>
@@ -9177,90 +10632,705 @@
           </a:bodyPr>
           <a:lstStyle/>
           <a:p>
+            <a:r>
+              <a:rPr sz="1400" b="0" i="0">
+                <a:solidFill>
+                  <a:srgbClr val="B8D8EE"/>
+                </a:solidFill>
+                <a:latin typeface="Calibri"/>
+              </a:rPr>
+              <a:t>El diagrama se escribe como código: se versiona, se compara y se corrige</a:t>
+            </a:r>
+          </a:p>
+        </p:txBody>
+      </p:sp>
+      <p:sp>
+        <p:nvSpPr>
+          <p:cNvPr id="6" name="Rounded Rectangle 5"/>
+          <p:cNvSpPr/>
+          <p:nvPr/>
+        </p:nvSpPr>
+        <p:spPr>
+          <a:xfrm>
+            <a:off x="457200" y="1659636"/>
+            <a:ext cx="11277295" cy="1051560"/>
+          </a:xfrm>
+          <a:prstGeom prst="roundRect">
+            <a:avLst>
+              <a:gd name="adj" fmla="val 12000"/>
+            </a:avLst>
+          </a:prstGeom>
+          <a:solidFill>
+            <a:srgbClr val="F2F2F2"/>
+          </a:solidFill>
+          <a:ln>
+            <a:noFill/>
+          </a:ln>
+        </p:spPr>
+        <p:style>
+          <a:lnRef idx="1">
+            <a:schemeClr val="accent1"/>
+          </a:lnRef>
+          <a:fillRef idx="3">
+            <a:schemeClr val="accent1"/>
+          </a:fillRef>
+          <a:effectRef idx="2">
+            <a:schemeClr val="accent1"/>
+          </a:effectRef>
+          <a:fontRef idx="minor">
+            <a:schemeClr val="lt1"/>
+          </a:fontRef>
+        </p:style>
+        <p:txBody>
+          <a:bodyPr rtlCol="0" anchor="ctr"/>
+          <a:lstStyle/>
+          <a:p>
+            <a:pPr algn="ctr"/>
+          </a:p>
+        </p:txBody>
+      </p:sp>
+      <p:sp>
+        <p:nvSpPr>
+          <p:cNvPr id="7" name="Rounded Rectangle 6"/>
+          <p:cNvSpPr/>
+          <p:nvPr/>
+        </p:nvSpPr>
+        <p:spPr>
+          <a:xfrm>
+            <a:off x="594360" y="1965960"/>
+            <a:ext cx="438912" cy="438912"/>
+          </a:xfrm>
+          <a:prstGeom prst="roundRect">
+            <a:avLst>
+              <a:gd name="adj" fmla="val 12000"/>
+            </a:avLst>
+          </a:prstGeom>
+          <a:solidFill>
+            <a:srgbClr val="095292"/>
+          </a:solidFill>
+          <a:ln>
+            <a:noFill/>
+          </a:ln>
+        </p:spPr>
+        <p:style>
+          <a:lnRef idx="1">
+            <a:schemeClr val="accent1"/>
+          </a:lnRef>
+          <a:fillRef idx="3">
+            <a:schemeClr val="accent1"/>
+          </a:fillRef>
+          <a:effectRef idx="2">
+            <a:schemeClr val="accent1"/>
+          </a:effectRef>
+          <a:fontRef idx="minor">
+            <a:schemeClr val="lt1"/>
+          </a:fontRef>
+        </p:style>
+        <p:txBody>
+          <a:bodyPr rtlCol="0" anchor="ctr"/>
+          <a:lstStyle/>
+          <a:p>
+            <a:pPr algn="ctr"/>
+          </a:p>
+        </p:txBody>
+      </p:sp>
+      <p:sp>
+        <p:nvSpPr>
+          <p:cNvPr id="8" name="TextBox 7"/>
+          <p:cNvSpPr txBox="1"/>
+          <p:nvPr/>
+        </p:nvSpPr>
+        <p:spPr>
+          <a:xfrm>
+            <a:off x="594360" y="1965960"/>
+            <a:ext cx="438912" cy="438912"/>
+          </a:xfrm>
+          <a:prstGeom prst="rect">
+            <a:avLst/>
+          </a:prstGeom>
+          <a:noFill/>
+        </p:spPr>
+        <p:txBody>
+          <a:bodyPr wrap="square" anchor="ctr"/>
+          <a:lstStyle/>
+          <a:p>
+            <a:pPr algn="ctr"/>
+            <a:r>
+              <a:rPr sz="1600" b="1" i="0">
+                <a:solidFill>
+                  <a:srgbClr val="FFFFFF"/>
+                </a:solidFill>
+                <a:latin typeface="Calibri"/>
+              </a:rPr>
+              <a:t>1</a:t>
+            </a:r>
+          </a:p>
+        </p:txBody>
+      </p:sp>
+      <p:sp>
+        <p:nvSpPr>
+          <p:cNvPr id="9" name="TextBox 8"/>
+          <p:cNvSpPr txBox="1"/>
+          <p:nvPr/>
+        </p:nvSpPr>
+        <p:spPr>
+          <a:xfrm>
+            <a:off x="1188720" y="1751076"/>
+            <a:ext cx="10271455" cy="886968"/>
+          </a:xfrm>
+          <a:prstGeom prst="rect">
+            <a:avLst/>
+          </a:prstGeom>
+          <a:noFill/>
+        </p:spPr>
+        <p:txBody>
+          <a:bodyPr wrap="square" anchor="ctr"/>
+          <a:lstStyle/>
+          <a:p>
+            <a:r>
+              <a:rPr sz="1500" b="1" i="0">
+                <a:solidFill>
+                  <a:srgbClr val="095292"/>
+                </a:solidFill>
+                <a:latin typeface="Calibri"/>
+              </a:rPr>
+              <a:t>Diseña visual</a:t>
+            </a:r>
+          </a:p>
+          <a:p>
             <a:pPr>
-              <a:spcAft>
-                <a:spcPts val="800"/>
-              </a:spcAft>
+              <a:spcBef>
+                <a:spcPts val="200"/>
+              </a:spcBef>
             </a:pPr>
             <a:r>
-              <a:rPr sz="2000" b="0" i="0">
+              <a:rPr sz="1300" b="0" i="0">
                 <a:solidFill>
                   <a:srgbClr val="333333"/>
                 </a:solidFill>
                 <a:latin typeface="Calibri"/>
               </a:rPr>
-              <a:t>–   «Si la base de datos es privada, como se conecta la API?» Privado significa inalcanzable desde internet</a:t>
+              <a:t>Dibuja el diagrama como quieras en Excalidraw o draw.io: es más rápido arrastrar cajas que escribir código, y ahí es donde se piensa el modelo.</a:t>
+            </a:r>
+          </a:p>
+        </p:txBody>
+      </p:sp>
+      <p:sp>
+        <p:nvSpPr>
+          <p:cNvPr id="10" name="Rounded Rectangle 9"/>
+          <p:cNvSpPr/>
+          <p:nvPr/>
+        </p:nvSpPr>
+        <p:spPr>
+          <a:xfrm>
+            <a:off x="457200" y="2802636"/>
+            <a:ext cx="11277295" cy="1051560"/>
+          </a:xfrm>
+          <a:prstGeom prst="roundRect">
+            <a:avLst>
+              <a:gd name="adj" fmla="val 12000"/>
+            </a:avLst>
+          </a:prstGeom>
+          <a:solidFill>
+            <a:srgbClr val="E8F4FA"/>
+          </a:solidFill>
+          <a:ln>
+            <a:noFill/>
+          </a:ln>
+        </p:spPr>
+        <p:style>
+          <a:lnRef idx="1">
+            <a:schemeClr val="accent1"/>
+          </a:lnRef>
+          <a:fillRef idx="3">
+            <a:schemeClr val="accent1"/>
+          </a:fillRef>
+          <a:effectRef idx="2">
+            <a:schemeClr val="accent1"/>
+          </a:effectRef>
+          <a:fontRef idx="minor">
+            <a:schemeClr val="lt1"/>
+          </a:fontRef>
+        </p:style>
+        <p:txBody>
+          <a:bodyPr rtlCol="0" anchor="ctr"/>
+          <a:lstStyle/>
+          <a:p>
+            <a:pPr algn="ctr"/>
+          </a:p>
+        </p:txBody>
+      </p:sp>
+      <p:sp>
+        <p:nvSpPr>
+          <p:cNvPr id="11" name="Rounded Rectangle 10"/>
+          <p:cNvSpPr/>
+          <p:nvPr/>
+        </p:nvSpPr>
+        <p:spPr>
+          <a:xfrm>
+            <a:off x="594360" y="3108960"/>
+            <a:ext cx="438912" cy="438912"/>
+          </a:xfrm>
+          <a:prstGeom prst="roundRect">
+            <a:avLst>
+              <a:gd name="adj" fmla="val 12000"/>
+            </a:avLst>
+          </a:prstGeom>
+          <a:solidFill>
+            <a:srgbClr val="095292"/>
+          </a:solidFill>
+          <a:ln>
+            <a:noFill/>
+          </a:ln>
+        </p:spPr>
+        <p:style>
+          <a:lnRef idx="1">
+            <a:schemeClr val="accent1"/>
+          </a:lnRef>
+          <a:fillRef idx="3">
+            <a:schemeClr val="accent1"/>
+          </a:fillRef>
+          <a:effectRef idx="2">
+            <a:schemeClr val="accent1"/>
+          </a:effectRef>
+          <a:fontRef idx="minor">
+            <a:schemeClr val="lt1"/>
+          </a:fontRef>
+        </p:style>
+        <p:txBody>
+          <a:bodyPr rtlCol="0" anchor="ctr"/>
+          <a:lstStyle/>
+          <a:p>
+            <a:pPr algn="ctr"/>
+          </a:p>
+        </p:txBody>
+      </p:sp>
+      <p:sp>
+        <p:nvSpPr>
+          <p:cNvPr id="12" name="TextBox 11"/>
+          <p:cNvSpPr txBox="1"/>
+          <p:nvPr/>
+        </p:nvSpPr>
+        <p:spPr>
+          <a:xfrm>
+            <a:off x="594360" y="3108960"/>
+            <a:ext cx="438912" cy="438912"/>
+          </a:xfrm>
+          <a:prstGeom prst="rect">
+            <a:avLst/>
+          </a:prstGeom>
+          <a:noFill/>
+        </p:spPr>
+        <p:txBody>
+          <a:bodyPr wrap="square" anchor="ctr"/>
+          <a:lstStyle/>
+          <a:p>
+            <a:pPr algn="ctr"/>
+            <a:r>
+              <a:rPr sz="1600" b="1" i="0">
+                <a:solidFill>
+                  <a:srgbClr val="FFFFFF"/>
+                </a:solidFill>
+                <a:latin typeface="Calibri"/>
+              </a:rPr>
+              <a:t>2</a:t>
+            </a:r>
+          </a:p>
+        </p:txBody>
+      </p:sp>
+      <p:sp>
+        <p:nvSpPr>
+          <p:cNvPr id="13" name="TextBox 12"/>
+          <p:cNvSpPr txBox="1"/>
+          <p:nvPr/>
+        </p:nvSpPr>
+        <p:spPr>
+          <a:xfrm>
+            <a:off x="1188720" y="2894076"/>
+            <a:ext cx="10271455" cy="886968"/>
+          </a:xfrm>
+          <a:prstGeom prst="rect">
+            <a:avLst/>
+          </a:prstGeom>
+          <a:noFill/>
+        </p:spPr>
+        <p:txBody>
+          <a:bodyPr wrap="square" anchor="ctr"/>
+          <a:lstStyle/>
+          <a:p>
+            <a:r>
+              <a:rPr sz="1500" b="1" i="0">
+                <a:solidFill>
+                  <a:srgbClr val="095292"/>
+                </a:solidFill>
+                <a:latin typeface="Calibri"/>
+              </a:rPr>
+              <a:t>Traduce con IA</a:t>
             </a:r>
           </a:p>
           <a:p>
             <a:pPr>
-              <a:spcAft>
-                <a:spcPts val="800"/>
-              </a:spcAft>
+              <a:spcBef>
+                <a:spcPts val="200"/>
+              </a:spcBef>
             </a:pPr>
             <a:r>
-              <a:rPr sz="2000" b="0" i="0">
+              <a:rPr sz="1300" b="0" i="0">
                 <a:solidFill>
                   <a:srgbClr val="333333"/>
                 </a:solidFill>
                 <a:latin typeface="Calibri"/>
               </a:rPr>
-              <a:t>–   No inalcanzable en absoluto: la API esta en la misma red y llega por el nombre interno y el puerto del motor; quien no puede llegar es el usuario final ni un atacante externo.</a:t>
+              <a:t>Describe tu boceto a una IA y pídele el código Mermaid usando flowchart. Revisa el resultado: la IA acierta la sintaxis, no tu modelo.</a:t>
+            </a:r>
+          </a:p>
+        </p:txBody>
+      </p:sp>
+      <p:sp>
+        <p:nvSpPr>
+          <p:cNvPr id="14" name="Rounded Rectangle 13"/>
+          <p:cNvSpPr/>
+          <p:nvPr/>
+        </p:nvSpPr>
+        <p:spPr>
+          <a:xfrm>
+            <a:off x="457200" y="3945636"/>
+            <a:ext cx="11277295" cy="1051560"/>
+          </a:xfrm>
+          <a:prstGeom prst="roundRect">
+            <a:avLst>
+              <a:gd name="adj" fmla="val 12000"/>
+            </a:avLst>
+          </a:prstGeom>
+          <a:solidFill>
+            <a:srgbClr val="F2F2F2"/>
+          </a:solidFill>
+          <a:ln>
+            <a:noFill/>
+          </a:ln>
+        </p:spPr>
+        <p:style>
+          <a:lnRef idx="1">
+            <a:schemeClr val="accent1"/>
+          </a:lnRef>
+          <a:fillRef idx="3">
+            <a:schemeClr val="accent1"/>
+          </a:fillRef>
+          <a:effectRef idx="2">
+            <a:schemeClr val="accent1"/>
+          </a:effectRef>
+          <a:fontRef idx="minor">
+            <a:schemeClr val="lt1"/>
+          </a:fontRef>
+        </p:style>
+        <p:txBody>
+          <a:bodyPr rtlCol="0" anchor="ctr"/>
+          <a:lstStyle/>
+          <a:p>
+            <a:pPr algn="ctr"/>
+          </a:p>
+        </p:txBody>
+      </p:sp>
+      <p:sp>
+        <p:nvSpPr>
+          <p:cNvPr id="15" name="Rounded Rectangle 14"/>
+          <p:cNvSpPr/>
+          <p:nvPr/>
+        </p:nvSpPr>
+        <p:spPr>
+          <a:xfrm>
+            <a:off x="594360" y="4251960"/>
+            <a:ext cx="438912" cy="438912"/>
+          </a:xfrm>
+          <a:prstGeom prst="roundRect">
+            <a:avLst>
+              <a:gd name="adj" fmla="val 12000"/>
+            </a:avLst>
+          </a:prstGeom>
+          <a:solidFill>
+            <a:srgbClr val="095292"/>
+          </a:solidFill>
+          <a:ln>
+            <a:noFill/>
+          </a:ln>
+        </p:spPr>
+        <p:style>
+          <a:lnRef idx="1">
+            <a:schemeClr val="accent1"/>
+          </a:lnRef>
+          <a:fillRef idx="3">
+            <a:schemeClr val="accent1"/>
+          </a:fillRef>
+          <a:effectRef idx="2">
+            <a:schemeClr val="accent1"/>
+          </a:effectRef>
+          <a:fontRef idx="minor">
+            <a:schemeClr val="lt1"/>
+          </a:fontRef>
+        </p:style>
+        <p:txBody>
+          <a:bodyPr rtlCol="0" anchor="ctr"/>
+          <a:lstStyle/>
+          <a:p>
+            <a:pPr algn="ctr"/>
+          </a:p>
+        </p:txBody>
+      </p:sp>
+      <p:sp>
+        <p:nvSpPr>
+          <p:cNvPr id="16" name="TextBox 15"/>
+          <p:cNvSpPr txBox="1"/>
+          <p:nvPr/>
+        </p:nvSpPr>
+        <p:spPr>
+          <a:xfrm>
+            <a:off x="594360" y="4251960"/>
+            <a:ext cx="438912" cy="438912"/>
+          </a:xfrm>
+          <a:prstGeom prst="rect">
+            <a:avLst/>
+          </a:prstGeom>
+          <a:noFill/>
+        </p:spPr>
+        <p:txBody>
+          <a:bodyPr wrap="square" anchor="ctr"/>
+          <a:lstStyle/>
+          <a:p>
+            <a:pPr algn="ctr"/>
+            <a:r>
+              <a:rPr sz="1600" b="1" i="0">
+                <a:solidFill>
+                  <a:srgbClr val="FFFFFF"/>
+                </a:solidFill>
+                <a:latin typeface="Calibri"/>
+              </a:rPr>
+              <a:t>3</a:t>
+            </a:r>
+          </a:p>
+        </p:txBody>
+      </p:sp>
+      <p:sp>
+        <p:nvSpPr>
+          <p:cNvPr id="17" name="TextBox 16"/>
+          <p:cNvSpPr txBox="1"/>
+          <p:nvPr/>
+        </p:nvSpPr>
+        <p:spPr>
+          <a:xfrm>
+            <a:off x="1188720" y="4037076"/>
+            <a:ext cx="10271455" cy="886968"/>
+          </a:xfrm>
+          <a:prstGeom prst="rect">
+            <a:avLst/>
+          </a:prstGeom>
+          <a:noFill/>
+        </p:spPr>
+        <p:txBody>
+          <a:bodyPr wrap="square" anchor="ctr"/>
+          <a:lstStyle/>
+          <a:p>
+            <a:r>
+              <a:rPr sz="1500" b="1" i="0">
+                <a:solidFill>
+                  <a:srgbClr val="095292"/>
+                </a:solidFill>
+                <a:latin typeface="Calibri"/>
+              </a:rPr>
+              <a:t>Renderiza en un visor</a:t>
             </a:r>
           </a:p>
           <a:p>
             <a:pPr>
-              <a:spcAft>
-                <a:spcPts val="800"/>
-              </a:spcAft>
+              <a:spcBef>
+                <a:spcPts val="200"/>
+              </a:spcBef>
             </a:pPr>
             <a:r>
-              <a:rPr sz="2000" b="0" i="0">
+              <a:rPr sz="1300" b="0" i="0">
                 <a:solidFill>
                   <a:srgbClr val="333333"/>
                 </a:solidFill>
                 <a:latin typeface="Calibri"/>
               </a:rPr>
-              <a:t>–   «Esto no esta mal por no ser una VPC real de un proveedor?» Lo que se evalua es el razonamiento sobre zonas, puertos y ubicacion de los datos, no la sintaxis de una marca; el curso usa herramientas gratis en navegador y no pide cuenta de pago ni tarjeta.</a:t>
+              <a:t>Pega el código en un visor Mermaid (mermaid.live o la vista previa de tu editor) y míralo dibujado. Si no renderiza, corrige ahí: un end faltante o un rótulo sin comillas.</a:t>
+            </a:r>
+          </a:p>
+        </p:txBody>
+      </p:sp>
+      <p:sp>
+        <p:nvSpPr>
+          <p:cNvPr id="18" name="Rounded Rectangle 17"/>
+          <p:cNvSpPr/>
+          <p:nvPr/>
+        </p:nvSpPr>
+        <p:spPr>
+          <a:xfrm>
+            <a:off x="457200" y="5088636"/>
+            <a:ext cx="11277295" cy="1051560"/>
+          </a:xfrm>
+          <a:prstGeom prst="roundRect">
+            <a:avLst>
+              <a:gd name="adj" fmla="val 12000"/>
+            </a:avLst>
+          </a:prstGeom>
+          <a:solidFill>
+            <a:srgbClr val="E8F4FA"/>
+          </a:solidFill>
+          <a:ln>
+            <a:noFill/>
+          </a:ln>
+        </p:spPr>
+        <p:style>
+          <a:lnRef idx="1">
+            <a:schemeClr val="accent1"/>
+          </a:lnRef>
+          <a:fillRef idx="3">
+            <a:schemeClr val="accent1"/>
+          </a:fillRef>
+          <a:effectRef idx="2">
+            <a:schemeClr val="accent1"/>
+          </a:effectRef>
+          <a:fontRef idx="minor">
+            <a:schemeClr val="lt1"/>
+          </a:fontRef>
+        </p:style>
+        <p:txBody>
+          <a:bodyPr rtlCol="0" anchor="ctr"/>
+          <a:lstStyle/>
+          <a:p>
+            <a:pPr algn="ctr"/>
+          </a:p>
+        </p:txBody>
+      </p:sp>
+      <p:sp>
+        <p:nvSpPr>
+          <p:cNvPr id="19" name="Rounded Rectangle 18"/>
+          <p:cNvSpPr/>
+          <p:nvPr/>
+        </p:nvSpPr>
+        <p:spPr>
+          <a:xfrm>
+            <a:off x="594360" y="5394960"/>
+            <a:ext cx="438912" cy="438912"/>
+          </a:xfrm>
+          <a:prstGeom prst="roundRect">
+            <a:avLst>
+              <a:gd name="adj" fmla="val 12000"/>
+            </a:avLst>
+          </a:prstGeom>
+          <a:solidFill>
+            <a:srgbClr val="095292"/>
+          </a:solidFill>
+          <a:ln>
+            <a:noFill/>
+          </a:ln>
+        </p:spPr>
+        <p:style>
+          <a:lnRef idx="1">
+            <a:schemeClr val="accent1"/>
+          </a:lnRef>
+          <a:fillRef idx="3">
+            <a:schemeClr val="accent1"/>
+          </a:fillRef>
+          <a:effectRef idx="2">
+            <a:schemeClr val="accent1"/>
+          </a:effectRef>
+          <a:fontRef idx="minor">
+            <a:schemeClr val="lt1"/>
+          </a:fontRef>
+        </p:style>
+        <p:txBody>
+          <a:bodyPr rtlCol="0" anchor="ctr"/>
+          <a:lstStyle/>
+          <a:p>
+            <a:pPr algn="ctr"/>
+          </a:p>
+        </p:txBody>
+      </p:sp>
+      <p:sp>
+        <p:nvSpPr>
+          <p:cNvPr id="20" name="TextBox 19"/>
+          <p:cNvSpPr txBox="1"/>
+          <p:nvPr/>
+        </p:nvSpPr>
+        <p:spPr>
+          <a:xfrm>
+            <a:off x="594360" y="5394960"/>
+            <a:ext cx="438912" cy="438912"/>
+          </a:xfrm>
+          <a:prstGeom prst="rect">
+            <a:avLst/>
+          </a:prstGeom>
+          <a:noFill/>
+        </p:spPr>
+        <p:txBody>
+          <a:bodyPr wrap="square" anchor="ctr"/>
+          <a:lstStyle/>
+          <a:p>
+            <a:pPr algn="ctr"/>
+            <a:r>
+              <a:rPr sz="1600" b="1" i="0">
+                <a:solidFill>
+                  <a:srgbClr val="FFFFFF"/>
+                </a:solidFill>
+                <a:latin typeface="Calibri"/>
+              </a:rPr>
+              <a:t>4</a:t>
+            </a:r>
+          </a:p>
+        </p:txBody>
+      </p:sp>
+      <p:sp>
+        <p:nvSpPr>
+          <p:cNvPr id="21" name="TextBox 20"/>
+          <p:cNvSpPr txBox="1"/>
+          <p:nvPr/>
+        </p:nvSpPr>
+        <p:spPr>
+          <a:xfrm>
+            <a:off x="1188720" y="5180076"/>
+            <a:ext cx="10271455" cy="886968"/>
+          </a:xfrm>
+          <a:prstGeom prst="rect">
+            <a:avLst/>
+          </a:prstGeom>
+          <a:noFill/>
+        </p:spPr>
+        <p:txBody>
+          <a:bodyPr wrap="square" anchor="ctr"/>
+          <a:lstStyle/>
+          <a:p>
+            <a:r>
+              <a:rPr sz="1500" b="1" i="0">
+                <a:solidFill>
+                  <a:srgbClr val="095292"/>
+                </a:solidFill>
+                <a:latin typeface="Calibri"/>
+              </a:rPr>
+              <a:t>Guarda código e imagen</a:t>
             </a:r>
           </a:p>
           <a:p>
             <a:pPr>
-              <a:spcAft>
-                <a:spcPts val="800"/>
-              </a:spcAft>
+              <a:spcBef>
+                <a:spcPts val="200"/>
+              </a:spcBef>
             </a:pPr>
             <a:r>
-              <a:rPr sz="2000" b="0" i="0">
+              <a:rPr sz="1300" b="0" i="0">
                 <a:solidFill>
                   <a:srgbClr val="333333"/>
                 </a:solidFill>
                 <a:latin typeface="Calibri"/>
               </a:rPr>
-              <a:t>–   Un sistema de dos cajas se dibuja con cliente y edge en la publica, la aplicacion en la privada y la base en la de datos</a:t>
-            </a:r>
-          </a:p>
-          <a:p>
-            <a:pPr>
-              <a:spcAft>
-                <a:spcPts val="800"/>
-              </a:spcAft>
-            </a:pPr>
-            <a:r>
-              <a:rPr sz="2000" b="0" i="0">
-                <a:solidFill>
-                  <a:srgbClr val="333333"/>
-                </a:solidFill>
-                <a:latin typeface="Calibri"/>
-              </a:rPr>
-              <a:t>–   Si de verdad no hay balanceador, el punto de entrada es el servidor web o el proxy que atiende el 443, y ese es el habitante de la zona publica.</a:t>
-            </a:r>
-          </a:p>
-        </p:txBody>
-      </p:sp>
-      <p:sp>
-        <p:nvSpPr>
-          <p:cNvPr id="6" name="TextBox 5"/>
+              <a:t>El código es la fuente del diagrama: guárdalo con tu proyecto junto con el PNG exportado.</a:t>
+            </a:r>
+          </a:p>
+        </p:txBody>
+      </p:sp>
+      <p:sp>
+        <p:nvSpPr>
+          <p:cNvPr id="22" name="TextBox 21"/>
           <p:cNvSpPr txBox="1"/>
           <p:nvPr/>
         </p:nvSpPr>
@@ -9328,1491 +11398,10 @@
         <p:spPr>
           <a:xfrm>
             <a:off x="0" y="0"/>
-            <a:ext cx="12191695" cy="960120"/>
-          </a:xfrm>
-          <a:prstGeom prst="rect">
-            <a:avLst/>
-          </a:prstGeom>
-          <a:solidFill>
-            <a:srgbClr val="095292"/>
-          </a:solidFill>
-          <a:ln>
-            <a:noFill/>
-          </a:ln>
-        </p:spPr>
-        <p:style>
-          <a:lnRef idx="1">
-            <a:schemeClr val="accent1"/>
-          </a:lnRef>
-          <a:fillRef idx="3">
-            <a:schemeClr val="accent1"/>
-          </a:fillRef>
-          <a:effectRef idx="2">
-            <a:schemeClr val="accent1"/>
-          </a:effectRef>
-          <a:fontRef idx="minor">
-            <a:schemeClr val="lt1"/>
-          </a:fontRef>
-        </p:style>
-        <p:txBody>
-          <a:bodyPr rtlCol="0" anchor="ctr"/>
-          <a:lstStyle/>
-          <a:p>
-            <a:pPr algn="ctr"/>
-          </a:p>
-        </p:txBody>
-      </p:sp>
-      <p:sp>
-        <p:nvSpPr>
-          <p:cNvPr id="3" name="Rectangle 2"/>
-          <p:cNvSpPr/>
-          <p:nvPr/>
-        </p:nvSpPr>
-        <p:spPr>
-          <a:xfrm>
-            <a:off x="0" y="960120"/>
-            <a:ext cx="12191695" cy="41148"/>
-          </a:xfrm>
-          <a:prstGeom prst="rect">
-            <a:avLst/>
-          </a:prstGeom>
-          <a:solidFill>
-            <a:srgbClr val="FFD000"/>
-          </a:solidFill>
-          <a:ln>
-            <a:noFill/>
-          </a:ln>
-        </p:spPr>
-        <p:style>
-          <a:lnRef idx="1">
-            <a:schemeClr val="accent1"/>
-          </a:lnRef>
-          <a:fillRef idx="3">
-            <a:schemeClr val="accent1"/>
-          </a:fillRef>
-          <a:effectRef idx="2">
-            <a:schemeClr val="accent1"/>
-          </a:effectRef>
-          <a:fontRef idx="minor">
-            <a:schemeClr val="lt1"/>
-          </a:fontRef>
-        </p:style>
-        <p:txBody>
-          <a:bodyPr rtlCol="0" anchor="ctr"/>
-          <a:lstStyle/>
-          <a:p>
-            <a:pPr algn="ctr"/>
-          </a:p>
-        </p:txBody>
-      </p:sp>
-      <p:sp>
-        <p:nvSpPr>
-          <p:cNvPr id="4" name="TextBox 3"/>
-          <p:cNvSpPr txBox="1"/>
-          <p:nvPr/>
-        </p:nvSpPr>
-        <p:spPr>
-          <a:xfrm>
-            <a:off x="457200" y="164592"/>
-            <a:ext cx="11277295" cy="502920"/>
-          </a:xfrm>
-          <a:prstGeom prst="rect">
-            <a:avLst/>
-          </a:prstGeom>
-          <a:noFill/>
-        </p:spPr>
-        <p:txBody>
-          <a:bodyPr wrap="square">
-            <a:spAutoFit/>
-          </a:bodyPr>
-          <a:lstStyle/>
-          <a:p>
-            <a:r>
-              <a:rPr sz="2600" b="1" i="0">
-                <a:solidFill>
-                  <a:srgbClr val="FFFFFF"/>
-                </a:solidFill>
-                <a:latin typeface="Calibri"/>
-              </a:rPr>
-              <a:t>El diagrama de Despliegue: donde corre cada cosa</a:t>
-            </a:r>
-          </a:p>
-        </p:txBody>
-      </p:sp>
-      <p:sp>
-        <p:nvSpPr>
-          <p:cNvPr id="5" name="Rounded Rectangle 4"/>
-          <p:cNvSpPr/>
-          <p:nvPr/>
-        </p:nvSpPr>
-        <p:spPr>
-          <a:xfrm>
-            <a:off x="457200" y="1261872"/>
-            <a:ext cx="11277295" cy="5093208"/>
-          </a:xfrm>
-          <a:prstGeom prst="roundRect">
-            <a:avLst>
-              <a:gd name="adj" fmla="val 12000"/>
-            </a:avLst>
-          </a:prstGeom>
-          <a:solidFill>
-            <a:srgbClr val="1E2A38"/>
-          </a:solidFill>
-          <a:ln>
-            <a:noFill/>
-          </a:ln>
-        </p:spPr>
-        <p:style>
-          <a:lnRef idx="1">
-            <a:schemeClr val="accent1"/>
-          </a:lnRef>
-          <a:fillRef idx="3">
-            <a:schemeClr val="accent1"/>
-          </a:fillRef>
-          <a:effectRef idx="2">
-            <a:schemeClr val="accent1"/>
-          </a:effectRef>
-          <a:fontRef idx="minor">
-            <a:schemeClr val="lt1"/>
-          </a:fontRef>
-        </p:style>
-        <p:txBody>
-          <a:bodyPr rtlCol="0" anchor="ctr"/>
-          <a:lstStyle/>
-          <a:p>
-            <a:pPr algn="ctr"/>
-          </a:p>
-        </p:txBody>
-      </p:sp>
-      <p:sp>
-        <p:nvSpPr>
-          <p:cNvPr id="6" name="Rectangle 5"/>
-          <p:cNvSpPr/>
-          <p:nvPr/>
-        </p:nvSpPr>
-        <p:spPr>
-          <a:xfrm>
-            <a:off x="457200" y="1261872"/>
-            <a:ext cx="11277295" cy="320040"/>
-          </a:xfrm>
-          <a:prstGeom prst="rect">
-            <a:avLst/>
-          </a:prstGeom>
-          <a:solidFill>
-            <a:srgbClr val="095292"/>
-          </a:solidFill>
-          <a:ln>
-            <a:noFill/>
-          </a:ln>
-        </p:spPr>
-        <p:style>
-          <a:lnRef idx="1">
-            <a:schemeClr val="accent1"/>
-          </a:lnRef>
-          <a:fillRef idx="3">
-            <a:schemeClr val="accent1"/>
-          </a:fillRef>
-          <a:effectRef idx="2">
-            <a:schemeClr val="accent1"/>
-          </a:effectRef>
-          <a:fontRef idx="minor">
-            <a:schemeClr val="lt1"/>
-          </a:fontRef>
-        </p:style>
-        <p:txBody>
-          <a:bodyPr rtlCol="0" anchor="ctr"/>
-          <a:lstStyle/>
-          <a:p>
-            <a:pPr algn="ctr"/>
-          </a:p>
-        </p:txBody>
-      </p:sp>
-      <p:sp>
-        <p:nvSpPr>
-          <p:cNvPr id="7" name="TextBox 6"/>
-          <p:cNvSpPr txBox="1"/>
-          <p:nvPr/>
-        </p:nvSpPr>
-        <p:spPr>
-          <a:xfrm>
-            <a:off x="685800" y="1307592"/>
-            <a:ext cx="10820095" cy="256032"/>
-          </a:xfrm>
-          <a:prstGeom prst="rect">
-            <a:avLst/>
-          </a:prstGeom>
-          <a:noFill/>
-        </p:spPr>
-        <p:txBody>
-          <a:bodyPr wrap="square" anchor="ctr"/>
-          <a:lstStyle/>
-          <a:p>
-            <a:r>
-              <a:rPr sz="1000" b="1" i="0">
-                <a:solidFill>
-                  <a:srgbClr val="269CCB"/>
-                </a:solidFill>
-                <a:latin typeface="Calibri"/>
-              </a:rPr>
-              <a:t>● ● ●</a:t>
-            </a:r>
-          </a:p>
-        </p:txBody>
-      </p:sp>
-      <p:sp>
-        <p:nvSpPr>
-          <p:cNvPr id="8" name="TextBox 7"/>
-          <p:cNvSpPr txBox="1"/>
-          <p:nvPr/>
-        </p:nvSpPr>
-        <p:spPr>
-          <a:xfrm>
-            <a:off x="777240" y="1719072"/>
-            <a:ext cx="5181447" cy="4453128"/>
-          </a:xfrm>
-          <a:prstGeom prst="rect">
-            <a:avLst/>
-          </a:prstGeom>
-          <a:noFill/>
-        </p:spPr>
-        <p:txBody>
-          <a:bodyPr wrap="square">
-            <a:spAutoFit/>
-          </a:bodyPr>
-          <a:lstStyle/>
-          <a:p>
-            <a:pPr>
-              <a:spcAft>
-                <a:spcPts val="400"/>
-              </a:spcAft>
-            </a:pPr>
-            <a:r>
-              <a:rPr sz="1400" b="0" i="0">
-                <a:solidFill>
-                  <a:srgbClr val="FFFFFF"/>
-                </a:solidFill>
-                <a:latin typeface="Calibri"/>
-              </a:rPr>
-              <a:t>flowchart TB</a:t>
-            </a:r>
-          </a:p>
-          <a:p>
-            <a:pPr>
-              <a:spcAft>
-                <a:spcPts val="400"/>
-              </a:spcAft>
-            </a:pPr>
-            <a:r>
-              <a:rPr sz="1400" b="0" i="0">
-                <a:solidFill>
-                  <a:srgbClr val="FFFFFF"/>
-                </a:solidFill>
-                <a:latin typeface="Calibri"/>
-              </a:rPr>
-              <a:t>  subgraph internet[Internet]</a:t>
-            </a:r>
-          </a:p>
-          <a:p>
-            <a:pPr>
-              <a:spcAft>
-                <a:spcPts val="400"/>
-              </a:spcAft>
-            </a:pPr>
-            <a:r>
-              <a:rPr sz="1400" b="0" i="0">
-                <a:solidFill>
-                  <a:srgbClr val="FFFFFF"/>
-                </a:solidFill>
-                <a:latin typeface="Calibri"/>
-              </a:rPr>
-              <a:t>    nav([Navegador del usuario])</a:t>
-            </a:r>
-          </a:p>
-          <a:p>
-            <a:pPr>
-              <a:spcAft>
-                <a:spcPts val="400"/>
-              </a:spcAft>
-            </a:pPr>
-            <a:r>
-              <a:rPr sz="1400" b="0" i="0">
-                <a:solidFill>
-                  <a:srgbClr val="FFFFFF"/>
-                </a:solidFill>
-                <a:latin typeface="Calibri"/>
-              </a:rPr>
-              <a:t>  end</a:t>
-            </a:r>
-          </a:p>
-          <a:p>
-            <a:pPr>
-              <a:spcAft>
-                <a:spcPts val="400"/>
-              </a:spcAft>
-            </a:pPr>
-            <a:r>
-              <a:rPr sz="1400" b="0" i="0">
-                <a:solidFill>
-                  <a:srgbClr val="FFFFFF"/>
-                </a:solidFill>
-                <a:latin typeface="Calibri"/>
-              </a:rPr>
-              <a:t/>
-            </a:r>
-          </a:p>
-          <a:p>
-            <a:pPr>
-              <a:spcAft>
-                <a:spcPts val="400"/>
-              </a:spcAft>
-            </a:pPr>
-            <a:r>
-              <a:rPr sz="1400" b="0" i="0">
-                <a:solidFill>
-                  <a:srgbClr val="FFFFFF"/>
-                </a:solidFill>
-                <a:latin typeface="Calibri"/>
-              </a:rPr>
-              <a:t>  subgraph nube[Proveedor cloud - region &lt;su region&gt;]</a:t>
-            </a:r>
-          </a:p>
-          <a:p>
-            <a:pPr>
-              <a:spcAft>
-                <a:spcPts val="400"/>
-              </a:spcAft>
-            </a:pPr>
-            <a:r>
-              <a:rPr sz="1400" b="0" i="0">
-                <a:solidFill>
-                  <a:srgbClr val="FFFFFF"/>
-                </a:solidFill>
-                <a:latin typeface="Calibri"/>
-              </a:rPr>
-              <a:t>    subgraph edge[CDN / Edge]</a:t>
-            </a:r>
-          </a:p>
-          <a:p>
-            <a:pPr>
-              <a:spcAft>
-                <a:spcPts val="400"/>
-              </a:spcAft>
-            </a:pPr>
-            <a:r>
-              <a:rPr sz="1400" b="0" i="0">
-                <a:solidFill>
-                  <a:srgbClr val="FFFFFF"/>
-                </a:solidFill>
-                <a:latin typeface="Calibri"/>
-              </a:rPr>
-              <a:t>      estatico[/Archivos estaticos&lt;br/&gt;build de la SPA/]</a:t>
-            </a:r>
-          </a:p>
-          <a:p>
-            <a:pPr>
-              <a:spcAft>
-                <a:spcPts val="400"/>
-              </a:spcAft>
-            </a:pPr>
-            <a:r>
-              <a:rPr sz="1400" b="0" i="0">
-                <a:solidFill>
-                  <a:srgbClr val="FFFFFF"/>
-                </a:solidFill>
-                <a:latin typeface="Calibri"/>
-              </a:rPr>
-              <a:t>    end</a:t>
-            </a:r>
-          </a:p>
-          <a:p>
-            <a:pPr>
-              <a:spcAft>
-                <a:spcPts val="400"/>
-              </a:spcAft>
-            </a:pPr>
-            <a:r>
-              <a:rPr sz="1400" b="0" i="0">
-                <a:solidFill>
-                  <a:srgbClr val="FFFFFF"/>
-                </a:solidFill>
-                <a:latin typeface="Calibri"/>
-              </a:rPr>
-              <a:t>    subgraph app[Servicio de aplicacion]</a:t>
-            </a:r>
-          </a:p>
-          <a:p>
-            <a:pPr>
-              <a:spcAft>
-                <a:spcPts val="400"/>
-              </a:spcAft>
-            </a:pPr>
-            <a:r>
-              <a:rPr sz="1400" b="0" i="0">
-                <a:solidFill>
-                  <a:srgbClr val="FFFFFF"/>
-                </a:solidFill>
-                <a:latin typeface="Calibri"/>
-              </a:rPr>
-              <a:t>      api1[Instancia API 1]</a:t>
-            </a:r>
-          </a:p>
-          <a:p>
-            <a:pPr>
-              <a:spcAft>
-                <a:spcPts val="400"/>
-              </a:spcAft>
-            </a:pPr>
-            <a:r>
-              <a:rPr sz="1400" b="0" i="0">
-                <a:solidFill>
-                  <a:srgbClr val="FFFFFF"/>
-                </a:solidFill>
-                <a:latin typeface="Calibri"/>
-              </a:rPr>
-              <a:t>      api2[Instancia API 2]</a:t>
-            </a:r>
-          </a:p>
-        </p:txBody>
-      </p:sp>
-      <p:sp>
-        <p:nvSpPr>
-          <p:cNvPr id="9" name="TextBox 8"/>
-          <p:cNvSpPr txBox="1"/>
-          <p:nvPr/>
-        </p:nvSpPr>
-        <p:spPr>
-          <a:xfrm>
-            <a:off x="6233007" y="1719072"/>
-            <a:ext cx="5181447" cy="4453128"/>
-          </a:xfrm>
-          <a:prstGeom prst="rect">
-            <a:avLst/>
-          </a:prstGeom>
-          <a:noFill/>
-        </p:spPr>
-        <p:txBody>
-          <a:bodyPr wrap="square">
-            <a:spAutoFit/>
-          </a:bodyPr>
-          <a:lstStyle/>
-          <a:p>
-            <a:pPr>
-              <a:spcAft>
-                <a:spcPts val="400"/>
-              </a:spcAft>
-            </a:pPr>
-            <a:r>
-              <a:rPr sz="1400" b="0" i="0">
-                <a:solidFill>
-                  <a:srgbClr val="FFFFFF"/>
-                </a:solidFill>
-                <a:latin typeface="Calibri"/>
-              </a:rPr>
-              <a:t>    end</a:t>
-            </a:r>
-          </a:p>
-          <a:p>
-            <a:pPr>
-              <a:spcAft>
-                <a:spcPts val="400"/>
-              </a:spcAft>
-            </a:pPr>
-            <a:r>
-              <a:rPr sz="1400" b="0" i="0">
-                <a:solidFill>
-                  <a:srgbClr val="FFFFFF"/>
-                </a:solidFill>
-                <a:latin typeface="Calibri"/>
-              </a:rPr>
-              <a:t>    subgraph datos[Servicio gestionado]</a:t>
-            </a:r>
-          </a:p>
-          <a:p>
-            <a:pPr>
-              <a:spcAft>
-                <a:spcPts val="400"/>
-              </a:spcAft>
-            </a:pPr>
-            <a:r>
-              <a:rPr sz="1400" b="0" i="0">
-                <a:solidFill>
-                  <a:srgbClr val="FFFFFF"/>
-                </a:solidFill>
-                <a:latin typeface="Calibri"/>
-              </a:rPr>
-              <a:t>      pg[(PostgreSQL&lt;br/&gt;con respaldo diario)]</a:t>
-            </a:r>
-          </a:p>
-          <a:p>
-            <a:pPr>
-              <a:spcAft>
-                <a:spcPts val="400"/>
-              </a:spcAft>
-            </a:pPr>
-            <a:r>
-              <a:rPr sz="1400" b="0" i="0">
-                <a:solidFill>
-                  <a:srgbClr val="FFFFFF"/>
-                </a:solidFill>
-                <a:latin typeface="Calibri"/>
-              </a:rPr>
-              <a:t>      obj[(Almacenamiento de objetos&lt;br/&gt;adjuntos)]</a:t>
-            </a:r>
-          </a:p>
-          <a:p>
-            <a:pPr>
-              <a:spcAft>
-                <a:spcPts val="400"/>
-              </a:spcAft>
-            </a:pPr>
-            <a:r>
-              <a:rPr sz="1400" b="0" i="0">
-                <a:solidFill>
-                  <a:srgbClr val="FFFFFF"/>
-                </a:solidFill>
-                <a:latin typeface="Calibri"/>
-              </a:rPr>
-              <a:t>    end</a:t>
-            </a:r>
-          </a:p>
-          <a:p>
-            <a:pPr>
-              <a:spcAft>
-                <a:spcPts val="400"/>
-              </a:spcAft>
-            </a:pPr>
-            <a:r>
-              <a:rPr sz="1400" b="0" i="0">
-                <a:solidFill>
-                  <a:srgbClr val="FFFFFF"/>
-                </a:solidFill>
-                <a:latin typeface="Calibri"/>
-              </a:rPr>
-              <a:t>  end</a:t>
-            </a:r>
-          </a:p>
-          <a:p>
-            <a:pPr>
-              <a:spcAft>
-                <a:spcPts val="400"/>
-              </a:spcAft>
-            </a:pPr>
-            <a:r>
-              <a:rPr sz="1400" b="0" i="0">
-                <a:solidFill>
-                  <a:srgbClr val="FFFFFF"/>
-                </a:solidFill>
-                <a:latin typeface="Calibri"/>
-              </a:rPr>
-              <a:t/>
-            </a:r>
-          </a:p>
-          <a:p>
-            <a:pPr>
-              <a:spcAft>
-                <a:spcPts val="400"/>
-              </a:spcAft>
-            </a:pPr>
-            <a:r>
-              <a:rPr sz="1400" b="0" i="0">
-                <a:solidFill>
-                  <a:srgbClr val="FFFFFF"/>
-                </a:solidFill>
-                <a:latin typeface="Calibri"/>
-              </a:rPr>
-              <a:t>  nav --&gt; estatico</a:t>
-            </a:r>
-          </a:p>
-          <a:p>
-            <a:pPr>
-              <a:spcAft>
-                <a:spcPts val="400"/>
-              </a:spcAft>
-            </a:pPr>
-            <a:r>
-              <a:rPr sz="1400" b="0" i="0">
-                <a:solidFill>
-                  <a:srgbClr val="FFFFFF"/>
-                </a:solidFill>
-                <a:latin typeface="Calibri"/>
-              </a:rPr>
-              <a:t>  nav --&gt; api1 &amp; api2</a:t>
-            </a:r>
-          </a:p>
-          <a:p>
-            <a:pPr>
-              <a:spcAft>
-                <a:spcPts val="400"/>
-              </a:spcAft>
-            </a:pPr>
-            <a:r>
-              <a:rPr sz="1400" b="0" i="0">
-                <a:solidFill>
-                  <a:srgbClr val="FFFFFF"/>
-                </a:solidFill>
-                <a:latin typeface="Calibri"/>
-              </a:rPr>
-              <a:t>  api1 &amp; api2 --&gt; pg</a:t>
-            </a:r>
-          </a:p>
-          <a:p>
-            <a:pPr>
-              <a:spcAft>
-                <a:spcPts val="400"/>
-              </a:spcAft>
-            </a:pPr>
-            <a:r>
-              <a:rPr sz="1400" b="0" i="0">
-                <a:solidFill>
-                  <a:srgbClr val="FFFFFF"/>
-                </a:solidFill>
-                <a:latin typeface="Calibri"/>
-              </a:rPr>
-              <a:t>  api1 &amp; api2 --&gt; obj</a:t>
-            </a:r>
-          </a:p>
-        </p:txBody>
-      </p:sp>
-      <p:sp>
-        <p:nvSpPr>
-          <p:cNvPr id="10" name="TextBox 9"/>
-          <p:cNvSpPr txBox="1"/>
-          <p:nvPr/>
-        </p:nvSpPr>
-        <p:spPr>
-          <a:xfrm>
-            <a:off x="11185855" y="6473952"/>
-            <a:ext cx="640080" cy="274320"/>
-          </a:xfrm>
-          <a:prstGeom prst="rect">
-            <a:avLst/>
-          </a:prstGeom>
-          <a:noFill/>
-        </p:spPr>
-        <p:txBody>
-          <a:bodyPr wrap="square">
-            <a:spAutoFit/>
-          </a:bodyPr>
-          <a:lstStyle/>
-          <a:p>
-            <a:pPr algn="r"/>
-            <a:r>
-              <a:rPr sz="1100" b="0" i="0">
-                <a:solidFill>
-                  <a:srgbClr val="666666"/>
-                </a:solidFill>
-                <a:latin typeface="Calibri"/>
-              </a:rPr>
-              <a:t>26</a:t>
-            </a:r>
-          </a:p>
-        </p:txBody>
-      </p:sp>
-    </p:spTree>
-  </p:cSld>
-  <p:clrMapOvr>
-    <a:masterClrMapping/>
-  </p:clrMapOvr>
-</p:sld>
-</file>
-
-<file path=ppt/slides/slide27.xml><?xml version="1.0" encoding="utf-8"?>
-<p:sld xmlns:a="http://schemas.openxmlformats.org/drawingml/2006/main" xmlns:p="http://schemas.openxmlformats.org/presentationml/2006/main" xmlns:r="http://schemas.openxmlformats.org/officeDocument/2006/relationships">
-  <p:cSld>
-    <p:bg>
-      <p:bgPr>
-        <a:solidFill>
-          <a:srgbClr val="FFFFFF"/>
-        </a:solidFill>
-        <a:effectLst/>
-      </p:bgPr>
-    </p:bg>
-    <p:spTree>
-      <p:nvGrpSpPr>
-        <p:cNvPr id="1" name=""/>
-        <p:cNvGrpSpPr/>
-        <p:nvPr/>
-      </p:nvGrpSpPr>
-      <p:grpSpPr/>
-      <p:sp>
-        <p:nvSpPr>
-          <p:cNvPr id="2" name="Rectangle 1"/>
-          <p:cNvSpPr/>
-          <p:nvPr/>
-        </p:nvSpPr>
-        <p:spPr>
-          <a:xfrm>
-            <a:off x="0" y="0"/>
-            <a:ext cx="12191695" cy="960120"/>
-          </a:xfrm>
-          <a:prstGeom prst="rect">
-            <a:avLst/>
-          </a:prstGeom>
-          <a:solidFill>
-            <a:srgbClr val="095292"/>
-          </a:solidFill>
-          <a:ln>
-            <a:noFill/>
-          </a:ln>
-        </p:spPr>
-        <p:style>
-          <a:lnRef idx="1">
-            <a:schemeClr val="accent1"/>
-          </a:lnRef>
-          <a:fillRef idx="3">
-            <a:schemeClr val="accent1"/>
-          </a:fillRef>
-          <a:effectRef idx="2">
-            <a:schemeClr val="accent1"/>
-          </a:effectRef>
-          <a:fontRef idx="minor">
-            <a:schemeClr val="lt1"/>
-          </a:fontRef>
-        </p:style>
-        <p:txBody>
-          <a:bodyPr rtlCol="0" anchor="ctr"/>
-          <a:lstStyle/>
-          <a:p>
-            <a:pPr algn="ctr"/>
-          </a:p>
-        </p:txBody>
-      </p:sp>
-      <p:sp>
-        <p:nvSpPr>
-          <p:cNvPr id="3" name="Rectangle 2"/>
-          <p:cNvSpPr/>
-          <p:nvPr/>
-        </p:nvSpPr>
-        <p:spPr>
-          <a:xfrm>
-            <a:off x="0" y="960120"/>
-            <a:ext cx="12191695" cy="41148"/>
-          </a:xfrm>
-          <a:prstGeom prst="rect">
-            <a:avLst/>
-          </a:prstGeom>
-          <a:solidFill>
-            <a:srgbClr val="FFD000"/>
-          </a:solidFill>
-          <a:ln>
-            <a:noFill/>
-          </a:ln>
-        </p:spPr>
-        <p:style>
-          <a:lnRef idx="1">
-            <a:schemeClr val="accent1"/>
-          </a:lnRef>
-          <a:fillRef idx="3">
-            <a:schemeClr val="accent1"/>
-          </a:fillRef>
-          <a:effectRef idx="2">
-            <a:schemeClr val="accent1"/>
-          </a:effectRef>
-          <a:fontRef idx="minor">
-            <a:schemeClr val="lt1"/>
-          </a:fontRef>
-        </p:style>
-        <p:txBody>
-          <a:bodyPr rtlCol="0" anchor="ctr"/>
-          <a:lstStyle/>
-          <a:p>
-            <a:pPr algn="ctr"/>
-          </a:p>
-        </p:txBody>
-      </p:sp>
-      <p:sp>
-        <p:nvSpPr>
-          <p:cNvPr id="4" name="TextBox 3"/>
-          <p:cNvSpPr txBox="1"/>
-          <p:nvPr/>
-        </p:nvSpPr>
-        <p:spPr>
-          <a:xfrm>
-            <a:off x="457200" y="164592"/>
-            <a:ext cx="11277295" cy="502920"/>
-          </a:xfrm>
-          <a:prstGeom prst="rect">
-            <a:avLst/>
-          </a:prstGeom>
-          <a:noFill/>
-        </p:spPr>
-        <p:txBody>
-          <a:bodyPr wrap="square">
-            <a:spAutoFit/>
-          </a:bodyPr>
-          <a:lstStyle/>
-          <a:p>
-            <a:r>
-              <a:rPr sz="2600" b="1" i="0">
-                <a:solidFill>
-                  <a:srgbClr val="FFFFFF"/>
-                </a:solidFill>
-                <a:latin typeface="Calibri"/>
-              </a:rPr>
-              <a:t>Que tipo de almacenamiento pide cada componente</a:t>
-            </a:r>
-          </a:p>
-        </p:txBody>
-      </p:sp>
-      <p:sp>
-        <p:nvSpPr>
-          <p:cNvPr id="5" name="Rounded Rectangle 4"/>
-          <p:cNvSpPr/>
-          <p:nvPr/>
-        </p:nvSpPr>
-        <p:spPr>
-          <a:xfrm>
-            <a:off x="457200" y="1261872"/>
-            <a:ext cx="11277295" cy="5093208"/>
-          </a:xfrm>
-          <a:prstGeom prst="roundRect">
-            <a:avLst>
-              <a:gd name="adj" fmla="val 12000"/>
-            </a:avLst>
-          </a:prstGeom>
-          <a:solidFill>
-            <a:srgbClr val="1E2A38"/>
-          </a:solidFill>
-          <a:ln>
-            <a:noFill/>
-          </a:ln>
-        </p:spPr>
-        <p:style>
-          <a:lnRef idx="1">
-            <a:schemeClr val="accent1"/>
-          </a:lnRef>
-          <a:fillRef idx="3">
-            <a:schemeClr val="accent1"/>
-          </a:fillRef>
-          <a:effectRef idx="2">
-            <a:schemeClr val="accent1"/>
-          </a:effectRef>
-          <a:fontRef idx="minor">
-            <a:schemeClr val="lt1"/>
-          </a:fontRef>
-        </p:style>
-        <p:txBody>
-          <a:bodyPr rtlCol="0" anchor="ctr"/>
-          <a:lstStyle/>
-          <a:p>
-            <a:pPr algn="ctr"/>
-          </a:p>
-        </p:txBody>
-      </p:sp>
-      <p:sp>
-        <p:nvSpPr>
-          <p:cNvPr id="6" name="Rectangle 5"/>
-          <p:cNvSpPr/>
-          <p:nvPr/>
-        </p:nvSpPr>
-        <p:spPr>
-          <a:xfrm>
-            <a:off x="457200" y="1261872"/>
-            <a:ext cx="11277295" cy="320040"/>
-          </a:xfrm>
-          <a:prstGeom prst="rect">
-            <a:avLst/>
-          </a:prstGeom>
-          <a:solidFill>
-            <a:srgbClr val="095292"/>
-          </a:solidFill>
-          <a:ln>
-            <a:noFill/>
-          </a:ln>
-        </p:spPr>
-        <p:style>
-          <a:lnRef idx="1">
-            <a:schemeClr val="accent1"/>
-          </a:lnRef>
-          <a:fillRef idx="3">
-            <a:schemeClr val="accent1"/>
-          </a:fillRef>
-          <a:effectRef idx="2">
-            <a:schemeClr val="accent1"/>
-          </a:effectRef>
-          <a:fontRef idx="minor">
-            <a:schemeClr val="lt1"/>
-          </a:fontRef>
-        </p:style>
-        <p:txBody>
-          <a:bodyPr rtlCol="0" anchor="ctr"/>
-          <a:lstStyle/>
-          <a:p>
-            <a:pPr algn="ctr"/>
-          </a:p>
-        </p:txBody>
-      </p:sp>
-      <p:sp>
-        <p:nvSpPr>
-          <p:cNvPr id="7" name="TextBox 6"/>
-          <p:cNvSpPr txBox="1"/>
-          <p:nvPr/>
-        </p:nvSpPr>
-        <p:spPr>
-          <a:xfrm>
-            <a:off x="685800" y="1307592"/>
-            <a:ext cx="10820095" cy="256032"/>
-          </a:xfrm>
-          <a:prstGeom prst="rect">
-            <a:avLst/>
-          </a:prstGeom>
-          <a:noFill/>
-        </p:spPr>
-        <p:txBody>
-          <a:bodyPr wrap="square" anchor="ctr"/>
-          <a:lstStyle/>
-          <a:p>
-            <a:r>
-              <a:rPr sz="1000" b="1" i="0">
-                <a:solidFill>
-                  <a:srgbClr val="269CCB"/>
-                </a:solidFill>
-                <a:latin typeface="Calibri"/>
-              </a:rPr>
-              <a:t>● ● ●</a:t>
-            </a:r>
-          </a:p>
-        </p:txBody>
-      </p:sp>
-      <p:sp>
-        <p:nvSpPr>
-          <p:cNvPr id="8" name="TextBox 7"/>
-          <p:cNvSpPr txBox="1"/>
-          <p:nvPr/>
-        </p:nvSpPr>
-        <p:spPr>
-          <a:xfrm>
-            <a:off x="777240" y="1719072"/>
-            <a:ext cx="10637215" cy="4453128"/>
-          </a:xfrm>
-          <a:prstGeom prst="rect">
-            <a:avLst/>
-          </a:prstGeom>
-          <a:noFill/>
-        </p:spPr>
-        <p:txBody>
-          <a:bodyPr wrap="square">
-            <a:spAutoFit/>
-          </a:bodyPr>
-          <a:lstStyle/>
-          <a:p>
-            <a:pPr>
-              <a:spcAft>
-                <a:spcPts val="400"/>
-              </a:spcAft>
-            </a:pPr>
-            <a:r>
-              <a:rPr sz="1400" b="0" i="0">
-                <a:solidFill>
-                  <a:srgbClr val="FFFFFF"/>
-                </a:solidFill>
-                <a:latin typeface="Calibri"/>
-              </a:rPr>
-              <a:t>%% BLOQUE (disco de la instancia): rapido, se va con la instancia.</a:t>
-            </a:r>
-          </a:p>
-          <a:p>
-            <a:pPr>
-              <a:spcAft>
-                <a:spcPts val="400"/>
-              </a:spcAft>
-            </a:pPr>
-            <a:r>
-              <a:rPr sz="1400" b="0" i="0">
-                <a:solidFill>
-                  <a:srgbClr val="FFFFFF"/>
-                </a:solidFill>
-                <a:latin typeface="Calibri"/>
-              </a:rPr>
-              <a:t>%%   -&gt; cache local, archivos temporales. NUNCA el dato que importa.</a:t>
-            </a:r>
-          </a:p>
-          <a:p>
-            <a:pPr>
-              <a:spcAft>
-                <a:spcPts val="400"/>
-              </a:spcAft>
-            </a:pPr>
-            <a:r>
-              <a:rPr sz="1400" b="0" i="0">
-                <a:solidFill>
-                  <a:srgbClr val="FFFFFF"/>
-                </a:solidFill>
-                <a:latin typeface="Calibri"/>
-              </a:rPr>
-              <a:t/>
-            </a:r>
-          </a:p>
-          <a:p>
-            <a:pPr>
-              <a:spcAft>
-                <a:spcPts val="400"/>
-              </a:spcAft>
-            </a:pPr>
-            <a:r>
-              <a:rPr sz="1400" b="0" i="0">
-                <a:solidFill>
-                  <a:srgbClr val="FFFFFF"/>
-                </a:solidFill>
-                <a:latin typeface="Calibri"/>
-              </a:rPr>
-              <a:t>%% OBJETOS (S3 y equivalentes): barato, por HTTP, no se monta como disco.</a:t>
-            </a:r>
-          </a:p>
-          <a:p>
-            <a:pPr>
-              <a:spcAft>
-                <a:spcPts val="400"/>
-              </a:spcAft>
-            </a:pPr>
-            <a:r>
-              <a:rPr sz="1400" b="0" i="0">
-                <a:solidFill>
-                  <a:srgbClr val="FFFFFF"/>
-                </a:solidFill>
-                <a:latin typeface="Calibri"/>
-              </a:rPr>
-              <a:t>%%   -&gt; adjuntos, imagenes, respaldos, el build de la SPA.</a:t>
-            </a:r>
-          </a:p>
-          <a:p>
-            <a:pPr>
-              <a:spcAft>
-                <a:spcPts val="400"/>
-              </a:spcAft>
-            </a:pPr>
-            <a:r>
-              <a:rPr sz="1400" b="0" i="0">
-                <a:solidFill>
-                  <a:srgbClr val="FFFFFF"/>
-                </a:solidFill>
-                <a:latin typeface="Calibri"/>
-              </a:rPr>
-              <a:t/>
-            </a:r>
-          </a:p>
-          <a:p>
-            <a:pPr>
-              <a:spcAft>
-                <a:spcPts val="400"/>
-              </a:spcAft>
-            </a:pPr>
-            <a:r>
-              <a:rPr sz="1400" b="0" i="0">
-                <a:solidFill>
-                  <a:srgbClr val="FFFFFF"/>
-                </a:solidFill>
-                <a:latin typeface="Calibri"/>
-              </a:rPr>
-              <a:t>%% BASE RELACIONAL GESTIONADA: transaccional, con respaldo y replica.</a:t>
-            </a:r>
-          </a:p>
-          <a:p>
-            <a:pPr>
-              <a:spcAft>
-                <a:spcPts val="400"/>
-              </a:spcAft>
-            </a:pPr>
-            <a:r>
-              <a:rPr sz="1400" b="0" i="0">
-                <a:solidFill>
-                  <a:srgbClr val="FFFFFF"/>
-                </a:solidFill>
-                <a:latin typeface="Calibri"/>
-              </a:rPr>
-              <a:t>%%   -&gt; lo que necesita integridad y consultas.</a:t>
-            </a:r>
-          </a:p>
-          <a:p>
-            <a:pPr>
-              <a:spcAft>
-                <a:spcPts val="400"/>
-              </a:spcAft>
-            </a:pPr>
-            <a:r>
-              <a:rPr sz="1400" b="0" i="0">
-                <a:solidFill>
-                  <a:srgbClr val="FFFFFF"/>
-                </a:solidFill>
-                <a:latin typeface="Calibri"/>
-              </a:rPr>
-              <a:t/>
-            </a:r>
-          </a:p>
-          <a:p>
-            <a:pPr>
-              <a:spcAft>
-                <a:spcPts val="400"/>
-              </a:spcAft>
-            </a:pPr>
-            <a:r>
-              <a:rPr sz="1400" b="0" i="0">
-                <a:solidFill>
-                  <a:srgbClr val="FFFFFF"/>
-                </a:solidFill>
-                <a:latin typeface="Calibri"/>
-              </a:rPr>
-              <a:t>%% La pregunta que decide: si esta instancia desaparece ahora mismo,</a:t>
-            </a:r>
-          </a:p>
-          <a:p>
-            <a:pPr>
-              <a:spcAft>
-                <a:spcPts val="400"/>
-              </a:spcAft>
-            </a:pPr>
-            <a:r>
-              <a:rPr sz="1400" b="0" i="0">
-                <a:solidFill>
-                  <a:srgbClr val="FFFFFF"/>
-                </a:solidFill>
-                <a:latin typeface="Calibri"/>
-              </a:rPr>
-              <a:t>%% que dato se pierde? Si la respuesta no es «ninguno», esta mal ubicado.</a:t>
-            </a:r>
-          </a:p>
-        </p:txBody>
-      </p:sp>
-      <p:sp>
-        <p:nvSpPr>
-          <p:cNvPr id="9" name="TextBox 8"/>
-          <p:cNvSpPr txBox="1"/>
-          <p:nvPr/>
-        </p:nvSpPr>
-        <p:spPr>
-          <a:xfrm>
-            <a:off x="11185855" y="6473952"/>
-            <a:ext cx="640080" cy="274320"/>
-          </a:xfrm>
-          <a:prstGeom prst="rect">
-            <a:avLst/>
-          </a:prstGeom>
-          <a:noFill/>
-        </p:spPr>
-        <p:txBody>
-          <a:bodyPr wrap="square">
-            <a:spAutoFit/>
-          </a:bodyPr>
-          <a:lstStyle/>
-          <a:p>
-            <a:pPr algn="r"/>
-            <a:r>
-              <a:rPr sz="1100" b="0" i="0">
-                <a:solidFill>
-                  <a:srgbClr val="666666"/>
-                </a:solidFill>
-                <a:latin typeface="Calibri"/>
-              </a:rPr>
-              <a:t>27</a:t>
-            </a:r>
-          </a:p>
-        </p:txBody>
-      </p:sp>
-    </p:spTree>
-  </p:cSld>
-  <p:clrMapOvr>
-    <a:masterClrMapping/>
-  </p:clrMapOvr>
-</p:sld>
-</file>
-
-<file path=ppt/slides/slide28.xml><?xml version="1.0" encoding="utf-8"?>
-<p:sld xmlns:a="http://schemas.openxmlformats.org/drawingml/2006/main" xmlns:p="http://schemas.openxmlformats.org/presentationml/2006/main" xmlns:r="http://schemas.openxmlformats.org/officeDocument/2006/relationships">
-  <p:cSld>
-    <p:bg>
-      <p:bgPr>
-        <a:solidFill>
-          <a:srgbClr val="FFFFFF"/>
-        </a:solidFill>
-        <a:effectLst/>
-      </p:bgPr>
-    </p:bg>
-    <p:spTree>
-      <p:nvGrpSpPr>
-        <p:cNvPr id="1" name=""/>
-        <p:cNvGrpSpPr/>
-        <p:nvPr/>
-      </p:nvGrpSpPr>
-      <p:grpSpPr/>
-      <p:sp>
-        <p:nvSpPr>
-          <p:cNvPr id="2" name="Rectangle 1"/>
-          <p:cNvSpPr/>
-          <p:nvPr/>
-        </p:nvSpPr>
-        <p:spPr>
-          <a:xfrm>
-            <a:off x="0" y="0"/>
-            <a:ext cx="12191695" cy="1170432"/>
-          </a:xfrm>
-          <a:prstGeom prst="rect">
-            <a:avLst/>
-          </a:prstGeom>
-          <a:solidFill>
-            <a:srgbClr val="095292"/>
-          </a:solidFill>
-          <a:ln>
-            <a:noFill/>
-          </a:ln>
-        </p:spPr>
-        <p:style>
-          <a:lnRef idx="1">
-            <a:schemeClr val="accent1"/>
-          </a:lnRef>
-          <a:fillRef idx="3">
-            <a:schemeClr val="accent1"/>
-          </a:fillRef>
-          <a:effectRef idx="2">
-            <a:schemeClr val="accent1"/>
-          </a:effectRef>
-          <a:fontRef idx="minor">
-            <a:schemeClr val="lt1"/>
-          </a:fontRef>
-        </p:style>
-        <p:txBody>
-          <a:bodyPr rtlCol="0" anchor="ctr"/>
-          <a:lstStyle/>
-          <a:p>
-            <a:pPr algn="ctr"/>
-          </a:p>
-        </p:txBody>
-      </p:sp>
-      <p:sp>
-        <p:nvSpPr>
-          <p:cNvPr id="3" name="Rectangle 2"/>
-          <p:cNvSpPr/>
-          <p:nvPr/>
-        </p:nvSpPr>
-        <p:spPr>
-          <a:xfrm>
-            <a:off x="0" y="1170432"/>
-            <a:ext cx="12191695" cy="41148"/>
-          </a:xfrm>
-          <a:prstGeom prst="rect">
-            <a:avLst/>
-          </a:prstGeom>
-          <a:solidFill>
-            <a:srgbClr val="FFD000"/>
-          </a:solidFill>
-          <a:ln>
-            <a:noFill/>
-          </a:ln>
-        </p:spPr>
-        <p:style>
-          <a:lnRef idx="1">
-            <a:schemeClr val="accent1"/>
-          </a:lnRef>
-          <a:fillRef idx="3">
-            <a:schemeClr val="accent1"/>
-          </a:fillRef>
-          <a:effectRef idx="2">
-            <a:schemeClr val="accent1"/>
-          </a:effectRef>
-          <a:fontRef idx="minor">
-            <a:schemeClr val="lt1"/>
-          </a:fontRef>
-        </p:style>
-        <p:txBody>
-          <a:bodyPr rtlCol="0" anchor="ctr"/>
-          <a:lstStyle/>
-          <a:p>
-            <a:pPr algn="ctr"/>
-          </a:p>
-        </p:txBody>
-      </p:sp>
-      <p:sp>
-        <p:nvSpPr>
-          <p:cNvPr id="4" name="TextBox 3"/>
-          <p:cNvSpPr txBox="1"/>
-          <p:nvPr/>
-        </p:nvSpPr>
-        <p:spPr>
-          <a:xfrm>
-            <a:off x="457200" y="164592"/>
-            <a:ext cx="11277295" cy="384048"/>
-          </a:xfrm>
-          <a:prstGeom prst="rect">
-            <a:avLst/>
-          </a:prstGeom>
-          <a:noFill/>
-        </p:spPr>
-        <p:txBody>
-          <a:bodyPr wrap="square">
-            <a:spAutoFit/>
-          </a:bodyPr>
-          <a:lstStyle/>
-          <a:p>
-            <a:r>
-              <a:rPr sz="2600" b="1" i="0">
-                <a:solidFill>
-                  <a:srgbClr val="FFFFFF"/>
-                </a:solidFill>
-                <a:latin typeface="Calibri"/>
-              </a:rPr>
-              <a:t>Ejemplo de diagrama de despliegue (Deployment)</a:t>
-            </a:r>
-          </a:p>
-        </p:txBody>
-      </p:sp>
-      <p:sp>
-        <p:nvSpPr>
-          <p:cNvPr id="5" name="TextBox 4"/>
-          <p:cNvSpPr txBox="1"/>
-          <p:nvPr/>
-        </p:nvSpPr>
-        <p:spPr>
-          <a:xfrm>
-            <a:off x="457200" y="566928"/>
-            <a:ext cx="11277295" cy="411480"/>
-          </a:xfrm>
-          <a:prstGeom prst="rect">
-            <a:avLst/>
-          </a:prstGeom>
-          <a:noFill/>
-        </p:spPr>
-        <p:txBody>
-          <a:bodyPr wrap="square">
-            <a:spAutoFit/>
-          </a:bodyPr>
-          <a:lstStyle/>
-          <a:p>
-            <a:r>
-              <a:rPr sz="1400" b="0" i="0">
-                <a:solidFill>
-                  <a:srgbClr val="B8D8EE"/>
-                </a:solidFill>
-                <a:latin typeface="Calibri"/>
-              </a:rPr>
-              <a:t>Zonas de confianza: qué es público, qué es privado, dónde viven los datos</a:t>
-            </a:r>
-          </a:p>
-        </p:txBody>
-      </p:sp>
-      <p:sp>
-        <p:nvSpPr>
-          <p:cNvPr id="6" name="Rounded Rectangle 5"/>
-          <p:cNvSpPr/>
-          <p:nvPr/>
-        </p:nvSpPr>
-        <p:spPr>
-          <a:xfrm>
-            <a:off x="822960" y="2194560"/>
-            <a:ext cx="3291840" cy="1005840"/>
-          </a:xfrm>
-          <a:prstGeom prst="roundRect">
-            <a:avLst>
-              <a:gd name="adj" fmla="val 12000"/>
-            </a:avLst>
-          </a:prstGeom>
-          <a:solidFill>
-            <a:srgbClr val="FFD000"/>
-          </a:solidFill>
-          <a:ln>
-            <a:noFill/>
-          </a:ln>
-        </p:spPr>
-        <p:style>
-          <a:lnRef idx="1">
-            <a:schemeClr val="accent1"/>
-          </a:lnRef>
-          <a:fillRef idx="3">
-            <a:schemeClr val="accent1"/>
-          </a:fillRef>
-          <a:effectRef idx="2">
-            <a:schemeClr val="accent1"/>
-          </a:effectRef>
-          <a:fontRef idx="minor">
-            <a:schemeClr val="lt1"/>
-          </a:fontRef>
-        </p:style>
-        <p:txBody>
-          <a:bodyPr rtlCol="0" anchor="ctr" wrap="square"/>
-          <a:lstStyle/>
-          <a:p>
-            <a:pPr algn="ctr"/>
-            <a:r>
-              <a:rPr sz="1300" b="1" i="0">
-                <a:solidFill>
-                  <a:srgbClr val="095292"/>
-                </a:solidFill>
-                <a:latin typeface="Calibri"/>
-              </a:rPr>
-              <a:t>Zona pública
-(balanceador / edge)</a:t>
-            </a:r>
-          </a:p>
-        </p:txBody>
-      </p:sp>
-      <p:sp>
-        <p:nvSpPr>
-          <p:cNvPr id="7" name="Rounded Rectangle 6"/>
-          <p:cNvSpPr/>
-          <p:nvPr/>
-        </p:nvSpPr>
-        <p:spPr>
-          <a:xfrm>
-            <a:off x="4754880" y="2194560"/>
-            <a:ext cx="3291840" cy="1005840"/>
-          </a:xfrm>
-          <a:prstGeom prst="roundRect">
-            <a:avLst>
-              <a:gd name="adj" fmla="val 12000"/>
-            </a:avLst>
-          </a:prstGeom>
-          <a:solidFill>
-            <a:srgbClr val="095292"/>
-          </a:solidFill>
-          <a:ln>
-            <a:noFill/>
-          </a:ln>
-        </p:spPr>
-        <p:style>
-          <a:lnRef idx="1">
-            <a:schemeClr val="accent1"/>
-          </a:lnRef>
-          <a:fillRef idx="3">
-            <a:schemeClr val="accent1"/>
-          </a:fillRef>
-          <a:effectRef idx="2">
-            <a:schemeClr val="accent1"/>
-          </a:effectRef>
-          <a:fontRef idx="minor">
-            <a:schemeClr val="lt1"/>
-          </a:fontRef>
-        </p:style>
-        <p:txBody>
-          <a:bodyPr rtlCol="0" anchor="ctr" wrap="square"/>
-          <a:lstStyle/>
-          <a:p>
-            <a:pPr algn="ctr"/>
-            <a:r>
-              <a:rPr sz="1300" b="1" i="0">
-                <a:solidFill>
-                  <a:srgbClr val="FFFFFF"/>
-                </a:solidFill>
-                <a:latin typeface="Calibri"/>
-              </a:rPr>
-              <a:t>Zona privada
-(app de la app)</a:t>
-            </a:r>
-          </a:p>
-        </p:txBody>
-      </p:sp>
-      <p:sp>
-        <p:nvSpPr>
-          <p:cNvPr id="8" name="Rounded Rectangle 7"/>
-          <p:cNvSpPr/>
-          <p:nvPr/>
-        </p:nvSpPr>
-        <p:spPr>
-          <a:xfrm>
-            <a:off x="8595360" y="2194560"/>
-            <a:ext cx="3291840" cy="1005840"/>
-          </a:xfrm>
-          <a:prstGeom prst="roundRect">
-            <a:avLst>
-              <a:gd name="adj" fmla="val 12000"/>
-            </a:avLst>
+            <a:ext cx="12191695" cy="164592"/>
+          </a:xfrm>
+          <a:prstGeom prst="rect">
+            <a:avLst/>
           </a:prstGeom>
           <a:solidFill>
             <a:srgbClr val="269CCB"/>
@@ -10836,69 +11425,80 @@
           </a:fontRef>
         </p:style>
         <p:txBody>
-          <a:bodyPr rtlCol="0" anchor="ctr" wrap="square"/>
+          <a:bodyPr rtlCol="0" anchor="ctr"/>
           <a:lstStyle/>
           <a:p>
             <a:pPr algn="ctr"/>
-            <a:r>
-              <a:rPr sz="1300" b="1" i="0">
-                <a:solidFill>
-                  <a:srgbClr val="FFFFFF"/>
-                </a:solidFill>
-                <a:latin typeface="Calibri"/>
-              </a:rPr>
-              <a:t>Zona de datos
-(base de datos)</a:t>
-            </a:r>
-          </a:p>
-        </p:txBody>
-      </p:sp>
-      <p:cxnSp>
-        <p:nvCxnSpPr>
-          <p:cNvPr id="9" name="Connector 8"/>
-          <p:cNvCxnSpPr/>
-          <p:nvPr/>
-        </p:nvCxnSpPr>
-        <p:spPr>
-          <a:xfrm>
-            <a:off x="4114800" y="2697480"/>
-            <a:ext cx="640080" cy="0"/>
-          </a:xfrm>
-          <a:prstGeom prst="line">
-            <a:avLst/>
-          </a:prstGeom>
-          <a:ln w="22225">
-            <a:solidFill>
-              <a:srgbClr val="666666"/>
-            </a:solidFill>
-            <a:tailEnd type="triangle" w="med" len="med"/>
-          </a:ln>
-        </p:spPr>
-        <p:style>
-          <a:lnRef idx="2">
-            <a:schemeClr val="accent1"/>
-          </a:lnRef>
-          <a:fillRef idx="0">
-            <a:schemeClr val="accent1"/>
-          </a:fillRef>
-          <a:effectRef idx="1">
-            <a:schemeClr val="accent1"/>
-          </a:effectRef>
-          <a:fontRef idx="minor">
-            <a:schemeClr val="tx1"/>
-          </a:fontRef>
-        </p:style>
-      </p:cxnSp>
-      <p:sp>
-        <p:nvSpPr>
-          <p:cNvPr id="10" name="TextBox 9"/>
+          </a:p>
+        </p:txBody>
+      </p:sp>
+      <p:pic>
+        <p:nvPicPr>
+          <p:cNvPr id="3" name="Picture 2" descr="logo_uniajc_color.png"/>
+          <p:cNvPicPr>
+            <a:picLocks noChangeAspect="1"/>
+          </p:cNvPicPr>
+          <p:nvPr/>
+        </p:nvPicPr>
+        <p:blipFill>
+          <a:blip r:embed="rId2"/>
+          <a:stretch>
+            <a:fillRect/>
+          </a:stretch>
+        </p:blipFill>
+        <p:spPr>
+          <a:xfrm>
+            <a:off x="10271455" y="5998464"/>
+            <a:ext cx="1463040" cy="643233"/>
+          </a:xfrm>
+          <a:prstGeom prst="rect">
+            <a:avLst/>
+          </a:prstGeom>
+        </p:spPr>
+      </p:pic>
+      <p:sp>
+        <p:nvSpPr>
+          <p:cNvPr id="4" name="TextBox 3"/>
           <p:cNvSpPr txBox="1"/>
           <p:nvPr/>
         </p:nvSpPr>
         <p:spPr>
           <a:xfrm>
-            <a:off x="3611879" y="2496312"/>
-            <a:ext cx="1645920" cy="320040"/>
+            <a:off x="457200" y="1737360"/>
+            <a:ext cx="11277295" cy="1097280"/>
+          </a:xfrm>
+          <a:prstGeom prst="rect">
+            <a:avLst/>
+          </a:prstGeom>
+          <a:noFill/>
+        </p:spPr>
+        <p:txBody>
+          <a:bodyPr wrap="square" anchor="ctr"/>
+          <a:lstStyle/>
+          <a:p>
+            <a:pPr algn="ctr"/>
+            <a:r>
+              <a:rPr sz="3400" b="1" i="0">
+                <a:solidFill>
+                  <a:srgbClr val="095292"/>
+                </a:solidFill>
+                <a:latin typeface="Calibri"/>
+              </a:rPr>
+              <a:t>Clase 7 · cierre conceptual</a:t>
+            </a:r>
+          </a:p>
+        </p:txBody>
+      </p:sp>
+      <p:sp>
+        <p:nvSpPr>
+          <p:cNvPr id="5" name="TextBox 4"/>
+          <p:cNvSpPr txBox="1"/>
+          <p:nvPr/>
+        </p:nvSpPr>
+        <p:spPr>
+          <a:xfrm>
+            <a:off x="457200" y="3017520"/>
+            <a:ext cx="11277295" cy="1645920"/>
           </a:xfrm>
           <a:prstGeom prst="rect">
             <a:avLst/>
@@ -10911,65 +11511,65 @@
           </a:bodyPr>
           <a:lstStyle/>
           <a:p>
-            <a:pPr algn="ctr"/>
-            <a:r>
-              <a:rPr sz="1000" b="0" i="1">
-                <a:solidFill>
-                  <a:srgbClr val="666666"/>
-                </a:solidFill>
-                <a:latin typeface="Calibri"/>
-              </a:rPr>
-              <a:t>solo el 8080</a:t>
-            </a:r>
-          </a:p>
-        </p:txBody>
-      </p:sp>
-      <p:cxnSp>
-        <p:nvCxnSpPr>
-          <p:cNvPr id="11" name="Connector 10"/>
-          <p:cNvCxnSpPr/>
-          <p:nvPr/>
-        </p:nvCxnSpPr>
-        <p:spPr>
-          <a:xfrm>
-            <a:off x="8046720" y="2697480"/>
-            <a:ext cx="548640" cy="0"/>
-          </a:xfrm>
-          <a:prstGeom prst="line">
-            <a:avLst/>
-          </a:prstGeom>
-          <a:ln w="22225">
-            <a:solidFill>
-              <a:srgbClr val="666666"/>
-            </a:solidFill>
-            <a:tailEnd type="triangle" w="med" len="med"/>
-          </a:ln>
-        </p:spPr>
-        <p:style>
-          <a:lnRef idx="2">
-            <a:schemeClr val="accent1"/>
-          </a:lnRef>
-          <a:fillRef idx="0">
-            <a:schemeClr val="accent1"/>
-          </a:fillRef>
-          <a:effectRef idx="1">
-            <a:schemeClr val="accent1"/>
-          </a:effectRef>
-          <a:fontRef idx="minor">
-            <a:schemeClr val="tx1"/>
-          </a:fontRef>
-        </p:style>
-      </p:cxnSp>
-      <p:sp>
-        <p:nvSpPr>
-          <p:cNvPr id="12" name="TextBox 11"/>
+            <a:pPr algn="ctr">
+              <a:spcAft>
+                <a:spcPts val="600"/>
+              </a:spcAft>
+            </a:pPr>
+            <a:r>
+              <a:rPr sz="1600" b="0" i="0">
+                <a:solidFill>
+                  <a:srgbClr val="333333"/>
+                </a:solidFill>
+                <a:latin typeface="Calibri"/>
+              </a:rPr>
+              <a:t>Modelar red lógica (cliente, edge, app, datos) sin VPC de pago.</a:t>
+            </a:r>
+          </a:p>
+          <a:p>
+            <a:pPr algn="ctr">
+              <a:spcAft>
+                <a:spcPts val="600"/>
+              </a:spcAft>
+            </a:pPr>
+            <a:r>
+              <a:rPr sz="1600" b="0" i="0">
+                <a:solidFill>
+                  <a:srgbClr val="333333"/>
+                </a:solidFill>
+                <a:latin typeface="Calibri"/>
+              </a:rPr>
+              <a:t>Elegir tipo de almacenamiento según el caso de uso de la app.</a:t>
+            </a:r>
+          </a:p>
+          <a:p>
+            <a:pPr algn="ctr">
+              <a:spcAft>
+                <a:spcPts val="600"/>
+              </a:spcAft>
+            </a:pPr>
+            <a:r>
+              <a:rPr sz="1600" b="0" i="0">
+                <a:solidFill>
+                  <a:srgbClr val="333333"/>
+                </a:solidFill>
+                <a:latin typeface="Calibri"/>
+              </a:rPr>
+              <a:t>Completar el diagrama de despliegue.</a:t>
+            </a:r>
+          </a:p>
+        </p:txBody>
+      </p:sp>
+      <p:sp>
+        <p:nvSpPr>
+          <p:cNvPr id="6" name="TextBox 5"/>
           <p:cNvSpPr txBox="1"/>
           <p:nvPr/>
         </p:nvSpPr>
         <p:spPr>
           <a:xfrm>
-            <a:off x="7498080" y="2496312"/>
-            <a:ext cx="1645920" cy="320040"/>
+            <a:off x="457200" y="4754880"/>
+            <a:ext cx="11277295" cy="640080"/>
           </a:xfrm>
           <a:prstGeom prst="rect">
             <a:avLst/>
@@ -10984,681 +11584,13 @@
           <a:p>
             <a:pPr algn="ctr"/>
             <a:r>
-              <a:rPr sz="1000" b="0" i="1">
-                <a:solidFill>
-                  <a:srgbClr val="666666"/>
-                </a:solidFill>
-                <a:latin typeface="Calibri"/>
-              </a:rPr>
-              <a:t>solo el 5432</a:t>
-            </a:r>
-          </a:p>
-        </p:txBody>
-      </p:sp>
-      <p:sp>
-        <p:nvSpPr>
-          <p:cNvPr id="13" name="TextBox 12"/>
-          <p:cNvSpPr txBox="1"/>
-          <p:nvPr/>
-        </p:nvSpPr>
-        <p:spPr>
-          <a:xfrm>
-            <a:off x="457200" y="6263640"/>
-            <a:ext cx="11277295" cy="411480"/>
-          </a:xfrm>
-          <a:prstGeom prst="rect">
-            <a:avLst/>
-          </a:prstGeom>
-          <a:noFill/>
-        </p:spPr>
-        <p:txBody>
-          <a:bodyPr wrap="square">
-            <a:spAutoFit/>
-          </a:bodyPr>
-          <a:lstStyle/>
-          <a:p>
-            <a:r>
-              <a:rPr sz="1100" b="0" i="1">
-                <a:solidFill>
-                  <a:srgbClr val="666666"/>
-                </a:solidFill>
-                <a:latin typeface="Calibri"/>
-              </a:rPr>
-              <a:t>La base de datos NUNCA vive en la zona pública: solo acepta conexiones de la API por el 5432. Los nombres coinciden con los del C4 Containers (Clase 4) — mismo sistema, otro ángulo. El correo externo queda fuera de las zonas.</a:t>
-            </a:r>
-          </a:p>
-        </p:txBody>
-      </p:sp>
-      <p:sp>
-        <p:nvSpPr>
-          <p:cNvPr id="14" name="TextBox 13"/>
-          <p:cNvSpPr txBox="1"/>
-          <p:nvPr/>
-        </p:nvSpPr>
-        <p:spPr>
-          <a:xfrm>
-            <a:off x="11185855" y="6473952"/>
-            <a:ext cx="640080" cy="274320"/>
-          </a:xfrm>
-          <a:prstGeom prst="rect">
-            <a:avLst/>
-          </a:prstGeom>
-          <a:noFill/>
-        </p:spPr>
-        <p:txBody>
-          <a:bodyPr wrap="square">
-            <a:spAutoFit/>
-          </a:bodyPr>
-          <a:lstStyle/>
-          <a:p>
-            <a:pPr algn="r"/>
-            <a:r>
-              <a:rPr sz="1100" b="0" i="0">
-                <a:solidFill>
-                  <a:srgbClr val="666666"/>
-                </a:solidFill>
-                <a:latin typeface="Calibri"/>
-              </a:rPr>
-              <a:t>28</a:t>
-            </a:r>
-          </a:p>
-        </p:txBody>
-      </p:sp>
-    </p:spTree>
-  </p:cSld>
-  <p:clrMapOvr>
-    <a:masterClrMapping/>
-  </p:clrMapOvr>
-</p:sld>
-</file>
-
-<file path=ppt/slides/slide29.xml><?xml version="1.0" encoding="utf-8"?>
-<p:sld xmlns:a="http://schemas.openxmlformats.org/drawingml/2006/main" xmlns:p="http://schemas.openxmlformats.org/presentationml/2006/main" xmlns:r="http://schemas.openxmlformats.org/officeDocument/2006/relationships">
-  <p:cSld>
-    <p:bg>
-      <p:bgPr>
-        <a:solidFill>
-          <a:srgbClr val="FFFFFF"/>
-        </a:solidFill>
-        <a:effectLst/>
-      </p:bgPr>
-    </p:bg>
-    <p:spTree>
-      <p:nvGrpSpPr>
-        <p:cNvPr id="1" name=""/>
-        <p:cNvGrpSpPr/>
-        <p:nvPr/>
-      </p:nvGrpSpPr>
-      <p:grpSpPr/>
-      <p:sp>
-        <p:nvSpPr>
-          <p:cNvPr id="2" name="Rectangle 1"/>
-          <p:cNvSpPr/>
-          <p:nvPr/>
-        </p:nvSpPr>
-        <p:spPr>
-          <a:xfrm>
-            <a:off x="0" y="0"/>
-            <a:ext cx="12191695" cy="960120"/>
-          </a:xfrm>
-          <a:prstGeom prst="rect">
-            <a:avLst/>
-          </a:prstGeom>
-          <a:solidFill>
-            <a:srgbClr val="095292"/>
-          </a:solidFill>
-          <a:ln>
-            <a:noFill/>
-          </a:ln>
-        </p:spPr>
-        <p:style>
-          <a:lnRef idx="1">
-            <a:schemeClr val="accent1"/>
-          </a:lnRef>
-          <a:fillRef idx="3">
-            <a:schemeClr val="accent1"/>
-          </a:fillRef>
-          <a:effectRef idx="2">
-            <a:schemeClr val="accent1"/>
-          </a:effectRef>
-          <a:fontRef idx="minor">
-            <a:schemeClr val="lt1"/>
-          </a:fontRef>
-        </p:style>
-        <p:txBody>
-          <a:bodyPr rtlCol="0" anchor="ctr"/>
-          <a:lstStyle/>
-          <a:p>
-            <a:pPr algn="ctr"/>
-          </a:p>
-        </p:txBody>
-      </p:sp>
-      <p:sp>
-        <p:nvSpPr>
-          <p:cNvPr id="3" name="Rectangle 2"/>
-          <p:cNvSpPr/>
-          <p:nvPr/>
-        </p:nvSpPr>
-        <p:spPr>
-          <a:xfrm>
-            <a:off x="0" y="960120"/>
-            <a:ext cx="12191695" cy="41148"/>
-          </a:xfrm>
-          <a:prstGeom prst="rect">
-            <a:avLst/>
-          </a:prstGeom>
-          <a:solidFill>
-            <a:srgbClr val="FFD000"/>
-          </a:solidFill>
-          <a:ln>
-            <a:noFill/>
-          </a:ln>
-        </p:spPr>
-        <p:style>
-          <a:lnRef idx="1">
-            <a:schemeClr val="accent1"/>
-          </a:lnRef>
-          <a:fillRef idx="3">
-            <a:schemeClr val="accent1"/>
-          </a:fillRef>
-          <a:effectRef idx="2">
-            <a:schemeClr val="accent1"/>
-          </a:effectRef>
-          <a:fontRef idx="minor">
-            <a:schemeClr val="lt1"/>
-          </a:fontRef>
-        </p:style>
-        <p:txBody>
-          <a:bodyPr rtlCol="0" anchor="ctr"/>
-          <a:lstStyle/>
-          <a:p>
-            <a:pPr algn="ctr"/>
-          </a:p>
-        </p:txBody>
-      </p:sp>
-      <p:sp>
-        <p:nvSpPr>
-          <p:cNvPr id="4" name="TextBox 3"/>
-          <p:cNvSpPr txBox="1"/>
-          <p:nvPr/>
-        </p:nvSpPr>
-        <p:spPr>
-          <a:xfrm>
-            <a:off x="457200" y="164592"/>
-            <a:ext cx="11277295" cy="502920"/>
-          </a:xfrm>
-          <a:prstGeom prst="rect">
-            <a:avLst/>
-          </a:prstGeom>
-          <a:noFill/>
-        </p:spPr>
-        <p:txBody>
-          <a:bodyPr wrap="square">
-            <a:spAutoFit/>
-          </a:bodyPr>
-          <a:lstStyle/>
-          <a:p>
-            <a:r>
-              <a:rPr sz="2600" b="1" i="0">
-                <a:solidFill>
-                  <a:srgbClr val="FFFFFF"/>
-                </a:solidFill>
-                <a:latin typeface="Calibri"/>
-              </a:rPr>
-              <a:t>El Despliegue en Mermaid: el molde que un visor renderiza</a:t>
-            </a:r>
-          </a:p>
-        </p:txBody>
-      </p:sp>
-      <p:sp>
-        <p:nvSpPr>
-          <p:cNvPr id="5" name="Rounded Rectangle 4"/>
-          <p:cNvSpPr/>
-          <p:nvPr/>
-        </p:nvSpPr>
-        <p:spPr>
-          <a:xfrm>
-            <a:off x="457200" y="1261872"/>
-            <a:ext cx="11277295" cy="4773168"/>
-          </a:xfrm>
-          <a:prstGeom prst="roundRect">
-            <a:avLst>
-              <a:gd name="adj" fmla="val 12000"/>
-            </a:avLst>
-          </a:prstGeom>
-          <a:solidFill>
-            <a:srgbClr val="1E2A38"/>
-          </a:solidFill>
-          <a:ln>
-            <a:noFill/>
-          </a:ln>
-        </p:spPr>
-        <p:style>
-          <a:lnRef idx="1">
-            <a:schemeClr val="accent1"/>
-          </a:lnRef>
-          <a:fillRef idx="3">
-            <a:schemeClr val="accent1"/>
-          </a:fillRef>
-          <a:effectRef idx="2">
-            <a:schemeClr val="accent1"/>
-          </a:effectRef>
-          <a:fontRef idx="minor">
-            <a:schemeClr val="lt1"/>
-          </a:fontRef>
-        </p:style>
-        <p:txBody>
-          <a:bodyPr rtlCol="0" anchor="ctr"/>
-          <a:lstStyle/>
-          <a:p>
-            <a:pPr algn="ctr"/>
-          </a:p>
-        </p:txBody>
-      </p:sp>
-      <p:sp>
-        <p:nvSpPr>
-          <p:cNvPr id="6" name="Rectangle 5"/>
-          <p:cNvSpPr/>
-          <p:nvPr/>
-        </p:nvSpPr>
-        <p:spPr>
-          <a:xfrm>
-            <a:off x="457200" y="1261872"/>
-            <a:ext cx="11277295" cy="320040"/>
-          </a:xfrm>
-          <a:prstGeom prst="rect">
-            <a:avLst/>
-          </a:prstGeom>
-          <a:solidFill>
-            <a:srgbClr val="095292"/>
-          </a:solidFill>
-          <a:ln>
-            <a:noFill/>
-          </a:ln>
-        </p:spPr>
-        <p:style>
-          <a:lnRef idx="1">
-            <a:schemeClr val="accent1"/>
-          </a:lnRef>
-          <a:fillRef idx="3">
-            <a:schemeClr val="accent1"/>
-          </a:fillRef>
-          <a:effectRef idx="2">
-            <a:schemeClr val="accent1"/>
-          </a:effectRef>
-          <a:fontRef idx="minor">
-            <a:schemeClr val="lt1"/>
-          </a:fontRef>
-        </p:style>
-        <p:txBody>
-          <a:bodyPr rtlCol="0" anchor="ctr"/>
-          <a:lstStyle/>
-          <a:p>
-            <a:pPr algn="ctr"/>
-          </a:p>
-        </p:txBody>
-      </p:sp>
-      <p:sp>
-        <p:nvSpPr>
-          <p:cNvPr id="7" name="TextBox 6"/>
-          <p:cNvSpPr txBox="1"/>
-          <p:nvPr/>
-        </p:nvSpPr>
-        <p:spPr>
-          <a:xfrm>
-            <a:off x="685800" y="1307592"/>
-            <a:ext cx="10820095" cy="256032"/>
-          </a:xfrm>
-          <a:prstGeom prst="rect">
-            <a:avLst/>
-          </a:prstGeom>
-          <a:noFill/>
-        </p:spPr>
-        <p:txBody>
-          <a:bodyPr wrap="square" anchor="ctr"/>
-          <a:lstStyle/>
-          <a:p>
-            <a:r>
-              <a:rPr sz="1000" b="1" i="0">
+              <a:rPr sz="2000" b="1" i="0">
                 <a:solidFill>
                   <a:srgbClr val="269CCB"/>
                 </a:solidFill>
                 <a:latin typeface="Calibri"/>
               </a:rPr>
-              <a:t>● ● ●</a:t>
-            </a:r>
-          </a:p>
-        </p:txBody>
-      </p:sp>
-      <p:sp>
-        <p:nvSpPr>
-          <p:cNvPr id="8" name="TextBox 7"/>
-          <p:cNvSpPr txBox="1"/>
-          <p:nvPr/>
-        </p:nvSpPr>
-        <p:spPr>
-          <a:xfrm>
-            <a:off x="777240" y="1719072"/>
-            <a:ext cx="10637215" cy="4133087"/>
-          </a:xfrm>
-          <a:prstGeom prst="rect">
-            <a:avLst/>
-          </a:prstGeom>
-          <a:noFill/>
-        </p:spPr>
-        <p:txBody>
-          <a:bodyPr wrap="square">
-            <a:spAutoFit/>
-          </a:bodyPr>
-          <a:lstStyle/>
-          <a:p>
-            <a:pPr>
-              <a:spcAft>
-                <a:spcPts val="400"/>
-              </a:spcAft>
-            </a:pPr>
-            <a:r>
-              <a:rPr sz="1400" b="0" i="0">
-                <a:solidFill>
-                  <a:srgbClr val="FFFFFF"/>
-                </a:solidFill>
-                <a:latin typeface="Calibri"/>
-              </a:rPr>
-              <a:t>flowchart LR</a:t>
-            </a:r>
-          </a:p>
-          <a:p>
-            <a:pPr>
-              <a:spcAft>
-                <a:spcPts val="400"/>
-              </a:spcAft>
-            </a:pPr>
-            <a:r>
-              <a:rPr sz="1400" b="0" i="0">
-                <a:solidFill>
-                  <a:srgbClr val="FFFFFF"/>
-                </a:solidFill>
-                <a:latin typeface="Calibri"/>
-              </a:rPr>
-              <a:t>  subgraph publica["Zona publica - internet"]</a:t>
-            </a:r>
-          </a:p>
-          <a:p>
-            <a:pPr>
-              <a:spcAft>
-                <a:spcPts val="400"/>
-              </a:spcAft>
-            </a:pPr>
-            <a:r>
-              <a:rPr sz="1400" b="0" i="0">
-                <a:solidFill>
-                  <a:srgbClr val="FFFFFF"/>
-                </a:solidFill>
-                <a:latin typeface="Calibri"/>
-              </a:rPr>
-              <a:t>    web["App web&lt;br/&gt;React estatico - 443"]</a:t>
-            </a:r>
-          </a:p>
-          <a:p>
-            <a:pPr>
-              <a:spcAft>
-                <a:spcPts val="400"/>
-              </a:spcAft>
-            </a:pPr>
-            <a:r>
-              <a:rPr sz="1400" b="0" i="0">
-                <a:solidFill>
-                  <a:srgbClr val="FFFFFF"/>
-                </a:solidFill>
-                <a:latin typeface="Calibri"/>
-              </a:rPr>
-              <a:t>    edge["Edge / balanceador&lt;br/&gt;443 HTTPS"]</a:t>
-            </a:r>
-          </a:p>
-          <a:p>
-            <a:pPr>
-              <a:spcAft>
-                <a:spcPts val="400"/>
-              </a:spcAft>
-            </a:pPr>
-            <a:r>
-              <a:rPr sz="1400" b="0" i="0">
-                <a:solidFill>
-                  <a:srgbClr val="FFFFFF"/>
-                </a:solidFill>
-                <a:latin typeface="Calibri"/>
-              </a:rPr>
-              <a:t>  end</a:t>
-            </a:r>
-          </a:p>
-          <a:p>
-            <a:pPr>
-              <a:spcAft>
-                <a:spcPts val="400"/>
-              </a:spcAft>
-            </a:pPr>
-            <a:r>
-              <a:rPr sz="1400" b="0" i="0">
-                <a:solidFill>
-                  <a:srgbClr val="FFFFFF"/>
-                </a:solidFill>
-                <a:latin typeface="Calibri"/>
-              </a:rPr>
-              <a:t>  subgraph privada["Zona privada - solo desde el edge"]</a:t>
-            </a:r>
-          </a:p>
-          <a:p>
-            <a:pPr>
-              <a:spcAft>
-                <a:spcPts val="400"/>
-              </a:spcAft>
-            </a:pPr>
-            <a:r>
-              <a:rPr sz="1400" b="0" i="0">
-                <a:solidFill>
-                  <a:srgbClr val="FFFFFF"/>
-                </a:solidFill>
-                <a:latin typeface="Calibri"/>
-              </a:rPr>
-              <a:t>    api["API de la app&lt;br/&gt;8080 HTTP"]</a:t>
-            </a:r>
-          </a:p>
-          <a:p>
-            <a:pPr>
-              <a:spcAft>
-                <a:spcPts val="400"/>
-              </a:spcAft>
-            </a:pPr>
-            <a:r>
-              <a:rPr sz="1400" b="0" i="0">
-                <a:solidFill>
-                  <a:srgbClr val="FFFFFF"/>
-                </a:solidFill>
-                <a:latin typeface="Calibri"/>
-              </a:rPr>
-              <a:t>  end</a:t>
-            </a:r>
-          </a:p>
-          <a:p>
-            <a:pPr>
-              <a:spcAft>
-                <a:spcPts val="400"/>
-              </a:spcAft>
-            </a:pPr>
-            <a:r>
-              <a:rPr sz="1400" b="0" i="0">
-                <a:solidFill>
-                  <a:srgbClr val="FFFFFF"/>
-                </a:solidFill>
-                <a:latin typeface="Calibri"/>
-              </a:rPr>
-              <a:t>  subgraph datos["Zona de datos - sin internet: la BD va AQUI"]</a:t>
-            </a:r>
-          </a:p>
-          <a:p>
-            <a:pPr>
-              <a:spcAft>
-                <a:spcPts val="400"/>
-              </a:spcAft>
-            </a:pPr>
-            <a:r>
-              <a:rPr sz="1400" b="0" i="0">
-                <a:solidFill>
-                  <a:srgbClr val="FFFFFF"/>
-                </a:solidFill>
-                <a:latin typeface="Calibri"/>
-              </a:rPr>
-              <a:t>    db[("Base de datos&lt;br/&gt;5432 TCP")]</a:t>
-            </a:r>
-          </a:p>
-          <a:p>
-            <a:pPr>
-              <a:spcAft>
-                <a:spcPts val="400"/>
-              </a:spcAft>
-            </a:pPr>
-            <a:r>
-              <a:rPr sz="1400" b="0" i="0">
-                <a:solidFill>
-                  <a:srgbClr val="FFFFFF"/>
-                </a:solidFill>
-                <a:latin typeface="Calibri"/>
-              </a:rPr>
-              <a:t>  end</a:t>
-            </a:r>
-          </a:p>
-          <a:p>
-            <a:pPr>
-              <a:spcAft>
-                <a:spcPts val="400"/>
-              </a:spcAft>
-            </a:pPr>
-            <a:r>
-              <a:rPr sz="1400" b="0" i="0">
-                <a:solidFill>
-                  <a:srgbClr val="FFFFFF"/>
-                </a:solidFill>
-                <a:latin typeface="Calibri"/>
-              </a:rPr>
-              <a:t>  web --&gt;|"HTTPS 443"| edge</a:t>
-            </a:r>
-          </a:p>
-          <a:p>
-            <a:pPr>
-              <a:spcAft>
-                <a:spcPts val="400"/>
-              </a:spcAft>
-            </a:pPr>
-            <a:r>
-              <a:rPr sz="1400" b="0" i="0">
-                <a:solidFill>
-                  <a:srgbClr val="FFFFFF"/>
-                </a:solidFill>
-                <a:latin typeface="Calibri"/>
-              </a:rPr>
-              <a:t>  edge --&gt;|"HTTP 8080"| api</a:t>
-            </a:r>
-          </a:p>
-          <a:p>
-            <a:pPr>
-              <a:spcAft>
-                <a:spcPts val="400"/>
-              </a:spcAft>
-            </a:pPr>
-            <a:r>
-              <a:rPr sz="1400" b="0" i="0">
-                <a:solidFill>
-                  <a:srgbClr val="FFFFFF"/>
-                </a:solidFill>
-                <a:latin typeface="Calibri"/>
-              </a:rPr>
-              <a:t>  api --&gt;|"TCP 5432"| db</a:t>
-            </a:r>
-          </a:p>
-          <a:p>
-            <a:pPr>
-              <a:spcAft>
-                <a:spcPts val="400"/>
-              </a:spcAft>
-            </a:pPr>
-            <a:r>
-              <a:rPr sz="1400" b="0" i="0">
-                <a:solidFill>
-                  <a:srgbClr val="FFFFFF"/>
-                </a:solidFill>
-                <a:latin typeface="Calibri"/>
-              </a:rPr>
-              <a:t>  api --&gt;|"HTTPS 443 - frontera de confianza"| pagos["Pasarela de pagos externa"]</a:t>
-            </a:r>
-          </a:p>
-        </p:txBody>
-      </p:sp>
-      <p:sp>
-        <p:nvSpPr>
-          <p:cNvPr id="9" name="TextBox 8"/>
-          <p:cNvSpPr txBox="1"/>
-          <p:nvPr/>
-        </p:nvSpPr>
-        <p:spPr>
-          <a:xfrm>
-            <a:off x="457200" y="6080760"/>
-            <a:ext cx="11277295" cy="320040"/>
-          </a:xfrm>
-          <a:prstGeom prst="rect">
-            <a:avLst/>
-          </a:prstGeom>
-          <a:noFill/>
-        </p:spPr>
-        <p:txBody>
-          <a:bodyPr wrap="square">
-            <a:spAutoFit/>
-          </a:bodyPr>
-          <a:lstStyle/>
-          <a:p>
-            <a:pPr algn="ctr"/>
-            <a:r>
-              <a:rPr sz="1200" b="0" i="1">
-                <a:solidFill>
-                  <a:srgbClr val="666666"/>
-                </a:solidFill>
-                <a:latin typeface="Calibri"/>
-              </a:rPr>
-              <a:t>Una «subgraph» por zona, el puerto en cada caja y la base con «[( )]». La flecha al externo ES la frontera de confianza. Nombres: los mismos del C4 Containers de la Clase 4.</a:t>
-            </a:r>
-          </a:p>
-        </p:txBody>
-      </p:sp>
-      <p:sp>
-        <p:nvSpPr>
-          <p:cNvPr id="10" name="TextBox 9"/>
-          <p:cNvSpPr txBox="1"/>
-          <p:nvPr/>
-        </p:nvSpPr>
-        <p:spPr>
-          <a:xfrm>
-            <a:off x="11185855" y="6473952"/>
-            <a:ext cx="640080" cy="274320"/>
-          </a:xfrm>
-          <a:prstGeom prst="rect">
-            <a:avLst/>
-          </a:prstGeom>
-          <a:noFill/>
-        </p:spPr>
-        <p:txBody>
-          <a:bodyPr wrap="square">
-            <a:spAutoFit/>
-          </a:bodyPr>
-          <a:lstStyle/>
-          <a:p>
-            <a:pPr algn="r"/>
-            <a:r>
-              <a:rPr sz="1100" b="0" i="0">
-                <a:solidFill>
-                  <a:srgbClr val="666666"/>
-                </a:solidFill>
-                <a:latin typeface="Calibri"/>
-              </a:rPr>
-              <a:t>29</a:t>
+              <a:t>Teoría al servicio del diseño</a:t>
             </a:r>
           </a:p>
         </p:txBody>
@@ -11941,1137 +11873,6 @@
 </p:sld>
 </file>
 
-<file path=ppt/slides/slide30.xml><?xml version="1.0" encoding="utf-8"?>
-<p:sld xmlns:a="http://schemas.openxmlformats.org/drawingml/2006/main" xmlns:p="http://schemas.openxmlformats.org/presentationml/2006/main" xmlns:r="http://schemas.openxmlformats.org/officeDocument/2006/relationships">
-  <p:cSld>
-    <p:bg>
-      <p:bgPr>
-        <a:solidFill>
-          <a:srgbClr val="FFFFFF"/>
-        </a:solidFill>
-        <a:effectLst/>
-      </p:bgPr>
-    </p:bg>
-    <p:spTree>
-      <p:nvGrpSpPr>
-        <p:cNvPr id="1" name=""/>
-        <p:cNvGrpSpPr/>
-        <p:nvPr/>
-      </p:nvGrpSpPr>
-      <p:grpSpPr/>
-      <p:sp>
-        <p:nvSpPr>
-          <p:cNvPr id="2" name="Rectangle 1"/>
-          <p:cNvSpPr/>
-          <p:nvPr/>
-        </p:nvSpPr>
-        <p:spPr>
-          <a:xfrm>
-            <a:off x="0" y="0"/>
-            <a:ext cx="12191695" cy="1170432"/>
-          </a:xfrm>
-          <a:prstGeom prst="rect">
-            <a:avLst/>
-          </a:prstGeom>
-          <a:solidFill>
-            <a:srgbClr val="095292"/>
-          </a:solidFill>
-          <a:ln>
-            <a:noFill/>
-          </a:ln>
-        </p:spPr>
-        <p:style>
-          <a:lnRef idx="1">
-            <a:schemeClr val="accent1"/>
-          </a:lnRef>
-          <a:fillRef idx="3">
-            <a:schemeClr val="accent1"/>
-          </a:fillRef>
-          <a:effectRef idx="2">
-            <a:schemeClr val="accent1"/>
-          </a:effectRef>
-          <a:fontRef idx="minor">
-            <a:schemeClr val="lt1"/>
-          </a:fontRef>
-        </p:style>
-        <p:txBody>
-          <a:bodyPr rtlCol="0" anchor="ctr"/>
-          <a:lstStyle/>
-          <a:p>
-            <a:pPr algn="ctr"/>
-          </a:p>
-        </p:txBody>
-      </p:sp>
-      <p:sp>
-        <p:nvSpPr>
-          <p:cNvPr id="3" name="Rectangle 2"/>
-          <p:cNvSpPr/>
-          <p:nvPr/>
-        </p:nvSpPr>
-        <p:spPr>
-          <a:xfrm>
-            <a:off x="0" y="1170432"/>
-            <a:ext cx="12191695" cy="41148"/>
-          </a:xfrm>
-          <a:prstGeom prst="rect">
-            <a:avLst/>
-          </a:prstGeom>
-          <a:solidFill>
-            <a:srgbClr val="FFD000"/>
-          </a:solidFill>
-          <a:ln>
-            <a:noFill/>
-          </a:ln>
-        </p:spPr>
-        <p:style>
-          <a:lnRef idx="1">
-            <a:schemeClr val="accent1"/>
-          </a:lnRef>
-          <a:fillRef idx="3">
-            <a:schemeClr val="accent1"/>
-          </a:fillRef>
-          <a:effectRef idx="2">
-            <a:schemeClr val="accent1"/>
-          </a:effectRef>
-          <a:fontRef idx="minor">
-            <a:schemeClr val="lt1"/>
-          </a:fontRef>
-        </p:style>
-        <p:txBody>
-          <a:bodyPr rtlCol="0" anchor="ctr"/>
-          <a:lstStyle/>
-          <a:p>
-            <a:pPr algn="ctr"/>
-          </a:p>
-        </p:txBody>
-      </p:sp>
-      <p:sp>
-        <p:nvSpPr>
-          <p:cNvPr id="4" name="TextBox 3"/>
-          <p:cNvSpPr txBox="1"/>
-          <p:nvPr/>
-        </p:nvSpPr>
-        <p:spPr>
-          <a:xfrm>
-            <a:off x="457200" y="164592"/>
-            <a:ext cx="11277295" cy="384048"/>
-          </a:xfrm>
-          <a:prstGeom prst="rect">
-            <a:avLst/>
-          </a:prstGeom>
-          <a:noFill/>
-        </p:spPr>
-        <p:txBody>
-          <a:bodyPr wrap="square">
-            <a:spAutoFit/>
-          </a:bodyPr>
-          <a:lstStyle/>
-          <a:p>
-            <a:r>
-              <a:rPr sz="2600" b="1" i="0">
-                <a:solidFill>
-                  <a:srgbClr val="FFFFFF"/>
-                </a:solidFill>
-                <a:latin typeface="Calibri"/>
-              </a:rPr>
-              <a:t>Del boceto al código Mermaid</a:t>
-            </a:r>
-          </a:p>
-        </p:txBody>
-      </p:sp>
-      <p:sp>
-        <p:nvSpPr>
-          <p:cNvPr id="5" name="TextBox 4"/>
-          <p:cNvSpPr txBox="1"/>
-          <p:nvPr/>
-        </p:nvSpPr>
-        <p:spPr>
-          <a:xfrm>
-            <a:off x="457200" y="566928"/>
-            <a:ext cx="11277295" cy="411480"/>
-          </a:xfrm>
-          <a:prstGeom prst="rect">
-            <a:avLst/>
-          </a:prstGeom>
-          <a:noFill/>
-        </p:spPr>
-        <p:txBody>
-          <a:bodyPr wrap="square">
-            <a:spAutoFit/>
-          </a:bodyPr>
-          <a:lstStyle/>
-          <a:p>
-            <a:r>
-              <a:rPr sz="1400" b="0" i="0">
-                <a:solidFill>
-                  <a:srgbClr val="B8D8EE"/>
-                </a:solidFill>
-                <a:latin typeface="Calibri"/>
-              </a:rPr>
-              <a:t>El diagrama se escribe como código: se versiona, se compara y se corrige</a:t>
-            </a:r>
-          </a:p>
-        </p:txBody>
-      </p:sp>
-      <p:sp>
-        <p:nvSpPr>
-          <p:cNvPr id="6" name="Rounded Rectangle 5"/>
-          <p:cNvSpPr/>
-          <p:nvPr/>
-        </p:nvSpPr>
-        <p:spPr>
-          <a:xfrm>
-            <a:off x="457200" y="1659636"/>
-            <a:ext cx="11277295" cy="1051560"/>
-          </a:xfrm>
-          <a:prstGeom prst="roundRect">
-            <a:avLst>
-              <a:gd name="adj" fmla="val 12000"/>
-            </a:avLst>
-          </a:prstGeom>
-          <a:solidFill>
-            <a:srgbClr val="F2F2F2"/>
-          </a:solidFill>
-          <a:ln>
-            <a:noFill/>
-          </a:ln>
-        </p:spPr>
-        <p:style>
-          <a:lnRef idx="1">
-            <a:schemeClr val="accent1"/>
-          </a:lnRef>
-          <a:fillRef idx="3">
-            <a:schemeClr val="accent1"/>
-          </a:fillRef>
-          <a:effectRef idx="2">
-            <a:schemeClr val="accent1"/>
-          </a:effectRef>
-          <a:fontRef idx="minor">
-            <a:schemeClr val="lt1"/>
-          </a:fontRef>
-        </p:style>
-        <p:txBody>
-          <a:bodyPr rtlCol="0" anchor="ctr"/>
-          <a:lstStyle/>
-          <a:p>
-            <a:pPr algn="ctr"/>
-          </a:p>
-        </p:txBody>
-      </p:sp>
-      <p:sp>
-        <p:nvSpPr>
-          <p:cNvPr id="7" name="Rounded Rectangle 6"/>
-          <p:cNvSpPr/>
-          <p:nvPr/>
-        </p:nvSpPr>
-        <p:spPr>
-          <a:xfrm>
-            <a:off x="594360" y="1965960"/>
-            <a:ext cx="438912" cy="438912"/>
-          </a:xfrm>
-          <a:prstGeom prst="roundRect">
-            <a:avLst>
-              <a:gd name="adj" fmla="val 12000"/>
-            </a:avLst>
-          </a:prstGeom>
-          <a:solidFill>
-            <a:srgbClr val="095292"/>
-          </a:solidFill>
-          <a:ln>
-            <a:noFill/>
-          </a:ln>
-        </p:spPr>
-        <p:style>
-          <a:lnRef idx="1">
-            <a:schemeClr val="accent1"/>
-          </a:lnRef>
-          <a:fillRef idx="3">
-            <a:schemeClr val="accent1"/>
-          </a:fillRef>
-          <a:effectRef idx="2">
-            <a:schemeClr val="accent1"/>
-          </a:effectRef>
-          <a:fontRef idx="minor">
-            <a:schemeClr val="lt1"/>
-          </a:fontRef>
-        </p:style>
-        <p:txBody>
-          <a:bodyPr rtlCol="0" anchor="ctr"/>
-          <a:lstStyle/>
-          <a:p>
-            <a:pPr algn="ctr"/>
-          </a:p>
-        </p:txBody>
-      </p:sp>
-      <p:sp>
-        <p:nvSpPr>
-          <p:cNvPr id="8" name="TextBox 7"/>
-          <p:cNvSpPr txBox="1"/>
-          <p:nvPr/>
-        </p:nvSpPr>
-        <p:spPr>
-          <a:xfrm>
-            <a:off x="594360" y="1965960"/>
-            <a:ext cx="438912" cy="438912"/>
-          </a:xfrm>
-          <a:prstGeom prst="rect">
-            <a:avLst/>
-          </a:prstGeom>
-          <a:noFill/>
-        </p:spPr>
-        <p:txBody>
-          <a:bodyPr wrap="square" anchor="ctr"/>
-          <a:lstStyle/>
-          <a:p>
-            <a:pPr algn="ctr"/>
-            <a:r>
-              <a:rPr sz="1600" b="1" i="0">
-                <a:solidFill>
-                  <a:srgbClr val="FFFFFF"/>
-                </a:solidFill>
-                <a:latin typeface="Calibri"/>
-              </a:rPr>
-              <a:t>1</a:t>
-            </a:r>
-          </a:p>
-        </p:txBody>
-      </p:sp>
-      <p:sp>
-        <p:nvSpPr>
-          <p:cNvPr id="9" name="TextBox 8"/>
-          <p:cNvSpPr txBox="1"/>
-          <p:nvPr/>
-        </p:nvSpPr>
-        <p:spPr>
-          <a:xfrm>
-            <a:off x="1188720" y="1751076"/>
-            <a:ext cx="10271455" cy="886968"/>
-          </a:xfrm>
-          <a:prstGeom prst="rect">
-            <a:avLst/>
-          </a:prstGeom>
-          <a:noFill/>
-        </p:spPr>
-        <p:txBody>
-          <a:bodyPr wrap="square" anchor="ctr"/>
-          <a:lstStyle/>
-          <a:p>
-            <a:r>
-              <a:rPr sz="1500" b="1" i="0">
-                <a:solidFill>
-                  <a:srgbClr val="095292"/>
-                </a:solidFill>
-                <a:latin typeface="Calibri"/>
-              </a:rPr>
-              <a:t>Diseña visual</a:t>
-            </a:r>
-          </a:p>
-          <a:p>
-            <a:pPr>
-              <a:spcBef>
-                <a:spcPts val="200"/>
-              </a:spcBef>
-            </a:pPr>
-            <a:r>
-              <a:rPr sz="1300" b="0" i="0">
-                <a:solidFill>
-                  <a:srgbClr val="333333"/>
-                </a:solidFill>
-                <a:latin typeface="Calibri"/>
-              </a:rPr>
-              <a:t>Dibuja el diagrama como quieras en Excalidraw o draw.io: es más rápido arrastrar cajas que escribir código, y ahí es donde se piensa el modelo.</a:t>
-            </a:r>
-          </a:p>
-        </p:txBody>
-      </p:sp>
-      <p:sp>
-        <p:nvSpPr>
-          <p:cNvPr id="10" name="Rounded Rectangle 9"/>
-          <p:cNvSpPr/>
-          <p:nvPr/>
-        </p:nvSpPr>
-        <p:spPr>
-          <a:xfrm>
-            <a:off x="457200" y="2802636"/>
-            <a:ext cx="11277295" cy="1051560"/>
-          </a:xfrm>
-          <a:prstGeom prst="roundRect">
-            <a:avLst>
-              <a:gd name="adj" fmla="val 12000"/>
-            </a:avLst>
-          </a:prstGeom>
-          <a:solidFill>
-            <a:srgbClr val="E8F4FA"/>
-          </a:solidFill>
-          <a:ln>
-            <a:noFill/>
-          </a:ln>
-        </p:spPr>
-        <p:style>
-          <a:lnRef idx="1">
-            <a:schemeClr val="accent1"/>
-          </a:lnRef>
-          <a:fillRef idx="3">
-            <a:schemeClr val="accent1"/>
-          </a:fillRef>
-          <a:effectRef idx="2">
-            <a:schemeClr val="accent1"/>
-          </a:effectRef>
-          <a:fontRef idx="minor">
-            <a:schemeClr val="lt1"/>
-          </a:fontRef>
-        </p:style>
-        <p:txBody>
-          <a:bodyPr rtlCol="0" anchor="ctr"/>
-          <a:lstStyle/>
-          <a:p>
-            <a:pPr algn="ctr"/>
-          </a:p>
-        </p:txBody>
-      </p:sp>
-      <p:sp>
-        <p:nvSpPr>
-          <p:cNvPr id="11" name="Rounded Rectangle 10"/>
-          <p:cNvSpPr/>
-          <p:nvPr/>
-        </p:nvSpPr>
-        <p:spPr>
-          <a:xfrm>
-            <a:off x="594360" y="3108960"/>
-            <a:ext cx="438912" cy="438912"/>
-          </a:xfrm>
-          <a:prstGeom prst="roundRect">
-            <a:avLst>
-              <a:gd name="adj" fmla="val 12000"/>
-            </a:avLst>
-          </a:prstGeom>
-          <a:solidFill>
-            <a:srgbClr val="095292"/>
-          </a:solidFill>
-          <a:ln>
-            <a:noFill/>
-          </a:ln>
-        </p:spPr>
-        <p:style>
-          <a:lnRef idx="1">
-            <a:schemeClr val="accent1"/>
-          </a:lnRef>
-          <a:fillRef idx="3">
-            <a:schemeClr val="accent1"/>
-          </a:fillRef>
-          <a:effectRef idx="2">
-            <a:schemeClr val="accent1"/>
-          </a:effectRef>
-          <a:fontRef idx="minor">
-            <a:schemeClr val="lt1"/>
-          </a:fontRef>
-        </p:style>
-        <p:txBody>
-          <a:bodyPr rtlCol="0" anchor="ctr"/>
-          <a:lstStyle/>
-          <a:p>
-            <a:pPr algn="ctr"/>
-          </a:p>
-        </p:txBody>
-      </p:sp>
-      <p:sp>
-        <p:nvSpPr>
-          <p:cNvPr id="12" name="TextBox 11"/>
-          <p:cNvSpPr txBox="1"/>
-          <p:nvPr/>
-        </p:nvSpPr>
-        <p:spPr>
-          <a:xfrm>
-            <a:off x="594360" y="3108960"/>
-            <a:ext cx="438912" cy="438912"/>
-          </a:xfrm>
-          <a:prstGeom prst="rect">
-            <a:avLst/>
-          </a:prstGeom>
-          <a:noFill/>
-        </p:spPr>
-        <p:txBody>
-          <a:bodyPr wrap="square" anchor="ctr"/>
-          <a:lstStyle/>
-          <a:p>
-            <a:pPr algn="ctr"/>
-            <a:r>
-              <a:rPr sz="1600" b="1" i="0">
-                <a:solidFill>
-                  <a:srgbClr val="FFFFFF"/>
-                </a:solidFill>
-                <a:latin typeface="Calibri"/>
-              </a:rPr>
-              <a:t>2</a:t>
-            </a:r>
-          </a:p>
-        </p:txBody>
-      </p:sp>
-      <p:sp>
-        <p:nvSpPr>
-          <p:cNvPr id="13" name="TextBox 12"/>
-          <p:cNvSpPr txBox="1"/>
-          <p:nvPr/>
-        </p:nvSpPr>
-        <p:spPr>
-          <a:xfrm>
-            <a:off x="1188720" y="2894076"/>
-            <a:ext cx="10271455" cy="886968"/>
-          </a:xfrm>
-          <a:prstGeom prst="rect">
-            <a:avLst/>
-          </a:prstGeom>
-          <a:noFill/>
-        </p:spPr>
-        <p:txBody>
-          <a:bodyPr wrap="square" anchor="ctr"/>
-          <a:lstStyle/>
-          <a:p>
-            <a:r>
-              <a:rPr sz="1500" b="1" i="0">
-                <a:solidFill>
-                  <a:srgbClr val="095292"/>
-                </a:solidFill>
-                <a:latin typeface="Calibri"/>
-              </a:rPr>
-              <a:t>Traduce con IA</a:t>
-            </a:r>
-          </a:p>
-          <a:p>
-            <a:pPr>
-              <a:spcBef>
-                <a:spcPts val="200"/>
-              </a:spcBef>
-            </a:pPr>
-            <a:r>
-              <a:rPr sz="1300" b="0" i="0">
-                <a:solidFill>
-                  <a:srgbClr val="333333"/>
-                </a:solidFill>
-                <a:latin typeface="Calibri"/>
-              </a:rPr>
-              <a:t>Describe tu boceto a una IA y pídele el código Mermaid usando flowchart. Revisa el resultado: la IA acierta la sintaxis, no tu modelo.</a:t>
-            </a:r>
-          </a:p>
-        </p:txBody>
-      </p:sp>
-      <p:sp>
-        <p:nvSpPr>
-          <p:cNvPr id="14" name="Rounded Rectangle 13"/>
-          <p:cNvSpPr/>
-          <p:nvPr/>
-        </p:nvSpPr>
-        <p:spPr>
-          <a:xfrm>
-            <a:off x="457200" y="3945636"/>
-            <a:ext cx="11277295" cy="1051560"/>
-          </a:xfrm>
-          <a:prstGeom prst="roundRect">
-            <a:avLst>
-              <a:gd name="adj" fmla="val 12000"/>
-            </a:avLst>
-          </a:prstGeom>
-          <a:solidFill>
-            <a:srgbClr val="F2F2F2"/>
-          </a:solidFill>
-          <a:ln>
-            <a:noFill/>
-          </a:ln>
-        </p:spPr>
-        <p:style>
-          <a:lnRef idx="1">
-            <a:schemeClr val="accent1"/>
-          </a:lnRef>
-          <a:fillRef idx="3">
-            <a:schemeClr val="accent1"/>
-          </a:fillRef>
-          <a:effectRef idx="2">
-            <a:schemeClr val="accent1"/>
-          </a:effectRef>
-          <a:fontRef idx="minor">
-            <a:schemeClr val="lt1"/>
-          </a:fontRef>
-        </p:style>
-        <p:txBody>
-          <a:bodyPr rtlCol="0" anchor="ctr"/>
-          <a:lstStyle/>
-          <a:p>
-            <a:pPr algn="ctr"/>
-          </a:p>
-        </p:txBody>
-      </p:sp>
-      <p:sp>
-        <p:nvSpPr>
-          <p:cNvPr id="15" name="Rounded Rectangle 14"/>
-          <p:cNvSpPr/>
-          <p:nvPr/>
-        </p:nvSpPr>
-        <p:spPr>
-          <a:xfrm>
-            <a:off x="594360" y="4251960"/>
-            <a:ext cx="438912" cy="438912"/>
-          </a:xfrm>
-          <a:prstGeom prst="roundRect">
-            <a:avLst>
-              <a:gd name="adj" fmla="val 12000"/>
-            </a:avLst>
-          </a:prstGeom>
-          <a:solidFill>
-            <a:srgbClr val="095292"/>
-          </a:solidFill>
-          <a:ln>
-            <a:noFill/>
-          </a:ln>
-        </p:spPr>
-        <p:style>
-          <a:lnRef idx="1">
-            <a:schemeClr val="accent1"/>
-          </a:lnRef>
-          <a:fillRef idx="3">
-            <a:schemeClr val="accent1"/>
-          </a:fillRef>
-          <a:effectRef idx="2">
-            <a:schemeClr val="accent1"/>
-          </a:effectRef>
-          <a:fontRef idx="minor">
-            <a:schemeClr val="lt1"/>
-          </a:fontRef>
-        </p:style>
-        <p:txBody>
-          <a:bodyPr rtlCol="0" anchor="ctr"/>
-          <a:lstStyle/>
-          <a:p>
-            <a:pPr algn="ctr"/>
-          </a:p>
-        </p:txBody>
-      </p:sp>
-      <p:sp>
-        <p:nvSpPr>
-          <p:cNvPr id="16" name="TextBox 15"/>
-          <p:cNvSpPr txBox="1"/>
-          <p:nvPr/>
-        </p:nvSpPr>
-        <p:spPr>
-          <a:xfrm>
-            <a:off x="594360" y="4251960"/>
-            <a:ext cx="438912" cy="438912"/>
-          </a:xfrm>
-          <a:prstGeom prst="rect">
-            <a:avLst/>
-          </a:prstGeom>
-          <a:noFill/>
-        </p:spPr>
-        <p:txBody>
-          <a:bodyPr wrap="square" anchor="ctr"/>
-          <a:lstStyle/>
-          <a:p>
-            <a:pPr algn="ctr"/>
-            <a:r>
-              <a:rPr sz="1600" b="1" i="0">
-                <a:solidFill>
-                  <a:srgbClr val="FFFFFF"/>
-                </a:solidFill>
-                <a:latin typeface="Calibri"/>
-              </a:rPr>
-              <a:t>3</a:t>
-            </a:r>
-          </a:p>
-        </p:txBody>
-      </p:sp>
-      <p:sp>
-        <p:nvSpPr>
-          <p:cNvPr id="17" name="TextBox 16"/>
-          <p:cNvSpPr txBox="1"/>
-          <p:nvPr/>
-        </p:nvSpPr>
-        <p:spPr>
-          <a:xfrm>
-            <a:off x="1188720" y="4037076"/>
-            <a:ext cx="10271455" cy="886968"/>
-          </a:xfrm>
-          <a:prstGeom prst="rect">
-            <a:avLst/>
-          </a:prstGeom>
-          <a:noFill/>
-        </p:spPr>
-        <p:txBody>
-          <a:bodyPr wrap="square" anchor="ctr"/>
-          <a:lstStyle/>
-          <a:p>
-            <a:r>
-              <a:rPr sz="1500" b="1" i="0">
-                <a:solidFill>
-                  <a:srgbClr val="095292"/>
-                </a:solidFill>
-                <a:latin typeface="Calibri"/>
-              </a:rPr>
-              <a:t>Renderiza en un visor</a:t>
-            </a:r>
-          </a:p>
-          <a:p>
-            <a:pPr>
-              <a:spcBef>
-                <a:spcPts val="200"/>
-              </a:spcBef>
-            </a:pPr>
-            <a:r>
-              <a:rPr sz="1300" b="0" i="0">
-                <a:solidFill>
-                  <a:srgbClr val="333333"/>
-                </a:solidFill>
-                <a:latin typeface="Calibri"/>
-              </a:rPr>
-              <a:t>Pega el código en un visor Mermaid (mermaid.live o la vista previa de tu editor) y míralo dibujado. Si no renderiza, corrige ahí: un end faltante o un rótulo sin comillas.</a:t>
-            </a:r>
-          </a:p>
-        </p:txBody>
-      </p:sp>
-      <p:sp>
-        <p:nvSpPr>
-          <p:cNvPr id="18" name="Rounded Rectangle 17"/>
-          <p:cNvSpPr/>
-          <p:nvPr/>
-        </p:nvSpPr>
-        <p:spPr>
-          <a:xfrm>
-            <a:off x="457200" y="5088636"/>
-            <a:ext cx="11277295" cy="1051560"/>
-          </a:xfrm>
-          <a:prstGeom prst="roundRect">
-            <a:avLst>
-              <a:gd name="adj" fmla="val 12000"/>
-            </a:avLst>
-          </a:prstGeom>
-          <a:solidFill>
-            <a:srgbClr val="E8F4FA"/>
-          </a:solidFill>
-          <a:ln>
-            <a:noFill/>
-          </a:ln>
-        </p:spPr>
-        <p:style>
-          <a:lnRef idx="1">
-            <a:schemeClr val="accent1"/>
-          </a:lnRef>
-          <a:fillRef idx="3">
-            <a:schemeClr val="accent1"/>
-          </a:fillRef>
-          <a:effectRef idx="2">
-            <a:schemeClr val="accent1"/>
-          </a:effectRef>
-          <a:fontRef idx="minor">
-            <a:schemeClr val="lt1"/>
-          </a:fontRef>
-        </p:style>
-        <p:txBody>
-          <a:bodyPr rtlCol="0" anchor="ctr"/>
-          <a:lstStyle/>
-          <a:p>
-            <a:pPr algn="ctr"/>
-          </a:p>
-        </p:txBody>
-      </p:sp>
-      <p:sp>
-        <p:nvSpPr>
-          <p:cNvPr id="19" name="Rounded Rectangle 18"/>
-          <p:cNvSpPr/>
-          <p:nvPr/>
-        </p:nvSpPr>
-        <p:spPr>
-          <a:xfrm>
-            <a:off x="594360" y="5394960"/>
-            <a:ext cx="438912" cy="438912"/>
-          </a:xfrm>
-          <a:prstGeom prst="roundRect">
-            <a:avLst>
-              <a:gd name="adj" fmla="val 12000"/>
-            </a:avLst>
-          </a:prstGeom>
-          <a:solidFill>
-            <a:srgbClr val="095292"/>
-          </a:solidFill>
-          <a:ln>
-            <a:noFill/>
-          </a:ln>
-        </p:spPr>
-        <p:style>
-          <a:lnRef idx="1">
-            <a:schemeClr val="accent1"/>
-          </a:lnRef>
-          <a:fillRef idx="3">
-            <a:schemeClr val="accent1"/>
-          </a:fillRef>
-          <a:effectRef idx="2">
-            <a:schemeClr val="accent1"/>
-          </a:effectRef>
-          <a:fontRef idx="minor">
-            <a:schemeClr val="lt1"/>
-          </a:fontRef>
-        </p:style>
-        <p:txBody>
-          <a:bodyPr rtlCol="0" anchor="ctr"/>
-          <a:lstStyle/>
-          <a:p>
-            <a:pPr algn="ctr"/>
-          </a:p>
-        </p:txBody>
-      </p:sp>
-      <p:sp>
-        <p:nvSpPr>
-          <p:cNvPr id="20" name="TextBox 19"/>
-          <p:cNvSpPr txBox="1"/>
-          <p:nvPr/>
-        </p:nvSpPr>
-        <p:spPr>
-          <a:xfrm>
-            <a:off x="594360" y="5394960"/>
-            <a:ext cx="438912" cy="438912"/>
-          </a:xfrm>
-          <a:prstGeom prst="rect">
-            <a:avLst/>
-          </a:prstGeom>
-          <a:noFill/>
-        </p:spPr>
-        <p:txBody>
-          <a:bodyPr wrap="square" anchor="ctr"/>
-          <a:lstStyle/>
-          <a:p>
-            <a:pPr algn="ctr"/>
-            <a:r>
-              <a:rPr sz="1600" b="1" i="0">
-                <a:solidFill>
-                  <a:srgbClr val="FFFFFF"/>
-                </a:solidFill>
-                <a:latin typeface="Calibri"/>
-              </a:rPr>
-              <a:t>4</a:t>
-            </a:r>
-          </a:p>
-        </p:txBody>
-      </p:sp>
-      <p:sp>
-        <p:nvSpPr>
-          <p:cNvPr id="21" name="TextBox 20"/>
-          <p:cNvSpPr txBox="1"/>
-          <p:nvPr/>
-        </p:nvSpPr>
-        <p:spPr>
-          <a:xfrm>
-            <a:off x="1188720" y="5180076"/>
-            <a:ext cx="10271455" cy="886968"/>
-          </a:xfrm>
-          <a:prstGeom prst="rect">
-            <a:avLst/>
-          </a:prstGeom>
-          <a:noFill/>
-        </p:spPr>
-        <p:txBody>
-          <a:bodyPr wrap="square" anchor="ctr"/>
-          <a:lstStyle/>
-          <a:p>
-            <a:r>
-              <a:rPr sz="1500" b="1" i="0">
-                <a:solidFill>
-                  <a:srgbClr val="095292"/>
-                </a:solidFill>
-                <a:latin typeface="Calibri"/>
-              </a:rPr>
-              <a:t>Guarda código e imagen</a:t>
-            </a:r>
-          </a:p>
-          <a:p>
-            <a:pPr>
-              <a:spcBef>
-                <a:spcPts val="200"/>
-              </a:spcBef>
-            </a:pPr>
-            <a:r>
-              <a:rPr sz="1300" b="0" i="0">
-                <a:solidFill>
-                  <a:srgbClr val="333333"/>
-                </a:solidFill>
-                <a:latin typeface="Calibri"/>
-              </a:rPr>
-              <a:t>El código es la fuente del diagrama: guárdalo con tu proyecto junto con el PNG exportado.</a:t>
-            </a:r>
-          </a:p>
-        </p:txBody>
-      </p:sp>
-      <p:sp>
-        <p:nvSpPr>
-          <p:cNvPr id="22" name="TextBox 21"/>
-          <p:cNvSpPr txBox="1"/>
-          <p:nvPr/>
-        </p:nvSpPr>
-        <p:spPr>
-          <a:xfrm>
-            <a:off x="11185855" y="6473952"/>
-            <a:ext cx="640080" cy="274320"/>
-          </a:xfrm>
-          <a:prstGeom prst="rect">
-            <a:avLst/>
-          </a:prstGeom>
-          <a:noFill/>
-        </p:spPr>
-        <p:txBody>
-          <a:bodyPr wrap="square">
-            <a:spAutoFit/>
-          </a:bodyPr>
-          <a:lstStyle/>
-          <a:p>
-            <a:pPr algn="r"/>
-            <a:r>
-              <a:rPr sz="1100" b="0" i="0">
-                <a:solidFill>
-                  <a:srgbClr val="666666"/>
-                </a:solidFill>
-                <a:latin typeface="Calibri"/>
-              </a:rPr>
-              <a:t>30</a:t>
-            </a:r>
-          </a:p>
-        </p:txBody>
-      </p:sp>
-    </p:spTree>
-  </p:cSld>
-  <p:clrMapOvr>
-    <a:masterClrMapping/>
-  </p:clrMapOvr>
-</p:sld>
-</file>
-
-<file path=ppt/slides/slide31.xml><?xml version="1.0" encoding="utf-8"?>
-<p:sld xmlns:a="http://schemas.openxmlformats.org/drawingml/2006/main" xmlns:p="http://schemas.openxmlformats.org/presentationml/2006/main" xmlns:r="http://schemas.openxmlformats.org/officeDocument/2006/relationships">
-  <p:cSld>
-    <p:bg>
-      <p:bgPr>
-        <a:solidFill>
-          <a:srgbClr val="FFFFFF"/>
-        </a:solidFill>
-        <a:effectLst/>
-      </p:bgPr>
-    </p:bg>
-    <p:spTree>
-      <p:nvGrpSpPr>
-        <p:cNvPr id="1" name=""/>
-        <p:cNvGrpSpPr/>
-        <p:nvPr/>
-      </p:nvGrpSpPr>
-      <p:grpSpPr/>
-      <p:sp>
-        <p:nvSpPr>
-          <p:cNvPr id="2" name="Rectangle 1"/>
-          <p:cNvSpPr/>
-          <p:nvPr/>
-        </p:nvSpPr>
-        <p:spPr>
-          <a:xfrm>
-            <a:off x="0" y="0"/>
-            <a:ext cx="12191695" cy="164592"/>
-          </a:xfrm>
-          <a:prstGeom prst="rect">
-            <a:avLst/>
-          </a:prstGeom>
-          <a:solidFill>
-            <a:srgbClr val="269CCB"/>
-          </a:solidFill>
-          <a:ln>
-            <a:noFill/>
-          </a:ln>
-        </p:spPr>
-        <p:style>
-          <a:lnRef idx="1">
-            <a:schemeClr val="accent1"/>
-          </a:lnRef>
-          <a:fillRef idx="3">
-            <a:schemeClr val="accent1"/>
-          </a:fillRef>
-          <a:effectRef idx="2">
-            <a:schemeClr val="accent1"/>
-          </a:effectRef>
-          <a:fontRef idx="minor">
-            <a:schemeClr val="lt1"/>
-          </a:fontRef>
-        </p:style>
-        <p:txBody>
-          <a:bodyPr rtlCol="0" anchor="ctr"/>
-          <a:lstStyle/>
-          <a:p>
-            <a:pPr algn="ctr"/>
-          </a:p>
-        </p:txBody>
-      </p:sp>
-      <p:pic>
-        <p:nvPicPr>
-          <p:cNvPr id="3" name="Picture 2" descr="logo_uniajc_color.png"/>
-          <p:cNvPicPr>
-            <a:picLocks noChangeAspect="1"/>
-          </p:cNvPicPr>
-          <p:nvPr/>
-        </p:nvPicPr>
-        <p:blipFill>
-          <a:blip r:embed="rId2"/>
-          <a:stretch>
-            <a:fillRect/>
-          </a:stretch>
-        </p:blipFill>
-        <p:spPr>
-          <a:xfrm>
-            <a:off x="10271455" y="5998464"/>
-            <a:ext cx="1463040" cy="643233"/>
-          </a:xfrm>
-          <a:prstGeom prst="rect">
-            <a:avLst/>
-          </a:prstGeom>
-        </p:spPr>
-      </p:pic>
-      <p:sp>
-        <p:nvSpPr>
-          <p:cNvPr id="4" name="TextBox 3"/>
-          <p:cNvSpPr txBox="1"/>
-          <p:nvPr/>
-        </p:nvSpPr>
-        <p:spPr>
-          <a:xfrm>
-            <a:off x="457200" y="1737360"/>
-            <a:ext cx="11277295" cy="1097280"/>
-          </a:xfrm>
-          <a:prstGeom prst="rect">
-            <a:avLst/>
-          </a:prstGeom>
-          <a:noFill/>
-        </p:spPr>
-        <p:txBody>
-          <a:bodyPr wrap="square" anchor="ctr"/>
-          <a:lstStyle/>
-          <a:p>
-            <a:pPr algn="ctr"/>
-            <a:r>
-              <a:rPr sz="3400" b="1" i="0">
-                <a:solidFill>
-                  <a:srgbClr val="095292"/>
-                </a:solidFill>
-                <a:latin typeface="Calibri"/>
-              </a:rPr>
-              <a:t>Clase 7 · cierre conceptual</a:t>
-            </a:r>
-          </a:p>
-        </p:txBody>
-      </p:sp>
-      <p:sp>
-        <p:nvSpPr>
-          <p:cNvPr id="5" name="TextBox 4"/>
-          <p:cNvSpPr txBox="1"/>
-          <p:nvPr/>
-        </p:nvSpPr>
-        <p:spPr>
-          <a:xfrm>
-            <a:off x="457200" y="3017520"/>
-            <a:ext cx="11277295" cy="1645920"/>
-          </a:xfrm>
-          <a:prstGeom prst="rect">
-            <a:avLst/>
-          </a:prstGeom>
-          <a:noFill/>
-        </p:spPr>
-        <p:txBody>
-          <a:bodyPr wrap="square">
-            <a:spAutoFit/>
-          </a:bodyPr>
-          <a:lstStyle/>
-          <a:p>
-            <a:pPr algn="ctr">
-              <a:spcAft>
-                <a:spcPts val="600"/>
-              </a:spcAft>
-            </a:pPr>
-            <a:r>
-              <a:rPr sz="1600" b="0" i="0">
-                <a:solidFill>
-                  <a:srgbClr val="333333"/>
-                </a:solidFill>
-                <a:latin typeface="Calibri"/>
-              </a:rPr>
-              <a:t>Modelar red lógica (cliente, edge, app, datos) sin VPC de pago.</a:t>
-            </a:r>
-          </a:p>
-          <a:p>
-            <a:pPr algn="ctr">
-              <a:spcAft>
-                <a:spcPts val="600"/>
-              </a:spcAft>
-            </a:pPr>
-            <a:r>
-              <a:rPr sz="1600" b="0" i="0">
-                <a:solidFill>
-                  <a:srgbClr val="333333"/>
-                </a:solidFill>
-                <a:latin typeface="Calibri"/>
-              </a:rPr>
-              <a:t>Elegir tipo de almacenamiento según el caso de uso de la app.</a:t>
-            </a:r>
-          </a:p>
-          <a:p>
-            <a:pPr algn="ctr">
-              <a:spcAft>
-                <a:spcPts val="600"/>
-              </a:spcAft>
-            </a:pPr>
-            <a:r>
-              <a:rPr sz="1600" b="0" i="0">
-                <a:solidFill>
-                  <a:srgbClr val="333333"/>
-                </a:solidFill>
-                <a:latin typeface="Calibri"/>
-              </a:rPr>
-              <a:t>Completar el diagrama de despliegue.</a:t>
-            </a:r>
-          </a:p>
-        </p:txBody>
-      </p:sp>
-      <p:sp>
-        <p:nvSpPr>
-          <p:cNvPr id="6" name="TextBox 5"/>
-          <p:cNvSpPr txBox="1"/>
-          <p:nvPr/>
-        </p:nvSpPr>
-        <p:spPr>
-          <a:xfrm>
-            <a:off x="457200" y="4754880"/>
-            <a:ext cx="11277295" cy="640080"/>
-          </a:xfrm>
-          <a:prstGeom prst="rect">
-            <a:avLst/>
-          </a:prstGeom>
-          <a:noFill/>
-        </p:spPr>
-        <p:txBody>
-          <a:bodyPr wrap="square">
-            <a:spAutoFit/>
-          </a:bodyPr>
-          <a:lstStyle/>
-          <a:p>
-            <a:pPr algn="ctr"/>
-            <a:r>
-              <a:rPr sz="2000" b="1" i="0">
-                <a:solidFill>
-                  <a:srgbClr val="269CCB"/>
-                </a:solidFill>
-                <a:latin typeface="Calibri"/>
-              </a:rPr>
-              <a:t>Teoría al servicio del diseño</a:t>
-            </a:r>
-          </a:p>
-        </p:txBody>
-      </p:sp>
-    </p:spTree>
-  </p:cSld>
-  <p:clrMapOvr>
-    <a:masterClrMapping/>
-  </p:clrMapOvr>
-</p:sld>
-</file>
-
 <file path=ppt/slides/slide4.xml><?xml version="1.0" encoding="utf-8"?>
 <p:sld xmlns:a="http://schemas.openxmlformats.org/drawingml/2006/main" xmlns:p="http://schemas.openxmlformats.org/presentationml/2006/main" xmlns:r="http://schemas.openxmlformats.org/officeDocument/2006/relationships">
   <p:cSld>
@@ -14292,38 +13093,6 @@
                 </a:solidFill>
                 <a:latin typeface="Calibri"/>
               </a:rPr>
-              <a:t>–   En la Clase 1 se hizo C4 Context: el sistema como una caja, quien lo usa y con que sistemas externos habla; responde QUIEN.</a:t>
-            </a:r>
-          </a:p>
-          <a:p>
-            <a:pPr>
-              <a:spcAft>
-                <a:spcPts val="800"/>
-              </a:spcAft>
-            </a:pPr>
-            <a:r>
-              <a:rPr sz="2000" b="0" i="0">
-                <a:solidFill>
-                  <a:srgbClr val="333333"/>
-                </a:solidFill>
-                <a:latin typeface="Calibri"/>
-              </a:rPr>
-              <a:t>–   En la Clase 4 se hizo C4 Containers: que aplicaciones, servicios y bases de datos lo componen por dentro y con que contratos se comunican; responde QUE.</a:t>
-            </a:r>
-          </a:p>
-          <a:p>
-            <a:pPr>
-              <a:spcAft>
-                <a:spcPts val="800"/>
-              </a:spcAft>
-            </a:pPr>
-            <a:r>
-              <a:rPr sz="2000" b="0" i="0">
-                <a:solidFill>
-                  <a:srgbClr val="333333"/>
-                </a:solidFill>
-                <a:latin typeface="Calibri"/>
-              </a:rPr>
               <a:t>–   Hoy se hace el despliegue: en que nodos se ejecutan esos contenedores, en que zona de red esta cada nodo, por que puerto y protocolo pasa cada flecha, y donde quedan los datos; responde DONDE.</a:t>
             </a:r>
           </a:p>
@@ -14547,22 +13316,6 @@
             <a:spAutoFit/>
           </a:bodyPr>
           <a:lstStyle/>
-          <a:p>
-            <a:pPr>
-              <a:spcAft>
-                <a:spcPts val="800"/>
-              </a:spcAft>
-            </a:pPr>
-            <a:r>
-              <a:rPr sz="2000" b="0" i="0">
-                <a:solidFill>
-                  <a:srgbClr val="333333"/>
-                </a:solidFill>
-                <a:latin typeface="Calibri"/>
-              </a:rPr>
-              <a:t>–   Es el mismo sistema desde un tercer angulo, no un sistema nuevo, y por eso los nombres deben coincidir con los de la Clase 4.</a:t>
-            </a:r>
-          </a:p>
           <a:p>
             <a:pPr>
               <a:spcAft>

--- a/Arquitectura de Sistemas Computacionales/Clases/Clase 7 - Redes y almacenamiento cloud/Presentacion.pptx
+++ b/Arquitectura de Sistemas Computacionales/Clases/Clase 7 - Redes y almacenamiento cloud/Presentacion.pptx
@@ -624,474 +624,6 @@
 </p:notes>
 </file>
 
-<file path=ppt/notesSlides/notesSlide10.xml><?xml version="1.0" encoding="utf-8"?>
-<p:notes xmlns:a="http://schemas.openxmlformats.org/drawingml/2006/main" xmlns:p="http://schemas.openxmlformats.org/presentationml/2006/main" xmlns:r="http://schemas.openxmlformats.org/officeDocument/2006/relationships">
-  <p:cSld>
-    <p:spTree>
-      <p:nvGrpSpPr>
-        <p:cNvPr id="1" name=""/>
-        <p:cNvGrpSpPr/>
-        <p:nvPr/>
-      </p:nvGrpSpPr>
-      <p:grpSpPr>
-        <a:xfrm>
-          <a:off x="0" y="0"/>
-          <a:ext cx="0" cy="0"/>
-          <a:chOff x="0" y="0"/>
-          <a:chExt cx="0" cy="0"/>
-        </a:xfrm>
-      </p:grpSpPr>
-      <p:sp>
-        <p:nvSpPr>
-          <p:cNvPr id="2" name="Slide Image Placeholder 1"/>
-          <p:cNvSpPr>
-            <a:spLocks noGrp="1"/>
-          </p:cNvSpPr>
-          <p:nvPr>
-            <p:ph type="sldImg" idx="2"/>
-          </p:nvPr>
-        </p:nvSpPr>
-        <p:spPr/>
-      </p:sp>
-      <p:sp>
-        <p:nvSpPr>
-          <p:cNvPr id="3" name="Notes Placeholder 2"/>
-          <p:cNvSpPr>
-            <a:spLocks noGrp="1"/>
-          </p:cNvSpPr>
-          <p:nvPr>
-            <p:ph type="body" idx="3" sz="quarter"/>
-          </p:nvPr>
-        </p:nvSpPr>
-        <p:spPr/>
-        <p:txBody>
-          <a:bodyPr/>
-          <a:lstStyle/>
-          <a:p>
-            <a:r>
-              <a:t>TEXTO COMPLETO DE LA LÁMINA (se proyecta resumido):</a:t>
-            </a:r>
-          </a:p>
-          <a:p/>
-          <a:p>
-            <a:r>
-              <a:t>Tres zonas rotuladas · cada componente en su zona · puerto de cada uno.</a:t>
-            </a:r>
-          </a:p>
-          <a:p/>
-          <a:p>
-            <a:r>
-              <a:t>Fronteras de confianza marcadas · que renderice sin error en un visor Mermaid.</a:t>
-            </a:r>
-          </a:p>
-          <a:p/>
-          <a:p>
-            <a:r>
-              <a:t>Debe alinearse con el C4 Containers (mismos nombres).</a:t>
-            </a:r>
-          </a:p>
-          <a:p/>
-          <a:p>
-            <a:r>
-              <a:t>Cada flecha lleva protocolo y puerto: HTTPS 443 al edge, HTTP 8080 a la API, PostgreSQL 5432 a la base.</a:t>
-            </a:r>
-          </a:p>
-          <a:p/>
-          <a:p>
-            <a:r>
-              <a:t>Los servicios externos (correo, pagos) se dibujan fuera de las tres zonas: ahí está la frontera de confianza.</a:t>
-            </a:r>
-          </a:p>
-        </p:txBody>
-      </p:sp>
-      <p:sp>
-        <p:nvSpPr>
-          <p:cNvPr id="4" name="Slide Number Placeholder 3"/>
-          <p:cNvSpPr>
-            <a:spLocks noGrp="1"/>
-          </p:cNvSpPr>
-          <p:nvPr>
-            <p:ph type="sldNum" idx="5" sz="quarter"/>
-          </p:nvPr>
-        </p:nvSpPr>
-        <p:spPr/>
-      </p:sp>
-    </p:spTree>
-  </p:cSld>
-  <p:clrMapOvr>
-    <a:masterClrMapping/>
-  </p:clrMapOvr>
-</p:notes>
-</file>
-
-<file path=ppt/notesSlides/notesSlide11.xml><?xml version="1.0" encoding="utf-8"?>
-<p:notes xmlns:a="http://schemas.openxmlformats.org/drawingml/2006/main" xmlns:p="http://schemas.openxmlformats.org/presentationml/2006/main" xmlns:r="http://schemas.openxmlformats.org/officeDocument/2006/relationships">
-  <p:cSld>
-    <p:spTree>
-      <p:nvGrpSpPr>
-        <p:cNvPr id="1" name=""/>
-        <p:cNvGrpSpPr/>
-        <p:nvPr/>
-      </p:nvGrpSpPr>
-      <p:grpSpPr>
-        <a:xfrm>
-          <a:off x="0" y="0"/>
-          <a:ext cx="0" cy="0"/>
-          <a:chOff x="0" y="0"/>
-          <a:chExt cx="0" cy="0"/>
-        </a:xfrm>
-      </p:grpSpPr>
-      <p:sp>
-        <p:nvSpPr>
-          <p:cNvPr id="2" name="Slide Image Placeholder 1"/>
-          <p:cNvSpPr>
-            <a:spLocks noGrp="1"/>
-          </p:cNvSpPr>
-          <p:nvPr>
-            <p:ph type="sldImg" idx="2"/>
-          </p:nvPr>
-        </p:nvSpPr>
-        <p:spPr/>
-      </p:sp>
-      <p:sp>
-        <p:nvSpPr>
-          <p:cNvPr id="3" name="Notes Placeholder 2"/>
-          <p:cNvSpPr>
-            <a:spLocks noGrp="1"/>
-          </p:cNvSpPr>
-          <p:nvPr>
-            <p:ph type="body" idx="3" sz="quarter"/>
-          </p:nvPr>
-        </p:nvSpPr>
-        <p:spPr/>
-        <p:txBody>
-          <a:bodyPr/>
-          <a:lstStyle/>
-          <a:p>
-            <a:r>
-              <a:t>DESARROLLO (para explicarlo, no se proyecta):</a:t>
-            </a:r>
-          </a:p>
-          <a:p/>
-          <a:p>
-            <a:r>
-              <a:t>Un usuario final abre cloudlite.example en su telefono; el DNS resuelve el nombre a la IP publica del balanceador; el navegador abre una conexion HTTPS al puerto 443 de ese balanceador</a:t>
-            </a:r>
-          </a:p>
-          <a:p/>
-          <a:p>
-            <a:r>
-              <a:t>Que vive en la zona publica; el balanceador elige una de las dos instancias del contenedor de la API, en la zona privada</a:t>
-            </a:r>
-          </a:p>
-          <a:p/>
-          <a:p>
-            <a:r>
-              <a:t>Y le reenvia la peticion por HTTP al puerto 8080; la API consulta el motor de base de datos en la zona de datos por el puerto 5432 y devuelve JSON por el mismo camino.</a:t>
-            </a:r>
-          </a:p>
-          <a:p/>
-          <a:p>
-            <a:r>
-              <a:t>El recorrido completo tiene 4 saltos: DNS, balanceador en la zona publica, API en la zona privada y base de datos en la zona de datos.</a:t>
-            </a:r>
-          </a:p>
-          <a:p/>
-          <a:p>
-            <a:r>
-              <a:t>Cada salto de red dentro de un mismo centro de datos suma del orden de 1 milisegundo, y por eso un diseno que encadena servicios innecesarios es lento aunque cada pieza sea rapida.</a:t>
-            </a:r>
-          </a:p>
-          <a:p/>
-          <a:p>
-            <a:r>
-              <a:t>(No se proyecta) La mejor forma de dictar la clase es seguir una peticion de CloudLite de punta a punta sobre el diagrama proyectado.</a:t>
-            </a:r>
-          </a:p>
-          <a:p/>
-          <a:p>
-            <a:r>
-              <a:t>(No se proyecta) Ese recorrido, con cada flecha etiquetada con protocolo y puerto y cada caja dentro de su zona, es la estructura que la pregunta 4 califica; lo que se pega en la plataforma es su version en Mermaid, que es la seccion siguiente.</a:t>
-            </a:r>
-          </a:p>
-          <a:p/>
-          <a:p>
-            <a:r>
-              <a:t>(No se proyecta) Sirve tambien para citar numeros: una consulta simple bien indexada responde entre 1 y 20 milisegundos, y el objetivo que se formalizara en la Clase 12 suele fijarse por convencion en menos de 300 milisegundos para el 95 por ciento de las peticiones.</a:t>
-            </a:r>
-          </a:p>
-          <a:p/>
-          <a:p>
-            <a:r>
-              <a:t>(No se proyecta) Con eso el grupo ve que si una pantalla dispara veinte consultas encadenadas el problema es de diseno y no de servidor.</a:t>
-            </a:r>
-          </a:p>
-        </p:txBody>
-      </p:sp>
-      <p:sp>
-        <p:nvSpPr>
-          <p:cNvPr id="4" name="Slide Number Placeholder 3"/>
-          <p:cNvSpPr>
-            <a:spLocks noGrp="1"/>
-          </p:cNvSpPr>
-          <p:nvPr>
-            <p:ph type="sldNum" idx="5" sz="quarter"/>
-          </p:nvPr>
-        </p:nvSpPr>
-        <p:spPr/>
-      </p:sp>
-    </p:spTree>
-  </p:cSld>
-  <p:clrMapOvr>
-    <a:masterClrMapping/>
-  </p:clrMapOvr>
-</p:notes>
-</file>
-
-<file path=ppt/notesSlides/notesSlide12.xml><?xml version="1.0" encoding="utf-8"?>
-<p:notes xmlns:a="http://schemas.openxmlformats.org/drawingml/2006/main" xmlns:p="http://schemas.openxmlformats.org/presentationml/2006/main" xmlns:r="http://schemas.openxmlformats.org/officeDocument/2006/relationships">
-  <p:cSld>
-    <p:spTree>
-      <p:nvGrpSpPr>
-        <p:cNvPr id="1" name=""/>
-        <p:cNvGrpSpPr/>
-        <p:nvPr/>
-      </p:nvGrpSpPr>
-      <p:grpSpPr>
-        <a:xfrm>
-          <a:off x="0" y="0"/>
-          <a:ext cx="0" cy="0"/>
-          <a:chOff x="0" y="0"/>
-          <a:chExt cx="0" cy="0"/>
-        </a:xfrm>
-      </p:grpSpPr>
-      <p:sp>
-        <p:nvSpPr>
-          <p:cNvPr id="2" name="Slide Image Placeholder 1"/>
-          <p:cNvSpPr>
-            <a:spLocks noGrp="1"/>
-          </p:cNvSpPr>
-          <p:nvPr>
-            <p:ph type="sldImg" idx="2"/>
-          </p:nvPr>
-        </p:nvSpPr>
-        <p:spPr/>
-      </p:sp>
-      <p:sp>
-        <p:nvSpPr>
-          <p:cNvPr id="3" name="Notes Placeholder 2"/>
-          <p:cNvSpPr>
-            <a:spLocks noGrp="1"/>
-          </p:cNvSpPr>
-          <p:nvPr>
-            <p:ph type="body" idx="3" sz="quarter"/>
-          </p:nvPr>
-        </p:nvSpPr>
-        <p:spPr/>
-        <p:txBody>
-          <a:bodyPr/>
-          <a:lstStyle/>
-          <a:p>
-            <a:r>
-              <a:t>DESARROLLO (para explicarlo, no se proyecta):</a:t>
-            </a:r>
-          </a:p>
-          <a:p/>
-          <a:p>
-            <a:r>
-              <a:t>Primera: la palabra inicial.</a:t>
-            </a:r>
-          </a:p>
-          <a:p/>
-          <a:p>
-            <a:r>
-              <a:t>Segunda: cada zona es un subgraph con su rotulo entre comillas y su propio end.</a:t>
-            </a:r>
-          </a:p>
-          <a:p/>
-          <a:p>
-            <a:r>
-              <a:t>Los subgraph son las tres zonas; olvidar un end es la causa numero uno de que el diagrama no se dibuje, porque el bloque queda abierto.</a:t>
-            </a:r>
-          </a:p>
-          <a:p/>
-          <a:p>
-            <a:r>
-              <a:t>Tercera: la forma de la caja dice que es la pieza.</a:t>
-            </a:r>
-          </a:p>
-          <a:p/>
-          <a:p>
-            <a:r>
-              <a:t>Los corchetes rectos son un proceso o servicio, y la combinacion de corchete y parentesis, es decir abrir corchete parentesis, es la base de datos, que se lee como cilindro.</a:t>
-            </a:r>
-          </a:p>
-          <a:p/>
-          <a:p>
-            <a:r>
-              <a:t>Cuarta: el puerto va DENTRO del rotulo de la caja, separado con la etiqueta de salto de linea de HTML, y la etiqueta de la flecha va entre barras verticales y comillas, con el protocolo y el puerto.</a:t>
-            </a:r>
-          </a:p>
-          <a:p/>
-          <a:p>
-            <a:r>
-              <a:t>Es la forma mas segura de etiquetar los puertos sin ensuciar el dibujo.</a:t>
-            </a:r>
-          </a:p>
-          <a:p/>
-          <a:p>
-            <a:r>
-              <a:t>Quinta: el servicio externo se declara FUERA de los tres subgraph, y la flecha que llega a el se rotula como frontera de confianza; asi las fronteras quedan visibles en el propio dibujo y no en un comentario aparte.</a:t>
-            </a:r>
-          </a:p>
-          <a:p/>
-          <a:p>
-            <a:r>
-              <a:t>Los comentarios de Mermaid empiezan con dos signos de porcentaje, no se dibujan y tienen que ir en LINEA PROPIA: uno pegado al final de la linea de un nodo puede tumbar el renderizado.</a:t>
-            </a:r>
-          </a:p>
-          <a:p/>
-          <a:p>
-            <a:r>
-              <a:t>Y si un rotulo lleva parentesis, dos signos de puntuacion o comillas, hay que envolverlo en comillas dobles, porque sin ellas el analizador se detiene ahi.</a:t>
-            </a:r>
-          </a:p>
-          <a:p/>
-          <a:p>
-            <a:r>
-              <a:t>NOTAS:</a:t>
-            </a:r>
-          </a:p>
-          <a:p/>
-          <a:p>
-            <a:r>
-              <a:t>Se escribe flowchart LR, donde LR significa de izquierda a derecha, y es lo que hace que el recorrido cliente, edge, aplicacion, datos se lea como un flujo y no como una torre.</a:t>
-            </a:r>
-          </a:p>
-          <a:p/>
-          <a:p>
-            <a:r>
-              <a:t>Dos advertencias practicas.</a:t>
-            </a:r>
-          </a:p>
-          <a:p/>
-          <a:p>
-            <a:r>
-              <a:t>Sirven para dejar una nota al evaluador, no para responder.</a:t>
-            </a:r>
-          </a:p>
-          <a:p/>
-          <a:p>
-            <a:r>
-              <a:t>PREGUNTAS FRECUENTES DEL GRUPO</a:t>
-            </a:r>
-          </a:p>
-          <a:p/>
-          <a:p>
-            <a:r>
-              <a:t>«Si la base de datos es privada, como se conecta la API?» Privado significa inalcanzable desde internet</a:t>
-            </a:r>
-          </a:p>
-          <a:p/>
-          <a:p>
-            <a:r>
-              <a:t>No inalcanzable en absoluto: la API esta en la misma red y llega por el nombre interno y el puerto del motor; quien no puede llegar es el usuario final ni un atacante externo.</a:t>
-            </a:r>
-          </a:p>
-          <a:p/>
-          <a:p>
-            <a:r>
-              <a:t>«Esto no esta mal por no ser una VPC real de un proveedor?» Lo que se evalua es el razonamiento sobre zonas, puertos y ubicacion de los datos, no la sintaxis de una marca; el curso usa herramientas gratis en navegador y no pide cuenta de pago ni tarjeta.</a:t>
-            </a:r>
-          </a:p>
-          <a:p/>
-          <a:p>
-            <a:r>
-              <a:t>Un sistema de dos cajas se dibuja con cliente y edge en la publica, la aplicacion en la privada y la base en la de datos</a:t>
-            </a:r>
-          </a:p>
-          <a:p/>
-          <a:p>
-            <a:r>
-              <a:t>Si de verdad no hay balanceador, el punto de entrada es el servidor web o el proxy que atiende el 443, y ese es el habitante de la zona publica.</a:t>
-            </a:r>
-          </a:p>
-          <a:p/>
-          <a:p>
-            <a:r>
-              <a:t>Estas cuatro aparecen todos los semestres y las cuatro se responden con material que ya esta proyectado.</a:t>
-            </a:r>
-          </a:p>
-          <a:p/>
-          <a:p>
-            <a:r>
-              <a:t>Si un desarrollador necesita entrar, se hace por un unico host intermedio controlado, llamado bastion.</a:t>
-            </a:r>
-          </a:p>
-          <a:p/>
-          <a:p>
-            <a:r>
-              <a:t>Por eso las zonas se llaman Publica, Privada y Datos.</a:t>
-            </a:r>
-          </a:p>
-          <a:p/>
-          <a:p>
-            <a:r>
-              <a:t>El PNG exportado va a la carpeta del Proyecto Integrador, para el informe, y no reemplaza la respuesta.</a:t>
-            </a:r>
-          </a:p>
-          <a:p/>
-          <a:p>
-            <a:r>
-              <a:t>(No se proyecta) La diapositiva del molde existe porque el estudiante puede tener el modelo correcto en la cabeza y perder puntos por sintaxis, y porque 2 de los 14 son que el diagrama renderice.</a:t>
-            </a:r>
-          </a:p>
-          <a:p/>
-          <a:p>
-            <a:r>
-              <a:t>(No se proyecta) Hay cinco cosas que el docente debe poder explicar sin titubear.</a:t>
-            </a:r>
-          </a:p>
-          <a:p/>
-          <a:p>
-            <a:r>
-              <a:t>(No se proyecta) Vale la pena senalar la caja de la base de datos y decir «esta forma, dentro de este subgraph, son 4 de los 14 puntos».</a:t>
-            </a:r>
-          </a:p>
-          <a:p/>
-          <a:p>
-            <a:r>
-              <a:t>(No se proyecta) El procedimiento que se proyecta en la demo es el que conviene repetir tres veces: dibujar el boceto donde sea, traducirlo a Mermaid (una IA lo hace bien, y ahi hay que decir la frase exacta: la IA acierta la sintaxis, no el modelo), pegarlo en un visor Mermaid y MIRARLO RENDERIZADO.</a:t>
-            </a:r>
-          </a:p>
-          <a:p/>
-          <a:p>
-            <a:r>
-              <a:t>(No se proyecta) Si no se dibuja, se corrige ahi mismo; nadie califica un codigo que no dibuja.</a:t>
-            </a:r>
-          </a:p>
-        </p:txBody>
-      </p:sp>
-      <p:sp>
-        <p:nvSpPr>
-          <p:cNvPr id="4" name="Slide Number Placeholder 3"/>
-          <p:cNvSpPr>
-            <a:spLocks noGrp="1"/>
-          </p:cNvSpPr>
-          <p:nvPr>
-            <p:ph type="sldNum" idx="5" sz="quarter"/>
-          </p:nvPr>
-        </p:nvSpPr>
-        <p:spPr/>
-      </p:sp>
-    </p:spTree>
-  </p:cSld>
-  <p:clrMapOvr>
-    <a:masterClrMapping/>
-  </p:clrMapOvr>
-</p:notes>
-</file>
-
 <file path=ppt/notesSlides/notesSlide2.xml><?xml version="1.0" encoding="utf-8"?>
 <p:notes xmlns:a="http://schemas.openxmlformats.org/drawingml/2006/main" xmlns:p="http://schemas.openxmlformats.org/presentationml/2006/main" xmlns:r="http://schemas.openxmlformats.org/officeDocument/2006/relationships">
   <p:cSld>
@@ -1261,37 +793,61 @@
           <a:lstStyle/>
           <a:p>
             <a:r>
-              <a:t>TEXTO COMPLETO DE LA LÁMINA (se proyecta resumido):</a:t>
+              <a:t>DESARROLLO (para explicarlo, no se proyecta):</a:t>
             </a:r>
           </a:p>
           <a:p/>
           <a:p>
             <a:r>
-              <a:t>Cliente → edge/balanceador → app → datos: tres zonas, no dos.</a:t>
+              <a:t>Una subred es una subdivision de una red, y lo que la hace publica o privada no es su nombre sino sus rutas.</a:t>
             </a:r>
           </a:p>
           <a:p/>
           <a:p>
             <a:r>
-              <a:t>La base de datos va en la zona de datos, nunca en la pública: es el error más grave del diagrama.</a:t>
+              <a:t>Una subred publica tiene camino de entrada desde internet: alguien de afuera puede iniciar una conexion hacia lo que vive ahi.</a:t>
             </a:r>
           </a:p>
           <a:p/>
           <a:p>
             <a:r>
-              <a:t>Frontera de confianza: la flecha donde termina lo que tú controlas (un SaaS externo).</a:t>
+              <a:t>En CloudLite las mas faciles de senalar son las dos flechas que salen a lo que no es suyo, la pasarela de pagos y el correo transaccional: ninguno de los dos esta en las tres zonas, y la del molde que se proyecta es la de la pasarela.</a:t>
             </a:r>
           </a:p>
           <a:p/>
           <a:p>
             <a:r>
-              <a:t>No inventen subnets AWS: usen zonas Pública / Privada / Datos.</a:t>
+              <a:t>NOTAS:</a:t>
             </a:r>
           </a:p>
           <a:p/>
           <a:p>
             <a:r>
-              <a:t>Pública: balanceador y web estática · Privada: la API · Datos: la base, que solo acepta conexiones desde la API.</a:t>
+              <a:t>Una privada no lo tiene; solo se alcanza desde dentro, aunque normalmente si puede salir para descargar actualizaciones.</a:t>
+            </a:r>
+          </a:p>
+          <a:p/>
+          <a:p>
+            <a:r>
+              <a:t>(No se proyecta) Sobre esa distincion se construye la regla de las zonas, con tres nombres exactos porque son tres zonas y no dos: en la zona PUBLICA van el punto de entrada, el balanceador o proxy inverso, y la aplicacion web estatica, que es publica sin que eso sea una fuga porque no lleva secretos dentro; el cliente que llega de internet se dibuja FUERA de las tres zonas, porque es el actor y no una pieza que el estudiante despliegue; la API va en la zona PRIVADA, alcanzable solo desde el edge; y los datos van en una tercera zona, la de DATOS, que solo acepta conexiones desde la aplicacion y no tiene salida a internet.</a:t>
+            </a:r>
+          </a:p>
+          <a:p/>
+          <a:p>
+            <a:r>
+              <a:t>(No se proyecta) Los 4 puntos de ubicacion de la pregunta 4 se pierden COMPLETOS si la base de datos queda en la zona publica: no es un descuento parcial, es el error que la pregunta esta disenada para detectar.</a:t>
+            </a:r>
+          </a:p>
+          <a:p/>
+          <a:p>
+            <a:r>
+              <a:t>(No se proyecta) Y las tres zonas rotuladas valen otros 4 puntos por si mismas, asi que un diagrama de dos zonas, aunque tenga la base de datos bien puesta, ya empezo perdiendo.</a:t>
+            </a:r>
+          </a:p>
+          <a:p/>
+          <a:p>
+            <a:r>
+              <a:t>(No se proyecta) Conviene ademas nombrar la frontera de confianza: es la linea donde termina lo que el estudiante controla y empieza lo que no.</a:t>
             </a:r>
           </a:p>
         </p:txBody>
@@ -1367,55 +923,61 @@
           <a:p/>
           <a:p>
             <a:r>
-              <a:t>Una subred es una subdivision de una red, y lo que la hace publica o privada no es su nombre sino sus rutas.</a:t>
+              <a:t>El DNS es el directorio distribuido que traduce un nombre legible, como cloudlite.example, en la direccion IP donde atiende el servicio; el registro tipo A apunta un nombre a una IP y el CNAME apunta un nombre a otro nombre.</a:t>
             </a:r>
           </a:p>
           <a:p/>
           <a:p>
             <a:r>
-              <a:t>Una subred publica tiene camino de entrada desde internet: alguien de afuera puede iniciar una conexion hacia lo que vive ahi.</a:t>
+              <a:t>Cada registro tiene un TTL, los segundos que los demas guardan la respuesta en cache; tipicamente de 300 a 3600, asi que un cambio de direccion no es instantaneo para todos.</a:t>
             </a:r>
           </a:p>
           <a:p/>
           <a:p>
             <a:r>
-              <a:t>En CloudLite las mas faciles de senalar son las dos flechas que salen a lo que no es suyo, la pasarela de pagos y el correo transaccional: ninguno de los dos esta en las tres zonas, y la del molde que se proyecta es la de la pasarela.</a:t>
+              <a:t>Su funcion menos obvia y mas importante es el chequeo de salud: consulta un endpoint como /health, por convencion cada 10 a 30 segundos, y si falla dos o tres veces seguidas retira esa instancia de la rotacion hasta que responda.</a:t>
             </a:r>
           </a:p>
           <a:p/>
           <a:p>
             <a:r>
+              <a:t>Es tambien donde termina el TLS, es decir donde se descifra HTTPS.</a:t>
+            </a:r>
+          </a:p>
+          <a:p/>
+          <a:p>
+            <a:r>
+              <a:t>En CloudLite el recorrido es concreto: cloudlite.example resuelve a la IP del balanceador, que escucha en el 443, termina el TLS y reenvia la peticion a una instancia de la API en el 8080.</a:t>
+            </a:r>
+          </a:p>
+          <a:p/>
+          <a:p>
+            <a:r>
+              <a:t>Si una instancia no responde a su /health, el balanceador deja de enviarle trafico: es la primera forma de disponibilidad que el sistema obtiene sin escribir codigo.</a:t>
+            </a:r>
+          </a:p>
+          <a:p/>
+          <a:p>
+            <a:r>
               <a:t>NOTAS:</a:t>
             </a:r>
           </a:p>
           <a:p/>
           <a:p>
             <a:r>
-              <a:t>Una privada no lo tiene; solo se alcanza desde dentro, aunque normalmente si puede salir para descargar actualizaciones.</a:t>
+              <a:t>El balanceador de carga recibe todas las peticiones y las reparte entre varias instancias iguales del mismo servicio, con algoritmos como round robin o menor numero de conexiones activas.</a:t>
             </a:r>
           </a:p>
           <a:p/>
           <a:p>
             <a:r>
-              <a:t>(No se proyecta) Sobre esa distincion se construye la regla de las zonas, con tres nombres exactos porque son tres zonas y no dos: en la zona PUBLICA van el punto de entrada, el balanceador o proxy inverso, y la aplicacion web estatica, que es publica sin que eso sea una fuga porque no lleva secretos dentro; el cliente que llega de internet se dibuja FUERA de las tres zonas, porque es el actor y no una pieza que el estudiante despliegue; la API va en la zona PRIVADA, alcanzable solo desde el edge; y los datos van en una tercera zona, la de DATOS, que solo acepta conexiones desde la aplicacion y no tiene salida a internet.</a:t>
+              <a:t>(No se proyecta) Dos piezas mas hay que explicar sin titubear.</a:t>
             </a:r>
           </a:p>
           <a:p/>
           <a:p>
             <a:r>
-              <a:t>(No se proyecta) Los 4 puntos de ubicacion de la pregunta 4 se pierden COMPLETOS si la base de datos queda en la zona publica: no es un descuento parcial, es el error que la pregunta esta disenada para detectar.</a:t>
-            </a:r>
-          </a:p>
-          <a:p/>
-          <a:p>
-            <a:r>
-              <a:t>(No se proyecta) Y las tres zonas rotuladas valen otros 4 puntos por si mismas, asi que un diagrama de dos zonas, aunque tenga la base de datos bien puesta, ya empezo perdiendo.</a:t>
-            </a:r>
-          </a:p>
-          <a:p/>
-          <a:p>
-            <a:r>
-              <a:t>(No se proyecta) Conviene ademas nombrar la frontera de confianza: es la linea donde termina lo que el estudiante controla y empieza lo que no.</a:t>
+              <a:t>(No se proyecta) En el diagrama de hoy el balanceador es el habitante de la zona publica, y el /health que consulta es el mismo contrato de salud que se verifico con curl en la Clase 3 y el primer monitoreo real de la Clase 8.</a:t>
             </a:r>
           </a:p>
         </p:txBody>
@@ -1491,61 +1053,97 @@
           <a:p/>
           <a:p>
             <a:r>
-              <a:t>El DNS es el directorio distribuido que traduce un nombre legible, como cloudlite.example, en la direccion IP donde atiende el servicio; el registro tipo A apunta un nombre a una IP y el CNAME apunta un nombre a otro nombre.</a:t>
+              <a:t>El almacenamiento se decide por la caracteristica del dato, y aqui hay que ser estricto con el vocabulario: se usan TRES palabras y no mas: Relacional, Bloque y Objeto.</a:t>
             </a:r>
           </a:p>
           <a:p/>
           <a:p>
             <a:r>
-              <a:t>Cada registro tiene un TTL, los segundos que los demas guardan la respuesta en cache; tipicamente de 300 a 3600, asi que un cambio de direccion no es instantaneo para todos.</a:t>
+              <a:t>RELACIONAL es el motor de base de datos que guarda registros estructurados y permite cruzarlos con consultas y transacciones; la caracteristica del dato que lo exige es que ese dato se cruza con otro dato, y la prueba es que existe una consulta que los junta.</a:t>
             </a:r>
           </a:p>
           <a:p/>
           <a:p>
             <a:r>
-              <a:t>Su funcion menos obvia y mas importante es el chequeo de salud: consulta un endpoint como /health, por convencion cada 10 a 30 segundos, y si falla dos o tres veces seguidas retira esa instancia de la rotacion hasta que responda.</a:t>
+              <a:t>BLOQUE es un disco crudo que el sistema operativo formatea y monta; se conecta a una sola instancia a la vez, es lo que hay debajo del volumen de un contenedor</a:t>
             </a:r>
           </a:p>
           <a:p/>
           <a:p>
             <a:r>
-              <a:t>Es tambien donde termina el TLS, es decir donde se descifra HTTPS.</a:t>
+              <a:t>Y se mide en gigabytes y en IOPS, operaciones de lectura y escritura por segundo; la caracteristica que lo exige es que el dato lo monta un solo proceso y se escribe por partes, sin recuperarse entero.</a:t>
             </a:r>
           </a:p>
           <a:p/>
           <a:p>
             <a:r>
-              <a:t>En CloudLite el recorrido es concreto: cloudlite.example resuelve a la IP del balanceador, que escucha en el 443, termina el TLS y reenvia la peticion a una instancia de la API en el 8080.</a:t>
+              <a:t>OBJETO no tiene carpetas reales: es un espacio plano de contenedores llamados buckets donde cada objeto se guarda bajo una clave, se lee y escribe por HTTP y se reemplaza completo en vez de editarse por partes</a:t>
             </a:r>
           </a:p>
           <a:p/>
           <a:p>
             <a:r>
-              <a:t>Si una instancia no responde a su /health, el balanceador deja de enviarle trafico: es la primera forma de disponibilidad que el sistema obtiene sin escribir codigo.</a:t>
+              <a:t>Es practicamente ilimitado, barato y accesible por URL; la caracteristica que lo exige es que el dato se recupera entero, sin partes.</a:t>
             </a:r>
           </a:p>
           <a:p/>
           <a:p>
             <a:r>
+              <a:t>El numero que ordena la decision es el precio relativo: un gigabyte al mes en objetos cuesta del orden de dos a tres centavos de dolar, en disco de bloque cerca de cuatro veces mas, y en base de datos gestionada aun mas porque se paga computo.</a:t>
+            </a:r>
+          </a:p>
+          <a:p/>
+          <a:p>
+            <a:r>
+              <a:t>Son referencias de mercado, no reglas fijas, y aqui no se aprovisiona nada de pago: el valor esta en justificar.</a:t>
+            </a:r>
+          </a:p>
+          <a:p/>
+          <a:p>
+            <a:r>
+              <a:t>El resumen operativo es: Relacional cuando el dato se consulta cruzado con otro y necesita transacciones</a:t>
+            </a:r>
+          </a:p>
+          <a:p/>
+          <a:p>
+            <a:r>
               <a:t>NOTAS:</a:t>
             </a:r>
           </a:p>
           <a:p/>
           <a:p>
             <a:r>
-              <a:t>El balanceador de carga recibe todas las peticiones y las reparte entre varias instancias iguales del mismo servicio, con algoritmos como round robin o menor numero de conexiones activas.</a:t>
+              <a:t>Y cada eleccion se justifica nombrando la caracteristica del dato.</a:t>
             </a:r>
           </a:p>
           <a:p/>
           <a:p>
             <a:r>
-              <a:t>(No se proyecta) Dos piezas mas hay que explicar sin titubear.</a:t>
+              <a:t>Bloque cuando un solo proceso monta un disco y escribe en el como si fuera local</a:t>
             </a:r>
           </a:p>
           <a:p/>
           <a:p>
             <a:r>
-              <a:t>(No se proyecta) En el diagrama de hoy el balanceador es el habitante de la zona publica, y el /health que consulta es el mismo contrato de salud que se verifico con curl en la Clase 3 y el primer monitoreo real de la Clase 8.</a:t>
+              <a:t>Objeto cuando el archivo se guarda y se recupera entero por una clave o una URL.</a:t>
+            </a:r>
+          </a:p>
+          <a:p/>
+          <a:p>
+            <a:r>
+              <a:t>(No se proyecta) Vale la pena escribirlas en el tablero y sostenerlas toda la clase.</a:t>
+            </a:r>
+          </a:p>
+          <a:p/>
+          <a:p>
+            <a:r>
+              <a:t>(No se proyecta) Hay una cuarta categoria en la literatura, el almacenamiento de ARCHIVOS, un sistema de archivos compartido que varias instancias montan por red; conviene nombrarla como contraste para que nadie se sienta enganado, pero no es una de las tres palabras que la pregunta admite, y quien cree necesitarla casi siempre esta describiendo un caso que en la nube se resuelve con objeto.</a:t>
+            </a:r>
+          </a:p>
+          <a:p/>
+          <a:p>
+            <a:r>
+              <a:t>(No se proyecta) «Es mas rapido», «es lo que usa todo el mundo» o «es lo normal» no son caracteristicas del dato y no suman ni un punto, aunque el tipo elegido sea el correcto.</a:t>
             </a:r>
           </a:p>
         </p:txBody>
@@ -1621,97 +1219,55 @@
           <a:p/>
           <a:p>
             <a:r>
-              <a:t>El almacenamiento se decide por la caracteristica del dato, y aqui hay que ser estricto con el vocabulario: se usan TRES palabras y no mas: Relacional, Bloque y Objeto.</a:t>
+              <a:t>La solucion ingenua es guardar el archivo en una columna binaria de la base de datos.</a:t>
             </a:r>
           </a:p>
           <a:p/>
           <a:p>
             <a:r>
-              <a:t>RELACIONAL es el motor de base de datos que guarda registros estructurados y permite cruzarlos con consultas y transacciones; la caracteristica del dato que lo exige es que ese dato se cruza con otro dato, y la prueba es que existe una consulta que los junta.</a:t>
+              <a:t>El diseno correcto separa: el archivo va a almacenamiento de objetos y la base guarda una fila con la clave del objeto, el dueno, el tamano, el tipo de contenido y la fecha.</a:t>
             </a:r>
           </a:p>
           <a:p/>
           <a:p>
             <a:r>
-              <a:t>BLOQUE es un disco crudo que el sistema operativo formatea y monta; se conecta a una sola instancia a la vez, es lo que hay debajo del volumen de un contenedor</a:t>
+              <a:t>Hay una razon adicional: un contenedor es efimero, lo que se escriba en su sistema de archivos desaparece cuando se reemplaza, y con dos instancias detras del balanceador el archivo subido a una no existe en la otra.</a:t>
             </a:r>
           </a:p>
           <a:p/>
           <a:p>
             <a:r>
-              <a:t>Y se mide en gigabytes y en IOPS, operaciones de lectura y escritura por segundo; la caracteristica que lo exige es que el dato lo monta un solo proceso y se escribe por partes, sin recuperarse entero.</a:t>
+              <a:t>(No se proyecta) El ejemplo que hace visible la decision, y el error de diseno que conviene provocar: CloudLite permite subir una foto de perfil o adjuntar un PDF.</a:t>
             </a:r>
           </a:p>
           <a:p/>
           <a:p>
             <a:r>
-              <a:t>OBJETO no tiene carpetas reales: es un espacio plano de contenedores llamados buckets donde cada objeto se guarda bajo una clave, se lee y escribe por HTTP y se reemplaza completo en vez de editarse por partes</a:t>
+              <a:t>(No se proyecta) Hay que dejar que el estudiante la proponga y luego cuantificarla: dos megabytes por usuario y cinco mil usuarios son diez gigabytes de binarios dentro de una base cuyos datos utiles podrian ser doscientos megabytes; cada respaldo arrastra esos diez gigabytes y la cache del motor se llena de bytes que ninguna consulta filtra.</a:t>
             </a:r>
           </a:p>
           <a:p/>
           <a:p>
             <a:r>
-              <a:t>Es practicamente ilimitado, barato y accesible por URL; la caracteristica que lo exige es que el dato se recupera entero, sin partes.</a:t>
+              <a:t>(No se proyecta) Mantener los contenedores sin estado es la condicion del escalado horizontal de la Clase 13.</a:t>
             </a:r>
           </a:p>
           <a:p/>
           <a:p>
             <a:r>
-              <a:t>El numero que ordena la decision es el precio relativo: un gigabyte al mes en objetos cuesta del orden de dos a tres centavos de dolar, en disco de bloque cerca de cuatro veces mas, y en base de datos gestionada aun mas porque se paga computo.</a:t>
+              <a:t>(No se proyecta) Y ahora la otra mitad, que es la que sorprende al docente: si el dominio del estudiante no maneja archivos, imagenes ni documentos adjuntos, la respuesta correcta y completa es declarar que NO necesita almacenamiento de objetos y explicar por que.</a:t>
             </a:r>
           </a:p>
           <a:p/>
           <a:p>
             <a:r>
-              <a:t>Son referencias de mercado, no reglas fijas, y aqui no se aprovisiona nada de pago: el valor esta en justificar.</a:t>
+              <a:t>(No se proyecta) La rubrica lo dice al reves de como el grupo lo espera: suma completo quien lo declare y justifique, y se descuenta a quien agregue un almacen de objetos sin un dato que lo pida.</a:t>
             </a:r>
           </a:p>
           <a:p/>
           <a:p>
             <a:r>
-              <a:t>El resumen operativo es: Relacional cuando el dato se consulta cruzado con otro y necesita transacciones</a:t>
-            </a:r>
-          </a:p>
-          <a:p/>
-          <a:p>
-            <a:r>
-              <a:t>NOTAS:</a:t>
-            </a:r>
-          </a:p>
-          <a:p/>
-          <a:p>
-            <a:r>
-              <a:t>Y cada eleccion se justifica nombrando la caracteristica del dato.</a:t>
-            </a:r>
-          </a:p>
-          <a:p/>
-          <a:p>
-            <a:r>
-              <a:t>Bloque cuando un solo proceso monta un disco y escribe en el como si fuera local</a:t>
-            </a:r>
-          </a:p>
-          <a:p/>
-          <a:p>
-            <a:r>
-              <a:t>Objeto cuando el archivo se guarda y se recupera entero por una clave o una URL.</a:t>
-            </a:r>
-          </a:p>
-          <a:p/>
-          <a:p>
-            <a:r>
-              <a:t>(No se proyecta) Vale la pena escribirlas en el tablero y sostenerlas toda la clase.</a:t>
-            </a:r>
-          </a:p>
-          <a:p/>
-          <a:p>
-            <a:r>
-              <a:t>(No se proyecta) Hay una cuarta categoria en la literatura, el almacenamiento de ARCHIVOS, un sistema de archivos compartido que varias instancias montan por red; conviene nombrarla como contraste para que nadie se sienta enganado, pero no es una de las tres palabras que la pregunta admite, y quien cree necesitarla casi siempre esta describiendo un caso que en la nube se resuelve con objeto.</a:t>
-            </a:r>
-          </a:p>
-          <a:p/>
-          <a:p>
-            <a:r>
-              <a:t>(No se proyecta) «Es mas rapido», «es lo que usa todo el mundo» o «es lo normal» no son caracteristicas del dato y no suman ni un punto, aunque el tipo elegido sea el correcto.</a:t>
+              <a:t>(No se proyecta) Hay que anunciarlo antes del taller, porque si no medio salon inventa un bucket «porque suena a cloud» y pierde puntos por agregar.</a:t>
             </a:r>
           </a:p>
         </p:txBody>
@@ -1781,37 +1337,67 @@
           <a:lstStyle/>
           <a:p>
             <a:r>
-              <a:t>TEXTO COMPLETO DE LA LÁMINA (se proyecta resumido):</a:t>
+              <a:t>DESARROLLO (para explicarlo, no se proyecta):</a:t>
             </a:r>
           </a:p>
           <a:p/>
           <a:p>
             <a:r>
-              <a:t>Tres tipos y sus nombres exactos: Relacional · Bloque · Objeto.</a:t>
+              <a:t>Se demuestra con una tabla de tres columnas: «Componente en el C4 Containers», «Componente en el Despliegue» y «Zona».</a:t>
             </a:r>
           </a:p>
           <a:p/>
           <a:p>
             <a:r>
-              <a:t>Relacional: el dato se cruza con otro · Bloque: lo monta un solo proceso · Objeto: se recupera entero.</a:t>
+              <a:t>Un ejemplo de fila completa es: «API de turnos» en el Containers, «API de turnos (contenedor, 8080)» en el Despliegue, zona Privada.</a:t>
             </a:r>
           </a:p>
           <a:p/>
           <a:p>
             <a:r>
-              <a:t>Se justifica por la característica del dato, no por preferencia.</a:t>
+              <a:t>El cliente y el proveedor de correo son las filas sin par: aparecen en los diagramas, pero no se despliegan dentro del sistema.</a:t>
             </a:r>
           </a:p>
           <a:p/>
           <a:p>
             <a:r>
-              <a:t>Si tu dominio no maneja archivos, declara que no necesitas objeto: es una decisión válida.</a:t>
+              <a:t>Un error comun es renombrar en el Despliegue: «backend» en lugar de «API de turnos».</a:t>
             </a:r>
           </a:p>
           <a:p/>
           <a:p>
             <a:r>
-              <a:t>Ejemplos: turnos → Relacional · disco de una VM → Bloque · fotos de perfil → Objeto.</a:t>
+              <a:t>Para quien lee son dos piezas distintas, y nadie puede saber si el despliegue cubre todo el sistema.</a:t>
+            </a:r>
+          </a:p>
+          <a:p/>
+          <a:p>
+            <a:r>
+              <a:t>(No se proyecta) Queda la trazabilidad, donde mas puntos se pierden y donde vive una pregunta entera.</a:t>
+            </a:r>
+          </a:p>
+          <a:p/>
+          <a:p>
+            <a:r>
+              <a:t>(No se proyecta) Los nombres de las cajas del despliegue deben ser los mismos que los contenedores del C4 Containers de la Clase 4: si alli el servicio se llamaba api-citas, hoy no puede aparecer como backend, ni puede aparecer una caja nueva que nadie declaro.</a:t>
+            </a:r>
+          </a:p>
+          <a:p/>
+          <a:p>
+            <a:r>
+              <a:t>(No se proyecta) Los 5.5 puntos se reparten asi, y conviene decirlo en voz alta: 2 puntos la explicacion de por que los nombres deben coincidir, y la respuesta esperada es que los dos diagramas son el MISMO sistema visto desde angulos distintos, uno dice que piezas hay y el otro donde se ejecutan; 2.5 puntos la tabla completa, con una fila por componente y su zona; y 1 punto listar los renombres que se aplicaron, o declarar explicitamente que no hubo ninguno, que tambien vale.</a:t>
+            </a:r>
+          </a:p>
+          <a:p/>
+          <a:p>
+            <a:r>
+              <a:t>(No se proyecta) La trampa esta en la palabra completa: se descuenta si la tabla deja fuera un componente que si aparece en alguno de los dos diagramas, asi que hay que instruir el gesto de llenarla con los dos diagramas abiertos al lado y contando cajas.</a:t>
+            </a:r>
+          </a:p>
+          <a:p/>
+          <a:p>
+            <a:r>
+              <a:t>(No se proyecta) La cadena aguas abajo es directa: la Clase 6 identifico amenazas y fronteras de confianza en texto y hoy esas fronteras se vuelven zonas dibujadas; la Clase 8 tomara cada flecha para definir que se mide en ella, porque no se puede monitorear un camino que no esta dibujado; la Clase 10 costeara estas mismas cajas, asi que la eleccion de almacenamiento es tambien decision de costo; y la Clase 13 discutira cual caja se replica y cual no.</a:t>
             </a:r>
           </a:p>
         </p:txBody>
@@ -1887,55 +1473,55 @@
           <a:p/>
           <a:p>
             <a:r>
-              <a:t>La solucion ingenua es guardar el archivo en una columna binaria de la base de datos.</a:t>
+              <a:t>Un usuario final abre cloudlite.example en su telefono; el DNS resuelve el nombre a la IP publica del balanceador; el navegador abre una conexion HTTPS al puerto 443 de ese balanceador</a:t>
             </a:r>
           </a:p>
           <a:p/>
           <a:p>
             <a:r>
-              <a:t>El diseno correcto separa: el archivo va a almacenamiento de objetos y la base guarda una fila con la clave del objeto, el dueno, el tamano, el tipo de contenido y la fecha.</a:t>
+              <a:t>Que vive en la zona publica; el balanceador elige una de las dos instancias del contenedor de la API, en la zona privada</a:t>
             </a:r>
           </a:p>
           <a:p/>
           <a:p>
             <a:r>
-              <a:t>Hay una razon adicional: un contenedor es efimero, lo que se escriba en su sistema de archivos desaparece cuando se reemplaza, y con dos instancias detras del balanceador el archivo subido a una no existe en la otra.</a:t>
+              <a:t>Y le reenvia la peticion por HTTP al puerto 8080; la API consulta el motor de base de datos en la zona de datos por el puerto 5432 y devuelve JSON por el mismo camino.</a:t>
             </a:r>
           </a:p>
           <a:p/>
           <a:p>
             <a:r>
-              <a:t>(No se proyecta) El ejemplo que hace visible la decision, y el error de diseno que conviene provocar: CloudLite permite subir una foto de perfil o adjuntar un PDF.</a:t>
+              <a:t>El recorrido completo tiene 4 saltos: DNS, balanceador en la zona publica, API en la zona privada y base de datos en la zona de datos.</a:t>
             </a:r>
           </a:p>
           <a:p/>
           <a:p>
             <a:r>
-              <a:t>(No se proyecta) Hay que dejar que el estudiante la proponga y luego cuantificarla: dos megabytes por usuario y cinco mil usuarios son diez gigabytes de binarios dentro de una base cuyos datos utiles podrian ser doscientos megabytes; cada respaldo arrastra esos diez gigabytes y la cache del motor se llena de bytes que ninguna consulta filtra.</a:t>
+              <a:t>Cada salto de red dentro de un mismo centro de datos suma del orden de 1 milisegundo, y por eso un diseno que encadena servicios innecesarios es lento aunque cada pieza sea rapida.</a:t>
             </a:r>
           </a:p>
           <a:p/>
           <a:p>
             <a:r>
-              <a:t>(No se proyecta) Mantener los contenedores sin estado es la condicion del escalado horizontal de la Clase 13.</a:t>
+              <a:t>(No se proyecta) La mejor forma de dictar la clase es seguir una peticion de CloudLite de punta a punta sobre el diagrama proyectado.</a:t>
             </a:r>
           </a:p>
           <a:p/>
           <a:p>
             <a:r>
-              <a:t>(No se proyecta) Y ahora la otra mitad, que es la que sorprende al docente: si el dominio del estudiante no maneja archivos, imagenes ni documentos adjuntos, la respuesta correcta y completa es declarar que NO necesita almacenamiento de objetos y explicar por que.</a:t>
+              <a:t>(No se proyecta) Ese recorrido, con cada flecha etiquetada con protocolo y puerto y cada caja dentro de su zona, es la estructura que la pregunta 4 califica; lo que se pega en la plataforma es su version en Mermaid, que es la seccion siguiente.</a:t>
             </a:r>
           </a:p>
           <a:p/>
           <a:p>
             <a:r>
-              <a:t>(No se proyecta) La rubrica lo dice al reves de como el grupo lo espera: suma completo quien lo declare y justifique, y se descuenta a quien agregue un almacen de objetos sin un dato que lo pida.</a:t>
+              <a:t>(No se proyecta) Sirve tambien para citar numeros: una consulta simple bien indexada responde entre 1 y 20 milisegundos, y el objetivo que se formalizara en la Clase 12 suele fijarse por convencion en menos de 300 milisegundos para el 95 por ciento de las peticiones.</a:t>
             </a:r>
           </a:p>
           <a:p/>
           <a:p>
             <a:r>
-              <a:t>(No se proyecta) Hay que anunciarlo antes del taller, porque si no medio salon inventa un bucket «porque suena a cloud» y pierde puntos por agregar.</a:t>
+              <a:t>(No se proyecta) Con eso el grupo ve que si una pantalla dispara veinte consultas encadenadas el problema es de diseno y no de servidor.</a:t>
             </a:r>
           </a:p>
         </p:txBody>
@@ -2011,61 +1597,175 @@
           <a:p/>
           <a:p>
             <a:r>
-              <a:t>Se demuestra con una tabla de tres columnas: «Componente en el C4 Containers», «Componente en el Despliegue» y «Zona».</a:t>
+              <a:t>Primera: la palabra inicial.</a:t>
             </a:r>
           </a:p>
           <a:p/>
           <a:p>
             <a:r>
-              <a:t>Un ejemplo de fila completa es: «API de turnos» en el Containers, «API de turnos (contenedor, 8080)» en el Despliegue, zona Privada.</a:t>
+              <a:t>Segunda: cada zona es un subgraph con su rotulo entre comillas y su propio end.</a:t>
             </a:r>
           </a:p>
           <a:p/>
           <a:p>
             <a:r>
-              <a:t>El cliente y el proveedor de correo son las filas sin par: aparecen en los diagramas, pero no se despliegan dentro del sistema.</a:t>
+              <a:t>Los subgraph son las tres zonas; olvidar un end es la causa numero uno de que el diagrama no se dibuje, porque el bloque queda abierto.</a:t>
             </a:r>
           </a:p>
           <a:p/>
           <a:p>
             <a:r>
-              <a:t>Un error comun es renombrar en el Despliegue: «backend» en lugar de «API de turnos».</a:t>
+              <a:t>Tercera: la forma de la caja dice que es la pieza.</a:t>
             </a:r>
           </a:p>
           <a:p/>
           <a:p>
             <a:r>
-              <a:t>Para quien lee son dos piezas distintas, y nadie puede saber si el despliegue cubre todo el sistema.</a:t>
+              <a:t>Los corchetes rectos son un proceso o servicio, y la combinacion de corchete y parentesis, es decir abrir corchete parentesis, es la base de datos, que se lee como cilindro.</a:t>
             </a:r>
           </a:p>
           <a:p/>
           <a:p>
             <a:r>
-              <a:t>(No se proyecta) Queda la trazabilidad, donde mas puntos se pierden y donde vive una pregunta entera.</a:t>
+              <a:t>Cuarta: el puerto va DENTRO del rotulo de la caja, separado con la etiqueta de salto de linea de HTML, y la etiqueta de la flecha va entre barras verticales y comillas, con el protocolo y el puerto.</a:t>
             </a:r>
           </a:p>
           <a:p/>
           <a:p>
             <a:r>
-              <a:t>(No se proyecta) Los nombres de las cajas del despliegue deben ser los mismos que los contenedores del C4 Containers de la Clase 4: si alli el servicio se llamaba api-citas, hoy no puede aparecer como backend, ni puede aparecer una caja nueva que nadie declaro.</a:t>
+              <a:t>Es la forma mas segura de etiquetar los puertos sin ensuciar el dibujo.</a:t>
             </a:r>
           </a:p>
           <a:p/>
           <a:p>
             <a:r>
-              <a:t>(No se proyecta) Los 5.5 puntos se reparten asi, y conviene decirlo en voz alta: 2 puntos la explicacion de por que los nombres deben coincidir, y la respuesta esperada es que los dos diagramas son el MISMO sistema visto desde angulos distintos, uno dice que piezas hay y el otro donde se ejecutan; 2.5 puntos la tabla completa, con una fila por componente y su zona; y 1 punto listar los renombres que se aplicaron, o declarar explicitamente que no hubo ninguno, que tambien vale.</a:t>
+              <a:t>Quinta: el servicio externo se declara FUERA de los tres subgraph, y la flecha que llega a el se rotula como frontera de confianza; asi las fronteras quedan visibles en el propio dibujo y no en un comentario aparte.</a:t>
             </a:r>
           </a:p>
           <a:p/>
           <a:p>
             <a:r>
-              <a:t>(No se proyecta) La trampa esta en la palabra completa: se descuenta si la tabla deja fuera un componente que si aparece en alguno de los dos diagramas, asi que hay que instruir el gesto de llenarla con los dos diagramas abiertos al lado y contando cajas.</a:t>
+              <a:t>Los comentarios de Mermaid empiezan con dos signos de porcentaje, no se dibujan y tienen que ir en LINEA PROPIA: uno pegado al final de la linea de un nodo puede tumbar el renderizado.</a:t>
             </a:r>
           </a:p>
           <a:p/>
           <a:p>
             <a:r>
-              <a:t>(No se proyecta) La cadena aguas abajo es directa: la Clase 6 identifico amenazas y fronteras de confianza en texto y hoy esas fronteras se vuelven zonas dibujadas; la Clase 8 tomara cada flecha para definir que se mide en ella, porque no se puede monitorear un camino que no esta dibujado; la Clase 10 costeara estas mismas cajas, asi que la eleccion de almacenamiento es tambien decision de costo; y la Clase 13 discutira cual caja se replica y cual no.</a:t>
+              <a:t>Y si un rotulo lleva parentesis, dos signos de puntuacion o comillas, hay que envolverlo en comillas dobles, porque sin ellas el analizador se detiene ahi.</a:t>
+            </a:r>
+          </a:p>
+          <a:p/>
+          <a:p>
+            <a:r>
+              <a:t>NOTAS:</a:t>
+            </a:r>
+          </a:p>
+          <a:p/>
+          <a:p>
+            <a:r>
+              <a:t>Se escribe flowchart LR, donde LR significa de izquierda a derecha, y es lo que hace que el recorrido cliente, edge, aplicacion, datos se lea como un flujo y no como una torre.</a:t>
+            </a:r>
+          </a:p>
+          <a:p/>
+          <a:p>
+            <a:r>
+              <a:t>Dos advertencias practicas.</a:t>
+            </a:r>
+          </a:p>
+          <a:p/>
+          <a:p>
+            <a:r>
+              <a:t>Sirven para dejar una nota al evaluador, no para responder.</a:t>
+            </a:r>
+          </a:p>
+          <a:p/>
+          <a:p>
+            <a:r>
+              <a:t>PREGUNTAS FRECUENTES DEL GRUPO</a:t>
+            </a:r>
+          </a:p>
+          <a:p/>
+          <a:p>
+            <a:r>
+              <a:t>«Si la base de datos es privada, como se conecta la API?» Privado significa inalcanzable desde internet</a:t>
+            </a:r>
+          </a:p>
+          <a:p/>
+          <a:p>
+            <a:r>
+              <a:t>No inalcanzable en absoluto: la API esta en la misma red y llega por el nombre interno y el puerto del motor; quien no puede llegar es el usuario final ni un atacante externo.</a:t>
+            </a:r>
+          </a:p>
+          <a:p/>
+          <a:p>
+            <a:r>
+              <a:t>«Esto no esta mal por no ser una VPC real de un proveedor?» Lo que se evalua es el razonamiento sobre zonas, puertos y ubicacion de los datos, no la sintaxis de una marca; el curso usa herramientas gratis en navegador y no pide cuenta de pago ni tarjeta.</a:t>
+            </a:r>
+          </a:p>
+          <a:p/>
+          <a:p>
+            <a:r>
+              <a:t>Un sistema de dos cajas se dibuja con cliente y edge en la publica, la aplicacion en la privada y la base en la de datos</a:t>
+            </a:r>
+          </a:p>
+          <a:p/>
+          <a:p>
+            <a:r>
+              <a:t>Si de verdad no hay balanceador, el punto de entrada es el servidor web o el proxy que atiende el 443, y ese es el habitante de la zona publica.</a:t>
+            </a:r>
+          </a:p>
+          <a:p/>
+          <a:p>
+            <a:r>
+              <a:t>Estas cuatro aparecen todos los semestres y las cuatro se responden con material que ya esta proyectado.</a:t>
+            </a:r>
+          </a:p>
+          <a:p/>
+          <a:p>
+            <a:r>
+              <a:t>Si un desarrollador necesita entrar, se hace por un unico host intermedio controlado, llamado bastion.</a:t>
+            </a:r>
+          </a:p>
+          <a:p/>
+          <a:p>
+            <a:r>
+              <a:t>Por eso las zonas se llaman Publica, Privada y Datos.</a:t>
+            </a:r>
+          </a:p>
+          <a:p/>
+          <a:p>
+            <a:r>
+              <a:t>El PNG exportado va a la carpeta del Proyecto Integrador, para el informe, y no reemplaza la respuesta.</a:t>
+            </a:r>
+          </a:p>
+          <a:p/>
+          <a:p>
+            <a:r>
+              <a:t>(No se proyecta) La diapositiva del molde existe porque el estudiante puede tener el modelo correcto en la cabeza y perder puntos por sintaxis, y porque 2 de los 14 son que el diagrama renderice.</a:t>
+            </a:r>
+          </a:p>
+          <a:p/>
+          <a:p>
+            <a:r>
+              <a:t>(No se proyecta) Hay cinco cosas que el docente debe poder explicar sin titubear.</a:t>
+            </a:r>
+          </a:p>
+          <a:p/>
+          <a:p>
+            <a:r>
+              <a:t>(No se proyecta) Vale la pena senalar la caja de la base de datos y decir «esta forma, dentro de este subgraph, son 4 de los 14 puntos».</a:t>
+            </a:r>
+          </a:p>
+          <a:p/>
+          <a:p>
+            <a:r>
+              <a:t>(No se proyecta) El procedimiento que se proyecta en la demo es el que conviene repetir tres veces: dibujar el boceto donde sea, traducirlo a Mermaid (una IA lo hace bien, y ahi hay que decir la frase exacta: la IA acierta la sintaxis, no el modelo), pegarlo en un visor Mermaid y MIRARLO RENDERIZADO.</a:t>
+            </a:r>
+          </a:p>
+          <a:p/>
+          <a:p>
+            <a:r>
+              <a:t>(No se proyecta) Si no se dibuja, se corrige ahi mismo; nadie califica un codigo que no dibuja.</a:t>
             </a:r>
           </a:p>
         </p:txBody>
@@ -6103,118 +5803,14 @@
       </p:sp>
       <p:sp>
         <p:nvSpPr>
-          <p:cNvPr id="5" name="Rounded Rectangle 4"/>
-          <p:cNvSpPr/>
-          <p:nvPr/>
-        </p:nvSpPr>
-        <p:spPr>
-          <a:xfrm>
-            <a:off x="5797149" y="1573813"/>
-            <a:ext cx="6010497" cy="4057845"/>
-          </a:xfrm>
-          <a:prstGeom prst="roundRect">
-            <a:avLst>
-              <a:gd name="adj" fmla="val 4000"/>
-            </a:avLst>
-          </a:prstGeom>
-          <a:solidFill>
-            <a:srgbClr val="E8EEF4"/>
-          </a:solidFill>
-          <a:ln>
-            <a:noFill/>
-          </a:ln>
-        </p:spPr>
-        <p:style>
-          <a:lnRef idx="1">
-            <a:schemeClr val="accent1"/>
-          </a:lnRef>
-          <a:fillRef idx="3">
-            <a:schemeClr val="accent1"/>
-          </a:fillRef>
-          <a:effectRef idx="2">
-            <a:schemeClr val="accent1"/>
-          </a:effectRef>
-          <a:fontRef idx="minor">
-            <a:schemeClr val="lt1"/>
-          </a:fontRef>
-        </p:style>
-        <p:txBody>
-          <a:bodyPr rtlCol="0" anchor="ctr"/>
-          <a:lstStyle/>
-          <a:p>
-            <a:pPr algn="ctr"/>
-          </a:p>
-        </p:txBody>
-      </p:sp>
-      <p:pic>
-        <p:nvPicPr>
-          <p:cNvPr id="6" name="Picture 5" descr="hard-drives-storage-server.jpg"/>
-          <p:cNvPicPr>
-            <a:picLocks noChangeAspect="1"/>
-          </p:cNvPicPr>
-          <p:nvPr/>
-        </p:nvPicPr>
-        <p:blipFill>
-          <a:blip r:embed="rId2"/>
-          <a:stretch>
-            <a:fillRect/>
-          </a:stretch>
-        </p:blipFill>
-        <p:spPr>
-          <a:xfrm>
-            <a:off x="5870301" y="1646965"/>
-            <a:ext cx="5864193" cy="3911541"/>
-          </a:xfrm>
-          <a:prstGeom prst="rect">
-            <a:avLst/>
-          </a:prstGeom>
-        </p:spPr>
-      </p:pic>
-      <p:sp>
-        <p:nvSpPr>
-          <p:cNvPr id="7" name="TextBox 6"/>
+          <p:cNvPr id="5" name="TextBox 4"/>
           <p:cNvSpPr txBox="1"/>
           <p:nvPr/>
         </p:nvSpPr>
         <p:spPr>
           <a:xfrm>
-            <a:off x="5870301" y="5961888"/>
-            <a:ext cx="5864193" cy="320040"/>
-          </a:xfrm>
-          <a:prstGeom prst="rect">
-            <a:avLst/>
-          </a:prstGeom>
-          <a:noFill/>
-        </p:spPr>
-        <p:txBody>
-          <a:bodyPr wrap="square">
-            <a:spAutoFit/>
-          </a:bodyPr>
-          <a:lstStyle/>
-          <a:p>
-            <a:pPr algn="ctr"/>
-            <a:r>
-              <a:rPr sz="1100" b="0" i="1">
-                <a:solidFill>
-                  <a:srgbClr val="666666"/>
-                </a:solidFill>
-                <a:latin typeface="Calibri"/>
-              </a:rPr>
-              <a:t>Foto: Marta Branco · Pexels</a:t>
-            </a:r>
-          </a:p>
-        </p:txBody>
-      </p:sp>
-      <p:sp>
-        <p:nvSpPr>
-          <p:cNvPr id="8" name="TextBox 7"/>
-          <p:cNvSpPr txBox="1"/>
-          <p:nvPr/>
-        </p:nvSpPr>
-        <p:spPr>
-          <a:xfrm>
-            <a:off x="457200" y="1353312"/>
-            <a:ext cx="5093061" cy="5047488"/>
+            <a:off x="457200" y="1170432"/>
+            <a:ext cx="11277295" cy="5230368"/>
           </a:xfrm>
           <a:prstGeom prst="rect">
             <a:avLst/>
@@ -6380,11 +5976,27 @@
               <a:t>: es una decisión válida.</a:t>
             </a:r>
           </a:p>
-        </p:txBody>
-      </p:sp>
-      <p:sp>
-        <p:nvSpPr>
-          <p:cNvPr id="9" name="TextBox 8"/>
+          <a:p>
+            <a:pPr>
+              <a:spcAft>
+                <a:spcPts val="800"/>
+              </a:spcAft>
+            </a:pPr>
+            <a:r>
+              <a:rPr sz="2000" b="0" i="0">
+                <a:solidFill>
+                  <a:srgbClr val="333333"/>
+                </a:solidFill>
+                <a:latin typeface="Calibri"/>
+              </a:rPr>
+              <a:t>–   Ejemplos: turnos → Relacional · disco de una VM → Bloque · fotos de perfil → Objeto.</a:t>
+            </a:r>
+          </a:p>
+        </p:txBody>
+      </p:sp>
+      <p:sp>
+        <p:nvSpPr>
+          <p:cNvPr id="6" name="TextBox 5"/>
           <p:cNvSpPr txBox="1"/>
           <p:nvPr/>
         </p:nvSpPr>
@@ -8458,118 +8070,14 @@
       </p:sp>
       <p:sp>
         <p:nvSpPr>
-          <p:cNvPr id="5" name="Rounded Rectangle 4"/>
-          <p:cNvSpPr/>
-          <p:nvPr/>
-        </p:nvSpPr>
-        <p:spPr>
-          <a:xfrm>
-            <a:off x="5797149" y="1573813"/>
-            <a:ext cx="6010497" cy="4057845"/>
-          </a:xfrm>
-          <a:prstGeom prst="roundRect">
-            <a:avLst>
-              <a:gd name="adj" fmla="val 4000"/>
-            </a:avLst>
-          </a:prstGeom>
-          <a:solidFill>
-            <a:srgbClr val="E8EEF4"/>
-          </a:solidFill>
-          <a:ln>
-            <a:noFill/>
-          </a:ln>
-        </p:spPr>
-        <p:style>
-          <a:lnRef idx="1">
-            <a:schemeClr val="accent1"/>
-          </a:lnRef>
-          <a:fillRef idx="3">
-            <a:schemeClr val="accent1"/>
-          </a:fillRef>
-          <a:effectRef idx="2">
-            <a:schemeClr val="accent1"/>
-          </a:effectRef>
-          <a:fontRef idx="minor">
-            <a:schemeClr val="lt1"/>
-          </a:fontRef>
-        </p:style>
-        <p:txBody>
-          <a:bodyPr rtlCol="0" anchor="ctr"/>
-          <a:lstStyle/>
-          <a:p>
-            <a:pPr algn="ctr"/>
-          </a:p>
-        </p:txBody>
-      </p:sp>
-      <p:pic>
-        <p:nvPicPr>
-          <p:cNvPr id="6" name="Picture 5" descr="checklist-clipboard.jpg"/>
-          <p:cNvPicPr>
-            <a:picLocks noChangeAspect="1"/>
-          </p:cNvPicPr>
-          <p:nvPr/>
-        </p:nvPicPr>
-        <p:blipFill>
-          <a:blip r:embed="rId2"/>
-          <a:stretch>
-            <a:fillRect/>
-          </a:stretch>
-        </p:blipFill>
-        <p:spPr>
-          <a:xfrm>
-            <a:off x="5870301" y="1646965"/>
-            <a:ext cx="5864193" cy="3911541"/>
-          </a:xfrm>
-          <a:prstGeom prst="rect">
-            <a:avLst/>
-          </a:prstGeom>
-        </p:spPr>
-      </p:pic>
-      <p:sp>
-        <p:nvSpPr>
-          <p:cNvPr id="7" name="TextBox 6"/>
+          <p:cNvPr id="5" name="TextBox 4"/>
           <p:cNvSpPr txBox="1"/>
           <p:nvPr/>
         </p:nvSpPr>
         <p:spPr>
           <a:xfrm>
-            <a:off x="5870301" y="5961888"/>
-            <a:ext cx="5864193" cy="320040"/>
-          </a:xfrm>
-          <a:prstGeom prst="rect">
-            <a:avLst/>
-          </a:prstGeom>
-          <a:noFill/>
-        </p:spPr>
-        <p:txBody>
-          <a:bodyPr wrap="square">
-            <a:spAutoFit/>
-          </a:bodyPr>
-          <a:lstStyle/>
-          <a:p>
-            <a:pPr algn="ctr"/>
-            <a:r>
-              <a:rPr sz="1100" b="0" i="1">
-                <a:solidFill>
-                  <a:srgbClr val="666666"/>
-                </a:solidFill>
-                <a:latin typeface="Calibri"/>
-              </a:rPr>
-              <a:t>Foto: RDNE Stock project · Pexels</a:t>
-            </a:r>
-          </a:p>
-        </p:txBody>
-      </p:sp>
-      <p:sp>
-        <p:nvSpPr>
-          <p:cNvPr id="8" name="TextBox 7"/>
-          <p:cNvSpPr txBox="1"/>
-          <p:nvPr/>
-        </p:nvSpPr>
-        <p:spPr>
-          <a:xfrm>
-            <a:off x="457200" y="1353312"/>
-            <a:ext cx="5093061" cy="5047488"/>
+            <a:off x="457200" y="1170432"/>
+            <a:ext cx="11277295" cy="5230368"/>
           </a:xfrm>
           <a:prstGeom prst="rect">
             <a:avLst/>
@@ -8663,11 +8171,27 @@
               <a:t>–   Cada flecha lleva protocolo y puerto: HTTPS 443 al edge, HTTP 8080 a la API, PostgreSQL 5432 a la base.</a:t>
             </a:r>
           </a:p>
-        </p:txBody>
-      </p:sp>
-      <p:sp>
-        <p:nvSpPr>
-          <p:cNvPr id="9" name="TextBox 8"/>
+          <a:p>
+            <a:pPr>
+              <a:spcAft>
+                <a:spcPts val="800"/>
+              </a:spcAft>
+            </a:pPr>
+            <a:r>
+              <a:rPr sz="2000" b="0" i="0">
+                <a:solidFill>
+                  <a:srgbClr val="333333"/>
+                </a:solidFill>
+                <a:latin typeface="Calibri"/>
+              </a:rPr>
+              <a:t>–   Los servicios externos (correo, pagos) se dibujan fuera de las tres zonas: ahí está la frontera de confianza.</a:t>
+            </a:r>
+          </a:p>
+        </p:txBody>
+      </p:sp>
+      <p:sp>
+        <p:nvSpPr>
+          <p:cNvPr id="6" name="TextBox 5"/>
           <p:cNvSpPr txBox="1"/>
           <p:nvPr/>
         </p:nvSpPr>
@@ -9449,118 +8973,14 @@
       </p:sp>
       <p:sp>
         <p:nvSpPr>
-          <p:cNvPr id="5" name="Rounded Rectangle 4"/>
-          <p:cNvSpPr/>
-          <p:nvPr/>
-        </p:nvSpPr>
-        <p:spPr>
-          <a:xfrm>
-            <a:off x="5797149" y="1580051"/>
-            <a:ext cx="6010497" cy="4045368"/>
-          </a:xfrm>
-          <a:prstGeom prst="roundRect">
-            <a:avLst>
-              <a:gd name="adj" fmla="val 4000"/>
-            </a:avLst>
-          </a:prstGeom>
-          <a:solidFill>
-            <a:srgbClr val="E8EEF4"/>
-          </a:solidFill>
-          <a:ln>
-            <a:noFill/>
-          </a:ln>
-        </p:spPr>
-        <p:style>
-          <a:lnRef idx="1">
-            <a:schemeClr val="accent1"/>
-          </a:lnRef>
-          <a:fillRef idx="3">
-            <a:schemeClr val="accent1"/>
-          </a:fillRef>
-          <a:effectRef idx="2">
-            <a:schemeClr val="accent1"/>
-          </a:effectRef>
-          <a:fontRef idx="minor">
-            <a:schemeClr val="lt1"/>
-          </a:fontRef>
-        </p:style>
-        <p:txBody>
-          <a:bodyPr rtlCol="0" anchor="ctr"/>
-          <a:lstStyle/>
-          <a:p>
-            <a:pPr algn="ctr"/>
-          </a:p>
-        </p:txBody>
-      </p:sp>
-      <p:pic>
-        <p:nvPicPr>
-          <p:cNvPr id="6" name="Picture 5" descr="code-editor-screen.jpg"/>
-          <p:cNvPicPr>
-            <a:picLocks noChangeAspect="1"/>
-          </p:cNvPicPr>
-          <p:nvPr/>
-        </p:nvPicPr>
-        <p:blipFill>
-          <a:blip r:embed="rId2"/>
-          <a:stretch>
-            <a:fillRect/>
-          </a:stretch>
-        </p:blipFill>
-        <p:spPr>
-          <a:xfrm>
-            <a:off x="5870301" y="1653203"/>
-            <a:ext cx="5864193" cy="3899064"/>
-          </a:xfrm>
-          <a:prstGeom prst="rect">
-            <a:avLst/>
-          </a:prstGeom>
-        </p:spPr>
-      </p:pic>
-      <p:sp>
-        <p:nvSpPr>
-          <p:cNvPr id="7" name="TextBox 6"/>
+          <p:cNvPr id="5" name="TextBox 4"/>
           <p:cNvSpPr txBox="1"/>
           <p:nvPr/>
         </p:nvSpPr>
         <p:spPr>
           <a:xfrm>
-            <a:off x="5870301" y="5961888"/>
-            <a:ext cx="5864193" cy="320040"/>
-          </a:xfrm>
-          <a:prstGeom prst="rect">
-            <a:avLst/>
-          </a:prstGeom>
-          <a:noFill/>
-        </p:spPr>
-        <p:txBody>
-          <a:bodyPr wrap="square">
-            <a:spAutoFit/>
-          </a:bodyPr>
-          <a:lstStyle/>
-          <a:p>
-            <a:pPr algn="ctr"/>
-            <a:r>
-              <a:rPr sz="1100" b="0" i="1">
-                <a:solidFill>
-                  <a:srgbClr val="666666"/>
-                </a:solidFill>
-                <a:latin typeface="Calibri"/>
-              </a:rPr>
-              <a:t>Foto: Pixabay · Pexels</a:t>
-            </a:r>
-          </a:p>
-        </p:txBody>
-      </p:sp>
-      <p:sp>
-        <p:nvSpPr>
-          <p:cNvPr id="8" name="TextBox 7"/>
-          <p:cNvSpPr txBox="1"/>
-          <p:nvPr/>
-        </p:nvSpPr>
-        <p:spPr>
-          <a:xfrm>
-            <a:off x="457200" y="1353312"/>
-            <a:ext cx="5093061" cy="5047488"/>
+            <a:off x="457200" y="1170432"/>
+            <a:ext cx="11277295" cy="5230368"/>
           </a:xfrm>
           <a:prstGeom prst="rect">
             <a:avLst/>
@@ -9640,7 +9060,7 @@
       </p:sp>
       <p:sp>
         <p:nvSpPr>
-          <p:cNvPr id="9" name="TextBox 8"/>
+          <p:cNvPr id="6" name="TextBox 5"/>
           <p:cNvSpPr txBox="1"/>
           <p:nvPr/>
         </p:nvSpPr>
@@ -12849,118 +12269,14 @@
       </p:sp>
       <p:sp>
         <p:nvSpPr>
-          <p:cNvPr id="5" name="Rounded Rectangle 4"/>
-          <p:cNvSpPr/>
-          <p:nvPr/>
-        </p:nvSpPr>
-        <p:spPr>
-          <a:xfrm>
-            <a:off x="5797149" y="1573813"/>
-            <a:ext cx="6010497" cy="4057845"/>
-          </a:xfrm>
-          <a:prstGeom prst="roundRect">
-            <a:avLst>
-              <a:gd name="adj" fmla="val 4000"/>
-            </a:avLst>
-          </a:prstGeom>
-          <a:solidFill>
-            <a:srgbClr val="E8EEF4"/>
-          </a:solidFill>
-          <a:ln>
-            <a:noFill/>
-          </a:ln>
-        </p:spPr>
-        <p:style>
-          <a:lnRef idx="1">
-            <a:schemeClr val="accent1"/>
-          </a:lnRef>
-          <a:fillRef idx="3">
-            <a:schemeClr val="accent1"/>
-          </a:fillRef>
-          <a:effectRef idx="2">
-            <a:schemeClr val="accent1"/>
-          </a:effectRef>
-          <a:fontRef idx="minor">
-            <a:schemeClr val="lt1"/>
-          </a:fontRef>
-        </p:style>
-        <p:txBody>
-          <a:bodyPr rtlCol="0" anchor="ctr"/>
-          <a:lstStyle/>
-          <a:p>
-            <a:pPr algn="ctr"/>
-          </a:p>
-        </p:txBody>
-      </p:sp>
-      <p:pic>
-        <p:nvPicPr>
-          <p:cNvPr id="6" name="Picture 5" descr="students-learning-laptops-classroom.jpg"/>
-          <p:cNvPicPr>
-            <a:picLocks noChangeAspect="1"/>
-          </p:cNvPicPr>
-          <p:nvPr/>
-        </p:nvPicPr>
-        <p:blipFill>
-          <a:blip r:embed="rId2"/>
-          <a:stretch>
-            <a:fillRect/>
-          </a:stretch>
-        </p:blipFill>
-        <p:spPr>
-          <a:xfrm>
-            <a:off x="5870301" y="1646965"/>
-            <a:ext cx="5864193" cy="3911541"/>
-          </a:xfrm>
-          <a:prstGeom prst="rect">
-            <a:avLst/>
-          </a:prstGeom>
-        </p:spPr>
-      </p:pic>
-      <p:sp>
-        <p:nvSpPr>
-          <p:cNvPr id="7" name="TextBox 6"/>
+          <p:cNvPr id="5" name="TextBox 4"/>
           <p:cNvSpPr txBox="1"/>
           <p:nvPr/>
         </p:nvSpPr>
         <p:spPr>
           <a:xfrm>
-            <a:off x="5870301" y="5961888"/>
-            <a:ext cx="5864193" cy="320040"/>
-          </a:xfrm>
-          <a:prstGeom prst="rect">
-            <a:avLst/>
-          </a:prstGeom>
-          <a:noFill/>
-        </p:spPr>
-        <p:txBody>
-          <a:bodyPr wrap="square">
-            <a:spAutoFit/>
-          </a:bodyPr>
-          <a:lstStyle/>
-          <a:p>
-            <a:pPr algn="ctr"/>
-            <a:r>
-              <a:rPr sz="1100" b="0" i="1">
-                <a:solidFill>
-                  <a:srgbClr val="666666"/>
-                </a:solidFill>
-                <a:latin typeface="Calibri"/>
-              </a:rPr>
-              <a:t>Foto: Mikhail Nilov · Pexels</a:t>
-            </a:r>
-          </a:p>
-        </p:txBody>
-      </p:sp>
-      <p:sp>
-        <p:nvSpPr>
-          <p:cNvPr id="8" name="TextBox 7"/>
-          <p:cNvSpPr txBox="1"/>
-          <p:nvPr/>
-        </p:nvSpPr>
-        <p:spPr>
-          <a:xfrm>
-            <a:off x="457200" y="1353312"/>
-            <a:ext cx="5093061" cy="5047488"/>
+            <a:off x="457200" y="1170432"/>
+            <a:ext cx="11277295" cy="5230368"/>
           </a:xfrm>
           <a:prstGeom prst="rect">
             <a:avLst/>
@@ -13042,7 +12358,7 @@
       </p:sp>
       <p:sp>
         <p:nvSpPr>
-          <p:cNvPr id="9" name="TextBox 8"/>
+          <p:cNvPr id="6" name="TextBox 5"/>
           <p:cNvSpPr txBox="1"/>
           <p:nvPr/>
         </p:nvSpPr>
@@ -14319,118 +13635,14 @@
       </p:sp>
       <p:sp>
         <p:nvSpPr>
-          <p:cNvPr id="5" name="Rounded Rectangle 4"/>
-          <p:cNvSpPr/>
-          <p:nvPr/>
-        </p:nvSpPr>
-        <p:spPr>
-          <a:xfrm>
-            <a:off x="5797149" y="1580051"/>
-            <a:ext cx="6010497" cy="4045368"/>
-          </a:xfrm>
-          <a:prstGeom prst="roundRect">
-            <a:avLst>
-              <a:gd name="adj" fmla="val 4000"/>
-            </a:avLst>
-          </a:prstGeom>
-          <a:solidFill>
-            <a:srgbClr val="E8EEF4"/>
-          </a:solidFill>
-          <a:ln>
-            <a:noFill/>
-          </a:ln>
-        </p:spPr>
-        <p:style>
-          <a:lnRef idx="1">
-            <a:schemeClr val="accent1"/>
-          </a:lnRef>
-          <a:fillRef idx="3">
-            <a:schemeClr val="accent1"/>
-          </a:fillRef>
-          <a:effectRef idx="2">
-            <a:schemeClr val="accent1"/>
-          </a:effectRef>
-          <a:fontRef idx="minor">
-            <a:schemeClr val="lt1"/>
-          </a:fontRef>
-        </p:style>
-        <p:txBody>
-          <a:bodyPr rtlCol="0" anchor="ctr"/>
-          <a:lstStyle/>
-          <a:p>
-            <a:pPr algn="ctr"/>
-          </a:p>
-        </p:txBody>
-      </p:sp>
-      <p:pic>
-        <p:nvPicPr>
-          <p:cNvPr id="6" name="Picture 5" descr="network-switch-cables.jpg"/>
-          <p:cNvPicPr>
-            <a:picLocks noChangeAspect="1"/>
-          </p:cNvPicPr>
-          <p:nvPr/>
-        </p:nvPicPr>
-        <p:blipFill>
-          <a:blip r:embed="rId2"/>
-          <a:stretch>
-            <a:fillRect/>
-          </a:stretch>
-        </p:blipFill>
-        <p:spPr>
-          <a:xfrm>
-            <a:off x="5870301" y="1653203"/>
-            <a:ext cx="5864193" cy="3899064"/>
-          </a:xfrm>
-          <a:prstGeom prst="rect">
-            <a:avLst/>
-          </a:prstGeom>
-        </p:spPr>
-      </p:pic>
-      <p:sp>
-        <p:nvSpPr>
-          <p:cNvPr id="7" name="TextBox 6"/>
+          <p:cNvPr id="5" name="TextBox 4"/>
           <p:cNvSpPr txBox="1"/>
           <p:nvPr/>
         </p:nvSpPr>
         <p:spPr>
           <a:xfrm>
-            <a:off x="5870301" y="5961888"/>
-            <a:ext cx="5864193" cy="320040"/>
-          </a:xfrm>
-          <a:prstGeom prst="rect">
-            <a:avLst/>
-          </a:prstGeom>
-          <a:noFill/>
-        </p:spPr>
-        <p:txBody>
-          <a:bodyPr wrap="square">
-            <a:spAutoFit/>
-          </a:bodyPr>
-          <a:lstStyle/>
-          <a:p>
-            <a:pPr algn="ctr"/>
-            <a:r>
-              <a:rPr sz="1100" b="0" i="1">
-                <a:solidFill>
-                  <a:srgbClr val="666666"/>
-                </a:solidFill>
-                <a:latin typeface="Calibri"/>
-              </a:rPr>
-              <a:t>Foto: Brett Sayles · Pexels</a:t>
-            </a:r>
-          </a:p>
-        </p:txBody>
-      </p:sp>
-      <p:sp>
-        <p:nvSpPr>
-          <p:cNvPr id="8" name="TextBox 7"/>
-          <p:cNvSpPr txBox="1"/>
-          <p:nvPr/>
-        </p:nvSpPr>
-        <p:spPr>
-          <a:xfrm>
-            <a:off x="457200" y="1353312"/>
-            <a:ext cx="5093061" cy="5047488"/>
+            <a:off x="457200" y="1170432"/>
+            <a:ext cx="11277295" cy="5230368"/>
           </a:xfrm>
           <a:prstGeom prst="rect">
             <a:avLst/>
@@ -14507,7 +13719,7 @@
                 </a:solidFill>
                 <a:latin typeface="Calibri"/>
               </a:rPr>
-              <a:t>, nunca en la pública:</a:t>
+              <a:t>, nunca en la pública: es el error más grave del diagrama.</a:t>
             </a:r>
           </a:p>
           <a:p>
@@ -14578,11 +13790,27 @@
               <a:t>.</a:t>
             </a:r>
           </a:p>
-        </p:txBody>
-      </p:sp>
-      <p:sp>
-        <p:nvSpPr>
-          <p:cNvPr id="9" name="TextBox 8"/>
+          <a:p>
+            <a:pPr>
+              <a:spcAft>
+                <a:spcPts val="800"/>
+              </a:spcAft>
+            </a:pPr>
+            <a:r>
+              <a:rPr sz="2000" b="0" i="0">
+                <a:solidFill>
+                  <a:srgbClr val="333333"/>
+                </a:solidFill>
+                <a:latin typeface="Calibri"/>
+              </a:rPr>
+              <a:t>–   Pública: balanceador y web estática · Privada: la API · Datos: la base, que solo acepta conexiones desde la API.</a:t>
+            </a:r>
+          </a:p>
+        </p:txBody>
+      </p:sp>
+      <p:sp>
+        <p:nvSpPr>
+          <p:cNvPr id="6" name="TextBox 5"/>
           <p:cNvSpPr txBox="1"/>
           <p:nvPr/>
         </p:nvSpPr>

--- a/Arquitectura de Sistemas Computacionales/Clases/Clase 7 - Redes y almacenamiento cloud/Presentacion.pptx
+++ b/Arquitectura de Sistemas Computacionales/Clases/Clase 7 - Redes y almacenamiento cloud/Presentacion.pptx
@@ -624,6 +624,474 @@
 </p:notes>
 </file>
 
+<file path=ppt/notesSlides/notesSlide10.xml><?xml version="1.0" encoding="utf-8"?>
+<p:notes xmlns:a="http://schemas.openxmlformats.org/drawingml/2006/main" xmlns:p="http://schemas.openxmlformats.org/presentationml/2006/main" xmlns:r="http://schemas.openxmlformats.org/officeDocument/2006/relationships">
+  <p:cSld>
+    <p:spTree>
+      <p:nvGrpSpPr>
+        <p:cNvPr id="1" name=""/>
+        <p:cNvGrpSpPr/>
+        <p:nvPr/>
+      </p:nvGrpSpPr>
+      <p:grpSpPr>
+        <a:xfrm>
+          <a:off x="0" y="0"/>
+          <a:ext cx="0" cy="0"/>
+          <a:chOff x="0" y="0"/>
+          <a:chExt cx="0" cy="0"/>
+        </a:xfrm>
+      </p:grpSpPr>
+      <p:sp>
+        <p:nvSpPr>
+          <p:cNvPr id="2" name="Slide Image Placeholder 1"/>
+          <p:cNvSpPr>
+            <a:spLocks noGrp="1"/>
+          </p:cNvSpPr>
+          <p:nvPr>
+            <p:ph type="sldImg" idx="2"/>
+          </p:nvPr>
+        </p:nvSpPr>
+        <p:spPr/>
+      </p:sp>
+      <p:sp>
+        <p:nvSpPr>
+          <p:cNvPr id="3" name="Notes Placeholder 2"/>
+          <p:cNvSpPr>
+            <a:spLocks noGrp="1"/>
+          </p:cNvSpPr>
+          <p:nvPr>
+            <p:ph type="body" idx="3" sz="quarter"/>
+          </p:nvPr>
+        </p:nvSpPr>
+        <p:spPr/>
+        <p:txBody>
+          <a:bodyPr/>
+          <a:lstStyle/>
+          <a:p>
+            <a:r>
+              <a:t>TEXTO COMPLETO DE LA LÁMINA (se proyecta resumido):</a:t>
+            </a:r>
+          </a:p>
+          <a:p/>
+          <a:p>
+            <a:r>
+              <a:t>Tres zonas rotuladas · cada componente en su zona · puerto de cada uno.</a:t>
+            </a:r>
+          </a:p>
+          <a:p/>
+          <a:p>
+            <a:r>
+              <a:t>Fronteras de confianza marcadas · que renderice sin error en un visor Mermaid.</a:t>
+            </a:r>
+          </a:p>
+          <a:p/>
+          <a:p>
+            <a:r>
+              <a:t>Debe alinearse con el C4 Containers (mismos nombres).</a:t>
+            </a:r>
+          </a:p>
+          <a:p/>
+          <a:p>
+            <a:r>
+              <a:t>Cada flecha lleva protocolo y puerto: HTTPS 443 al edge, HTTP 8080 a la API, PostgreSQL 5432 a la base.</a:t>
+            </a:r>
+          </a:p>
+          <a:p/>
+          <a:p>
+            <a:r>
+              <a:t>Los servicios externos (correo, pagos) se dibujan fuera de las tres zonas: ahí está la frontera de confianza.</a:t>
+            </a:r>
+          </a:p>
+        </p:txBody>
+      </p:sp>
+      <p:sp>
+        <p:nvSpPr>
+          <p:cNvPr id="4" name="Slide Number Placeholder 3"/>
+          <p:cNvSpPr>
+            <a:spLocks noGrp="1"/>
+          </p:cNvSpPr>
+          <p:nvPr>
+            <p:ph type="sldNum" idx="5" sz="quarter"/>
+          </p:nvPr>
+        </p:nvSpPr>
+        <p:spPr/>
+      </p:sp>
+    </p:spTree>
+  </p:cSld>
+  <p:clrMapOvr>
+    <a:masterClrMapping/>
+  </p:clrMapOvr>
+</p:notes>
+</file>
+
+<file path=ppt/notesSlides/notesSlide11.xml><?xml version="1.0" encoding="utf-8"?>
+<p:notes xmlns:a="http://schemas.openxmlformats.org/drawingml/2006/main" xmlns:p="http://schemas.openxmlformats.org/presentationml/2006/main" xmlns:r="http://schemas.openxmlformats.org/officeDocument/2006/relationships">
+  <p:cSld>
+    <p:spTree>
+      <p:nvGrpSpPr>
+        <p:cNvPr id="1" name=""/>
+        <p:cNvGrpSpPr/>
+        <p:nvPr/>
+      </p:nvGrpSpPr>
+      <p:grpSpPr>
+        <a:xfrm>
+          <a:off x="0" y="0"/>
+          <a:ext cx="0" cy="0"/>
+          <a:chOff x="0" y="0"/>
+          <a:chExt cx="0" cy="0"/>
+        </a:xfrm>
+      </p:grpSpPr>
+      <p:sp>
+        <p:nvSpPr>
+          <p:cNvPr id="2" name="Slide Image Placeholder 1"/>
+          <p:cNvSpPr>
+            <a:spLocks noGrp="1"/>
+          </p:cNvSpPr>
+          <p:nvPr>
+            <p:ph type="sldImg" idx="2"/>
+          </p:nvPr>
+        </p:nvSpPr>
+        <p:spPr/>
+      </p:sp>
+      <p:sp>
+        <p:nvSpPr>
+          <p:cNvPr id="3" name="Notes Placeholder 2"/>
+          <p:cNvSpPr>
+            <a:spLocks noGrp="1"/>
+          </p:cNvSpPr>
+          <p:nvPr>
+            <p:ph type="body" idx="3" sz="quarter"/>
+          </p:nvPr>
+        </p:nvSpPr>
+        <p:spPr/>
+        <p:txBody>
+          <a:bodyPr/>
+          <a:lstStyle/>
+          <a:p>
+            <a:r>
+              <a:t>DESARROLLO (para explicarlo, no se proyecta):</a:t>
+            </a:r>
+          </a:p>
+          <a:p/>
+          <a:p>
+            <a:r>
+              <a:t>Un usuario final abre cloudlite.example en su telefono; el DNS resuelve el nombre a la IP publica del balanceador; el navegador abre una conexion HTTPS al puerto 443 de ese balanceador</a:t>
+            </a:r>
+          </a:p>
+          <a:p/>
+          <a:p>
+            <a:r>
+              <a:t>Que vive en la zona publica; el balanceador elige una de las dos instancias del contenedor de la API, en la zona privada</a:t>
+            </a:r>
+          </a:p>
+          <a:p/>
+          <a:p>
+            <a:r>
+              <a:t>Y le reenvia la peticion por HTTP al puerto 8080; la API consulta el motor de base de datos en la zona de datos por el puerto 5432 y devuelve JSON por el mismo camino.</a:t>
+            </a:r>
+          </a:p>
+          <a:p/>
+          <a:p>
+            <a:r>
+              <a:t>El recorrido completo tiene 4 saltos: DNS, balanceador en la zona publica, API en la zona privada y base de datos en la zona de datos.</a:t>
+            </a:r>
+          </a:p>
+          <a:p/>
+          <a:p>
+            <a:r>
+              <a:t>Cada salto de red dentro de un mismo centro de datos suma del orden de 1 milisegundo, y por eso un diseno que encadena servicios innecesarios es lento aunque cada pieza sea rapida.</a:t>
+            </a:r>
+          </a:p>
+          <a:p/>
+          <a:p>
+            <a:r>
+              <a:t>(No se proyecta) La mejor forma de dictar la clase es seguir una peticion de CloudLite de punta a punta sobre el diagrama proyectado.</a:t>
+            </a:r>
+          </a:p>
+          <a:p/>
+          <a:p>
+            <a:r>
+              <a:t>(No se proyecta) Ese recorrido, con cada flecha etiquetada con protocolo y puerto y cada caja dentro de su zona, es la estructura que la pregunta 4 califica; lo que se pega en la plataforma es su version en Mermaid, que es la seccion siguiente.</a:t>
+            </a:r>
+          </a:p>
+          <a:p/>
+          <a:p>
+            <a:r>
+              <a:t>(No se proyecta) Sirve tambien para citar numeros: una consulta simple bien indexada responde entre 1 y 20 milisegundos, y el objetivo que se formalizara en la Clase 12 suele fijarse por convencion en menos de 300 milisegundos para el 95 por ciento de las peticiones.</a:t>
+            </a:r>
+          </a:p>
+          <a:p/>
+          <a:p>
+            <a:r>
+              <a:t>(No se proyecta) Con eso el grupo ve que si una pantalla dispara veinte consultas encadenadas el problema es de diseno y no de servidor.</a:t>
+            </a:r>
+          </a:p>
+        </p:txBody>
+      </p:sp>
+      <p:sp>
+        <p:nvSpPr>
+          <p:cNvPr id="4" name="Slide Number Placeholder 3"/>
+          <p:cNvSpPr>
+            <a:spLocks noGrp="1"/>
+          </p:cNvSpPr>
+          <p:nvPr>
+            <p:ph type="sldNum" idx="5" sz="quarter"/>
+          </p:nvPr>
+        </p:nvSpPr>
+        <p:spPr/>
+      </p:sp>
+    </p:spTree>
+  </p:cSld>
+  <p:clrMapOvr>
+    <a:masterClrMapping/>
+  </p:clrMapOvr>
+</p:notes>
+</file>
+
+<file path=ppt/notesSlides/notesSlide12.xml><?xml version="1.0" encoding="utf-8"?>
+<p:notes xmlns:a="http://schemas.openxmlformats.org/drawingml/2006/main" xmlns:p="http://schemas.openxmlformats.org/presentationml/2006/main" xmlns:r="http://schemas.openxmlformats.org/officeDocument/2006/relationships">
+  <p:cSld>
+    <p:spTree>
+      <p:nvGrpSpPr>
+        <p:cNvPr id="1" name=""/>
+        <p:cNvGrpSpPr/>
+        <p:nvPr/>
+      </p:nvGrpSpPr>
+      <p:grpSpPr>
+        <a:xfrm>
+          <a:off x="0" y="0"/>
+          <a:ext cx="0" cy="0"/>
+          <a:chOff x="0" y="0"/>
+          <a:chExt cx="0" cy="0"/>
+        </a:xfrm>
+      </p:grpSpPr>
+      <p:sp>
+        <p:nvSpPr>
+          <p:cNvPr id="2" name="Slide Image Placeholder 1"/>
+          <p:cNvSpPr>
+            <a:spLocks noGrp="1"/>
+          </p:cNvSpPr>
+          <p:nvPr>
+            <p:ph type="sldImg" idx="2"/>
+          </p:nvPr>
+        </p:nvSpPr>
+        <p:spPr/>
+      </p:sp>
+      <p:sp>
+        <p:nvSpPr>
+          <p:cNvPr id="3" name="Notes Placeholder 2"/>
+          <p:cNvSpPr>
+            <a:spLocks noGrp="1"/>
+          </p:cNvSpPr>
+          <p:nvPr>
+            <p:ph type="body" idx="3" sz="quarter"/>
+          </p:nvPr>
+        </p:nvSpPr>
+        <p:spPr/>
+        <p:txBody>
+          <a:bodyPr/>
+          <a:lstStyle/>
+          <a:p>
+            <a:r>
+              <a:t>DESARROLLO (para explicarlo, no se proyecta):</a:t>
+            </a:r>
+          </a:p>
+          <a:p/>
+          <a:p>
+            <a:r>
+              <a:t>Primera: la palabra inicial.</a:t>
+            </a:r>
+          </a:p>
+          <a:p/>
+          <a:p>
+            <a:r>
+              <a:t>Segunda: cada zona es un subgraph con su rotulo entre comillas y su propio end.</a:t>
+            </a:r>
+          </a:p>
+          <a:p/>
+          <a:p>
+            <a:r>
+              <a:t>Los subgraph son las tres zonas; olvidar un end es la causa numero uno de que el diagrama no se dibuje, porque el bloque queda abierto.</a:t>
+            </a:r>
+          </a:p>
+          <a:p/>
+          <a:p>
+            <a:r>
+              <a:t>Tercera: la forma de la caja dice que es la pieza.</a:t>
+            </a:r>
+          </a:p>
+          <a:p/>
+          <a:p>
+            <a:r>
+              <a:t>Los corchetes rectos son un proceso o servicio, y la combinacion de corchete y parentesis, es decir abrir corchete parentesis, es la base de datos, que se lee como cilindro.</a:t>
+            </a:r>
+          </a:p>
+          <a:p/>
+          <a:p>
+            <a:r>
+              <a:t>Cuarta: el puerto va DENTRO del rotulo de la caja, separado con la etiqueta de salto de linea de HTML, y la etiqueta de la flecha va entre barras verticales y comillas, con el protocolo y el puerto.</a:t>
+            </a:r>
+          </a:p>
+          <a:p/>
+          <a:p>
+            <a:r>
+              <a:t>Es la forma mas segura de etiquetar los puertos sin ensuciar el dibujo.</a:t>
+            </a:r>
+          </a:p>
+          <a:p/>
+          <a:p>
+            <a:r>
+              <a:t>Quinta: el servicio externo se declara FUERA de los tres subgraph, y la flecha que llega a el se rotula como frontera de confianza; asi las fronteras quedan visibles en el propio dibujo y no en un comentario aparte.</a:t>
+            </a:r>
+          </a:p>
+          <a:p/>
+          <a:p>
+            <a:r>
+              <a:t>Los comentarios de Mermaid empiezan con dos signos de porcentaje, no se dibujan y tienen que ir en LINEA PROPIA: uno pegado al final de la linea de un nodo puede tumbar el renderizado.</a:t>
+            </a:r>
+          </a:p>
+          <a:p/>
+          <a:p>
+            <a:r>
+              <a:t>Y si un rotulo lleva parentesis, dos signos de puntuacion o comillas, hay que envolverlo en comillas dobles, porque sin ellas el analizador se detiene ahi.</a:t>
+            </a:r>
+          </a:p>
+          <a:p/>
+          <a:p>
+            <a:r>
+              <a:t>NOTAS:</a:t>
+            </a:r>
+          </a:p>
+          <a:p/>
+          <a:p>
+            <a:r>
+              <a:t>Se escribe flowchart LR, donde LR significa de izquierda a derecha, y es lo que hace que el recorrido cliente, edge, aplicacion, datos se lea como un flujo y no como una torre.</a:t>
+            </a:r>
+          </a:p>
+          <a:p/>
+          <a:p>
+            <a:r>
+              <a:t>Dos advertencias practicas.</a:t>
+            </a:r>
+          </a:p>
+          <a:p/>
+          <a:p>
+            <a:r>
+              <a:t>Sirven para dejar una nota al evaluador, no para responder.</a:t>
+            </a:r>
+          </a:p>
+          <a:p/>
+          <a:p>
+            <a:r>
+              <a:t>PREGUNTAS FRECUENTES DEL GRUPO</a:t>
+            </a:r>
+          </a:p>
+          <a:p/>
+          <a:p>
+            <a:r>
+              <a:t>«Si la base de datos es privada, como se conecta la API?» Privado significa inalcanzable desde internet</a:t>
+            </a:r>
+          </a:p>
+          <a:p/>
+          <a:p>
+            <a:r>
+              <a:t>No inalcanzable en absoluto: la API esta en la misma red y llega por el nombre interno y el puerto del motor; quien no puede llegar es el usuario final ni un atacante externo.</a:t>
+            </a:r>
+          </a:p>
+          <a:p/>
+          <a:p>
+            <a:r>
+              <a:t>«Esto no esta mal por no ser una VPC real de un proveedor?» Lo que se evalua es el razonamiento sobre zonas, puertos y ubicacion de los datos, no la sintaxis de una marca; el curso usa herramientas gratis en navegador y no pide cuenta de pago ni tarjeta.</a:t>
+            </a:r>
+          </a:p>
+          <a:p/>
+          <a:p>
+            <a:r>
+              <a:t>Un sistema de dos cajas se dibuja con cliente y edge en la publica, la aplicacion en la privada y la base en la de datos</a:t>
+            </a:r>
+          </a:p>
+          <a:p/>
+          <a:p>
+            <a:r>
+              <a:t>Si de verdad no hay balanceador, el punto de entrada es el servidor web o el proxy que atiende el 443, y ese es el habitante de la zona publica.</a:t>
+            </a:r>
+          </a:p>
+          <a:p/>
+          <a:p>
+            <a:r>
+              <a:t>Estas cuatro aparecen todos los semestres y las cuatro se responden con material que ya esta proyectado.</a:t>
+            </a:r>
+          </a:p>
+          <a:p/>
+          <a:p>
+            <a:r>
+              <a:t>Si un desarrollador necesita entrar, se hace por un unico host intermedio controlado, llamado bastion.</a:t>
+            </a:r>
+          </a:p>
+          <a:p/>
+          <a:p>
+            <a:r>
+              <a:t>Por eso las zonas se llaman Publica, Privada y Datos.</a:t>
+            </a:r>
+          </a:p>
+          <a:p/>
+          <a:p>
+            <a:r>
+              <a:t>El PNG exportado va a la carpeta del Proyecto Integrador, para el informe, y no reemplaza la respuesta.</a:t>
+            </a:r>
+          </a:p>
+          <a:p/>
+          <a:p>
+            <a:r>
+              <a:t>(No se proyecta) La diapositiva del molde existe porque el estudiante puede tener el modelo correcto en la cabeza y perder puntos por sintaxis, y porque 2 de los 14 son que el diagrama renderice.</a:t>
+            </a:r>
+          </a:p>
+          <a:p/>
+          <a:p>
+            <a:r>
+              <a:t>(No se proyecta) Hay cinco cosas que el docente debe poder explicar sin titubear.</a:t>
+            </a:r>
+          </a:p>
+          <a:p/>
+          <a:p>
+            <a:r>
+              <a:t>(No se proyecta) Vale la pena senalar la caja de la base de datos y decir «esta forma, dentro de este subgraph, son 4 de los 14 puntos».</a:t>
+            </a:r>
+          </a:p>
+          <a:p/>
+          <a:p>
+            <a:r>
+              <a:t>(No se proyecta) El procedimiento que se proyecta en la demo es el que conviene repetir tres veces: dibujar el boceto donde sea, traducirlo a Mermaid (una IA lo hace bien, y ahi hay que decir la frase exacta: la IA acierta la sintaxis, no el modelo), pegarlo en un visor Mermaid y MIRARLO RENDERIZADO.</a:t>
+            </a:r>
+          </a:p>
+          <a:p/>
+          <a:p>
+            <a:r>
+              <a:t>(No se proyecta) Si no se dibuja, se corrige ahi mismo; nadie califica un codigo que no dibuja.</a:t>
+            </a:r>
+          </a:p>
+        </p:txBody>
+      </p:sp>
+      <p:sp>
+        <p:nvSpPr>
+          <p:cNvPr id="4" name="Slide Number Placeholder 3"/>
+          <p:cNvSpPr>
+            <a:spLocks noGrp="1"/>
+          </p:cNvSpPr>
+          <p:nvPr>
+            <p:ph type="sldNum" idx="5" sz="quarter"/>
+          </p:nvPr>
+        </p:nvSpPr>
+        <p:spPr/>
+      </p:sp>
+    </p:spTree>
+  </p:cSld>
+  <p:clrMapOvr>
+    <a:masterClrMapping/>
+  </p:clrMapOvr>
+</p:notes>
+</file>
+
 <file path=ppt/notesSlides/notesSlide2.xml><?xml version="1.0" encoding="utf-8"?>
 <p:notes xmlns:a="http://schemas.openxmlformats.org/drawingml/2006/main" xmlns:p="http://schemas.openxmlformats.org/presentationml/2006/main" xmlns:r="http://schemas.openxmlformats.org/officeDocument/2006/relationships">
   <p:cSld>
@@ -793,61 +1261,37 @@
           <a:lstStyle/>
           <a:p>
             <a:r>
-              <a:t>DESARROLLO (para explicarlo, no se proyecta):</a:t>
+              <a:t>TEXTO COMPLETO DE LA LÁMINA (se proyecta resumido):</a:t>
             </a:r>
           </a:p>
           <a:p/>
           <a:p>
             <a:r>
-              <a:t>Una subred es una subdivision de una red, y lo que la hace publica o privada no es su nombre sino sus rutas.</a:t>
+              <a:t>Cliente → edge/balanceador → app → datos: tres zonas, no dos.</a:t>
             </a:r>
           </a:p>
           <a:p/>
           <a:p>
             <a:r>
-              <a:t>Una subred publica tiene camino de entrada desde internet: alguien de afuera puede iniciar una conexion hacia lo que vive ahi.</a:t>
+              <a:t>La base de datos va en la zona de datos, nunca en la pública: es el error más grave del diagrama.</a:t>
             </a:r>
           </a:p>
           <a:p/>
           <a:p>
             <a:r>
-              <a:t>En CloudLite las mas faciles de senalar son las dos flechas que salen a lo que no es suyo, la pasarela de pagos y el correo transaccional: ninguno de los dos esta en las tres zonas, y la del molde que se proyecta es la de la pasarela.</a:t>
+              <a:t>Frontera de confianza: la flecha donde termina lo que tú controlas (un SaaS externo).</a:t>
             </a:r>
           </a:p>
           <a:p/>
           <a:p>
             <a:r>
-              <a:t>NOTAS:</a:t>
+              <a:t>No inventen subnets AWS: usen zonas Pública / Privada / Datos.</a:t>
             </a:r>
           </a:p>
           <a:p/>
           <a:p>
             <a:r>
-              <a:t>Una privada no lo tiene; solo se alcanza desde dentro, aunque normalmente si puede salir para descargar actualizaciones.</a:t>
-            </a:r>
-          </a:p>
-          <a:p/>
-          <a:p>
-            <a:r>
-              <a:t>(No se proyecta) Sobre esa distincion se construye la regla de las zonas, con tres nombres exactos porque son tres zonas y no dos: en la zona PUBLICA van el punto de entrada, el balanceador o proxy inverso, y la aplicacion web estatica, que es publica sin que eso sea una fuga porque no lleva secretos dentro; el cliente que llega de internet se dibuja FUERA de las tres zonas, porque es el actor y no una pieza que el estudiante despliegue; la API va en la zona PRIVADA, alcanzable solo desde el edge; y los datos van en una tercera zona, la de DATOS, que solo acepta conexiones desde la aplicacion y no tiene salida a internet.</a:t>
-            </a:r>
-          </a:p>
-          <a:p/>
-          <a:p>
-            <a:r>
-              <a:t>(No se proyecta) Los 4 puntos de ubicacion de la pregunta 4 se pierden COMPLETOS si la base de datos queda en la zona publica: no es un descuento parcial, es el error que la pregunta esta disenada para detectar.</a:t>
-            </a:r>
-          </a:p>
-          <a:p/>
-          <a:p>
-            <a:r>
-              <a:t>(No se proyecta) Y las tres zonas rotuladas valen otros 4 puntos por si mismas, asi que un diagrama de dos zonas, aunque tenga la base de datos bien puesta, ya empezo perdiendo.</a:t>
-            </a:r>
-          </a:p>
-          <a:p/>
-          <a:p>
-            <a:r>
-              <a:t>(No se proyecta) Conviene ademas nombrar la frontera de confianza: es la linea donde termina lo que el estudiante controla y empieza lo que no.</a:t>
+              <a:t>Pública: balanceador y web estática · Privada: la API · Datos: la base, que solo acepta conexiones desde la API.</a:t>
             </a:r>
           </a:p>
         </p:txBody>
@@ -923,61 +1367,55 @@
           <a:p/>
           <a:p>
             <a:r>
-              <a:t>El DNS es el directorio distribuido que traduce un nombre legible, como cloudlite.example, en la direccion IP donde atiende el servicio; el registro tipo A apunta un nombre a una IP y el CNAME apunta un nombre a otro nombre.</a:t>
+              <a:t>Una subred es una subdivision de una red, y lo que la hace publica o privada no es su nombre sino sus rutas.</a:t>
             </a:r>
           </a:p>
           <a:p/>
           <a:p>
             <a:r>
-              <a:t>Cada registro tiene un TTL, los segundos que los demas guardan la respuesta en cache; tipicamente de 300 a 3600, asi que un cambio de direccion no es instantaneo para todos.</a:t>
+              <a:t>Una subred publica tiene camino de entrada desde internet: alguien de afuera puede iniciar una conexion hacia lo que vive ahi.</a:t>
             </a:r>
           </a:p>
           <a:p/>
           <a:p>
             <a:r>
-              <a:t>Su funcion menos obvia y mas importante es el chequeo de salud: consulta un endpoint como /health, por convencion cada 10 a 30 segundos, y si falla dos o tres veces seguidas retira esa instancia de la rotacion hasta que responda.</a:t>
+              <a:t>En CloudLite las mas faciles de senalar son las dos flechas que salen a lo que no es suyo, la pasarela de pagos y el correo transaccional: ninguno de los dos esta en las tres zonas, y la del molde que se proyecta es la de la pasarela.</a:t>
             </a:r>
           </a:p>
           <a:p/>
           <a:p>
             <a:r>
-              <a:t>Es tambien donde termina el TLS, es decir donde se descifra HTTPS.</a:t>
+              <a:t>NOTAS:</a:t>
             </a:r>
           </a:p>
           <a:p/>
           <a:p>
             <a:r>
-              <a:t>En CloudLite el recorrido es concreto: cloudlite.example resuelve a la IP del balanceador, que escucha en el 443, termina el TLS y reenvia la peticion a una instancia de la API en el 8080.</a:t>
+              <a:t>Una privada no lo tiene; solo se alcanza desde dentro, aunque normalmente si puede salir para descargar actualizaciones.</a:t>
             </a:r>
           </a:p>
           <a:p/>
           <a:p>
             <a:r>
-              <a:t>Si una instancia no responde a su /health, el balanceador deja de enviarle trafico: es la primera forma de disponibilidad que el sistema obtiene sin escribir codigo.</a:t>
+              <a:t>(No se proyecta) Sobre esa distincion se construye la regla de las zonas, con tres nombres exactos porque son tres zonas y no dos: en la zona PUBLICA van el punto de entrada, el balanceador o proxy inverso, y la aplicacion web estatica, que es publica sin que eso sea una fuga porque no lleva secretos dentro; el cliente que llega de internet se dibuja FUERA de las tres zonas, porque es el actor y no una pieza que el estudiante despliegue; la API va en la zona PRIVADA, alcanzable solo desde el edge; y los datos van en una tercera zona, la de DATOS, que solo acepta conexiones desde la aplicacion y no tiene salida a internet.</a:t>
             </a:r>
           </a:p>
           <a:p/>
           <a:p>
             <a:r>
-              <a:t>NOTAS:</a:t>
+              <a:t>(No se proyecta) Los 4 puntos de ubicacion de la pregunta 4 se pierden COMPLETOS si la base de datos queda en la zona publica: no es un descuento parcial, es el error que la pregunta esta disenada para detectar.</a:t>
             </a:r>
           </a:p>
           <a:p/>
           <a:p>
             <a:r>
-              <a:t>El balanceador de carga recibe todas las peticiones y las reparte entre varias instancias iguales del mismo servicio, con algoritmos como round robin o menor numero de conexiones activas.</a:t>
+              <a:t>(No se proyecta) Y las tres zonas rotuladas valen otros 4 puntos por si mismas, asi que un diagrama de dos zonas, aunque tenga la base de datos bien puesta, ya empezo perdiendo.</a:t>
             </a:r>
           </a:p>
           <a:p/>
           <a:p>
             <a:r>
-              <a:t>(No se proyecta) Dos piezas mas hay que explicar sin titubear.</a:t>
-            </a:r>
-          </a:p>
-          <a:p/>
-          <a:p>
-            <a:r>
-              <a:t>(No se proyecta) En el diagrama de hoy el balanceador es el habitante de la zona publica, y el /health que consulta es el mismo contrato de salud que se verifico con curl en la Clase 3 y el primer monitoreo real de la Clase 8.</a:t>
+              <a:t>(No se proyecta) Conviene ademas nombrar la frontera de confianza: es la linea donde termina lo que el estudiante controla y empieza lo que no.</a:t>
             </a:r>
           </a:p>
         </p:txBody>
@@ -1053,97 +1491,61 @@
           <a:p/>
           <a:p>
             <a:r>
-              <a:t>El almacenamiento se decide por la caracteristica del dato, y aqui hay que ser estricto con el vocabulario: se usan TRES palabras y no mas: Relacional, Bloque y Objeto.</a:t>
+              <a:t>El DNS es el directorio distribuido que traduce un nombre legible, como cloudlite.example, en la direccion IP donde atiende el servicio; el registro tipo A apunta un nombre a una IP y el CNAME apunta un nombre a otro nombre.</a:t>
             </a:r>
           </a:p>
           <a:p/>
           <a:p>
             <a:r>
-              <a:t>RELACIONAL es el motor de base de datos que guarda registros estructurados y permite cruzarlos con consultas y transacciones; la caracteristica del dato que lo exige es que ese dato se cruza con otro dato, y la prueba es que existe una consulta que los junta.</a:t>
+              <a:t>Cada registro tiene un TTL, los segundos que los demas guardan la respuesta en cache; tipicamente de 300 a 3600, asi que un cambio de direccion no es instantaneo para todos.</a:t>
             </a:r>
           </a:p>
           <a:p/>
           <a:p>
             <a:r>
-              <a:t>BLOQUE es un disco crudo que el sistema operativo formatea y monta; se conecta a una sola instancia a la vez, es lo que hay debajo del volumen de un contenedor</a:t>
+              <a:t>Su funcion menos obvia y mas importante es el chequeo de salud: consulta un endpoint como /health, por convencion cada 10 a 30 segundos, y si falla dos o tres veces seguidas retira esa instancia de la rotacion hasta que responda.</a:t>
             </a:r>
           </a:p>
           <a:p/>
           <a:p>
             <a:r>
-              <a:t>Y se mide en gigabytes y en IOPS, operaciones de lectura y escritura por segundo; la caracteristica que lo exige es que el dato lo monta un solo proceso y se escribe por partes, sin recuperarse entero.</a:t>
+              <a:t>Es tambien donde termina el TLS, es decir donde se descifra HTTPS.</a:t>
             </a:r>
           </a:p>
           <a:p/>
           <a:p>
             <a:r>
-              <a:t>OBJETO no tiene carpetas reales: es un espacio plano de contenedores llamados buckets donde cada objeto se guarda bajo una clave, se lee y escribe por HTTP y se reemplaza completo en vez de editarse por partes</a:t>
+              <a:t>En CloudLite el recorrido es concreto: cloudlite.example resuelve a la IP del balanceador, que escucha en el 443, termina el TLS y reenvia la peticion a una instancia de la API en el 8080.</a:t>
             </a:r>
           </a:p>
           <a:p/>
           <a:p>
             <a:r>
-              <a:t>Es practicamente ilimitado, barato y accesible por URL; la caracteristica que lo exige es que el dato se recupera entero, sin partes.</a:t>
+              <a:t>Si una instancia no responde a su /health, el balanceador deja de enviarle trafico: es la primera forma de disponibilidad que el sistema obtiene sin escribir codigo.</a:t>
             </a:r>
           </a:p>
           <a:p/>
           <a:p>
             <a:r>
-              <a:t>El numero que ordena la decision es el precio relativo: un gigabyte al mes en objetos cuesta del orden de dos a tres centavos de dolar, en disco de bloque cerca de cuatro veces mas, y en base de datos gestionada aun mas porque se paga computo.</a:t>
+              <a:t>NOTAS:</a:t>
             </a:r>
           </a:p>
           <a:p/>
           <a:p>
             <a:r>
-              <a:t>Son referencias de mercado, no reglas fijas, y aqui no se aprovisiona nada de pago: el valor esta en justificar.</a:t>
+              <a:t>El balanceador de carga recibe todas las peticiones y las reparte entre varias instancias iguales del mismo servicio, con algoritmos como round robin o menor numero de conexiones activas.</a:t>
             </a:r>
           </a:p>
           <a:p/>
           <a:p>
             <a:r>
-              <a:t>El resumen operativo es: Relacional cuando el dato se consulta cruzado con otro y necesita transacciones</a:t>
+              <a:t>(No se proyecta) Dos piezas mas hay que explicar sin titubear.</a:t>
             </a:r>
           </a:p>
           <a:p/>
           <a:p>
             <a:r>
-              <a:t>NOTAS:</a:t>
-            </a:r>
-          </a:p>
-          <a:p/>
-          <a:p>
-            <a:r>
-              <a:t>Y cada eleccion se justifica nombrando la caracteristica del dato.</a:t>
-            </a:r>
-          </a:p>
-          <a:p/>
-          <a:p>
-            <a:r>
-              <a:t>Bloque cuando un solo proceso monta un disco y escribe en el como si fuera local</a:t>
-            </a:r>
-          </a:p>
-          <a:p/>
-          <a:p>
-            <a:r>
-              <a:t>Objeto cuando el archivo se guarda y se recupera entero por una clave o una URL.</a:t>
-            </a:r>
-          </a:p>
-          <a:p/>
-          <a:p>
-            <a:r>
-              <a:t>(No se proyecta) Vale la pena escribirlas en el tablero y sostenerlas toda la clase.</a:t>
-            </a:r>
-          </a:p>
-          <a:p/>
-          <a:p>
-            <a:r>
-              <a:t>(No se proyecta) Hay una cuarta categoria en la literatura, el almacenamiento de ARCHIVOS, un sistema de archivos compartido que varias instancias montan por red; conviene nombrarla como contraste para que nadie se sienta enganado, pero no es una de las tres palabras que la pregunta admite, y quien cree necesitarla casi siempre esta describiendo un caso que en la nube se resuelve con objeto.</a:t>
-            </a:r>
-          </a:p>
-          <a:p/>
-          <a:p>
-            <a:r>
-              <a:t>(No se proyecta) «Es mas rapido», «es lo que usa todo el mundo» o «es lo normal» no son caracteristicas del dato y no suman ni un punto, aunque el tipo elegido sea el correcto.</a:t>
+              <a:t>(No se proyecta) En el diagrama de hoy el balanceador es el habitante de la zona publica, y el /health que consulta es el mismo contrato de salud que se verifico con curl en la Clase 3 y el primer monitoreo real de la Clase 8.</a:t>
             </a:r>
           </a:p>
         </p:txBody>
@@ -1219,55 +1621,97 @@
           <a:p/>
           <a:p>
             <a:r>
-              <a:t>La solucion ingenua es guardar el archivo en una columna binaria de la base de datos.</a:t>
+              <a:t>El almacenamiento se decide por la caracteristica del dato, y aqui hay que ser estricto con el vocabulario: se usan TRES palabras y no mas: Relacional, Bloque y Objeto.</a:t>
             </a:r>
           </a:p>
           <a:p/>
           <a:p>
             <a:r>
-              <a:t>El diseno correcto separa: el archivo va a almacenamiento de objetos y la base guarda una fila con la clave del objeto, el dueno, el tamano, el tipo de contenido y la fecha.</a:t>
+              <a:t>RELACIONAL es el motor de base de datos que guarda registros estructurados y permite cruzarlos con consultas y transacciones; la caracteristica del dato que lo exige es que ese dato se cruza con otro dato, y la prueba es que existe una consulta que los junta.</a:t>
             </a:r>
           </a:p>
           <a:p/>
           <a:p>
             <a:r>
-              <a:t>Hay una razon adicional: un contenedor es efimero, lo que se escriba en su sistema de archivos desaparece cuando se reemplaza, y con dos instancias detras del balanceador el archivo subido a una no existe en la otra.</a:t>
+              <a:t>BLOQUE es un disco crudo que el sistema operativo formatea y monta; se conecta a una sola instancia a la vez, es lo que hay debajo del volumen de un contenedor</a:t>
             </a:r>
           </a:p>
           <a:p/>
           <a:p>
             <a:r>
-              <a:t>(No se proyecta) El ejemplo que hace visible la decision, y el error de diseno que conviene provocar: CloudLite permite subir una foto de perfil o adjuntar un PDF.</a:t>
+              <a:t>Y se mide en gigabytes y en IOPS, operaciones de lectura y escritura por segundo; la caracteristica que lo exige es que el dato lo monta un solo proceso y se escribe por partes, sin recuperarse entero.</a:t>
             </a:r>
           </a:p>
           <a:p/>
           <a:p>
             <a:r>
-              <a:t>(No se proyecta) Hay que dejar que el estudiante la proponga y luego cuantificarla: dos megabytes por usuario y cinco mil usuarios son diez gigabytes de binarios dentro de una base cuyos datos utiles podrian ser doscientos megabytes; cada respaldo arrastra esos diez gigabytes y la cache del motor se llena de bytes que ninguna consulta filtra.</a:t>
+              <a:t>OBJETO no tiene carpetas reales: es un espacio plano de contenedores llamados buckets donde cada objeto se guarda bajo una clave, se lee y escribe por HTTP y se reemplaza completo en vez de editarse por partes</a:t>
             </a:r>
           </a:p>
           <a:p/>
           <a:p>
             <a:r>
-              <a:t>(No se proyecta) Mantener los contenedores sin estado es la condicion del escalado horizontal de la Clase 13.</a:t>
+              <a:t>Es practicamente ilimitado, barato y accesible por URL; la caracteristica que lo exige es que el dato se recupera entero, sin partes.</a:t>
             </a:r>
           </a:p>
           <a:p/>
           <a:p>
             <a:r>
-              <a:t>(No se proyecta) Y ahora la otra mitad, que es la que sorprende al docente: si el dominio del estudiante no maneja archivos, imagenes ni documentos adjuntos, la respuesta correcta y completa es declarar que NO necesita almacenamiento de objetos y explicar por que.</a:t>
+              <a:t>El numero que ordena la decision es el precio relativo: un gigabyte al mes en objetos cuesta del orden de dos a tres centavos de dolar, en disco de bloque cerca de cuatro veces mas, y en base de datos gestionada aun mas porque se paga computo.</a:t>
             </a:r>
           </a:p>
           <a:p/>
           <a:p>
             <a:r>
-              <a:t>(No se proyecta) La rubrica lo dice al reves de como el grupo lo espera: suma completo quien lo declare y justifique, y se descuenta a quien agregue un almacen de objetos sin un dato que lo pida.</a:t>
+              <a:t>Son referencias de mercado, no reglas fijas, y aqui no se aprovisiona nada de pago: el valor esta en justificar.</a:t>
             </a:r>
           </a:p>
           <a:p/>
           <a:p>
             <a:r>
-              <a:t>(No se proyecta) Hay que anunciarlo antes del taller, porque si no medio salon inventa un bucket «porque suena a cloud» y pierde puntos por agregar.</a:t>
+              <a:t>El resumen operativo es: Relacional cuando el dato se consulta cruzado con otro y necesita transacciones</a:t>
+            </a:r>
+          </a:p>
+          <a:p/>
+          <a:p>
+            <a:r>
+              <a:t>NOTAS:</a:t>
+            </a:r>
+          </a:p>
+          <a:p/>
+          <a:p>
+            <a:r>
+              <a:t>Y cada eleccion se justifica nombrando la caracteristica del dato.</a:t>
+            </a:r>
+          </a:p>
+          <a:p/>
+          <a:p>
+            <a:r>
+              <a:t>Bloque cuando un solo proceso monta un disco y escribe en el como si fuera local</a:t>
+            </a:r>
+          </a:p>
+          <a:p/>
+          <a:p>
+            <a:r>
+              <a:t>Objeto cuando el archivo se guarda y se recupera entero por una clave o una URL.</a:t>
+            </a:r>
+          </a:p>
+          <a:p/>
+          <a:p>
+            <a:r>
+              <a:t>(No se proyecta) Vale la pena escribirlas en el tablero y sostenerlas toda la clase.</a:t>
+            </a:r>
+          </a:p>
+          <a:p/>
+          <a:p>
+            <a:r>
+              <a:t>(No se proyecta) Hay una cuarta categoria en la literatura, el almacenamiento de ARCHIVOS, un sistema de archivos compartido que varias instancias montan por red; conviene nombrarla como contraste para que nadie se sienta enganado, pero no es una de las tres palabras que la pregunta admite, y quien cree necesitarla casi siempre esta describiendo un caso que en la nube se resuelve con objeto.</a:t>
+            </a:r>
+          </a:p>
+          <a:p/>
+          <a:p>
+            <a:r>
+              <a:t>(No se proyecta) «Es mas rapido», «es lo que usa todo el mundo» o «es lo normal» no son caracteristicas del dato y no suman ni un punto, aunque el tipo elegido sea el correcto.</a:t>
             </a:r>
           </a:p>
         </p:txBody>
@@ -1337,67 +1781,37 @@
           <a:lstStyle/>
           <a:p>
             <a:r>
-              <a:t>DESARROLLO (para explicarlo, no se proyecta):</a:t>
+              <a:t>TEXTO COMPLETO DE LA LÁMINA (se proyecta resumido):</a:t>
             </a:r>
           </a:p>
           <a:p/>
           <a:p>
             <a:r>
-              <a:t>Se demuestra con una tabla de tres columnas: «Componente en el C4 Containers», «Componente en el Despliegue» y «Zona».</a:t>
+              <a:t>Tres tipos y sus nombres exactos: Relacional · Bloque · Objeto.</a:t>
             </a:r>
           </a:p>
           <a:p/>
           <a:p>
             <a:r>
-              <a:t>Un ejemplo de fila completa es: «API de turnos» en el Containers, «API de turnos (contenedor, 8080)» en el Despliegue, zona Privada.</a:t>
+              <a:t>Relacional: el dato se cruza con otro · Bloque: lo monta un solo proceso · Objeto: se recupera entero.</a:t>
             </a:r>
           </a:p>
           <a:p/>
           <a:p>
             <a:r>
-              <a:t>El cliente y el proveedor de correo son las filas sin par: aparecen en los diagramas, pero no se despliegan dentro del sistema.</a:t>
+              <a:t>Se justifica por la característica del dato, no por preferencia.</a:t>
             </a:r>
           </a:p>
           <a:p/>
           <a:p>
             <a:r>
-              <a:t>Un error comun es renombrar en el Despliegue: «backend» en lugar de «API de turnos».</a:t>
+              <a:t>Si tu dominio no maneja archivos, declara que no necesitas objeto: es una decisión válida.</a:t>
             </a:r>
           </a:p>
           <a:p/>
           <a:p>
             <a:r>
-              <a:t>Para quien lee son dos piezas distintas, y nadie puede saber si el despliegue cubre todo el sistema.</a:t>
-            </a:r>
-          </a:p>
-          <a:p/>
-          <a:p>
-            <a:r>
-              <a:t>(No se proyecta) Queda la trazabilidad, donde mas puntos se pierden y donde vive una pregunta entera.</a:t>
-            </a:r>
-          </a:p>
-          <a:p/>
-          <a:p>
-            <a:r>
-              <a:t>(No se proyecta) Los nombres de las cajas del despliegue deben ser los mismos que los contenedores del C4 Containers de la Clase 4: si alli el servicio se llamaba api-citas, hoy no puede aparecer como backend, ni puede aparecer una caja nueva que nadie declaro.</a:t>
-            </a:r>
-          </a:p>
-          <a:p/>
-          <a:p>
-            <a:r>
-              <a:t>(No se proyecta) Los 5.5 puntos se reparten asi, y conviene decirlo en voz alta: 2 puntos la explicacion de por que los nombres deben coincidir, y la respuesta esperada es que los dos diagramas son el MISMO sistema visto desde angulos distintos, uno dice que piezas hay y el otro donde se ejecutan; 2.5 puntos la tabla completa, con una fila por componente y su zona; y 1 punto listar los renombres que se aplicaron, o declarar explicitamente que no hubo ninguno, que tambien vale.</a:t>
-            </a:r>
-          </a:p>
-          <a:p/>
-          <a:p>
-            <a:r>
-              <a:t>(No se proyecta) La trampa esta en la palabra completa: se descuenta si la tabla deja fuera un componente que si aparece en alguno de los dos diagramas, asi que hay que instruir el gesto de llenarla con los dos diagramas abiertos al lado y contando cajas.</a:t>
-            </a:r>
-          </a:p>
-          <a:p/>
-          <a:p>
-            <a:r>
-              <a:t>(No se proyecta) La cadena aguas abajo es directa: la Clase 6 identifico amenazas y fronteras de confianza en texto y hoy esas fronteras se vuelven zonas dibujadas; la Clase 8 tomara cada flecha para definir que se mide en ella, porque no se puede monitorear un camino que no esta dibujado; la Clase 10 costeara estas mismas cajas, asi que la eleccion de almacenamiento es tambien decision de costo; y la Clase 13 discutira cual caja se replica y cual no.</a:t>
+              <a:t>Ejemplos: turnos → Relacional · disco de una VM → Bloque · fotos de perfil → Objeto.</a:t>
             </a:r>
           </a:p>
         </p:txBody>
@@ -1473,55 +1887,55 @@
           <a:p/>
           <a:p>
             <a:r>
-              <a:t>Un usuario final abre cloudlite.example en su telefono; el DNS resuelve el nombre a la IP publica del balanceador; el navegador abre una conexion HTTPS al puerto 443 de ese balanceador</a:t>
+              <a:t>La solucion ingenua es guardar el archivo en una columna binaria de la base de datos.</a:t>
             </a:r>
           </a:p>
           <a:p/>
           <a:p>
             <a:r>
-              <a:t>Que vive en la zona publica; el balanceador elige una de las dos instancias del contenedor de la API, en la zona privada</a:t>
+              <a:t>El diseno correcto separa: el archivo va a almacenamiento de objetos y la base guarda una fila con la clave del objeto, el dueno, el tamano, el tipo de contenido y la fecha.</a:t>
             </a:r>
           </a:p>
           <a:p/>
           <a:p>
             <a:r>
-              <a:t>Y le reenvia la peticion por HTTP al puerto 8080; la API consulta el motor de base de datos en la zona de datos por el puerto 5432 y devuelve JSON por el mismo camino.</a:t>
+              <a:t>Hay una razon adicional: un contenedor es efimero, lo que se escriba en su sistema de archivos desaparece cuando se reemplaza, y con dos instancias detras del balanceador el archivo subido a una no existe en la otra.</a:t>
             </a:r>
           </a:p>
           <a:p/>
           <a:p>
             <a:r>
-              <a:t>El recorrido completo tiene 4 saltos: DNS, balanceador en la zona publica, API en la zona privada y base de datos en la zona de datos.</a:t>
+              <a:t>(No se proyecta) El ejemplo que hace visible la decision, y el error de diseno que conviene provocar: CloudLite permite subir una foto de perfil o adjuntar un PDF.</a:t>
             </a:r>
           </a:p>
           <a:p/>
           <a:p>
             <a:r>
-              <a:t>Cada salto de red dentro de un mismo centro de datos suma del orden de 1 milisegundo, y por eso un diseno que encadena servicios innecesarios es lento aunque cada pieza sea rapida.</a:t>
+              <a:t>(No se proyecta) Hay que dejar que el estudiante la proponga y luego cuantificarla: dos megabytes por usuario y cinco mil usuarios son diez gigabytes de binarios dentro de una base cuyos datos utiles podrian ser doscientos megabytes; cada respaldo arrastra esos diez gigabytes y la cache del motor se llena de bytes que ninguna consulta filtra.</a:t>
             </a:r>
           </a:p>
           <a:p/>
           <a:p>
             <a:r>
-              <a:t>(No se proyecta) La mejor forma de dictar la clase es seguir una peticion de CloudLite de punta a punta sobre el diagrama proyectado.</a:t>
+              <a:t>(No se proyecta) Mantener los contenedores sin estado es la condicion del escalado horizontal de la Clase 13.</a:t>
             </a:r>
           </a:p>
           <a:p/>
           <a:p>
             <a:r>
-              <a:t>(No se proyecta) Ese recorrido, con cada flecha etiquetada con protocolo y puerto y cada caja dentro de su zona, es la estructura que la pregunta 4 califica; lo que se pega en la plataforma es su version en Mermaid, que es la seccion siguiente.</a:t>
+              <a:t>(No se proyecta) Y ahora la otra mitad, que es la que sorprende al docente: si el dominio del estudiante no maneja archivos, imagenes ni documentos adjuntos, la respuesta correcta y completa es declarar que NO necesita almacenamiento de objetos y explicar por que.</a:t>
             </a:r>
           </a:p>
           <a:p/>
           <a:p>
             <a:r>
-              <a:t>(No se proyecta) Sirve tambien para citar numeros: una consulta simple bien indexada responde entre 1 y 20 milisegundos, y el objetivo que se formalizara en la Clase 12 suele fijarse por convencion en menos de 300 milisegundos para el 95 por ciento de las peticiones.</a:t>
+              <a:t>(No se proyecta) La rubrica lo dice al reves de como el grupo lo espera: suma completo quien lo declare y justifique, y se descuenta a quien agregue un almacen de objetos sin un dato que lo pida.</a:t>
             </a:r>
           </a:p>
           <a:p/>
           <a:p>
             <a:r>
-              <a:t>(No se proyecta) Con eso el grupo ve que si una pantalla dispara veinte consultas encadenadas el problema es de diseno y no de servidor.</a:t>
+              <a:t>(No se proyecta) Hay que anunciarlo antes del taller, porque si no medio salon inventa un bucket «porque suena a cloud» y pierde puntos por agregar.</a:t>
             </a:r>
           </a:p>
         </p:txBody>
@@ -1597,175 +2011,61 @@
           <a:p/>
           <a:p>
             <a:r>
-              <a:t>Primera: la palabra inicial.</a:t>
+              <a:t>Se demuestra con una tabla de tres columnas: «Componente en el C4 Containers», «Componente en el Despliegue» y «Zona».</a:t>
             </a:r>
           </a:p>
           <a:p/>
           <a:p>
             <a:r>
-              <a:t>Segunda: cada zona es un subgraph con su rotulo entre comillas y su propio end.</a:t>
+              <a:t>Un ejemplo de fila completa es: «API de turnos» en el Containers, «API de turnos (contenedor, 8080)» en el Despliegue, zona Privada.</a:t>
             </a:r>
           </a:p>
           <a:p/>
           <a:p>
             <a:r>
-              <a:t>Los subgraph son las tres zonas; olvidar un end es la causa numero uno de que el diagrama no se dibuje, porque el bloque queda abierto.</a:t>
+              <a:t>El cliente y el proveedor de correo son las filas sin par: aparecen en los diagramas, pero no se despliegan dentro del sistema.</a:t>
             </a:r>
           </a:p>
           <a:p/>
           <a:p>
             <a:r>
-              <a:t>Tercera: la forma de la caja dice que es la pieza.</a:t>
+              <a:t>Un error comun es renombrar en el Despliegue: «backend» en lugar de «API de turnos».</a:t>
             </a:r>
           </a:p>
           <a:p/>
           <a:p>
             <a:r>
-              <a:t>Los corchetes rectos son un proceso o servicio, y la combinacion de corchete y parentesis, es decir abrir corchete parentesis, es la base de datos, que se lee como cilindro.</a:t>
+              <a:t>Para quien lee son dos piezas distintas, y nadie puede saber si el despliegue cubre todo el sistema.</a:t>
             </a:r>
           </a:p>
           <a:p/>
           <a:p>
             <a:r>
-              <a:t>Cuarta: el puerto va DENTRO del rotulo de la caja, separado con la etiqueta de salto de linea de HTML, y la etiqueta de la flecha va entre barras verticales y comillas, con el protocolo y el puerto.</a:t>
+              <a:t>(No se proyecta) Queda la trazabilidad, donde mas puntos se pierden y donde vive una pregunta entera.</a:t>
             </a:r>
           </a:p>
           <a:p/>
           <a:p>
             <a:r>
-              <a:t>Es la forma mas segura de etiquetar los puertos sin ensuciar el dibujo.</a:t>
+              <a:t>(No se proyecta) Los nombres de las cajas del despliegue deben ser los mismos que los contenedores del C4 Containers de la Clase 4: si alli el servicio se llamaba api-citas, hoy no puede aparecer como backend, ni puede aparecer una caja nueva que nadie declaro.</a:t>
             </a:r>
           </a:p>
           <a:p/>
           <a:p>
             <a:r>
-              <a:t>Quinta: el servicio externo se declara FUERA de los tres subgraph, y la flecha que llega a el se rotula como frontera de confianza; asi las fronteras quedan visibles en el propio dibujo y no en un comentario aparte.</a:t>
+              <a:t>(No se proyecta) Los 5.5 puntos se reparten asi, y conviene decirlo en voz alta: 2 puntos la explicacion de por que los nombres deben coincidir, y la respuesta esperada es que los dos diagramas son el MISMO sistema visto desde angulos distintos, uno dice que piezas hay y el otro donde se ejecutan; 2.5 puntos la tabla completa, con una fila por componente y su zona; y 1 punto listar los renombres que se aplicaron, o declarar explicitamente que no hubo ninguno, que tambien vale.</a:t>
             </a:r>
           </a:p>
           <a:p/>
           <a:p>
             <a:r>
-              <a:t>Los comentarios de Mermaid empiezan con dos signos de porcentaje, no se dibujan y tienen que ir en LINEA PROPIA: uno pegado al final de la linea de un nodo puede tumbar el renderizado.</a:t>
+              <a:t>(No se proyecta) La trampa esta en la palabra completa: se descuenta si la tabla deja fuera un componente que si aparece en alguno de los dos diagramas, asi que hay que instruir el gesto de llenarla con los dos diagramas abiertos al lado y contando cajas.</a:t>
             </a:r>
           </a:p>
           <a:p/>
           <a:p>
             <a:r>
-              <a:t>Y si un rotulo lleva parentesis, dos signos de puntuacion o comillas, hay que envolverlo en comillas dobles, porque sin ellas el analizador se detiene ahi.</a:t>
-            </a:r>
-          </a:p>
-          <a:p/>
-          <a:p>
-            <a:r>
-              <a:t>NOTAS:</a:t>
-            </a:r>
-          </a:p>
-          <a:p/>
-          <a:p>
-            <a:r>
-              <a:t>Se escribe flowchart LR, donde LR significa de izquierda a derecha, y es lo que hace que el recorrido cliente, edge, aplicacion, datos se lea como un flujo y no como una torre.</a:t>
-            </a:r>
-          </a:p>
-          <a:p/>
-          <a:p>
-            <a:r>
-              <a:t>Dos advertencias practicas.</a:t>
-            </a:r>
-          </a:p>
-          <a:p/>
-          <a:p>
-            <a:r>
-              <a:t>Sirven para dejar una nota al evaluador, no para responder.</a:t>
-            </a:r>
-          </a:p>
-          <a:p/>
-          <a:p>
-            <a:r>
-              <a:t>PREGUNTAS FRECUENTES DEL GRUPO</a:t>
-            </a:r>
-          </a:p>
-          <a:p/>
-          <a:p>
-            <a:r>
-              <a:t>«Si la base de datos es privada, como se conecta la API?» Privado significa inalcanzable desde internet</a:t>
-            </a:r>
-          </a:p>
-          <a:p/>
-          <a:p>
-            <a:r>
-              <a:t>No inalcanzable en absoluto: la API esta en la misma red y llega por el nombre interno y el puerto del motor; quien no puede llegar es el usuario final ni un atacante externo.</a:t>
-            </a:r>
-          </a:p>
-          <a:p/>
-          <a:p>
-            <a:r>
-              <a:t>«Esto no esta mal por no ser una VPC real de un proveedor?» Lo que se evalua es el razonamiento sobre zonas, puertos y ubicacion de los datos, no la sintaxis de una marca; el curso usa herramientas gratis en navegador y no pide cuenta de pago ni tarjeta.</a:t>
-            </a:r>
-          </a:p>
-          <a:p/>
-          <a:p>
-            <a:r>
-              <a:t>Un sistema de dos cajas se dibuja con cliente y edge en la publica, la aplicacion en la privada y la base en la de datos</a:t>
-            </a:r>
-          </a:p>
-          <a:p/>
-          <a:p>
-            <a:r>
-              <a:t>Si de verdad no hay balanceador, el punto de entrada es el servidor web o el proxy que atiende el 443, y ese es el habitante de la zona publica.</a:t>
-            </a:r>
-          </a:p>
-          <a:p/>
-          <a:p>
-            <a:r>
-              <a:t>Estas cuatro aparecen todos los semestres y las cuatro se responden con material que ya esta proyectado.</a:t>
-            </a:r>
-          </a:p>
-          <a:p/>
-          <a:p>
-            <a:r>
-              <a:t>Si un desarrollador necesita entrar, se hace por un unico host intermedio controlado, llamado bastion.</a:t>
-            </a:r>
-          </a:p>
-          <a:p/>
-          <a:p>
-            <a:r>
-              <a:t>Por eso las zonas se llaman Publica, Privada y Datos.</a:t>
-            </a:r>
-          </a:p>
-          <a:p/>
-          <a:p>
-            <a:r>
-              <a:t>El PNG exportado va a la carpeta del Proyecto Integrador, para el informe, y no reemplaza la respuesta.</a:t>
-            </a:r>
-          </a:p>
-          <a:p/>
-          <a:p>
-            <a:r>
-              <a:t>(No se proyecta) La diapositiva del molde existe porque el estudiante puede tener el modelo correcto en la cabeza y perder puntos por sintaxis, y porque 2 de los 14 son que el diagrama renderice.</a:t>
-            </a:r>
-          </a:p>
-          <a:p/>
-          <a:p>
-            <a:r>
-              <a:t>(No se proyecta) Hay cinco cosas que el docente debe poder explicar sin titubear.</a:t>
-            </a:r>
-          </a:p>
-          <a:p/>
-          <a:p>
-            <a:r>
-              <a:t>(No se proyecta) Vale la pena senalar la caja de la base de datos y decir «esta forma, dentro de este subgraph, son 4 de los 14 puntos».</a:t>
-            </a:r>
-          </a:p>
-          <a:p/>
-          <a:p>
-            <a:r>
-              <a:t>(No se proyecta) El procedimiento que se proyecta en la demo es el que conviene repetir tres veces: dibujar el boceto donde sea, traducirlo a Mermaid (una IA lo hace bien, y ahi hay que decir la frase exacta: la IA acierta la sintaxis, no el modelo), pegarlo en un visor Mermaid y MIRARLO RENDERIZADO.</a:t>
-            </a:r>
-          </a:p>
-          <a:p/>
-          <a:p>
-            <a:r>
-              <a:t>(No se proyecta) Si no se dibuja, se corrige ahi mismo; nadie califica un codigo que no dibuja.</a:t>
+              <a:t>(No se proyecta) La cadena aguas abajo es directa: la Clase 6 identifico amenazas y fronteras de confianza en texto y hoy esas fronteras se vuelven zonas dibujadas; la Clase 8 tomara cada flecha para definir que se mide en ella, porque no se puede monitorear un camino que no esta dibujado; la Clase 10 costeara estas mismas cajas, asi que la eleccion de almacenamiento es tambien decision de costo; y la Clase 13 discutira cual caja se replica y cual no.</a:t>
             </a:r>
           </a:p>
         </p:txBody>
@@ -5803,14 +6103,83 @@
       </p:sp>
       <p:sp>
         <p:nvSpPr>
-          <p:cNvPr id="5" name="TextBox 4"/>
+          <p:cNvPr id="5" name="Rounded Rectangle 4"/>
+          <p:cNvSpPr/>
+          <p:nvPr/>
+        </p:nvSpPr>
+        <p:spPr>
+          <a:xfrm>
+            <a:off x="5797149" y="1343926"/>
+            <a:ext cx="6010497" cy="4837658"/>
+          </a:xfrm>
+          <a:prstGeom prst="roundRect">
+            <a:avLst>
+              <a:gd name="adj" fmla="val 4000"/>
+            </a:avLst>
+          </a:prstGeom>
+          <a:solidFill>
+            <a:srgbClr val="E8EEF4"/>
+          </a:solidFill>
+          <a:ln>
+            <a:noFill/>
+          </a:ln>
+        </p:spPr>
+        <p:style>
+          <a:lnRef idx="1">
+            <a:schemeClr val="accent1"/>
+          </a:lnRef>
+          <a:fillRef idx="3">
+            <a:schemeClr val="accent1"/>
+          </a:fillRef>
+          <a:effectRef idx="2">
+            <a:schemeClr val="accent1"/>
+          </a:effectRef>
+          <a:fontRef idx="minor">
+            <a:schemeClr val="lt1"/>
+          </a:fontRef>
+        </p:style>
+        <p:txBody>
+          <a:bodyPr rtlCol="0" anchor="ctr"/>
+          <a:lstStyle/>
+          <a:p>
+            <a:pPr algn="ctr"/>
+          </a:p>
+        </p:txBody>
+      </p:sp>
+      <p:pic>
+        <p:nvPicPr>
+          <p:cNvPr id="6" name="Picture 5" descr="ilus-elegir-almacen-paso1.png"/>
+          <p:cNvPicPr>
+            <a:picLocks noChangeAspect="1"/>
+          </p:cNvPicPr>
+          <p:nvPr/>
+        </p:nvPicPr>
+        <p:blipFill>
+          <a:blip r:embed="rId2"/>
+          <a:stretch>
+            <a:fillRect/>
+          </a:stretch>
+        </p:blipFill>
+        <p:spPr>
+          <a:xfrm>
+            <a:off x="5870301" y="1417078"/>
+            <a:ext cx="5864193" cy="4691354"/>
+          </a:xfrm>
+          <a:prstGeom prst="rect">
+            <a:avLst/>
+          </a:prstGeom>
+        </p:spPr>
+      </p:pic>
+      <p:sp>
+        <p:nvSpPr>
+          <p:cNvPr id="7" name="TextBox 6"/>
           <p:cNvSpPr txBox="1"/>
           <p:nvPr/>
         </p:nvSpPr>
         <p:spPr>
           <a:xfrm>
-            <a:off x="457200" y="1170432"/>
-            <a:ext cx="11277295" cy="5230368"/>
+            <a:off x="457200" y="1353312"/>
+            <a:ext cx="5093061" cy="5047488"/>
           </a:xfrm>
           <a:prstGeom prst="rect">
             <a:avLst/>
@@ -5976,27 +6345,11 @@
               <a:t>: es una decisión válida.</a:t>
             </a:r>
           </a:p>
-          <a:p>
-            <a:pPr>
-              <a:spcAft>
-                <a:spcPts val="800"/>
-              </a:spcAft>
-            </a:pPr>
-            <a:r>
-              <a:rPr sz="2000" b="0" i="0">
-                <a:solidFill>
-                  <a:srgbClr val="333333"/>
-                </a:solidFill>
-                <a:latin typeface="Calibri"/>
-              </a:rPr>
-              <a:t>–   Ejemplos: turnos → Relacional · disco de una VM → Bloque · fotos de perfil → Objeto.</a:t>
-            </a:r>
-          </a:p>
-        </p:txBody>
-      </p:sp>
-      <p:sp>
-        <p:nvSpPr>
-          <p:cNvPr id="6" name="TextBox 5"/>
+        </p:txBody>
+      </p:sp>
+      <p:sp>
+        <p:nvSpPr>
+          <p:cNvPr id="8" name="TextBox 7"/>
           <p:cNvSpPr txBox="1"/>
           <p:nvPr/>
         </p:nvSpPr>
@@ -7121,1375 +7474,9 @@
           </a:prstGeom>
         </p:spPr>
       </p:pic>
-      <p:sp>
-        <p:nvSpPr>
-          <p:cNvPr id="13" name="TextBox 12"/>
-          <p:cNvSpPr txBox="1"/>
-          <p:nvPr/>
-        </p:nvSpPr>
-        <p:spPr>
-          <a:xfrm>
-            <a:off x="5870301" y="5961888"/>
-            <a:ext cx="5864193" cy="320040"/>
-          </a:xfrm>
-          <a:prstGeom prst="rect">
-            <a:avLst/>
-          </a:prstGeom>
-          <a:noFill/>
-        </p:spPr>
-        <p:txBody>
-          <a:bodyPr wrap="square">
-            <a:spAutoFit/>
-          </a:bodyPr>
-          <a:lstStyle/>
-          <a:p>
-            <a:pPr algn="ctr"/>
-            <a:r>
-              <a:rPr sz="1100" b="0" i="1">
-                <a:solidFill>
-                  <a:srgbClr val="666666"/>
-                </a:solidFill>
-                <a:latin typeface="Calibri"/>
-              </a:rPr>
-              <a:t>Clic para avanzar la animación</a:t>
-            </a:r>
-          </a:p>
-        </p:txBody>
-      </p:sp>
-      <p:sp>
-        <p:nvSpPr>
-          <p:cNvPr id="14" name="TextBox 13"/>
-          <p:cNvSpPr txBox="1"/>
-          <p:nvPr/>
-        </p:nvSpPr>
-        <p:spPr>
-          <a:xfrm>
-            <a:off x="457200" y="1353312"/>
-            <a:ext cx="5093061" cy="5047488"/>
-          </a:xfrm>
-          <a:prstGeom prst="rect">
-            <a:avLst/>
-          </a:prstGeom>
-          <a:noFill/>
-        </p:spPr>
-        <p:txBody>
-          <a:bodyPr wrap="square">
-            <a:spAutoFit/>
-          </a:bodyPr>
-          <a:lstStyle/>
-          <a:p>
-            <a:pPr>
-              <a:spcAft>
-                <a:spcPts val="800"/>
-              </a:spcAft>
-            </a:pPr>
-            <a:r>
-              <a:rPr sz="2000" b="0" i="0">
-                <a:solidFill>
-                  <a:srgbClr val="333333"/>
-                </a:solidFill>
-                <a:latin typeface="Calibri"/>
-              </a:rPr>
-              <a:t>–   La solucion ingenua es guardar el archivo en una columna binaria de la base de datos.</a:t>
-            </a:r>
-          </a:p>
-          <a:p>
-            <a:pPr>
-              <a:spcAft>
-                <a:spcPts val="800"/>
-              </a:spcAft>
-            </a:pPr>
-            <a:r>
-              <a:rPr sz="2000" b="0" i="0">
-                <a:solidFill>
-                  <a:srgbClr val="333333"/>
-                </a:solidFill>
-                <a:latin typeface="Calibri"/>
-              </a:rPr>
-              <a:t>–   El diseno correcto separa: el archivo va a almacenamiento de objetos y la base guarda una fila con la clave del objeto, el dueno, el tamano, el tipo…</a:t>
-            </a:r>
-          </a:p>
-        </p:txBody>
-      </p:sp>
-      <p:sp>
-        <p:nvSpPr>
-          <p:cNvPr id="15" name="TextBox 14"/>
-          <p:cNvSpPr txBox="1"/>
-          <p:nvPr/>
-        </p:nvSpPr>
-        <p:spPr>
-          <a:xfrm>
-            <a:off x="11185855" y="6473952"/>
-            <a:ext cx="640080" cy="274320"/>
-          </a:xfrm>
-          <a:prstGeom prst="rect">
-            <a:avLst/>
-          </a:prstGeom>
-          <a:noFill/>
-        </p:spPr>
-        <p:txBody>
-          <a:bodyPr wrap="square">
-            <a:spAutoFit/>
-          </a:bodyPr>
-          <a:lstStyle/>
-          <a:p>
-            <a:pPr algn="r"/>
-            <a:r>
-              <a:rPr sz="1100" b="0" i="0">
-                <a:solidFill>
-                  <a:srgbClr val="666666"/>
-                </a:solidFill>
-                <a:latin typeface="Calibri"/>
-              </a:rPr>
-              <a:t>13</a:t>
-            </a:r>
-          </a:p>
-        </p:txBody>
-      </p:sp>
-    </p:spTree>
-  </p:cSld>
-  <p:clrMapOvr>
-    <a:masterClrMapping/>
-  </p:clrMapOvr>
-  <p:timing>
-    <p:tnLst>
-      <p:par>
-        <p:cTn id="1" dur="indefinite" restart="never" nodeType="tmRoot">
-          <p:childTnLst>
-            <p:seq concurrent="1" nextAc="seek">
-              <p:cTn id="2" dur="indefinite" nodeType="mainSeq">
-                <p:childTnLst>
-                  <p:par>
-                    <p:cTn id="3" fill="hold">
-                      <p:stCondLst>
-                        <p:cond delay="indefinite"/>
-                      </p:stCondLst>
-                      <p:childTnLst>
-                        <p:par>
-                          <p:cTn id="4" fill="hold">
-                            <p:stCondLst>
-                              <p:cond delay="0"/>
-                            </p:stCondLst>
-                            <p:childTnLst>
-                              <p:par>
-                                <p:cTn id="5" presetID="10" presetClass="entr" presetSubtype="0" fill="hold" nodeType="clickEffect">
-                                  <p:stCondLst>
-                                    <p:cond delay="0"/>
-                                  </p:stCondLst>
-                                  <p:childTnLst>
-                                    <p:set>
-                                      <p:cBhvr>
-                                        <p:cTn id="6" dur="1" fill="hold">
-                                          <p:stCondLst>
-                                            <p:cond delay="0"/>
-                                          </p:stCondLst>
-                                        </p:cTn>
-                                        <p:tgtEl>
-                                          <p:spTgt spid="7"/>
-                                        </p:tgtEl>
-                                        <p:attrNameLst>
-                                          <p:attrName>style.visibility</p:attrName>
-                                        </p:attrNameLst>
-                                      </p:cBhvr>
-                                      <p:to>
-                                        <p:strVal val="visible"/>
-                                      </p:to>
-                                    </p:set>
-                                    <p:animEffect transition="in" filter="fade">
-                                      <p:cBhvr>
-                                        <p:cTn id="7" dur="450"/>
-                                        <p:tgtEl>
-                                          <p:spTgt spid="7"/>
-                                        </p:tgtEl>
-                                      </p:cBhvr>
-                                    </p:animEffect>
-                                  </p:childTnLst>
-                                </p:cTn>
-                              </p:par>
-                            </p:childTnLst>
-                          </p:cTn>
-                        </p:par>
-                      </p:childTnLst>
-                    </p:cTn>
-                  </p:par>
-                  <p:par>
-                    <p:cTn id="8" fill="hold">
-                      <p:stCondLst>
-                        <p:cond delay="indefinite"/>
-                      </p:stCondLst>
-                      <p:childTnLst>
-                        <p:par>
-                          <p:cTn id="9" fill="hold">
-                            <p:stCondLst>
-                              <p:cond delay="0"/>
-                            </p:stCondLst>
-                            <p:childTnLst>
-                              <p:par>
-                                <p:cTn id="10" presetID="10" presetClass="entr" presetSubtype="0" fill="hold" nodeType="clickEffect">
-                                  <p:stCondLst>
-                                    <p:cond delay="0"/>
-                                  </p:stCondLst>
-                                  <p:childTnLst>
-                                    <p:set>
-                                      <p:cBhvr>
-                                        <p:cTn id="11" dur="1" fill="hold">
-                                          <p:stCondLst>
-                                            <p:cond delay="0"/>
-                                          </p:stCondLst>
-                                        </p:cTn>
-                                        <p:tgtEl>
-                                          <p:spTgt spid="8"/>
-                                        </p:tgtEl>
-                                        <p:attrNameLst>
-                                          <p:attrName>style.visibility</p:attrName>
-                                        </p:attrNameLst>
-                                      </p:cBhvr>
-                                      <p:to>
-                                        <p:strVal val="visible"/>
-                                      </p:to>
-                                    </p:set>
-                                    <p:animEffect transition="in" filter="fade">
-                                      <p:cBhvr>
-                                        <p:cTn id="12" dur="450"/>
-                                        <p:tgtEl>
-                                          <p:spTgt spid="8"/>
-                                        </p:tgtEl>
-                                      </p:cBhvr>
-                                    </p:animEffect>
-                                  </p:childTnLst>
-                                </p:cTn>
-                              </p:par>
-                            </p:childTnLst>
-                          </p:cTn>
-                        </p:par>
-                      </p:childTnLst>
-                    </p:cTn>
-                  </p:par>
-                </p:childTnLst>
-              </p:cTn>
-              <p:prevCondLst>
-                <p:cond evt="onPrev" delay="0">
-                  <p:tgtEl>
-                    <p:sldTgt/>
-                  </p:tgtEl>
-                </p:cond>
-              </p:prevCondLst>
-              <p:nextCondLst>
-                <p:cond evt="onNext" delay="0">
-                  <p:tgtEl>
-                    <p:sldTgt/>
-                  </p:tgtEl>
-                </p:cond>
-              </p:nextCondLst>
-            </p:seq>
-          </p:childTnLst>
-        </p:cTn>
-      </p:par>
-    </p:tnLst>
-  </p:timing>
-</p:sld>
-</file>
-
-<file path=ppt/slides/slide14.xml><?xml version="1.0" encoding="utf-8"?>
-<p:sld xmlns:a="http://schemas.openxmlformats.org/drawingml/2006/main" xmlns:p="http://schemas.openxmlformats.org/presentationml/2006/main" xmlns:r="http://schemas.openxmlformats.org/officeDocument/2006/relationships">
-  <p:cSld>
-    <p:bg>
-      <p:bgPr>
-        <a:solidFill>
-          <a:srgbClr val="FFFFFF"/>
-        </a:solidFill>
-        <a:effectLst/>
-      </p:bgPr>
-    </p:bg>
-    <p:spTree>
-      <p:nvGrpSpPr>
-        <p:cNvPr id="1" name=""/>
-        <p:cNvGrpSpPr/>
-        <p:nvPr/>
-      </p:nvGrpSpPr>
-      <p:grpSpPr/>
-      <p:sp>
-        <p:nvSpPr>
-          <p:cNvPr id="2" name="Rectangle 1"/>
-          <p:cNvSpPr/>
-          <p:nvPr/>
-        </p:nvSpPr>
-        <p:spPr>
-          <a:xfrm>
-            <a:off x="0" y="0"/>
-            <a:ext cx="12191695" cy="960120"/>
-          </a:xfrm>
-          <a:prstGeom prst="rect">
-            <a:avLst/>
-          </a:prstGeom>
-          <a:solidFill>
-            <a:srgbClr val="095292"/>
-          </a:solidFill>
-          <a:ln>
-            <a:noFill/>
-          </a:ln>
-        </p:spPr>
-        <p:style>
-          <a:lnRef idx="1">
-            <a:schemeClr val="accent1"/>
-          </a:lnRef>
-          <a:fillRef idx="3">
-            <a:schemeClr val="accent1"/>
-          </a:fillRef>
-          <a:effectRef idx="2">
-            <a:schemeClr val="accent1"/>
-          </a:effectRef>
-          <a:fontRef idx="minor">
-            <a:schemeClr val="lt1"/>
-          </a:fontRef>
-        </p:style>
-        <p:txBody>
-          <a:bodyPr rtlCol="0" anchor="ctr"/>
-          <a:lstStyle/>
-          <a:p>
-            <a:pPr algn="ctr"/>
-          </a:p>
-        </p:txBody>
-      </p:sp>
-      <p:sp>
-        <p:nvSpPr>
-          <p:cNvPr id="3" name="Rectangle 2"/>
-          <p:cNvSpPr/>
-          <p:nvPr/>
-        </p:nvSpPr>
-        <p:spPr>
-          <a:xfrm>
-            <a:off x="0" y="960120"/>
-            <a:ext cx="12191695" cy="41148"/>
-          </a:xfrm>
-          <a:prstGeom prst="rect">
-            <a:avLst/>
-          </a:prstGeom>
-          <a:solidFill>
-            <a:srgbClr val="FFD000"/>
-          </a:solidFill>
-          <a:ln>
-            <a:noFill/>
-          </a:ln>
-        </p:spPr>
-        <p:style>
-          <a:lnRef idx="1">
-            <a:schemeClr val="accent1"/>
-          </a:lnRef>
-          <a:fillRef idx="3">
-            <a:schemeClr val="accent1"/>
-          </a:fillRef>
-          <a:effectRef idx="2">
-            <a:schemeClr val="accent1"/>
-          </a:effectRef>
-          <a:fontRef idx="minor">
-            <a:schemeClr val="lt1"/>
-          </a:fontRef>
-        </p:style>
-        <p:txBody>
-          <a:bodyPr rtlCol="0" anchor="ctr"/>
-          <a:lstStyle/>
-          <a:p>
-            <a:pPr algn="ctr"/>
-          </a:p>
-        </p:txBody>
-      </p:sp>
-      <p:sp>
-        <p:nvSpPr>
-          <p:cNvPr id="4" name="TextBox 3"/>
-          <p:cNvSpPr txBox="1"/>
-          <p:nvPr/>
-        </p:nvSpPr>
-        <p:spPr>
-          <a:xfrm>
-            <a:off x="457200" y="164592"/>
-            <a:ext cx="11277295" cy="502920"/>
-          </a:xfrm>
-          <a:prstGeom prst="rect">
-            <a:avLst/>
-          </a:prstGeom>
-          <a:noFill/>
-        </p:spPr>
-        <p:txBody>
-          <a:bodyPr wrap="square">
-            <a:spAutoFit/>
-          </a:bodyPr>
-          <a:lstStyle/>
-          <a:p>
-            <a:r>
-              <a:rPr sz="2600" b="1" i="0">
-                <a:solidFill>
-                  <a:srgbClr val="FFFFFF"/>
-                </a:solidFill>
-                <a:latin typeface="Calibri"/>
-              </a:rPr>
-              <a:t>Trazabilidad: la tabla de correspondencia</a:t>
-            </a:r>
-          </a:p>
-        </p:txBody>
-      </p:sp>
-      <p:sp>
-        <p:nvSpPr>
-          <p:cNvPr id="5" name="Rounded Rectangle 4"/>
-          <p:cNvSpPr/>
-          <p:nvPr/>
-        </p:nvSpPr>
-        <p:spPr>
-          <a:xfrm>
-            <a:off x="5803166" y="1188719"/>
-            <a:ext cx="5998464" cy="4828032"/>
-          </a:xfrm>
-          <a:prstGeom prst="roundRect">
-            <a:avLst>
-              <a:gd name="adj" fmla="val 4000"/>
-            </a:avLst>
-          </a:prstGeom>
-          <a:solidFill>
-            <a:srgbClr val="E8EEF4"/>
-          </a:solidFill>
-          <a:ln>
-            <a:noFill/>
-          </a:ln>
-        </p:spPr>
-        <p:style>
-          <a:lnRef idx="1">
-            <a:schemeClr val="accent1"/>
-          </a:lnRef>
-          <a:fillRef idx="3">
-            <a:schemeClr val="accent1"/>
-          </a:fillRef>
-          <a:effectRef idx="2">
-            <a:schemeClr val="accent1"/>
-          </a:effectRef>
-          <a:fontRef idx="minor">
-            <a:schemeClr val="lt1"/>
-          </a:fontRef>
-        </p:style>
-        <p:txBody>
-          <a:bodyPr rtlCol="0" anchor="ctr"/>
-          <a:lstStyle/>
-          <a:p>
-            <a:pPr algn="ctr"/>
-          </a:p>
-        </p:txBody>
-      </p:sp>
       <p:pic>
         <p:nvPicPr>
-          <p:cNvPr id="6" name="Picture 5" descr="trazabilidad-tabla-paso1.png"/>
-          <p:cNvPicPr>
-            <a:picLocks noChangeAspect="1"/>
-          </p:cNvPicPr>
-          <p:nvPr/>
-        </p:nvPicPr>
-        <p:blipFill>
-          <a:blip r:embed="rId2"/>
-          <a:stretch>
-            <a:fillRect/>
-          </a:stretch>
-        </p:blipFill>
-        <p:spPr>
-          <a:xfrm>
-            <a:off x="5876318" y="1261872"/>
-            <a:ext cx="5852160" cy="4681728"/>
-          </a:xfrm>
-          <a:prstGeom prst="rect">
-            <a:avLst/>
-          </a:prstGeom>
-        </p:spPr>
-      </p:pic>
-      <p:pic>
-        <p:nvPicPr>
-          <p:cNvPr id="7" name="Picture 6" descr="trazabilidad-tabla-paso2.png"/>
-          <p:cNvPicPr>
-            <a:picLocks noChangeAspect="1"/>
-          </p:cNvPicPr>
-          <p:nvPr/>
-        </p:nvPicPr>
-        <p:blipFill>
-          <a:blip r:embed="rId3"/>
-          <a:stretch>
-            <a:fillRect/>
-          </a:stretch>
-        </p:blipFill>
-        <p:spPr>
-          <a:xfrm>
-            <a:off x="5876318" y="1261872"/>
-            <a:ext cx="5852160" cy="4681728"/>
-          </a:xfrm>
-          <a:prstGeom prst="rect">
-            <a:avLst/>
-          </a:prstGeom>
-        </p:spPr>
-      </p:pic>
-      <p:pic>
-        <p:nvPicPr>
-          <p:cNvPr id="8" name="Picture 7" descr="trazabilidad-tabla-paso3.png"/>
-          <p:cNvPicPr>
-            <a:picLocks noChangeAspect="1"/>
-          </p:cNvPicPr>
-          <p:nvPr/>
-        </p:nvPicPr>
-        <p:blipFill>
-          <a:blip r:embed="rId4"/>
-          <a:stretch>
-            <a:fillRect/>
-          </a:stretch>
-        </p:blipFill>
-        <p:spPr>
-          <a:xfrm>
-            <a:off x="5876318" y="1261872"/>
-            <a:ext cx="5852160" cy="4681728"/>
-          </a:xfrm>
-          <a:prstGeom prst="rect">
-            <a:avLst/>
-          </a:prstGeom>
-        </p:spPr>
-      </p:pic>
-      <p:sp>
-        <p:nvSpPr>
-          <p:cNvPr id="13" name="TextBox 12"/>
-          <p:cNvSpPr txBox="1"/>
-          <p:nvPr/>
-        </p:nvSpPr>
-        <p:spPr>
-          <a:xfrm>
-            <a:off x="5870301" y="5961888"/>
-            <a:ext cx="5864193" cy="320040"/>
-          </a:xfrm>
-          <a:prstGeom prst="rect">
-            <a:avLst/>
-          </a:prstGeom>
-          <a:noFill/>
-        </p:spPr>
-        <p:txBody>
-          <a:bodyPr wrap="square">
-            <a:spAutoFit/>
-          </a:bodyPr>
-          <a:lstStyle/>
-          <a:p>
-            <a:pPr algn="ctr"/>
-            <a:r>
-              <a:rPr sz="1100" b="0" i="1">
-                <a:solidFill>
-                  <a:srgbClr val="666666"/>
-                </a:solidFill>
-                <a:latin typeface="Calibri"/>
-              </a:rPr>
-              <a:t>Clic para avanzar la animación</a:t>
-            </a:r>
-          </a:p>
-        </p:txBody>
-      </p:sp>
-      <p:sp>
-        <p:nvSpPr>
-          <p:cNvPr id="14" name="TextBox 13"/>
-          <p:cNvSpPr txBox="1"/>
-          <p:nvPr/>
-        </p:nvSpPr>
-        <p:spPr>
-          <a:xfrm>
-            <a:off x="457200" y="1353312"/>
-            <a:ext cx="5093061" cy="5047488"/>
-          </a:xfrm>
-          <a:prstGeom prst="rect">
-            <a:avLst/>
-          </a:prstGeom>
-          <a:noFill/>
-        </p:spPr>
-        <p:txBody>
-          <a:bodyPr wrap="square">
-            <a:spAutoFit/>
-          </a:bodyPr>
-          <a:lstStyle/>
-          <a:p>
-            <a:pPr>
-              <a:spcAft>
-                <a:spcPts val="800"/>
-              </a:spcAft>
-            </a:pPr>
-            <a:r>
-              <a:rPr sz="2000" b="0" i="0">
-                <a:solidFill>
-                  <a:srgbClr val="333333"/>
-                </a:solidFill>
-                <a:latin typeface="Calibri"/>
-              </a:rPr>
-              <a:t>–   Se demuestra con una tabla de tres columnas: «Componente en el C4 Containers», «Componente en el Despliegue» y «Zona».</a:t>
-            </a:r>
-          </a:p>
-          <a:p>
-            <a:pPr>
-              <a:spcAft>
-                <a:spcPts val="800"/>
-              </a:spcAft>
-            </a:pPr>
-            <a:r>
-              <a:rPr sz="2000" b="0" i="0">
-                <a:solidFill>
-                  <a:srgbClr val="333333"/>
-                </a:solidFill>
-                <a:latin typeface="Calibri"/>
-              </a:rPr>
-              <a:t>–   Un ejemplo de fila completa es: «API de turnos» en el Containers, «API de turnos (contenedor, 8080)» en el Despliegue, zona Privada.</a:t>
-            </a:r>
-          </a:p>
-          <a:p>
-            <a:pPr>
-              <a:spcAft>
-                <a:spcPts val="800"/>
-              </a:spcAft>
-            </a:pPr>
-            <a:r>
-              <a:rPr sz="2000" b="0" i="0">
-                <a:solidFill>
-                  <a:srgbClr val="333333"/>
-                </a:solidFill>
-                <a:latin typeface="Calibri"/>
-              </a:rPr>
-              <a:t>–   El cliente y el proveedor de correo son las filas sin par: aparecen en los diagramas, pero no se despliegan dentro del sistema.</a:t>
-            </a:r>
-          </a:p>
-        </p:txBody>
-      </p:sp>
-      <p:sp>
-        <p:nvSpPr>
-          <p:cNvPr id="15" name="TextBox 14"/>
-          <p:cNvSpPr txBox="1"/>
-          <p:nvPr/>
-        </p:nvSpPr>
-        <p:spPr>
-          <a:xfrm>
-            <a:off x="11185855" y="6473952"/>
-            <a:ext cx="640080" cy="274320"/>
-          </a:xfrm>
-          <a:prstGeom prst="rect">
-            <a:avLst/>
-          </a:prstGeom>
-          <a:noFill/>
-        </p:spPr>
-        <p:txBody>
-          <a:bodyPr wrap="square">
-            <a:spAutoFit/>
-          </a:bodyPr>
-          <a:lstStyle/>
-          <a:p>
-            <a:pPr algn="r"/>
-            <a:r>
-              <a:rPr sz="1100" b="0" i="0">
-                <a:solidFill>
-                  <a:srgbClr val="666666"/>
-                </a:solidFill>
-                <a:latin typeface="Calibri"/>
-              </a:rPr>
-              <a:t>14</a:t>
-            </a:r>
-          </a:p>
-        </p:txBody>
-      </p:sp>
-    </p:spTree>
-  </p:cSld>
-  <p:clrMapOvr>
-    <a:masterClrMapping/>
-  </p:clrMapOvr>
-  <p:timing>
-    <p:tnLst>
-      <p:par>
-        <p:cTn id="1" dur="indefinite" restart="never" nodeType="tmRoot">
-          <p:childTnLst>
-            <p:seq concurrent="1" nextAc="seek">
-              <p:cTn id="2" dur="indefinite" nodeType="mainSeq">
-                <p:childTnLst>
-                  <p:par>
-                    <p:cTn id="3" fill="hold">
-                      <p:stCondLst>
-                        <p:cond delay="indefinite"/>
-                      </p:stCondLst>
-                      <p:childTnLst>
-                        <p:par>
-                          <p:cTn id="4" fill="hold">
-                            <p:stCondLst>
-                              <p:cond delay="0"/>
-                            </p:stCondLst>
-                            <p:childTnLst>
-                              <p:par>
-                                <p:cTn id="5" presetID="10" presetClass="entr" presetSubtype="0" fill="hold" nodeType="clickEffect">
-                                  <p:stCondLst>
-                                    <p:cond delay="0"/>
-                                  </p:stCondLst>
-                                  <p:childTnLst>
-                                    <p:set>
-                                      <p:cBhvr>
-                                        <p:cTn id="6" dur="1" fill="hold">
-                                          <p:stCondLst>
-                                            <p:cond delay="0"/>
-                                          </p:stCondLst>
-                                        </p:cTn>
-                                        <p:tgtEl>
-                                          <p:spTgt spid="7"/>
-                                        </p:tgtEl>
-                                        <p:attrNameLst>
-                                          <p:attrName>style.visibility</p:attrName>
-                                        </p:attrNameLst>
-                                      </p:cBhvr>
-                                      <p:to>
-                                        <p:strVal val="visible"/>
-                                      </p:to>
-                                    </p:set>
-                                    <p:animEffect transition="in" filter="fade">
-                                      <p:cBhvr>
-                                        <p:cTn id="7" dur="450"/>
-                                        <p:tgtEl>
-                                          <p:spTgt spid="7"/>
-                                        </p:tgtEl>
-                                      </p:cBhvr>
-                                    </p:animEffect>
-                                  </p:childTnLst>
-                                </p:cTn>
-                              </p:par>
-                            </p:childTnLst>
-                          </p:cTn>
-                        </p:par>
-                      </p:childTnLst>
-                    </p:cTn>
-                  </p:par>
-                  <p:par>
-                    <p:cTn id="8" fill="hold">
-                      <p:stCondLst>
-                        <p:cond delay="indefinite"/>
-                      </p:stCondLst>
-                      <p:childTnLst>
-                        <p:par>
-                          <p:cTn id="9" fill="hold">
-                            <p:stCondLst>
-                              <p:cond delay="0"/>
-                            </p:stCondLst>
-                            <p:childTnLst>
-                              <p:par>
-                                <p:cTn id="10" presetID="10" presetClass="entr" presetSubtype="0" fill="hold" nodeType="clickEffect">
-                                  <p:stCondLst>
-                                    <p:cond delay="0"/>
-                                  </p:stCondLst>
-                                  <p:childTnLst>
-                                    <p:set>
-                                      <p:cBhvr>
-                                        <p:cTn id="11" dur="1" fill="hold">
-                                          <p:stCondLst>
-                                            <p:cond delay="0"/>
-                                          </p:stCondLst>
-                                        </p:cTn>
-                                        <p:tgtEl>
-                                          <p:spTgt spid="8"/>
-                                        </p:tgtEl>
-                                        <p:attrNameLst>
-                                          <p:attrName>style.visibility</p:attrName>
-                                        </p:attrNameLst>
-                                      </p:cBhvr>
-                                      <p:to>
-                                        <p:strVal val="visible"/>
-                                      </p:to>
-                                    </p:set>
-                                    <p:animEffect transition="in" filter="fade">
-                                      <p:cBhvr>
-                                        <p:cTn id="12" dur="450"/>
-                                        <p:tgtEl>
-                                          <p:spTgt spid="8"/>
-                                        </p:tgtEl>
-                                      </p:cBhvr>
-                                    </p:animEffect>
-                                  </p:childTnLst>
-                                </p:cTn>
-                              </p:par>
-                            </p:childTnLst>
-                          </p:cTn>
-                        </p:par>
-                      </p:childTnLst>
-                    </p:cTn>
-                  </p:par>
-                </p:childTnLst>
-              </p:cTn>
-              <p:prevCondLst>
-                <p:cond evt="onPrev" delay="0">
-                  <p:tgtEl>
-                    <p:sldTgt/>
-                  </p:tgtEl>
-                </p:cond>
-              </p:prevCondLst>
-              <p:nextCondLst>
-                <p:cond evt="onNext" delay="0">
-                  <p:tgtEl>
-                    <p:sldTgt/>
-                  </p:tgtEl>
-                </p:cond>
-              </p:nextCondLst>
-            </p:seq>
-          </p:childTnLst>
-        </p:cTn>
-      </p:par>
-    </p:tnLst>
-  </p:timing>
-</p:sld>
-</file>
-
-<file path=ppt/slides/slide15.xml><?xml version="1.0" encoding="utf-8"?>
-<p:sld xmlns:a="http://schemas.openxmlformats.org/drawingml/2006/main" xmlns:p="http://schemas.openxmlformats.org/presentationml/2006/main" xmlns:r="http://schemas.openxmlformats.org/officeDocument/2006/relationships">
-  <p:cSld>
-    <p:bg>
-      <p:bgPr>
-        <a:solidFill>
-          <a:srgbClr val="FFFFFF"/>
-        </a:solidFill>
-        <a:effectLst/>
-      </p:bgPr>
-    </p:bg>
-    <p:spTree>
-      <p:nvGrpSpPr>
-        <p:cNvPr id="1" name=""/>
-        <p:cNvGrpSpPr/>
-        <p:nvPr/>
-      </p:nvGrpSpPr>
-      <p:grpSpPr/>
-      <p:sp>
-        <p:nvSpPr>
-          <p:cNvPr id="2" name="Rectangle 1"/>
-          <p:cNvSpPr/>
-          <p:nvPr/>
-        </p:nvSpPr>
-        <p:spPr>
-          <a:xfrm>
-            <a:off x="0" y="0"/>
-            <a:ext cx="12191695" cy="960120"/>
-          </a:xfrm>
-          <a:prstGeom prst="rect">
-            <a:avLst/>
-          </a:prstGeom>
-          <a:solidFill>
-            <a:srgbClr val="095292"/>
-          </a:solidFill>
-          <a:ln>
-            <a:noFill/>
-          </a:ln>
-        </p:spPr>
-        <p:style>
-          <a:lnRef idx="1">
-            <a:schemeClr val="accent1"/>
-          </a:lnRef>
-          <a:fillRef idx="3">
-            <a:schemeClr val="accent1"/>
-          </a:fillRef>
-          <a:effectRef idx="2">
-            <a:schemeClr val="accent1"/>
-          </a:effectRef>
-          <a:fontRef idx="minor">
-            <a:schemeClr val="lt1"/>
-          </a:fontRef>
-        </p:style>
-        <p:txBody>
-          <a:bodyPr rtlCol="0" anchor="ctr"/>
-          <a:lstStyle/>
-          <a:p>
-            <a:pPr algn="ctr"/>
-          </a:p>
-        </p:txBody>
-      </p:sp>
-      <p:sp>
-        <p:nvSpPr>
-          <p:cNvPr id="3" name="Rectangle 2"/>
-          <p:cNvSpPr/>
-          <p:nvPr/>
-        </p:nvSpPr>
-        <p:spPr>
-          <a:xfrm>
-            <a:off x="0" y="960120"/>
-            <a:ext cx="12191695" cy="41148"/>
-          </a:xfrm>
-          <a:prstGeom prst="rect">
-            <a:avLst/>
-          </a:prstGeom>
-          <a:solidFill>
-            <a:srgbClr val="FFD000"/>
-          </a:solidFill>
-          <a:ln>
-            <a:noFill/>
-          </a:ln>
-        </p:spPr>
-        <p:style>
-          <a:lnRef idx="1">
-            <a:schemeClr val="accent1"/>
-          </a:lnRef>
-          <a:fillRef idx="3">
-            <a:schemeClr val="accent1"/>
-          </a:fillRef>
-          <a:effectRef idx="2">
-            <a:schemeClr val="accent1"/>
-          </a:effectRef>
-          <a:fontRef idx="minor">
-            <a:schemeClr val="lt1"/>
-          </a:fontRef>
-        </p:style>
-        <p:txBody>
-          <a:bodyPr rtlCol="0" anchor="ctr"/>
-          <a:lstStyle/>
-          <a:p>
-            <a:pPr algn="ctr"/>
-          </a:p>
-        </p:txBody>
-      </p:sp>
-      <p:sp>
-        <p:nvSpPr>
-          <p:cNvPr id="4" name="TextBox 3"/>
-          <p:cNvSpPr txBox="1"/>
-          <p:nvPr/>
-        </p:nvSpPr>
-        <p:spPr>
-          <a:xfrm>
-            <a:off x="457200" y="164592"/>
-            <a:ext cx="11277295" cy="502920"/>
-          </a:xfrm>
-          <a:prstGeom prst="rect">
-            <a:avLst/>
-          </a:prstGeom>
-          <a:noFill/>
-        </p:spPr>
-        <p:txBody>
-          <a:bodyPr wrap="square">
-            <a:spAutoFit/>
-          </a:bodyPr>
-          <a:lstStyle/>
-          <a:p>
-            <a:r>
-              <a:rPr sz="2600" b="1" i="0">
-                <a:solidFill>
-                  <a:srgbClr val="FFFFFF"/>
-                </a:solidFill>
-                <a:latin typeface="Calibri"/>
-              </a:rPr>
-              <a:t>Checklist del diagrama Deployment</a:t>
-            </a:r>
-          </a:p>
-        </p:txBody>
-      </p:sp>
-      <p:sp>
-        <p:nvSpPr>
-          <p:cNvPr id="5" name="TextBox 4"/>
-          <p:cNvSpPr txBox="1"/>
-          <p:nvPr/>
-        </p:nvSpPr>
-        <p:spPr>
-          <a:xfrm>
-            <a:off x="457200" y="1170432"/>
-            <a:ext cx="11277295" cy="5230368"/>
-          </a:xfrm>
-          <a:prstGeom prst="rect">
-            <a:avLst/>
-          </a:prstGeom>
-          <a:noFill/>
-        </p:spPr>
-        <p:txBody>
-          <a:bodyPr wrap="square">
-            <a:spAutoFit/>
-          </a:bodyPr>
-          <a:lstStyle/>
-          <a:p>
-            <a:pPr>
-              <a:spcAft>
-                <a:spcPts val="800"/>
-              </a:spcAft>
-            </a:pPr>
-            <a:r>
-              <a:rPr sz="2000" b="0" i="0">
-                <a:solidFill>
-                  <a:srgbClr val="333333"/>
-                </a:solidFill>
-                <a:latin typeface="Calibri"/>
-              </a:rPr>
-              <a:t>–   Tres zonas rotuladas · cada componente en su zona · puerto de cada uno.</a:t>
-            </a:r>
-          </a:p>
-          <a:p>
-            <a:pPr>
-              <a:spcAft>
-                <a:spcPts val="800"/>
-              </a:spcAft>
-            </a:pPr>
-            <a:r>
-              <a:rPr sz="2000" b="0" i="0">
-                <a:solidFill>
-                  <a:srgbClr val="333333"/>
-                </a:solidFill>
-                <a:latin typeface="Calibri"/>
-              </a:rPr>
-              <a:t>–   Fronteras de confianza marcadas · </a:t>
-            </a:r>
-            <a:r>
-              <a:rPr sz="2000" b="1" i="0">
-                <a:solidFill>
-                  <a:srgbClr val="333333"/>
-                </a:solidFill>
-                <a:latin typeface="Calibri"/>
-              </a:rPr>
-              <a:t>que renderice sin error</a:t>
-            </a:r>
-            <a:r>
-              <a:rPr sz="2000" b="0" i="0">
-                <a:solidFill>
-                  <a:srgbClr val="333333"/>
-                </a:solidFill>
-                <a:latin typeface="Calibri"/>
-              </a:rPr>
-              <a:t> en un visor Mermaid.</a:t>
-            </a:r>
-          </a:p>
-          <a:p>
-            <a:pPr>
-              <a:spcAft>
-                <a:spcPts val="800"/>
-              </a:spcAft>
-            </a:pPr>
-            <a:r>
-              <a:rPr sz="2000" b="0" i="0">
-                <a:solidFill>
-                  <a:srgbClr val="333333"/>
-                </a:solidFill>
-                <a:latin typeface="Calibri"/>
-              </a:rPr>
-              <a:t>–   Debe alinearse con el C4 Containers (mismos nombres).</a:t>
-            </a:r>
-          </a:p>
-          <a:p>
-            <a:pPr>
-              <a:spcAft>
-                <a:spcPts val="800"/>
-              </a:spcAft>
-            </a:pPr>
-            <a:r>
-              <a:rPr sz="2000" b="0" i="0">
-                <a:solidFill>
-                  <a:srgbClr val="333333"/>
-                </a:solidFill>
-                <a:latin typeface="Calibri"/>
-              </a:rPr>
-              <a:t>–   Cada flecha lleva protocolo y puerto: HTTPS 443 al edge, HTTP 8080 a la API, PostgreSQL 5432 a la base.</a:t>
-            </a:r>
-          </a:p>
-          <a:p>
-            <a:pPr>
-              <a:spcAft>
-                <a:spcPts val="800"/>
-              </a:spcAft>
-            </a:pPr>
-            <a:r>
-              <a:rPr sz="2000" b="0" i="0">
-                <a:solidFill>
-                  <a:srgbClr val="333333"/>
-                </a:solidFill>
-                <a:latin typeface="Calibri"/>
-              </a:rPr>
-              <a:t>–   Los servicios externos (correo, pagos) se dibujan fuera de las tres zonas: ahí está la frontera de confianza.</a:t>
-            </a:r>
-          </a:p>
-        </p:txBody>
-      </p:sp>
-      <p:sp>
-        <p:nvSpPr>
-          <p:cNvPr id="6" name="TextBox 5"/>
-          <p:cNvSpPr txBox="1"/>
-          <p:nvPr/>
-        </p:nvSpPr>
-        <p:spPr>
-          <a:xfrm>
-            <a:off x="11185855" y="6473952"/>
-            <a:ext cx="640080" cy="274320"/>
-          </a:xfrm>
-          <a:prstGeom prst="rect">
-            <a:avLst/>
-          </a:prstGeom>
-          <a:noFill/>
-        </p:spPr>
-        <p:txBody>
-          <a:bodyPr wrap="square">
-            <a:spAutoFit/>
-          </a:bodyPr>
-          <a:lstStyle/>
-          <a:p>
-            <a:pPr algn="r"/>
-            <a:r>
-              <a:rPr sz="1100" b="0" i="0">
-                <a:solidFill>
-                  <a:srgbClr val="666666"/>
-                </a:solidFill>
-                <a:latin typeface="Calibri"/>
-              </a:rPr>
-              <a:t>15</a:t>
-            </a:r>
-          </a:p>
-        </p:txBody>
-      </p:sp>
-    </p:spTree>
-  </p:cSld>
-  <p:clrMapOvr>
-    <a:masterClrMapping/>
-  </p:clrMapOvr>
-</p:sld>
-</file>
-
-<file path=ppt/slides/slide16.xml><?xml version="1.0" encoding="utf-8"?>
-<p:sld xmlns:a="http://schemas.openxmlformats.org/drawingml/2006/main" xmlns:p="http://schemas.openxmlformats.org/presentationml/2006/main" xmlns:r="http://schemas.openxmlformats.org/officeDocument/2006/relationships">
-  <p:cSld>
-    <p:bg>
-      <p:bgPr>
-        <a:solidFill>
-          <a:srgbClr val="FFFFFF"/>
-        </a:solidFill>
-        <a:effectLst/>
-      </p:bgPr>
-    </p:bg>
-    <p:spTree>
-      <p:nvGrpSpPr>
-        <p:cNvPr id="1" name=""/>
-        <p:cNvGrpSpPr/>
-        <p:nvPr/>
-      </p:nvGrpSpPr>
-      <p:grpSpPr/>
-      <p:sp>
-        <p:nvSpPr>
-          <p:cNvPr id="2" name="Rectangle 1"/>
-          <p:cNvSpPr/>
-          <p:nvPr/>
-        </p:nvSpPr>
-        <p:spPr>
-          <a:xfrm>
-            <a:off x="0" y="0"/>
-            <a:ext cx="12191695" cy="960120"/>
-          </a:xfrm>
-          <a:prstGeom prst="rect">
-            <a:avLst/>
-          </a:prstGeom>
-          <a:solidFill>
-            <a:srgbClr val="095292"/>
-          </a:solidFill>
-          <a:ln>
-            <a:noFill/>
-          </a:ln>
-        </p:spPr>
-        <p:style>
-          <a:lnRef idx="1">
-            <a:schemeClr val="accent1"/>
-          </a:lnRef>
-          <a:fillRef idx="3">
-            <a:schemeClr val="accent1"/>
-          </a:fillRef>
-          <a:effectRef idx="2">
-            <a:schemeClr val="accent1"/>
-          </a:effectRef>
-          <a:fontRef idx="minor">
-            <a:schemeClr val="lt1"/>
-          </a:fontRef>
-        </p:style>
-        <p:txBody>
-          <a:bodyPr rtlCol="0" anchor="ctr"/>
-          <a:lstStyle/>
-          <a:p>
-            <a:pPr algn="ctr"/>
-          </a:p>
-        </p:txBody>
-      </p:sp>
-      <p:sp>
-        <p:nvSpPr>
-          <p:cNvPr id="3" name="Rectangle 2"/>
-          <p:cNvSpPr/>
-          <p:nvPr/>
-        </p:nvSpPr>
-        <p:spPr>
-          <a:xfrm>
-            <a:off x="0" y="960120"/>
-            <a:ext cx="12191695" cy="41148"/>
-          </a:xfrm>
-          <a:prstGeom prst="rect">
-            <a:avLst/>
-          </a:prstGeom>
-          <a:solidFill>
-            <a:srgbClr val="FFD000"/>
-          </a:solidFill>
-          <a:ln>
-            <a:noFill/>
-          </a:ln>
-        </p:spPr>
-        <p:style>
-          <a:lnRef idx="1">
-            <a:schemeClr val="accent1"/>
-          </a:lnRef>
-          <a:fillRef idx="3">
-            <a:schemeClr val="accent1"/>
-          </a:fillRef>
-          <a:effectRef idx="2">
-            <a:schemeClr val="accent1"/>
-          </a:effectRef>
-          <a:fontRef idx="minor">
-            <a:schemeClr val="lt1"/>
-          </a:fontRef>
-        </p:style>
-        <p:txBody>
-          <a:bodyPr rtlCol="0" anchor="ctr"/>
-          <a:lstStyle/>
-          <a:p>
-            <a:pPr algn="ctr"/>
-          </a:p>
-        </p:txBody>
-      </p:sp>
-      <p:sp>
-        <p:nvSpPr>
-          <p:cNvPr id="4" name="TextBox 3"/>
-          <p:cNvSpPr txBox="1"/>
-          <p:nvPr/>
-        </p:nvSpPr>
-        <p:spPr>
-          <a:xfrm>
-            <a:off x="457200" y="164592"/>
-            <a:ext cx="11277295" cy="502920"/>
-          </a:xfrm>
-          <a:prstGeom prst="rect">
-            <a:avLst/>
-          </a:prstGeom>
-          <a:noFill/>
-        </p:spPr>
-        <p:txBody>
-          <a:bodyPr wrap="square">
-            <a:spAutoFit/>
-          </a:bodyPr>
-          <a:lstStyle/>
-          <a:p>
-            <a:r>
-              <a:rPr sz="2600" b="1" i="0">
-                <a:solidFill>
-                  <a:srgbClr val="FFFFFF"/>
-                </a:solidFill>
-                <a:latin typeface="Calibri"/>
-              </a:rPr>
-              <a:t>Recorrer una peticion de la app de punta a punta</a:t>
-            </a:r>
-          </a:p>
-        </p:txBody>
-      </p:sp>
-      <p:sp>
-        <p:nvSpPr>
-          <p:cNvPr id="5" name="Rounded Rectangle 4"/>
-          <p:cNvSpPr/>
-          <p:nvPr/>
-        </p:nvSpPr>
-        <p:spPr>
-          <a:xfrm>
-            <a:off x="5803166" y="1188719"/>
-            <a:ext cx="5998464" cy="4828032"/>
-          </a:xfrm>
-          <a:prstGeom prst="roundRect">
-            <a:avLst>
-              <a:gd name="adj" fmla="val 4000"/>
-            </a:avLst>
-          </a:prstGeom>
-          <a:solidFill>
-            <a:srgbClr val="E8EEF4"/>
-          </a:solidFill>
-          <a:ln>
-            <a:noFill/>
-          </a:ln>
-        </p:spPr>
-        <p:style>
-          <a:lnRef idx="1">
-            <a:schemeClr val="accent1"/>
-          </a:lnRef>
-          <a:fillRef idx="3">
-            <a:schemeClr val="accent1"/>
-          </a:fillRef>
-          <a:effectRef idx="2">
-            <a:schemeClr val="accent1"/>
-          </a:effectRef>
-          <a:fontRef idx="minor">
-            <a:schemeClr val="lt1"/>
-          </a:fontRef>
-        </p:style>
-        <p:txBody>
-          <a:bodyPr rtlCol="0" anchor="ctr"/>
-          <a:lstStyle/>
-          <a:p>
-            <a:pPr algn="ctr"/>
-          </a:p>
-        </p:txBody>
-      </p:sp>
-      <p:pic>
-        <p:nvPicPr>
-          <p:cNvPr id="6" name="Picture 5" descr="peticion-punta-a-punta-paso1.png"/>
-          <p:cNvPicPr>
-            <a:picLocks noChangeAspect="1"/>
-          </p:cNvPicPr>
-          <p:nvPr/>
-        </p:nvPicPr>
-        <p:blipFill>
-          <a:blip r:embed="rId2"/>
-          <a:stretch>
-            <a:fillRect/>
-          </a:stretch>
-        </p:blipFill>
-        <p:spPr>
-          <a:xfrm>
-            <a:off x="5876318" y="1261872"/>
-            <a:ext cx="5852160" cy="4681728"/>
-          </a:xfrm>
-          <a:prstGeom prst="rect">
-            <a:avLst/>
-          </a:prstGeom>
-        </p:spPr>
-      </p:pic>
-      <p:pic>
-        <p:nvPicPr>
-          <p:cNvPr id="7" name="Picture 6" descr="peticion-punta-a-punta-paso2.png"/>
-          <p:cNvPicPr>
-            <a:picLocks noChangeAspect="1"/>
-          </p:cNvPicPr>
-          <p:nvPr/>
-        </p:nvPicPr>
-        <p:blipFill>
-          <a:blip r:embed="rId3"/>
-          <a:stretch>
-            <a:fillRect/>
-          </a:stretch>
-        </p:blipFill>
-        <p:spPr>
-          <a:xfrm>
-            <a:off x="5876318" y="1261872"/>
-            <a:ext cx="5852160" cy="4681728"/>
-          </a:xfrm>
-          <a:prstGeom prst="rect">
-            <a:avLst/>
-          </a:prstGeom>
-        </p:spPr>
-      </p:pic>
-      <p:pic>
-        <p:nvPicPr>
-          <p:cNvPr id="8" name="Picture 7" descr="peticion-punta-a-punta-paso3.png"/>
-          <p:cNvPicPr>
-            <a:picLocks noChangeAspect="1"/>
-          </p:cNvPicPr>
-          <p:nvPr/>
-        </p:nvPicPr>
-        <p:blipFill>
-          <a:blip r:embed="rId4"/>
-          <a:stretch>
-            <a:fillRect/>
-          </a:stretch>
-        </p:blipFill>
-        <p:spPr>
-          <a:xfrm>
-            <a:off x="5876318" y="1261872"/>
-            <a:ext cx="5852160" cy="4681728"/>
-          </a:xfrm>
-          <a:prstGeom prst="rect">
-            <a:avLst/>
-          </a:prstGeom>
-        </p:spPr>
-      </p:pic>
-      <p:pic>
-        <p:nvPicPr>
-          <p:cNvPr id="9" name="Picture 8" descr="peticion-punta-a-punta-paso4.png"/>
+          <p:cNvPr id="9" name="Picture 8" descr="foto-perfil-paso4.png"/>
           <p:cNvPicPr>
             <a:picLocks noChangeAspect="1"/>
           </p:cNvPicPr>
@@ -8580,7 +7567,7 @@
                 </a:solidFill>
                 <a:latin typeface="Calibri"/>
               </a:rPr>
-              <a:t>–   El recorrido completo tiene 4 saltos: DNS, balanceador en la zona publica, API en la zona privada y base de datos en la zona de datos.</a:t>
+              <a:t>–   La solucion ingenua es guardar el archivo en una columna binaria de la base de datos.</a:t>
             </a:r>
           </a:p>
           <a:p>
@@ -8596,7 +7583,7 @@
                 </a:solidFill>
                 <a:latin typeface="Calibri"/>
               </a:rPr>
-              <a:t>–   Cada salto de red dentro de un mismo centro de datos suma del orden de 1 milisegundo, y por eso un diseno que encadena servicios innecesarios es…</a:t>
+              <a:t>–   El diseno correcto separa: el archivo va a almacenamiento de objetos y la base guarda una fila con la clave del objeto, el dueno, el tamano, el tipo…</a:t>
             </a:r>
           </a:p>
         </p:txBody>
@@ -8631,7 +7618,7 @@
                 </a:solidFill>
                 <a:latin typeface="Calibri"/>
               </a:rPr>
-              <a:t>16</a:t>
+              <a:t>13</a:t>
             </a:r>
           </a:p>
         </p:txBody>
@@ -8833,6 +7820,1579 @@
 </p:sld>
 </file>
 
+<file path=ppt/slides/slide14.xml><?xml version="1.0" encoding="utf-8"?>
+<p:sld xmlns:a="http://schemas.openxmlformats.org/drawingml/2006/main" xmlns:p="http://schemas.openxmlformats.org/presentationml/2006/main" xmlns:r="http://schemas.openxmlformats.org/officeDocument/2006/relationships">
+  <p:cSld>
+    <p:bg>
+      <p:bgPr>
+        <a:solidFill>
+          <a:srgbClr val="FFFFFF"/>
+        </a:solidFill>
+        <a:effectLst/>
+      </p:bgPr>
+    </p:bg>
+    <p:spTree>
+      <p:nvGrpSpPr>
+        <p:cNvPr id="1" name=""/>
+        <p:cNvGrpSpPr/>
+        <p:nvPr/>
+      </p:nvGrpSpPr>
+      <p:grpSpPr/>
+      <p:sp>
+        <p:nvSpPr>
+          <p:cNvPr id="2" name="Rectangle 1"/>
+          <p:cNvSpPr/>
+          <p:nvPr/>
+        </p:nvSpPr>
+        <p:spPr>
+          <a:xfrm>
+            <a:off x="0" y="0"/>
+            <a:ext cx="12191695" cy="960120"/>
+          </a:xfrm>
+          <a:prstGeom prst="rect">
+            <a:avLst/>
+          </a:prstGeom>
+          <a:solidFill>
+            <a:srgbClr val="095292"/>
+          </a:solidFill>
+          <a:ln>
+            <a:noFill/>
+          </a:ln>
+        </p:spPr>
+        <p:style>
+          <a:lnRef idx="1">
+            <a:schemeClr val="accent1"/>
+          </a:lnRef>
+          <a:fillRef idx="3">
+            <a:schemeClr val="accent1"/>
+          </a:fillRef>
+          <a:effectRef idx="2">
+            <a:schemeClr val="accent1"/>
+          </a:effectRef>
+          <a:fontRef idx="minor">
+            <a:schemeClr val="lt1"/>
+          </a:fontRef>
+        </p:style>
+        <p:txBody>
+          <a:bodyPr rtlCol="0" anchor="ctr"/>
+          <a:lstStyle/>
+          <a:p>
+            <a:pPr algn="ctr"/>
+          </a:p>
+        </p:txBody>
+      </p:sp>
+      <p:sp>
+        <p:nvSpPr>
+          <p:cNvPr id="3" name="Rectangle 2"/>
+          <p:cNvSpPr/>
+          <p:nvPr/>
+        </p:nvSpPr>
+        <p:spPr>
+          <a:xfrm>
+            <a:off x="0" y="960120"/>
+            <a:ext cx="12191695" cy="41148"/>
+          </a:xfrm>
+          <a:prstGeom prst="rect">
+            <a:avLst/>
+          </a:prstGeom>
+          <a:solidFill>
+            <a:srgbClr val="FFD000"/>
+          </a:solidFill>
+          <a:ln>
+            <a:noFill/>
+          </a:ln>
+        </p:spPr>
+        <p:style>
+          <a:lnRef idx="1">
+            <a:schemeClr val="accent1"/>
+          </a:lnRef>
+          <a:fillRef idx="3">
+            <a:schemeClr val="accent1"/>
+          </a:fillRef>
+          <a:effectRef idx="2">
+            <a:schemeClr val="accent1"/>
+          </a:effectRef>
+          <a:fontRef idx="minor">
+            <a:schemeClr val="lt1"/>
+          </a:fontRef>
+        </p:style>
+        <p:txBody>
+          <a:bodyPr rtlCol="0" anchor="ctr"/>
+          <a:lstStyle/>
+          <a:p>
+            <a:pPr algn="ctr"/>
+          </a:p>
+        </p:txBody>
+      </p:sp>
+      <p:sp>
+        <p:nvSpPr>
+          <p:cNvPr id="4" name="TextBox 3"/>
+          <p:cNvSpPr txBox="1"/>
+          <p:nvPr/>
+        </p:nvSpPr>
+        <p:spPr>
+          <a:xfrm>
+            <a:off x="457200" y="164592"/>
+            <a:ext cx="11277295" cy="502920"/>
+          </a:xfrm>
+          <a:prstGeom prst="rect">
+            <a:avLst/>
+          </a:prstGeom>
+          <a:noFill/>
+        </p:spPr>
+        <p:txBody>
+          <a:bodyPr wrap="square">
+            <a:spAutoFit/>
+          </a:bodyPr>
+          <a:lstStyle/>
+          <a:p>
+            <a:r>
+              <a:rPr sz="2600" b="1" i="0">
+                <a:solidFill>
+                  <a:srgbClr val="FFFFFF"/>
+                </a:solidFill>
+                <a:latin typeface="Calibri"/>
+              </a:rPr>
+              <a:t>Trazabilidad: la tabla de correspondencia</a:t>
+            </a:r>
+          </a:p>
+        </p:txBody>
+      </p:sp>
+      <p:sp>
+        <p:nvSpPr>
+          <p:cNvPr id="5" name="Rounded Rectangle 4"/>
+          <p:cNvSpPr/>
+          <p:nvPr/>
+        </p:nvSpPr>
+        <p:spPr>
+          <a:xfrm>
+            <a:off x="5803166" y="1188719"/>
+            <a:ext cx="5998464" cy="4828032"/>
+          </a:xfrm>
+          <a:prstGeom prst="roundRect">
+            <a:avLst>
+              <a:gd name="adj" fmla="val 4000"/>
+            </a:avLst>
+          </a:prstGeom>
+          <a:solidFill>
+            <a:srgbClr val="E8EEF4"/>
+          </a:solidFill>
+          <a:ln>
+            <a:noFill/>
+          </a:ln>
+        </p:spPr>
+        <p:style>
+          <a:lnRef idx="1">
+            <a:schemeClr val="accent1"/>
+          </a:lnRef>
+          <a:fillRef idx="3">
+            <a:schemeClr val="accent1"/>
+          </a:fillRef>
+          <a:effectRef idx="2">
+            <a:schemeClr val="accent1"/>
+          </a:effectRef>
+          <a:fontRef idx="minor">
+            <a:schemeClr val="lt1"/>
+          </a:fontRef>
+        </p:style>
+        <p:txBody>
+          <a:bodyPr rtlCol="0" anchor="ctr"/>
+          <a:lstStyle/>
+          <a:p>
+            <a:pPr algn="ctr"/>
+          </a:p>
+        </p:txBody>
+      </p:sp>
+      <p:pic>
+        <p:nvPicPr>
+          <p:cNvPr id="6" name="Picture 5" descr="trazabilidad-tabla-paso1.png"/>
+          <p:cNvPicPr>
+            <a:picLocks noChangeAspect="1"/>
+          </p:cNvPicPr>
+          <p:nvPr/>
+        </p:nvPicPr>
+        <p:blipFill>
+          <a:blip r:embed="rId2"/>
+          <a:stretch>
+            <a:fillRect/>
+          </a:stretch>
+        </p:blipFill>
+        <p:spPr>
+          <a:xfrm>
+            <a:off x="5876318" y="1261872"/>
+            <a:ext cx="5852160" cy="4681728"/>
+          </a:xfrm>
+          <a:prstGeom prst="rect">
+            <a:avLst/>
+          </a:prstGeom>
+        </p:spPr>
+      </p:pic>
+      <p:pic>
+        <p:nvPicPr>
+          <p:cNvPr id="7" name="Picture 6" descr="trazabilidad-tabla-paso2.png"/>
+          <p:cNvPicPr>
+            <a:picLocks noChangeAspect="1"/>
+          </p:cNvPicPr>
+          <p:nvPr/>
+        </p:nvPicPr>
+        <p:blipFill>
+          <a:blip r:embed="rId3"/>
+          <a:stretch>
+            <a:fillRect/>
+          </a:stretch>
+        </p:blipFill>
+        <p:spPr>
+          <a:xfrm>
+            <a:off x="5876318" y="1261872"/>
+            <a:ext cx="5852160" cy="4681728"/>
+          </a:xfrm>
+          <a:prstGeom prst="rect">
+            <a:avLst/>
+          </a:prstGeom>
+        </p:spPr>
+      </p:pic>
+      <p:pic>
+        <p:nvPicPr>
+          <p:cNvPr id="8" name="Picture 7" descr="trazabilidad-tabla-paso3.png"/>
+          <p:cNvPicPr>
+            <a:picLocks noChangeAspect="1"/>
+          </p:cNvPicPr>
+          <p:nvPr/>
+        </p:nvPicPr>
+        <p:blipFill>
+          <a:blip r:embed="rId4"/>
+          <a:stretch>
+            <a:fillRect/>
+          </a:stretch>
+        </p:blipFill>
+        <p:spPr>
+          <a:xfrm>
+            <a:off x="5876318" y="1261872"/>
+            <a:ext cx="5852160" cy="4681728"/>
+          </a:xfrm>
+          <a:prstGeom prst="rect">
+            <a:avLst/>
+          </a:prstGeom>
+        </p:spPr>
+      </p:pic>
+      <p:sp>
+        <p:nvSpPr>
+          <p:cNvPr id="13" name="TextBox 12"/>
+          <p:cNvSpPr txBox="1"/>
+          <p:nvPr/>
+        </p:nvSpPr>
+        <p:spPr>
+          <a:xfrm>
+            <a:off x="5870301" y="5961888"/>
+            <a:ext cx="5864193" cy="320040"/>
+          </a:xfrm>
+          <a:prstGeom prst="rect">
+            <a:avLst/>
+          </a:prstGeom>
+          <a:noFill/>
+        </p:spPr>
+        <p:txBody>
+          <a:bodyPr wrap="square">
+            <a:spAutoFit/>
+          </a:bodyPr>
+          <a:lstStyle/>
+          <a:p>
+            <a:pPr algn="ctr"/>
+            <a:r>
+              <a:rPr sz="1100" b="0" i="1">
+                <a:solidFill>
+                  <a:srgbClr val="666666"/>
+                </a:solidFill>
+                <a:latin typeface="Calibri"/>
+              </a:rPr>
+              <a:t>Clic para avanzar la animación</a:t>
+            </a:r>
+          </a:p>
+        </p:txBody>
+      </p:sp>
+      <p:sp>
+        <p:nvSpPr>
+          <p:cNvPr id="14" name="TextBox 13"/>
+          <p:cNvSpPr txBox="1"/>
+          <p:nvPr/>
+        </p:nvSpPr>
+        <p:spPr>
+          <a:xfrm>
+            <a:off x="457200" y="1353312"/>
+            <a:ext cx="5093061" cy="5047488"/>
+          </a:xfrm>
+          <a:prstGeom prst="rect">
+            <a:avLst/>
+          </a:prstGeom>
+          <a:noFill/>
+        </p:spPr>
+        <p:txBody>
+          <a:bodyPr wrap="square">
+            <a:spAutoFit/>
+          </a:bodyPr>
+          <a:lstStyle/>
+          <a:p>
+            <a:pPr>
+              <a:spcAft>
+                <a:spcPts val="800"/>
+              </a:spcAft>
+            </a:pPr>
+            <a:r>
+              <a:rPr sz="2000" b="0" i="0">
+                <a:solidFill>
+                  <a:srgbClr val="333333"/>
+                </a:solidFill>
+                <a:latin typeface="Calibri"/>
+              </a:rPr>
+              <a:t>–   Se demuestra con una tabla de tres columnas: «Componente en el C4 Containers», «Componente en el Despliegue» y «Zona».</a:t>
+            </a:r>
+          </a:p>
+          <a:p>
+            <a:pPr>
+              <a:spcAft>
+                <a:spcPts val="800"/>
+              </a:spcAft>
+            </a:pPr>
+            <a:r>
+              <a:rPr sz="2000" b="0" i="0">
+                <a:solidFill>
+                  <a:srgbClr val="333333"/>
+                </a:solidFill>
+                <a:latin typeface="Calibri"/>
+              </a:rPr>
+              <a:t>–   Un ejemplo de fila completa es: «API de turnos» en el Containers, «API de turnos (contenedor, 8080)» en el Despliegue, zona Privada.</a:t>
+            </a:r>
+          </a:p>
+          <a:p>
+            <a:pPr>
+              <a:spcAft>
+                <a:spcPts val="800"/>
+              </a:spcAft>
+            </a:pPr>
+            <a:r>
+              <a:rPr sz="2000" b="0" i="0">
+                <a:solidFill>
+                  <a:srgbClr val="333333"/>
+                </a:solidFill>
+                <a:latin typeface="Calibri"/>
+              </a:rPr>
+              <a:t>–   El cliente y el proveedor de correo son las filas sin par: aparecen en los diagramas, pero no se despliegan dentro del sistema.</a:t>
+            </a:r>
+          </a:p>
+        </p:txBody>
+      </p:sp>
+      <p:sp>
+        <p:nvSpPr>
+          <p:cNvPr id="15" name="TextBox 14"/>
+          <p:cNvSpPr txBox="1"/>
+          <p:nvPr/>
+        </p:nvSpPr>
+        <p:spPr>
+          <a:xfrm>
+            <a:off x="11185855" y="6473952"/>
+            <a:ext cx="640080" cy="274320"/>
+          </a:xfrm>
+          <a:prstGeom prst="rect">
+            <a:avLst/>
+          </a:prstGeom>
+          <a:noFill/>
+        </p:spPr>
+        <p:txBody>
+          <a:bodyPr wrap="square">
+            <a:spAutoFit/>
+          </a:bodyPr>
+          <a:lstStyle/>
+          <a:p>
+            <a:pPr algn="r"/>
+            <a:r>
+              <a:rPr sz="1100" b="0" i="0">
+                <a:solidFill>
+                  <a:srgbClr val="666666"/>
+                </a:solidFill>
+                <a:latin typeface="Calibri"/>
+              </a:rPr>
+              <a:t>14</a:t>
+            </a:r>
+          </a:p>
+        </p:txBody>
+      </p:sp>
+    </p:spTree>
+  </p:cSld>
+  <p:clrMapOvr>
+    <a:masterClrMapping/>
+  </p:clrMapOvr>
+  <p:timing>
+    <p:tnLst>
+      <p:par>
+        <p:cTn id="1" dur="indefinite" restart="never" nodeType="tmRoot">
+          <p:childTnLst>
+            <p:seq concurrent="1" nextAc="seek">
+              <p:cTn id="2" dur="indefinite" nodeType="mainSeq">
+                <p:childTnLst>
+                  <p:par>
+                    <p:cTn id="3" fill="hold">
+                      <p:stCondLst>
+                        <p:cond delay="indefinite"/>
+                      </p:stCondLst>
+                      <p:childTnLst>
+                        <p:par>
+                          <p:cTn id="4" fill="hold">
+                            <p:stCondLst>
+                              <p:cond delay="0"/>
+                            </p:stCondLst>
+                            <p:childTnLst>
+                              <p:par>
+                                <p:cTn id="5" presetID="10" presetClass="entr" presetSubtype="0" fill="hold" nodeType="clickEffect">
+                                  <p:stCondLst>
+                                    <p:cond delay="0"/>
+                                  </p:stCondLst>
+                                  <p:childTnLst>
+                                    <p:set>
+                                      <p:cBhvr>
+                                        <p:cTn id="6" dur="1" fill="hold">
+                                          <p:stCondLst>
+                                            <p:cond delay="0"/>
+                                          </p:stCondLst>
+                                        </p:cTn>
+                                        <p:tgtEl>
+                                          <p:spTgt spid="7"/>
+                                        </p:tgtEl>
+                                        <p:attrNameLst>
+                                          <p:attrName>style.visibility</p:attrName>
+                                        </p:attrNameLst>
+                                      </p:cBhvr>
+                                      <p:to>
+                                        <p:strVal val="visible"/>
+                                      </p:to>
+                                    </p:set>
+                                    <p:animEffect transition="in" filter="fade">
+                                      <p:cBhvr>
+                                        <p:cTn id="7" dur="450"/>
+                                        <p:tgtEl>
+                                          <p:spTgt spid="7"/>
+                                        </p:tgtEl>
+                                      </p:cBhvr>
+                                    </p:animEffect>
+                                  </p:childTnLst>
+                                </p:cTn>
+                              </p:par>
+                            </p:childTnLst>
+                          </p:cTn>
+                        </p:par>
+                      </p:childTnLst>
+                    </p:cTn>
+                  </p:par>
+                  <p:par>
+                    <p:cTn id="8" fill="hold">
+                      <p:stCondLst>
+                        <p:cond delay="indefinite"/>
+                      </p:stCondLst>
+                      <p:childTnLst>
+                        <p:par>
+                          <p:cTn id="9" fill="hold">
+                            <p:stCondLst>
+                              <p:cond delay="0"/>
+                            </p:stCondLst>
+                            <p:childTnLst>
+                              <p:par>
+                                <p:cTn id="10" presetID="10" presetClass="entr" presetSubtype="0" fill="hold" nodeType="clickEffect">
+                                  <p:stCondLst>
+                                    <p:cond delay="0"/>
+                                  </p:stCondLst>
+                                  <p:childTnLst>
+                                    <p:set>
+                                      <p:cBhvr>
+                                        <p:cTn id="11" dur="1" fill="hold">
+                                          <p:stCondLst>
+                                            <p:cond delay="0"/>
+                                          </p:stCondLst>
+                                        </p:cTn>
+                                        <p:tgtEl>
+                                          <p:spTgt spid="8"/>
+                                        </p:tgtEl>
+                                        <p:attrNameLst>
+                                          <p:attrName>style.visibility</p:attrName>
+                                        </p:attrNameLst>
+                                      </p:cBhvr>
+                                      <p:to>
+                                        <p:strVal val="visible"/>
+                                      </p:to>
+                                    </p:set>
+                                    <p:animEffect transition="in" filter="fade">
+                                      <p:cBhvr>
+                                        <p:cTn id="12" dur="450"/>
+                                        <p:tgtEl>
+                                          <p:spTgt spid="8"/>
+                                        </p:tgtEl>
+                                      </p:cBhvr>
+                                    </p:animEffect>
+                                  </p:childTnLst>
+                                </p:cTn>
+                              </p:par>
+                            </p:childTnLst>
+                          </p:cTn>
+                        </p:par>
+                      </p:childTnLst>
+                    </p:cTn>
+                  </p:par>
+                </p:childTnLst>
+              </p:cTn>
+              <p:prevCondLst>
+                <p:cond evt="onPrev" delay="0">
+                  <p:tgtEl>
+                    <p:sldTgt/>
+                  </p:tgtEl>
+                </p:cond>
+              </p:prevCondLst>
+              <p:nextCondLst>
+                <p:cond evt="onNext" delay="0">
+                  <p:tgtEl>
+                    <p:sldTgt/>
+                  </p:tgtEl>
+                </p:cond>
+              </p:nextCondLst>
+            </p:seq>
+          </p:childTnLst>
+        </p:cTn>
+      </p:par>
+    </p:tnLst>
+  </p:timing>
+</p:sld>
+</file>
+
+<file path=ppt/slides/slide15.xml><?xml version="1.0" encoding="utf-8"?>
+<p:sld xmlns:a="http://schemas.openxmlformats.org/drawingml/2006/main" xmlns:p="http://schemas.openxmlformats.org/presentationml/2006/main" xmlns:r="http://schemas.openxmlformats.org/officeDocument/2006/relationships">
+  <p:cSld>
+    <p:bg>
+      <p:bgPr>
+        <a:solidFill>
+          <a:srgbClr val="FFFFFF"/>
+        </a:solidFill>
+        <a:effectLst/>
+      </p:bgPr>
+    </p:bg>
+    <p:spTree>
+      <p:nvGrpSpPr>
+        <p:cNvPr id="1" name=""/>
+        <p:cNvGrpSpPr/>
+        <p:nvPr/>
+      </p:nvGrpSpPr>
+      <p:grpSpPr/>
+      <p:sp>
+        <p:nvSpPr>
+          <p:cNvPr id="2" name="Rectangle 1"/>
+          <p:cNvSpPr/>
+          <p:nvPr/>
+        </p:nvSpPr>
+        <p:spPr>
+          <a:xfrm>
+            <a:off x="0" y="0"/>
+            <a:ext cx="12191695" cy="960120"/>
+          </a:xfrm>
+          <a:prstGeom prst="rect">
+            <a:avLst/>
+          </a:prstGeom>
+          <a:solidFill>
+            <a:srgbClr val="095292"/>
+          </a:solidFill>
+          <a:ln>
+            <a:noFill/>
+          </a:ln>
+        </p:spPr>
+        <p:style>
+          <a:lnRef idx="1">
+            <a:schemeClr val="accent1"/>
+          </a:lnRef>
+          <a:fillRef idx="3">
+            <a:schemeClr val="accent1"/>
+          </a:fillRef>
+          <a:effectRef idx="2">
+            <a:schemeClr val="accent1"/>
+          </a:effectRef>
+          <a:fontRef idx="minor">
+            <a:schemeClr val="lt1"/>
+          </a:fontRef>
+        </p:style>
+        <p:txBody>
+          <a:bodyPr rtlCol="0" anchor="ctr"/>
+          <a:lstStyle/>
+          <a:p>
+            <a:pPr algn="ctr"/>
+          </a:p>
+        </p:txBody>
+      </p:sp>
+      <p:sp>
+        <p:nvSpPr>
+          <p:cNvPr id="3" name="Rectangle 2"/>
+          <p:cNvSpPr/>
+          <p:nvPr/>
+        </p:nvSpPr>
+        <p:spPr>
+          <a:xfrm>
+            <a:off x="0" y="960120"/>
+            <a:ext cx="12191695" cy="41148"/>
+          </a:xfrm>
+          <a:prstGeom prst="rect">
+            <a:avLst/>
+          </a:prstGeom>
+          <a:solidFill>
+            <a:srgbClr val="FFD000"/>
+          </a:solidFill>
+          <a:ln>
+            <a:noFill/>
+          </a:ln>
+        </p:spPr>
+        <p:style>
+          <a:lnRef idx="1">
+            <a:schemeClr val="accent1"/>
+          </a:lnRef>
+          <a:fillRef idx="3">
+            <a:schemeClr val="accent1"/>
+          </a:fillRef>
+          <a:effectRef idx="2">
+            <a:schemeClr val="accent1"/>
+          </a:effectRef>
+          <a:fontRef idx="minor">
+            <a:schemeClr val="lt1"/>
+          </a:fontRef>
+        </p:style>
+        <p:txBody>
+          <a:bodyPr rtlCol="0" anchor="ctr"/>
+          <a:lstStyle/>
+          <a:p>
+            <a:pPr algn="ctr"/>
+          </a:p>
+        </p:txBody>
+      </p:sp>
+      <p:sp>
+        <p:nvSpPr>
+          <p:cNvPr id="4" name="TextBox 3"/>
+          <p:cNvSpPr txBox="1"/>
+          <p:nvPr/>
+        </p:nvSpPr>
+        <p:spPr>
+          <a:xfrm>
+            <a:off x="457200" y="164592"/>
+            <a:ext cx="11277295" cy="502920"/>
+          </a:xfrm>
+          <a:prstGeom prst="rect">
+            <a:avLst/>
+          </a:prstGeom>
+          <a:noFill/>
+        </p:spPr>
+        <p:txBody>
+          <a:bodyPr wrap="square">
+            <a:spAutoFit/>
+          </a:bodyPr>
+          <a:lstStyle/>
+          <a:p>
+            <a:r>
+              <a:rPr sz="2600" b="1" i="0">
+                <a:solidFill>
+                  <a:srgbClr val="FFFFFF"/>
+                </a:solidFill>
+                <a:latin typeface="Calibri"/>
+              </a:rPr>
+              <a:t>Checklist del diagrama Deployment</a:t>
+            </a:r>
+          </a:p>
+        </p:txBody>
+      </p:sp>
+      <p:sp>
+        <p:nvSpPr>
+          <p:cNvPr id="5" name="Rounded Rectangle 4"/>
+          <p:cNvSpPr/>
+          <p:nvPr/>
+        </p:nvSpPr>
+        <p:spPr>
+          <a:xfrm>
+            <a:off x="5797149" y="1343926"/>
+            <a:ext cx="6010497" cy="4837658"/>
+          </a:xfrm>
+          <a:prstGeom prst="roundRect">
+            <a:avLst>
+              <a:gd name="adj" fmla="val 4000"/>
+            </a:avLst>
+          </a:prstGeom>
+          <a:solidFill>
+            <a:srgbClr val="E8EEF4"/>
+          </a:solidFill>
+          <a:ln>
+            <a:noFill/>
+          </a:ln>
+        </p:spPr>
+        <p:style>
+          <a:lnRef idx="1">
+            <a:schemeClr val="accent1"/>
+          </a:lnRef>
+          <a:fillRef idx="3">
+            <a:schemeClr val="accent1"/>
+          </a:fillRef>
+          <a:effectRef idx="2">
+            <a:schemeClr val="accent1"/>
+          </a:effectRef>
+          <a:fontRef idx="minor">
+            <a:schemeClr val="lt1"/>
+          </a:fontRef>
+        </p:style>
+        <p:txBody>
+          <a:bodyPr rtlCol="0" anchor="ctr"/>
+          <a:lstStyle/>
+          <a:p>
+            <a:pPr algn="ctr"/>
+          </a:p>
+        </p:txBody>
+      </p:sp>
+      <p:pic>
+        <p:nvPicPr>
+          <p:cNvPr id="6" name="Picture 5" descr="ilus-checklist-deploy-paso1.png"/>
+          <p:cNvPicPr>
+            <a:picLocks noChangeAspect="1"/>
+          </p:cNvPicPr>
+          <p:nvPr/>
+        </p:nvPicPr>
+        <p:blipFill>
+          <a:blip r:embed="rId2"/>
+          <a:stretch>
+            <a:fillRect/>
+          </a:stretch>
+        </p:blipFill>
+        <p:spPr>
+          <a:xfrm>
+            <a:off x="5870301" y="1417078"/>
+            <a:ext cx="5864193" cy="4691354"/>
+          </a:xfrm>
+          <a:prstGeom prst="rect">
+            <a:avLst/>
+          </a:prstGeom>
+        </p:spPr>
+      </p:pic>
+      <p:sp>
+        <p:nvSpPr>
+          <p:cNvPr id="7" name="TextBox 6"/>
+          <p:cNvSpPr txBox="1"/>
+          <p:nvPr/>
+        </p:nvSpPr>
+        <p:spPr>
+          <a:xfrm>
+            <a:off x="457200" y="1353312"/>
+            <a:ext cx="5093061" cy="5047488"/>
+          </a:xfrm>
+          <a:prstGeom prst="rect">
+            <a:avLst/>
+          </a:prstGeom>
+          <a:noFill/>
+        </p:spPr>
+        <p:txBody>
+          <a:bodyPr wrap="square">
+            <a:spAutoFit/>
+          </a:bodyPr>
+          <a:lstStyle/>
+          <a:p>
+            <a:pPr>
+              <a:spcAft>
+                <a:spcPts val="800"/>
+              </a:spcAft>
+            </a:pPr>
+            <a:r>
+              <a:rPr sz="2000" b="0" i="0">
+                <a:solidFill>
+                  <a:srgbClr val="333333"/>
+                </a:solidFill>
+                <a:latin typeface="Calibri"/>
+              </a:rPr>
+              <a:t>–   Tres zonas rotuladas · cada componente en su zona · puerto de cada uno.</a:t>
+            </a:r>
+          </a:p>
+          <a:p>
+            <a:pPr>
+              <a:spcAft>
+                <a:spcPts val="800"/>
+              </a:spcAft>
+            </a:pPr>
+            <a:r>
+              <a:rPr sz="2000" b="0" i="0">
+                <a:solidFill>
+                  <a:srgbClr val="333333"/>
+                </a:solidFill>
+                <a:latin typeface="Calibri"/>
+              </a:rPr>
+              <a:t>–   Fronteras de confianza marcadas · </a:t>
+            </a:r>
+            <a:r>
+              <a:rPr sz="2000" b="1" i="0">
+                <a:solidFill>
+                  <a:srgbClr val="333333"/>
+                </a:solidFill>
+                <a:latin typeface="Calibri"/>
+              </a:rPr>
+              <a:t>que renderice sin error</a:t>
+            </a:r>
+            <a:r>
+              <a:rPr sz="2000" b="0" i="0">
+                <a:solidFill>
+                  <a:srgbClr val="333333"/>
+                </a:solidFill>
+                <a:latin typeface="Calibri"/>
+              </a:rPr>
+              <a:t> en un visor Mermaid.</a:t>
+            </a:r>
+          </a:p>
+          <a:p>
+            <a:pPr>
+              <a:spcAft>
+                <a:spcPts val="800"/>
+              </a:spcAft>
+            </a:pPr>
+            <a:r>
+              <a:rPr sz="2000" b="0" i="0">
+                <a:solidFill>
+                  <a:srgbClr val="333333"/>
+                </a:solidFill>
+                <a:latin typeface="Calibri"/>
+              </a:rPr>
+              <a:t>–   Debe alinearse con el C4 Containers (mismos nombres).</a:t>
+            </a:r>
+          </a:p>
+          <a:p>
+            <a:pPr>
+              <a:spcAft>
+                <a:spcPts val="800"/>
+              </a:spcAft>
+            </a:pPr>
+            <a:r>
+              <a:rPr sz="2000" b="0" i="0">
+                <a:solidFill>
+                  <a:srgbClr val="333333"/>
+                </a:solidFill>
+                <a:latin typeface="Calibri"/>
+              </a:rPr>
+              <a:t>–   Cada flecha lleva protocolo y puerto: HTTPS 443 al edge, HTTP 8080 a la API, PostgreSQL 5432 a la base.</a:t>
+            </a:r>
+          </a:p>
+        </p:txBody>
+      </p:sp>
+      <p:sp>
+        <p:nvSpPr>
+          <p:cNvPr id="8" name="TextBox 7"/>
+          <p:cNvSpPr txBox="1"/>
+          <p:nvPr/>
+        </p:nvSpPr>
+        <p:spPr>
+          <a:xfrm>
+            <a:off x="11185855" y="6473952"/>
+            <a:ext cx="640080" cy="274320"/>
+          </a:xfrm>
+          <a:prstGeom prst="rect">
+            <a:avLst/>
+          </a:prstGeom>
+          <a:noFill/>
+        </p:spPr>
+        <p:txBody>
+          <a:bodyPr wrap="square">
+            <a:spAutoFit/>
+          </a:bodyPr>
+          <a:lstStyle/>
+          <a:p>
+            <a:pPr algn="r"/>
+            <a:r>
+              <a:rPr sz="1100" b="0" i="0">
+                <a:solidFill>
+                  <a:srgbClr val="666666"/>
+                </a:solidFill>
+                <a:latin typeface="Calibri"/>
+              </a:rPr>
+              <a:t>15</a:t>
+            </a:r>
+          </a:p>
+        </p:txBody>
+      </p:sp>
+    </p:spTree>
+  </p:cSld>
+  <p:clrMapOvr>
+    <a:masterClrMapping/>
+  </p:clrMapOvr>
+</p:sld>
+</file>
+
+<file path=ppt/slides/slide16.xml><?xml version="1.0" encoding="utf-8"?>
+<p:sld xmlns:a="http://schemas.openxmlformats.org/drawingml/2006/main" xmlns:p="http://schemas.openxmlformats.org/presentationml/2006/main" xmlns:r="http://schemas.openxmlformats.org/officeDocument/2006/relationships">
+  <p:cSld>
+    <p:bg>
+      <p:bgPr>
+        <a:solidFill>
+          <a:srgbClr val="FFFFFF"/>
+        </a:solidFill>
+        <a:effectLst/>
+      </p:bgPr>
+    </p:bg>
+    <p:spTree>
+      <p:nvGrpSpPr>
+        <p:cNvPr id="1" name=""/>
+        <p:cNvGrpSpPr/>
+        <p:nvPr/>
+      </p:nvGrpSpPr>
+      <p:grpSpPr/>
+      <p:sp>
+        <p:nvSpPr>
+          <p:cNvPr id="2" name="Rectangle 1"/>
+          <p:cNvSpPr/>
+          <p:nvPr/>
+        </p:nvSpPr>
+        <p:spPr>
+          <a:xfrm>
+            <a:off x="0" y="0"/>
+            <a:ext cx="12191695" cy="960120"/>
+          </a:xfrm>
+          <a:prstGeom prst="rect">
+            <a:avLst/>
+          </a:prstGeom>
+          <a:solidFill>
+            <a:srgbClr val="095292"/>
+          </a:solidFill>
+          <a:ln>
+            <a:noFill/>
+          </a:ln>
+        </p:spPr>
+        <p:style>
+          <a:lnRef idx="1">
+            <a:schemeClr val="accent1"/>
+          </a:lnRef>
+          <a:fillRef idx="3">
+            <a:schemeClr val="accent1"/>
+          </a:fillRef>
+          <a:effectRef idx="2">
+            <a:schemeClr val="accent1"/>
+          </a:effectRef>
+          <a:fontRef idx="minor">
+            <a:schemeClr val="lt1"/>
+          </a:fontRef>
+        </p:style>
+        <p:txBody>
+          <a:bodyPr rtlCol="0" anchor="ctr"/>
+          <a:lstStyle/>
+          <a:p>
+            <a:pPr algn="ctr"/>
+          </a:p>
+        </p:txBody>
+      </p:sp>
+      <p:sp>
+        <p:nvSpPr>
+          <p:cNvPr id="3" name="Rectangle 2"/>
+          <p:cNvSpPr/>
+          <p:nvPr/>
+        </p:nvSpPr>
+        <p:spPr>
+          <a:xfrm>
+            <a:off x="0" y="960120"/>
+            <a:ext cx="12191695" cy="41148"/>
+          </a:xfrm>
+          <a:prstGeom prst="rect">
+            <a:avLst/>
+          </a:prstGeom>
+          <a:solidFill>
+            <a:srgbClr val="FFD000"/>
+          </a:solidFill>
+          <a:ln>
+            <a:noFill/>
+          </a:ln>
+        </p:spPr>
+        <p:style>
+          <a:lnRef idx="1">
+            <a:schemeClr val="accent1"/>
+          </a:lnRef>
+          <a:fillRef idx="3">
+            <a:schemeClr val="accent1"/>
+          </a:fillRef>
+          <a:effectRef idx="2">
+            <a:schemeClr val="accent1"/>
+          </a:effectRef>
+          <a:fontRef idx="minor">
+            <a:schemeClr val="lt1"/>
+          </a:fontRef>
+        </p:style>
+        <p:txBody>
+          <a:bodyPr rtlCol="0" anchor="ctr"/>
+          <a:lstStyle/>
+          <a:p>
+            <a:pPr algn="ctr"/>
+          </a:p>
+        </p:txBody>
+      </p:sp>
+      <p:sp>
+        <p:nvSpPr>
+          <p:cNvPr id="4" name="TextBox 3"/>
+          <p:cNvSpPr txBox="1"/>
+          <p:nvPr/>
+        </p:nvSpPr>
+        <p:spPr>
+          <a:xfrm>
+            <a:off x="457200" y="164592"/>
+            <a:ext cx="11277295" cy="502920"/>
+          </a:xfrm>
+          <a:prstGeom prst="rect">
+            <a:avLst/>
+          </a:prstGeom>
+          <a:noFill/>
+        </p:spPr>
+        <p:txBody>
+          <a:bodyPr wrap="square">
+            <a:spAutoFit/>
+          </a:bodyPr>
+          <a:lstStyle/>
+          <a:p>
+            <a:r>
+              <a:rPr sz="2600" b="1" i="0">
+                <a:solidFill>
+                  <a:srgbClr val="FFFFFF"/>
+                </a:solidFill>
+                <a:latin typeface="Calibri"/>
+              </a:rPr>
+              <a:t>Recorrer una peticion de la app de punta a punta</a:t>
+            </a:r>
+          </a:p>
+        </p:txBody>
+      </p:sp>
+      <p:sp>
+        <p:nvSpPr>
+          <p:cNvPr id="5" name="Rounded Rectangle 4"/>
+          <p:cNvSpPr/>
+          <p:nvPr/>
+        </p:nvSpPr>
+        <p:spPr>
+          <a:xfrm>
+            <a:off x="5803166" y="1188719"/>
+            <a:ext cx="5998464" cy="4828032"/>
+          </a:xfrm>
+          <a:prstGeom prst="roundRect">
+            <a:avLst>
+              <a:gd name="adj" fmla="val 4000"/>
+            </a:avLst>
+          </a:prstGeom>
+          <a:solidFill>
+            <a:srgbClr val="E8EEF4"/>
+          </a:solidFill>
+          <a:ln>
+            <a:noFill/>
+          </a:ln>
+        </p:spPr>
+        <p:style>
+          <a:lnRef idx="1">
+            <a:schemeClr val="accent1"/>
+          </a:lnRef>
+          <a:fillRef idx="3">
+            <a:schemeClr val="accent1"/>
+          </a:fillRef>
+          <a:effectRef idx="2">
+            <a:schemeClr val="accent1"/>
+          </a:effectRef>
+          <a:fontRef idx="minor">
+            <a:schemeClr val="lt1"/>
+          </a:fontRef>
+        </p:style>
+        <p:txBody>
+          <a:bodyPr rtlCol="0" anchor="ctr"/>
+          <a:lstStyle/>
+          <a:p>
+            <a:pPr algn="ctr"/>
+          </a:p>
+        </p:txBody>
+      </p:sp>
+      <p:pic>
+        <p:nvPicPr>
+          <p:cNvPr id="6" name="Picture 5" descr="peticion-punta-a-punta-paso1.png"/>
+          <p:cNvPicPr>
+            <a:picLocks noChangeAspect="1"/>
+          </p:cNvPicPr>
+          <p:nvPr/>
+        </p:nvPicPr>
+        <p:blipFill>
+          <a:blip r:embed="rId2"/>
+          <a:stretch>
+            <a:fillRect/>
+          </a:stretch>
+        </p:blipFill>
+        <p:spPr>
+          <a:xfrm>
+            <a:off x="5876318" y="1261872"/>
+            <a:ext cx="5852160" cy="4681728"/>
+          </a:xfrm>
+          <a:prstGeom prst="rect">
+            <a:avLst/>
+          </a:prstGeom>
+        </p:spPr>
+      </p:pic>
+      <p:pic>
+        <p:nvPicPr>
+          <p:cNvPr id="7" name="Picture 6" descr="peticion-punta-a-punta-paso2.png"/>
+          <p:cNvPicPr>
+            <a:picLocks noChangeAspect="1"/>
+          </p:cNvPicPr>
+          <p:nvPr/>
+        </p:nvPicPr>
+        <p:blipFill>
+          <a:blip r:embed="rId3"/>
+          <a:stretch>
+            <a:fillRect/>
+          </a:stretch>
+        </p:blipFill>
+        <p:spPr>
+          <a:xfrm>
+            <a:off x="5876318" y="1261872"/>
+            <a:ext cx="5852160" cy="4681728"/>
+          </a:xfrm>
+          <a:prstGeom prst="rect">
+            <a:avLst/>
+          </a:prstGeom>
+        </p:spPr>
+      </p:pic>
+      <p:pic>
+        <p:nvPicPr>
+          <p:cNvPr id="8" name="Picture 7" descr="peticion-punta-a-punta-paso3.png"/>
+          <p:cNvPicPr>
+            <a:picLocks noChangeAspect="1"/>
+          </p:cNvPicPr>
+          <p:nvPr/>
+        </p:nvPicPr>
+        <p:blipFill>
+          <a:blip r:embed="rId4"/>
+          <a:stretch>
+            <a:fillRect/>
+          </a:stretch>
+        </p:blipFill>
+        <p:spPr>
+          <a:xfrm>
+            <a:off x="5876318" y="1261872"/>
+            <a:ext cx="5852160" cy="4681728"/>
+          </a:xfrm>
+          <a:prstGeom prst="rect">
+            <a:avLst/>
+          </a:prstGeom>
+        </p:spPr>
+      </p:pic>
+      <p:pic>
+        <p:nvPicPr>
+          <p:cNvPr id="9" name="Picture 8" descr="peticion-punta-a-punta-paso4.png"/>
+          <p:cNvPicPr>
+            <a:picLocks noChangeAspect="1"/>
+          </p:cNvPicPr>
+          <p:nvPr/>
+        </p:nvPicPr>
+        <p:blipFill>
+          <a:blip r:embed="rId5"/>
+          <a:stretch>
+            <a:fillRect/>
+          </a:stretch>
+        </p:blipFill>
+        <p:spPr>
+          <a:xfrm>
+            <a:off x="5876318" y="1261872"/>
+            <a:ext cx="5852160" cy="4681728"/>
+          </a:xfrm>
+          <a:prstGeom prst="rect">
+            <a:avLst/>
+          </a:prstGeom>
+        </p:spPr>
+      </p:pic>
+      <p:pic>
+        <p:nvPicPr>
+          <p:cNvPr id="10" name="Picture 9" descr="peticion-punta-a-punta-paso5.png"/>
+          <p:cNvPicPr>
+            <a:picLocks noChangeAspect="1"/>
+          </p:cNvPicPr>
+          <p:nvPr/>
+        </p:nvPicPr>
+        <p:blipFill>
+          <a:blip r:embed="rId6"/>
+          <a:stretch>
+            <a:fillRect/>
+          </a:stretch>
+        </p:blipFill>
+        <p:spPr>
+          <a:xfrm>
+            <a:off x="5876318" y="1261872"/>
+            <a:ext cx="5852160" cy="4681728"/>
+          </a:xfrm>
+          <a:prstGeom prst="rect">
+            <a:avLst/>
+          </a:prstGeom>
+        </p:spPr>
+      </p:pic>
+      <p:sp>
+        <p:nvSpPr>
+          <p:cNvPr id="23" name="TextBox 22"/>
+          <p:cNvSpPr txBox="1"/>
+          <p:nvPr/>
+        </p:nvSpPr>
+        <p:spPr>
+          <a:xfrm>
+            <a:off x="5870301" y="5961888"/>
+            <a:ext cx="5864193" cy="320040"/>
+          </a:xfrm>
+          <a:prstGeom prst="rect">
+            <a:avLst/>
+          </a:prstGeom>
+          <a:noFill/>
+        </p:spPr>
+        <p:txBody>
+          <a:bodyPr wrap="square">
+            <a:spAutoFit/>
+          </a:bodyPr>
+          <a:lstStyle/>
+          <a:p>
+            <a:pPr algn="ctr"/>
+            <a:r>
+              <a:rPr sz="1100" b="0" i="1">
+                <a:solidFill>
+                  <a:srgbClr val="666666"/>
+                </a:solidFill>
+                <a:latin typeface="Calibri"/>
+              </a:rPr>
+              <a:t>Clic para avanzar la animación</a:t>
+            </a:r>
+          </a:p>
+        </p:txBody>
+      </p:sp>
+      <p:sp>
+        <p:nvSpPr>
+          <p:cNvPr id="24" name="TextBox 23"/>
+          <p:cNvSpPr txBox="1"/>
+          <p:nvPr/>
+        </p:nvSpPr>
+        <p:spPr>
+          <a:xfrm>
+            <a:off x="457200" y="1353312"/>
+            <a:ext cx="5093061" cy="5047488"/>
+          </a:xfrm>
+          <a:prstGeom prst="rect">
+            <a:avLst/>
+          </a:prstGeom>
+          <a:noFill/>
+        </p:spPr>
+        <p:txBody>
+          <a:bodyPr wrap="square">
+            <a:spAutoFit/>
+          </a:bodyPr>
+          <a:lstStyle/>
+          <a:p>
+            <a:pPr>
+              <a:spcAft>
+                <a:spcPts val="800"/>
+              </a:spcAft>
+            </a:pPr>
+            <a:r>
+              <a:rPr sz="2000" b="0" i="0">
+                <a:solidFill>
+                  <a:srgbClr val="333333"/>
+                </a:solidFill>
+                <a:latin typeface="Calibri"/>
+              </a:rPr>
+              <a:t>–   El recorrido completo tiene 4 saltos: DNS, balanceador en la zona publica, API en la zona privada y base de datos en la zona de datos.</a:t>
+            </a:r>
+          </a:p>
+          <a:p>
+            <a:pPr>
+              <a:spcAft>
+                <a:spcPts val="800"/>
+              </a:spcAft>
+            </a:pPr>
+            <a:r>
+              <a:rPr sz="2000" b="0" i="0">
+                <a:solidFill>
+                  <a:srgbClr val="333333"/>
+                </a:solidFill>
+                <a:latin typeface="Calibri"/>
+              </a:rPr>
+              <a:t>–   Cada salto de red dentro de un mismo centro de datos suma del orden de 1 milisegundo, y por eso un diseno que encadena servicios innecesarios es…</a:t>
+            </a:r>
+          </a:p>
+        </p:txBody>
+      </p:sp>
+      <p:sp>
+        <p:nvSpPr>
+          <p:cNvPr id="25" name="TextBox 24"/>
+          <p:cNvSpPr txBox="1"/>
+          <p:nvPr/>
+        </p:nvSpPr>
+        <p:spPr>
+          <a:xfrm>
+            <a:off x="11185855" y="6473952"/>
+            <a:ext cx="640080" cy="274320"/>
+          </a:xfrm>
+          <a:prstGeom prst="rect">
+            <a:avLst/>
+          </a:prstGeom>
+          <a:noFill/>
+        </p:spPr>
+        <p:txBody>
+          <a:bodyPr wrap="square">
+            <a:spAutoFit/>
+          </a:bodyPr>
+          <a:lstStyle/>
+          <a:p>
+            <a:pPr algn="r"/>
+            <a:r>
+              <a:rPr sz="1100" b="0" i="0">
+                <a:solidFill>
+                  <a:srgbClr val="666666"/>
+                </a:solidFill>
+                <a:latin typeface="Calibri"/>
+              </a:rPr>
+              <a:t>16</a:t>
+            </a:r>
+          </a:p>
+        </p:txBody>
+      </p:sp>
+    </p:spTree>
+  </p:cSld>
+  <p:clrMapOvr>
+    <a:masterClrMapping/>
+  </p:clrMapOvr>
+  <p:timing>
+    <p:tnLst>
+      <p:par>
+        <p:cTn id="1" dur="indefinite" restart="never" nodeType="tmRoot">
+          <p:childTnLst>
+            <p:seq concurrent="1" nextAc="seek">
+              <p:cTn id="2" dur="indefinite" nodeType="mainSeq">
+                <p:childTnLst>
+                  <p:par>
+                    <p:cTn id="3" fill="hold">
+                      <p:stCondLst>
+                        <p:cond delay="indefinite"/>
+                      </p:stCondLst>
+                      <p:childTnLst>
+                        <p:par>
+                          <p:cTn id="4" fill="hold">
+                            <p:stCondLst>
+                              <p:cond delay="0"/>
+                            </p:stCondLst>
+                            <p:childTnLst>
+                              <p:par>
+                                <p:cTn id="5" presetID="10" presetClass="entr" presetSubtype="0" fill="hold" nodeType="clickEffect">
+                                  <p:stCondLst>
+                                    <p:cond delay="0"/>
+                                  </p:stCondLst>
+                                  <p:childTnLst>
+                                    <p:set>
+                                      <p:cBhvr>
+                                        <p:cTn id="6" dur="1" fill="hold">
+                                          <p:stCondLst>
+                                            <p:cond delay="0"/>
+                                          </p:stCondLst>
+                                        </p:cTn>
+                                        <p:tgtEl>
+                                          <p:spTgt spid="7"/>
+                                        </p:tgtEl>
+                                        <p:attrNameLst>
+                                          <p:attrName>style.visibility</p:attrName>
+                                        </p:attrNameLst>
+                                      </p:cBhvr>
+                                      <p:to>
+                                        <p:strVal val="visible"/>
+                                      </p:to>
+                                    </p:set>
+                                    <p:animEffect transition="in" filter="fade">
+                                      <p:cBhvr>
+                                        <p:cTn id="7" dur="450"/>
+                                        <p:tgtEl>
+                                          <p:spTgt spid="7"/>
+                                        </p:tgtEl>
+                                      </p:cBhvr>
+                                    </p:animEffect>
+                                  </p:childTnLst>
+                                </p:cTn>
+                              </p:par>
+                            </p:childTnLst>
+                          </p:cTn>
+                        </p:par>
+                      </p:childTnLst>
+                    </p:cTn>
+                  </p:par>
+                  <p:par>
+                    <p:cTn id="8" fill="hold">
+                      <p:stCondLst>
+                        <p:cond delay="indefinite"/>
+                      </p:stCondLst>
+                      <p:childTnLst>
+                        <p:par>
+                          <p:cTn id="9" fill="hold">
+                            <p:stCondLst>
+                              <p:cond delay="0"/>
+                            </p:stCondLst>
+                            <p:childTnLst>
+                              <p:par>
+                                <p:cTn id="10" presetID="10" presetClass="entr" presetSubtype="0" fill="hold" nodeType="clickEffect">
+                                  <p:stCondLst>
+                                    <p:cond delay="0"/>
+                                  </p:stCondLst>
+                                  <p:childTnLst>
+                                    <p:set>
+                                      <p:cBhvr>
+                                        <p:cTn id="11" dur="1" fill="hold">
+                                          <p:stCondLst>
+                                            <p:cond delay="0"/>
+                                          </p:stCondLst>
+                                        </p:cTn>
+                                        <p:tgtEl>
+                                          <p:spTgt spid="8"/>
+                                        </p:tgtEl>
+                                        <p:attrNameLst>
+                                          <p:attrName>style.visibility</p:attrName>
+                                        </p:attrNameLst>
+                                      </p:cBhvr>
+                                      <p:to>
+                                        <p:strVal val="visible"/>
+                                      </p:to>
+                                    </p:set>
+                                    <p:animEffect transition="in" filter="fade">
+                                      <p:cBhvr>
+                                        <p:cTn id="12" dur="450"/>
+                                        <p:tgtEl>
+                                          <p:spTgt spid="8"/>
+                                        </p:tgtEl>
+                                      </p:cBhvr>
+                                    </p:animEffect>
+                                  </p:childTnLst>
+                                </p:cTn>
+                              </p:par>
+                            </p:childTnLst>
+                          </p:cTn>
+                        </p:par>
+                      </p:childTnLst>
+                    </p:cTn>
+                  </p:par>
+                  <p:par>
+                    <p:cTn id="13" fill="hold">
+                      <p:stCondLst>
+                        <p:cond delay="indefinite"/>
+                      </p:stCondLst>
+                      <p:childTnLst>
+                        <p:par>
+                          <p:cTn id="14" fill="hold">
+                            <p:stCondLst>
+                              <p:cond delay="0"/>
+                            </p:stCondLst>
+                            <p:childTnLst>
+                              <p:par>
+                                <p:cTn id="15" presetID="10" presetClass="entr" presetSubtype="0" fill="hold" nodeType="clickEffect">
+                                  <p:stCondLst>
+                                    <p:cond delay="0"/>
+                                  </p:stCondLst>
+                                  <p:childTnLst>
+                                    <p:set>
+                                      <p:cBhvr>
+                                        <p:cTn id="16" dur="1" fill="hold">
+                                          <p:stCondLst>
+                                            <p:cond delay="0"/>
+                                          </p:stCondLst>
+                                        </p:cTn>
+                                        <p:tgtEl>
+                                          <p:spTgt spid="9"/>
+                                        </p:tgtEl>
+                                        <p:attrNameLst>
+                                          <p:attrName>style.visibility</p:attrName>
+                                        </p:attrNameLst>
+                                      </p:cBhvr>
+                                      <p:to>
+                                        <p:strVal val="visible"/>
+                                      </p:to>
+                                    </p:set>
+                                    <p:animEffect transition="in" filter="fade">
+                                      <p:cBhvr>
+                                        <p:cTn id="17" dur="450"/>
+                                        <p:tgtEl>
+                                          <p:spTgt spid="9"/>
+                                        </p:tgtEl>
+                                      </p:cBhvr>
+                                    </p:animEffect>
+                                  </p:childTnLst>
+                                </p:cTn>
+                              </p:par>
+                            </p:childTnLst>
+                          </p:cTn>
+                        </p:par>
+                      </p:childTnLst>
+                    </p:cTn>
+                  </p:par>
+                  <p:par>
+                    <p:cTn id="18" fill="hold">
+                      <p:stCondLst>
+                        <p:cond delay="indefinite"/>
+                      </p:stCondLst>
+                      <p:childTnLst>
+                        <p:par>
+                          <p:cTn id="19" fill="hold">
+                            <p:stCondLst>
+                              <p:cond delay="0"/>
+                            </p:stCondLst>
+                            <p:childTnLst>
+                              <p:par>
+                                <p:cTn id="20" presetID="10" presetClass="entr" presetSubtype="0" fill="hold" nodeType="clickEffect">
+                                  <p:stCondLst>
+                                    <p:cond delay="0"/>
+                                  </p:stCondLst>
+                                  <p:childTnLst>
+                                    <p:set>
+                                      <p:cBhvr>
+                                        <p:cTn id="21" dur="1" fill="hold">
+                                          <p:stCondLst>
+                                            <p:cond delay="0"/>
+                                          </p:stCondLst>
+                                        </p:cTn>
+                                        <p:tgtEl>
+                                          <p:spTgt spid="10"/>
+                                        </p:tgtEl>
+                                        <p:attrNameLst>
+                                          <p:attrName>style.visibility</p:attrName>
+                                        </p:attrNameLst>
+                                      </p:cBhvr>
+                                      <p:to>
+                                        <p:strVal val="visible"/>
+                                      </p:to>
+                                    </p:set>
+                                    <p:animEffect transition="in" filter="fade">
+                                      <p:cBhvr>
+                                        <p:cTn id="22" dur="450"/>
+                                        <p:tgtEl>
+                                          <p:spTgt spid="10"/>
+                                        </p:tgtEl>
+                                      </p:cBhvr>
+                                    </p:animEffect>
+                                  </p:childTnLst>
+                                </p:cTn>
+                              </p:par>
+                            </p:childTnLst>
+                          </p:cTn>
+                        </p:par>
+                      </p:childTnLst>
+                    </p:cTn>
+                  </p:par>
+                </p:childTnLst>
+              </p:cTn>
+              <p:prevCondLst>
+                <p:cond evt="onPrev" delay="0">
+                  <p:tgtEl>
+                    <p:sldTgt/>
+                  </p:tgtEl>
+                </p:cond>
+              </p:prevCondLst>
+              <p:nextCondLst>
+                <p:cond evt="onNext" delay="0">
+                  <p:tgtEl>
+                    <p:sldTgt/>
+                  </p:tgtEl>
+                </p:cond>
+              </p:nextCondLst>
+            </p:seq>
+          </p:childTnLst>
+        </p:cTn>
+      </p:par>
+    </p:tnLst>
+  </p:timing>
+</p:sld>
+</file>
+
 <file path=ppt/slides/slide17.xml><?xml version="1.0" encoding="utf-8"?>
 <p:sld xmlns:a="http://schemas.openxmlformats.org/drawingml/2006/main" xmlns:p="http://schemas.openxmlformats.org/presentationml/2006/main" xmlns:r="http://schemas.openxmlformats.org/officeDocument/2006/relationships">
   <p:cSld>
@@ -8973,14 +9533,83 @@
       </p:sp>
       <p:sp>
         <p:nvSpPr>
-          <p:cNvPr id="5" name="TextBox 4"/>
+          <p:cNvPr id="5" name="Rounded Rectangle 4"/>
+          <p:cNvSpPr/>
+          <p:nvPr/>
+        </p:nvSpPr>
+        <p:spPr>
+          <a:xfrm>
+            <a:off x="5797149" y="1343926"/>
+            <a:ext cx="6010497" cy="4837658"/>
+          </a:xfrm>
+          <a:prstGeom prst="roundRect">
+            <a:avLst>
+              <a:gd name="adj" fmla="val 4000"/>
+            </a:avLst>
+          </a:prstGeom>
+          <a:solidFill>
+            <a:srgbClr val="E8EEF4"/>
+          </a:solidFill>
+          <a:ln>
+            <a:noFill/>
+          </a:ln>
+        </p:spPr>
+        <p:style>
+          <a:lnRef idx="1">
+            <a:schemeClr val="accent1"/>
+          </a:lnRef>
+          <a:fillRef idx="3">
+            <a:schemeClr val="accent1"/>
+          </a:fillRef>
+          <a:effectRef idx="2">
+            <a:schemeClr val="accent1"/>
+          </a:effectRef>
+          <a:fontRef idx="minor">
+            <a:schemeClr val="lt1"/>
+          </a:fontRef>
+        </p:style>
+        <p:txBody>
+          <a:bodyPr rtlCol="0" anchor="ctr"/>
+          <a:lstStyle/>
+          <a:p>
+            <a:pPr algn="ctr"/>
+          </a:p>
+        </p:txBody>
+      </p:sp>
+      <p:pic>
+        <p:nvPicPr>
+          <p:cNvPr id="6" name="Picture 5" descr="ilus-molde-mermaid-paso1.png"/>
+          <p:cNvPicPr>
+            <a:picLocks noChangeAspect="1"/>
+          </p:cNvPicPr>
+          <p:nvPr/>
+        </p:nvPicPr>
+        <p:blipFill>
+          <a:blip r:embed="rId2"/>
+          <a:stretch>
+            <a:fillRect/>
+          </a:stretch>
+        </p:blipFill>
+        <p:spPr>
+          <a:xfrm>
+            <a:off x="5870301" y="1417078"/>
+            <a:ext cx="5864193" cy="4691354"/>
+          </a:xfrm>
+          <a:prstGeom prst="rect">
+            <a:avLst/>
+          </a:prstGeom>
+        </p:spPr>
+      </p:pic>
+      <p:sp>
+        <p:nvSpPr>
+          <p:cNvPr id="7" name="TextBox 6"/>
           <p:cNvSpPr txBox="1"/>
           <p:nvPr/>
         </p:nvSpPr>
         <p:spPr>
           <a:xfrm>
-            <a:off x="457200" y="1170432"/>
-            <a:ext cx="11277295" cy="5230368"/>
+            <a:off x="457200" y="1353312"/>
+            <a:ext cx="5093061" cy="5047488"/>
           </a:xfrm>
           <a:prstGeom prst="rect">
             <a:avLst/>
@@ -9060,7 +9689,7 @@
       </p:sp>
       <p:sp>
         <p:nvSpPr>
-          <p:cNvPr id="6" name="TextBox 5"/>
+          <p:cNvPr id="8" name="TextBox 7"/>
           <p:cNvSpPr txBox="1"/>
           <p:nvPr/>
         </p:nvSpPr>
@@ -13635,14 +14264,83 @@
       </p:sp>
       <p:sp>
         <p:nvSpPr>
-          <p:cNvPr id="5" name="TextBox 4"/>
+          <p:cNvPr id="5" name="Rounded Rectangle 4"/>
+          <p:cNvSpPr/>
+          <p:nvPr/>
+        </p:nvSpPr>
+        <p:spPr>
+          <a:xfrm>
+            <a:off x="5797149" y="1343926"/>
+            <a:ext cx="6010497" cy="4837658"/>
+          </a:xfrm>
+          <a:prstGeom prst="roundRect">
+            <a:avLst>
+              <a:gd name="adj" fmla="val 4000"/>
+            </a:avLst>
+          </a:prstGeom>
+          <a:solidFill>
+            <a:srgbClr val="E8EEF4"/>
+          </a:solidFill>
+          <a:ln>
+            <a:noFill/>
+          </a:ln>
+        </p:spPr>
+        <p:style>
+          <a:lnRef idx="1">
+            <a:schemeClr val="accent1"/>
+          </a:lnRef>
+          <a:fillRef idx="3">
+            <a:schemeClr val="accent1"/>
+          </a:fillRef>
+          <a:effectRef idx="2">
+            <a:schemeClr val="accent1"/>
+          </a:effectRef>
+          <a:fontRef idx="minor">
+            <a:schemeClr val="lt1"/>
+          </a:fontRef>
+        </p:style>
+        <p:txBody>
+          <a:bodyPr rtlCol="0" anchor="ctr"/>
+          <a:lstStyle/>
+          <a:p>
+            <a:pPr algn="ctr"/>
+          </a:p>
+        </p:txBody>
+      </p:sp>
+      <p:pic>
+        <p:nvPicPr>
+          <p:cNvPr id="6" name="Picture 5" descr="ilus-tres-zonas-paso1.png"/>
+          <p:cNvPicPr>
+            <a:picLocks noChangeAspect="1"/>
+          </p:cNvPicPr>
+          <p:nvPr/>
+        </p:nvPicPr>
+        <p:blipFill>
+          <a:blip r:embed="rId2"/>
+          <a:stretch>
+            <a:fillRect/>
+          </a:stretch>
+        </p:blipFill>
+        <p:spPr>
+          <a:xfrm>
+            <a:off x="5870301" y="1417078"/>
+            <a:ext cx="5864193" cy="4691354"/>
+          </a:xfrm>
+          <a:prstGeom prst="rect">
+            <a:avLst/>
+          </a:prstGeom>
+        </p:spPr>
+      </p:pic>
+      <p:sp>
+        <p:nvSpPr>
+          <p:cNvPr id="7" name="TextBox 6"/>
           <p:cNvSpPr txBox="1"/>
           <p:nvPr/>
         </p:nvSpPr>
         <p:spPr>
           <a:xfrm>
-            <a:off x="457200" y="1170432"/>
-            <a:ext cx="11277295" cy="5230368"/>
+            <a:off x="457200" y="1353312"/>
+            <a:ext cx="5093061" cy="5047488"/>
           </a:xfrm>
           <a:prstGeom prst="rect">
             <a:avLst/>
@@ -13790,27 +14488,11 @@
               <a:t>.</a:t>
             </a:r>
           </a:p>
-          <a:p>
-            <a:pPr>
-              <a:spcAft>
-                <a:spcPts val="800"/>
-              </a:spcAft>
-            </a:pPr>
-            <a:r>
-              <a:rPr sz="2000" b="0" i="0">
-                <a:solidFill>
-                  <a:srgbClr val="333333"/>
-                </a:solidFill>
-                <a:latin typeface="Calibri"/>
-              </a:rPr>
-              <a:t>–   Pública: balanceador y web estática · Privada: la API · Datos: la base, que solo acepta conexiones desde la API.</a:t>
-            </a:r>
-          </a:p>
-        </p:txBody>
-      </p:sp>
-      <p:sp>
-        <p:nvSpPr>
-          <p:cNvPr id="6" name="TextBox 5"/>
+        </p:txBody>
+      </p:sp>
+      <p:sp>
+        <p:nvSpPr>
+          <p:cNvPr id="8" name="TextBox 7"/>
           <p:cNvSpPr txBox="1"/>
           <p:nvPr/>
         </p:nvSpPr>

--- a/Arquitectura de Sistemas Computacionales/Clases/Clase 7 - Redes y almacenamiento cloud/Presentacion.pptx
+++ b/Arquitectura de Sistemas Computacionales/Clases/Clase 7 - Redes y almacenamiento cloud/Presentacion.pptx
@@ -6537,7 +6537,7 @@
         <p:spPr>
           <a:xfrm>
             <a:off x="457200" y="1261872"/>
-            <a:ext cx="11277295" cy="4068325"/>
+            <a:ext cx="6991923" cy="2532221"/>
           </a:xfrm>
           <a:prstGeom prst="roundRect">
             <a:avLst>
@@ -6582,7 +6582,7 @@
         <p:spPr>
           <a:xfrm>
             <a:off x="457200" y="1261872"/>
-            <a:ext cx="11277295" cy="365760"/>
+            <a:ext cx="6991923" cy="365760"/>
           </a:xfrm>
           <a:prstGeom prst="rect">
             <a:avLst/>
@@ -6754,7 +6754,7 @@
         <p:spPr>
           <a:xfrm>
             <a:off x="1371600" y="1298448"/>
-            <a:ext cx="10180015" cy="292608"/>
+            <a:ext cx="5894643" cy="292608"/>
           </a:xfrm>
           <a:prstGeom prst="rect">
             <a:avLst/>
@@ -6786,8 +6786,8 @@
         </p:nvSpPr>
         <p:spPr>
           <a:xfrm>
-            <a:off x="1188720" y="1719072"/>
-            <a:ext cx="10271455" cy="3473965"/>
+            <a:off x="685800" y="1719072"/>
+            <a:ext cx="502920" cy="1937861"/>
           </a:xfrm>
           <a:prstGeom prst="rect">
             <a:avLst/>
@@ -6800,13 +6800,164 @@
           </a:bodyPr>
           <a:lstStyle/>
           <a:p>
+            <a:pPr algn="r">
+              <a:spcAft>
+                <a:spcPts val="257"/>
+              </a:spcAft>
+            </a:pPr>
+            <a:r>
+              <a:rPr sz="1200" i="0" b="0">
+                <a:solidFill>
+                  <a:srgbClr val="858585"/>
+                </a:solidFill>
+                <a:latin typeface="Consolas"/>
+              </a:rPr>
+              <a:t>1</a:t>
+            </a:r>
+          </a:p>
+          <a:p>
+            <a:pPr algn="r">
+              <a:spcAft>
+                <a:spcPts val="257"/>
+              </a:spcAft>
+            </a:pPr>
+            <a:r>
+              <a:rPr sz="1200" i="0" b="0">
+                <a:solidFill>
+                  <a:srgbClr val="858585"/>
+                </a:solidFill>
+                <a:latin typeface="Consolas"/>
+              </a:rPr>
+              <a:t>2</a:t>
+            </a:r>
+          </a:p>
+          <a:p>
+            <a:pPr algn="r">
+              <a:spcAft>
+                <a:spcPts val="257"/>
+              </a:spcAft>
+            </a:pPr>
+            <a:r>
+              <a:rPr sz="1200" i="0" b="0">
+                <a:solidFill>
+                  <a:srgbClr val="858585"/>
+                </a:solidFill>
+                <a:latin typeface="Consolas"/>
+              </a:rPr>
+              <a:t>3</a:t>
+            </a:r>
+          </a:p>
+          <a:p>
+            <a:pPr algn="r">
+              <a:spcAft>
+                <a:spcPts val="257"/>
+              </a:spcAft>
+            </a:pPr>
+            <a:r>
+              <a:rPr sz="1200" i="0" b="0">
+                <a:solidFill>
+                  <a:srgbClr val="858585"/>
+                </a:solidFill>
+                <a:latin typeface="Consolas"/>
+              </a:rPr>
+              <a:t>4</a:t>
+            </a:r>
+          </a:p>
+          <a:p>
+            <a:pPr algn="r">
+              <a:spcAft>
+                <a:spcPts val="257"/>
+              </a:spcAft>
+            </a:pPr>
+            <a:r>
+              <a:rPr sz="1200" i="0" b="0">
+                <a:solidFill>
+                  <a:srgbClr val="858585"/>
+                </a:solidFill>
+                <a:latin typeface="Consolas"/>
+              </a:rPr>
+              <a:t>5</a:t>
+            </a:r>
+          </a:p>
+          <a:p>
+            <a:pPr algn="r">
+              <a:spcAft>
+                <a:spcPts val="257"/>
+              </a:spcAft>
+            </a:pPr>
+            <a:r>
+              <a:rPr sz="1200" i="0" b="0">
+                <a:solidFill>
+                  <a:srgbClr val="858585"/>
+                </a:solidFill>
+                <a:latin typeface="Consolas"/>
+              </a:rPr>
+              <a:t>6</a:t>
+            </a:r>
+          </a:p>
+          <a:p>
+            <a:pPr algn="r">
+              <a:spcAft>
+                <a:spcPts val="257"/>
+              </a:spcAft>
+            </a:pPr>
+            <a:r>
+              <a:rPr sz="1200" i="0" b="0">
+                <a:solidFill>
+                  <a:srgbClr val="858585"/>
+                </a:solidFill>
+                <a:latin typeface="Consolas"/>
+              </a:rPr>
+              <a:t>7</a:t>
+            </a:r>
+          </a:p>
+          <a:p>
+            <a:pPr algn="r">
+              <a:spcAft>
+                <a:spcPts val="257"/>
+              </a:spcAft>
+            </a:pPr>
+            <a:r>
+              <a:rPr sz="1200" i="0" b="0">
+                <a:solidFill>
+                  <a:srgbClr val="858585"/>
+                </a:solidFill>
+                <a:latin typeface="Consolas"/>
+              </a:rPr>
+              <a:t>8</a:t>
+            </a:r>
+          </a:p>
+        </p:txBody>
+      </p:sp>
+      <p:sp>
+        <p:nvSpPr>
+          <p:cNvPr id="12" name="TextBox 11"/>
+          <p:cNvSpPr txBox="1"/>
+          <p:nvPr/>
+        </p:nvSpPr>
+        <p:spPr>
+          <a:xfrm>
+            <a:off x="1188720" y="1719072"/>
+            <a:ext cx="5986083" cy="1937861"/>
+          </a:xfrm>
+          <a:prstGeom prst="rect">
+            <a:avLst/>
+          </a:prstGeom>
+          <a:noFill/>
+        </p:spPr>
+        <p:txBody>
+          <a:bodyPr wrap="square">
+            <a:spAutoFit/>
+          </a:bodyPr>
+          <a:lstStyle/>
+          <a:p>
             <a:pPr>
               <a:spcAft>
-                <a:spcPts val="428"/>
+                <a:spcPts val="257"/>
               </a:spcAft>
             </a:pPr>
             <a:r>
-              <a:rPr sz="2000" i="0" b="0">
+              <a:rPr sz="1200" i="0" b="0">
                 <a:solidFill>
                   <a:srgbClr val="D4D4D4"/>
                 </a:solidFill>
@@ -6815,7 +6966,7 @@
               <a:t>flowchart</a:t>
             </a:r>
             <a:r>
-              <a:rPr sz="2000" i="0" b="0">
+              <a:rPr sz="1200" i="0" b="0">
                 <a:solidFill>
                   <a:srgbClr val="D4D4D4"/>
                 </a:solidFill>
@@ -6824,7 +6975,7 @@
               <a:t> </a:t>
             </a:r>
             <a:r>
-              <a:rPr sz="2000" i="0" b="0">
+              <a:rPr sz="1200" i="0" b="0">
                 <a:solidFill>
                   <a:srgbClr val="D4D4D4"/>
                 </a:solidFill>
@@ -6836,11 +6987,11 @@
           <a:p>
             <a:pPr>
               <a:spcAft>
-                <a:spcPts val="428"/>
+                <a:spcPts val="257"/>
               </a:spcAft>
             </a:pPr>
             <a:r>
-              <a:rPr sz="2000" i="0" b="0">
+              <a:rPr sz="1200" i="0" b="0">
                 <a:solidFill>
                   <a:srgbClr val="D4D4D4"/>
                 </a:solidFill>
@@ -6849,23 +7000,50 @@
               <a:t>  </a:t>
             </a:r>
             <a:r>
-              <a:rPr sz="2000" i="1" b="0">
-                <a:solidFill>
-                  <a:srgbClr val="6A9955"/>
+              <a:rPr sz="1200" i="0" b="0">
+                <a:solidFill>
+                  <a:srgbClr val="D4D4D4"/>
                 </a:solidFill>
                 <a:latin typeface="Consolas"/>
               </a:rPr>
-              <a:t>%% La pregunta que decide: si esta instancia desaparece ahora, que dato se pierde?</a:t>
+              <a:t>api</a:t>
+            </a:r>
+            <a:r>
+              <a:rPr sz="1200" i="0" b="0">
+                <a:solidFill>
+                  <a:srgbClr val="D4D4D4"/>
+                </a:solidFill>
+                <a:latin typeface="Consolas"/>
+              </a:rPr>
+              <a:t>[</a:t>
+            </a:r>
+            <a:r>
+              <a:rPr sz="1200" i="0" b="0">
+                <a:solidFill>
+                  <a:srgbClr val="CE9178"/>
+                </a:solidFill>
+                <a:latin typeface="Consolas"/>
+              </a:rPr>
+              <a:t>"API - instancia"</a:t>
+            </a:r>
+            <a:r>
+              <a:rPr sz="1200" i="0" b="0">
+                <a:solidFill>
+                  <a:srgbClr val="D4D4D4"/>
+                </a:solidFill>
+                <a:latin typeface="Consolas"/>
+              </a:rPr>
+              <a:t>]</a:t>
             </a:r>
           </a:p>
           <a:p>
             <a:pPr>
               <a:spcAft>
-                <a:spcPts val="428"/>
+                <a:spcPts val="257"/>
               </a:spcAft>
             </a:pPr>
             <a:r>
-              <a:rPr sz="2000" i="0" b="0">
+              <a:rPr sz="1200" i="0" b="0">
                 <a:solidFill>
                   <a:srgbClr val="D4D4D4"/>
                 </a:solidFill>
@@ -6874,50 +7052,50 @@
               <a:t>  </a:t>
             </a:r>
             <a:r>
-              <a:rPr sz="2000" i="0" b="0">
+              <a:rPr sz="1200" i="0" b="0">
                 <a:solidFill>
                   <a:srgbClr val="D4D4D4"/>
                 </a:solidFill>
                 <a:latin typeface="Consolas"/>
               </a:rPr>
-              <a:t>api</a:t>
-            </a:r>
-            <a:r>
-              <a:rPr sz="2000" i="0" b="0">
+              <a:t>bloque</a:t>
+            </a:r>
+            <a:r>
+              <a:rPr sz="1200" i="0" b="0">
                 <a:solidFill>
                   <a:srgbClr val="D4D4D4"/>
                 </a:solidFill>
                 <a:latin typeface="Consolas"/>
               </a:rPr>
-              <a:t>[</a:t>
-            </a:r>
-            <a:r>
-              <a:rPr sz="2000" i="0" b="0">
+              <a:t>[(</a:t>
+            </a:r>
+            <a:r>
+              <a:rPr sz="1200" i="0" b="0">
                 <a:solidFill>
                   <a:srgbClr val="CE9178"/>
                 </a:solidFill>
                 <a:latin typeface="Consolas"/>
               </a:rPr>
-              <a:t>"API - instancia"</a:t>
-            </a:r>
-            <a:r>
-              <a:rPr sz="2000" i="0" b="0">
+              <a:t>"Disco de bloque&lt;br/&gt;se va con la instancia"</a:t>
+            </a:r>
+            <a:r>
+              <a:rPr sz="1200" i="0" b="0">
                 <a:solidFill>
                   <a:srgbClr val="D4D4D4"/>
                 </a:solidFill>
                 <a:latin typeface="Consolas"/>
               </a:rPr>
-              <a:t>]</a:t>
+              <a:t>)]</a:t>
             </a:r>
           </a:p>
           <a:p>
             <a:pPr>
               <a:spcAft>
-                <a:spcPts val="428"/>
+                <a:spcPts val="257"/>
               </a:spcAft>
             </a:pPr>
             <a:r>
-              <a:rPr sz="2000" i="0" b="0">
+              <a:rPr sz="1200" i="0" b="0">
                 <a:solidFill>
                   <a:srgbClr val="D4D4D4"/>
                 </a:solidFill>
@@ -6926,70 +7104,34 @@
               <a:t>  </a:t>
             </a:r>
             <a:r>
-              <a:rPr sz="2000" i="0" b="0">
+              <a:rPr sz="1200" i="0" b="0">
                 <a:solidFill>
                   <a:srgbClr val="D4D4D4"/>
                 </a:solidFill>
                 <a:latin typeface="Consolas"/>
               </a:rPr>
-              <a:t>api</a:t>
-            </a:r>
-            <a:r>
-              <a:rPr sz="2000" i="0" b="0">
+              <a:t>objetos</a:t>
+            </a:r>
+            <a:r>
+              <a:rPr sz="1200" i="0" b="0">
                 <a:solidFill>
                   <a:srgbClr val="D4D4D4"/>
                 </a:solidFill>
                 <a:latin typeface="Consolas"/>
               </a:rPr>
-              <a:t> --&gt;|</a:t>
-            </a:r>
-            <a:r>
-              <a:rPr sz="2000" i="0" b="0">
+              <a:t>[(</a:t>
+            </a:r>
+            <a:r>
+              <a:rPr sz="1200" i="0" b="0">
                 <a:solidFill>
                   <a:srgbClr val="CE9178"/>
                 </a:solidFill>
                 <a:latin typeface="Consolas"/>
               </a:rPr>
-              <a:t>"cache y temporales"</a:t>
-            </a:r>
-            <a:r>
-              <a:rPr sz="2000" i="0" b="0">
-                <a:solidFill>
-                  <a:srgbClr val="D4D4D4"/>
-                </a:solidFill>
-                <a:latin typeface="Consolas"/>
-              </a:rPr>
-              <a:t>| </a:t>
-            </a:r>
-            <a:r>
-              <a:rPr sz="2000" i="0" b="0">
-                <a:solidFill>
-                  <a:srgbClr val="D4D4D4"/>
-                </a:solidFill>
-                <a:latin typeface="Consolas"/>
-              </a:rPr>
-              <a:t>bloque</a:t>
-            </a:r>
-            <a:r>
-              <a:rPr sz="2000" i="0" b="0">
-                <a:solidFill>
-                  <a:srgbClr val="D4D4D4"/>
-                </a:solidFill>
-                <a:latin typeface="Consolas"/>
-              </a:rPr>
-              <a:t>[(</a:t>
-            </a:r>
-            <a:r>
-              <a:rPr sz="2000" i="0" b="0">
-                <a:solidFill>
-                  <a:srgbClr val="CE9178"/>
-                </a:solidFill>
-                <a:latin typeface="Consolas"/>
-              </a:rPr>
-              <a:t>"Disco de bloque&lt;br/&gt;se va con la instancia"</a:t>
-            </a:r>
-            <a:r>
-              <a:rPr sz="2000" i="0" b="0">
+              <a:t>"Almacenamiento de objetos&lt;br/&gt;fotos y respaldos"</a:t>
+            </a:r>
+            <a:r>
+              <a:rPr sz="1200" i="0" b="0">
                 <a:solidFill>
                   <a:srgbClr val="D4D4D4"/>
                 </a:solidFill>
@@ -7001,11 +7143,11 @@
           <a:p>
             <a:pPr>
               <a:spcAft>
-                <a:spcPts val="428"/>
+                <a:spcPts val="257"/>
               </a:spcAft>
             </a:pPr>
             <a:r>
-              <a:rPr sz="2000" i="0" b="0">
+              <a:rPr sz="1200" i="0" b="0">
                 <a:solidFill>
                   <a:srgbClr val="D4D4D4"/>
                 </a:solidFill>
@@ -7014,70 +7156,34 @@
               <a:t>  </a:t>
             </a:r>
             <a:r>
-              <a:rPr sz="2000" i="0" b="0">
+              <a:rPr sz="1200" i="0" b="0">
                 <a:solidFill>
                   <a:srgbClr val="D4D4D4"/>
                 </a:solidFill>
                 <a:latin typeface="Consolas"/>
               </a:rPr>
-              <a:t>api</a:t>
-            </a:r>
-            <a:r>
-              <a:rPr sz="2000" i="0" b="0">
+              <a:t>bd</a:t>
+            </a:r>
+            <a:r>
+              <a:rPr sz="1200" i="0" b="0">
                 <a:solidFill>
                   <a:srgbClr val="D4D4D4"/>
                 </a:solidFill>
                 <a:latin typeface="Consolas"/>
               </a:rPr>
-              <a:t> --&gt;|</a:t>
-            </a:r>
-            <a:r>
-              <a:rPr sz="2000" i="0" b="0">
+              <a:t>[(</a:t>
+            </a:r>
+            <a:r>
+              <a:rPr sz="1200" i="0" b="0">
                 <a:solidFill>
                   <a:srgbClr val="CE9178"/>
                 </a:solidFill>
                 <a:latin typeface="Consolas"/>
               </a:rPr>
-              <a:t>"HTTPS"</a:t>
-            </a:r>
-            <a:r>
-              <a:rPr sz="2000" i="0" b="0">
-                <a:solidFill>
-                  <a:srgbClr val="D4D4D4"/>
-                </a:solidFill>
-                <a:latin typeface="Consolas"/>
-              </a:rPr>
-              <a:t>| </a:t>
-            </a:r>
-            <a:r>
-              <a:rPr sz="2000" i="0" b="0">
-                <a:solidFill>
-                  <a:srgbClr val="D4D4D4"/>
-                </a:solidFill>
-                <a:latin typeface="Consolas"/>
-              </a:rPr>
-              <a:t>objetos</a:t>
-            </a:r>
-            <a:r>
-              <a:rPr sz="2000" i="0" b="0">
-                <a:solidFill>
-                  <a:srgbClr val="D4D4D4"/>
-                </a:solidFill>
-                <a:latin typeface="Consolas"/>
-              </a:rPr>
-              <a:t>[(</a:t>
-            </a:r>
-            <a:r>
-              <a:rPr sz="2000" i="0" b="0">
-                <a:solidFill>
-                  <a:srgbClr val="CE9178"/>
-                </a:solidFill>
-                <a:latin typeface="Consolas"/>
-              </a:rPr>
-              <a:t>"Almacenamiento de objetos&lt;br/&gt;fotos, adjuntos, respaldos"</a:t>
-            </a:r>
-            <a:r>
-              <a:rPr sz="2000" i="0" b="0">
+              <a:t>"Base relacional gestionada&lt;br/&gt;turnos, con respaldo"</a:t>
+            </a:r>
+            <a:r>
+              <a:rPr sz="1200" i="0" b="0">
                 <a:solidFill>
                   <a:srgbClr val="D4D4D4"/>
                 </a:solidFill>
@@ -7089,11 +7195,11 @@
           <a:p>
             <a:pPr>
               <a:spcAft>
-                <a:spcPts val="428"/>
+                <a:spcPts val="257"/>
               </a:spcAft>
             </a:pPr>
             <a:r>
-              <a:rPr sz="2000" i="0" b="0">
+              <a:rPr sz="1200" i="0" b="0">
                 <a:solidFill>
                   <a:srgbClr val="D4D4D4"/>
                 </a:solidFill>
@@ -7102,7 +7208,7 @@
               <a:t>  </a:t>
             </a:r>
             <a:r>
-              <a:rPr sz="2000" i="0" b="0">
+              <a:rPr sz="1200" i="0" b="0">
                 <a:solidFill>
                   <a:srgbClr val="D4D4D4"/>
                 </a:solidFill>
@@ -7111,7 +7217,7 @@
               <a:t>api</a:t>
             </a:r>
             <a:r>
-              <a:rPr sz="2000" i="0" b="0">
+              <a:rPr sz="1200" i="0" b="0">
                 <a:solidFill>
                   <a:srgbClr val="D4D4D4"/>
                 </a:solidFill>
@@ -7120,16 +7226,138 @@
               <a:t> --&gt;|</a:t>
             </a:r>
             <a:r>
-              <a:rPr sz="2000" i="0" b="0">
+              <a:rPr sz="1200" i="0" b="0">
                 <a:solidFill>
                   <a:srgbClr val="CE9178"/>
                 </a:solidFill>
                 <a:latin typeface="Consolas"/>
               </a:rPr>
+              <a:t>"cache y temporales"</a:t>
+            </a:r>
+            <a:r>
+              <a:rPr sz="1200" i="0" b="0">
+                <a:solidFill>
+                  <a:srgbClr val="D4D4D4"/>
+                </a:solidFill>
+                <a:latin typeface="Consolas"/>
+              </a:rPr>
+              <a:t>| </a:t>
+            </a:r>
+            <a:r>
+              <a:rPr sz="1200" i="0" b="0">
+                <a:solidFill>
+                  <a:srgbClr val="D4D4D4"/>
+                </a:solidFill>
+                <a:latin typeface="Consolas"/>
+              </a:rPr>
+              <a:t>bloque</a:t>
+            </a:r>
+          </a:p>
+          <a:p>
+            <a:pPr>
+              <a:spcAft>
+                <a:spcPts val="257"/>
+              </a:spcAft>
+            </a:pPr>
+            <a:r>
+              <a:rPr sz="1200" i="0" b="0">
+                <a:solidFill>
+                  <a:srgbClr val="D4D4D4"/>
+                </a:solidFill>
+                <a:latin typeface="Consolas"/>
+              </a:rPr>
+              <a:t>  </a:t>
+            </a:r>
+            <a:r>
+              <a:rPr sz="1200" i="0" b="0">
+                <a:solidFill>
+                  <a:srgbClr val="D4D4D4"/>
+                </a:solidFill>
+                <a:latin typeface="Consolas"/>
+              </a:rPr>
+              <a:t>api</a:t>
+            </a:r>
+            <a:r>
+              <a:rPr sz="1200" i="0" b="0">
+                <a:solidFill>
+                  <a:srgbClr val="D4D4D4"/>
+                </a:solidFill>
+                <a:latin typeface="Consolas"/>
+              </a:rPr>
+              <a:t> --&gt;|</a:t>
+            </a:r>
+            <a:r>
+              <a:rPr sz="1200" i="0" b="0">
+                <a:solidFill>
+                  <a:srgbClr val="CE9178"/>
+                </a:solidFill>
+                <a:latin typeface="Consolas"/>
+              </a:rPr>
+              <a:t>"HTTPS"</a:t>
+            </a:r>
+            <a:r>
+              <a:rPr sz="1200" i="0" b="0">
+                <a:solidFill>
+                  <a:srgbClr val="D4D4D4"/>
+                </a:solidFill>
+                <a:latin typeface="Consolas"/>
+              </a:rPr>
+              <a:t>| </a:t>
+            </a:r>
+            <a:r>
+              <a:rPr sz="1200" i="0" b="0">
+                <a:solidFill>
+                  <a:srgbClr val="D4D4D4"/>
+                </a:solidFill>
+                <a:latin typeface="Consolas"/>
+              </a:rPr>
+              <a:t>objetos</a:t>
+            </a:r>
+          </a:p>
+          <a:p>
+            <a:pPr>
+              <a:spcAft>
+                <a:spcPts val="257"/>
+              </a:spcAft>
+            </a:pPr>
+            <a:r>
+              <a:rPr sz="1200" i="0" b="0">
+                <a:solidFill>
+                  <a:srgbClr val="D4D4D4"/>
+                </a:solidFill>
+                <a:latin typeface="Consolas"/>
+              </a:rPr>
+              <a:t>  </a:t>
+            </a:r>
+            <a:r>
+              <a:rPr sz="1200" i="0" b="0">
+                <a:solidFill>
+                  <a:srgbClr val="D4D4D4"/>
+                </a:solidFill>
+                <a:latin typeface="Consolas"/>
+              </a:rPr>
+              <a:t>api</a:t>
+            </a:r>
+            <a:r>
+              <a:rPr sz="1200" i="0" b="0">
+                <a:solidFill>
+                  <a:srgbClr val="D4D4D4"/>
+                </a:solidFill>
+                <a:latin typeface="Consolas"/>
+              </a:rPr>
+              <a:t> --&gt;|</a:t>
+            </a:r>
+            <a:r>
+              <a:rPr sz="1200" i="0" b="0">
+                <a:solidFill>
+                  <a:srgbClr val="CE9178"/>
+                </a:solidFill>
+                <a:latin typeface="Consolas"/>
+              </a:rPr>
               <a:t>"TCP 5432"</a:t>
             </a:r>
             <a:r>
-              <a:rPr sz="2000" i="0" b="0">
+              <a:rPr sz="1200" i="0" b="0">
                 <a:solidFill>
                   <a:srgbClr val="D4D4D4"/>
                 </a:solidFill>
@@ -7138,7 +7366,7 @@
               <a:t>| </a:t>
             </a:r>
             <a:r>
-              <a:rPr sz="2000" i="0" b="0">
+              <a:rPr sz="1200" i="0" b="0">
                 <a:solidFill>
                   <a:srgbClr val="D4D4D4"/>
                 </a:solidFill>
@@ -7146,39 +7374,116 @@
               </a:rPr>
               <a:t>bd</a:t>
             </a:r>
-            <a:r>
-              <a:rPr sz="2000" i="0" b="0">
-                <a:solidFill>
-                  <a:srgbClr val="D4D4D4"/>
-                </a:solidFill>
-                <a:latin typeface="Consolas"/>
-              </a:rPr>
-              <a:t>[(</a:t>
-            </a:r>
-            <a:r>
-              <a:rPr sz="2000" i="0" b="0">
-                <a:solidFill>
-                  <a:srgbClr val="CE9178"/>
-                </a:solidFill>
-                <a:latin typeface="Consolas"/>
-              </a:rPr>
-              <a:t>"Base relacional gestionada&lt;br/&gt;turnos, con respaldo"</a:t>
-            </a:r>
-            <a:r>
-              <a:rPr sz="2000" i="0" b="0">
-                <a:solidFill>
-                  <a:srgbClr val="D4D4D4"/>
-                </a:solidFill>
-                <a:latin typeface="Consolas"/>
-              </a:rPr>
-              <a:t>)]</a:t>
-            </a:r>
-          </a:p>
-        </p:txBody>
-      </p:sp>
-      <p:sp>
-        <p:nvSpPr>
-          <p:cNvPr id="12" name="TextBox 11"/>
+          </a:p>
+        </p:txBody>
+      </p:sp>
+      <p:sp>
+        <p:nvSpPr>
+          <p:cNvPr id="13" name="Rounded Rectangle 12"/>
+          <p:cNvSpPr/>
+          <p:nvPr/>
+        </p:nvSpPr>
+        <p:spPr>
+          <a:xfrm>
+            <a:off x="7668579" y="1261872"/>
+            <a:ext cx="4120780" cy="3318569"/>
+          </a:xfrm>
+          <a:prstGeom prst="roundRect">
+            <a:avLst>
+              <a:gd name="adj" fmla="val 4000"/>
+            </a:avLst>
+          </a:prstGeom>
+          <a:solidFill>
+            <a:srgbClr val="E8EEF4"/>
+          </a:solidFill>
+          <a:ln>
+            <a:noFill/>
+          </a:ln>
+        </p:spPr>
+        <p:style>
+          <a:lnRef idx="1">
+            <a:schemeClr val="accent1"/>
+          </a:lnRef>
+          <a:fillRef idx="3">
+            <a:schemeClr val="accent1"/>
+          </a:fillRef>
+          <a:effectRef idx="2">
+            <a:schemeClr val="accent1"/>
+          </a:effectRef>
+          <a:fontRef idx="minor">
+            <a:schemeClr val="lt1"/>
+          </a:fontRef>
+        </p:style>
+        <p:txBody>
+          <a:bodyPr rtlCol="0" anchor="ctr"/>
+          <a:lstStyle/>
+          <a:p>
+            <a:pPr algn="ctr"/>
+          </a:p>
+        </p:txBody>
+      </p:sp>
+      <p:pic>
+        <p:nvPicPr>
+          <p:cNvPr id="14" name="Picture 13" descr="dg-almacenamiento-paso1.png"/>
+          <p:cNvPicPr>
+            <a:picLocks noChangeAspect="1"/>
+          </p:cNvPicPr>
+          <p:nvPr/>
+        </p:nvPicPr>
+        <p:blipFill>
+          <a:blip r:embed="rId2"/>
+          <a:stretch>
+            <a:fillRect/>
+          </a:stretch>
+        </p:blipFill>
+        <p:spPr>
+          <a:xfrm>
+            <a:off x="7723443" y="1316736"/>
+            <a:ext cx="4011052" cy="3208841"/>
+          </a:xfrm>
+          <a:prstGeom prst="rect">
+            <a:avLst/>
+          </a:prstGeom>
+        </p:spPr>
+      </p:pic>
+      <p:sp>
+        <p:nvSpPr>
+          <p:cNvPr id="15" name="TextBox 14"/>
+          <p:cNvSpPr txBox="1"/>
+          <p:nvPr/>
+        </p:nvSpPr>
+        <p:spPr>
+          <a:xfrm>
+            <a:off x="7723443" y="4580441"/>
+            <a:ext cx="4011052" cy="320040"/>
+          </a:xfrm>
+          <a:prstGeom prst="rect">
+            <a:avLst/>
+          </a:prstGeom>
+          <a:noFill/>
+        </p:spPr>
+        <p:txBody>
+          <a:bodyPr wrap="square">
+            <a:spAutoFit/>
+          </a:bodyPr>
+          <a:lstStyle/>
+          <a:p>
+            <a:pPr algn="ctr"/>
+            <a:r>
+              <a:rPr sz="1200" b="0" i="1">
+                <a:solidFill>
+                  <a:srgbClr val="666666"/>
+                </a:solidFill>
+                <a:latin typeface="Calibri"/>
+              </a:rPr>
+              <a:t>Lo que dibuja este código</a:t>
+            </a:r>
+          </a:p>
+        </p:txBody>
+      </p:sp>
+      <p:sp>
+        <p:nvSpPr>
+          <p:cNvPr id="16" name="TextBox 15"/>
           <p:cNvSpPr txBox="1"/>
           <p:nvPr/>
         </p:nvSpPr>
@@ -9877,7 +10182,7 @@
         <p:spPr>
           <a:xfrm>
             <a:off x="457200" y="1261872"/>
-            <a:ext cx="11277295" cy="4798799"/>
+            <a:ext cx="6991923" cy="4573349"/>
           </a:xfrm>
           <a:prstGeom prst="roundRect">
             <a:avLst>
@@ -9922,7 +10227,7 @@
         <p:spPr>
           <a:xfrm>
             <a:off x="457200" y="1261872"/>
-            <a:ext cx="11277295" cy="365760"/>
+            <a:ext cx="6991923" cy="365760"/>
           </a:xfrm>
           <a:prstGeom prst="rect">
             <a:avLst/>
@@ -10094,7 +10399,7 @@
         <p:spPr>
           <a:xfrm>
             <a:off x="1371600" y="1298448"/>
-            <a:ext cx="10180015" cy="292608"/>
+            <a:ext cx="5894643" cy="292608"/>
           </a:xfrm>
           <a:prstGeom prst="rect">
             <a:avLst/>
@@ -10127,7 +10432,7 @@
         <p:spPr>
           <a:xfrm>
             <a:off x="685800" y="1719072"/>
-            <a:ext cx="502920" cy="4204439"/>
+            <a:ext cx="502920" cy="3978989"/>
           </a:xfrm>
           <a:prstGeom prst="rect">
             <a:avLst/>
@@ -10142,11 +10447,11 @@
           <a:p>
             <a:pPr algn="r">
               <a:spcAft>
-                <a:spcPts val="321"/>
+                <a:spcPts val="278"/>
               </a:spcAft>
             </a:pPr>
             <a:r>
-              <a:rPr sz="1500" i="0" b="0">
+              <a:rPr sz="1300" i="0" b="0">
                 <a:solidFill>
                   <a:srgbClr val="858585"/>
                 </a:solidFill>
@@ -10158,11 +10463,11 @@
           <a:p>
             <a:pPr algn="r">
               <a:spcAft>
-                <a:spcPts val="321"/>
+                <a:spcPts val="278"/>
               </a:spcAft>
             </a:pPr>
             <a:r>
-              <a:rPr sz="1500" i="0" b="0">
+              <a:rPr sz="1300" i="0" b="0">
                 <a:solidFill>
                   <a:srgbClr val="858585"/>
                 </a:solidFill>
@@ -10174,11 +10479,11 @@
           <a:p>
             <a:pPr algn="r">
               <a:spcAft>
-                <a:spcPts val="321"/>
+                <a:spcPts val="278"/>
               </a:spcAft>
             </a:pPr>
             <a:r>
-              <a:rPr sz="1500" i="0" b="0">
+              <a:rPr sz="1300" i="0" b="0">
                 <a:solidFill>
                   <a:srgbClr val="858585"/>
                 </a:solidFill>
@@ -10190,11 +10495,11 @@
           <a:p>
             <a:pPr algn="r">
               <a:spcAft>
-                <a:spcPts val="321"/>
+                <a:spcPts val="278"/>
               </a:spcAft>
             </a:pPr>
             <a:r>
-              <a:rPr sz="1500" i="0" b="0">
+              <a:rPr sz="1300" i="0" b="0">
                 <a:solidFill>
                   <a:srgbClr val="858585"/>
                 </a:solidFill>
@@ -10206,11 +10511,11 @@
           <a:p>
             <a:pPr algn="r">
               <a:spcAft>
-                <a:spcPts val="321"/>
+                <a:spcPts val="278"/>
               </a:spcAft>
             </a:pPr>
             <a:r>
-              <a:rPr sz="1500" i="0" b="0">
+              <a:rPr sz="1300" i="0" b="0">
                 <a:solidFill>
                   <a:srgbClr val="858585"/>
                 </a:solidFill>
@@ -10222,11 +10527,11 @@
           <a:p>
             <a:pPr algn="r">
               <a:spcAft>
-                <a:spcPts val="321"/>
+                <a:spcPts val="278"/>
               </a:spcAft>
             </a:pPr>
             <a:r>
-              <a:rPr sz="1500" i="0" b="0">
+              <a:rPr sz="1300" i="0" b="0">
                 <a:solidFill>
                   <a:srgbClr val="858585"/>
                 </a:solidFill>
@@ -10238,11 +10543,11 @@
           <a:p>
             <a:pPr algn="r">
               <a:spcAft>
-                <a:spcPts val="321"/>
+                <a:spcPts val="278"/>
               </a:spcAft>
             </a:pPr>
             <a:r>
-              <a:rPr sz="1500" i="0" b="0">
+              <a:rPr sz="1300" i="0" b="0">
                 <a:solidFill>
                   <a:srgbClr val="858585"/>
                 </a:solidFill>
@@ -10254,11 +10559,11 @@
           <a:p>
             <a:pPr algn="r">
               <a:spcAft>
-                <a:spcPts val="321"/>
+                <a:spcPts val="278"/>
               </a:spcAft>
             </a:pPr>
             <a:r>
-              <a:rPr sz="1500" i="0" b="0">
+              <a:rPr sz="1300" i="0" b="0">
                 <a:solidFill>
                   <a:srgbClr val="858585"/>
                 </a:solidFill>
@@ -10270,11 +10575,11 @@
           <a:p>
             <a:pPr algn="r">
               <a:spcAft>
-                <a:spcPts val="321"/>
+                <a:spcPts val="278"/>
               </a:spcAft>
             </a:pPr>
             <a:r>
-              <a:rPr sz="1500" i="0" b="0">
+              <a:rPr sz="1300" i="0" b="0">
                 <a:solidFill>
                   <a:srgbClr val="858585"/>
                 </a:solidFill>
@@ -10286,11 +10591,11 @@
           <a:p>
             <a:pPr algn="r">
               <a:spcAft>
-                <a:spcPts val="321"/>
+                <a:spcPts val="278"/>
               </a:spcAft>
             </a:pPr>
             <a:r>
-              <a:rPr sz="1500" i="0" b="0">
+              <a:rPr sz="1300" i="0" b="0">
                 <a:solidFill>
                   <a:srgbClr val="858585"/>
                 </a:solidFill>
@@ -10302,11 +10607,11 @@
           <a:p>
             <a:pPr algn="r">
               <a:spcAft>
-                <a:spcPts val="321"/>
+                <a:spcPts val="278"/>
               </a:spcAft>
             </a:pPr>
             <a:r>
-              <a:rPr sz="1500" i="0" b="0">
+              <a:rPr sz="1300" i="0" b="0">
                 <a:solidFill>
                   <a:srgbClr val="858585"/>
                 </a:solidFill>
@@ -10318,11 +10623,11 @@
           <a:p>
             <a:pPr algn="r">
               <a:spcAft>
-                <a:spcPts val="321"/>
+                <a:spcPts val="278"/>
               </a:spcAft>
             </a:pPr>
             <a:r>
-              <a:rPr sz="1500" i="0" b="0">
+              <a:rPr sz="1300" i="0" b="0">
                 <a:solidFill>
                   <a:srgbClr val="858585"/>
                 </a:solidFill>
@@ -10334,11 +10639,11 @@
           <a:p>
             <a:pPr algn="r">
               <a:spcAft>
-                <a:spcPts val="321"/>
+                <a:spcPts val="278"/>
               </a:spcAft>
             </a:pPr>
             <a:r>
-              <a:rPr sz="1500" i="0" b="0">
+              <a:rPr sz="1300" i="0" b="0">
                 <a:solidFill>
                   <a:srgbClr val="858585"/>
                 </a:solidFill>
@@ -10350,11 +10655,11 @@
           <a:p>
             <a:pPr algn="r">
               <a:spcAft>
-                <a:spcPts val="321"/>
+                <a:spcPts val="278"/>
               </a:spcAft>
             </a:pPr>
             <a:r>
-              <a:rPr sz="1500" i="0" b="0">
+              <a:rPr sz="1300" i="0" b="0">
                 <a:solidFill>
                   <a:srgbClr val="858585"/>
                 </a:solidFill>
@@ -10366,17 +10671,33 @@
           <a:p>
             <a:pPr algn="r">
               <a:spcAft>
-                <a:spcPts val="321"/>
+                <a:spcPts val="278"/>
               </a:spcAft>
             </a:pPr>
             <a:r>
-              <a:rPr sz="1500" i="0" b="0">
+              <a:rPr sz="1300" i="0" b="0">
                 <a:solidFill>
                   <a:srgbClr val="858585"/>
                 </a:solidFill>
                 <a:latin typeface="Consolas"/>
               </a:rPr>
               <a:t>15</a:t>
+            </a:r>
+          </a:p>
+          <a:p>
+            <a:pPr algn="r">
+              <a:spcAft>
+                <a:spcPts val="278"/>
+              </a:spcAft>
+            </a:pPr>
+            <a:r>
+              <a:rPr sz="1300" i="0" b="0">
+                <a:solidFill>
+                  <a:srgbClr val="858585"/>
+                </a:solidFill>
+                <a:latin typeface="Consolas"/>
+              </a:rPr>
+              <a:t>16</a:t>
             </a:r>
           </a:p>
         </p:txBody>
@@ -10390,7 +10711,7 @@
         <p:spPr>
           <a:xfrm>
             <a:off x="1188720" y="1719072"/>
-            <a:ext cx="10271455" cy="4204439"/>
+            <a:ext cx="5986083" cy="3978989"/>
           </a:xfrm>
           <a:prstGeom prst="rect">
             <a:avLst/>
@@ -10405,11 +10726,11 @@
           <a:p>
             <a:pPr>
               <a:spcAft>
-                <a:spcPts val="321"/>
+                <a:spcPts val="278"/>
               </a:spcAft>
             </a:pPr>
             <a:r>
-              <a:rPr sz="1500" i="0" b="0">
+              <a:rPr sz="1300" i="0" b="0">
                 <a:solidFill>
                   <a:srgbClr val="D4D4D4"/>
                 </a:solidFill>
@@ -10418,7 +10739,7 @@
               <a:t>flowchart</a:t>
             </a:r>
             <a:r>
-              <a:rPr sz="1500" i="0" b="0">
+              <a:rPr sz="1300" i="0" b="0">
                 <a:solidFill>
                   <a:srgbClr val="D4D4D4"/>
                 </a:solidFill>
@@ -10427,7 +10748,7 @@
               <a:t> </a:t>
             </a:r>
             <a:r>
-              <a:rPr sz="1500" i="0" b="0">
+              <a:rPr sz="1300" i="0" b="0">
                 <a:solidFill>
                   <a:srgbClr val="D4D4D4"/>
                 </a:solidFill>
@@ -10439,11 +10760,11 @@
           <a:p>
             <a:pPr>
               <a:spcAft>
-                <a:spcPts val="321"/>
+                <a:spcPts val="278"/>
               </a:spcAft>
             </a:pPr>
             <a:r>
-              <a:rPr sz="1500" i="0" b="0">
+              <a:rPr sz="1300" i="0" b="0">
                 <a:solidFill>
                   <a:srgbClr val="D4D4D4"/>
                 </a:solidFill>
@@ -10452,7 +10773,7 @@
               <a:t>  </a:t>
             </a:r>
             <a:r>
-              <a:rPr sz="1500" i="0" b="0">
+              <a:rPr sz="1300" i="0" b="0">
                 <a:solidFill>
                   <a:srgbClr val="D4D4D4"/>
                 </a:solidFill>
@@ -10461,7 +10782,7 @@
               <a:t>subgraph</a:t>
             </a:r>
             <a:r>
-              <a:rPr sz="1500" i="0" b="0">
+              <a:rPr sz="1300" i="0" b="0">
                 <a:solidFill>
                   <a:srgbClr val="D4D4D4"/>
                 </a:solidFill>
@@ -10470,7 +10791,7 @@
               <a:t> </a:t>
             </a:r>
             <a:r>
-              <a:rPr sz="1500" i="0" b="0">
+              <a:rPr sz="1300" i="0" b="0">
                 <a:solidFill>
                   <a:srgbClr val="D4D4D4"/>
                 </a:solidFill>
@@ -10479,7 +10800,7 @@
               <a:t>publica</a:t>
             </a:r>
             <a:r>
-              <a:rPr sz="1500" i="0" b="0">
+              <a:rPr sz="1300" i="0" b="0">
                 <a:solidFill>
                   <a:srgbClr val="D4D4D4"/>
                 </a:solidFill>
@@ -10488,7 +10809,7 @@
               <a:t>[</a:t>
             </a:r>
             <a:r>
-              <a:rPr sz="1500" i="0" b="0">
+              <a:rPr sz="1300" i="0" b="0">
                 <a:solidFill>
                   <a:srgbClr val="CE9178"/>
                 </a:solidFill>
@@ -10497,7 +10818,7 @@
               <a:t>"Zona publica - internet"</a:t>
             </a:r>
             <a:r>
-              <a:rPr sz="1500" i="0" b="0">
+              <a:rPr sz="1300" i="0" b="0">
                 <a:solidFill>
                   <a:srgbClr val="D4D4D4"/>
                 </a:solidFill>
@@ -10509,11 +10830,11 @@
           <a:p>
             <a:pPr>
               <a:spcAft>
-                <a:spcPts val="321"/>
+                <a:spcPts val="278"/>
               </a:spcAft>
             </a:pPr>
             <a:r>
-              <a:rPr sz="1500" i="0" b="0">
+              <a:rPr sz="1300" i="0" b="0">
                 <a:solidFill>
                   <a:srgbClr val="D4D4D4"/>
                 </a:solidFill>
@@ -10522,7 +10843,7 @@
               <a:t>    </a:t>
             </a:r>
             <a:r>
-              <a:rPr sz="1500" i="0" b="0">
+              <a:rPr sz="1300" i="0" b="0">
                 <a:solidFill>
                   <a:srgbClr val="D4D4D4"/>
                 </a:solidFill>
@@ -10531,7 +10852,7 @@
               <a:t>web</a:t>
             </a:r>
             <a:r>
-              <a:rPr sz="1500" i="0" b="0">
+              <a:rPr sz="1300" i="0" b="0">
                 <a:solidFill>
                   <a:srgbClr val="D4D4D4"/>
                 </a:solidFill>
@@ -10540,7 +10861,7 @@
               <a:t>[</a:t>
             </a:r>
             <a:r>
-              <a:rPr sz="1500" i="0" b="0">
+              <a:rPr sz="1300" i="0" b="0">
                 <a:solidFill>
                   <a:srgbClr val="CE9178"/>
                 </a:solidFill>
@@ -10549,7 +10870,7 @@
               <a:t>"App web&lt;br/&gt;React estatico - 443"</a:t>
             </a:r>
             <a:r>
-              <a:rPr sz="1500" i="0" b="0">
+              <a:rPr sz="1300" i="0" b="0">
                 <a:solidFill>
                   <a:srgbClr val="D4D4D4"/>
                 </a:solidFill>
@@ -10561,11 +10882,11 @@
           <a:p>
             <a:pPr>
               <a:spcAft>
-                <a:spcPts val="321"/>
+                <a:spcPts val="278"/>
               </a:spcAft>
             </a:pPr>
             <a:r>
-              <a:rPr sz="1500" i="0" b="0">
+              <a:rPr sz="1300" i="0" b="0">
                 <a:solidFill>
                   <a:srgbClr val="D4D4D4"/>
                 </a:solidFill>
@@ -10574,7 +10895,7 @@
               <a:t>    </a:t>
             </a:r>
             <a:r>
-              <a:rPr sz="1500" i="0" b="0">
+              <a:rPr sz="1300" i="0" b="0">
                 <a:solidFill>
                   <a:srgbClr val="D4D4D4"/>
                 </a:solidFill>
@@ -10583,7 +10904,7 @@
               <a:t>edge</a:t>
             </a:r>
             <a:r>
-              <a:rPr sz="1500" i="0" b="0">
+              <a:rPr sz="1300" i="0" b="0">
                 <a:solidFill>
                   <a:srgbClr val="D4D4D4"/>
                 </a:solidFill>
@@ -10592,7 +10913,7 @@
               <a:t>[</a:t>
             </a:r>
             <a:r>
-              <a:rPr sz="1500" i="0" b="0">
+              <a:rPr sz="1300" i="0" b="0">
                 <a:solidFill>
                   <a:srgbClr val="CE9178"/>
                 </a:solidFill>
@@ -10601,7 +10922,7 @@
               <a:t>"Edge / balanceador&lt;br/&gt;443 HTTPS"</a:t>
             </a:r>
             <a:r>
-              <a:rPr sz="1500" i="0" b="0">
+              <a:rPr sz="1300" i="0" b="0">
                 <a:solidFill>
                   <a:srgbClr val="D4D4D4"/>
                 </a:solidFill>
@@ -10613,11 +10934,11 @@
           <a:p>
             <a:pPr>
               <a:spcAft>
-                <a:spcPts val="321"/>
+                <a:spcPts val="278"/>
               </a:spcAft>
             </a:pPr>
             <a:r>
-              <a:rPr sz="1500" i="0" b="0">
+              <a:rPr sz="1300" i="0" b="0">
                 <a:solidFill>
                   <a:srgbClr val="D4D4D4"/>
                 </a:solidFill>
@@ -10626,7 +10947,7 @@
               <a:t>  </a:t>
             </a:r>
             <a:r>
-              <a:rPr sz="1500" i="0" b="0">
+              <a:rPr sz="1300" i="0" b="0">
                 <a:solidFill>
                   <a:srgbClr val="D4D4D4"/>
                 </a:solidFill>
@@ -10638,11 +10959,11 @@
           <a:p>
             <a:pPr>
               <a:spcAft>
-                <a:spcPts val="321"/>
+                <a:spcPts val="278"/>
               </a:spcAft>
             </a:pPr>
             <a:r>
-              <a:rPr sz="1500" i="0" b="0">
+              <a:rPr sz="1300" i="0" b="0">
                 <a:solidFill>
                   <a:srgbClr val="D4D4D4"/>
                 </a:solidFill>
@@ -10651,7 +10972,7 @@
               <a:t>  </a:t>
             </a:r>
             <a:r>
-              <a:rPr sz="1500" i="0" b="0">
+              <a:rPr sz="1300" i="0" b="0">
                 <a:solidFill>
                   <a:srgbClr val="D4D4D4"/>
                 </a:solidFill>
@@ -10660,7 +10981,7 @@
               <a:t>subgraph</a:t>
             </a:r>
             <a:r>
-              <a:rPr sz="1500" i="0" b="0">
+              <a:rPr sz="1300" i="0" b="0">
                 <a:solidFill>
                   <a:srgbClr val="D4D4D4"/>
                 </a:solidFill>
@@ -10669,7 +10990,7 @@
               <a:t> </a:t>
             </a:r>
             <a:r>
-              <a:rPr sz="1500" i="0" b="0">
+              <a:rPr sz="1300" i="0" b="0">
                 <a:solidFill>
                   <a:srgbClr val="D4D4D4"/>
                 </a:solidFill>
@@ -10678,7 +10999,7 @@
               <a:t>privada</a:t>
             </a:r>
             <a:r>
-              <a:rPr sz="1500" i="0" b="0">
+              <a:rPr sz="1300" i="0" b="0">
                 <a:solidFill>
                   <a:srgbClr val="D4D4D4"/>
                 </a:solidFill>
@@ -10687,7 +11008,7 @@
               <a:t>[</a:t>
             </a:r>
             <a:r>
-              <a:rPr sz="1500" i="0" b="0">
+              <a:rPr sz="1300" i="0" b="0">
                 <a:solidFill>
                   <a:srgbClr val="CE9178"/>
                 </a:solidFill>
@@ -10696,7 +11017,7 @@
               <a:t>"Zona privada - solo desde el edge"</a:t>
             </a:r>
             <a:r>
-              <a:rPr sz="1500" i="0" b="0">
+              <a:rPr sz="1300" i="0" b="0">
                 <a:solidFill>
                   <a:srgbClr val="D4D4D4"/>
                 </a:solidFill>
@@ -10708,11 +11029,11 @@
           <a:p>
             <a:pPr>
               <a:spcAft>
-                <a:spcPts val="321"/>
+                <a:spcPts val="278"/>
               </a:spcAft>
             </a:pPr>
             <a:r>
-              <a:rPr sz="1500" i="0" b="0">
+              <a:rPr sz="1300" i="0" b="0">
                 <a:solidFill>
                   <a:srgbClr val="D4D4D4"/>
                 </a:solidFill>
@@ -10721,7 +11042,7 @@
               <a:t>    </a:t>
             </a:r>
             <a:r>
-              <a:rPr sz="1500" i="0" b="0">
+              <a:rPr sz="1300" i="0" b="0">
                 <a:solidFill>
                   <a:srgbClr val="D4D4D4"/>
                 </a:solidFill>
@@ -10730,7 +11051,7 @@
               <a:t>api</a:t>
             </a:r>
             <a:r>
-              <a:rPr sz="1500" i="0" b="0">
+              <a:rPr sz="1300" i="0" b="0">
                 <a:solidFill>
                   <a:srgbClr val="D4D4D4"/>
                 </a:solidFill>
@@ -10739,16 +11060,16 @@
               <a:t>[</a:t>
             </a:r>
             <a:r>
-              <a:rPr sz="1500" i="0" b="0">
+              <a:rPr sz="1300" i="0" b="0">
                 <a:solidFill>
                   <a:srgbClr val="CE9178"/>
                 </a:solidFill>
                 <a:latin typeface="Consolas"/>
               </a:rPr>
-              <a:t>"API de la app&lt;br/&gt;8080 HTTP"</a:t>
-            </a:r>
-            <a:r>
-              <a:rPr sz="1500" i="0" b="0">
+              <a:t>"API de turnos&lt;br/&gt;8080 HTTP"</a:t>
+            </a:r>
+            <a:r>
+              <a:rPr sz="1300" i="0" b="0">
                 <a:solidFill>
                   <a:srgbClr val="D4D4D4"/>
                 </a:solidFill>
@@ -10760,11 +11081,11 @@
           <a:p>
             <a:pPr>
               <a:spcAft>
-                <a:spcPts val="321"/>
+                <a:spcPts val="278"/>
               </a:spcAft>
             </a:pPr>
             <a:r>
-              <a:rPr sz="1500" i="0" b="0">
+              <a:rPr sz="1300" i="0" b="0">
                 <a:solidFill>
                   <a:srgbClr val="D4D4D4"/>
                 </a:solidFill>
@@ -10773,7 +11094,7 @@
               <a:t>  </a:t>
             </a:r>
             <a:r>
-              <a:rPr sz="1500" i="0" b="0">
+              <a:rPr sz="1300" i="0" b="0">
                 <a:solidFill>
                   <a:srgbClr val="D4D4D4"/>
                 </a:solidFill>
@@ -10785,11 +11106,11 @@
           <a:p>
             <a:pPr>
               <a:spcAft>
-                <a:spcPts val="321"/>
+                <a:spcPts val="278"/>
               </a:spcAft>
             </a:pPr>
             <a:r>
-              <a:rPr sz="1500" i="0" b="0">
+              <a:rPr sz="1300" i="0" b="0">
                 <a:solidFill>
                   <a:srgbClr val="D4D4D4"/>
                 </a:solidFill>
@@ -10798,7 +11119,7 @@
               <a:t>  </a:t>
             </a:r>
             <a:r>
-              <a:rPr sz="1500" i="0" b="0">
+              <a:rPr sz="1300" i="0" b="0">
                 <a:solidFill>
                   <a:srgbClr val="D4D4D4"/>
                 </a:solidFill>
@@ -10807,7 +11128,7 @@
               <a:t>subgraph</a:t>
             </a:r>
             <a:r>
-              <a:rPr sz="1500" i="0" b="0">
+              <a:rPr sz="1300" i="0" b="0">
                 <a:solidFill>
                   <a:srgbClr val="D4D4D4"/>
                 </a:solidFill>
@@ -10816,7 +11137,7 @@
               <a:t> </a:t>
             </a:r>
             <a:r>
-              <a:rPr sz="1500" i="0" b="0">
+              <a:rPr sz="1300" i="0" b="0">
                 <a:solidFill>
                   <a:srgbClr val="D4D4D4"/>
                 </a:solidFill>
@@ -10825,7 +11146,7 @@
               <a:t>datos</a:t>
             </a:r>
             <a:r>
-              <a:rPr sz="1500" i="0" b="0">
+              <a:rPr sz="1300" i="0" b="0">
                 <a:solidFill>
                   <a:srgbClr val="D4D4D4"/>
                 </a:solidFill>
@@ -10834,16 +11155,16 @@
               <a:t>[</a:t>
             </a:r>
             <a:r>
-              <a:rPr sz="1500" i="0" b="0">
+              <a:rPr sz="1300" i="0" b="0">
                 <a:solidFill>
                   <a:srgbClr val="CE9178"/>
                 </a:solidFill>
                 <a:latin typeface="Consolas"/>
               </a:rPr>
-              <a:t>"Zona de datos - sin internet: la BD va AQUI"</a:t>
-            </a:r>
-            <a:r>
-              <a:rPr sz="1500" i="0" b="0">
+              <a:t>"Zona de datos - sin internet"</a:t>
+            </a:r>
+            <a:r>
+              <a:rPr sz="1300" i="0" b="0">
                 <a:solidFill>
                   <a:srgbClr val="D4D4D4"/>
                 </a:solidFill>
@@ -10855,11 +11176,11 @@
           <a:p>
             <a:pPr>
               <a:spcAft>
-                <a:spcPts val="321"/>
+                <a:spcPts val="278"/>
               </a:spcAft>
             </a:pPr>
             <a:r>
-              <a:rPr sz="1500" i="0" b="0">
+              <a:rPr sz="1300" i="0" b="0">
                 <a:solidFill>
                   <a:srgbClr val="D4D4D4"/>
                 </a:solidFill>
@@ -10868,7 +11189,7 @@
               <a:t>    </a:t>
             </a:r>
             <a:r>
-              <a:rPr sz="1500" i="0" b="0">
+              <a:rPr sz="1300" i="0" b="0">
                 <a:solidFill>
                   <a:srgbClr val="D4D4D4"/>
                 </a:solidFill>
@@ -10877,7 +11198,7 @@
               <a:t>db</a:t>
             </a:r>
             <a:r>
-              <a:rPr sz="1500" i="0" b="0">
+              <a:rPr sz="1300" i="0" b="0">
                 <a:solidFill>
                   <a:srgbClr val="D4D4D4"/>
                 </a:solidFill>
@@ -10886,16 +11207,16 @@
               <a:t>[(</a:t>
             </a:r>
             <a:r>
-              <a:rPr sz="1500" i="0" b="0">
+              <a:rPr sz="1300" i="0" b="0">
                 <a:solidFill>
                   <a:srgbClr val="CE9178"/>
                 </a:solidFill>
                 <a:latin typeface="Consolas"/>
               </a:rPr>
-              <a:t>"Base de datos&lt;br/&gt;5432 TCP"</a:t>
-            </a:r>
-            <a:r>
-              <a:rPr sz="1500" i="0" b="0">
+              <a:t>"Base de turnos&lt;br/&gt;5432 TCP"</a:t>
+            </a:r>
+            <a:r>
+              <a:rPr sz="1300" i="0" b="0">
                 <a:solidFill>
                   <a:srgbClr val="D4D4D4"/>
                 </a:solidFill>
@@ -10907,11 +11228,11 @@
           <a:p>
             <a:pPr>
               <a:spcAft>
-                <a:spcPts val="321"/>
+                <a:spcPts val="278"/>
               </a:spcAft>
             </a:pPr>
             <a:r>
-              <a:rPr sz="1500" i="0" b="0">
+              <a:rPr sz="1300" i="0" b="0">
                 <a:solidFill>
                   <a:srgbClr val="D4D4D4"/>
                 </a:solidFill>
@@ -10920,7 +11241,7 @@
               <a:t>  </a:t>
             </a:r>
             <a:r>
-              <a:rPr sz="1500" i="0" b="0">
+              <a:rPr sz="1300" i="0" b="0">
                 <a:solidFill>
                   <a:srgbClr val="D4D4D4"/>
                 </a:solidFill>
@@ -10932,11 +11253,11 @@
           <a:p>
             <a:pPr>
               <a:spcAft>
-                <a:spcPts val="321"/>
+                <a:spcPts val="278"/>
               </a:spcAft>
             </a:pPr>
             <a:r>
-              <a:rPr sz="1500" i="0" b="0">
+              <a:rPr sz="1300" i="0" b="0">
                 <a:solidFill>
                   <a:srgbClr val="D4D4D4"/>
                 </a:solidFill>
@@ -10945,7 +11266,7 @@
               <a:t>  </a:t>
             </a:r>
             <a:r>
-              <a:rPr sz="1500" i="0" b="0">
+              <a:rPr sz="1300" i="0" b="0">
                 <a:solidFill>
                   <a:srgbClr val="D4D4D4"/>
                 </a:solidFill>
@@ -10954,7 +11275,7 @@
               <a:t>web</a:t>
             </a:r>
             <a:r>
-              <a:rPr sz="1500" i="0" b="0">
+              <a:rPr sz="1300" i="0" b="0">
                 <a:solidFill>
                   <a:srgbClr val="D4D4D4"/>
                 </a:solidFill>
@@ -10963,7 +11284,7 @@
               <a:t> --&gt;|</a:t>
             </a:r>
             <a:r>
-              <a:rPr sz="1500" i="0" b="0">
+              <a:rPr sz="1300" i="0" b="0">
                 <a:solidFill>
                   <a:srgbClr val="CE9178"/>
                 </a:solidFill>
@@ -10972,7 +11293,7 @@
               <a:t>"HTTPS 443"</a:t>
             </a:r>
             <a:r>
-              <a:rPr sz="1500" i="0" b="0">
+              <a:rPr sz="1300" i="0" b="0">
                 <a:solidFill>
                   <a:srgbClr val="D4D4D4"/>
                 </a:solidFill>
@@ -10981,7 +11302,7 @@
               <a:t>| </a:t>
             </a:r>
             <a:r>
-              <a:rPr sz="1500" i="0" b="0">
+              <a:rPr sz="1300" i="0" b="0">
                 <a:solidFill>
                   <a:srgbClr val="D4D4D4"/>
                 </a:solidFill>
@@ -10993,11 +11314,11 @@
           <a:p>
             <a:pPr>
               <a:spcAft>
-                <a:spcPts val="321"/>
+                <a:spcPts val="278"/>
               </a:spcAft>
             </a:pPr>
             <a:r>
-              <a:rPr sz="1500" i="0" b="0">
+              <a:rPr sz="1300" i="0" b="0">
                 <a:solidFill>
                   <a:srgbClr val="D4D4D4"/>
                 </a:solidFill>
@@ -11006,7 +11327,7 @@
               <a:t>  </a:t>
             </a:r>
             <a:r>
-              <a:rPr sz="1500" i="0" b="0">
+              <a:rPr sz="1300" i="0" b="0">
                 <a:solidFill>
                   <a:srgbClr val="D4D4D4"/>
                 </a:solidFill>
@@ -11015,7 +11336,7 @@
               <a:t>edge</a:t>
             </a:r>
             <a:r>
-              <a:rPr sz="1500" i="0" b="0">
+              <a:rPr sz="1300" i="0" b="0">
                 <a:solidFill>
                   <a:srgbClr val="D4D4D4"/>
                 </a:solidFill>
@@ -11024,7 +11345,7 @@
               <a:t> --&gt;|</a:t>
             </a:r>
             <a:r>
-              <a:rPr sz="1500" i="0" b="0">
+              <a:rPr sz="1300" i="0" b="0">
                 <a:solidFill>
                   <a:srgbClr val="CE9178"/>
                 </a:solidFill>
@@ -11033,7 +11354,7 @@
               <a:t>"HTTP 8080"</a:t>
             </a:r>
             <a:r>
-              <a:rPr sz="1500" i="0" b="0">
+              <a:rPr sz="1300" i="0" b="0">
                 <a:solidFill>
                   <a:srgbClr val="D4D4D4"/>
                 </a:solidFill>
@@ -11042,7 +11363,7 @@
               <a:t>| </a:t>
             </a:r>
             <a:r>
-              <a:rPr sz="1500" i="0" b="0">
+              <a:rPr sz="1300" i="0" b="0">
                 <a:solidFill>
                   <a:srgbClr val="D4D4D4"/>
                 </a:solidFill>
@@ -11054,11 +11375,11 @@
           <a:p>
             <a:pPr>
               <a:spcAft>
-                <a:spcPts val="321"/>
+                <a:spcPts val="278"/>
               </a:spcAft>
             </a:pPr>
             <a:r>
-              <a:rPr sz="1500" i="0" b="0">
+              <a:rPr sz="1300" i="0" b="0">
                 <a:solidFill>
                   <a:srgbClr val="D4D4D4"/>
                 </a:solidFill>
@@ -11067,7 +11388,7 @@
               <a:t>  </a:t>
             </a:r>
             <a:r>
-              <a:rPr sz="1500" i="0" b="0">
+              <a:rPr sz="1300" i="0" b="0">
                 <a:solidFill>
                   <a:srgbClr val="D4D4D4"/>
                 </a:solidFill>
@@ -11076,7 +11397,7 @@
               <a:t>api</a:t>
             </a:r>
             <a:r>
-              <a:rPr sz="1500" i="0" b="0">
+              <a:rPr sz="1300" i="0" b="0">
                 <a:solidFill>
                   <a:srgbClr val="D4D4D4"/>
                 </a:solidFill>
@@ -11085,7 +11406,7 @@
               <a:t> --&gt;|</a:t>
             </a:r>
             <a:r>
-              <a:rPr sz="1500" i="0" b="0">
+              <a:rPr sz="1300" i="0" b="0">
                 <a:solidFill>
                   <a:srgbClr val="CE9178"/>
                 </a:solidFill>
@@ -11094,7 +11415,7 @@
               <a:t>"TCP 5432"</a:t>
             </a:r>
             <a:r>
-              <a:rPr sz="1500" i="0" b="0">
+              <a:rPr sz="1300" i="0" b="0">
                 <a:solidFill>
                   <a:srgbClr val="D4D4D4"/>
                 </a:solidFill>
@@ -11103,7 +11424,7 @@
               <a:t>| </a:t>
             </a:r>
             <a:r>
-              <a:rPr sz="1500" i="0" b="0">
+              <a:rPr sz="1300" i="0" b="0">
                 <a:solidFill>
                   <a:srgbClr val="D4D4D4"/>
                 </a:solidFill>
@@ -11115,11 +11436,11 @@
           <a:p>
             <a:pPr>
               <a:spcAft>
-                <a:spcPts val="321"/>
+                <a:spcPts val="278"/>
               </a:spcAft>
             </a:pPr>
             <a:r>
-              <a:rPr sz="1500" i="0" b="0">
+              <a:rPr sz="1300" i="0" b="0">
                 <a:solidFill>
                   <a:srgbClr val="D4D4D4"/>
                 </a:solidFill>
@@ -11128,16 +11449,68 @@
               <a:t>  </a:t>
             </a:r>
             <a:r>
-              <a:rPr sz="1500" i="0" b="0">
+              <a:rPr sz="1300" i="0" b="0">
                 <a:solidFill>
                   <a:srgbClr val="D4D4D4"/>
                 </a:solidFill>
                 <a:latin typeface="Consolas"/>
               </a:rPr>
+              <a:t>pagos</a:t>
+            </a:r>
+            <a:r>
+              <a:rPr sz="1300" i="0" b="0">
+                <a:solidFill>
+                  <a:srgbClr val="D4D4D4"/>
+                </a:solidFill>
+                <a:latin typeface="Consolas"/>
+              </a:rPr>
+              <a:t>[</a:t>
+            </a:r>
+            <a:r>
+              <a:rPr sz="1300" i="0" b="0">
+                <a:solidFill>
+                  <a:srgbClr val="CE9178"/>
+                </a:solidFill>
+                <a:latin typeface="Consolas"/>
+              </a:rPr>
+              <a:t>"Pasarela de pagos externa"</a:t>
+            </a:r>
+            <a:r>
+              <a:rPr sz="1300" i="0" b="0">
+                <a:solidFill>
+                  <a:srgbClr val="D4D4D4"/>
+                </a:solidFill>
+                <a:latin typeface="Consolas"/>
+              </a:rPr>
+              <a:t>]</a:t>
+            </a:r>
+          </a:p>
+          <a:p>
+            <a:pPr>
+              <a:spcAft>
+                <a:spcPts val="278"/>
+              </a:spcAft>
+            </a:pPr>
+            <a:r>
+              <a:rPr sz="1300" i="0" b="0">
+                <a:solidFill>
+                  <a:srgbClr val="D4D4D4"/>
+                </a:solidFill>
+                <a:latin typeface="Consolas"/>
+              </a:rPr>
+              <a:t>  </a:t>
+            </a:r>
+            <a:r>
+              <a:rPr sz="1300" i="0" b="0">
+                <a:solidFill>
+                  <a:srgbClr val="D4D4D4"/>
+                </a:solidFill>
+                <a:latin typeface="Consolas"/>
+              </a:rPr>
               <a:t>api</a:t>
             </a:r>
             <a:r>
-              <a:rPr sz="1500" i="0" b="0">
+              <a:rPr sz="1300" i="0" b="0">
                 <a:solidFill>
                   <a:srgbClr val="D4D4D4"/>
                 </a:solidFill>
@@ -11146,7 +11519,7 @@
               <a:t> --&gt;|</a:t>
             </a:r>
             <a:r>
-              <a:rPr sz="1500" i="0" b="0">
+              <a:rPr sz="1300" i="0" b="0">
                 <a:solidFill>
                   <a:srgbClr val="CE9178"/>
                 </a:solidFill>
@@ -11155,7 +11528,7 @@
               <a:t>"HTTPS 443 - frontera de confianza"</a:t>
             </a:r>
             <a:r>
-              <a:rPr sz="1500" i="0" b="0">
+              <a:rPr sz="1300" i="0" b="0">
                 <a:solidFill>
                   <a:srgbClr val="D4D4D4"/>
                 </a:solidFill>
@@ -11164,7 +11537,7 @@
               <a:t>| </a:t>
             </a:r>
             <a:r>
-              <a:rPr sz="1500" i="0" b="0">
+              <a:rPr sz="1300" i="0" b="0">
                 <a:solidFill>
                   <a:srgbClr val="D4D4D4"/>
                 </a:solidFill>
@@ -11172,46 +11545,88 @@
               </a:rPr>
               <a:t>pagos</a:t>
             </a:r>
-            <a:r>
-              <a:rPr sz="1500" i="0" b="0">
-                <a:solidFill>
-                  <a:srgbClr val="D4D4D4"/>
-                </a:solidFill>
-                <a:latin typeface="Consolas"/>
-              </a:rPr>
-              <a:t>[</a:t>
-            </a:r>
-            <a:r>
-              <a:rPr sz="1500" i="0" b="0">
-                <a:solidFill>
-                  <a:srgbClr val="CE9178"/>
-                </a:solidFill>
-                <a:latin typeface="Consolas"/>
-              </a:rPr>
-              <a:t>"Pasarela de pagos externa"</a:t>
-            </a:r>
-            <a:r>
-              <a:rPr sz="1500" i="0" b="0">
-                <a:solidFill>
-                  <a:srgbClr val="D4D4D4"/>
-                </a:solidFill>
-                <a:latin typeface="Consolas"/>
-              </a:rPr>
-              <a:t>]</a:t>
-            </a:r>
-          </a:p>
-        </p:txBody>
-      </p:sp>
-      <p:sp>
-        <p:nvSpPr>
-          <p:cNvPr id="13" name="TextBox 12"/>
+          </a:p>
+        </p:txBody>
+      </p:sp>
+      <p:sp>
+        <p:nvSpPr>
+          <p:cNvPr id="13" name="Rounded Rectangle 12"/>
+          <p:cNvSpPr/>
+          <p:nvPr/>
+        </p:nvSpPr>
+        <p:spPr>
+          <a:xfrm>
+            <a:off x="7668579" y="1261872"/>
+            <a:ext cx="4120780" cy="3318569"/>
+          </a:xfrm>
+          <a:prstGeom prst="roundRect">
+            <a:avLst>
+              <a:gd name="adj" fmla="val 4000"/>
+            </a:avLst>
+          </a:prstGeom>
+          <a:solidFill>
+            <a:srgbClr val="E8EEF4"/>
+          </a:solidFill>
+          <a:ln>
+            <a:noFill/>
+          </a:ln>
+        </p:spPr>
+        <p:style>
+          <a:lnRef idx="1">
+            <a:schemeClr val="accent1"/>
+          </a:lnRef>
+          <a:fillRef idx="3">
+            <a:schemeClr val="accent1"/>
+          </a:fillRef>
+          <a:effectRef idx="2">
+            <a:schemeClr val="accent1"/>
+          </a:effectRef>
+          <a:fontRef idx="minor">
+            <a:schemeClr val="lt1"/>
+          </a:fontRef>
+        </p:style>
+        <p:txBody>
+          <a:bodyPr rtlCol="0" anchor="ctr"/>
+          <a:lstStyle/>
+          <a:p>
+            <a:pPr algn="ctr"/>
+          </a:p>
+        </p:txBody>
+      </p:sp>
+      <p:pic>
+        <p:nvPicPr>
+          <p:cNvPr id="14" name="Picture 13" descr="dg-despliegue-paso1.png"/>
+          <p:cNvPicPr>
+            <a:picLocks noChangeAspect="1"/>
+          </p:cNvPicPr>
+          <p:nvPr/>
+        </p:nvPicPr>
+        <p:blipFill>
+          <a:blip r:embed="rId2"/>
+          <a:stretch>
+            <a:fillRect/>
+          </a:stretch>
+        </p:blipFill>
+        <p:spPr>
+          <a:xfrm>
+            <a:off x="7723443" y="1316736"/>
+            <a:ext cx="4011052" cy="3208841"/>
+          </a:xfrm>
+          <a:prstGeom prst="rect">
+            <a:avLst/>
+          </a:prstGeom>
+        </p:spPr>
+      </p:pic>
+      <p:sp>
+        <p:nvSpPr>
+          <p:cNvPr id="15" name="TextBox 14"/>
           <p:cNvSpPr txBox="1"/>
           <p:nvPr/>
         </p:nvSpPr>
         <p:spPr>
           <a:xfrm>
-            <a:off x="457200" y="6035040"/>
-            <a:ext cx="11277295" cy="365760"/>
+            <a:off x="7723443" y="4580441"/>
+            <a:ext cx="4011052" cy="320040"/>
           </a:xfrm>
           <a:prstGeom prst="rect">
             <a:avLst/>
@@ -11226,6 +11641,41 @@
           <a:p>
             <a:pPr algn="ctr"/>
             <a:r>
+              <a:rPr sz="1200" b="0" i="1">
+                <a:solidFill>
+                  <a:srgbClr val="666666"/>
+                </a:solidFill>
+                <a:latin typeface="Calibri"/>
+              </a:rPr>
+              <a:t>Lo que dibuja este código</a:t>
+            </a:r>
+          </a:p>
+        </p:txBody>
+      </p:sp>
+      <p:sp>
+        <p:nvSpPr>
+          <p:cNvPr id="16" name="TextBox 15"/>
+          <p:cNvSpPr txBox="1"/>
+          <p:nvPr/>
+        </p:nvSpPr>
+        <p:spPr>
+          <a:xfrm>
+            <a:off x="457200" y="6035040"/>
+            <a:ext cx="11277295" cy="365760"/>
+          </a:xfrm>
+          <a:prstGeom prst="rect">
+            <a:avLst/>
+          </a:prstGeom>
+          <a:noFill/>
+        </p:spPr>
+        <p:txBody>
+          <a:bodyPr wrap="square">
+            <a:spAutoFit/>
+          </a:bodyPr>
+          <a:lstStyle/>
+          <a:p>
+            <a:pPr algn="ctr"/>
+            <a:r>
               <a:rPr sz="1300" b="0" i="1">
                 <a:solidFill>
                   <a:srgbClr val="666666"/>
@@ -11239,7 +11689,7 @@
       </p:sp>
       <p:sp>
         <p:nvSpPr>
-          <p:cNvPr id="14" name="TextBox 13"/>
+          <p:cNvPr id="17" name="TextBox 16"/>
           <p:cNvSpPr txBox="1"/>
           <p:nvPr/>
         </p:nvSpPr>

--- a/Arquitectura de Sistemas Computacionales/Clases/Clase 7 - Redes y almacenamiento cloud/Presentacion.pptx
+++ b/Arquitectura de Sistemas Computacionales/Clases/Clase 7 - Redes y almacenamiento cloud/Presentacion.pptx
@@ -1049,7 +1049,7 @@
           <a:p/>
           <a:p>
             <a:r>
-              <a:t>(No se proyecta) Hay cinco cosas que el docente debe poder explicar sin titubear.</a:t>
+              <a:t>(No se proyecta) Hay cinco cosas que el docente debe poder explicar sin dudar.</a:t>
             </a:r>
           </a:p>
           <a:p/>
@@ -1539,7 +1539,7 @@
           <a:p/>
           <a:p>
             <a:r>
-              <a:t>(No se proyecta) Dos piezas mas hay que explicar sin titubear.</a:t>
+              <a:t>(No se proyecta) Dos piezas mas hay que explicar sin dudar.</a:t>
             </a:r>
           </a:p>
           <a:p/>
@@ -2065,7 +2065,7 @@
           <a:p/>
           <a:p>
             <a:r>
-              <a:t>(No se proyecta) La cadena aguas abajo es directa: la Clase 6 identifico amenazas y fronteras de confianza en texto y hoy esas fronteras se vuelven zonas dibujadas; la Clase 8 tomara cada flecha para definir que se mide en ella, porque no se puede monitorear un camino que no esta dibujado; la Clase 10 costeara estas mismas cajas, asi que la eleccion de almacenamiento es tambien decision de costo; y la Clase 13 discutira cual caja se replica y cual no.</a:t>
+              <a:t>(No se proyecta) La cadena aguas abajo es directa: la Clase 6 identifico amenazas y fronteras de confianza en texto y hoy esas fronteras se vuelven zonas dibujadas; la Clase 8 tomara cada flecha para definir que se mide en ella, porque no se puede monitorear un camino que no esta dibujado; la Clase 10 calculara el costo de estas mismas cajas, asi que la eleccion de almacenamiento es tambien decision de costo; y la Clase 13 discutira cual caja se replica y cual no.</a:t>
             </a:r>
           </a:p>
         </p:txBody>
